--- a/downloads/presentations/modules/ops-240.pptx
+++ b/downloads/presentations/modules/ops-240.pptx
@@ -3437,13 +3437,11 @@
             </a:avLst>
           </a:prstGeom>
           <a:solidFill>
-            <a:srgbClr val="FFFFFF">
-              <a:alpha val="88000"/>
-            </a:srgbClr>
+            <a:srgbClr val="FFFFFF"/>
           </a:solidFill>
           <a:ln w="12700">
             <a:solidFill>
-              <a:srgbClr val="D6E8F2"/>
+              <a:srgbClr val="B9D7E6"/>
             </a:solidFill>
             <a:prstDash val="solid"/>
           </a:ln>
@@ -3451,26 +3449,42 @@
       </p:sp>
       <p:sp>
         <p:nvSpPr>
-          <p:cNvPr id="14" name="Shape 12"/>
-          <p:cNvSpPr/>
-          <p:nvPr/>
-        </p:nvSpPr>
-        <p:spPr>
-          <a:xfrm>
-            <a:off x="8046720" y="3108960"/>
-            <a:ext cx="2651760" cy="896112"/>
-          </a:xfrm>
-          <a:prstGeom prst="arc">
-            <a:avLst/>
-          </a:prstGeom>
-          <a:noFill/>
-          <a:ln w="25400">
-            <a:solidFill>
-              <a:srgbClr val="0068B7"/>
-            </a:solidFill>
-            <a:prstDash val="solid"/>
-          </a:ln>
-        </p:spPr>
+          <p:cNvPr id="14" name="Text 12"/>
+          <p:cNvSpPr/>
+          <p:nvPr/>
+        </p:nvSpPr>
+        <p:spPr>
+          <a:xfrm>
+            <a:off x="7799832" y="2935224"/>
+            <a:ext cx="3145536" cy="256032"/>
+          </a:xfrm>
+          <a:prstGeom prst="rect">
+            <a:avLst/>
+          </a:prstGeom>
+          <a:noFill/>
+          <a:ln/>
+        </p:spPr>
+        <p:txBody>
+          <a:bodyPr wrap="square" lIns="0" tIns="0" rIns="0" bIns="0" rtlCol="0" anchor="ctr"/>
+          <a:lstStyle/>
+          <a:p>
+            <a:pPr indent="0" marL="0">
+              <a:buNone/>
+            </a:pPr>
+            <a:r>
+              <a:rPr lang="en-US" sz="1300" b="1" dirty="0">
+                <a:solidFill>
+                  <a:srgbClr val="0068B7"/>
+                </a:solidFill>
+                <a:latin typeface="Aptos" pitchFamily="34" charset="0"/>
+                <a:ea typeface="Aptos" pitchFamily="34" charset="-122"/>
+                <a:cs typeface="Aptos" pitchFamily="34" charset="-120"/>
+              </a:rPr>
+              <a:t>Concept checkpoints</a:t>
+            </a:r>
+            <a:endParaRPr lang="en-US" sz="1300" dirty="0"/>
+          </a:p>
+        </p:txBody>
       </p:sp>
       <p:sp>
         <p:nvSpPr>
@@ -3480,102 +3494,67 @@
         </p:nvSpPr>
         <p:spPr>
           <a:xfrm>
-            <a:off x="7909560" y="3099816"/>
-            <a:ext cx="2926080" cy="256032"/>
-          </a:xfrm>
-          <a:prstGeom prst="rect">
-            <a:avLst/>
-          </a:prstGeom>
-          <a:noFill/>
-          <a:ln/>
-        </p:spPr>
-        <p:txBody>
-          <a:bodyPr wrap="square" lIns="0" tIns="0" rIns="0" bIns="0" rtlCol="0" anchor="ctr"/>
-          <a:lstStyle/>
-          <a:p>
-            <a:pPr algn="ctr" indent="0" marL="0">
-              <a:buNone/>
-            </a:pPr>
-            <a:r>
-              <a:rPr lang="en-US" sz="1500" b="1" dirty="0">
-                <a:solidFill>
-                  <a:srgbClr val="003A63"/>
-                </a:solidFill>
-                <a:latin typeface="Aptos" pitchFamily="34" charset="0"/>
-                <a:ea typeface="Aptos" pitchFamily="34" charset="-122"/>
-                <a:cs typeface="Aptos" pitchFamily="34" charset="-120"/>
-              </a:rPr>
-              <a:t>Risk</a:t>
-            </a:r>
-            <a:endParaRPr lang="en-US" sz="1500" dirty="0"/>
+            <a:off x="7818120" y="3300984"/>
+            <a:ext cx="3090672" cy="877824"/>
+          </a:xfrm>
+          <a:prstGeom prst="rect">
+            <a:avLst/>
+          </a:prstGeom>
+          <a:noFill/>
+          <a:ln/>
+        </p:spPr>
+        <p:txBody>
+          <a:bodyPr wrap="square" lIns="254" tIns="254" rIns="254" bIns="254" rtlCol="0" anchor="t">
+            <a:normAutofit/>
+          </a:bodyPr>
+          <a:lstStyle/>
+          <a:p>
+            <a:r>
+              <a:rPr lang="en-US" sz="1380" dirty="0">
+                <a:solidFill>
+                  <a:srgbClr val="17364A"/>
+                </a:solidFill>
+                <a:latin typeface="Aptos" pitchFamily="34" charset="0"/>
+                <a:ea typeface="Aptos" pitchFamily="34" charset="-122"/>
+                <a:cs typeface="Aptos" pitchFamily="34" charset="-120"/>
+              </a:rPr>
+              <a:t>Risks and failure modes include the following:</a:t>
+            </a:r>
+            <a:endParaRPr lang="en-US" sz="1380" dirty="0"/>
+          </a:p>
+          <a:p>
+            <a:r>
+              <a:rPr lang="en-US" sz="1380" dirty="0">
+                <a:solidFill>
+                  <a:srgbClr val="17364A"/>
+                </a:solidFill>
+                <a:latin typeface="Aptos" pitchFamily="34" charset="0"/>
+                <a:ea typeface="Aptos" pitchFamily="34" charset="-122"/>
+                <a:cs typeface="Aptos" pitchFamily="34" charset="-120"/>
+              </a:rPr>
+              <a:t>Testing only ideal scenarios and missing high-risk workflow failures.</a:t>
+            </a:r>
+            <a:endParaRPr lang="en-US" sz="1380" dirty="0"/>
+          </a:p>
+          <a:p>
+            <a:r>
+              <a:rPr lang="en-US" sz="1380" dirty="0">
+                <a:solidFill>
+                  <a:srgbClr val="17364A"/>
+                </a:solidFill>
+                <a:latin typeface="Aptos" pitchFamily="34" charset="0"/>
+                <a:ea typeface="Aptos" pitchFamily="34" charset="-122"/>
+                <a:cs typeface="Aptos" pitchFamily="34" charset="-120"/>
+              </a:rPr>
+              <a:t>Excluding real end users from testing.</a:t>
+            </a:r>
+            <a:endParaRPr lang="en-US" sz="1380" dirty="0"/>
           </a:p>
         </p:txBody>
       </p:sp>
       <p:sp>
         <p:nvSpPr>
           <p:cNvPr id="16" name="Shape 14"/>
-          <p:cNvSpPr/>
-          <p:nvPr/>
-        </p:nvSpPr>
-        <p:spPr>
-          <a:xfrm>
-            <a:off x="8366760" y="3639312"/>
-            <a:ext cx="2011680" cy="0"/>
-          </a:xfrm>
-          <a:prstGeom prst="line">
-            <a:avLst/>
-          </a:prstGeom>
-          <a:noFill/>
-          <a:ln w="63500">
-            <a:solidFill>
-              <a:srgbClr val="2F8A28"/>
-            </a:solidFill>
-            <a:prstDash val="solid"/>
-          </a:ln>
-        </p:spPr>
-      </p:sp>
-      <p:sp>
-        <p:nvSpPr>
-          <p:cNvPr id="17" name="Text 15"/>
-          <p:cNvSpPr/>
-          <p:nvPr/>
-        </p:nvSpPr>
-        <p:spPr>
-          <a:xfrm>
-            <a:off x="7909560" y="3849624"/>
-            <a:ext cx="2926080" cy="164592"/>
-          </a:xfrm>
-          <a:prstGeom prst="rect">
-            <a:avLst/>
-          </a:prstGeom>
-          <a:noFill/>
-          <a:ln/>
-        </p:spPr>
-        <p:txBody>
-          <a:bodyPr wrap="square" lIns="0" tIns="0" rIns="0" bIns="0" rtlCol="0" anchor="ctr"/>
-          <a:lstStyle/>
-          <a:p>
-            <a:pPr algn="ctr" indent="0" marL="0">
-              <a:buNone/>
-            </a:pPr>
-            <a:r>
-              <a:rPr lang="en-US" sz="900" dirty="0">
-                <a:solidFill>
-                  <a:srgbClr val="003A63"/>
-                </a:solidFill>
-                <a:latin typeface="Aptos" pitchFamily="34" charset="0"/>
-                <a:ea typeface="Aptos" pitchFamily="34" charset="-122"/>
-                <a:cs typeface="Aptos" pitchFamily="34" charset="-120"/>
-              </a:rPr>
-              <a:t>Human review</a:t>
-            </a:r>
-            <a:endParaRPr lang="en-US" sz="900" dirty="0"/>
-          </a:p>
-        </p:txBody>
-      </p:sp>
-      <p:sp>
-        <p:nvSpPr>
-          <p:cNvPr id="18" name="Shape 16"/>
           <p:cNvSpPr/>
           <p:nvPr/>
         </p:nvSpPr>
@@ -3602,7 +3581,7 @@
       </p:sp>
       <p:sp>
         <p:nvSpPr>
-          <p:cNvPr id="19" name="Text 17"/>
+          <p:cNvPr id="17" name="Text 15"/>
           <p:cNvSpPr/>
           <p:nvPr/>
         </p:nvSpPr>
@@ -3641,7 +3620,7 @@
       </p:sp>
       <p:sp>
         <p:nvSpPr>
-          <p:cNvPr id="20" name="Text 18"/>
+          <p:cNvPr id="18" name="Text 16"/>
           <p:cNvSpPr/>
           <p:nvPr/>
         </p:nvSpPr>
@@ -4149,13 +4128,11 @@
             </a:avLst>
           </a:prstGeom>
           <a:solidFill>
-            <a:srgbClr val="FFFFFF">
-              <a:alpha val="88000"/>
-            </a:srgbClr>
+            <a:srgbClr val="FFFFFF"/>
           </a:solidFill>
           <a:ln w="12700">
             <a:solidFill>
-              <a:srgbClr val="D6E8F2"/>
+              <a:srgbClr val="B9D7E6"/>
             </a:solidFill>
             <a:prstDash val="solid"/>
           </a:ln>
@@ -4163,26 +4140,42 @@
       </p:sp>
       <p:sp>
         <p:nvSpPr>
-          <p:cNvPr id="14" name="Shape 12"/>
-          <p:cNvSpPr/>
-          <p:nvPr/>
-        </p:nvSpPr>
-        <p:spPr>
-          <a:xfrm>
-            <a:off x="8046720" y="3108960"/>
-            <a:ext cx="2651760" cy="896112"/>
-          </a:xfrm>
-          <a:prstGeom prst="arc">
-            <a:avLst/>
-          </a:prstGeom>
-          <a:noFill/>
-          <a:ln w="25400">
-            <a:solidFill>
-              <a:srgbClr val="0068B7"/>
-            </a:solidFill>
-            <a:prstDash val="solid"/>
-          </a:ln>
-        </p:spPr>
+          <p:cNvPr id="14" name="Text 12"/>
+          <p:cNvSpPr/>
+          <p:nvPr/>
+        </p:nvSpPr>
+        <p:spPr>
+          <a:xfrm>
+            <a:off x="7799832" y="2935224"/>
+            <a:ext cx="3145536" cy="256032"/>
+          </a:xfrm>
+          <a:prstGeom prst="rect">
+            <a:avLst/>
+          </a:prstGeom>
+          <a:noFill/>
+          <a:ln/>
+        </p:spPr>
+        <p:txBody>
+          <a:bodyPr wrap="square" lIns="0" tIns="0" rIns="0" bIns="0" rtlCol="0" anchor="ctr"/>
+          <a:lstStyle/>
+          <a:p>
+            <a:pPr indent="0" marL="0">
+              <a:buNone/>
+            </a:pPr>
+            <a:r>
+              <a:rPr lang="en-US" sz="1300" b="1" dirty="0">
+                <a:solidFill>
+                  <a:srgbClr val="0068B7"/>
+                </a:solidFill>
+                <a:latin typeface="Aptos" pitchFamily="34" charset="0"/>
+                <a:ea typeface="Aptos" pitchFamily="34" charset="-122"/>
+                <a:cs typeface="Aptos" pitchFamily="34" charset="-120"/>
+              </a:rPr>
+              <a:t>Concept checkpoints</a:t>
+            </a:r>
+            <a:endParaRPr lang="en-US" sz="1300" dirty="0"/>
+          </a:p>
+        </p:txBody>
       </p:sp>
       <p:sp>
         <p:nvSpPr>
@@ -4192,102 +4185,67 @@
         </p:nvSpPr>
         <p:spPr>
           <a:xfrm>
-            <a:off x="7909560" y="3099816"/>
-            <a:ext cx="2926080" cy="256032"/>
-          </a:xfrm>
-          <a:prstGeom prst="rect">
-            <a:avLst/>
-          </a:prstGeom>
-          <a:noFill/>
-          <a:ln/>
-        </p:spPr>
-        <p:txBody>
-          <a:bodyPr wrap="square" lIns="0" tIns="0" rIns="0" bIns="0" rtlCol="0" anchor="ctr"/>
-          <a:lstStyle/>
-          <a:p>
-            <a:pPr algn="ctr" indent="0" marL="0">
-              <a:buNone/>
-            </a:pPr>
-            <a:r>
-              <a:rPr lang="en-US" sz="1500" b="1" dirty="0">
-                <a:solidFill>
-                  <a:srgbClr val="003A63"/>
-                </a:solidFill>
-                <a:latin typeface="Aptos" pitchFamily="34" charset="0"/>
-                <a:ea typeface="Aptos" pitchFamily="34" charset="-122"/>
-                <a:cs typeface="Aptos" pitchFamily="34" charset="-120"/>
-              </a:rPr>
-              <a:t>Risk</a:t>
-            </a:r>
-            <a:endParaRPr lang="en-US" sz="1500" dirty="0"/>
+            <a:off x="7818120" y="3300984"/>
+            <a:ext cx="3090672" cy="877824"/>
+          </a:xfrm>
+          <a:prstGeom prst="rect">
+            <a:avLst/>
+          </a:prstGeom>
+          <a:noFill/>
+          <a:ln/>
+        </p:spPr>
+        <p:txBody>
+          <a:bodyPr wrap="square" lIns="254" tIns="254" rIns="254" bIns="254" rtlCol="0" anchor="t">
+            <a:normAutofit/>
+          </a:bodyPr>
+          <a:lstStyle/>
+          <a:p>
+            <a:r>
+              <a:rPr lang="en-US" sz="1380" dirty="0">
+                <a:solidFill>
+                  <a:srgbClr val="17364A"/>
+                </a:solidFill>
+                <a:latin typeface="Aptos" pitchFamily="34" charset="0"/>
+                <a:ea typeface="Aptos" pitchFamily="34" charset="-122"/>
+                <a:cs typeface="Aptos" pitchFamily="34" charset="-120"/>
+              </a:rPr>
+              <a:t>Launching despite unresolved issues that affect safety, equity, or documentation.</a:t>
+            </a:r>
+            <a:endParaRPr lang="en-US" sz="1380" dirty="0"/>
+          </a:p>
+          <a:p>
+            <a:r>
+              <a:rPr lang="en-US" sz="1380" dirty="0">
+                <a:solidFill>
+                  <a:srgbClr val="17364A"/>
+                </a:solidFill>
+                <a:latin typeface="Aptos" pitchFamily="34" charset="0"/>
+                <a:ea typeface="Aptos" pitchFamily="34" charset="-122"/>
+                <a:cs typeface="Aptos" pitchFamily="34" charset="-120"/>
+              </a:rPr>
+              <a:t>Treating model validation as a substitute for workflow acceptance testing.</a:t>
+            </a:r>
+            <a:endParaRPr lang="en-US" sz="1380" dirty="0"/>
+          </a:p>
+          <a:p>
+            <a:r>
+              <a:rPr lang="en-US" sz="1380" dirty="0">
+                <a:solidFill>
+                  <a:srgbClr val="17364A"/>
+                </a:solidFill>
+                <a:latin typeface="Aptos" pitchFamily="34" charset="0"/>
+                <a:ea typeface="Aptos" pitchFamily="34" charset="-122"/>
+                <a:cs typeface="Aptos" pitchFamily="34" charset="-120"/>
+              </a:rPr>
+              <a:t>Failing to test override, escalation, fallback, and accessibility requirements.</a:t>
+            </a:r>
+            <a:endParaRPr lang="en-US" sz="1380" dirty="0"/>
           </a:p>
         </p:txBody>
       </p:sp>
       <p:sp>
         <p:nvSpPr>
           <p:cNvPr id="16" name="Shape 14"/>
-          <p:cNvSpPr/>
-          <p:nvPr/>
-        </p:nvSpPr>
-        <p:spPr>
-          <a:xfrm>
-            <a:off x="8366760" y="3639312"/>
-            <a:ext cx="2011680" cy="0"/>
-          </a:xfrm>
-          <a:prstGeom prst="line">
-            <a:avLst/>
-          </a:prstGeom>
-          <a:noFill/>
-          <a:ln w="63500">
-            <a:solidFill>
-              <a:srgbClr val="2F8A28"/>
-            </a:solidFill>
-            <a:prstDash val="solid"/>
-          </a:ln>
-        </p:spPr>
-      </p:sp>
-      <p:sp>
-        <p:nvSpPr>
-          <p:cNvPr id="17" name="Text 15"/>
-          <p:cNvSpPr/>
-          <p:nvPr/>
-        </p:nvSpPr>
-        <p:spPr>
-          <a:xfrm>
-            <a:off x="7909560" y="3849624"/>
-            <a:ext cx="2926080" cy="164592"/>
-          </a:xfrm>
-          <a:prstGeom prst="rect">
-            <a:avLst/>
-          </a:prstGeom>
-          <a:noFill/>
-          <a:ln/>
-        </p:spPr>
-        <p:txBody>
-          <a:bodyPr wrap="square" lIns="0" tIns="0" rIns="0" bIns="0" rtlCol="0" anchor="ctr"/>
-          <a:lstStyle/>
-          <a:p>
-            <a:pPr algn="ctr" indent="0" marL="0">
-              <a:buNone/>
-            </a:pPr>
-            <a:r>
-              <a:rPr lang="en-US" sz="900" dirty="0">
-                <a:solidFill>
-                  <a:srgbClr val="003A63"/>
-                </a:solidFill>
-                <a:latin typeface="Aptos" pitchFamily="34" charset="0"/>
-                <a:ea typeface="Aptos" pitchFamily="34" charset="-122"/>
-                <a:cs typeface="Aptos" pitchFamily="34" charset="-120"/>
-              </a:rPr>
-              <a:t>Human review</a:t>
-            </a:r>
-            <a:endParaRPr lang="en-US" sz="900" dirty="0"/>
-          </a:p>
-        </p:txBody>
-      </p:sp>
-      <p:sp>
-        <p:nvSpPr>
-          <p:cNvPr id="18" name="Shape 16"/>
           <p:cNvSpPr/>
           <p:nvPr/>
         </p:nvSpPr>
@@ -4314,7 +4272,7 @@
       </p:sp>
       <p:sp>
         <p:nvSpPr>
-          <p:cNvPr id="19" name="Text 17"/>
+          <p:cNvPr id="17" name="Text 15"/>
           <p:cNvSpPr/>
           <p:nvPr/>
         </p:nvSpPr>
@@ -4353,7 +4311,7 @@
       </p:sp>
       <p:sp>
         <p:nvSpPr>
-          <p:cNvPr id="20" name="Text 18"/>
+          <p:cNvPr id="18" name="Text 16"/>
           <p:cNvSpPr/>
           <p:nvPr/>
         </p:nvSpPr>
@@ -4861,13 +4819,11 @@
             </a:avLst>
           </a:prstGeom>
           <a:solidFill>
-            <a:srgbClr val="FFFFFF">
-              <a:alpha val="88000"/>
-            </a:srgbClr>
+            <a:srgbClr val="FFFFFF"/>
           </a:solidFill>
           <a:ln w="12700">
             <a:solidFill>
-              <a:srgbClr val="D6E8F2"/>
+              <a:srgbClr val="B9D7E6"/>
             </a:solidFill>
             <a:prstDash val="solid"/>
           </a:ln>
@@ -4875,26 +4831,42 @@
       </p:sp>
       <p:sp>
         <p:nvSpPr>
-          <p:cNvPr id="14" name="Shape 12"/>
-          <p:cNvSpPr/>
-          <p:nvPr/>
-        </p:nvSpPr>
-        <p:spPr>
-          <a:xfrm>
-            <a:off x="8046720" y="3108960"/>
-            <a:ext cx="2651760" cy="896112"/>
-          </a:xfrm>
-          <a:prstGeom prst="arc">
-            <a:avLst/>
-          </a:prstGeom>
-          <a:noFill/>
-          <a:ln w="25400">
-            <a:solidFill>
-              <a:srgbClr val="0068B7"/>
-            </a:solidFill>
-            <a:prstDash val="solid"/>
-          </a:ln>
-        </p:spPr>
+          <p:cNvPr id="14" name="Text 12"/>
+          <p:cNvSpPr/>
+          <p:nvPr/>
+        </p:nvSpPr>
+        <p:spPr>
+          <a:xfrm>
+            <a:off x="7799832" y="2935224"/>
+            <a:ext cx="3145536" cy="256032"/>
+          </a:xfrm>
+          <a:prstGeom prst="rect">
+            <a:avLst/>
+          </a:prstGeom>
+          <a:noFill/>
+          <a:ln/>
+        </p:spPr>
+        <p:txBody>
+          <a:bodyPr wrap="square" lIns="0" tIns="0" rIns="0" bIns="0" rtlCol="0" anchor="ctr"/>
+          <a:lstStyle/>
+          <a:p>
+            <a:pPr indent="0" marL="0">
+              <a:buNone/>
+            </a:pPr>
+            <a:r>
+              <a:rPr lang="en-US" sz="1300" b="1" dirty="0">
+                <a:solidFill>
+                  <a:srgbClr val="0068B7"/>
+                </a:solidFill>
+                <a:latin typeface="Aptos" pitchFamily="34" charset="0"/>
+                <a:ea typeface="Aptos" pitchFamily="34" charset="-122"/>
+                <a:cs typeface="Aptos" pitchFamily="34" charset="-120"/>
+              </a:rPr>
+              <a:t>Concept checkpoints</a:t>
+            </a:r>
+            <a:endParaRPr lang="en-US" sz="1300" dirty="0"/>
+          </a:p>
+        </p:txBody>
       </p:sp>
       <p:sp>
         <p:nvSpPr>
@@ -4904,102 +4876,67 @@
         </p:nvSpPr>
         <p:spPr>
           <a:xfrm>
-            <a:off x="7909560" y="3099816"/>
-            <a:ext cx="2926080" cy="256032"/>
-          </a:xfrm>
-          <a:prstGeom prst="rect">
-            <a:avLst/>
-          </a:prstGeom>
-          <a:noFill/>
-          <a:ln/>
-        </p:spPr>
-        <p:txBody>
-          <a:bodyPr wrap="square" lIns="0" tIns="0" rIns="0" bIns="0" rtlCol="0" anchor="ctr"/>
-          <a:lstStyle/>
-          <a:p>
-            <a:pPr algn="ctr" indent="0" marL="0">
-              <a:buNone/>
-            </a:pPr>
-            <a:r>
-              <a:rPr lang="en-US" sz="1500" b="1" dirty="0">
-                <a:solidFill>
-                  <a:srgbClr val="003A63"/>
-                </a:solidFill>
-                <a:latin typeface="Aptos" pitchFamily="34" charset="0"/>
-                <a:ea typeface="Aptos" pitchFamily="34" charset="-122"/>
-                <a:cs typeface="Aptos" pitchFamily="34" charset="-120"/>
-              </a:rPr>
-              <a:t>Risk</a:t>
-            </a:r>
-            <a:endParaRPr lang="en-US" sz="1500" dirty="0"/>
+            <a:off x="7818120" y="3300984"/>
+            <a:ext cx="3090672" cy="877824"/>
+          </a:xfrm>
+          <a:prstGeom prst="rect">
+            <a:avLst/>
+          </a:prstGeom>
+          <a:noFill/>
+          <a:ln/>
+        </p:spPr>
+        <p:txBody>
+          <a:bodyPr wrap="square" lIns="254" tIns="254" rIns="254" bIns="254" rtlCol="0" anchor="t">
+            <a:normAutofit/>
+          </a:bodyPr>
+          <a:lstStyle/>
+          <a:p>
+            <a:r>
+              <a:rPr lang="en-US" sz="1380" dirty="0">
+                <a:solidFill>
+                  <a:srgbClr val="17364A"/>
+                </a:solidFill>
+                <a:latin typeface="Aptos" pitchFamily="34" charset="0"/>
+                <a:ea typeface="Aptos" pitchFamily="34" charset="-122"/>
+                <a:cs typeface="Aptos" pitchFamily="34" charset="-120"/>
+              </a:rPr>
+              <a:t>Recommended guardrails include the following:</a:t>
+            </a:r>
+            <a:endParaRPr lang="en-US" sz="1380" dirty="0"/>
+          </a:p>
+          <a:p>
+            <a:r>
+              <a:rPr lang="en-US" sz="1380" dirty="0">
+                <a:solidFill>
+                  <a:srgbClr val="17364A"/>
+                </a:solidFill>
+                <a:latin typeface="Aptos" pitchFamily="34" charset="0"/>
+                <a:ea typeface="Aptos" pitchFamily="34" charset="-122"/>
+                <a:cs typeface="Aptos" pitchFamily="34" charset="-120"/>
+              </a:rPr>
+              <a:t>Develop role-based UAT scripts before launch.</a:t>
+            </a:r>
+            <a:endParaRPr lang="en-US" sz="1380" dirty="0"/>
+          </a:p>
+          <a:p>
+            <a:r>
+              <a:rPr lang="en-US" sz="1380" dirty="0">
+                <a:solidFill>
+                  <a:srgbClr val="17364A"/>
+                </a:solidFill>
+                <a:latin typeface="Aptos" pitchFamily="34" charset="0"/>
+                <a:ea typeface="Aptos" pitchFamily="34" charset="-122"/>
+                <a:cs typeface="Aptos" pitchFamily="34" charset="-120"/>
+              </a:rPr>
+              <a:t>Include routine, edge, failure, and equity-sensitive cases.</a:t>
+            </a:r>
+            <a:endParaRPr lang="en-US" sz="1380" dirty="0"/>
           </a:p>
         </p:txBody>
       </p:sp>
       <p:sp>
         <p:nvSpPr>
           <p:cNvPr id="16" name="Shape 14"/>
-          <p:cNvSpPr/>
-          <p:nvPr/>
-        </p:nvSpPr>
-        <p:spPr>
-          <a:xfrm>
-            <a:off x="8366760" y="3639312"/>
-            <a:ext cx="2011680" cy="0"/>
-          </a:xfrm>
-          <a:prstGeom prst="line">
-            <a:avLst/>
-          </a:prstGeom>
-          <a:noFill/>
-          <a:ln w="63500">
-            <a:solidFill>
-              <a:srgbClr val="2F8A28"/>
-            </a:solidFill>
-            <a:prstDash val="solid"/>
-          </a:ln>
-        </p:spPr>
-      </p:sp>
-      <p:sp>
-        <p:nvSpPr>
-          <p:cNvPr id="17" name="Text 15"/>
-          <p:cNvSpPr/>
-          <p:nvPr/>
-        </p:nvSpPr>
-        <p:spPr>
-          <a:xfrm>
-            <a:off x="7909560" y="3849624"/>
-            <a:ext cx="2926080" cy="164592"/>
-          </a:xfrm>
-          <a:prstGeom prst="rect">
-            <a:avLst/>
-          </a:prstGeom>
-          <a:noFill/>
-          <a:ln/>
-        </p:spPr>
-        <p:txBody>
-          <a:bodyPr wrap="square" lIns="0" tIns="0" rIns="0" bIns="0" rtlCol="0" anchor="ctr"/>
-          <a:lstStyle/>
-          <a:p>
-            <a:pPr algn="ctr" indent="0" marL="0">
-              <a:buNone/>
-            </a:pPr>
-            <a:r>
-              <a:rPr lang="en-US" sz="900" dirty="0">
-                <a:solidFill>
-                  <a:srgbClr val="003A63"/>
-                </a:solidFill>
-                <a:latin typeface="Aptos" pitchFamily="34" charset="0"/>
-                <a:ea typeface="Aptos" pitchFamily="34" charset="-122"/>
-                <a:cs typeface="Aptos" pitchFamily="34" charset="-120"/>
-              </a:rPr>
-              <a:t>Human review</a:t>
-            </a:r>
-            <a:endParaRPr lang="en-US" sz="900" dirty="0"/>
-          </a:p>
-        </p:txBody>
-      </p:sp>
-      <p:sp>
-        <p:nvSpPr>
-          <p:cNvPr id="18" name="Shape 16"/>
           <p:cNvSpPr/>
           <p:nvPr/>
         </p:nvSpPr>
@@ -5026,7 +4963,7 @@
       </p:sp>
       <p:sp>
         <p:nvSpPr>
-          <p:cNvPr id="19" name="Text 17"/>
+          <p:cNvPr id="17" name="Text 15"/>
           <p:cNvSpPr/>
           <p:nvPr/>
         </p:nvSpPr>
@@ -5065,7 +5002,7 @@
       </p:sp>
       <p:sp>
         <p:nvSpPr>
-          <p:cNvPr id="20" name="Text 18"/>
+          <p:cNvPr id="18" name="Text 16"/>
           <p:cNvSpPr/>
           <p:nvPr/>
         </p:nvSpPr>
@@ -5573,13 +5510,11 @@
             </a:avLst>
           </a:prstGeom>
           <a:solidFill>
-            <a:srgbClr val="FFFFFF">
-              <a:alpha val="88000"/>
-            </a:srgbClr>
+            <a:srgbClr val="FFFFFF"/>
           </a:solidFill>
           <a:ln w="12700">
             <a:solidFill>
-              <a:srgbClr val="D6E8F2"/>
+              <a:srgbClr val="B9D7E6"/>
             </a:solidFill>
             <a:prstDash val="solid"/>
           </a:ln>
@@ -5587,26 +5522,42 @@
       </p:sp>
       <p:sp>
         <p:nvSpPr>
-          <p:cNvPr id="14" name="Shape 12"/>
-          <p:cNvSpPr/>
-          <p:nvPr/>
-        </p:nvSpPr>
-        <p:spPr>
-          <a:xfrm>
-            <a:off x="8046720" y="3108960"/>
-            <a:ext cx="2651760" cy="896112"/>
-          </a:xfrm>
-          <a:prstGeom prst="arc">
-            <a:avLst/>
-          </a:prstGeom>
-          <a:noFill/>
-          <a:ln w="25400">
-            <a:solidFill>
-              <a:srgbClr val="0068B7"/>
-            </a:solidFill>
-            <a:prstDash val="solid"/>
-          </a:ln>
-        </p:spPr>
+          <p:cNvPr id="14" name="Text 12"/>
+          <p:cNvSpPr/>
+          <p:nvPr/>
+        </p:nvSpPr>
+        <p:spPr>
+          <a:xfrm>
+            <a:off x="7799832" y="2935224"/>
+            <a:ext cx="3145536" cy="256032"/>
+          </a:xfrm>
+          <a:prstGeom prst="rect">
+            <a:avLst/>
+          </a:prstGeom>
+          <a:noFill/>
+          <a:ln/>
+        </p:spPr>
+        <p:txBody>
+          <a:bodyPr wrap="square" lIns="0" tIns="0" rIns="0" bIns="0" rtlCol="0" anchor="ctr"/>
+          <a:lstStyle/>
+          <a:p>
+            <a:pPr indent="0" marL="0">
+              <a:buNone/>
+            </a:pPr>
+            <a:r>
+              <a:rPr lang="en-US" sz="1300" b="1" dirty="0">
+                <a:solidFill>
+                  <a:srgbClr val="0068B7"/>
+                </a:solidFill>
+                <a:latin typeface="Aptos" pitchFamily="34" charset="0"/>
+                <a:ea typeface="Aptos" pitchFamily="34" charset="-122"/>
+                <a:cs typeface="Aptos" pitchFamily="34" charset="-120"/>
+              </a:rPr>
+              <a:t>Concept checkpoints</a:t>
+            </a:r>
+            <a:endParaRPr lang="en-US" sz="1300" dirty="0"/>
+          </a:p>
+        </p:txBody>
       </p:sp>
       <p:sp>
         <p:nvSpPr>
@@ -5616,102 +5567,67 @@
         </p:nvSpPr>
         <p:spPr>
           <a:xfrm>
-            <a:off x="7909560" y="3099816"/>
-            <a:ext cx="2926080" cy="256032"/>
-          </a:xfrm>
-          <a:prstGeom prst="rect">
-            <a:avLst/>
-          </a:prstGeom>
-          <a:noFill/>
-          <a:ln/>
-        </p:spPr>
-        <p:txBody>
-          <a:bodyPr wrap="square" lIns="0" tIns="0" rIns="0" bIns="0" rtlCol="0" anchor="ctr"/>
-          <a:lstStyle/>
-          <a:p>
-            <a:pPr algn="ctr" indent="0" marL="0">
-              <a:buNone/>
-            </a:pPr>
-            <a:r>
-              <a:rPr lang="en-US" sz="1500" b="1" dirty="0">
-                <a:solidFill>
-                  <a:srgbClr val="003A63"/>
-                </a:solidFill>
-                <a:latin typeface="Aptos" pitchFamily="34" charset="0"/>
-                <a:ea typeface="Aptos" pitchFamily="34" charset="-122"/>
-                <a:cs typeface="Aptos" pitchFamily="34" charset="-120"/>
-              </a:rPr>
-              <a:t>Risk</a:t>
-            </a:r>
-            <a:endParaRPr lang="en-US" sz="1500" dirty="0"/>
+            <a:off x="7818120" y="3300984"/>
+            <a:ext cx="3090672" cy="877824"/>
+          </a:xfrm>
+          <a:prstGeom prst="rect">
+            <a:avLst/>
+          </a:prstGeom>
+          <a:noFill/>
+          <a:ln/>
+        </p:spPr>
+        <p:txBody>
+          <a:bodyPr wrap="square" lIns="254" tIns="254" rIns="254" bIns="254" rtlCol="0" anchor="t">
+            <a:normAutofit/>
+          </a:bodyPr>
+          <a:lstStyle/>
+          <a:p>
+            <a:r>
+              <a:rPr lang="en-US" sz="1380" dirty="0">
+                <a:solidFill>
+                  <a:srgbClr val="17364A"/>
+                </a:solidFill>
+                <a:latin typeface="Aptos" pitchFamily="34" charset="0"/>
+                <a:ea typeface="Aptos" pitchFamily="34" charset="-122"/>
+                <a:cs typeface="Aptos" pitchFamily="34" charset="-120"/>
+              </a:rPr>
+              <a:t>Define acceptance criteria before testing.</a:t>
+            </a:r>
+            <a:endParaRPr lang="en-US" sz="1380" dirty="0"/>
+          </a:p>
+          <a:p>
+            <a:r>
+              <a:rPr lang="en-US" sz="1380" dirty="0">
+                <a:solidFill>
+                  <a:srgbClr val="17364A"/>
+                </a:solidFill>
+                <a:latin typeface="Aptos" pitchFamily="34" charset="0"/>
+                <a:ea typeface="Aptos" pitchFamily="34" charset="-122"/>
+                <a:cs typeface="Aptos" pitchFamily="34" charset="-120"/>
+              </a:rPr>
+              <a:t>Track issues by severity, owner, and resolution status.</a:t>
+            </a:r>
+            <a:endParaRPr lang="en-US" sz="1380" dirty="0"/>
+          </a:p>
+          <a:p>
+            <a:r>
+              <a:rPr lang="en-US" sz="1380" dirty="0">
+                <a:solidFill>
+                  <a:srgbClr val="17364A"/>
+                </a:solidFill>
+                <a:latin typeface="Aptos" pitchFamily="34" charset="0"/>
+                <a:ea typeface="Aptos" pitchFamily="34" charset="-122"/>
+                <a:cs typeface="Aptos" pitchFamily="34" charset="-120"/>
+              </a:rPr>
+              <a:t>Require documented sign-off or remediation before deployment.</a:t>
+            </a:r>
+            <a:endParaRPr lang="en-US" sz="1380" dirty="0"/>
           </a:p>
         </p:txBody>
       </p:sp>
       <p:sp>
         <p:nvSpPr>
           <p:cNvPr id="16" name="Shape 14"/>
-          <p:cNvSpPr/>
-          <p:nvPr/>
-        </p:nvSpPr>
-        <p:spPr>
-          <a:xfrm>
-            <a:off x="8366760" y="3639312"/>
-            <a:ext cx="2011680" cy="0"/>
-          </a:xfrm>
-          <a:prstGeom prst="line">
-            <a:avLst/>
-          </a:prstGeom>
-          <a:noFill/>
-          <a:ln w="63500">
-            <a:solidFill>
-              <a:srgbClr val="2F8A28"/>
-            </a:solidFill>
-            <a:prstDash val="solid"/>
-          </a:ln>
-        </p:spPr>
-      </p:sp>
-      <p:sp>
-        <p:nvSpPr>
-          <p:cNvPr id="17" name="Text 15"/>
-          <p:cNvSpPr/>
-          <p:nvPr/>
-        </p:nvSpPr>
-        <p:spPr>
-          <a:xfrm>
-            <a:off x="7909560" y="3849624"/>
-            <a:ext cx="2926080" cy="164592"/>
-          </a:xfrm>
-          <a:prstGeom prst="rect">
-            <a:avLst/>
-          </a:prstGeom>
-          <a:noFill/>
-          <a:ln/>
-        </p:spPr>
-        <p:txBody>
-          <a:bodyPr wrap="square" lIns="0" tIns="0" rIns="0" bIns="0" rtlCol="0" anchor="ctr"/>
-          <a:lstStyle/>
-          <a:p>
-            <a:pPr algn="ctr" indent="0" marL="0">
-              <a:buNone/>
-            </a:pPr>
-            <a:r>
-              <a:rPr lang="en-US" sz="900" dirty="0">
-                <a:solidFill>
-                  <a:srgbClr val="003A63"/>
-                </a:solidFill>
-                <a:latin typeface="Aptos" pitchFamily="34" charset="0"/>
-                <a:ea typeface="Aptos" pitchFamily="34" charset="-122"/>
-                <a:cs typeface="Aptos" pitchFamily="34" charset="-120"/>
-              </a:rPr>
-              <a:t>Human review</a:t>
-            </a:r>
-            <a:endParaRPr lang="en-US" sz="900" dirty="0"/>
-          </a:p>
-        </p:txBody>
-      </p:sp>
-      <p:sp>
-        <p:nvSpPr>
-          <p:cNvPr id="18" name="Shape 16"/>
           <p:cNvSpPr/>
           <p:nvPr/>
         </p:nvSpPr>
@@ -5738,7 +5654,7 @@
       </p:sp>
       <p:sp>
         <p:nvSpPr>
-          <p:cNvPr id="19" name="Text 17"/>
+          <p:cNvPr id="17" name="Text 15"/>
           <p:cNvSpPr/>
           <p:nvPr/>
         </p:nvSpPr>
@@ -5777,7 +5693,7 @@
       </p:sp>
       <p:sp>
         <p:nvSpPr>
-          <p:cNvPr id="20" name="Text 18"/>
+          <p:cNvPr id="18" name="Text 16"/>
           <p:cNvSpPr/>
           <p:nvPr/>
         </p:nvSpPr>
@@ -6285,13 +6201,11 @@
             </a:avLst>
           </a:prstGeom>
           <a:solidFill>
-            <a:srgbClr val="FFFFFF">
-              <a:alpha val="88000"/>
-            </a:srgbClr>
+            <a:srgbClr val="FFFFFF"/>
           </a:solidFill>
           <a:ln w="12700">
             <a:solidFill>
-              <a:srgbClr val="D6E8F2"/>
+              <a:srgbClr val="B9D7E6"/>
             </a:solidFill>
             <a:prstDash val="solid"/>
           </a:ln>
@@ -6299,30 +6213,42 @@
       </p:sp>
       <p:sp>
         <p:nvSpPr>
-          <p:cNvPr id="14" name="Shape 12"/>
-          <p:cNvSpPr/>
-          <p:nvPr/>
-        </p:nvSpPr>
-        <p:spPr>
-          <a:xfrm>
-            <a:off x="7927848" y="3319272"/>
-            <a:ext cx="792480" cy="749808"/>
-          </a:xfrm>
-          <a:prstGeom prst="roundRect">
-            <a:avLst>
-              <a:gd name="adj" fmla="val 14634"/>
-            </a:avLst>
-          </a:prstGeom>
-          <a:solidFill>
-            <a:srgbClr val="0068B7"/>
-          </a:solidFill>
-          <a:ln w="12700">
-            <a:solidFill>
-              <a:srgbClr val="0068B7"/>
-            </a:solidFill>
-            <a:prstDash val="solid"/>
-          </a:ln>
-        </p:spPr>
+          <p:cNvPr id="14" name="Text 12"/>
+          <p:cNvSpPr/>
+          <p:nvPr/>
+        </p:nvSpPr>
+        <p:spPr>
+          <a:xfrm>
+            <a:off x="7799832" y="2935224"/>
+            <a:ext cx="3145536" cy="256032"/>
+          </a:xfrm>
+          <a:prstGeom prst="rect">
+            <a:avLst/>
+          </a:prstGeom>
+          <a:noFill/>
+          <a:ln/>
+        </p:spPr>
+        <p:txBody>
+          <a:bodyPr wrap="square" lIns="0" tIns="0" rIns="0" bIns="0" rtlCol="0" anchor="ctr"/>
+          <a:lstStyle/>
+          <a:p>
+            <a:pPr indent="0" marL="0">
+              <a:buNone/>
+            </a:pPr>
+            <a:r>
+              <a:rPr lang="en-US" sz="1300" b="1" dirty="0">
+                <a:solidFill>
+                  <a:srgbClr val="0068B7"/>
+                </a:solidFill>
+                <a:latin typeface="Aptos" pitchFamily="34" charset="0"/>
+                <a:ea typeface="Aptos" pitchFamily="34" charset="-122"/>
+                <a:cs typeface="Aptos" pitchFamily="34" charset="-120"/>
+              </a:rPr>
+              <a:t>Concept checkpoints</a:t>
+            </a:r>
+            <a:endParaRPr lang="en-US" sz="1300" dirty="0"/>
+          </a:p>
+        </p:txBody>
       </p:sp>
       <p:sp>
         <p:nvSpPr>
@@ -6332,240 +6258,67 @@
         </p:nvSpPr>
         <p:spPr>
           <a:xfrm>
-            <a:off x="8001000" y="3511296"/>
-            <a:ext cx="646176" cy="310896"/>
-          </a:xfrm>
-          <a:prstGeom prst="rect">
-            <a:avLst/>
-          </a:prstGeom>
-          <a:noFill/>
-          <a:ln/>
-        </p:spPr>
-        <p:txBody>
-          <a:bodyPr wrap="square" lIns="0" tIns="0" rIns="0" bIns="0" rtlCol="0" anchor="ctr">
+            <a:off x="7818120" y="3300984"/>
+            <a:ext cx="3090672" cy="877824"/>
+          </a:xfrm>
+          <a:prstGeom prst="rect">
+            <a:avLst/>
+          </a:prstGeom>
+          <a:noFill/>
+          <a:ln/>
+        </p:spPr>
+        <p:txBody>
+          <a:bodyPr wrap="square" lIns="254" tIns="254" rIns="254" bIns="254" rtlCol="0" anchor="t">
             <a:normAutofit/>
           </a:bodyPr>
           <a:lstStyle/>
           <a:p>
-            <a:pPr algn="ctr" indent="0" marL="0">
-              <a:buNone/>
-            </a:pPr>
-            <a:r>
-              <a:rPr lang="en-US" sz="1500" b="1" dirty="0">
-                <a:solidFill>
-                  <a:srgbClr val="FFFFFF"/>
-                </a:solidFill>
-                <a:latin typeface="Aptos" pitchFamily="34" charset="0"/>
-                <a:ea typeface="Aptos" pitchFamily="34" charset="-122"/>
-                <a:cs typeface="Aptos" pitchFamily="34" charset="-120"/>
-              </a:rPr>
-              <a:t>Plan</a:t>
-            </a:r>
-            <a:endParaRPr lang="en-US" sz="1500" dirty="0"/>
+            <a:r>
+              <a:rPr lang="en-US" sz="1380" dirty="0">
+                <a:solidFill>
+                  <a:srgbClr val="17364A"/>
+                </a:solidFill>
+                <a:latin typeface="Aptos" pitchFamily="34" charset="0"/>
+                <a:ea typeface="Aptos" pitchFamily="34" charset="-122"/>
+                <a:cs typeface="Aptos" pitchFamily="34" charset="-120"/>
+              </a:rPr>
+              <a:t>Where does this topic appear in your agency, program, or workflow?</a:t>
+            </a:r>
+            <a:endParaRPr lang="en-US" sz="1380" dirty="0"/>
+          </a:p>
+          <a:p>
+            <a:r>
+              <a:rPr lang="en-US" sz="1380" dirty="0">
+                <a:solidFill>
+                  <a:srgbClr val="17364A"/>
+                </a:solidFill>
+                <a:latin typeface="Aptos" pitchFamily="34" charset="0"/>
+                <a:ea typeface="Aptos" pitchFamily="34" charset="-122"/>
+                <a:cs typeface="Aptos" pitchFamily="34" charset="-120"/>
+              </a:rPr>
+              <a:t>Which staff roles would need to understand or apply this concept before AI use is approved?</a:t>
+            </a:r>
+            <a:endParaRPr lang="en-US" sz="1380" dirty="0"/>
+          </a:p>
+          <a:p>
+            <a:r>
+              <a:rPr lang="en-US" sz="1380" dirty="0">
+                <a:solidFill>
+                  <a:srgbClr val="17364A"/>
+                </a:solidFill>
+                <a:latin typeface="Aptos" pitchFamily="34" charset="0"/>
+                <a:ea typeface="Aptos" pitchFamily="34" charset="-122"/>
+                <a:cs typeface="Aptos" pitchFamily="34" charset="-120"/>
+              </a:rPr>
+              <a:t>What could go wrong if this topic is not addressed before implementation?</a:t>
+            </a:r>
+            <a:endParaRPr lang="en-US" sz="1380" dirty="0"/>
           </a:p>
         </p:txBody>
       </p:sp>
       <p:sp>
         <p:nvSpPr>
           <p:cNvPr id="16" name="Shape 14"/>
-          <p:cNvSpPr/>
-          <p:nvPr/>
-        </p:nvSpPr>
-        <p:spPr>
-          <a:xfrm>
-            <a:off x="8976360" y="3319272"/>
-            <a:ext cx="792480" cy="749808"/>
-          </a:xfrm>
-          <a:prstGeom prst="roundRect">
-            <a:avLst>
-              <a:gd name="adj" fmla="val 14634"/>
-            </a:avLst>
-          </a:prstGeom>
-          <a:solidFill>
-            <a:srgbClr val="2F8A28"/>
-          </a:solidFill>
-          <a:ln w="12700">
-            <a:solidFill>
-              <a:srgbClr val="2F8A28"/>
-            </a:solidFill>
-            <a:prstDash val="solid"/>
-          </a:ln>
-        </p:spPr>
-      </p:sp>
-      <p:sp>
-        <p:nvSpPr>
-          <p:cNvPr id="17" name="Text 15"/>
-          <p:cNvSpPr/>
-          <p:nvPr/>
-        </p:nvSpPr>
-        <p:spPr>
-          <a:xfrm>
-            <a:off x="9049512" y="3511296"/>
-            <a:ext cx="646176" cy="310896"/>
-          </a:xfrm>
-          <a:prstGeom prst="rect">
-            <a:avLst/>
-          </a:prstGeom>
-          <a:noFill/>
-          <a:ln/>
-        </p:spPr>
-        <p:txBody>
-          <a:bodyPr wrap="square" lIns="0" tIns="0" rIns="0" bIns="0" rtlCol="0" anchor="ctr">
-            <a:normAutofit/>
-          </a:bodyPr>
-          <a:lstStyle/>
-          <a:p>
-            <a:pPr algn="ctr" indent="0" marL="0">
-              <a:buNone/>
-            </a:pPr>
-            <a:r>
-              <a:rPr lang="en-US" sz="1500" b="1" dirty="0">
-                <a:solidFill>
-                  <a:srgbClr val="FFFFFF"/>
-                </a:solidFill>
-                <a:latin typeface="Aptos" pitchFamily="34" charset="0"/>
-                <a:ea typeface="Aptos" pitchFamily="34" charset="-122"/>
-                <a:cs typeface="Aptos" pitchFamily="34" charset="-120"/>
-              </a:rPr>
-              <a:t>Do</a:t>
-            </a:r>
-            <a:endParaRPr lang="en-US" sz="1500" dirty="0"/>
-          </a:p>
-        </p:txBody>
-      </p:sp>
-      <p:sp>
-        <p:nvSpPr>
-          <p:cNvPr id="18" name="Shape 16"/>
-          <p:cNvSpPr/>
-          <p:nvPr/>
-        </p:nvSpPr>
-        <p:spPr>
-          <a:xfrm>
-            <a:off x="10024872" y="3319272"/>
-            <a:ext cx="792480" cy="749808"/>
-          </a:xfrm>
-          <a:prstGeom prst="roundRect">
-            <a:avLst>
-              <a:gd name="adj" fmla="val 14634"/>
-            </a:avLst>
-          </a:prstGeom>
-          <a:solidFill>
-            <a:srgbClr val="D69A2D"/>
-          </a:solidFill>
-          <a:ln w="12700">
-            <a:solidFill>
-              <a:srgbClr val="D69A2D"/>
-            </a:solidFill>
-            <a:prstDash val="solid"/>
-          </a:ln>
-        </p:spPr>
-      </p:sp>
-      <p:sp>
-        <p:nvSpPr>
-          <p:cNvPr id="19" name="Text 17"/>
-          <p:cNvSpPr/>
-          <p:nvPr/>
-        </p:nvSpPr>
-        <p:spPr>
-          <a:xfrm>
-            <a:off x="10098024" y="3511296"/>
-            <a:ext cx="646176" cy="310896"/>
-          </a:xfrm>
-          <a:prstGeom prst="rect">
-            <a:avLst/>
-          </a:prstGeom>
-          <a:noFill/>
-          <a:ln/>
-        </p:spPr>
-        <p:txBody>
-          <a:bodyPr wrap="square" lIns="0" tIns="0" rIns="0" bIns="0" rtlCol="0" anchor="ctr">
-            <a:normAutofit/>
-          </a:bodyPr>
-          <a:lstStyle/>
-          <a:p>
-            <a:pPr algn="ctr" indent="0" marL="0">
-              <a:buNone/>
-            </a:pPr>
-            <a:r>
-              <a:rPr lang="en-US" sz="1500" b="1" dirty="0">
-                <a:solidFill>
-                  <a:srgbClr val="FFFFFF"/>
-                </a:solidFill>
-                <a:latin typeface="Aptos" pitchFamily="34" charset="0"/>
-                <a:ea typeface="Aptos" pitchFamily="34" charset="-122"/>
-                <a:cs typeface="Aptos" pitchFamily="34" charset="-120"/>
-              </a:rPr>
-              <a:t>Review</a:t>
-            </a:r>
-            <a:endParaRPr lang="en-US" sz="1500" dirty="0"/>
-          </a:p>
-        </p:txBody>
-      </p:sp>
-      <p:sp>
-        <p:nvSpPr>
-          <p:cNvPr id="20" name="Shape 18"/>
-          <p:cNvSpPr/>
-          <p:nvPr/>
-        </p:nvSpPr>
-        <p:spPr>
-          <a:xfrm>
-            <a:off x="8293608" y="4389120"/>
-            <a:ext cx="2157984" cy="0"/>
-          </a:xfrm>
-          <a:prstGeom prst="line">
-            <a:avLst/>
-          </a:prstGeom>
-          <a:noFill/>
-          <a:ln w="25400">
-            <a:solidFill>
-              <a:srgbClr val="8ABBD8"/>
-            </a:solidFill>
-            <a:prstDash val="solid"/>
-          </a:ln>
-        </p:spPr>
-      </p:sp>
-      <p:sp>
-        <p:nvSpPr>
-          <p:cNvPr id="21" name="Text 19"/>
-          <p:cNvSpPr/>
-          <p:nvPr/>
-        </p:nvSpPr>
-        <p:spPr>
-          <a:xfrm>
-            <a:off x="7909560" y="3977640"/>
-            <a:ext cx="2926080" cy="182880"/>
-          </a:xfrm>
-          <a:prstGeom prst="rect">
-            <a:avLst/>
-          </a:prstGeom>
-          <a:noFill/>
-          <a:ln/>
-        </p:spPr>
-        <p:txBody>
-          <a:bodyPr wrap="square" lIns="0" tIns="0" rIns="0" bIns="0" rtlCol="0" anchor="ctr"/>
-          <a:lstStyle/>
-          <a:p>
-            <a:pPr algn="ctr" indent="0" marL="0">
-              <a:buNone/>
-            </a:pPr>
-            <a:r>
-              <a:rPr lang="en-US" sz="1000" dirty="0">
-                <a:solidFill>
-                  <a:srgbClr val="003A63"/>
-                </a:solidFill>
-                <a:latin typeface="Aptos" pitchFamily="34" charset="0"/>
-                <a:ea typeface="Aptos" pitchFamily="34" charset="-122"/>
-                <a:cs typeface="Aptos" pitchFamily="34" charset="-120"/>
-              </a:rPr>
-              <a:t>Dependencies visible</a:t>
-            </a:r>
-            <a:endParaRPr lang="en-US" sz="1000" dirty="0"/>
-          </a:p>
-        </p:txBody>
-      </p:sp>
-      <p:sp>
-        <p:nvSpPr>
-          <p:cNvPr id="22" name="Shape 20"/>
           <p:cNvSpPr/>
           <p:nvPr/>
         </p:nvSpPr>
@@ -6592,7 +6345,7 @@
       </p:sp>
       <p:sp>
         <p:nvSpPr>
-          <p:cNvPr id="23" name="Text 21"/>
+          <p:cNvPr id="17" name="Text 15"/>
           <p:cNvSpPr/>
           <p:nvPr/>
         </p:nvSpPr>
@@ -6631,7 +6384,7 @@
       </p:sp>
       <p:sp>
         <p:nvSpPr>
-          <p:cNvPr id="24" name="Text 22"/>
+          <p:cNvPr id="18" name="Text 16"/>
           <p:cNvSpPr/>
           <p:nvPr/>
         </p:nvSpPr>
@@ -7125,13 +6878,11 @@
             </a:avLst>
           </a:prstGeom>
           <a:solidFill>
-            <a:srgbClr val="FFFFFF">
-              <a:alpha val="88000"/>
-            </a:srgbClr>
+            <a:srgbClr val="FFFFFF"/>
           </a:solidFill>
           <a:ln w="12700">
             <a:solidFill>
-              <a:srgbClr val="D6E8F2"/>
+              <a:srgbClr val="B9D7E6"/>
             </a:solidFill>
             <a:prstDash val="solid"/>
           </a:ln>
@@ -7139,30 +6890,42 @@
       </p:sp>
       <p:sp>
         <p:nvSpPr>
-          <p:cNvPr id="14" name="Shape 12"/>
-          <p:cNvSpPr/>
-          <p:nvPr/>
-        </p:nvSpPr>
-        <p:spPr>
-          <a:xfrm>
-            <a:off x="7927848" y="3319272"/>
-            <a:ext cx="792480" cy="749808"/>
-          </a:xfrm>
-          <a:prstGeom prst="roundRect">
-            <a:avLst>
-              <a:gd name="adj" fmla="val 14634"/>
-            </a:avLst>
-          </a:prstGeom>
-          <a:solidFill>
-            <a:srgbClr val="0068B7"/>
-          </a:solidFill>
-          <a:ln w="12700">
-            <a:solidFill>
-              <a:srgbClr val="0068B7"/>
-            </a:solidFill>
-            <a:prstDash val="solid"/>
-          </a:ln>
-        </p:spPr>
+          <p:cNvPr id="14" name="Text 12"/>
+          <p:cNvSpPr/>
+          <p:nvPr/>
+        </p:nvSpPr>
+        <p:spPr>
+          <a:xfrm>
+            <a:off x="7799832" y="2935224"/>
+            <a:ext cx="3145536" cy="256032"/>
+          </a:xfrm>
+          <a:prstGeom prst="rect">
+            <a:avLst/>
+          </a:prstGeom>
+          <a:noFill/>
+          <a:ln/>
+        </p:spPr>
+        <p:txBody>
+          <a:bodyPr wrap="square" lIns="0" tIns="0" rIns="0" bIns="0" rtlCol="0" anchor="ctr"/>
+          <a:lstStyle/>
+          <a:p>
+            <a:pPr indent="0" marL="0">
+              <a:buNone/>
+            </a:pPr>
+            <a:r>
+              <a:rPr lang="en-US" sz="1300" b="1" dirty="0">
+                <a:solidFill>
+                  <a:srgbClr val="0068B7"/>
+                </a:solidFill>
+                <a:latin typeface="Aptos" pitchFamily="34" charset="0"/>
+                <a:ea typeface="Aptos" pitchFamily="34" charset="-122"/>
+                <a:cs typeface="Aptos" pitchFamily="34" charset="-120"/>
+              </a:rPr>
+              <a:t>Concept checkpoints</a:t>
+            </a:r>
+            <a:endParaRPr lang="en-US" sz="1300" dirty="0"/>
+          </a:p>
+        </p:txBody>
       </p:sp>
       <p:sp>
         <p:nvSpPr>
@@ -7172,240 +6935,53 @@
         </p:nvSpPr>
         <p:spPr>
           <a:xfrm>
-            <a:off x="8001000" y="3511296"/>
-            <a:ext cx="646176" cy="310896"/>
-          </a:xfrm>
-          <a:prstGeom prst="rect">
-            <a:avLst/>
-          </a:prstGeom>
-          <a:noFill/>
-          <a:ln/>
-        </p:spPr>
-        <p:txBody>
-          <a:bodyPr wrap="square" lIns="0" tIns="0" rIns="0" bIns="0" rtlCol="0" anchor="ctr">
+            <a:off x="7818120" y="3300984"/>
+            <a:ext cx="3090672" cy="877824"/>
+          </a:xfrm>
+          <a:prstGeom prst="rect">
+            <a:avLst/>
+          </a:prstGeom>
+          <a:noFill/>
+          <a:ln/>
+        </p:spPr>
+        <p:txBody>
+          <a:bodyPr wrap="square" lIns="254" tIns="254" rIns="254" bIns="254" rtlCol="0" anchor="t">
             <a:normAutofit/>
           </a:bodyPr>
           <a:lstStyle/>
           <a:p>
-            <a:pPr algn="ctr" indent="0" marL="0">
-              <a:buNone/>
-            </a:pPr>
-            <a:r>
-              <a:rPr lang="en-US" sz="1500" b="1" dirty="0">
-                <a:solidFill>
-                  <a:srgbClr val="FFFFFF"/>
-                </a:solidFill>
-                <a:latin typeface="Aptos" pitchFamily="34" charset="0"/>
-                <a:ea typeface="Aptos" pitchFamily="34" charset="-122"/>
-                <a:cs typeface="Aptos" pitchFamily="34" charset="-120"/>
-              </a:rPr>
-              <a:t>Plan</a:t>
-            </a:r>
-            <a:endParaRPr lang="en-US" sz="1500" dirty="0"/>
+            <a:r>
+              <a:rPr lang="en-US" sz="1380" dirty="0">
+                <a:solidFill>
+                  <a:srgbClr val="17364A"/>
+                </a:solidFill>
+                <a:latin typeface="Aptos" pitchFamily="34" charset="0"/>
+                <a:ea typeface="Aptos" pitchFamily="34" charset="-122"/>
+                <a:cs typeface="Aptos" pitchFamily="34" charset="-120"/>
+              </a:rPr>
+              <a:t>What evidence would governance, leadership, or operations staff need before moving forward?</a:t>
+            </a:r>
+            <a:endParaRPr lang="en-US" sz="1380" dirty="0"/>
+          </a:p>
+          <a:p>
+            <a:r>
+              <a:rPr lang="en-US" sz="1380" dirty="0">
+                <a:solidFill>
+                  <a:srgbClr val="17364A"/>
+                </a:solidFill>
+                <a:latin typeface="Aptos" pitchFamily="34" charset="0"/>
+                <a:ea typeface="Aptos" pitchFamily="34" charset="-122"/>
+                <a:cs typeface="Aptos" pitchFamily="34" charset="-120"/>
+              </a:rPr>
+              <a:t>Which policy, data, equity, privacy, security, or workflow questions remain unresolved?</a:t>
+            </a:r>
+            <a:endParaRPr lang="en-US" sz="1380" dirty="0"/>
           </a:p>
         </p:txBody>
       </p:sp>
       <p:sp>
         <p:nvSpPr>
           <p:cNvPr id="16" name="Shape 14"/>
-          <p:cNvSpPr/>
-          <p:nvPr/>
-        </p:nvSpPr>
-        <p:spPr>
-          <a:xfrm>
-            <a:off x="8976360" y="3319272"/>
-            <a:ext cx="792480" cy="749808"/>
-          </a:xfrm>
-          <a:prstGeom prst="roundRect">
-            <a:avLst>
-              <a:gd name="adj" fmla="val 14634"/>
-            </a:avLst>
-          </a:prstGeom>
-          <a:solidFill>
-            <a:srgbClr val="2F8A28"/>
-          </a:solidFill>
-          <a:ln w="12700">
-            <a:solidFill>
-              <a:srgbClr val="2F8A28"/>
-            </a:solidFill>
-            <a:prstDash val="solid"/>
-          </a:ln>
-        </p:spPr>
-      </p:sp>
-      <p:sp>
-        <p:nvSpPr>
-          <p:cNvPr id="17" name="Text 15"/>
-          <p:cNvSpPr/>
-          <p:nvPr/>
-        </p:nvSpPr>
-        <p:spPr>
-          <a:xfrm>
-            <a:off x="9049512" y="3511296"/>
-            <a:ext cx="646176" cy="310896"/>
-          </a:xfrm>
-          <a:prstGeom prst="rect">
-            <a:avLst/>
-          </a:prstGeom>
-          <a:noFill/>
-          <a:ln/>
-        </p:spPr>
-        <p:txBody>
-          <a:bodyPr wrap="square" lIns="0" tIns="0" rIns="0" bIns="0" rtlCol="0" anchor="ctr">
-            <a:normAutofit/>
-          </a:bodyPr>
-          <a:lstStyle/>
-          <a:p>
-            <a:pPr algn="ctr" indent="0" marL="0">
-              <a:buNone/>
-            </a:pPr>
-            <a:r>
-              <a:rPr lang="en-US" sz="1500" b="1" dirty="0">
-                <a:solidFill>
-                  <a:srgbClr val="FFFFFF"/>
-                </a:solidFill>
-                <a:latin typeface="Aptos" pitchFamily="34" charset="0"/>
-                <a:ea typeface="Aptos" pitchFamily="34" charset="-122"/>
-                <a:cs typeface="Aptos" pitchFamily="34" charset="-120"/>
-              </a:rPr>
-              <a:t>Do</a:t>
-            </a:r>
-            <a:endParaRPr lang="en-US" sz="1500" dirty="0"/>
-          </a:p>
-        </p:txBody>
-      </p:sp>
-      <p:sp>
-        <p:nvSpPr>
-          <p:cNvPr id="18" name="Shape 16"/>
-          <p:cNvSpPr/>
-          <p:nvPr/>
-        </p:nvSpPr>
-        <p:spPr>
-          <a:xfrm>
-            <a:off x="10024872" y="3319272"/>
-            <a:ext cx="792480" cy="749808"/>
-          </a:xfrm>
-          <a:prstGeom prst="roundRect">
-            <a:avLst>
-              <a:gd name="adj" fmla="val 14634"/>
-            </a:avLst>
-          </a:prstGeom>
-          <a:solidFill>
-            <a:srgbClr val="D69A2D"/>
-          </a:solidFill>
-          <a:ln w="12700">
-            <a:solidFill>
-              <a:srgbClr val="D69A2D"/>
-            </a:solidFill>
-            <a:prstDash val="solid"/>
-          </a:ln>
-        </p:spPr>
-      </p:sp>
-      <p:sp>
-        <p:nvSpPr>
-          <p:cNvPr id="19" name="Text 17"/>
-          <p:cNvSpPr/>
-          <p:nvPr/>
-        </p:nvSpPr>
-        <p:spPr>
-          <a:xfrm>
-            <a:off x="10098024" y="3511296"/>
-            <a:ext cx="646176" cy="310896"/>
-          </a:xfrm>
-          <a:prstGeom prst="rect">
-            <a:avLst/>
-          </a:prstGeom>
-          <a:noFill/>
-          <a:ln/>
-        </p:spPr>
-        <p:txBody>
-          <a:bodyPr wrap="square" lIns="0" tIns="0" rIns="0" bIns="0" rtlCol="0" anchor="ctr">
-            <a:normAutofit/>
-          </a:bodyPr>
-          <a:lstStyle/>
-          <a:p>
-            <a:pPr algn="ctr" indent="0" marL="0">
-              <a:buNone/>
-            </a:pPr>
-            <a:r>
-              <a:rPr lang="en-US" sz="1500" b="1" dirty="0">
-                <a:solidFill>
-                  <a:srgbClr val="FFFFFF"/>
-                </a:solidFill>
-                <a:latin typeface="Aptos" pitchFamily="34" charset="0"/>
-                <a:ea typeface="Aptos" pitchFamily="34" charset="-122"/>
-                <a:cs typeface="Aptos" pitchFamily="34" charset="-120"/>
-              </a:rPr>
-              <a:t>Review</a:t>
-            </a:r>
-            <a:endParaRPr lang="en-US" sz="1500" dirty="0"/>
-          </a:p>
-        </p:txBody>
-      </p:sp>
-      <p:sp>
-        <p:nvSpPr>
-          <p:cNvPr id="20" name="Shape 18"/>
-          <p:cNvSpPr/>
-          <p:nvPr/>
-        </p:nvSpPr>
-        <p:spPr>
-          <a:xfrm>
-            <a:off x="8293608" y="4389120"/>
-            <a:ext cx="2157984" cy="0"/>
-          </a:xfrm>
-          <a:prstGeom prst="line">
-            <a:avLst/>
-          </a:prstGeom>
-          <a:noFill/>
-          <a:ln w="25400">
-            <a:solidFill>
-              <a:srgbClr val="8ABBD8"/>
-            </a:solidFill>
-            <a:prstDash val="solid"/>
-          </a:ln>
-        </p:spPr>
-      </p:sp>
-      <p:sp>
-        <p:nvSpPr>
-          <p:cNvPr id="21" name="Text 19"/>
-          <p:cNvSpPr/>
-          <p:nvPr/>
-        </p:nvSpPr>
-        <p:spPr>
-          <a:xfrm>
-            <a:off x="7909560" y="3977640"/>
-            <a:ext cx="2926080" cy="182880"/>
-          </a:xfrm>
-          <a:prstGeom prst="rect">
-            <a:avLst/>
-          </a:prstGeom>
-          <a:noFill/>
-          <a:ln/>
-        </p:spPr>
-        <p:txBody>
-          <a:bodyPr wrap="square" lIns="0" tIns="0" rIns="0" bIns="0" rtlCol="0" anchor="ctr"/>
-          <a:lstStyle/>
-          <a:p>
-            <a:pPr algn="ctr" indent="0" marL="0">
-              <a:buNone/>
-            </a:pPr>
-            <a:r>
-              <a:rPr lang="en-US" sz="1000" dirty="0">
-                <a:solidFill>
-                  <a:srgbClr val="003A63"/>
-                </a:solidFill>
-                <a:latin typeface="Aptos" pitchFamily="34" charset="0"/>
-                <a:ea typeface="Aptos" pitchFamily="34" charset="-122"/>
-                <a:cs typeface="Aptos" pitchFamily="34" charset="-120"/>
-              </a:rPr>
-              <a:t>Dependencies visible</a:t>
-            </a:r>
-            <a:endParaRPr lang="en-US" sz="1000" dirty="0"/>
-          </a:p>
-        </p:txBody>
-      </p:sp>
-      <p:sp>
-        <p:nvSpPr>
-          <p:cNvPr id="22" name="Shape 20"/>
           <p:cNvSpPr/>
           <p:nvPr/>
         </p:nvSpPr>
@@ -7432,7 +7008,7 @@
       </p:sp>
       <p:sp>
         <p:nvSpPr>
-          <p:cNvPr id="23" name="Text 21"/>
+          <p:cNvPr id="17" name="Text 15"/>
           <p:cNvSpPr/>
           <p:nvPr/>
         </p:nvSpPr>
@@ -7471,7 +7047,7 @@
       </p:sp>
       <p:sp>
         <p:nvSpPr>
-          <p:cNvPr id="24" name="Text 22"/>
+          <p:cNvPr id="18" name="Text 16"/>
           <p:cNvSpPr/>
           <p:nvPr/>
         </p:nvSpPr>
@@ -7965,13 +7541,11 @@
             </a:avLst>
           </a:prstGeom>
           <a:solidFill>
-            <a:srgbClr val="FFFFFF">
-              <a:alpha val="88000"/>
-            </a:srgbClr>
+            <a:srgbClr val="FFFFFF"/>
           </a:solidFill>
           <a:ln w="12700">
             <a:solidFill>
-              <a:srgbClr val="D6E8F2"/>
+              <a:srgbClr val="B9D7E6"/>
             </a:solidFill>
             <a:prstDash val="solid"/>
           </a:ln>
@@ -7979,30 +7553,42 @@
       </p:sp>
       <p:sp>
         <p:nvSpPr>
-          <p:cNvPr id="14" name="Shape 12"/>
-          <p:cNvSpPr/>
-          <p:nvPr/>
-        </p:nvSpPr>
-        <p:spPr>
-          <a:xfrm>
-            <a:off x="7927848" y="3319272"/>
-            <a:ext cx="792480" cy="749808"/>
-          </a:xfrm>
-          <a:prstGeom prst="roundRect">
-            <a:avLst>
-              <a:gd name="adj" fmla="val 14634"/>
-            </a:avLst>
-          </a:prstGeom>
-          <a:solidFill>
-            <a:srgbClr val="0068B7"/>
-          </a:solidFill>
-          <a:ln w="12700">
-            <a:solidFill>
-              <a:srgbClr val="0068B7"/>
-            </a:solidFill>
-            <a:prstDash val="solid"/>
-          </a:ln>
-        </p:spPr>
+          <p:cNvPr id="14" name="Text 12"/>
+          <p:cNvSpPr/>
+          <p:nvPr/>
+        </p:nvSpPr>
+        <p:spPr>
+          <a:xfrm>
+            <a:off x="7799832" y="2935224"/>
+            <a:ext cx="3145536" cy="256032"/>
+          </a:xfrm>
+          <a:prstGeom prst="rect">
+            <a:avLst/>
+          </a:prstGeom>
+          <a:noFill/>
+          <a:ln/>
+        </p:spPr>
+        <p:txBody>
+          <a:bodyPr wrap="square" lIns="0" tIns="0" rIns="0" bIns="0" rtlCol="0" anchor="ctr"/>
+          <a:lstStyle/>
+          <a:p>
+            <a:pPr indent="0" marL="0">
+              <a:buNone/>
+            </a:pPr>
+            <a:r>
+              <a:rPr lang="en-US" sz="1300" b="1" dirty="0">
+                <a:solidFill>
+                  <a:srgbClr val="0068B7"/>
+                </a:solidFill>
+                <a:latin typeface="Aptos" pitchFamily="34" charset="0"/>
+                <a:ea typeface="Aptos" pitchFamily="34" charset="-122"/>
+                <a:cs typeface="Aptos" pitchFamily="34" charset="-120"/>
+              </a:rPr>
+              <a:t>Concept checkpoints</a:t>
+            </a:r>
+            <a:endParaRPr lang="en-US" sz="1300" dirty="0"/>
+          </a:p>
+        </p:txBody>
       </p:sp>
       <p:sp>
         <p:nvSpPr>
@@ -8012,240 +7598,53 @@
         </p:nvSpPr>
         <p:spPr>
           <a:xfrm>
-            <a:off x="8001000" y="3511296"/>
-            <a:ext cx="646176" cy="310896"/>
-          </a:xfrm>
-          <a:prstGeom prst="rect">
-            <a:avLst/>
-          </a:prstGeom>
-          <a:noFill/>
-          <a:ln/>
-        </p:spPr>
-        <p:txBody>
-          <a:bodyPr wrap="square" lIns="0" tIns="0" rIns="0" bIns="0" rtlCol="0" anchor="ctr">
+            <a:off x="7818120" y="3300984"/>
+            <a:ext cx="3090672" cy="877824"/>
+          </a:xfrm>
+          <a:prstGeom prst="rect">
+            <a:avLst/>
+          </a:prstGeom>
+          <a:noFill/>
+          <a:ln/>
+        </p:spPr>
+        <p:txBody>
+          <a:bodyPr wrap="square" lIns="254" tIns="254" rIns="254" bIns="254" rtlCol="0" anchor="t">
             <a:normAutofit/>
           </a:bodyPr>
           <a:lstStyle/>
           <a:p>
-            <a:pPr algn="ctr" indent="0" marL="0">
-              <a:buNone/>
-            </a:pPr>
-            <a:r>
-              <a:rPr lang="en-US" sz="1500" b="1" dirty="0">
-                <a:solidFill>
-                  <a:srgbClr val="FFFFFF"/>
-                </a:solidFill>
-                <a:latin typeface="Aptos" pitchFamily="34" charset="0"/>
-                <a:ea typeface="Aptos" pitchFamily="34" charset="-122"/>
-                <a:cs typeface="Aptos" pitchFamily="34" charset="-120"/>
-              </a:rPr>
-              <a:t>Plan</a:t>
-            </a:r>
-            <a:endParaRPr lang="en-US" sz="1500" dirty="0"/>
+            <a:r>
+              <a:rPr lang="en-US" sz="1380" dirty="0">
+                <a:solidFill>
+                  <a:srgbClr val="17364A"/>
+                </a:solidFill>
+                <a:latin typeface="Aptos" pitchFamily="34" charset="0"/>
+                <a:ea typeface="Aptos" pitchFamily="34" charset="-122"/>
+                <a:cs typeface="Aptos" pitchFamily="34" charset="-120"/>
+              </a:rPr>
+              <a:t>Create a UAT plan for one AI-supported workflow.</a:t>
+            </a:r>
+            <a:endParaRPr lang="en-US" sz="1380" dirty="0"/>
+          </a:p>
+          <a:p>
+            <a:r>
+              <a:rPr lang="en-US" sz="1380" dirty="0">
+                <a:solidFill>
+                  <a:srgbClr val="17364A"/>
+                </a:solidFill>
+                <a:latin typeface="Aptos" pitchFamily="34" charset="0"/>
+                <a:ea typeface="Aptos" pitchFamily="34" charset="-122"/>
+                <a:cs typeface="Aptos" pitchFamily="34" charset="-120"/>
+              </a:rPr>
+              <a:t>Include user roles, test scenarios, edge cases, acceptance criteria, tester instructions,.</a:t>
+            </a:r>
+            <a:endParaRPr lang="en-US" sz="1380" dirty="0"/>
           </a:p>
         </p:txBody>
       </p:sp>
       <p:sp>
         <p:nvSpPr>
           <p:cNvPr id="16" name="Shape 14"/>
-          <p:cNvSpPr/>
-          <p:nvPr/>
-        </p:nvSpPr>
-        <p:spPr>
-          <a:xfrm>
-            <a:off x="8976360" y="3319272"/>
-            <a:ext cx="792480" cy="749808"/>
-          </a:xfrm>
-          <a:prstGeom prst="roundRect">
-            <a:avLst>
-              <a:gd name="adj" fmla="val 14634"/>
-            </a:avLst>
-          </a:prstGeom>
-          <a:solidFill>
-            <a:srgbClr val="2F8A28"/>
-          </a:solidFill>
-          <a:ln w="12700">
-            <a:solidFill>
-              <a:srgbClr val="2F8A28"/>
-            </a:solidFill>
-            <a:prstDash val="solid"/>
-          </a:ln>
-        </p:spPr>
-      </p:sp>
-      <p:sp>
-        <p:nvSpPr>
-          <p:cNvPr id="17" name="Text 15"/>
-          <p:cNvSpPr/>
-          <p:nvPr/>
-        </p:nvSpPr>
-        <p:spPr>
-          <a:xfrm>
-            <a:off x="9049512" y="3511296"/>
-            <a:ext cx="646176" cy="310896"/>
-          </a:xfrm>
-          <a:prstGeom prst="rect">
-            <a:avLst/>
-          </a:prstGeom>
-          <a:noFill/>
-          <a:ln/>
-        </p:spPr>
-        <p:txBody>
-          <a:bodyPr wrap="square" lIns="0" tIns="0" rIns="0" bIns="0" rtlCol="0" anchor="ctr">
-            <a:normAutofit/>
-          </a:bodyPr>
-          <a:lstStyle/>
-          <a:p>
-            <a:pPr algn="ctr" indent="0" marL="0">
-              <a:buNone/>
-            </a:pPr>
-            <a:r>
-              <a:rPr lang="en-US" sz="1500" b="1" dirty="0">
-                <a:solidFill>
-                  <a:srgbClr val="FFFFFF"/>
-                </a:solidFill>
-                <a:latin typeface="Aptos" pitchFamily="34" charset="0"/>
-                <a:ea typeface="Aptos" pitchFamily="34" charset="-122"/>
-                <a:cs typeface="Aptos" pitchFamily="34" charset="-120"/>
-              </a:rPr>
-              <a:t>Do</a:t>
-            </a:r>
-            <a:endParaRPr lang="en-US" sz="1500" dirty="0"/>
-          </a:p>
-        </p:txBody>
-      </p:sp>
-      <p:sp>
-        <p:nvSpPr>
-          <p:cNvPr id="18" name="Shape 16"/>
-          <p:cNvSpPr/>
-          <p:nvPr/>
-        </p:nvSpPr>
-        <p:spPr>
-          <a:xfrm>
-            <a:off x="10024872" y="3319272"/>
-            <a:ext cx="792480" cy="749808"/>
-          </a:xfrm>
-          <a:prstGeom prst="roundRect">
-            <a:avLst>
-              <a:gd name="adj" fmla="val 14634"/>
-            </a:avLst>
-          </a:prstGeom>
-          <a:solidFill>
-            <a:srgbClr val="D69A2D"/>
-          </a:solidFill>
-          <a:ln w="12700">
-            <a:solidFill>
-              <a:srgbClr val="D69A2D"/>
-            </a:solidFill>
-            <a:prstDash val="solid"/>
-          </a:ln>
-        </p:spPr>
-      </p:sp>
-      <p:sp>
-        <p:nvSpPr>
-          <p:cNvPr id="19" name="Text 17"/>
-          <p:cNvSpPr/>
-          <p:nvPr/>
-        </p:nvSpPr>
-        <p:spPr>
-          <a:xfrm>
-            <a:off x="10098024" y="3511296"/>
-            <a:ext cx="646176" cy="310896"/>
-          </a:xfrm>
-          <a:prstGeom prst="rect">
-            <a:avLst/>
-          </a:prstGeom>
-          <a:noFill/>
-          <a:ln/>
-        </p:spPr>
-        <p:txBody>
-          <a:bodyPr wrap="square" lIns="0" tIns="0" rIns="0" bIns="0" rtlCol="0" anchor="ctr">
-            <a:normAutofit/>
-          </a:bodyPr>
-          <a:lstStyle/>
-          <a:p>
-            <a:pPr algn="ctr" indent="0" marL="0">
-              <a:buNone/>
-            </a:pPr>
-            <a:r>
-              <a:rPr lang="en-US" sz="1500" b="1" dirty="0">
-                <a:solidFill>
-                  <a:srgbClr val="FFFFFF"/>
-                </a:solidFill>
-                <a:latin typeface="Aptos" pitchFamily="34" charset="0"/>
-                <a:ea typeface="Aptos" pitchFamily="34" charset="-122"/>
-                <a:cs typeface="Aptos" pitchFamily="34" charset="-120"/>
-              </a:rPr>
-              <a:t>Review</a:t>
-            </a:r>
-            <a:endParaRPr lang="en-US" sz="1500" dirty="0"/>
-          </a:p>
-        </p:txBody>
-      </p:sp>
-      <p:sp>
-        <p:nvSpPr>
-          <p:cNvPr id="20" name="Shape 18"/>
-          <p:cNvSpPr/>
-          <p:nvPr/>
-        </p:nvSpPr>
-        <p:spPr>
-          <a:xfrm>
-            <a:off x="8293608" y="4389120"/>
-            <a:ext cx="2157984" cy="0"/>
-          </a:xfrm>
-          <a:prstGeom prst="line">
-            <a:avLst/>
-          </a:prstGeom>
-          <a:noFill/>
-          <a:ln w="25400">
-            <a:solidFill>
-              <a:srgbClr val="8ABBD8"/>
-            </a:solidFill>
-            <a:prstDash val="solid"/>
-          </a:ln>
-        </p:spPr>
-      </p:sp>
-      <p:sp>
-        <p:nvSpPr>
-          <p:cNvPr id="21" name="Text 19"/>
-          <p:cNvSpPr/>
-          <p:nvPr/>
-        </p:nvSpPr>
-        <p:spPr>
-          <a:xfrm>
-            <a:off x="7909560" y="3977640"/>
-            <a:ext cx="2926080" cy="182880"/>
-          </a:xfrm>
-          <a:prstGeom prst="rect">
-            <a:avLst/>
-          </a:prstGeom>
-          <a:noFill/>
-          <a:ln/>
-        </p:spPr>
-        <p:txBody>
-          <a:bodyPr wrap="square" lIns="0" tIns="0" rIns="0" bIns="0" rtlCol="0" anchor="ctr"/>
-          <a:lstStyle/>
-          <a:p>
-            <a:pPr algn="ctr" indent="0" marL="0">
-              <a:buNone/>
-            </a:pPr>
-            <a:r>
-              <a:rPr lang="en-US" sz="1000" dirty="0">
-                <a:solidFill>
-                  <a:srgbClr val="003A63"/>
-                </a:solidFill>
-                <a:latin typeface="Aptos" pitchFamily="34" charset="0"/>
-                <a:ea typeface="Aptos" pitchFamily="34" charset="-122"/>
-                <a:cs typeface="Aptos" pitchFamily="34" charset="-120"/>
-              </a:rPr>
-              <a:t>Dependencies visible</a:t>
-            </a:r>
-            <a:endParaRPr lang="en-US" sz="1000" dirty="0"/>
-          </a:p>
-        </p:txBody>
-      </p:sp>
-      <p:sp>
-        <p:nvSpPr>
-          <p:cNvPr id="22" name="Shape 20"/>
           <p:cNvSpPr/>
           <p:nvPr/>
         </p:nvSpPr>
@@ -8272,7 +7671,7 @@
       </p:sp>
       <p:sp>
         <p:nvSpPr>
-          <p:cNvPr id="23" name="Text 21"/>
+          <p:cNvPr id="17" name="Text 15"/>
           <p:cNvSpPr/>
           <p:nvPr/>
         </p:nvSpPr>
@@ -8311,7 +7710,7 @@
       </p:sp>
       <p:sp>
         <p:nvSpPr>
-          <p:cNvPr id="24" name="Text 22"/>
+          <p:cNvPr id="18" name="Text 16"/>
           <p:cNvSpPr/>
           <p:nvPr/>
         </p:nvSpPr>
@@ -8819,13 +8218,11 @@
             </a:avLst>
           </a:prstGeom>
           <a:solidFill>
-            <a:srgbClr val="FFFFFF">
-              <a:alpha val="88000"/>
-            </a:srgbClr>
+            <a:srgbClr val="FFFFFF"/>
           </a:solidFill>
           <a:ln w="12700">
             <a:solidFill>
-              <a:srgbClr val="D6E8F2"/>
+              <a:srgbClr val="B9D7E6"/>
             </a:solidFill>
             <a:prstDash val="solid"/>
           </a:ln>
@@ -8833,30 +8230,42 @@
       </p:sp>
       <p:sp>
         <p:nvSpPr>
-          <p:cNvPr id="14" name="Shape 12"/>
-          <p:cNvSpPr/>
-          <p:nvPr/>
-        </p:nvSpPr>
-        <p:spPr>
-          <a:xfrm>
-            <a:off x="7927848" y="3319272"/>
-            <a:ext cx="792480" cy="749808"/>
-          </a:xfrm>
-          <a:prstGeom prst="roundRect">
-            <a:avLst>
-              <a:gd name="adj" fmla="val 14634"/>
-            </a:avLst>
-          </a:prstGeom>
-          <a:solidFill>
-            <a:srgbClr val="0068B7"/>
-          </a:solidFill>
-          <a:ln w="12700">
-            <a:solidFill>
-              <a:srgbClr val="0068B7"/>
-            </a:solidFill>
-            <a:prstDash val="solid"/>
-          </a:ln>
-        </p:spPr>
+          <p:cNvPr id="14" name="Text 12"/>
+          <p:cNvSpPr/>
+          <p:nvPr/>
+        </p:nvSpPr>
+        <p:spPr>
+          <a:xfrm>
+            <a:off x="7799832" y="2935224"/>
+            <a:ext cx="3145536" cy="256032"/>
+          </a:xfrm>
+          <a:prstGeom prst="rect">
+            <a:avLst/>
+          </a:prstGeom>
+          <a:noFill/>
+          <a:ln/>
+        </p:spPr>
+        <p:txBody>
+          <a:bodyPr wrap="square" lIns="0" tIns="0" rIns="0" bIns="0" rtlCol="0" anchor="ctr"/>
+          <a:lstStyle/>
+          <a:p>
+            <a:pPr indent="0" marL="0">
+              <a:buNone/>
+            </a:pPr>
+            <a:r>
+              <a:rPr lang="en-US" sz="1300" b="1" dirty="0">
+                <a:solidFill>
+                  <a:srgbClr val="0068B7"/>
+                </a:solidFill>
+                <a:latin typeface="Aptos" pitchFamily="34" charset="0"/>
+                <a:ea typeface="Aptos" pitchFamily="34" charset="-122"/>
+                <a:cs typeface="Aptos" pitchFamily="34" charset="-120"/>
+              </a:rPr>
+              <a:t>Concept checkpoints</a:t>
+            </a:r>
+            <a:endParaRPr lang="en-US" sz="1300" dirty="0"/>
+          </a:p>
+        </p:txBody>
       </p:sp>
       <p:sp>
         <p:nvSpPr>
@@ -8866,240 +8275,67 @@
         </p:nvSpPr>
         <p:spPr>
           <a:xfrm>
-            <a:off x="8001000" y="3511296"/>
-            <a:ext cx="646176" cy="310896"/>
-          </a:xfrm>
-          <a:prstGeom prst="rect">
-            <a:avLst/>
-          </a:prstGeom>
-          <a:noFill/>
-          <a:ln/>
-        </p:spPr>
-        <p:txBody>
-          <a:bodyPr wrap="square" lIns="0" tIns="0" rIns="0" bIns="0" rtlCol="0" anchor="ctr">
+            <a:off x="7818120" y="3300984"/>
+            <a:ext cx="3090672" cy="877824"/>
+          </a:xfrm>
+          <a:prstGeom prst="rect">
+            <a:avLst/>
+          </a:prstGeom>
+          <a:noFill/>
+          <a:ln/>
+        </p:spPr>
+        <p:txBody>
+          <a:bodyPr wrap="square" lIns="254" tIns="254" rIns="254" bIns="254" rtlCol="0" anchor="t">
             <a:normAutofit/>
           </a:bodyPr>
           <a:lstStyle/>
           <a:p>
-            <a:pPr algn="ctr" indent="0" marL="0">
-              <a:buNone/>
-            </a:pPr>
-            <a:r>
-              <a:rPr lang="en-US" sz="1500" b="1" dirty="0">
-                <a:solidFill>
-                  <a:srgbClr val="FFFFFF"/>
-                </a:solidFill>
-                <a:latin typeface="Aptos" pitchFamily="34" charset="0"/>
-                <a:ea typeface="Aptos" pitchFamily="34" charset="-122"/>
-                <a:cs typeface="Aptos" pitchFamily="34" charset="-120"/>
-              </a:rPr>
-              <a:t>Plan</a:t>
-            </a:r>
-            <a:endParaRPr lang="en-US" sz="1500" dirty="0"/>
+            <a:r>
+              <a:rPr lang="en-US" sz="1380" dirty="0">
+                <a:solidFill>
+                  <a:srgbClr val="17364A"/>
+                </a:solidFill>
+                <a:latin typeface="Aptos" pitchFamily="34" charset="0"/>
+                <a:ea typeface="Aptos" pitchFamily="34" charset="-122"/>
+                <a:cs typeface="Aptos" pitchFamily="34" charset="-120"/>
+              </a:rPr>
+              <a:t>UAT plan</a:t>
+            </a:r>
+            <a:endParaRPr lang="en-US" sz="1380" dirty="0"/>
+          </a:p>
+          <a:p>
+            <a:r>
+              <a:rPr lang="en-US" sz="1380" dirty="0">
+                <a:solidFill>
+                  <a:srgbClr val="17364A"/>
+                </a:solidFill>
+                <a:latin typeface="Aptos" pitchFamily="34" charset="0"/>
+                <a:ea typeface="Aptos" pitchFamily="34" charset="-122"/>
+                <a:cs typeface="Aptos" pitchFamily="34" charset="-120"/>
+              </a:rPr>
+              <a:t>Role-based test scripts</a:t>
+            </a:r>
+            <a:endParaRPr lang="en-US" sz="1380" dirty="0"/>
+          </a:p>
+          <a:p>
+            <a:r>
+              <a:rPr lang="en-US" sz="1380" dirty="0">
+                <a:solidFill>
+                  <a:srgbClr val="17364A"/>
+                </a:solidFill>
+                <a:latin typeface="Aptos" pitchFamily="34" charset="0"/>
+                <a:ea typeface="Aptos" pitchFamily="34" charset="-122"/>
+                <a:cs typeface="Aptos" pitchFamily="34" charset="-120"/>
+              </a:rPr>
+              <a:t>Acceptance criteria</a:t>
+            </a:r>
+            <a:endParaRPr lang="en-US" sz="1380" dirty="0"/>
           </a:p>
         </p:txBody>
       </p:sp>
       <p:sp>
         <p:nvSpPr>
           <p:cNvPr id="16" name="Shape 14"/>
-          <p:cNvSpPr/>
-          <p:nvPr/>
-        </p:nvSpPr>
-        <p:spPr>
-          <a:xfrm>
-            <a:off x="8976360" y="3319272"/>
-            <a:ext cx="792480" cy="749808"/>
-          </a:xfrm>
-          <a:prstGeom prst="roundRect">
-            <a:avLst>
-              <a:gd name="adj" fmla="val 14634"/>
-            </a:avLst>
-          </a:prstGeom>
-          <a:solidFill>
-            <a:srgbClr val="2F8A28"/>
-          </a:solidFill>
-          <a:ln w="12700">
-            <a:solidFill>
-              <a:srgbClr val="2F8A28"/>
-            </a:solidFill>
-            <a:prstDash val="solid"/>
-          </a:ln>
-        </p:spPr>
-      </p:sp>
-      <p:sp>
-        <p:nvSpPr>
-          <p:cNvPr id="17" name="Text 15"/>
-          <p:cNvSpPr/>
-          <p:nvPr/>
-        </p:nvSpPr>
-        <p:spPr>
-          <a:xfrm>
-            <a:off x="9049512" y="3511296"/>
-            <a:ext cx="646176" cy="310896"/>
-          </a:xfrm>
-          <a:prstGeom prst="rect">
-            <a:avLst/>
-          </a:prstGeom>
-          <a:noFill/>
-          <a:ln/>
-        </p:spPr>
-        <p:txBody>
-          <a:bodyPr wrap="square" lIns="0" tIns="0" rIns="0" bIns="0" rtlCol="0" anchor="ctr">
-            <a:normAutofit/>
-          </a:bodyPr>
-          <a:lstStyle/>
-          <a:p>
-            <a:pPr algn="ctr" indent="0" marL="0">
-              <a:buNone/>
-            </a:pPr>
-            <a:r>
-              <a:rPr lang="en-US" sz="1500" b="1" dirty="0">
-                <a:solidFill>
-                  <a:srgbClr val="FFFFFF"/>
-                </a:solidFill>
-                <a:latin typeface="Aptos" pitchFamily="34" charset="0"/>
-                <a:ea typeface="Aptos" pitchFamily="34" charset="-122"/>
-                <a:cs typeface="Aptos" pitchFamily="34" charset="-120"/>
-              </a:rPr>
-              <a:t>Do</a:t>
-            </a:r>
-            <a:endParaRPr lang="en-US" sz="1500" dirty="0"/>
-          </a:p>
-        </p:txBody>
-      </p:sp>
-      <p:sp>
-        <p:nvSpPr>
-          <p:cNvPr id="18" name="Shape 16"/>
-          <p:cNvSpPr/>
-          <p:nvPr/>
-        </p:nvSpPr>
-        <p:spPr>
-          <a:xfrm>
-            <a:off x="10024872" y="3319272"/>
-            <a:ext cx="792480" cy="749808"/>
-          </a:xfrm>
-          <a:prstGeom prst="roundRect">
-            <a:avLst>
-              <a:gd name="adj" fmla="val 14634"/>
-            </a:avLst>
-          </a:prstGeom>
-          <a:solidFill>
-            <a:srgbClr val="D69A2D"/>
-          </a:solidFill>
-          <a:ln w="12700">
-            <a:solidFill>
-              <a:srgbClr val="D69A2D"/>
-            </a:solidFill>
-            <a:prstDash val="solid"/>
-          </a:ln>
-        </p:spPr>
-      </p:sp>
-      <p:sp>
-        <p:nvSpPr>
-          <p:cNvPr id="19" name="Text 17"/>
-          <p:cNvSpPr/>
-          <p:nvPr/>
-        </p:nvSpPr>
-        <p:spPr>
-          <a:xfrm>
-            <a:off x="10098024" y="3511296"/>
-            <a:ext cx="646176" cy="310896"/>
-          </a:xfrm>
-          <a:prstGeom prst="rect">
-            <a:avLst/>
-          </a:prstGeom>
-          <a:noFill/>
-          <a:ln/>
-        </p:spPr>
-        <p:txBody>
-          <a:bodyPr wrap="square" lIns="0" tIns="0" rIns="0" bIns="0" rtlCol="0" anchor="ctr">
-            <a:normAutofit/>
-          </a:bodyPr>
-          <a:lstStyle/>
-          <a:p>
-            <a:pPr algn="ctr" indent="0" marL="0">
-              <a:buNone/>
-            </a:pPr>
-            <a:r>
-              <a:rPr lang="en-US" sz="1500" b="1" dirty="0">
-                <a:solidFill>
-                  <a:srgbClr val="FFFFFF"/>
-                </a:solidFill>
-                <a:latin typeface="Aptos" pitchFamily="34" charset="0"/>
-                <a:ea typeface="Aptos" pitchFamily="34" charset="-122"/>
-                <a:cs typeface="Aptos" pitchFamily="34" charset="-120"/>
-              </a:rPr>
-              <a:t>Review</a:t>
-            </a:r>
-            <a:endParaRPr lang="en-US" sz="1500" dirty="0"/>
-          </a:p>
-        </p:txBody>
-      </p:sp>
-      <p:sp>
-        <p:nvSpPr>
-          <p:cNvPr id="20" name="Shape 18"/>
-          <p:cNvSpPr/>
-          <p:nvPr/>
-        </p:nvSpPr>
-        <p:spPr>
-          <a:xfrm>
-            <a:off x="8293608" y="4389120"/>
-            <a:ext cx="2157984" cy="0"/>
-          </a:xfrm>
-          <a:prstGeom prst="line">
-            <a:avLst/>
-          </a:prstGeom>
-          <a:noFill/>
-          <a:ln w="25400">
-            <a:solidFill>
-              <a:srgbClr val="8ABBD8"/>
-            </a:solidFill>
-            <a:prstDash val="solid"/>
-          </a:ln>
-        </p:spPr>
-      </p:sp>
-      <p:sp>
-        <p:nvSpPr>
-          <p:cNvPr id="21" name="Text 19"/>
-          <p:cNvSpPr/>
-          <p:nvPr/>
-        </p:nvSpPr>
-        <p:spPr>
-          <a:xfrm>
-            <a:off x="7909560" y="3977640"/>
-            <a:ext cx="2926080" cy="182880"/>
-          </a:xfrm>
-          <a:prstGeom prst="rect">
-            <a:avLst/>
-          </a:prstGeom>
-          <a:noFill/>
-          <a:ln/>
-        </p:spPr>
-        <p:txBody>
-          <a:bodyPr wrap="square" lIns="0" tIns="0" rIns="0" bIns="0" rtlCol="0" anchor="ctr"/>
-          <a:lstStyle/>
-          <a:p>
-            <a:pPr algn="ctr" indent="0" marL="0">
-              <a:buNone/>
-            </a:pPr>
-            <a:r>
-              <a:rPr lang="en-US" sz="1000" dirty="0">
-                <a:solidFill>
-                  <a:srgbClr val="003A63"/>
-                </a:solidFill>
-                <a:latin typeface="Aptos" pitchFamily="34" charset="0"/>
-                <a:ea typeface="Aptos" pitchFamily="34" charset="-122"/>
-                <a:cs typeface="Aptos" pitchFamily="34" charset="-120"/>
-              </a:rPr>
-              <a:t>Dependencies visible</a:t>
-            </a:r>
-            <a:endParaRPr lang="en-US" sz="1000" dirty="0"/>
-          </a:p>
-        </p:txBody>
-      </p:sp>
-      <p:sp>
-        <p:nvSpPr>
-          <p:cNvPr id="22" name="Shape 20"/>
           <p:cNvSpPr/>
           <p:nvPr/>
         </p:nvSpPr>
@@ -9126,7 +8362,7 @@
       </p:sp>
       <p:sp>
         <p:nvSpPr>
-          <p:cNvPr id="23" name="Text 21"/>
+          <p:cNvPr id="17" name="Text 15"/>
           <p:cNvSpPr/>
           <p:nvPr/>
         </p:nvSpPr>
@@ -9165,7 +8401,7 @@
       </p:sp>
       <p:sp>
         <p:nvSpPr>
-          <p:cNvPr id="24" name="Text 22"/>
+          <p:cNvPr id="18" name="Text 16"/>
           <p:cNvSpPr/>
           <p:nvPr/>
         </p:nvSpPr>
@@ -9659,13 +8895,11 @@
             </a:avLst>
           </a:prstGeom>
           <a:solidFill>
-            <a:srgbClr val="FFFFFF">
-              <a:alpha val="88000"/>
-            </a:srgbClr>
+            <a:srgbClr val="FFFFFF"/>
           </a:solidFill>
           <a:ln w="12700">
             <a:solidFill>
-              <a:srgbClr val="D6E8F2"/>
+              <a:srgbClr val="B9D7E6"/>
             </a:solidFill>
             <a:prstDash val="solid"/>
           </a:ln>
@@ -9673,30 +8907,42 @@
       </p:sp>
       <p:sp>
         <p:nvSpPr>
-          <p:cNvPr id="14" name="Shape 12"/>
-          <p:cNvSpPr/>
-          <p:nvPr/>
-        </p:nvSpPr>
-        <p:spPr>
-          <a:xfrm>
-            <a:off x="7927848" y="3319272"/>
-            <a:ext cx="792480" cy="749808"/>
-          </a:xfrm>
-          <a:prstGeom prst="roundRect">
-            <a:avLst>
-              <a:gd name="adj" fmla="val 14634"/>
-            </a:avLst>
-          </a:prstGeom>
-          <a:solidFill>
-            <a:srgbClr val="0068B7"/>
-          </a:solidFill>
-          <a:ln w="12700">
-            <a:solidFill>
-              <a:srgbClr val="0068B7"/>
-            </a:solidFill>
-            <a:prstDash val="solid"/>
-          </a:ln>
-        </p:spPr>
+          <p:cNvPr id="14" name="Text 12"/>
+          <p:cNvSpPr/>
+          <p:nvPr/>
+        </p:nvSpPr>
+        <p:spPr>
+          <a:xfrm>
+            <a:off x="7799832" y="2935224"/>
+            <a:ext cx="3145536" cy="256032"/>
+          </a:xfrm>
+          <a:prstGeom prst="rect">
+            <a:avLst/>
+          </a:prstGeom>
+          <a:noFill/>
+          <a:ln/>
+        </p:spPr>
+        <p:txBody>
+          <a:bodyPr wrap="square" lIns="0" tIns="0" rIns="0" bIns="0" rtlCol="0" anchor="ctr"/>
+          <a:lstStyle/>
+          <a:p>
+            <a:pPr indent="0" marL="0">
+              <a:buNone/>
+            </a:pPr>
+            <a:r>
+              <a:rPr lang="en-US" sz="1300" b="1" dirty="0">
+                <a:solidFill>
+                  <a:srgbClr val="0068B7"/>
+                </a:solidFill>
+                <a:latin typeface="Aptos" pitchFamily="34" charset="0"/>
+                <a:ea typeface="Aptos" pitchFamily="34" charset="-122"/>
+                <a:cs typeface="Aptos" pitchFamily="34" charset="-120"/>
+              </a:rPr>
+              <a:t>Concept checkpoints</a:t>
+            </a:r>
+            <a:endParaRPr lang="en-US" sz="1300" dirty="0"/>
+          </a:p>
+        </p:txBody>
       </p:sp>
       <p:sp>
         <p:nvSpPr>
@@ -9706,240 +8952,53 @@
         </p:nvSpPr>
         <p:spPr>
           <a:xfrm>
-            <a:off x="8001000" y="3511296"/>
-            <a:ext cx="646176" cy="310896"/>
-          </a:xfrm>
-          <a:prstGeom prst="rect">
-            <a:avLst/>
-          </a:prstGeom>
-          <a:noFill/>
-          <a:ln/>
-        </p:spPr>
-        <p:txBody>
-          <a:bodyPr wrap="square" lIns="0" tIns="0" rIns="0" bIns="0" rtlCol="0" anchor="ctr">
+            <a:off x="7818120" y="3300984"/>
+            <a:ext cx="3090672" cy="877824"/>
+          </a:xfrm>
+          <a:prstGeom prst="rect">
+            <a:avLst/>
+          </a:prstGeom>
+          <a:noFill/>
+          <a:ln/>
+        </p:spPr>
+        <p:txBody>
+          <a:bodyPr wrap="square" lIns="254" tIns="254" rIns="254" bIns="254" rtlCol="0" anchor="t">
             <a:normAutofit/>
           </a:bodyPr>
           <a:lstStyle/>
           <a:p>
-            <a:pPr algn="ctr" indent="0" marL="0">
-              <a:buNone/>
-            </a:pPr>
-            <a:r>
-              <a:rPr lang="en-US" sz="1500" b="1" dirty="0">
-                <a:solidFill>
-                  <a:srgbClr val="FFFFFF"/>
-                </a:solidFill>
-                <a:latin typeface="Aptos" pitchFamily="34" charset="0"/>
-                <a:ea typeface="Aptos" pitchFamily="34" charset="-122"/>
-                <a:cs typeface="Aptos" pitchFamily="34" charset="-120"/>
-              </a:rPr>
-              <a:t>Plan</a:t>
-            </a:r>
-            <a:endParaRPr lang="en-US" sz="1500" dirty="0"/>
+            <a:r>
+              <a:rPr lang="en-US" sz="1380" dirty="0">
+                <a:solidFill>
+                  <a:srgbClr val="17364A"/>
+                </a:solidFill>
+                <a:latin typeface="Aptos" pitchFamily="34" charset="0"/>
+                <a:ea typeface="Aptos" pitchFamily="34" charset="-122"/>
+                <a:cs typeface="Aptos" pitchFamily="34" charset="-120"/>
+              </a:rPr>
+              <a:t>Issue log template</a:t>
+            </a:r>
+            <a:endParaRPr lang="en-US" sz="1380" dirty="0"/>
+          </a:p>
+          <a:p>
+            <a:r>
+              <a:rPr lang="en-US" sz="1380" dirty="0">
+                <a:solidFill>
+                  <a:srgbClr val="17364A"/>
+                </a:solidFill>
+                <a:latin typeface="Aptos" pitchFamily="34" charset="0"/>
+                <a:ea typeface="Aptos" pitchFamily="34" charset="-122"/>
+                <a:cs typeface="Aptos" pitchFamily="34" charset="-120"/>
+              </a:rPr>
+              <a:t>Sign-off recommendation</a:t>
+            </a:r>
+            <a:endParaRPr lang="en-US" sz="1380" dirty="0"/>
           </a:p>
         </p:txBody>
       </p:sp>
       <p:sp>
         <p:nvSpPr>
           <p:cNvPr id="16" name="Shape 14"/>
-          <p:cNvSpPr/>
-          <p:nvPr/>
-        </p:nvSpPr>
-        <p:spPr>
-          <a:xfrm>
-            <a:off x="8976360" y="3319272"/>
-            <a:ext cx="792480" cy="749808"/>
-          </a:xfrm>
-          <a:prstGeom prst="roundRect">
-            <a:avLst>
-              <a:gd name="adj" fmla="val 14634"/>
-            </a:avLst>
-          </a:prstGeom>
-          <a:solidFill>
-            <a:srgbClr val="2F8A28"/>
-          </a:solidFill>
-          <a:ln w="12700">
-            <a:solidFill>
-              <a:srgbClr val="2F8A28"/>
-            </a:solidFill>
-            <a:prstDash val="solid"/>
-          </a:ln>
-        </p:spPr>
-      </p:sp>
-      <p:sp>
-        <p:nvSpPr>
-          <p:cNvPr id="17" name="Text 15"/>
-          <p:cNvSpPr/>
-          <p:nvPr/>
-        </p:nvSpPr>
-        <p:spPr>
-          <a:xfrm>
-            <a:off x="9049512" y="3511296"/>
-            <a:ext cx="646176" cy="310896"/>
-          </a:xfrm>
-          <a:prstGeom prst="rect">
-            <a:avLst/>
-          </a:prstGeom>
-          <a:noFill/>
-          <a:ln/>
-        </p:spPr>
-        <p:txBody>
-          <a:bodyPr wrap="square" lIns="0" tIns="0" rIns="0" bIns="0" rtlCol="0" anchor="ctr">
-            <a:normAutofit/>
-          </a:bodyPr>
-          <a:lstStyle/>
-          <a:p>
-            <a:pPr algn="ctr" indent="0" marL="0">
-              <a:buNone/>
-            </a:pPr>
-            <a:r>
-              <a:rPr lang="en-US" sz="1500" b="1" dirty="0">
-                <a:solidFill>
-                  <a:srgbClr val="FFFFFF"/>
-                </a:solidFill>
-                <a:latin typeface="Aptos" pitchFamily="34" charset="0"/>
-                <a:ea typeface="Aptos" pitchFamily="34" charset="-122"/>
-                <a:cs typeface="Aptos" pitchFamily="34" charset="-120"/>
-              </a:rPr>
-              <a:t>Do</a:t>
-            </a:r>
-            <a:endParaRPr lang="en-US" sz="1500" dirty="0"/>
-          </a:p>
-        </p:txBody>
-      </p:sp>
-      <p:sp>
-        <p:nvSpPr>
-          <p:cNvPr id="18" name="Shape 16"/>
-          <p:cNvSpPr/>
-          <p:nvPr/>
-        </p:nvSpPr>
-        <p:spPr>
-          <a:xfrm>
-            <a:off x="10024872" y="3319272"/>
-            <a:ext cx="792480" cy="749808"/>
-          </a:xfrm>
-          <a:prstGeom prst="roundRect">
-            <a:avLst>
-              <a:gd name="adj" fmla="val 14634"/>
-            </a:avLst>
-          </a:prstGeom>
-          <a:solidFill>
-            <a:srgbClr val="D69A2D"/>
-          </a:solidFill>
-          <a:ln w="12700">
-            <a:solidFill>
-              <a:srgbClr val="D69A2D"/>
-            </a:solidFill>
-            <a:prstDash val="solid"/>
-          </a:ln>
-        </p:spPr>
-      </p:sp>
-      <p:sp>
-        <p:nvSpPr>
-          <p:cNvPr id="19" name="Text 17"/>
-          <p:cNvSpPr/>
-          <p:nvPr/>
-        </p:nvSpPr>
-        <p:spPr>
-          <a:xfrm>
-            <a:off x="10098024" y="3511296"/>
-            <a:ext cx="646176" cy="310896"/>
-          </a:xfrm>
-          <a:prstGeom prst="rect">
-            <a:avLst/>
-          </a:prstGeom>
-          <a:noFill/>
-          <a:ln/>
-        </p:spPr>
-        <p:txBody>
-          <a:bodyPr wrap="square" lIns="0" tIns="0" rIns="0" bIns="0" rtlCol="0" anchor="ctr">
-            <a:normAutofit/>
-          </a:bodyPr>
-          <a:lstStyle/>
-          <a:p>
-            <a:pPr algn="ctr" indent="0" marL="0">
-              <a:buNone/>
-            </a:pPr>
-            <a:r>
-              <a:rPr lang="en-US" sz="1500" b="1" dirty="0">
-                <a:solidFill>
-                  <a:srgbClr val="FFFFFF"/>
-                </a:solidFill>
-                <a:latin typeface="Aptos" pitchFamily="34" charset="0"/>
-                <a:ea typeface="Aptos" pitchFamily="34" charset="-122"/>
-                <a:cs typeface="Aptos" pitchFamily="34" charset="-120"/>
-              </a:rPr>
-              <a:t>Review</a:t>
-            </a:r>
-            <a:endParaRPr lang="en-US" sz="1500" dirty="0"/>
-          </a:p>
-        </p:txBody>
-      </p:sp>
-      <p:sp>
-        <p:nvSpPr>
-          <p:cNvPr id="20" name="Shape 18"/>
-          <p:cNvSpPr/>
-          <p:nvPr/>
-        </p:nvSpPr>
-        <p:spPr>
-          <a:xfrm>
-            <a:off x="8293608" y="4389120"/>
-            <a:ext cx="2157984" cy="0"/>
-          </a:xfrm>
-          <a:prstGeom prst="line">
-            <a:avLst/>
-          </a:prstGeom>
-          <a:noFill/>
-          <a:ln w="25400">
-            <a:solidFill>
-              <a:srgbClr val="8ABBD8"/>
-            </a:solidFill>
-            <a:prstDash val="solid"/>
-          </a:ln>
-        </p:spPr>
-      </p:sp>
-      <p:sp>
-        <p:nvSpPr>
-          <p:cNvPr id="21" name="Text 19"/>
-          <p:cNvSpPr/>
-          <p:nvPr/>
-        </p:nvSpPr>
-        <p:spPr>
-          <a:xfrm>
-            <a:off x="7909560" y="3977640"/>
-            <a:ext cx="2926080" cy="182880"/>
-          </a:xfrm>
-          <a:prstGeom prst="rect">
-            <a:avLst/>
-          </a:prstGeom>
-          <a:noFill/>
-          <a:ln/>
-        </p:spPr>
-        <p:txBody>
-          <a:bodyPr wrap="square" lIns="0" tIns="0" rIns="0" bIns="0" rtlCol="0" anchor="ctr"/>
-          <a:lstStyle/>
-          <a:p>
-            <a:pPr algn="ctr" indent="0" marL="0">
-              <a:buNone/>
-            </a:pPr>
-            <a:r>
-              <a:rPr lang="en-US" sz="1000" dirty="0">
-                <a:solidFill>
-                  <a:srgbClr val="003A63"/>
-                </a:solidFill>
-                <a:latin typeface="Aptos" pitchFamily="34" charset="0"/>
-                <a:ea typeface="Aptos" pitchFamily="34" charset="-122"/>
-                <a:cs typeface="Aptos" pitchFamily="34" charset="-120"/>
-              </a:rPr>
-              <a:t>Dependencies visible</a:t>
-            </a:r>
-            <a:endParaRPr lang="en-US" sz="1000" dirty="0"/>
-          </a:p>
-        </p:txBody>
-      </p:sp>
-      <p:sp>
-        <p:nvSpPr>
-          <p:cNvPr id="22" name="Shape 20"/>
           <p:cNvSpPr/>
           <p:nvPr/>
         </p:nvSpPr>
@@ -9966,7 +9025,7 @@
       </p:sp>
       <p:sp>
         <p:nvSpPr>
-          <p:cNvPr id="23" name="Text 21"/>
+          <p:cNvPr id="17" name="Text 15"/>
           <p:cNvSpPr/>
           <p:nvPr/>
         </p:nvSpPr>
@@ -10005,7 +9064,7 @@
       </p:sp>
       <p:sp>
         <p:nvSpPr>
-          <p:cNvPr id="24" name="Text 22"/>
+          <p:cNvPr id="18" name="Text 16"/>
           <p:cNvSpPr/>
           <p:nvPr/>
         </p:nvSpPr>
@@ -10513,13 +9572,11 @@
             </a:avLst>
           </a:prstGeom>
           <a:solidFill>
-            <a:srgbClr val="FFFFFF">
-              <a:alpha val="88000"/>
-            </a:srgbClr>
+            <a:srgbClr val="FFFFFF"/>
           </a:solidFill>
           <a:ln w="12700">
             <a:solidFill>
-              <a:srgbClr val="D6E8F2"/>
+              <a:srgbClr val="B9D7E6"/>
             </a:solidFill>
             <a:prstDash val="solid"/>
           </a:ln>
@@ -10527,30 +9584,42 @@
       </p:sp>
       <p:sp>
         <p:nvSpPr>
-          <p:cNvPr id="14" name="Shape 12"/>
-          <p:cNvSpPr/>
-          <p:nvPr/>
-        </p:nvSpPr>
-        <p:spPr>
-          <a:xfrm>
-            <a:off x="7927848" y="3319272"/>
-            <a:ext cx="792480" cy="749808"/>
-          </a:xfrm>
-          <a:prstGeom prst="roundRect">
-            <a:avLst>
-              <a:gd name="adj" fmla="val 14634"/>
-            </a:avLst>
-          </a:prstGeom>
-          <a:solidFill>
-            <a:srgbClr val="0068B7"/>
-          </a:solidFill>
-          <a:ln w="12700">
-            <a:solidFill>
-              <a:srgbClr val="0068B7"/>
-            </a:solidFill>
-            <a:prstDash val="solid"/>
-          </a:ln>
-        </p:spPr>
+          <p:cNvPr id="14" name="Text 12"/>
+          <p:cNvSpPr/>
+          <p:nvPr/>
+        </p:nvSpPr>
+        <p:spPr>
+          <a:xfrm>
+            <a:off x="7799832" y="2935224"/>
+            <a:ext cx="3145536" cy="256032"/>
+          </a:xfrm>
+          <a:prstGeom prst="rect">
+            <a:avLst/>
+          </a:prstGeom>
+          <a:noFill/>
+          <a:ln/>
+        </p:spPr>
+        <p:txBody>
+          <a:bodyPr wrap="square" lIns="0" tIns="0" rIns="0" bIns="0" rtlCol="0" anchor="ctr"/>
+          <a:lstStyle/>
+          <a:p>
+            <a:pPr indent="0" marL="0">
+              <a:buNone/>
+            </a:pPr>
+            <a:r>
+              <a:rPr lang="en-US" sz="1300" b="1" dirty="0">
+                <a:solidFill>
+                  <a:srgbClr val="0068B7"/>
+                </a:solidFill>
+                <a:latin typeface="Aptos" pitchFamily="34" charset="0"/>
+                <a:ea typeface="Aptos" pitchFamily="34" charset="-122"/>
+                <a:cs typeface="Aptos" pitchFamily="34" charset="-120"/>
+              </a:rPr>
+              <a:t>Concept checkpoints</a:t>
+            </a:r>
+            <a:endParaRPr lang="en-US" sz="1300" dirty="0"/>
+          </a:p>
+        </p:txBody>
       </p:sp>
       <p:sp>
         <p:nvSpPr>
@@ -10560,240 +9629,53 @@
         </p:nvSpPr>
         <p:spPr>
           <a:xfrm>
-            <a:off x="8001000" y="3511296"/>
-            <a:ext cx="646176" cy="310896"/>
-          </a:xfrm>
-          <a:prstGeom prst="rect">
-            <a:avLst/>
-          </a:prstGeom>
-          <a:noFill/>
-          <a:ln/>
-        </p:spPr>
-        <p:txBody>
-          <a:bodyPr wrap="square" lIns="0" tIns="0" rIns="0" bIns="0" rtlCol="0" anchor="ctr">
+            <a:off x="7818120" y="3300984"/>
+            <a:ext cx="3090672" cy="877824"/>
+          </a:xfrm>
+          <a:prstGeom prst="rect">
+            <a:avLst/>
+          </a:prstGeom>
+          <a:noFill/>
+          <a:ln/>
+        </p:spPr>
+        <p:txBody>
+          <a:bodyPr wrap="square" lIns="254" tIns="254" rIns="254" bIns="254" rtlCol="0" anchor="t">
             <a:normAutofit/>
           </a:bodyPr>
           <a:lstStyle/>
           <a:p>
-            <a:pPr algn="ctr" indent="0" marL="0">
-              <a:buNone/>
-            </a:pPr>
-            <a:r>
-              <a:rPr lang="en-US" sz="1500" b="1" dirty="0">
-                <a:solidFill>
-                  <a:srgbClr val="FFFFFF"/>
-                </a:solidFill>
-                <a:latin typeface="Aptos" pitchFamily="34" charset="0"/>
-                <a:ea typeface="Aptos" pitchFamily="34" charset="-122"/>
-                <a:cs typeface="Aptos" pitchFamily="34" charset="-120"/>
-              </a:rPr>
-              <a:t>Plan</a:t>
-            </a:r>
-            <a:endParaRPr lang="en-US" sz="1500" dirty="0"/>
+            <a:r>
+              <a:rPr lang="en-US" sz="1380" dirty="0">
+                <a:solidFill>
+                  <a:srgbClr val="17364A"/>
+                </a:solidFill>
+                <a:latin typeface="Aptos" pitchFamily="34" charset="0"/>
+                <a:ea typeface="Aptos" pitchFamily="34" charset="-122"/>
+                <a:cs typeface="Aptos" pitchFamily="34" charset="-120"/>
+              </a:rPr>
+              <a:t>Issue log template</a:t>
+            </a:r>
+            <a:endParaRPr lang="en-US" sz="1380" dirty="0"/>
+          </a:p>
+          <a:p>
+            <a:r>
+              <a:rPr lang="en-US" sz="1380" dirty="0">
+                <a:solidFill>
+                  <a:srgbClr val="17364A"/>
+                </a:solidFill>
+                <a:latin typeface="Aptos" pitchFamily="34" charset="0"/>
+                <a:ea typeface="Aptos" pitchFamily="34" charset="-122"/>
+                <a:cs typeface="Aptos" pitchFamily="34" charset="-120"/>
+              </a:rPr>
+              <a:t>Sign-off recommendation</a:t>
+            </a:r>
+            <a:endParaRPr lang="en-US" sz="1380" dirty="0"/>
           </a:p>
         </p:txBody>
       </p:sp>
       <p:sp>
         <p:nvSpPr>
           <p:cNvPr id="16" name="Shape 14"/>
-          <p:cNvSpPr/>
-          <p:nvPr/>
-        </p:nvSpPr>
-        <p:spPr>
-          <a:xfrm>
-            <a:off x="8976360" y="3319272"/>
-            <a:ext cx="792480" cy="749808"/>
-          </a:xfrm>
-          <a:prstGeom prst="roundRect">
-            <a:avLst>
-              <a:gd name="adj" fmla="val 14634"/>
-            </a:avLst>
-          </a:prstGeom>
-          <a:solidFill>
-            <a:srgbClr val="2F8A28"/>
-          </a:solidFill>
-          <a:ln w="12700">
-            <a:solidFill>
-              <a:srgbClr val="2F8A28"/>
-            </a:solidFill>
-            <a:prstDash val="solid"/>
-          </a:ln>
-        </p:spPr>
-      </p:sp>
-      <p:sp>
-        <p:nvSpPr>
-          <p:cNvPr id="17" name="Text 15"/>
-          <p:cNvSpPr/>
-          <p:nvPr/>
-        </p:nvSpPr>
-        <p:spPr>
-          <a:xfrm>
-            <a:off x="9049512" y="3511296"/>
-            <a:ext cx="646176" cy="310896"/>
-          </a:xfrm>
-          <a:prstGeom prst="rect">
-            <a:avLst/>
-          </a:prstGeom>
-          <a:noFill/>
-          <a:ln/>
-        </p:spPr>
-        <p:txBody>
-          <a:bodyPr wrap="square" lIns="0" tIns="0" rIns="0" bIns="0" rtlCol="0" anchor="ctr">
-            <a:normAutofit/>
-          </a:bodyPr>
-          <a:lstStyle/>
-          <a:p>
-            <a:pPr algn="ctr" indent="0" marL="0">
-              <a:buNone/>
-            </a:pPr>
-            <a:r>
-              <a:rPr lang="en-US" sz="1500" b="1" dirty="0">
-                <a:solidFill>
-                  <a:srgbClr val="FFFFFF"/>
-                </a:solidFill>
-                <a:latin typeface="Aptos" pitchFamily="34" charset="0"/>
-                <a:ea typeface="Aptos" pitchFamily="34" charset="-122"/>
-                <a:cs typeface="Aptos" pitchFamily="34" charset="-120"/>
-              </a:rPr>
-              <a:t>Do</a:t>
-            </a:r>
-            <a:endParaRPr lang="en-US" sz="1500" dirty="0"/>
-          </a:p>
-        </p:txBody>
-      </p:sp>
-      <p:sp>
-        <p:nvSpPr>
-          <p:cNvPr id="18" name="Shape 16"/>
-          <p:cNvSpPr/>
-          <p:nvPr/>
-        </p:nvSpPr>
-        <p:spPr>
-          <a:xfrm>
-            <a:off x="10024872" y="3319272"/>
-            <a:ext cx="792480" cy="749808"/>
-          </a:xfrm>
-          <a:prstGeom prst="roundRect">
-            <a:avLst>
-              <a:gd name="adj" fmla="val 14634"/>
-            </a:avLst>
-          </a:prstGeom>
-          <a:solidFill>
-            <a:srgbClr val="D69A2D"/>
-          </a:solidFill>
-          <a:ln w="12700">
-            <a:solidFill>
-              <a:srgbClr val="D69A2D"/>
-            </a:solidFill>
-            <a:prstDash val="solid"/>
-          </a:ln>
-        </p:spPr>
-      </p:sp>
-      <p:sp>
-        <p:nvSpPr>
-          <p:cNvPr id="19" name="Text 17"/>
-          <p:cNvSpPr/>
-          <p:nvPr/>
-        </p:nvSpPr>
-        <p:spPr>
-          <a:xfrm>
-            <a:off x="10098024" y="3511296"/>
-            <a:ext cx="646176" cy="310896"/>
-          </a:xfrm>
-          <a:prstGeom prst="rect">
-            <a:avLst/>
-          </a:prstGeom>
-          <a:noFill/>
-          <a:ln/>
-        </p:spPr>
-        <p:txBody>
-          <a:bodyPr wrap="square" lIns="0" tIns="0" rIns="0" bIns="0" rtlCol="0" anchor="ctr">
-            <a:normAutofit/>
-          </a:bodyPr>
-          <a:lstStyle/>
-          <a:p>
-            <a:pPr algn="ctr" indent="0" marL="0">
-              <a:buNone/>
-            </a:pPr>
-            <a:r>
-              <a:rPr lang="en-US" sz="1500" b="1" dirty="0">
-                <a:solidFill>
-                  <a:srgbClr val="FFFFFF"/>
-                </a:solidFill>
-                <a:latin typeface="Aptos" pitchFamily="34" charset="0"/>
-                <a:ea typeface="Aptos" pitchFamily="34" charset="-122"/>
-                <a:cs typeface="Aptos" pitchFamily="34" charset="-120"/>
-              </a:rPr>
-              <a:t>Review</a:t>
-            </a:r>
-            <a:endParaRPr lang="en-US" sz="1500" dirty="0"/>
-          </a:p>
-        </p:txBody>
-      </p:sp>
-      <p:sp>
-        <p:nvSpPr>
-          <p:cNvPr id="20" name="Shape 18"/>
-          <p:cNvSpPr/>
-          <p:nvPr/>
-        </p:nvSpPr>
-        <p:spPr>
-          <a:xfrm>
-            <a:off x="8293608" y="4389120"/>
-            <a:ext cx="2157984" cy="0"/>
-          </a:xfrm>
-          <a:prstGeom prst="line">
-            <a:avLst/>
-          </a:prstGeom>
-          <a:noFill/>
-          <a:ln w="25400">
-            <a:solidFill>
-              <a:srgbClr val="8ABBD8"/>
-            </a:solidFill>
-            <a:prstDash val="solid"/>
-          </a:ln>
-        </p:spPr>
-      </p:sp>
-      <p:sp>
-        <p:nvSpPr>
-          <p:cNvPr id="21" name="Text 19"/>
-          <p:cNvSpPr/>
-          <p:nvPr/>
-        </p:nvSpPr>
-        <p:spPr>
-          <a:xfrm>
-            <a:off x="7909560" y="3977640"/>
-            <a:ext cx="2926080" cy="182880"/>
-          </a:xfrm>
-          <a:prstGeom prst="rect">
-            <a:avLst/>
-          </a:prstGeom>
-          <a:noFill/>
-          <a:ln/>
-        </p:spPr>
-        <p:txBody>
-          <a:bodyPr wrap="square" lIns="0" tIns="0" rIns="0" bIns="0" rtlCol="0" anchor="ctr"/>
-          <a:lstStyle/>
-          <a:p>
-            <a:pPr algn="ctr" indent="0" marL="0">
-              <a:buNone/>
-            </a:pPr>
-            <a:r>
-              <a:rPr lang="en-US" sz="1000" dirty="0">
-                <a:solidFill>
-                  <a:srgbClr val="003A63"/>
-                </a:solidFill>
-                <a:latin typeface="Aptos" pitchFamily="34" charset="0"/>
-                <a:ea typeface="Aptos" pitchFamily="34" charset="-122"/>
-                <a:cs typeface="Aptos" pitchFamily="34" charset="-120"/>
-              </a:rPr>
-              <a:t>Dependencies visible</a:t>
-            </a:r>
-            <a:endParaRPr lang="en-US" sz="1000" dirty="0"/>
-          </a:p>
-        </p:txBody>
-      </p:sp>
-      <p:sp>
-        <p:nvSpPr>
-          <p:cNvPr id="22" name="Shape 20"/>
           <p:cNvSpPr/>
           <p:nvPr/>
         </p:nvSpPr>
@@ -10820,7 +9702,7 @@
       </p:sp>
       <p:sp>
         <p:nvSpPr>
-          <p:cNvPr id="23" name="Text 21"/>
+          <p:cNvPr id="17" name="Text 15"/>
           <p:cNvSpPr/>
           <p:nvPr/>
         </p:nvSpPr>
@@ -10859,7 +9741,7 @@
       </p:sp>
       <p:sp>
         <p:nvSpPr>
-          <p:cNvPr id="24" name="Text 22"/>
+          <p:cNvPr id="18" name="Text 16"/>
           <p:cNvSpPr/>
           <p:nvPr/>
         </p:nvSpPr>
@@ -11392,20 +10274,20 @@
         </p:nvSpPr>
         <p:spPr>
           <a:xfrm>
-            <a:off x="7635240" y="3730752"/>
-            <a:ext cx="1033272" cy="749808"/>
+            <a:off x="7909560" y="3675888"/>
+            <a:ext cx="3154680" cy="1691640"/>
           </a:xfrm>
           <a:prstGeom prst="roundRect">
             <a:avLst>
-              <a:gd name="adj" fmla="val 14634"/>
+              <a:gd name="adj" fmla="val 6486"/>
             </a:avLst>
           </a:prstGeom>
           <a:solidFill>
-            <a:srgbClr val="0068B7"/>
+            <a:srgbClr val="FFFFFF"/>
           </a:solidFill>
           <a:ln w="12700">
             <a:solidFill>
-              <a:srgbClr val="0068B7"/>
+              <a:srgbClr val="B9D7E6"/>
             </a:solidFill>
             <a:prstDash val="solid"/>
           </a:ln>
@@ -11419,172 +10301,100 @@
         </p:nvSpPr>
         <p:spPr>
           <a:xfrm>
-            <a:off x="7708392" y="3922776"/>
-            <a:ext cx="886968" cy="310896"/>
-          </a:xfrm>
-          <a:prstGeom prst="rect">
-            <a:avLst/>
-          </a:prstGeom>
-          <a:noFill/>
-          <a:ln/>
-        </p:spPr>
-        <p:txBody>
-          <a:bodyPr wrap="square" lIns="0" tIns="0" rIns="0" bIns="0" rtlCol="0" anchor="ctr">
+            <a:off x="8074152" y="3822192"/>
+            <a:ext cx="2825496" cy="256032"/>
+          </a:xfrm>
+          <a:prstGeom prst="rect">
+            <a:avLst/>
+          </a:prstGeom>
+          <a:noFill/>
+          <a:ln/>
+        </p:spPr>
+        <p:txBody>
+          <a:bodyPr wrap="square" lIns="0" tIns="0" rIns="0" bIns="0" rtlCol="0" anchor="ctr"/>
+          <a:lstStyle/>
+          <a:p>
+            <a:pPr indent="0" marL="0">
+              <a:buNone/>
+            </a:pPr>
+            <a:r>
+              <a:rPr lang="en-US" sz="1300" b="1" dirty="0">
+                <a:solidFill>
+                  <a:srgbClr val="0068B7"/>
+                </a:solidFill>
+                <a:latin typeface="Aptos" pitchFamily="34" charset="0"/>
+                <a:ea typeface="Aptos" pitchFamily="34" charset="-122"/>
+                <a:cs typeface="Aptos" pitchFamily="34" charset="-120"/>
+              </a:rPr>
+              <a:t>Learning sequence</a:t>
+            </a:r>
+            <a:endParaRPr lang="en-US" sz="1300" dirty="0"/>
+          </a:p>
+        </p:txBody>
+      </p:sp>
+      <p:sp>
+        <p:nvSpPr>
+          <p:cNvPr id="15" name="Text 13"/>
+          <p:cNvSpPr/>
+          <p:nvPr/>
+        </p:nvSpPr>
+        <p:spPr>
+          <a:xfrm>
+            <a:off x="8092440" y="4187952"/>
+            <a:ext cx="2770632" cy="1033272"/>
+          </a:xfrm>
+          <a:prstGeom prst="rect">
+            <a:avLst/>
+          </a:prstGeom>
+          <a:noFill/>
+          <a:ln/>
+        </p:spPr>
+        <p:txBody>
+          <a:bodyPr wrap="square" lIns="254" tIns="254" rIns="254" bIns="254" rtlCol="0" anchor="t">
             <a:normAutofit/>
           </a:bodyPr>
           <a:lstStyle/>
           <a:p>
-            <a:pPr algn="ctr" indent="0" marL="0">
-              <a:buNone/>
-            </a:pPr>
-            <a:r>
-              <a:rPr lang="en-US" sz="1500" b="1" dirty="0">
-                <a:solidFill>
-                  <a:srgbClr val="FFFFFF"/>
-                </a:solidFill>
-                <a:latin typeface="Aptos" pitchFamily="34" charset="0"/>
-                <a:ea typeface="Aptos" pitchFamily="34" charset="-122"/>
-                <a:cs typeface="Aptos" pitchFamily="34" charset="-120"/>
-              </a:rPr>
-              <a:t>Learn</a:t>
-            </a:r>
-            <a:endParaRPr lang="en-US" sz="1500" dirty="0"/>
-          </a:p>
-        </p:txBody>
-      </p:sp>
-      <p:sp>
-        <p:nvSpPr>
-          <p:cNvPr id="15" name="Shape 13"/>
-          <p:cNvSpPr/>
-          <p:nvPr/>
-        </p:nvSpPr>
-        <p:spPr>
-          <a:xfrm>
-            <a:off x="8924544" y="3730752"/>
-            <a:ext cx="1033272" cy="749808"/>
-          </a:xfrm>
-          <a:prstGeom prst="roundRect">
-            <a:avLst>
-              <a:gd name="adj" fmla="val 14634"/>
-            </a:avLst>
-          </a:prstGeom>
-          <a:solidFill>
-            <a:srgbClr val="2F8A28"/>
-          </a:solidFill>
-          <a:ln w="12700">
-            <a:solidFill>
-              <a:srgbClr val="2F8A28"/>
-            </a:solidFill>
-            <a:prstDash val="solid"/>
-          </a:ln>
-        </p:spPr>
-      </p:sp>
-      <p:sp>
-        <p:nvSpPr>
-          <p:cNvPr id="16" name="Text 14"/>
-          <p:cNvSpPr/>
-          <p:nvPr/>
-        </p:nvSpPr>
-        <p:spPr>
-          <a:xfrm>
-            <a:off x="8997696" y="3922776"/>
-            <a:ext cx="886968" cy="310896"/>
-          </a:xfrm>
-          <a:prstGeom prst="rect">
-            <a:avLst/>
-          </a:prstGeom>
-          <a:noFill/>
-          <a:ln/>
-        </p:spPr>
-        <p:txBody>
-          <a:bodyPr wrap="square" lIns="0" tIns="0" rIns="0" bIns="0" rtlCol="0" anchor="ctr">
-            <a:normAutofit/>
-          </a:bodyPr>
-          <a:lstStyle/>
-          <a:p>
-            <a:pPr algn="ctr" indent="0" marL="0">
-              <a:buNone/>
-            </a:pPr>
-            <a:r>
-              <a:rPr lang="en-US" sz="1500" b="1" dirty="0">
-                <a:solidFill>
-                  <a:srgbClr val="FFFFFF"/>
-                </a:solidFill>
-                <a:latin typeface="Aptos" pitchFamily="34" charset="0"/>
-                <a:ea typeface="Aptos" pitchFamily="34" charset="-122"/>
-                <a:cs typeface="Aptos" pitchFamily="34" charset="-120"/>
-              </a:rPr>
-              <a:t>Apply</a:t>
-            </a:r>
-            <a:endParaRPr lang="en-US" sz="1500" dirty="0"/>
-          </a:p>
-        </p:txBody>
-      </p:sp>
-      <p:sp>
-        <p:nvSpPr>
-          <p:cNvPr id="17" name="Shape 15"/>
-          <p:cNvSpPr/>
-          <p:nvPr/>
-        </p:nvSpPr>
-        <p:spPr>
-          <a:xfrm>
-            <a:off x="10213848" y="3730752"/>
-            <a:ext cx="1033272" cy="749808"/>
-          </a:xfrm>
-          <a:prstGeom prst="roundRect">
-            <a:avLst>
-              <a:gd name="adj" fmla="val 14634"/>
-            </a:avLst>
-          </a:prstGeom>
-          <a:solidFill>
-            <a:srgbClr val="6A4CA3"/>
-          </a:solidFill>
-          <a:ln w="12700">
-            <a:solidFill>
-              <a:srgbClr val="6A4CA3"/>
-            </a:solidFill>
-            <a:prstDash val="solid"/>
-          </a:ln>
-        </p:spPr>
-      </p:sp>
-      <p:sp>
-        <p:nvSpPr>
-          <p:cNvPr id="18" name="Text 16"/>
-          <p:cNvSpPr/>
-          <p:nvPr/>
-        </p:nvSpPr>
-        <p:spPr>
-          <a:xfrm>
-            <a:off x="10287000" y="3922776"/>
-            <a:ext cx="886968" cy="310896"/>
-          </a:xfrm>
-          <a:prstGeom prst="rect">
-            <a:avLst/>
-          </a:prstGeom>
-          <a:noFill/>
-          <a:ln/>
-        </p:spPr>
-        <p:txBody>
-          <a:bodyPr wrap="square" lIns="0" tIns="0" rIns="0" bIns="0" rtlCol="0" anchor="ctr">
-            <a:normAutofit/>
-          </a:bodyPr>
-          <a:lstStyle/>
-          <a:p>
-            <a:pPr algn="ctr" indent="0" marL="0">
-              <a:buNone/>
-            </a:pPr>
-            <a:r>
-              <a:rPr lang="en-US" sz="1500" b="1" dirty="0">
-                <a:solidFill>
-                  <a:srgbClr val="FFFFFF"/>
-                </a:solidFill>
-                <a:latin typeface="Aptos" pitchFamily="34" charset="0"/>
-                <a:ea typeface="Aptos" pitchFamily="34" charset="-122"/>
-                <a:cs typeface="Aptos" pitchFamily="34" charset="-120"/>
-              </a:rPr>
-              <a:t>Document</a:t>
-            </a:r>
-            <a:endParaRPr lang="en-US" sz="1500" dirty="0"/>
+            <a:r>
+              <a:rPr lang="en-US" sz="1380" dirty="0">
+                <a:solidFill>
+                  <a:srgbClr val="17364A"/>
+                </a:solidFill>
+                <a:latin typeface="Aptos" pitchFamily="34" charset="0"/>
+                <a:ea typeface="Aptos" pitchFamily="34" charset="-122"/>
+                <a:cs typeface="Aptos" pitchFamily="34" charset="-120"/>
+              </a:rPr>
+              <a:t>Read the module for shared vocabulary and context.</a:t>
+            </a:r>
+            <a:endParaRPr lang="en-US" sz="1380" dirty="0"/>
+          </a:p>
+          <a:p>
+            <a:r>
+              <a:rPr lang="en-US" sz="1380" dirty="0">
+                <a:solidFill>
+                  <a:srgbClr val="17364A"/>
+                </a:solidFill>
+                <a:latin typeface="Aptos" pitchFamily="34" charset="0"/>
+                <a:ea typeface="Aptos" pitchFamily="34" charset="-122"/>
+                <a:cs typeface="Aptos" pitchFamily="34" charset="-120"/>
+              </a:rPr>
+              <a:t>Complete the practical exercise to apply the concept.</a:t>
+            </a:r>
+            <a:endParaRPr lang="en-US" sz="1380" dirty="0"/>
+          </a:p>
+          <a:p>
+            <a:r>
+              <a:rPr lang="en-US" sz="1380" dirty="0">
+                <a:solidFill>
+                  <a:srgbClr val="17364A"/>
+                </a:solidFill>
+                <a:latin typeface="Aptos" pitchFamily="34" charset="0"/>
+                <a:ea typeface="Aptos" pitchFamily="34" charset="-122"/>
+                <a:cs typeface="Aptos" pitchFamily="34" charset="-120"/>
+              </a:rPr>
+              <a:t>Use the notes and references for deeper review.</a:t>
+            </a:r>
+            <a:endParaRPr lang="en-US" sz="1380" dirty="0"/>
           </a:p>
         </p:txBody>
       </p:sp>
@@ -12057,13 +10867,11 @@
             </a:avLst>
           </a:prstGeom>
           <a:solidFill>
-            <a:srgbClr val="FFFFFF">
-              <a:alpha val="88000"/>
-            </a:srgbClr>
+            <a:srgbClr val="FFFFFF"/>
           </a:solidFill>
           <a:ln w="12700">
             <a:solidFill>
-              <a:srgbClr val="D6E8F2"/>
+              <a:srgbClr val="B9D7E6"/>
             </a:solidFill>
             <a:prstDash val="solid"/>
           </a:ln>
@@ -12071,30 +10879,42 @@
       </p:sp>
       <p:sp>
         <p:nvSpPr>
-          <p:cNvPr id="14" name="Shape 12"/>
-          <p:cNvSpPr/>
-          <p:nvPr/>
-        </p:nvSpPr>
-        <p:spPr>
-          <a:xfrm>
-            <a:off x="7927848" y="3319272"/>
-            <a:ext cx="792480" cy="749808"/>
-          </a:xfrm>
-          <a:prstGeom prst="roundRect">
-            <a:avLst>
-              <a:gd name="adj" fmla="val 14634"/>
-            </a:avLst>
-          </a:prstGeom>
-          <a:solidFill>
-            <a:srgbClr val="0068B7"/>
-          </a:solidFill>
-          <a:ln w="12700">
-            <a:solidFill>
-              <a:srgbClr val="0068B7"/>
-            </a:solidFill>
-            <a:prstDash val="solid"/>
-          </a:ln>
-        </p:spPr>
+          <p:cNvPr id="14" name="Text 12"/>
+          <p:cNvSpPr/>
+          <p:nvPr/>
+        </p:nvSpPr>
+        <p:spPr>
+          <a:xfrm>
+            <a:off x="7799832" y="2935224"/>
+            <a:ext cx="3145536" cy="256032"/>
+          </a:xfrm>
+          <a:prstGeom prst="rect">
+            <a:avLst/>
+          </a:prstGeom>
+          <a:noFill/>
+          <a:ln/>
+        </p:spPr>
+        <p:txBody>
+          <a:bodyPr wrap="square" lIns="0" tIns="0" rIns="0" bIns="0" rtlCol="0" anchor="ctr"/>
+          <a:lstStyle/>
+          <a:p>
+            <a:pPr indent="0" marL="0">
+              <a:buNone/>
+            </a:pPr>
+            <a:r>
+              <a:rPr lang="en-US" sz="1300" b="1" dirty="0">
+                <a:solidFill>
+                  <a:srgbClr val="0068B7"/>
+                </a:solidFill>
+                <a:latin typeface="Aptos" pitchFamily="34" charset="0"/>
+                <a:ea typeface="Aptos" pitchFamily="34" charset="-122"/>
+                <a:cs typeface="Aptos" pitchFamily="34" charset="-120"/>
+              </a:rPr>
+              <a:t>Concept checkpoints</a:t>
+            </a:r>
+            <a:endParaRPr lang="en-US" sz="1300" dirty="0"/>
+          </a:p>
+        </p:txBody>
       </p:sp>
       <p:sp>
         <p:nvSpPr>
@@ -12104,240 +10924,67 @@
         </p:nvSpPr>
         <p:spPr>
           <a:xfrm>
-            <a:off x="8001000" y="3511296"/>
-            <a:ext cx="646176" cy="310896"/>
-          </a:xfrm>
-          <a:prstGeom prst="rect">
-            <a:avLst/>
-          </a:prstGeom>
-          <a:noFill/>
-          <a:ln/>
-        </p:spPr>
-        <p:txBody>
-          <a:bodyPr wrap="square" lIns="0" tIns="0" rIns="0" bIns="0" rtlCol="0" anchor="ctr">
+            <a:off x="7818120" y="3300984"/>
+            <a:ext cx="3090672" cy="877824"/>
+          </a:xfrm>
+          <a:prstGeom prst="rect">
+            <a:avLst/>
+          </a:prstGeom>
+          <a:noFill/>
+          <a:ln/>
+        </p:spPr>
+        <p:txBody>
+          <a:bodyPr wrap="square" lIns="254" tIns="254" rIns="254" bIns="254" rtlCol="0" anchor="t">
             <a:normAutofit/>
           </a:bodyPr>
           <a:lstStyle/>
           <a:p>
-            <a:pPr algn="ctr" indent="0" marL="0">
-              <a:buNone/>
-            </a:pPr>
-            <a:r>
-              <a:rPr lang="en-US" sz="1500" b="1" dirty="0">
-                <a:solidFill>
-                  <a:srgbClr val="FFFFFF"/>
-                </a:solidFill>
-                <a:latin typeface="Aptos" pitchFamily="34" charset="0"/>
-                <a:ea typeface="Aptos" pitchFamily="34" charset="-122"/>
-                <a:cs typeface="Aptos" pitchFamily="34" charset="-120"/>
-              </a:rPr>
-              <a:t>Plan</a:t>
-            </a:r>
-            <a:endParaRPr lang="en-US" sz="1500" dirty="0"/>
+            <a:r>
+              <a:rPr lang="en-US" sz="1380" dirty="0">
+                <a:solidFill>
+                  <a:srgbClr val="17364A"/>
+                </a:solidFill>
+                <a:latin typeface="Aptos" pitchFamily="34" charset="0"/>
+                <a:ea typeface="Aptos" pitchFamily="34" charset="-122"/>
+                <a:cs typeface="Aptos" pitchFamily="34" charset="-120"/>
+              </a:rPr>
+              <a:t>1.</a:t>
+            </a:r>
+            <a:endParaRPr lang="en-US" sz="1380" dirty="0"/>
+          </a:p>
+          <a:p>
+            <a:r>
+              <a:rPr lang="en-US" sz="1380" dirty="0">
+                <a:solidFill>
+                  <a:srgbClr val="17364A"/>
+                </a:solidFill>
+                <a:latin typeface="Aptos" pitchFamily="34" charset="0"/>
+                <a:ea typeface="Aptos" pitchFamily="34" charset="-122"/>
+                <a:cs typeface="Aptos" pitchFamily="34" charset="-120"/>
+              </a:rPr>
+              <a:t>What is the purpose of UAT for AI-supported workflows?</a:t>
+            </a:r>
+            <a:endParaRPr lang="en-US" sz="1380" dirty="0"/>
+          </a:p>
+          <a:p>
+            <a:r>
+              <a:rPr lang="en-US" sz="1380" dirty="0">
+                <a:solidFill>
+                  <a:srgbClr val="17364A"/>
+                </a:solidFill>
+                <a:latin typeface="Aptos" pitchFamily="34" charset="0"/>
+                <a:ea typeface="Aptos" pitchFamily="34" charset="-122"/>
+                <a:cs typeface="Aptos" pitchFamily="34" charset="-120"/>
+              </a:rPr>
+              <a:t>2.</a:t>
+            </a:r>
+            <a:endParaRPr lang="en-US" sz="1380" dirty="0"/>
           </a:p>
         </p:txBody>
       </p:sp>
       <p:sp>
         <p:nvSpPr>
           <p:cNvPr id="16" name="Shape 14"/>
-          <p:cNvSpPr/>
-          <p:nvPr/>
-        </p:nvSpPr>
-        <p:spPr>
-          <a:xfrm>
-            <a:off x="8976360" y="3319272"/>
-            <a:ext cx="792480" cy="749808"/>
-          </a:xfrm>
-          <a:prstGeom prst="roundRect">
-            <a:avLst>
-              <a:gd name="adj" fmla="val 14634"/>
-            </a:avLst>
-          </a:prstGeom>
-          <a:solidFill>
-            <a:srgbClr val="2F8A28"/>
-          </a:solidFill>
-          <a:ln w="12700">
-            <a:solidFill>
-              <a:srgbClr val="2F8A28"/>
-            </a:solidFill>
-            <a:prstDash val="solid"/>
-          </a:ln>
-        </p:spPr>
-      </p:sp>
-      <p:sp>
-        <p:nvSpPr>
-          <p:cNvPr id="17" name="Text 15"/>
-          <p:cNvSpPr/>
-          <p:nvPr/>
-        </p:nvSpPr>
-        <p:spPr>
-          <a:xfrm>
-            <a:off x="9049512" y="3511296"/>
-            <a:ext cx="646176" cy="310896"/>
-          </a:xfrm>
-          <a:prstGeom prst="rect">
-            <a:avLst/>
-          </a:prstGeom>
-          <a:noFill/>
-          <a:ln/>
-        </p:spPr>
-        <p:txBody>
-          <a:bodyPr wrap="square" lIns="0" tIns="0" rIns="0" bIns="0" rtlCol="0" anchor="ctr">
-            <a:normAutofit/>
-          </a:bodyPr>
-          <a:lstStyle/>
-          <a:p>
-            <a:pPr algn="ctr" indent="0" marL="0">
-              <a:buNone/>
-            </a:pPr>
-            <a:r>
-              <a:rPr lang="en-US" sz="1500" b="1" dirty="0">
-                <a:solidFill>
-                  <a:srgbClr val="FFFFFF"/>
-                </a:solidFill>
-                <a:latin typeface="Aptos" pitchFamily="34" charset="0"/>
-                <a:ea typeface="Aptos" pitchFamily="34" charset="-122"/>
-                <a:cs typeface="Aptos" pitchFamily="34" charset="-120"/>
-              </a:rPr>
-              <a:t>Do</a:t>
-            </a:r>
-            <a:endParaRPr lang="en-US" sz="1500" dirty="0"/>
-          </a:p>
-        </p:txBody>
-      </p:sp>
-      <p:sp>
-        <p:nvSpPr>
-          <p:cNvPr id="18" name="Shape 16"/>
-          <p:cNvSpPr/>
-          <p:nvPr/>
-        </p:nvSpPr>
-        <p:spPr>
-          <a:xfrm>
-            <a:off x="10024872" y="3319272"/>
-            <a:ext cx="792480" cy="749808"/>
-          </a:xfrm>
-          <a:prstGeom prst="roundRect">
-            <a:avLst>
-              <a:gd name="adj" fmla="val 14634"/>
-            </a:avLst>
-          </a:prstGeom>
-          <a:solidFill>
-            <a:srgbClr val="D69A2D"/>
-          </a:solidFill>
-          <a:ln w="12700">
-            <a:solidFill>
-              <a:srgbClr val="D69A2D"/>
-            </a:solidFill>
-            <a:prstDash val="solid"/>
-          </a:ln>
-        </p:spPr>
-      </p:sp>
-      <p:sp>
-        <p:nvSpPr>
-          <p:cNvPr id="19" name="Text 17"/>
-          <p:cNvSpPr/>
-          <p:nvPr/>
-        </p:nvSpPr>
-        <p:spPr>
-          <a:xfrm>
-            <a:off x="10098024" y="3511296"/>
-            <a:ext cx="646176" cy="310896"/>
-          </a:xfrm>
-          <a:prstGeom prst="rect">
-            <a:avLst/>
-          </a:prstGeom>
-          <a:noFill/>
-          <a:ln/>
-        </p:spPr>
-        <p:txBody>
-          <a:bodyPr wrap="square" lIns="0" tIns="0" rIns="0" bIns="0" rtlCol="0" anchor="ctr">
-            <a:normAutofit/>
-          </a:bodyPr>
-          <a:lstStyle/>
-          <a:p>
-            <a:pPr algn="ctr" indent="0" marL="0">
-              <a:buNone/>
-            </a:pPr>
-            <a:r>
-              <a:rPr lang="en-US" sz="1500" b="1" dirty="0">
-                <a:solidFill>
-                  <a:srgbClr val="FFFFFF"/>
-                </a:solidFill>
-                <a:latin typeface="Aptos" pitchFamily="34" charset="0"/>
-                <a:ea typeface="Aptos" pitchFamily="34" charset="-122"/>
-                <a:cs typeface="Aptos" pitchFamily="34" charset="-120"/>
-              </a:rPr>
-              <a:t>Review</a:t>
-            </a:r>
-            <a:endParaRPr lang="en-US" sz="1500" dirty="0"/>
-          </a:p>
-        </p:txBody>
-      </p:sp>
-      <p:sp>
-        <p:nvSpPr>
-          <p:cNvPr id="20" name="Shape 18"/>
-          <p:cNvSpPr/>
-          <p:nvPr/>
-        </p:nvSpPr>
-        <p:spPr>
-          <a:xfrm>
-            <a:off x="8293608" y="4389120"/>
-            <a:ext cx="2157984" cy="0"/>
-          </a:xfrm>
-          <a:prstGeom prst="line">
-            <a:avLst/>
-          </a:prstGeom>
-          <a:noFill/>
-          <a:ln w="25400">
-            <a:solidFill>
-              <a:srgbClr val="8ABBD8"/>
-            </a:solidFill>
-            <a:prstDash val="solid"/>
-          </a:ln>
-        </p:spPr>
-      </p:sp>
-      <p:sp>
-        <p:nvSpPr>
-          <p:cNvPr id="21" name="Text 19"/>
-          <p:cNvSpPr/>
-          <p:nvPr/>
-        </p:nvSpPr>
-        <p:spPr>
-          <a:xfrm>
-            <a:off x="7909560" y="3977640"/>
-            <a:ext cx="2926080" cy="182880"/>
-          </a:xfrm>
-          <a:prstGeom prst="rect">
-            <a:avLst/>
-          </a:prstGeom>
-          <a:noFill/>
-          <a:ln/>
-        </p:spPr>
-        <p:txBody>
-          <a:bodyPr wrap="square" lIns="0" tIns="0" rIns="0" bIns="0" rtlCol="0" anchor="ctr"/>
-          <a:lstStyle/>
-          <a:p>
-            <a:pPr algn="ctr" indent="0" marL="0">
-              <a:buNone/>
-            </a:pPr>
-            <a:r>
-              <a:rPr lang="en-US" sz="1000" dirty="0">
-                <a:solidFill>
-                  <a:srgbClr val="003A63"/>
-                </a:solidFill>
-                <a:latin typeface="Aptos" pitchFamily="34" charset="0"/>
-                <a:ea typeface="Aptos" pitchFamily="34" charset="-122"/>
-                <a:cs typeface="Aptos" pitchFamily="34" charset="-120"/>
-              </a:rPr>
-              <a:t>Dependencies visible</a:t>
-            </a:r>
-            <a:endParaRPr lang="en-US" sz="1000" dirty="0"/>
-          </a:p>
-        </p:txBody>
-      </p:sp>
-      <p:sp>
-        <p:nvSpPr>
-          <p:cNvPr id="22" name="Shape 20"/>
           <p:cNvSpPr/>
           <p:nvPr/>
         </p:nvSpPr>
@@ -12364,7 +11011,7 @@
       </p:sp>
       <p:sp>
         <p:nvSpPr>
-          <p:cNvPr id="23" name="Text 21"/>
+          <p:cNvPr id="17" name="Text 15"/>
           <p:cNvSpPr/>
           <p:nvPr/>
         </p:nvSpPr>
@@ -12403,7 +11050,7 @@
       </p:sp>
       <p:sp>
         <p:nvSpPr>
-          <p:cNvPr id="24" name="Text 22"/>
+          <p:cNvPr id="18" name="Text 16"/>
           <p:cNvSpPr/>
           <p:nvPr/>
         </p:nvSpPr>
@@ -12911,13 +11558,11 @@
             </a:avLst>
           </a:prstGeom>
           <a:solidFill>
-            <a:srgbClr val="FFFFFF">
-              <a:alpha val="88000"/>
-            </a:srgbClr>
+            <a:srgbClr val="FFFFFF"/>
           </a:solidFill>
           <a:ln w="12700">
             <a:solidFill>
-              <a:srgbClr val="D6E8F2"/>
+              <a:srgbClr val="B9D7E6"/>
             </a:solidFill>
             <a:prstDash val="solid"/>
           </a:ln>
@@ -12925,30 +11570,42 @@
       </p:sp>
       <p:sp>
         <p:nvSpPr>
-          <p:cNvPr id="14" name="Shape 12"/>
-          <p:cNvSpPr/>
-          <p:nvPr/>
-        </p:nvSpPr>
-        <p:spPr>
-          <a:xfrm>
-            <a:off x="7927848" y="3319272"/>
-            <a:ext cx="792480" cy="749808"/>
-          </a:xfrm>
-          <a:prstGeom prst="roundRect">
-            <a:avLst>
-              <a:gd name="adj" fmla="val 14634"/>
-            </a:avLst>
-          </a:prstGeom>
-          <a:solidFill>
-            <a:srgbClr val="0068B7"/>
-          </a:solidFill>
-          <a:ln w="12700">
-            <a:solidFill>
-              <a:srgbClr val="0068B7"/>
-            </a:solidFill>
-            <a:prstDash val="solid"/>
-          </a:ln>
-        </p:spPr>
+          <p:cNvPr id="14" name="Text 12"/>
+          <p:cNvSpPr/>
+          <p:nvPr/>
+        </p:nvSpPr>
+        <p:spPr>
+          <a:xfrm>
+            <a:off x="7799832" y="2935224"/>
+            <a:ext cx="3145536" cy="256032"/>
+          </a:xfrm>
+          <a:prstGeom prst="rect">
+            <a:avLst/>
+          </a:prstGeom>
+          <a:noFill/>
+          <a:ln/>
+        </p:spPr>
+        <p:txBody>
+          <a:bodyPr wrap="square" lIns="0" tIns="0" rIns="0" bIns="0" rtlCol="0" anchor="ctr"/>
+          <a:lstStyle/>
+          <a:p>
+            <a:pPr indent="0" marL="0">
+              <a:buNone/>
+            </a:pPr>
+            <a:r>
+              <a:rPr lang="en-US" sz="1300" b="1" dirty="0">
+                <a:solidFill>
+                  <a:srgbClr val="0068B7"/>
+                </a:solidFill>
+                <a:latin typeface="Aptos" pitchFamily="34" charset="0"/>
+                <a:ea typeface="Aptos" pitchFamily="34" charset="-122"/>
+                <a:cs typeface="Aptos" pitchFamily="34" charset="-120"/>
+              </a:rPr>
+              <a:t>Concept checkpoints</a:t>
+            </a:r>
+            <a:endParaRPr lang="en-US" sz="1300" dirty="0"/>
+          </a:p>
+        </p:txBody>
       </p:sp>
       <p:sp>
         <p:nvSpPr>
@@ -12958,240 +11615,67 @@
         </p:nvSpPr>
         <p:spPr>
           <a:xfrm>
-            <a:off x="8001000" y="3511296"/>
-            <a:ext cx="646176" cy="310896"/>
-          </a:xfrm>
-          <a:prstGeom prst="rect">
-            <a:avLst/>
-          </a:prstGeom>
-          <a:noFill/>
-          <a:ln/>
-        </p:spPr>
-        <p:txBody>
-          <a:bodyPr wrap="square" lIns="0" tIns="0" rIns="0" bIns="0" rtlCol="0" anchor="ctr">
+            <a:off x="7818120" y="3300984"/>
+            <a:ext cx="3090672" cy="877824"/>
+          </a:xfrm>
+          <a:prstGeom prst="rect">
+            <a:avLst/>
+          </a:prstGeom>
+          <a:noFill/>
+          <a:ln/>
+        </p:spPr>
+        <p:txBody>
+          <a:bodyPr wrap="square" lIns="254" tIns="254" rIns="254" bIns="254" rtlCol="0" anchor="t">
             <a:normAutofit/>
           </a:bodyPr>
           <a:lstStyle/>
           <a:p>
-            <a:pPr algn="ctr" indent="0" marL="0">
-              <a:buNone/>
-            </a:pPr>
-            <a:r>
-              <a:rPr lang="en-US" sz="1500" b="1" dirty="0">
-                <a:solidFill>
-                  <a:srgbClr val="FFFFFF"/>
-                </a:solidFill>
-                <a:latin typeface="Aptos" pitchFamily="34" charset="0"/>
-                <a:ea typeface="Aptos" pitchFamily="34" charset="-122"/>
-                <a:cs typeface="Aptos" pitchFamily="34" charset="-120"/>
-              </a:rPr>
-              <a:t>Plan</a:t>
-            </a:r>
-            <a:endParaRPr lang="en-US" sz="1500" dirty="0"/>
+            <a:r>
+              <a:rPr lang="en-US" sz="1380" dirty="0">
+                <a:solidFill>
+                  <a:srgbClr val="17364A"/>
+                </a:solidFill>
+                <a:latin typeface="Aptos" pitchFamily="34" charset="0"/>
+                <a:ea typeface="Aptos" pitchFamily="34" charset="-122"/>
+                <a:cs typeface="Aptos" pitchFamily="34" charset="-120"/>
+              </a:rPr>
+              <a:t>NIST Artificial Intelligence Risk Management Framework:.</a:t>
+            </a:r>
+            <a:endParaRPr lang="en-US" sz="1380" dirty="0"/>
+          </a:p>
+          <a:p>
+            <a:r>
+              <a:rPr lang="en-US" sz="1380" dirty="0">
+                <a:solidFill>
+                  <a:srgbClr val="17364A"/>
+                </a:solidFill>
+                <a:latin typeface="Aptos" pitchFamily="34" charset="0"/>
+                <a:ea typeface="Aptos" pitchFamily="34" charset="-122"/>
+                <a:cs typeface="Aptos" pitchFamily="34" charset="-120"/>
+              </a:rPr>
+              <a:t>CDC Public Health Data Strategy:.</a:t>
+            </a:r>
+            <a:endParaRPr lang="en-US" sz="1380" dirty="0"/>
+          </a:p>
+          <a:p>
+            <a:r>
+              <a:rPr lang="en-US" sz="1380" dirty="0">
+                <a:solidFill>
+                  <a:srgbClr val="17364A"/>
+                </a:solidFill>
+                <a:latin typeface="Aptos" pitchFamily="34" charset="0"/>
+                <a:ea typeface="Aptos" pitchFamily="34" charset="-122"/>
+                <a:cs typeface="Aptos" pitchFamily="34" charset="-120"/>
+              </a:rPr>
+              <a:t>Agency user acceptance testing, quality assurance, accessibility, and implementation.</a:t>
+            </a:r>
+            <a:endParaRPr lang="en-US" sz="1380" dirty="0"/>
           </a:p>
         </p:txBody>
       </p:sp>
       <p:sp>
         <p:nvSpPr>
           <p:cNvPr id="16" name="Shape 14"/>
-          <p:cNvSpPr/>
-          <p:nvPr/>
-        </p:nvSpPr>
-        <p:spPr>
-          <a:xfrm>
-            <a:off x="8976360" y="3319272"/>
-            <a:ext cx="792480" cy="749808"/>
-          </a:xfrm>
-          <a:prstGeom prst="roundRect">
-            <a:avLst>
-              <a:gd name="adj" fmla="val 14634"/>
-            </a:avLst>
-          </a:prstGeom>
-          <a:solidFill>
-            <a:srgbClr val="2F8A28"/>
-          </a:solidFill>
-          <a:ln w="12700">
-            <a:solidFill>
-              <a:srgbClr val="2F8A28"/>
-            </a:solidFill>
-            <a:prstDash val="solid"/>
-          </a:ln>
-        </p:spPr>
-      </p:sp>
-      <p:sp>
-        <p:nvSpPr>
-          <p:cNvPr id="17" name="Text 15"/>
-          <p:cNvSpPr/>
-          <p:nvPr/>
-        </p:nvSpPr>
-        <p:spPr>
-          <a:xfrm>
-            <a:off x="9049512" y="3511296"/>
-            <a:ext cx="646176" cy="310896"/>
-          </a:xfrm>
-          <a:prstGeom prst="rect">
-            <a:avLst/>
-          </a:prstGeom>
-          <a:noFill/>
-          <a:ln/>
-        </p:spPr>
-        <p:txBody>
-          <a:bodyPr wrap="square" lIns="0" tIns="0" rIns="0" bIns="0" rtlCol="0" anchor="ctr">
-            <a:normAutofit/>
-          </a:bodyPr>
-          <a:lstStyle/>
-          <a:p>
-            <a:pPr algn="ctr" indent="0" marL="0">
-              <a:buNone/>
-            </a:pPr>
-            <a:r>
-              <a:rPr lang="en-US" sz="1500" b="1" dirty="0">
-                <a:solidFill>
-                  <a:srgbClr val="FFFFFF"/>
-                </a:solidFill>
-                <a:latin typeface="Aptos" pitchFamily="34" charset="0"/>
-                <a:ea typeface="Aptos" pitchFamily="34" charset="-122"/>
-                <a:cs typeface="Aptos" pitchFamily="34" charset="-120"/>
-              </a:rPr>
-              <a:t>Do</a:t>
-            </a:r>
-            <a:endParaRPr lang="en-US" sz="1500" dirty="0"/>
-          </a:p>
-        </p:txBody>
-      </p:sp>
-      <p:sp>
-        <p:nvSpPr>
-          <p:cNvPr id="18" name="Shape 16"/>
-          <p:cNvSpPr/>
-          <p:nvPr/>
-        </p:nvSpPr>
-        <p:spPr>
-          <a:xfrm>
-            <a:off x="10024872" y="3319272"/>
-            <a:ext cx="792480" cy="749808"/>
-          </a:xfrm>
-          <a:prstGeom prst="roundRect">
-            <a:avLst>
-              <a:gd name="adj" fmla="val 14634"/>
-            </a:avLst>
-          </a:prstGeom>
-          <a:solidFill>
-            <a:srgbClr val="D69A2D"/>
-          </a:solidFill>
-          <a:ln w="12700">
-            <a:solidFill>
-              <a:srgbClr val="D69A2D"/>
-            </a:solidFill>
-            <a:prstDash val="solid"/>
-          </a:ln>
-        </p:spPr>
-      </p:sp>
-      <p:sp>
-        <p:nvSpPr>
-          <p:cNvPr id="19" name="Text 17"/>
-          <p:cNvSpPr/>
-          <p:nvPr/>
-        </p:nvSpPr>
-        <p:spPr>
-          <a:xfrm>
-            <a:off x="10098024" y="3511296"/>
-            <a:ext cx="646176" cy="310896"/>
-          </a:xfrm>
-          <a:prstGeom prst="rect">
-            <a:avLst/>
-          </a:prstGeom>
-          <a:noFill/>
-          <a:ln/>
-        </p:spPr>
-        <p:txBody>
-          <a:bodyPr wrap="square" lIns="0" tIns="0" rIns="0" bIns="0" rtlCol="0" anchor="ctr">
-            <a:normAutofit/>
-          </a:bodyPr>
-          <a:lstStyle/>
-          <a:p>
-            <a:pPr algn="ctr" indent="0" marL="0">
-              <a:buNone/>
-            </a:pPr>
-            <a:r>
-              <a:rPr lang="en-US" sz="1500" b="1" dirty="0">
-                <a:solidFill>
-                  <a:srgbClr val="FFFFFF"/>
-                </a:solidFill>
-                <a:latin typeface="Aptos" pitchFamily="34" charset="0"/>
-                <a:ea typeface="Aptos" pitchFamily="34" charset="-122"/>
-                <a:cs typeface="Aptos" pitchFamily="34" charset="-120"/>
-              </a:rPr>
-              <a:t>Review</a:t>
-            </a:r>
-            <a:endParaRPr lang="en-US" sz="1500" dirty="0"/>
-          </a:p>
-        </p:txBody>
-      </p:sp>
-      <p:sp>
-        <p:nvSpPr>
-          <p:cNvPr id="20" name="Shape 18"/>
-          <p:cNvSpPr/>
-          <p:nvPr/>
-        </p:nvSpPr>
-        <p:spPr>
-          <a:xfrm>
-            <a:off x="8293608" y="4389120"/>
-            <a:ext cx="2157984" cy="0"/>
-          </a:xfrm>
-          <a:prstGeom prst="line">
-            <a:avLst/>
-          </a:prstGeom>
-          <a:noFill/>
-          <a:ln w="25400">
-            <a:solidFill>
-              <a:srgbClr val="8ABBD8"/>
-            </a:solidFill>
-            <a:prstDash val="solid"/>
-          </a:ln>
-        </p:spPr>
-      </p:sp>
-      <p:sp>
-        <p:nvSpPr>
-          <p:cNvPr id="21" name="Text 19"/>
-          <p:cNvSpPr/>
-          <p:nvPr/>
-        </p:nvSpPr>
-        <p:spPr>
-          <a:xfrm>
-            <a:off x="7909560" y="3977640"/>
-            <a:ext cx="2926080" cy="182880"/>
-          </a:xfrm>
-          <a:prstGeom prst="rect">
-            <a:avLst/>
-          </a:prstGeom>
-          <a:noFill/>
-          <a:ln/>
-        </p:spPr>
-        <p:txBody>
-          <a:bodyPr wrap="square" lIns="0" tIns="0" rIns="0" bIns="0" rtlCol="0" anchor="ctr"/>
-          <a:lstStyle/>
-          <a:p>
-            <a:pPr algn="ctr" indent="0" marL="0">
-              <a:buNone/>
-            </a:pPr>
-            <a:r>
-              <a:rPr lang="en-US" sz="1000" dirty="0">
-                <a:solidFill>
-                  <a:srgbClr val="003A63"/>
-                </a:solidFill>
-                <a:latin typeface="Aptos" pitchFamily="34" charset="0"/>
-                <a:ea typeface="Aptos" pitchFamily="34" charset="-122"/>
-                <a:cs typeface="Aptos" pitchFamily="34" charset="-120"/>
-              </a:rPr>
-              <a:t>Dependencies visible</a:t>
-            </a:r>
-            <a:endParaRPr lang="en-US" sz="1000" dirty="0"/>
-          </a:p>
-        </p:txBody>
-      </p:sp>
-      <p:sp>
-        <p:nvSpPr>
-          <p:cNvPr id="22" name="Shape 20"/>
           <p:cNvSpPr/>
           <p:nvPr/>
         </p:nvSpPr>
@@ -13218,7 +11702,7 @@
       </p:sp>
       <p:sp>
         <p:nvSpPr>
-          <p:cNvPr id="23" name="Text 21"/>
+          <p:cNvPr id="17" name="Text 15"/>
           <p:cNvSpPr/>
           <p:nvPr/>
         </p:nvSpPr>
@@ -13257,7 +11741,7 @@
       </p:sp>
       <p:sp>
         <p:nvSpPr>
-          <p:cNvPr id="24" name="Text 22"/>
+          <p:cNvPr id="18" name="Text 16"/>
           <p:cNvSpPr/>
           <p:nvPr/>
         </p:nvSpPr>
@@ -13770,20 +12254,20 @@
         </p:nvSpPr>
         <p:spPr>
           <a:xfrm>
-            <a:off x="7818120" y="3977640"/>
-            <a:ext cx="972312" cy="749808"/>
+            <a:off x="8046720" y="3794760"/>
+            <a:ext cx="3063240" cy="1600200"/>
           </a:xfrm>
           <a:prstGeom prst="roundRect">
             <a:avLst>
-              <a:gd name="adj" fmla="val 14634"/>
+              <a:gd name="adj" fmla="val 6857"/>
             </a:avLst>
           </a:prstGeom>
           <a:solidFill>
-            <a:srgbClr val="0068B7"/>
+            <a:srgbClr val="FFFFFF"/>
           </a:solidFill>
           <a:ln w="12700">
             <a:solidFill>
-              <a:srgbClr val="0068B7"/>
+              <a:srgbClr val="B9D7E6"/>
             </a:solidFill>
             <a:prstDash val="solid"/>
           </a:ln>
@@ -13797,172 +12281,100 @@
         </p:nvSpPr>
         <p:spPr>
           <a:xfrm>
-            <a:off x="7891272" y="4169664"/>
-            <a:ext cx="826008" cy="310896"/>
-          </a:xfrm>
-          <a:prstGeom prst="rect">
-            <a:avLst/>
-          </a:prstGeom>
-          <a:noFill/>
-          <a:ln/>
-        </p:spPr>
-        <p:txBody>
-          <a:bodyPr wrap="square" lIns="0" tIns="0" rIns="0" bIns="0" rtlCol="0" anchor="ctr">
+            <a:off x="8211312" y="3941064"/>
+            <a:ext cx="2734056" cy="256032"/>
+          </a:xfrm>
+          <a:prstGeom prst="rect">
+            <a:avLst/>
+          </a:prstGeom>
+          <a:noFill/>
+          <a:ln/>
+        </p:spPr>
+        <p:txBody>
+          <a:bodyPr wrap="square" lIns="0" tIns="0" rIns="0" bIns="0" rtlCol="0" anchor="ctr"/>
+          <a:lstStyle/>
+          <a:p>
+            <a:pPr indent="0" marL="0">
+              <a:buNone/>
+            </a:pPr>
+            <a:r>
+              <a:rPr lang="en-US" sz="1300" b="1" dirty="0">
+                <a:solidFill>
+                  <a:srgbClr val="0068B7"/>
+                </a:solidFill>
+                <a:latin typeface="Aptos" pitchFamily="34" charset="0"/>
+                <a:ea typeface="Aptos" pitchFamily="34" charset="-122"/>
+                <a:cs typeface="Aptos" pitchFamily="34" charset="-120"/>
+              </a:rPr>
+              <a:t>Use the play links to</a:t>
+            </a:r>
+            <a:endParaRPr lang="en-US" sz="1300" dirty="0"/>
+          </a:p>
+        </p:txBody>
+      </p:sp>
+      <p:sp>
+        <p:nvSpPr>
+          <p:cNvPr id="15" name="Text 13"/>
+          <p:cNvSpPr/>
+          <p:nvPr/>
+        </p:nvSpPr>
+        <p:spPr>
+          <a:xfrm>
+            <a:off x="8229600" y="4306824"/>
+            <a:ext cx="2679192" cy="941832"/>
+          </a:xfrm>
+          <a:prstGeom prst="rect">
+            <a:avLst/>
+          </a:prstGeom>
+          <a:noFill/>
+          <a:ln/>
+        </p:spPr>
+        <p:txBody>
+          <a:bodyPr wrap="square" lIns="254" tIns="254" rIns="254" bIns="254" rtlCol="0" anchor="t">
             <a:normAutofit/>
           </a:bodyPr>
           <a:lstStyle/>
           <a:p>
-            <a:pPr algn="ctr" indent="0" marL="0">
-              <a:buNone/>
-            </a:pPr>
-            <a:r>
-              <a:rPr lang="en-US" sz="1500" b="1" dirty="0">
-                <a:solidFill>
-                  <a:srgbClr val="FFFFFF"/>
-                </a:solidFill>
-                <a:latin typeface="Aptos" pitchFamily="34" charset="0"/>
-                <a:ea typeface="Aptos" pitchFamily="34" charset="-122"/>
-                <a:cs typeface="Aptos" pitchFamily="34" charset="-120"/>
-              </a:rPr>
-              <a:t>Lesson</a:t>
-            </a:r>
-            <a:endParaRPr lang="en-US" sz="1500" dirty="0"/>
-          </a:p>
-        </p:txBody>
-      </p:sp>
-      <p:sp>
-        <p:nvSpPr>
-          <p:cNvPr id="15" name="Shape 13"/>
-          <p:cNvSpPr/>
-          <p:nvPr/>
-        </p:nvSpPr>
-        <p:spPr>
-          <a:xfrm>
-            <a:off x="9046464" y="3977640"/>
-            <a:ext cx="972312" cy="749808"/>
-          </a:xfrm>
-          <a:prstGeom prst="roundRect">
-            <a:avLst>
-              <a:gd name="adj" fmla="val 14634"/>
-            </a:avLst>
-          </a:prstGeom>
-          <a:solidFill>
-            <a:srgbClr val="2F8A28"/>
-          </a:solidFill>
-          <a:ln w="12700">
-            <a:solidFill>
-              <a:srgbClr val="2F8A28"/>
-            </a:solidFill>
-            <a:prstDash val="solid"/>
-          </a:ln>
-        </p:spPr>
-      </p:sp>
-      <p:sp>
-        <p:nvSpPr>
-          <p:cNvPr id="16" name="Text 14"/>
-          <p:cNvSpPr/>
-          <p:nvPr/>
-        </p:nvSpPr>
-        <p:spPr>
-          <a:xfrm>
-            <a:off x="9119616" y="4169664"/>
-            <a:ext cx="826008" cy="310896"/>
-          </a:xfrm>
-          <a:prstGeom prst="rect">
-            <a:avLst/>
-          </a:prstGeom>
-          <a:noFill/>
-          <a:ln/>
-        </p:spPr>
-        <p:txBody>
-          <a:bodyPr wrap="square" lIns="0" tIns="0" rIns="0" bIns="0" rtlCol="0" anchor="ctr">
-            <a:normAutofit/>
-          </a:bodyPr>
-          <a:lstStyle/>
-          <a:p>
-            <a:pPr algn="ctr" indent="0" marL="0">
-              <a:buNone/>
-            </a:pPr>
-            <a:r>
-              <a:rPr lang="en-US" sz="1500" b="1" dirty="0">
-                <a:solidFill>
-                  <a:srgbClr val="FFFFFF"/>
-                </a:solidFill>
-                <a:latin typeface="Aptos" pitchFamily="34" charset="0"/>
-                <a:ea typeface="Aptos" pitchFamily="34" charset="-122"/>
-                <a:cs typeface="Aptos" pitchFamily="34" charset="-120"/>
-              </a:rPr>
-              <a:t>Plays</a:t>
-            </a:r>
-            <a:endParaRPr lang="en-US" sz="1500" dirty="0"/>
-          </a:p>
-        </p:txBody>
-      </p:sp>
-      <p:sp>
-        <p:nvSpPr>
-          <p:cNvPr id="17" name="Shape 15"/>
-          <p:cNvSpPr/>
-          <p:nvPr/>
-        </p:nvSpPr>
-        <p:spPr>
-          <a:xfrm>
-            <a:off x="10274808" y="3977640"/>
-            <a:ext cx="972312" cy="749808"/>
-          </a:xfrm>
-          <a:prstGeom prst="roundRect">
-            <a:avLst>
-              <a:gd name="adj" fmla="val 14634"/>
-            </a:avLst>
-          </a:prstGeom>
-          <a:solidFill>
-            <a:srgbClr val="6A4CA3"/>
-          </a:solidFill>
-          <a:ln w="12700">
-            <a:solidFill>
-              <a:srgbClr val="6A4CA3"/>
-            </a:solidFill>
-            <a:prstDash val="solid"/>
-          </a:ln>
-        </p:spPr>
-      </p:sp>
-      <p:sp>
-        <p:nvSpPr>
-          <p:cNvPr id="18" name="Text 16"/>
-          <p:cNvSpPr/>
-          <p:nvPr/>
-        </p:nvSpPr>
-        <p:spPr>
-          <a:xfrm>
-            <a:off x="10347960" y="4169664"/>
-            <a:ext cx="826008" cy="310896"/>
-          </a:xfrm>
-          <a:prstGeom prst="rect">
-            <a:avLst/>
-          </a:prstGeom>
-          <a:noFill/>
-          <a:ln/>
-        </p:spPr>
-        <p:txBody>
-          <a:bodyPr wrap="square" lIns="0" tIns="0" rIns="0" bIns="0" rtlCol="0" anchor="ctr">
-            <a:normAutofit/>
-          </a:bodyPr>
-          <a:lstStyle/>
-          <a:p>
-            <a:pPr algn="ctr" indent="0" marL="0">
-              <a:buNone/>
-            </a:pPr>
-            <a:r>
-              <a:rPr lang="en-US" sz="1500" b="1" dirty="0">
-                <a:solidFill>
-                  <a:srgbClr val="FFFFFF"/>
-                </a:solidFill>
-                <a:latin typeface="Aptos" pitchFamily="34" charset="0"/>
-                <a:ea typeface="Aptos" pitchFamily="34" charset="-122"/>
-                <a:cs typeface="Aptos" pitchFamily="34" charset="-120"/>
-              </a:rPr>
-              <a:t>Action</a:t>
-            </a:r>
-            <a:endParaRPr lang="en-US" sz="1500" dirty="0"/>
+            <a:r>
+              <a:rPr lang="en-US" sz="1380" dirty="0">
+                <a:solidFill>
+                  <a:srgbClr val="17364A"/>
+                </a:solidFill>
+                <a:latin typeface="Aptos" pitchFamily="34" charset="0"/>
+                <a:ea typeface="Aptos" pitchFamily="34" charset="-122"/>
+                <a:cs typeface="Aptos" pitchFamily="34" charset="-120"/>
+              </a:rPr>
+              <a:t>Locate the decision point in the playbook sequence.</a:t>
+            </a:r>
+            <a:endParaRPr lang="en-US" sz="1380" dirty="0"/>
+          </a:p>
+          <a:p>
+            <a:r>
+              <a:rPr lang="en-US" sz="1380" dirty="0">
+                <a:solidFill>
+                  <a:srgbClr val="17364A"/>
+                </a:solidFill>
+                <a:latin typeface="Aptos" pitchFamily="34" charset="0"/>
+                <a:ea typeface="Aptos" pitchFamily="34" charset="-122"/>
+                <a:cs typeface="Aptos" pitchFamily="34" charset="-120"/>
+              </a:rPr>
+              <a:t>Identify who should participate in the work.</a:t>
+            </a:r>
+            <a:endParaRPr lang="en-US" sz="1380" dirty="0"/>
+          </a:p>
+          <a:p>
+            <a:r>
+              <a:rPr lang="en-US" sz="1380" dirty="0">
+                <a:solidFill>
+                  <a:srgbClr val="17364A"/>
+                </a:solidFill>
+                <a:latin typeface="Aptos" pitchFamily="34" charset="0"/>
+                <a:ea typeface="Aptos" pitchFamily="34" charset="-122"/>
+                <a:cs typeface="Aptos" pitchFamily="34" charset="-120"/>
+              </a:rPr>
+              <a:t>Document the review, approval, or implementation step.</a:t>
+            </a:r>
+            <a:endParaRPr lang="en-US" sz="1380" dirty="0"/>
           </a:p>
         </p:txBody>
       </p:sp>
@@ -14440,20 +12852,20 @@
         </p:nvSpPr>
         <p:spPr>
           <a:xfrm>
-            <a:off x="7818120" y="3977640"/>
-            <a:ext cx="972312" cy="749808"/>
+            <a:off x="8046720" y="3794760"/>
+            <a:ext cx="3063240" cy="1600200"/>
           </a:xfrm>
           <a:prstGeom prst="roundRect">
             <a:avLst>
-              <a:gd name="adj" fmla="val 14634"/>
+              <a:gd name="adj" fmla="val 6857"/>
             </a:avLst>
           </a:prstGeom>
           <a:solidFill>
-            <a:srgbClr val="0068B7"/>
+            <a:srgbClr val="FFFFFF"/>
           </a:solidFill>
           <a:ln w="12700">
             <a:solidFill>
-              <a:srgbClr val="0068B7"/>
+              <a:srgbClr val="B9D7E6"/>
             </a:solidFill>
             <a:prstDash val="solid"/>
           </a:ln>
@@ -14467,172 +12879,100 @@
         </p:nvSpPr>
         <p:spPr>
           <a:xfrm>
-            <a:off x="7891272" y="4169664"/>
-            <a:ext cx="826008" cy="310896"/>
-          </a:xfrm>
-          <a:prstGeom prst="rect">
-            <a:avLst/>
-          </a:prstGeom>
-          <a:noFill/>
-          <a:ln/>
-        </p:spPr>
-        <p:txBody>
-          <a:bodyPr wrap="square" lIns="0" tIns="0" rIns="0" bIns="0" rtlCol="0" anchor="ctr">
+            <a:off x="8211312" y="3941064"/>
+            <a:ext cx="2734056" cy="256032"/>
+          </a:xfrm>
+          <a:prstGeom prst="rect">
+            <a:avLst/>
+          </a:prstGeom>
+          <a:noFill/>
+          <a:ln/>
+        </p:spPr>
+        <p:txBody>
+          <a:bodyPr wrap="square" lIns="0" tIns="0" rIns="0" bIns="0" rtlCol="0" anchor="ctr"/>
+          <a:lstStyle/>
+          <a:p>
+            <a:pPr indent="0" marL="0">
+              <a:buNone/>
+            </a:pPr>
+            <a:r>
+              <a:rPr lang="en-US" sz="1300" b="1" dirty="0">
+                <a:solidFill>
+                  <a:srgbClr val="0068B7"/>
+                </a:solidFill>
+                <a:latin typeface="Aptos" pitchFamily="34" charset="0"/>
+                <a:ea typeface="Aptos" pitchFamily="34" charset="-122"/>
+                <a:cs typeface="Aptos" pitchFamily="34" charset="-120"/>
+              </a:rPr>
+              <a:t>Tool selection cues</a:t>
+            </a:r>
+            <a:endParaRPr lang="en-US" sz="1300" dirty="0"/>
+          </a:p>
+        </p:txBody>
+      </p:sp>
+      <p:sp>
+        <p:nvSpPr>
+          <p:cNvPr id="15" name="Text 13"/>
+          <p:cNvSpPr/>
+          <p:nvPr/>
+        </p:nvSpPr>
+        <p:spPr>
+          <a:xfrm>
+            <a:off x="8229600" y="4306824"/>
+            <a:ext cx="2679192" cy="941832"/>
+          </a:xfrm>
+          <a:prstGeom prst="rect">
+            <a:avLst/>
+          </a:prstGeom>
+          <a:noFill/>
+          <a:ln/>
+        </p:spPr>
+        <p:txBody>
+          <a:bodyPr wrap="square" lIns="254" tIns="254" rIns="254" bIns="254" rtlCol="0" anchor="t">
             <a:normAutofit/>
           </a:bodyPr>
           <a:lstStyle/>
           <a:p>
-            <a:pPr algn="ctr" indent="0" marL="0">
-              <a:buNone/>
-            </a:pPr>
-            <a:r>
-              <a:rPr lang="en-US" sz="1500" b="1" dirty="0">
-                <a:solidFill>
-                  <a:srgbClr val="FFFFFF"/>
-                </a:solidFill>
-                <a:latin typeface="Aptos" pitchFamily="34" charset="0"/>
-                <a:ea typeface="Aptos" pitchFamily="34" charset="-122"/>
-                <a:cs typeface="Aptos" pitchFamily="34" charset="-120"/>
-              </a:rPr>
-              <a:t>Concept</a:t>
-            </a:r>
-            <a:endParaRPr lang="en-US" sz="1500" dirty="0"/>
-          </a:p>
-        </p:txBody>
-      </p:sp>
-      <p:sp>
-        <p:nvSpPr>
-          <p:cNvPr id="15" name="Shape 13"/>
-          <p:cNvSpPr/>
-          <p:nvPr/>
-        </p:nvSpPr>
-        <p:spPr>
-          <a:xfrm>
-            <a:off x="9046464" y="3977640"/>
-            <a:ext cx="972312" cy="749808"/>
-          </a:xfrm>
-          <a:prstGeom prst="roundRect">
-            <a:avLst>
-              <a:gd name="adj" fmla="val 14634"/>
-            </a:avLst>
-          </a:prstGeom>
-          <a:solidFill>
-            <a:srgbClr val="2F8A28"/>
-          </a:solidFill>
-          <a:ln w="12700">
-            <a:solidFill>
-              <a:srgbClr val="2F8A28"/>
-            </a:solidFill>
-            <a:prstDash val="solid"/>
-          </a:ln>
-        </p:spPr>
-      </p:sp>
-      <p:sp>
-        <p:nvSpPr>
-          <p:cNvPr id="16" name="Text 14"/>
-          <p:cNvSpPr/>
-          <p:nvPr/>
-        </p:nvSpPr>
-        <p:spPr>
-          <a:xfrm>
-            <a:off x="9119616" y="4169664"/>
-            <a:ext cx="826008" cy="310896"/>
-          </a:xfrm>
-          <a:prstGeom prst="rect">
-            <a:avLst/>
-          </a:prstGeom>
-          <a:noFill/>
-          <a:ln/>
-        </p:spPr>
-        <p:txBody>
-          <a:bodyPr wrap="square" lIns="0" tIns="0" rIns="0" bIns="0" rtlCol="0" anchor="ctr">
-            <a:normAutofit/>
-          </a:bodyPr>
-          <a:lstStyle/>
-          <a:p>
-            <a:pPr algn="ctr" indent="0" marL="0">
-              <a:buNone/>
-            </a:pPr>
-            <a:r>
-              <a:rPr lang="en-US" sz="1500" b="1" dirty="0">
-                <a:solidFill>
-                  <a:srgbClr val="FFFFFF"/>
-                </a:solidFill>
-                <a:latin typeface="Aptos" pitchFamily="34" charset="0"/>
-                <a:ea typeface="Aptos" pitchFamily="34" charset="-122"/>
-                <a:cs typeface="Aptos" pitchFamily="34" charset="-120"/>
-              </a:rPr>
-              <a:t>Tool</a:t>
-            </a:r>
-            <a:endParaRPr lang="en-US" sz="1500" dirty="0"/>
-          </a:p>
-        </p:txBody>
-      </p:sp>
-      <p:sp>
-        <p:nvSpPr>
-          <p:cNvPr id="17" name="Shape 15"/>
-          <p:cNvSpPr/>
-          <p:nvPr/>
-        </p:nvSpPr>
-        <p:spPr>
-          <a:xfrm>
-            <a:off x="10274808" y="3977640"/>
-            <a:ext cx="972312" cy="749808"/>
-          </a:xfrm>
-          <a:prstGeom prst="roundRect">
-            <a:avLst>
-              <a:gd name="adj" fmla="val 14634"/>
-            </a:avLst>
-          </a:prstGeom>
-          <a:solidFill>
-            <a:srgbClr val="D69A2D"/>
-          </a:solidFill>
-          <a:ln w="12700">
-            <a:solidFill>
-              <a:srgbClr val="D69A2D"/>
-            </a:solidFill>
-            <a:prstDash val="solid"/>
-          </a:ln>
-        </p:spPr>
-      </p:sp>
-      <p:sp>
-        <p:nvSpPr>
-          <p:cNvPr id="18" name="Text 16"/>
-          <p:cNvSpPr/>
-          <p:nvPr/>
-        </p:nvSpPr>
-        <p:spPr>
-          <a:xfrm>
-            <a:off x="10347960" y="4169664"/>
-            <a:ext cx="826008" cy="310896"/>
-          </a:xfrm>
-          <a:prstGeom prst="rect">
-            <a:avLst/>
-          </a:prstGeom>
-          <a:noFill/>
-          <a:ln/>
-        </p:spPr>
-        <p:txBody>
-          <a:bodyPr wrap="square" lIns="0" tIns="0" rIns="0" bIns="0" rtlCol="0" anchor="ctr">
-            <a:normAutofit/>
-          </a:bodyPr>
-          <a:lstStyle/>
-          <a:p>
-            <a:pPr algn="ctr" indent="0" marL="0">
-              <a:buNone/>
-            </a:pPr>
-            <a:r>
-              <a:rPr lang="en-US" sz="1500" b="1" dirty="0">
-                <a:solidFill>
-                  <a:srgbClr val="FFFFFF"/>
-                </a:solidFill>
-                <a:latin typeface="Aptos" pitchFamily="34" charset="0"/>
-                <a:ea typeface="Aptos" pitchFamily="34" charset="-122"/>
-                <a:cs typeface="Aptos" pitchFamily="34" charset="-120"/>
-              </a:rPr>
-              <a:t>Artifact</a:t>
-            </a:r>
-            <a:endParaRPr lang="en-US" sz="1500" dirty="0"/>
+            <a:r>
+              <a:rPr lang="en-US" sz="1380" dirty="0">
+                <a:solidFill>
+                  <a:srgbClr val="17364A"/>
+                </a:solidFill>
+                <a:latin typeface="Aptos" pitchFamily="34" charset="0"/>
+                <a:ea typeface="Aptos" pitchFamily="34" charset="-122"/>
+                <a:cs typeface="Aptos" pitchFamily="34" charset="-120"/>
+              </a:rPr>
+              <a:t>Use a tool when no comparable local process exists.</a:t>
+            </a:r>
+            <a:endParaRPr lang="en-US" sz="1380" dirty="0"/>
+          </a:p>
+          <a:p>
+            <a:r>
+              <a:rPr lang="en-US" sz="1380" dirty="0">
+                <a:solidFill>
+                  <a:srgbClr val="17364A"/>
+                </a:solidFill>
+                <a:latin typeface="Aptos" pitchFamily="34" charset="0"/>
+                <a:ea typeface="Aptos" pitchFamily="34" charset="-122"/>
+                <a:cs typeface="Aptos" pitchFamily="34" charset="-120"/>
+              </a:rPr>
+              <a:t>Adapt existing department templates when they already fit the purpose.</a:t>
+            </a:r>
+            <a:endParaRPr lang="en-US" sz="1380" dirty="0"/>
+          </a:p>
+          <a:p>
+            <a:r>
+              <a:rPr lang="en-US" sz="1380" dirty="0">
+                <a:solidFill>
+                  <a:srgbClr val="17364A"/>
+                </a:solidFill>
+                <a:latin typeface="Aptos" pitchFamily="34" charset="0"/>
+                <a:ea typeface="Aptos" pitchFamily="34" charset="-122"/>
+                <a:cs typeface="Aptos" pitchFamily="34" charset="-120"/>
+              </a:rPr>
+              <a:t>Save the completed artifact as evidence of the decision.</a:t>
+            </a:r>
+            <a:endParaRPr lang="en-US" sz="1380" dirty="0"/>
           </a:p>
         </p:txBody>
       </p:sp>
@@ -15105,13 +13445,11 @@
             </a:avLst>
           </a:prstGeom>
           <a:solidFill>
-            <a:srgbClr val="FFFFFF">
-              <a:alpha val="88000"/>
-            </a:srgbClr>
+            <a:srgbClr val="FFFFFF"/>
           </a:solidFill>
           <a:ln w="12700">
             <a:solidFill>
-              <a:srgbClr val="D6E8F2"/>
+              <a:srgbClr val="B9D7E6"/>
             </a:solidFill>
             <a:prstDash val="solid"/>
           </a:ln>
@@ -15119,30 +13457,42 @@
       </p:sp>
       <p:sp>
         <p:nvSpPr>
-          <p:cNvPr id="14" name="Shape 12"/>
-          <p:cNvSpPr/>
-          <p:nvPr/>
-        </p:nvSpPr>
-        <p:spPr>
-          <a:xfrm>
-            <a:off x="7927848" y="3319272"/>
-            <a:ext cx="792480" cy="749808"/>
-          </a:xfrm>
-          <a:prstGeom prst="roundRect">
-            <a:avLst>
-              <a:gd name="adj" fmla="val 14634"/>
-            </a:avLst>
-          </a:prstGeom>
-          <a:solidFill>
-            <a:srgbClr val="0068B7"/>
-          </a:solidFill>
-          <a:ln w="12700">
-            <a:solidFill>
-              <a:srgbClr val="0068B7"/>
-            </a:solidFill>
-            <a:prstDash val="solid"/>
-          </a:ln>
-        </p:spPr>
+          <p:cNvPr id="14" name="Text 12"/>
+          <p:cNvSpPr/>
+          <p:nvPr/>
+        </p:nvSpPr>
+        <p:spPr>
+          <a:xfrm>
+            <a:off x="7799832" y="2935224"/>
+            <a:ext cx="3145536" cy="256032"/>
+          </a:xfrm>
+          <a:prstGeom prst="rect">
+            <a:avLst/>
+          </a:prstGeom>
+          <a:noFill/>
+          <a:ln/>
+        </p:spPr>
+        <p:txBody>
+          <a:bodyPr wrap="square" lIns="0" tIns="0" rIns="0" bIns="0" rtlCol="0" anchor="ctr"/>
+          <a:lstStyle/>
+          <a:p>
+            <a:pPr indent="0" marL="0">
+              <a:buNone/>
+            </a:pPr>
+            <a:r>
+              <a:rPr lang="en-US" sz="1300" b="1" dirty="0">
+                <a:solidFill>
+                  <a:srgbClr val="0068B7"/>
+                </a:solidFill>
+                <a:latin typeface="Aptos" pitchFamily="34" charset="0"/>
+                <a:ea typeface="Aptos" pitchFamily="34" charset="-122"/>
+                <a:cs typeface="Aptos" pitchFamily="34" charset="-120"/>
+              </a:rPr>
+              <a:t>Concept checkpoints</a:t>
+            </a:r>
+            <a:endParaRPr lang="en-US" sz="1300" dirty="0"/>
+          </a:p>
+        </p:txBody>
       </p:sp>
       <p:sp>
         <p:nvSpPr>
@@ -15152,240 +13502,53 @@
         </p:nvSpPr>
         <p:spPr>
           <a:xfrm>
-            <a:off x="8001000" y="3511296"/>
-            <a:ext cx="646176" cy="310896"/>
-          </a:xfrm>
-          <a:prstGeom prst="rect">
-            <a:avLst/>
-          </a:prstGeom>
-          <a:noFill/>
-          <a:ln/>
-        </p:spPr>
-        <p:txBody>
-          <a:bodyPr wrap="square" lIns="0" tIns="0" rIns="0" bIns="0" rtlCol="0" anchor="ctr">
+            <a:off x="7818120" y="3300984"/>
+            <a:ext cx="3090672" cy="877824"/>
+          </a:xfrm>
+          <a:prstGeom prst="rect">
+            <a:avLst/>
+          </a:prstGeom>
+          <a:noFill/>
+          <a:ln/>
+        </p:spPr>
+        <p:txBody>
+          <a:bodyPr wrap="square" lIns="254" tIns="254" rIns="254" bIns="254" rtlCol="0" anchor="t">
             <a:normAutofit/>
           </a:bodyPr>
           <a:lstStyle/>
           <a:p>
-            <a:pPr algn="ctr" indent="0" marL="0">
-              <a:buNone/>
-            </a:pPr>
-            <a:r>
-              <a:rPr lang="en-US" sz="1500" b="1" dirty="0">
-                <a:solidFill>
-                  <a:srgbClr val="FFFFFF"/>
-                </a:solidFill>
-                <a:latin typeface="Aptos" pitchFamily="34" charset="0"/>
-                <a:ea typeface="Aptos" pitchFamily="34" charset="-122"/>
-                <a:cs typeface="Aptos" pitchFamily="34" charset="-120"/>
-              </a:rPr>
-              <a:t>Plan</a:t>
-            </a:r>
-            <a:endParaRPr lang="en-US" sz="1500" dirty="0"/>
+            <a:r>
+              <a:rPr lang="en-US" sz="1380" dirty="0">
+                <a:solidFill>
+                  <a:srgbClr val="17364A"/>
+                </a:solidFill>
+                <a:latin typeface="Aptos" pitchFamily="34" charset="0"/>
+                <a:ea typeface="Aptos" pitchFamily="34" charset="-122"/>
+                <a:cs typeface="Aptos" pitchFamily="34" charset="-120"/>
+              </a:rPr>
+              <a:t>Define acceptance criteria for usability, safety, documentation, human review, and.</a:t>
+            </a:r>
+            <a:endParaRPr lang="en-US" sz="1380" dirty="0"/>
+          </a:p>
+          <a:p>
+            <a:r>
+              <a:rPr lang="en-US" sz="1380" dirty="0">
+                <a:solidFill>
+                  <a:srgbClr val="17364A"/>
+                </a:solidFill>
+                <a:latin typeface="Aptos" pitchFamily="34" charset="0"/>
+                <a:ea typeface="Aptos" pitchFamily="34" charset="-122"/>
+                <a:cs typeface="Aptos" pitchFamily="34" charset="-120"/>
+              </a:rPr>
+              <a:t>Produce a UAT plan and sign-off recommendation for an AI-supported workflow.</a:t>
+            </a:r>
+            <a:endParaRPr lang="en-US" sz="1380" dirty="0"/>
           </a:p>
         </p:txBody>
       </p:sp>
       <p:sp>
         <p:nvSpPr>
           <p:cNvPr id="16" name="Shape 14"/>
-          <p:cNvSpPr/>
-          <p:nvPr/>
-        </p:nvSpPr>
-        <p:spPr>
-          <a:xfrm>
-            <a:off x="8976360" y="3319272"/>
-            <a:ext cx="792480" cy="749808"/>
-          </a:xfrm>
-          <a:prstGeom prst="roundRect">
-            <a:avLst>
-              <a:gd name="adj" fmla="val 14634"/>
-            </a:avLst>
-          </a:prstGeom>
-          <a:solidFill>
-            <a:srgbClr val="2F8A28"/>
-          </a:solidFill>
-          <a:ln w="12700">
-            <a:solidFill>
-              <a:srgbClr val="2F8A28"/>
-            </a:solidFill>
-            <a:prstDash val="solid"/>
-          </a:ln>
-        </p:spPr>
-      </p:sp>
-      <p:sp>
-        <p:nvSpPr>
-          <p:cNvPr id="17" name="Text 15"/>
-          <p:cNvSpPr/>
-          <p:nvPr/>
-        </p:nvSpPr>
-        <p:spPr>
-          <a:xfrm>
-            <a:off x="9049512" y="3511296"/>
-            <a:ext cx="646176" cy="310896"/>
-          </a:xfrm>
-          <a:prstGeom prst="rect">
-            <a:avLst/>
-          </a:prstGeom>
-          <a:noFill/>
-          <a:ln/>
-        </p:spPr>
-        <p:txBody>
-          <a:bodyPr wrap="square" lIns="0" tIns="0" rIns="0" bIns="0" rtlCol="0" anchor="ctr">
-            <a:normAutofit/>
-          </a:bodyPr>
-          <a:lstStyle/>
-          <a:p>
-            <a:pPr algn="ctr" indent="0" marL="0">
-              <a:buNone/>
-            </a:pPr>
-            <a:r>
-              <a:rPr lang="en-US" sz="1500" b="1" dirty="0">
-                <a:solidFill>
-                  <a:srgbClr val="FFFFFF"/>
-                </a:solidFill>
-                <a:latin typeface="Aptos" pitchFamily="34" charset="0"/>
-                <a:ea typeface="Aptos" pitchFamily="34" charset="-122"/>
-                <a:cs typeface="Aptos" pitchFamily="34" charset="-120"/>
-              </a:rPr>
-              <a:t>Do</a:t>
-            </a:r>
-            <a:endParaRPr lang="en-US" sz="1500" dirty="0"/>
-          </a:p>
-        </p:txBody>
-      </p:sp>
-      <p:sp>
-        <p:nvSpPr>
-          <p:cNvPr id="18" name="Shape 16"/>
-          <p:cNvSpPr/>
-          <p:nvPr/>
-        </p:nvSpPr>
-        <p:spPr>
-          <a:xfrm>
-            <a:off x="10024872" y="3319272"/>
-            <a:ext cx="792480" cy="749808"/>
-          </a:xfrm>
-          <a:prstGeom prst="roundRect">
-            <a:avLst>
-              <a:gd name="adj" fmla="val 14634"/>
-            </a:avLst>
-          </a:prstGeom>
-          <a:solidFill>
-            <a:srgbClr val="D69A2D"/>
-          </a:solidFill>
-          <a:ln w="12700">
-            <a:solidFill>
-              <a:srgbClr val="D69A2D"/>
-            </a:solidFill>
-            <a:prstDash val="solid"/>
-          </a:ln>
-        </p:spPr>
-      </p:sp>
-      <p:sp>
-        <p:nvSpPr>
-          <p:cNvPr id="19" name="Text 17"/>
-          <p:cNvSpPr/>
-          <p:nvPr/>
-        </p:nvSpPr>
-        <p:spPr>
-          <a:xfrm>
-            <a:off x="10098024" y="3511296"/>
-            <a:ext cx="646176" cy="310896"/>
-          </a:xfrm>
-          <a:prstGeom prst="rect">
-            <a:avLst/>
-          </a:prstGeom>
-          <a:noFill/>
-          <a:ln/>
-        </p:spPr>
-        <p:txBody>
-          <a:bodyPr wrap="square" lIns="0" tIns="0" rIns="0" bIns="0" rtlCol="0" anchor="ctr">
-            <a:normAutofit/>
-          </a:bodyPr>
-          <a:lstStyle/>
-          <a:p>
-            <a:pPr algn="ctr" indent="0" marL="0">
-              <a:buNone/>
-            </a:pPr>
-            <a:r>
-              <a:rPr lang="en-US" sz="1500" b="1" dirty="0">
-                <a:solidFill>
-                  <a:srgbClr val="FFFFFF"/>
-                </a:solidFill>
-                <a:latin typeface="Aptos" pitchFamily="34" charset="0"/>
-                <a:ea typeface="Aptos" pitchFamily="34" charset="-122"/>
-                <a:cs typeface="Aptos" pitchFamily="34" charset="-120"/>
-              </a:rPr>
-              <a:t>Review</a:t>
-            </a:r>
-            <a:endParaRPr lang="en-US" sz="1500" dirty="0"/>
-          </a:p>
-        </p:txBody>
-      </p:sp>
-      <p:sp>
-        <p:nvSpPr>
-          <p:cNvPr id="20" name="Shape 18"/>
-          <p:cNvSpPr/>
-          <p:nvPr/>
-        </p:nvSpPr>
-        <p:spPr>
-          <a:xfrm>
-            <a:off x="8293608" y="4389120"/>
-            <a:ext cx="2157984" cy="0"/>
-          </a:xfrm>
-          <a:prstGeom prst="line">
-            <a:avLst/>
-          </a:prstGeom>
-          <a:noFill/>
-          <a:ln w="25400">
-            <a:solidFill>
-              <a:srgbClr val="8ABBD8"/>
-            </a:solidFill>
-            <a:prstDash val="solid"/>
-          </a:ln>
-        </p:spPr>
-      </p:sp>
-      <p:sp>
-        <p:nvSpPr>
-          <p:cNvPr id="21" name="Text 19"/>
-          <p:cNvSpPr/>
-          <p:nvPr/>
-        </p:nvSpPr>
-        <p:spPr>
-          <a:xfrm>
-            <a:off x="7909560" y="3977640"/>
-            <a:ext cx="2926080" cy="182880"/>
-          </a:xfrm>
-          <a:prstGeom prst="rect">
-            <a:avLst/>
-          </a:prstGeom>
-          <a:noFill/>
-          <a:ln/>
-        </p:spPr>
-        <p:txBody>
-          <a:bodyPr wrap="square" lIns="0" tIns="0" rIns="0" bIns="0" rtlCol="0" anchor="ctr"/>
-          <a:lstStyle/>
-          <a:p>
-            <a:pPr algn="ctr" indent="0" marL="0">
-              <a:buNone/>
-            </a:pPr>
-            <a:r>
-              <a:rPr lang="en-US" sz="1000" dirty="0">
-                <a:solidFill>
-                  <a:srgbClr val="003A63"/>
-                </a:solidFill>
-                <a:latin typeface="Aptos" pitchFamily="34" charset="0"/>
-                <a:ea typeface="Aptos" pitchFamily="34" charset="-122"/>
-                <a:cs typeface="Aptos" pitchFamily="34" charset="-120"/>
-              </a:rPr>
-              <a:t>Dependencies visible</a:t>
-            </a:r>
-            <a:endParaRPr lang="en-US" sz="1000" dirty="0"/>
-          </a:p>
-        </p:txBody>
-      </p:sp>
-      <p:sp>
-        <p:nvSpPr>
-          <p:cNvPr id="22" name="Shape 20"/>
           <p:cNvSpPr/>
           <p:nvPr/>
         </p:nvSpPr>
@@ -15412,7 +13575,7 @@
       </p:sp>
       <p:sp>
         <p:nvSpPr>
-          <p:cNvPr id="23" name="Text 21"/>
+          <p:cNvPr id="17" name="Text 15"/>
           <p:cNvSpPr/>
           <p:nvPr/>
         </p:nvSpPr>
@@ -15451,7 +13614,7 @@
       </p:sp>
       <p:sp>
         <p:nvSpPr>
-          <p:cNvPr id="24" name="Text 22"/>
+          <p:cNvPr id="18" name="Text 16"/>
           <p:cNvSpPr/>
           <p:nvPr/>
         </p:nvSpPr>
@@ -15959,13 +14122,11 @@
             </a:avLst>
           </a:prstGeom>
           <a:solidFill>
-            <a:srgbClr val="FFFFFF">
-              <a:alpha val="88000"/>
-            </a:srgbClr>
+            <a:srgbClr val="FFFFFF"/>
           </a:solidFill>
           <a:ln w="12700">
             <a:solidFill>
-              <a:srgbClr val="D6E8F2"/>
+              <a:srgbClr val="B9D7E6"/>
             </a:solidFill>
             <a:prstDash val="solid"/>
           </a:ln>
@@ -15973,30 +14134,42 @@
       </p:sp>
       <p:sp>
         <p:nvSpPr>
-          <p:cNvPr id="14" name="Shape 12"/>
-          <p:cNvSpPr/>
-          <p:nvPr/>
-        </p:nvSpPr>
-        <p:spPr>
-          <a:xfrm>
-            <a:off x="7927848" y="3319272"/>
-            <a:ext cx="792480" cy="749808"/>
-          </a:xfrm>
-          <a:prstGeom prst="roundRect">
-            <a:avLst>
-              <a:gd name="adj" fmla="val 14634"/>
-            </a:avLst>
-          </a:prstGeom>
-          <a:solidFill>
-            <a:srgbClr val="0068B7"/>
-          </a:solidFill>
-          <a:ln w="12700">
-            <a:solidFill>
-              <a:srgbClr val="0068B7"/>
-            </a:solidFill>
-            <a:prstDash val="solid"/>
-          </a:ln>
-        </p:spPr>
+          <p:cNvPr id="14" name="Text 12"/>
+          <p:cNvSpPr/>
+          <p:nvPr/>
+        </p:nvSpPr>
+        <p:spPr>
+          <a:xfrm>
+            <a:off x="7799832" y="2935224"/>
+            <a:ext cx="3145536" cy="256032"/>
+          </a:xfrm>
+          <a:prstGeom prst="rect">
+            <a:avLst/>
+          </a:prstGeom>
+          <a:noFill/>
+          <a:ln/>
+        </p:spPr>
+        <p:txBody>
+          <a:bodyPr wrap="square" lIns="0" tIns="0" rIns="0" bIns="0" rtlCol="0" anchor="ctr"/>
+          <a:lstStyle/>
+          <a:p>
+            <a:pPr indent="0" marL="0">
+              <a:buNone/>
+            </a:pPr>
+            <a:r>
+              <a:rPr lang="en-US" sz="1300" b="1" dirty="0">
+                <a:solidFill>
+                  <a:srgbClr val="0068B7"/>
+                </a:solidFill>
+                <a:latin typeface="Aptos" pitchFamily="34" charset="0"/>
+                <a:ea typeface="Aptos" pitchFamily="34" charset="-122"/>
+                <a:cs typeface="Aptos" pitchFamily="34" charset="-120"/>
+              </a:rPr>
+              <a:t>Concept checkpoints</a:t>
+            </a:r>
+            <a:endParaRPr lang="en-US" sz="1300" dirty="0"/>
+          </a:p>
+        </p:txBody>
       </p:sp>
       <p:sp>
         <p:nvSpPr>
@@ -16006,240 +14179,67 @@
         </p:nvSpPr>
         <p:spPr>
           <a:xfrm>
-            <a:off x="8001000" y="3511296"/>
-            <a:ext cx="646176" cy="310896"/>
-          </a:xfrm>
-          <a:prstGeom prst="rect">
-            <a:avLst/>
-          </a:prstGeom>
-          <a:noFill/>
-          <a:ln/>
-        </p:spPr>
-        <p:txBody>
-          <a:bodyPr wrap="square" lIns="0" tIns="0" rIns="0" bIns="0" rtlCol="0" anchor="ctr">
+            <a:off x="7818120" y="3300984"/>
+            <a:ext cx="3090672" cy="877824"/>
+          </a:xfrm>
+          <a:prstGeom prst="rect">
+            <a:avLst/>
+          </a:prstGeom>
+          <a:noFill/>
+          <a:ln/>
+        </p:spPr>
+        <p:txBody>
+          <a:bodyPr wrap="square" lIns="254" tIns="254" rIns="254" bIns="254" rtlCol="0" anchor="t">
             <a:normAutofit/>
           </a:bodyPr>
           <a:lstStyle/>
           <a:p>
-            <a:pPr algn="ctr" indent="0" marL="0">
-              <a:buNone/>
-            </a:pPr>
-            <a:r>
-              <a:rPr lang="en-US" sz="1500" b="1" dirty="0">
-                <a:solidFill>
-                  <a:srgbClr val="FFFFFF"/>
-                </a:solidFill>
-                <a:latin typeface="Aptos" pitchFamily="34" charset="0"/>
-                <a:ea typeface="Aptos" pitchFamily="34" charset="-122"/>
-                <a:cs typeface="Aptos" pitchFamily="34" charset="-120"/>
-              </a:rPr>
-              <a:t>Plan</a:t>
-            </a:r>
-            <a:endParaRPr lang="en-US" sz="1500" dirty="0"/>
+            <a:r>
+              <a:rPr lang="en-US" sz="1380" dirty="0">
+                <a:solidFill>
+                  <a:srgbClr val="17364A"/>
+                </a:solidFill>
+                <a:latin typeface="Aptos" pitchFamily="34" charset="0"/>
+                <a:ea typeface="Aptos" pitchFamily="34" charset="-122"/>
+                <a:cs typeface="Aptos" pitchFamily="34" charset="-120"/>
+              </a:rPr>
+              <a:t>User acceptance testing is the process of determining whether an AI-supported workflow is.</a:t>
+            </a:r>
+            <a:endParaRPr lang="en-US" sz="1380" dirty="0"/>
+          </a:p>
+          <a:p>
+            <a:r>
+              <a:rPr lang="en-US" sz="1380" dirty="0">
+                <a:solidFill>
+                  <a:srgbClr val="17364A"/>
+                </a:solidFill>
+                <a:latin typeface="Aptos" pitchFamily="34" charset="0"/>
+                <a:ea typeface="Aptos" pitchFamily="34" charset="-122"/>
+                <a:cs typeface="Aptos" pitchFamily="34" charset="-120"/>
+              </a:rPr>
+              <a:t>Technical testing may show that a tool runs, and model validation may show acceptable.</a:t>
+            </a:r>
+            <a:endParaRPr lang="en-US" sz="1380" dirty="0"/>
+          </a:p>
+          <a:p>
+            <a:r>
+              <a:rPr lang="en-US" sz="1380" dirty="0">
+                <a:solidFill>
+                  <a:srgbClr val="17364A"/>
+                </a:solidFill>
+                <a:latin typeface="Aptos" pitchFamily="34" charset="0"/>
+                <a:ea typeface="Aptos" pitchFamily="34" charset="-122"/>
+                <a:cs typeface="Aptos" pitchFamily="34" charset="-120"/>
+              </a:rPr>
+              <a:t>This module teaches learners how to design and conduct user acceptance testing for.</a:t>
+            </a:r>
+            <a:endParaRPr lang="en-US" sz="1380" dirty="0"/>
           </a:p>
         </p:txBody>
       </p:sp>
       <p:sp>
         <p:nvSpPr>
           <p:cNvPr id="16" name="Shape 14"/>
-          <p:cNvSpPr/>
-          <p:nvPr/>
-        </p:nvSpPr>
-        <p:spPr>
-          <a:xfrm>
-            <a:off x="8976360" y="3319272"/>
-            <a:ext cx="792480" cy="749808"/>
-          </a:xfrm>
-          <a:prstGeom prst="roundRect">
-            <a:avLst>
-              <a:gd name="adj" fmla="val 14634"/>
-            </a:avLst>
-          </a:prstGeom>
-          <a:solidFill>
-            <a:srgbClr val="2F8A28"/>
-          </a:solidFill>
-          <a:ln w="12700">
-            <a:solidFill>
-              <a:srgbClr val="2F8A28"/>
-            </a:solidFill>
-            <a:prstDash val="solid"/>
-          </a:ln>
-        </p:spPr>
-      </p:sp>
-      <p:sp>
-        <p:nvSpPr>
-          <p:cNvPr id="17" name="Text 15"/>
-          <p:cNvSpPr/>
-          <p:nvPr/>
-        </p:nvSpPr>
-        <p:spPr>
-          <a:xfrm>
-            <a:off x="9049512" y="3511296"/>
-            <a:ext cx="646176" cy="310896"/>
-          </a:xfrm>
-          <a:prstGeom prst="rect">
-            <a:avLst/>
-          </a:prstGeom>
-          <a:noFill/>
-          <a:ln/>
-        </p:spPr>
-        <p:txBody>
-          <a:bodyPr wrap="square" lIns="0" tIns="0" rIns="0" bIns="0" rtlCol="0" anchor="ctr">
-            <a:normAutofit/>
-          </a:bodyPr>
-          <a:lstStyle/>
-          <a:p>
-            <a:pPr algn="ctr" indent="0" marL="0">
-              <a:buNone/>
-            </a:pPr>
-            <a:r>
-              <a:rPr lang="en-US" sz="1500" b="1" dirty="0">
-                <a:solidFill>
-                  <a:srgbClr val="FFFFFF"/>
-                </a:solidFill>
-                <a:latin typeface="Aptos" pitchFamily="34" charset="0"/>
-                <a:ea typeface="Aptos" pitchFamily="34" charset="-122"/>
-                <a:cs typeface="Aptos" pitchFamily="34" charset="-120"/>
-              </a:rPr>
-              <a:t>Do</a:t>
-            </a:r>
-            <a:endParaRPr lang="en-US" sz="1500" dirty="0"/>
-          </a:p>
-        </p:txBody>
-      </p:sp>
-      <p:sp>
-        <p:nvSpPr>
-          <p:cNvPr id="18" name="Shape 16"/>
-          <p:cNvSpPr/>
-          <p:nvPr/>
-        </p:nvSpPr>
-        <p:spPr>
-          <a:xfrm>
-            <a:off x="10024872" y="3319272"/>
-            <a:ext cx="792480" cy="749808"/>
-          </a:xfrm>
-          <a:prstGeom prst="roundRect">
-            <a:avLst>
-              <a:gd name="adj" fmla="val 14634"/>
-            </a:avLst>
-          </a:prstGeom>
-          <a:solidFill>
-            <a:srgbClr val="D69A2D"/>
-          </a:solidFill>
-          <a:ln w="12700">
-            <a:solidFill>
-              <a:srgbClr val="D69A2D"/>
-            </a:solidFill>
-            <a:prstDash val="solid"/>
-          </a:ln>
-        </p:spPr>
-      </p:sp>
-      <p:sp>
-        <p:nvSpPr>
-          <p:cNvPr id="19" name="Text 17"/>
-          <p:cNvSpPr/>
-          <p:nvPr/>
-        </p:nvSpPr>
-        <p:spPr>
-          <a:xfrm>
-            <a:off x="10098024" y="3511296"/>
-            <a:ext cx="646176" cy="310896"/>
-          </a:xfrm>
-          <a:prstGeom prst="rect">
-            <a:avLst/>
-          </a:prstGeom>
-          <a:noFill/>
-          <a:ln/>
-        </p:spPr>
-        <p:txBody>
-          <a:bodyPr wrap="square" lIns="0" tIns="0" rIns="0" bIns="0" rtlCol="0" anchor="ctr">
-            <a:normAutofit/>
-          </a:bodyPr>
-          <a:lstStyle/>
-          <a:p>
-            <a:pPr algn="ctr" indent="0" marL="0">
-              <a:buNone/>
-            </a:pPr>
-            <a:r>
-              <a:rPr lang="en-US" sz="1500" b="1" dirty="0">
-                <a:solidFill>
-                  <a:srgbClr val="FFFFFF"/>
-                </a:solidFill>
-                <a:latin typeface="Aptos" pitchFamily="34" charset="0"/>
-                <a:ea typeface="Aptos" pitchFamily="34" charset="-122"/>
-                <a:cs typeface="Aptos" pitchFamily="34" charset="-120"/>
-              </a:rPr>
-              <a:t>Review</a:t>
-            </a:r>
-            <a:endParaRPr lang="en-US" sz="1500" dirty="0"/>
-          </a:p>
-        </p:txBody>
-      </p:sp>
-      <p:sp>
-        <p:nvSpPr>
-          <p:cNvPr id="20" name="Shape 18"/>
-          <p:cNvSpPr/>
-          <p:nvPr/>
-        </p:nvSpPr>
-        <p:spPr>
-          <a:xfrm>
-            <a:off x="8293608" y="4389120"/>
-            <a:ext cx="2157984" cy="0"/>
-          </a:xfrm>
-          <a:prstGeom prst="line">
-            <a:avLst/>
-          </a:prstGeom>
-          <a:noFill/>
-          <a:ln w="25400">
-            <a:solidFill>
-              <a:srgbClr val="8ABBD8"/>
-            </a:solidFill>
-            <a:prstDash val="solid"/>
-          </a:ln>
-        </p:spPr>
-      </p:sp>
-      <p:sp>
-        <p:nvSpPr>
-          <p:cNvPr id="21" name="Text 19"/>
-          <p:cNvSpPr/>
-          <p:nvPr/>
-        </p:nvSpPr>
-        <p:spPr>
-          <a:xfrm>
-            <a:off x="7909560" y="3977640"/>
-            <a:ext cx="2926080" cy="182880"/>
-          </a:xfrm>
-          <a:prstGeom prst="rect">
-            <a:avLst/>
-          </a:prstGeom>
-          <a:noFill/>
-          <a:ln/>
-        </p:spPr>
-        <p:txBody>
-          <a:bodyPr wrap="square" lIns="0" tIns="0" rIns="0" bIns="0" rtlCol="0" anchor="ctr"/>
-          <a:lstStyle/>
-          <a:p>
-            <a:pPr algn="ctr" indent="0" marL="0">
-              <a:buNone/>
-            </a:pPr>
-            <a:r>
-              <a:rPr lang="en-US" sz="1000" dirty="0">
-                <a:solidFill>
-                  <a:srgbClr val="003A63"/>
-                </a:solidFill>
-                <a:latin typeface="Aptos" pitchFamily="34" charset="0"/>
-                <a:ea typeface="Aptos" pitchFamily="34" charset="-122"/>
-                <a:cs typeface="Aptos" pitchFamily="34" charset="-120"/>
-              </a:rPr>
-              <a:t>Dependencies visible</a:t>
-            </a:r>
-            <a:endParaRPr lang="en-US" sz="1000" dirty="0"/>
-          </a:p>
-        </p:txBody>
-      </p:sp>
-      <p:sp>
-        <p:nvSpPr>
-          <p:cNvPr id="22" name="Shape 20"/>
           <p:cNvSpPr/>
           <p:nvPr/>
         </p:nvSpPr>
@@ -16266,7 +14266,7 @@
       </p:sp>
       <p:sp>
         <p:nvSpPr>
-          <p:cNvPr id="23" name="Text 21"/>
+          <p:cNvPr id="17" name="Text 15"/>
           <p:cNvSpPr/>
           <p:nvPr/>
         </p:nvSpPr>
@@ -16305,7 +14305,7 @@
       </p:sp>
       <p:sp>
         <p:nvSpPr>
-          <p:cNvPr id="24" name="Text 22"/>
+          <p:cNvPr id="18" name="Text 16"/>
           <p:cNvSpPr/>
           <p:nvPr/>
         </p:nvSpPr>
@@ -16813,13 +14813,11 @@
             </a:avLst>
           </a:prstGeom>
           <a:solidFill>
-            <a:srgbClr val="FFFFFF">
-              <a:alpha val="88000"/>
-            </a:srgbClr>
+            <a:srgbClr val="FFFFFF"/>
           </a:solidFill>
           <a:ln w="12700">
             <a:solidFill>
-              <a:srgbClr val="D6E8F2"/>
+              <a:srgbClr val="B9D7E6"/>
             </a:solidFill>
             <a:prstDash val="solid"/>
           </a:ln>
@@ -16827,30 +14825,42 @@
       </p:sp>
       <p:sp>
         <p:nvSpPr>
-          <p:cNvPr id="14" name="Shape 12"/>
-          <p:cNvSpPr/>
-          <p:nvPr/>
-        </p:nvSpPr>
-        <p:spPr>
-          <a:xfrm>
-            <a:off x="7927848" y="3319272"/>
-            <a:ext cx="792480" cy="749808"/>
-          </a:xfrm>
-          <a:prstGeom prst="roundRect">
-            <a:avLst>
-              <a:gd name="adj" fmla="val 14634"/>
-            </a:avLst>
-          </a:prstGeom>
-          <a:solidFill>
-            <a:srgbClr val="0068B7"/>
-          </a:solidFill>
-          <a:ln w="12700">
-            <a:solidFill>
-              <a:srgbClr val="0068B7"/>
-            </a:solidFill>
-            <a:prstDash val="solid"/>
-          </a:ln>
-        </p:spPr>
+          <p:cNvPr id="14" name="Text 12"/>
+          <p:cNvSpPr/>
+          <p:nvPr/>
+        </p:nvSpPr>
+        <p:spPr>
+          <a:xfrm>
+            <a:off x="7799832" y="2935224"/>
+            <a:ext cx="3145536" cy="256032"/>
+          </a:xfrm>
+          <a:prstGeom prst="rect">
+            <a:avLst/>
+          </a:prstGeom>
+          <a:noFill/>
+          <a:ln/>
+        </p:spPr>
+        <p:txBody>
+          <a:bodyPr wrap="square" lIns="0" tIns="0" rIns="0" bIns="0" rtlCol="0" anchor="ctr"/>
+          <a:lstStyle/>
+          <a:p>
+            <a:pPr indent="0" marL="0">
+              <a:buNone/>
+            </a:pPr>
+            <a:r>
+              <a:rPr lang="en-US" sz="1300" b="1" dirty="0">
+                <a:solidFill>
+                  <a:srgbClr val="0068B7"/>
+                </a:solidFill>
+                <a:latin typeface="Aptos" pitchFamily="34" charset="0"/>
+                <a:ea typeface="Aptos" pitchFamily="34" charset="-122"/>
+                <a:cs typeface="Aptos" pitchFamily="34" charset="-120"/>
+              </a:rPr>
+              <a:t>Concept checkpoints</a:t>
+            </a:r>
+            <a:endParaRPr lang="en-US" sz="1300" dirty="0"/>
+          </a:p>
+        </p:txBody>
       </p:sp>
       <p:sp>
         <p:nvSpPr>
@@ -16860,240 +14870,53 @@
         </p:nvSpPr>
         <p:spPr>
           <a:xfrm>
-            <a:off x="8001000" y="3511296"/>
-            <a:ext cx="646176" cy="310896"/>
-          </a:xfrm>
-          <a:prstGeom prst="rect">
-            <a:avLst/>
-          </a:prstGeom>
-          <a:noFill/>
-          <a:ln/>
-        </p:spPr>
-        <p:txBody>
-          <a:bodyPr wrap="square" lIns="0" tIns="0" rIns="0" bIns="0" rtlCol="0" anchor="ctr">
+            <a:off x="7818120" y="3300984"/>
+            <a:ext cx="3090672" cy="877824"/>
+          </a:xfrm>
+          <a:prstGeom prst="rect">
+            <a:avLst/>
+          </a:prstGeom>
+          <a:noFill/>
+          <a:ln/>
+        </p:spPr>
+        <p:txBody>
+          <a:bodyPr wrap="square" lIns="254" tIns="254" rIns="254" bIns="254" rtlCol="0" anchor="t">
             <a:normAutofit/>
           </a:bodyPr>
           <a:lstStyle/>
           <a:p>
-            <a:pPr algn="ctr" indent="0" marL="0">
-              <a:buNone/>
-            </a:pPr>
-            <a:r>
-              <a:rPr lang="en-US" sz="1500" b="1" dirty="0">
-                <a:solidFill>
-                  <a:srgbClr val="FFFFFF"/>
-                </a:solidFill>
-                <a:latin typeface="Aptos" pitchFamily="34" charset="0"/>
-                <a:ea typeface="Aptos" pitchFamily="34" charset="-122"/>
-                <a:cs typeface="Aptos" pitchFamily="34" charset="-120"/>
-              </a:rPr>
-              <a:t>Plan</a:t>
-            </a:r>
-            <a:endParaRPr lang="en-US" sz="1500" dirty="0"/>
+            <a:r>
+              <a:rPr lang="en-US" sz="1380" dirty="0">
+                <a:solidFill>
+                  <a:srgbClr val="17364A"/>
+                </a:solidFill>
+                <a:latin typeface="Aptos" pitchFamily="34" charset="0"/>
+                <a:ea typeface="Aptos" pitchFamily="34" charset="-122"/>
+                <a:cs typeface="Aptos" pitchFamily="34" charset="-120"/>
+              </a:rPr>
+              <a:t>Before launching an AI tool that summarizes case investigation notes, investigators.</a:t>
+            </a:r>
+            <a:endParaRPr lang="en-US" sz="1380" dirty="0"/>
+          </a:p>
+          <a:p>
+            <a:r>
+              <a:rPr lang="en-US" sz="1380" dirty="0">
+                <a:solidFill>
+                  <a:srgbClr val="17364A"/>
+                </a:solidFill>
+                <a:latin typeface="Aptos" pitchFamily="34" charset="0"/>
+                <a:ea typeface="Aptos" pitchFamily="34" charset="-122"/>
+                <a:cs typeface="Aptos" pitchFamily="34" charset="-120"/>
+              </a:rPr>
+              <a:t>Testers verify whether the summary is understandable, source information is visible,.</a:t>
+            </a:r>
+            <a:endParaRPr lang="en-US" sz="1380" dirty="0"/>
           </a:p>
         </p:txBody>
       </p:sp>
       <p:sp>
         <p:nvSpPr>
           <p:cNvPr id="16" name="Shape 14"/>
-          <p:cNvSpPr/>
-          <p:nvPr/>
-        </p:nvSpPr>
-        <p:spPr>
-          <a:xfrm>
-            <a:off x="8976360" y="3319272"/>
-            <a:ext cx="792480" cy="749808"/>
-          </a:xfrm>
-          <a:prstGeom prst="roundRect">
-            <a:avLst>
-              <a:gd name="adj" fmla="val 14634"/>
-            </a:avLst>
-          </a:prstGeom>
-          <a:solidFill>
-            <a:srgbClr val="2F8A28"/>
-          </a:solidFill>
-          <a:ln w="12700">
-            <a:solidFill>
-              <a:srgbClr val="2F8A28"/>
-            </a:solidFill>
-            <a:prstDash val="solid"/>
-          </a:ln>
-        </p:spPr>
-      </p:sp>
-      <p:sp>
-        <p:nvSpPr>
-          <p:cNvPr id="17" name="Text 15"/>
-          <p:cNvSpPr/>
-          <p:nvPr/>
-        </p:nvSpPr>
-        <p:spPr>
-          <a:xfrm>
-            <a:off x="9049512" y="3511296"/>
-            <a:ext cx="646176" cy="310896"/>
-          </a:xfrm>
-          <a:prstGeom prst="rect">
-            <a:avLst/>
-          </a:prstGeom>
-          <a:noFill/>
-          <a:ln/>
-        </p:spPr>
-        <p:txBody>
-          <a:bodyPr wrap="square" lIns="0" tIns="0" rIns="0" bIns="0" rtlCol="0" anchor="ctr">
-            <a:normAutofit/>
-          </a:bodyPr>
-          <a:lstStyle/>
-          <a:p>
-            <a:pPr algn="ctr" indent="0" marL="0">
-              <a:buNone/>
-            </a:pPr>
-            <a:r>
-              <a:rPr lang="en-US" sz="1500" b="1" dirty="0">
-                <a:solidFill>
-                  <a:srgbClr val="FFFFFF"/>
-                </a:solidFill>
-                <a:latin typeface="Aptos" pitchFamily="34" charset="0"/>
-                <a:ea typeface="Aptos" pitchFamily="34" charset="-122"/>
-                <a:cs typeface="Aptos" pitchFamily="34" charset="-120"/>
-              </a:rPr>
-              <a:t>Do</a:t>
-            </a:r>
-            <a:endParaRPr lang="en-US" sz="1500" dirty="0"/>
-          </a:p>
-        </p:txBody>
-      </p:sp>
-      <p:sp>
-        <p:nvSpPr>
-          <p:cNvPr id="18" name="Shape 16"/>
-          <p:cNvSpPr/>
-          <p:nvPr/>
-        </p:nvSpPr>
-        <p:spPr>
-          <a:xfrm>
-            <a:off x="10024872" y="3319272"/>
-            <a:ext cx="792480" cy="749808"/>
-          </a:xfrm>
-          <a:prstGeom prst="roundRect">
-            <a:avLst>
-              <a:gd name="adj" fmla="val 14634"/>
-            </a:avLst>
-          </a:prstGeom>
-          <a:solidFill>
-            <a:srgbClr val="D69A2D"/>
-          </a:solidFill>
-          <a:ln w="12700">
-            <a:solidFill>
-              <a:srgbClr val="D69A2D"/>
-            </a:solidFill>
-            <a:prstDash val="solid"/>
-          </a:ln>
-        </p:spPr>
-      </p:sp>
-      <p:sp>
-        <p:nvSpPr>
-          <p:cNvPr id="19" name="Text 17"/>
-          <p:cNvSpPr/>
-          <p:nvPr/>
-        </p:nvSpPr>
-        <p:spPr>
-          <a:xfrm>
-            <a:off x="10098024" y="3511296"/>
-            <a:ext cx="646176" cy="310896"/>
-          </a:xfrm>
-          <a:prstGeom prst="rect">
-            <a:avLst/>
-          </a:prstGeom>
-          <a:noFill/>
-          <a:ln/>
-        </p:spPr>
-        <p:txBody>
-          <a:bodyPr wrap="square" lIns="0" tIns="0" rIns="0" bIns="0" rtlCol="0" anchor="ctr">
-            <a:normAutofit/>
-          </a:bodyPr>
-          <a:lstStyle/>
-          <a:p>
-            <a:pPr algn="ctr" indent="0" marL="0">
-              <a:buNone/>
-            </a:pPr>
-            <a:r>
-              <a:rPr lang="en-US" sz="1500" b="1" dirty="0">
-                <a:solidFill>
-                  <a:srgbClr val="FFFFFF"/>
-                </a:solidFill>
-                <a:latin typeface="Aptos" pitchFamily="34" charset="0"/>
-                <a:ea typeface="Aptos" pitchFamily="34" charset="-122"/>
-                <a:cs typeface="Aptos" pitchFamily="34" charset="-120"/>
-              </a:rPr>
-              <a:t>Review</a:t>
-            </a:r>
-            <a:endParaRPr lang="en-US" sz="1500" dirty="0"/>
-          </a:p>
-        </p:txBody>
-      </p:sp>
-      <p:sp>
-        <p:nvSpPr>
-          <p:cNvPr id="20" name="Shape 18"/>
-          <p:cNvSpPr/>
-          <p:nvPr/>
-        </p:nvSpPr>
-        <p:spPr>
-          <a:xfrm>
-            <a:off x="8293608" y="4389120"/>
-            <a:ext cx="2157984" cy="0"/>
-          </a:xfrm>
-          <a:prstGeom prst="line">
-            <a:avLst/>
-          </a:prstGeom>
-          <a:noFill/>
-          <a:ln w="25400">
-            <a:solidFill>
-              <a:srgbClr val="8ABBD8"/>
-            </a:solidFill>
-            <a:prstDash val="solid"/>
-          </a:ln>
-        </p:spPr>
-      </p:sp>
-      <p:sp>
-        <p:nvSpPr>
-          <p:cNvPr id="21" name="Text 19"/>
-          <p:cNvSpPr/>
-          <p:nvPr/>
-        </p:nvSpPr>
-        <p:spPr>
-          <a:xfrm>
-            <a:off x="7909560" y="3977640"/>
-            <a:ext cx="2926080" cy="182880"/>
-          </a:xfrm>
-          <a:prstGeom prst="rect">
-            <a:avLst/>
-          </a:prstGeom>
-          <a:noFill/>
-          <a:ln/>
-        </p:spPr>
-        <p:txBody>
-          <a:bodyPr wrap="square" lIns="0" tIns="0" rIns="0" bIns="0" rtlCol="0" anchor="ctr"/>
-          <a:lstStyle/>
-          <a:p>
-            <a:pPr algn="ctr" indent="0" marL="0">
-              <a:buNone/>
-            </a:pPr>
-            <a:r>
-              <a:rPr lang="en-US" sz="1000" dirty="0">
-                <a:solidFill>
-                  <a:srgbClr val="003A63"/>
-                </a:solidFill>
-                <a:latin typeface="Aptos" pitchFamily="34" charset="0"/>
-                <a:ea typeface="Aptos" pitchFamily="34" charset="-122"/>
-                <a:cs typeface="Aptos" pitchFamily="34" charset="-120"/>
-              </a:rPr>
-              <a:t>Dependencies visible</a:t>
-            </a:r>
-            <a:endParaRPr lang="en-US" sz="1000" dirty="0"/>
-          </a:p>
-        </p:txBody>
-      </p:sp>
-      <p:sp>
-        <p:nvSpPr>
-          <p:cNvPr id="22" name="Shape 20"/>
           <p:cNvSpPr/>
           <p:nvPr/>
         </p:nvSpPr>
@@ -17120,7 +14943,7 @@
       </p:sp>
       <p:sp>
         <p:nvSpPr>
-          <p:cNvPr id="23" name="Text 21"/>
+          <p:cNvPr id="17" name="Text 15"/>
           <p:cNvSpPr/>
           <p:nvPr/>
         </p:nvSpPr>
@@ -17159,7 +14982,7 @@
       </p:sp>
       <p:sp>
         <p:nvSpPr>
-          <p:cNvPr id="24" name="Text 22"/>
+          <p:cNvPr id="18" name="Text 16"/>
           <p:cNvSpPr/>
           <p:nvPr/>
         </p:nvSpPr>
@@ -17667,13 +15490,11 @@
             </a:avLst>
           </a:prstGeom>
           <a:solidFill>
-            <a:srgbClr val="FFFFFF">
-              <a:alpha val="88000"/>
-            </a:srgbClr>
+            <a:srgbClr val="FFFFFF"/>
           </a:solidFill>
           <a:ln w="12700">
             <a:solidFill>
-              <a:srgbClr val="D6E8F2"/>
+              <a:srgbClr val="B9D7E6"/>
             </a:solidFill>
             <a:prstDash val="solid"/>
           </a:ln>
@@ -17681,30 +15502,42 @@
       </p:sp>
       <p:sp>
         <p:nvSpPr>
-          <p:cNvPr id="14" name="Shape 12"/>
-          <p:cNvSpPr/>
-          <p:nvPr/>
-        </p:nvSpPr>
-        <p:spPr>
-          <a:xfrm>
-            <a:off x="7927848" y="3319272"/>
-            <a:ext cx="792480" cy="749808"/>
-          </a:xfrm>
-          <a:prstGeom prst="roundRect">
-            <a:avLst>
-              <a:gd name="adj" fmla="val 14634"/>
-            </a:avLst>
-          </a:prstGeom>
-          <a:solidFill>
-            <a:srgbClr val="0068B7"/>
-          </a:solidFill>
-          <a:ln w="12700">
-            <a:solidFill>
-              <a:srgbClr val="0068B7"/>
-            </a:solidFill>
-            <a:prstDash val="solid"/>
-          </a:ln>
-        </p:spPr>
+          <p:cNvPr id="14" name="Text 12"/>
+          <p:cNvSpPr/>
+          <p:nvPr/>
+        </p:nvSpPr>
+        <p:spPr>
+          <a:xfrm>
+            <a:off x="7799832" y="2935224"/>
+            <a:ext cx="3145536" cy="256032"/>
+          </a:xfrm>
+          <a:prstGeom prst="rect">
+            <a:avLst/>
+          </a:prstGeom>
+          <a:noFill/>
+          <a:ln/>
+        </p:spPr>
+        <p:txBody>
+          <a:bodyPr wrap="square" lIns="0" tIns="0" rIns="0" bIns="0" rtlCol="0" anchor="ctr"/>
+          <a:lstStyle/>
+          <a:p>
+            <a:pPr indent="0" marL="0">
+              <a:buNone/>
+            </a:pPr>
+            <a:r>
+              <a:rPr lang="en-US" sz="1300" b="1" dirty="0">
+                <a:solidFill>
+                  <a:srgbClr val="0068B7"/>
+                </a:solidFill>
+                <a:latin typeface="Aptos" pitchFamily="34" charset="0"/>
+                <a:ea typeface="Aptos" pitchFamily="34" charset="-122"/>
+                <a:cs typeface="Aptos" pitchFamily="34" charset="-120"/>
+              </a:rPr>
+              <a:t>Concept checkpoints</a:t>
+            </a:r>
+            <a:endParaRPr lang="en-US" sz="1300" dirty="0"/>
+          </a:p>
+        </p:txBody>
       </p:sp>
       <p:sp>
         <p:nvSpPr>
@@ -17714,240 +15547,67 @@
         </p:nvSpPr>
         <p:spPr>
           <a:xfrm>
-            <a:off x="8001000" y="3511296"/>
-            <a:ext cx="646176" cy="310896"/>
-          </a:xfrm>
-          <a:prstGeom prst="rect">
-            <a:avLst/>
-          </a:prstGeom>
-          <a:noFill/>
-          <a:ln/>
-        </p:spPr>
-        <p:txBody>
-          <a:bodyPr wrap="square" lIns="0" tIns="0" rIns="0" bIns="0" rtlCol="0" anchor="ctr">
+            <a:off x="7818120" y="3300984"/>
+            <a:ext cx="3090672" cy="877824"/>
+          </a:xfrm>
+          <a:prstGeom prst="rect">
+            <a:avLst/>
+          </a:prstGeom>
+          <a:noFill/>
+          <a:ln/>
+        </p:spPr>
+        <p:txBody>
+          <a:bodyPr wrap="square" lIns="254" tIns="254" rIns="254" bIns="254" rtlCol="0" anchor="t">
             <a:normAutofit/>
           </a:bodyPr>
           <a:lstStyle/>
           <a:p>
-            <a:pPr algn="ctr" indent="0" marL="0">
-              <a:buNone/>
-            </a:pPr>
-            <a:r>
-              <a:rPr lang="en-US" sz="1500" b="1" dirty="0">
-                <a:solidFill>
-                  <a:srgbClr val="FFFFFF"/>
-                </a:solidFill>
-                <a:latin typeface="Aptos" pitchFamily="34" charset="0"/>
-                <a:ea typeface="Aptos" pitchFamily="34" charset="-122"/>
-                <a:cs typeface="Aptos" pitchFamily="34" charset="-120"/>
-              </a:rPr>
-              <a:t>Plan</a:t>
-            </a:r>
-            <a:endParaRPr lang="en-US" sz="1500" dirty="0"/>
+            <a:r>
+              <a:rPr lang="en-US" sz="1380" dirty="0">
+                <a:solidFill>
+                  <a:srgbClr val="17364A"/>
+                </a:solidFill>
+                <a:latin typeface="Aptos" pitchFamily="34" charset="0"/>
+                <a:ea typeface="Aptos" pitchFamily="34" charset="-122"/>
+                <a:cs typeface="Aptos" pitchFamily="34" charset="-120"/>
+              </a:rPr>
+              <a:t>Testers should include the roles that will actually use or supervise the AI-supported.</a:t>
+            </a:r>
+            <a:endParaRPr lang="en-US" sz="1380" dirty="0"/>
+          </a:p>
+          <a:p>
+            <a:r>
+              <a:rPr lang="en-US" sz="1380" dirty="0">
+                <a:solidFill>
+                  <a:srgbClr val="17364A"/>
+                </a:solidFill>
+                <a:latin typeface="Aptos" pitchFamily="34" charset="0"/>
+                <a:ea typeface="Aptos" pitchFamily="34" charset="-122"/>
+                <a:cs typeface="Aptos" pitchFamily="34" charset="-120"/>
+              </a:rPr>
+              <a:t>Test scenarios should include more than ideal cases.</a:t>
+            </a:r>
+            <a:endParaRPr lang="en-US" sz="1380" dirty="0"/>
+          </a:p>
+          <a:p>
+            <a:r>
+              <a:rPr lang="en-US" sz="1380" dirty="0">
+                <a:solidFill>
+                  <a:srgbClr val="17364A"/>
+                </a:solidFill>
+                <a:latin typeface="Aptos" pitchFamily="34" charset="0"/>
+                <a:ea typeface="Aptos" pitchFamily="34" charset="-122"/>
+                <a:cs typeface="Aptos" pitchFamily="34" charset="-120"/>
+              </a:rPr>
+              <a:t>AI-supported workflows should be tested with incomplete data, conflicting information,.</a:t>
+            </a:r>
+            <a:endParaRPr lang="en-US" sz="1380" dirty="0"/>
           </a:p>
         </p:txBody>
       </p:sp>
       <p:sp>
         <p:nvSpPr>
           <p:cNvPr id="16" name="Shape 14"/>
-          <p:cNvSpPr/>
-          <p:nvPr/>
-        </p:nvSpPr>
-        <p:spPr>
-          <a:xfrm>
-            <a:off x="8976360" y="3319272"/>
-            <a:ext cx="792480" cy="749808"/>
-          </a:xfrm>
-          <a:prstGeom prst="roundRect">
-            <a:avLst>
-              <a:gd name="adj" fmla="val 14634"/>
-            </a:avLst>
-          </a:prstGeom>
-          <a:solidFill>
-            <a:srgbClr val="2F8A28"/>
-          </a:solidFill>
-          <a:ln w="12700">
-            <a:solidFill>
-              <a:srgbClr val="2F8A28"/>
-            </a:solidFill>
-            <a:prstDash val="solid"/>
-          </a:ln>
-        </p:spPr>
-      </p:sp>
-      <p:sp>
-        <p:nvSpPr>
-          <p:cNvPr id="17" name="Text 15"/>
-          <p:cNvSpPr/>
-          <p:nvPr/>
-        </p:nvSpPr>
-        <p:spPr>
-          <a:xfrm>
-            <a:off x="9049512" y="3511296"/>
-            <a:ext cx="646176" cy="310896"/>
-          </a:xfrm>
-          <a:prstGeom prst="rect">
-            <a:avLst/>
-          </a:prstGeom>
-          <a:noFill/>
-          <a:ln/>
-        </p:spPr>
-        <p:txBody>
-          <a:bodyPr wrap="square" lIns="0" tIns="0" rIns="0" bIns="0" rtlCol="0" anchor="ctr">
-            <a:normAutofit/>
-          </a:bodyPr>
-          <a:lstStyle/>
-          <a:p>
-            <a:pPr algn="ctr" indent="0" marL="0">
-              <a:buNone/>
-            </a:pPr>
-            <a:r>
-              <a:rPr lang="en-US" sz="1500" b="1" dirty="0">
-                <a:solidFill>
-                  <a:srgbClr val="FFFFFF"/>
-                </a:solidFill>
-                <a:latin typeface="Aptos" pitchFamily="34" charset="0"/>
-                <a:ea typeface="Aptos" pitchFamily="34" charset="-122"/>
-                <a:cs typeface="Aptos" pitchFamily="34" charset="-120"/>
-              </a:rPr>
-              <a:t>Do</a:t>
-            </a:r>
-            <a:endParaRPr lang="en-US" sz="1500" dirty="0"/>
-          </a:p>
-        </p:txBody>
-      </p:sp>
-      <p:sp>
-        <p:nvSpPr>
-          <p:cNvPr id="18" name="Shape 16"/>
-          <p:cNvSpPr/>
-          <p:nvPr/>
-        </p:nvSpPr>
-        <p:spPr>
-          <a:xfrm>
-            <a:off x="10024872" y="3319272"/>
-            <a:ext cx="792480" cy="749808"/>
-          </a:xfrm>
-          <a:prstGeom prst="roundRect">
-            <a:avLst>
-              <a:gd name="adj" fmla="val 14634"/>
-            </a:avLst>
-          </a:prstGeom>
-          <a:solidFill>
-            <a:srgbClr val="D69A2D"/>
-          </a:solidFill>
-          <a:ln w="12700">
-            <a:solidFill>
-              <a:srgbClr val="D69A2D"/>
-            </a:solidFill>
-            <a:prstDash val="solid"/>
-          </a:ln>
-        </p:spPr>
-      </p:sp>
-      <p:sp>
-        <p:nvSpPr>
-          <p:cNvPr id="19" name="Text 17"/>
-          <p:cNvSpPr/>
-          <p:nvPr/>
-        </p:nvSpPr>
-        <p:spPr>
-          <a:xfrm>
-            <a:off x="10098024" y="3511296"/>
-            <a:ext cx="646176" cy="310896"/>
-          </a:xfrm>
-          <a:prstGeom prst="rect">
-            <a:avLst/>
-          </a:prstGeom>
-          <a:noFill/>
-          <a:ln/>
-        </p:spPr>
-        <p:txBody>
-          <a:bodyPr wrap="square" lIns="0" tIns="0" rIns="0" bIns="0" rtlCol="0" anchor="ctr">
-            <a:normAutofit/>
-          </a:bodyPr>
-          <a:lstStyle/>
-          <a:p>
-            <a:pPr algn="ctr" indent="0" marL="0">
-              <a:buNone/>
-            </a:pPr>
-            <a:r>
-              <a:rPr lang="en-US" sz="1500" b="1" dirty="0">
-                <a:solidFill>
-                  <a:srgbClr val="FFFFFF"/>
-                </a:solidFill>
-                <a:latin typeface="Aptos" pitchFamily="34" charset="0"/>
-                <a:ea typeface="Aptos" pitchFamily="34" charset="-122"/>
-                <a:cs typeface="Aptos" pitchFamily="34" charset="-120"/>
-              </a:rPr>
-              <a:t>Review</a:t>
-            </a:r>
-            <a:endParaRPr lang="en-US" sz="1500" dirty="0"/>
-          </a:p>
-        </p:txBody>
-      </p:sp>
-      <p:sp>
-        <p:nvSpPr>
-          <p:cNvPr id="20" name="Shape 18"/>
-          <p:cNvSpPr/>
-          <p:nvPr/>
-        </p:nvSpPr>
-        <p:spPr>
-          <a:xfrm>
-            <a:off x="8293608" y="4389120"/>
-            <a:ext cx="2157984" cy="0"/>
-          </a:xfrm>
-          <a:prstGeom prst="line">
-            <a:avLst/>
-          </a:prstGeom>
-          <a:noFill/>
-          <a:ln w="25400">
-            <a:solidFill>
-              <a:srgbClr val="8ABBD8"/>
-            </a:solidFill>
-            <a:prstDash val="solid"/>
-          </a:ln>
-        </p:spPr>
-      </p:sp>
-      <p:sp>
-        <p:nvSpPr>
-          <p:cNvPr id="21" name="Text 19"/>
-          <p:cNvSpPr/>
-          <p:nvPr/>
-        </p:nvSpPr>
-        <p:spPr>
-          <a:xfrm>
-            <a:off x="7909560" y="3977640"/>
-            <a:ext cx="2926080" cy="182880"/>
-          </a:xfrm>
-          <a:prstGeom prst="rect">
-            <a:avLst/>
-          </a:prstGeom>
-          <a:noFill/>
-          <a:ln/>
-        </p:spPr>
-        <p:txBody>
-          <a:bodyPr wrap="square" lIns="0" tIns="0" rIns="0" bIns="0" rtlCol="0" anchor="ctr"/>
-          <a:lstStyle/>
-          <a:p>
-            <a:pPr algn="ctr" indent="0" marL="0">
-              <a:buNone/>
-            </a:pPr>
-            <a:r>
-              <a:rPr lang="en-US" sz="1000" dirty="0">
-                <a:solidFill>
-                  <a:srgbClr val="003A63"/>
-                </a:solidFill>
-                <a:latin typeface="Aptos" pitchFamily="34" charset="0"/>
-                <a:ea typeface="Aptos" pitchFamily="34" charset="-122"/>
-                <a:cs typeface="Aptos" pitchFamily="34" charset="-120"/>
-              </a:rPr>
-              <a:t>Dependencies visible</a:t>
-            </a:r>
-            <a:endParaRPr lang="en-US" sz="1000" dirty="0"/>
-          </a:p>
-        </p:txBody>
-      </p:sp>
-      <p:sp>
-        <p:nvSpPr>
-          <p:cNvPr id="22" name="Shape 20"/>
           <p:cNvSpPr/>
           <p:nvPr/>
         </p:nvSpPr>
@@ -17974,7 +15634,7 @@
       </p:sp>
       <p:sp>
         <p:nvSpPr>
-          <p:cNvPr id="23" name="Text 21"/>
+          <p:cNvPr id="17" name="Text 15"/>
           <p:cNvSpPr/>
           <p:nvPr/>
         </p:nvSpPr>
@@ -18013,7 +15673,7 @@
       </p:sp>
       <p:sp>
         <p:nvSpPr>
-          <p:cNvPr id="24" name="Text 22"/>
+          <p:cNvPr id="18" name="Text 16"/>
           <p:cNvSpPr/>
           <p:nvPr/>
         </p:nvSpPr>
@@ -18521,13 +16181,11 @@
             </a:avLst>
           </a:prstGeom>
           <a:solidFill>
-            <a:srgbClr val="FFFFFF">
-              <a:alpha val="88000"/>
-            </a:srgbClr>
+            <a:srgbClr val="FFFFFF"/>
           </a:solidFill>
           <a:ln w="12700">
             <a:solidFill>
-              <a:srgbClr val="D6E8F2"/>
+              <a:srgbClr val="B9D7E6"/>
             </a:solidFill>
             <a:prstDash val="solid"/>
           </a:ln>
@@ -18535,30 +16193,42 @@
       </p:sp>
       <p:sp>
         <p:nvSpPr>
-          <p:cNvPr id="14" name="Shape 12"/>
-          <p:cNvSpPr/>
-          <p:nvPr/>
-        </p:nvSpPr>
-        <p:spPr>
-          <a:xfrm>
-            <a:off x="7927848" y="3319272"/>
-            <a:ext cx="792480" cy="749808"/>
-          </a:xfrm>
-          <a:prstGeom prst="roundRect">
-            <a:avLst>
-              <a:gd name="adj" fmla="val 14634"/>
-            </a:avLst>
-          </a:prstGeom>
-          <a:solidFill>
-            <a:srgbClr val="0068B7"/>
-          </a:solidFill>
-          <a:ln w="12700">
-            <a:solidFill>
-              <a:srgbClr val="0068B7"/>
-            </a:solidFill>
-            <a:prstDash val="solid"/>
-          </a:ln>
-        </p:spPr>
+          <p:cNvPr id="14" name="Text 12"/>
+          <p:cNvSpPr/>
+          <p:nvPr/>
+        </p:nvSpPr>
+        <p:spPr>
+          <a:xfrm>
+            <a:off x="7799832" y="2935224"/>
+            <a:ext cx="3145536" cy="256032"/>
+          </a:xfrm>
+          <a:prstGeom prst="rect">
+            <a:avLst/>
+          </a:prstGeom>
+          <a:noFill/>
+          <a:ln/>
+        </p:spPr>
+        <p:txBody>
+          <a:bodyPr wrap="square" lIns="0" tIns="0" rIns="0" bIns="0" rtlCol="0" anchor="ctr"/>
+          <a:lstStyle/>
+          <a:p>
+            <a:pPr indent="0" marL="0">
+              <a:buNone/>
+            </a:pPr>
+            <a:r>
+              <a:rPr lang="en-US" sz="1300" b="1" dirty="0">
+                <a:solidFill>
+                  <a:srgbClr val="0068B7"/>
+                </a:solidFill>
+                <a:latin typeface="Aptos" pitchFamily="34" charset="0"/>
+                <a:ea typeface="Aptos" pitchFamily="34" charset="-122"/>
+                <a:cs typeface="Aptos" pitchFamily="34" charset="-120"/>
+              </a:rPr>
+              <a:t>Concept checkpoints</a:t>
+            </a:r>
+            <a:endParaRPr lang="en-US" sz="1300" dirty="0"/>
+          </a:p>
+        </p:txBody>
       </p:sp>
       <p:sp>
         <p:nvSpPr>
@@ -18568,240 +16238,53 @@
         </p:nvSpPr>
         <p:spPr>
           <a:xfrm>
-            <a:off x="8001000" y="3511296"/>
-            <a:ext cx="646176" cy="310896"/>
-          </a:xfrm>
-          <a:prstGeom prst="rect">
-            <a:avLst/>
-          </a:prstGeom>
-          <a:noFill/>
-          <a:ln/>
-        </p:spPr>
-        <p:txBody>
-          <a:bodyPr wrap="square" lIns="0" tIns="0" rIns="0" bIns="0" rtlCol="0" anchor="ctr">
+            <a:off x="7818120" y="3300984"/>
+            <a:ext cx="3090672" cy="877824"/>
+          </a:xfrm>
+          <a:prstGeom prst="rect">
+            <a:avLst/>
+          </a:prstGeom>
+          <a:noFill/>
+          <a:ln/>
+        </p:spPr>
+        <p:txBody>
+          <a:bodyPr wrap="square" lIns="254" tIns="254" rIns="254" bIns="254" rtlCol="0" anchor="t">
             <a:normAutofit/>
           </a:bodyPr>
           <a:lstStyle/>
           <a:p>
-            <a:pPr algn="ctr" indent="0" marL="0">
-              <a:buNone/>
-            </a:pPr>
-            <a:r>
-              <a:rPr lang="en-US" sz="1500" b="1" dirty="0">
-                <a:solidFill>
-                  <a:srgbClr val="FFFFFF"/>
-                </a:solidFill>
-                <a:latin typeface="Aptos" pitchFamily="34" charset="0"/>
-                <a:ea typeface="Aptos" pitchFamily="34" charset="-122"/>
-                <a:cs typeface="Aptos" pitchFamily="34" charset="-120"/>
-              </a:rPr>
-              <a:t>Plan</a:t>
-            </a:r>
-            <a:endParaRPr lang="en-US" sz="1500" dirty="0"/>
+            <a:r>
+              <a:rPr lang="en-US" sz="1380" dirty="0">
+                <a:solidFill>
+                  <a:srgbClr val="17364A"/>
+                </a:solidFill>
+                <a:latin typeface="Aptos" pitchFamily="34" charset="0"/>
+                <a:ea typeface="Aptos" pitchFamily="34" charset="-122"/>
+                <a:cs typeface="Aptos" pitchFamily="34" charset="-120"/>
+              </a:rPr>
+              <a:t>Issues should be categorized by severity, assigned to owners, and resolved or accepted.</a:t>
+            </a:r>
+            <a:endParaRPr lang="en-US" sz="1380" dirty="0"/>
+          </a:p>
+          <a:p>
+            <a:r>
+              <a:rPr lang="en-US" sz="1380" dirty="0">
+                <a:solidFill>
+                  <a:srgbClr val="17364A"/>
+                </a:solidFill>
+                <a:latin typeface="Aptos" pitchFamily="34" charset="0"/>
+                <a:ea typeface="Aptos" pitchFamily="34" charset="-122"/>
+                <a:cs typeface="Aptos" pitchFamily="34" charset="-120"/>
+              </a:rPr>
+              <a:t>It should proceed only if acceptance criteria are met and unresolved issues do not create.</a:t>
+            </a:r>
+            <a:endParaRPr lang="en-US" sz="1380" dirty="0"/>
           </a:p>
         </p:txBody>
       </p:sp>
       <p:sp>
         <p:nvSpPr>
           <p:cNvPr id="16" name="Shape 14"/>
-          <p:cNvSpPr/>
-          <p:nvPr/>
-        </p:nvSpPr>
-        <p:spPr>
-          <a:xfrm>
-            <a:off x="8976360" y="3319272"/>
-            <a:ext cx="792480" cy="749808"/>
-          </a:xfrm>
-          <a:prstGeom prst="roundRect">
-            <a:avLst>
-              <a:gd name="adj" fmla="val 14634"/>
-            </a:avLst>
-          </a:prstGeom>
-          <a:solidFill>
-            <a:srgbClr val="2F8A28"/>
-          </a:solidFill>
-          <a:ln w="12700">
-            <a:solidFill>
-              <a:srgbClr val="2F8A28"/>
-            </a:solidFill>
-            <a:prstDash val="solid"/>
-          </a:ln>
-        </p:spPr>
-      </p:sp>
-      <p:sp>
-        <p:nvSpPr>
-          <p:cNvPr id="17" name="Text 15"/>
-          <p:cNvSpPr/>
-          <p:nvPr/>
-        </p:nvSpPr>
-        <p:spPr>
-          <a:xfrm>
-            <a:off x="9049512" y="3511296"/>
-            <a:ext cx="646176" cy="310896"/>
-          </a:xfrm>
-          <a:prstGeom prst="rect">
-            <a:avLst/>
-          </a:prstGeom>
-          <a:noFill/>
-          <a:ln/>
-        </p:spPr>
-        <p:txBody>
-          <a:bodyPr wrap="square" lIns="0" tIns="0" rIns="0" bIns="0" rtlCol="0" anchor="ctr">
-            <a:normAutofit/>
-          </a:bodyPr>
-          <a:lstStyle/>
-          <a:p>
-            <a:pPr algn="ctr" indent="0" marL="0">
-              <a:buNone/>
-            </a:pPr>
-            <a:r>
-              <a:rPr lang="en-US" sz="1500" b="1" dirty="0">
-                <a:solidFill>
-                  <a:srgbClr val="FFFFFF"/>
-                </a:solidFill>
-                <a:latin typeface="Aptos" pitchFamily="34" charset="0"/>
-                <a:ea typeface="Aptos" pitchFamily="34" charset="-122"/>
-                <a:cs typeface="Aptos" pitchFamily="34" charset="-120"/>
-              </a:rPr>
-              <a:t>Do</a:t>
-            </a:r>
-            <a:endParaRPr lang="en-US" sz="1500" dirty="0"/>
-          </a:p>
-        </p:txBody>
-      </p:sp>
-      <p:sp>
-        <p:nvSpPr>
-          <p:cNvPr id="18" name="Shape 16"/>
-          <p:cNvSpPr/>
-          <p:nvPr/>
-        </p:nvSpPr>
-        <p:spPr>
-          <a:xfrm>
-            <a:off x="10024872" y="3319272"/>
-            <a:ext cx="792480" cy="749808"/>
-          </a:xfrm>
-          <a:prstGeom prst="roundRect">
-            <a:avLst>
-              <a:gd name="adj" fmla="val 14634"/>
-            </a:avLst>
-          </a:prstGeom>
-          <a:solidFill>
-            <a:srgbClr val="D69A2D"/>
-          </a:solidFill>
-          <a:ln w="12700">
-            <a:solidFill>
-              <a:srgbClr val="D69A2D"/>
-            </a:solidFill>
-            <a:prstDash val="solid"/>
-          </a:ln>
-        </p:spPr>
-      </p:sp>
-      <p:sp>
-        <p:nvSpPr>
-          <p:cNvPr id="19" name="Text 17"/>
-          <p:cNvSpPr/>
-          <p:nvPr/>
-        </p:nvSpPr>
-        <p:spPr>
-          <a:xfrm>
-            <a:off x="10098024" y="3511296"/>
-            <a:ext cx="646176" cy="310896"/>
-          </a:xfrm>
-          <a:prstGeom prst="rect">
-            <a:avLst/>
-          </a:prstGeom>
-          <a:noFill/>
-          <a:ln/>
-        </p:spPr>
-        <p:txBody>
-          <a:bodyPr wrap="square" lIns="0" tIns="0" rIns="0" bIns="0" rtlCol="0" anchor="ctr">
-            <a:normAutofit/>
-          </a:bodyPr>
-          <a:lstStyle/>
-          <a:p>
-            <a:pPr algn="ctr" indent="0" marL="0">
-              <a:buNone/>
-            </a:pPr>
-            <a:r>
-              <a:rPr lang="en-US" sz="1500" b="1" dirty="0">
-                <a:solidFill>
-                  <a:srgbClr val="FFFFFF"/>
-                </a:solidFill>
-                <a:latin typeface="Aptos" pitchFamily="34" charset="0"/>
-                <a:ea typeface="Aptos" pitchFamily="34" charset="-122"/>
-                <a:cs typeface="Aptos" pitchFamily="34" charset="-120"/>
-              </a:rPr>
-              <a:t>Review</a:t>
-            </a:r>
-            <a:endParaRPr lang="en-US" sz="1500" dirty="0"/>
-          </a:p>
-        </p:txBody>
-      </p:sp>
-      <p:sp>
-        <p:nvSpPr>
-          <p:cNvPr id="20" name="Shape 18"/>
-          <p:cNvSpPr/>
-          <p:nvPr/>
-        </p:nvSpPr>
-        <p:spPr>
-          <a:xfrm>
-            <a:off x="8293608" y="4389120"/>
-            <a:ext cx="2157984" cy="0"/>
-          </a:xfrm>
-          <a:prstGeom prst="line">
-            <a:avLst/>
-          </a:prstGeom>
-          <a:noFill/>
-          <a:ln w="25400">
-            <a:solidFill>
-              <a:srgbClr val="8ABBD8"/>
-            </a:solidFill>
-            <a:prstDash val="solid"/>
-          </a:ln>
-        </p:spPr>
-      </p:sp>
-      <p:sp>
-        <p:nvSpPr>
-          <p:cNvPr id="21" name="Text 19"/>
-          <p:cNvSpPr/>
-          <p:nvPr/>
-        </p:nvSpPr>
-        <p:spPr>
-          <a:xfrm>
-            <a:off x="7909560" y="3977640"/>
-            <a:ext cx="2926080" cy="182880"/>
-          </a:xfrm>
-          <a:prstGeom prst="rect">
-            <a:avLst/>
-          </a:prstGeom>
-          <a:noFill/>
-          <a:ln/>
-        </p:spPr>
-        <p:txBody>
-          <a:bodyPr wrap="square" lIns="0" tIns="0" rIns="0" bIns="0" rtlCol="0" anchor="ctr"/>
-          <a:lstStyle/>
-          <a:p>
-            <a:pPr algn="ctr" indent="0" marL="0">
-              <a:buNone/>
-            </a:pPr>
-            <a:r>
-              <a:rPr lang="en-US" sz="1000" dirty="0">
-                <a:solidFill>
-                  <a:srgbClr val="003A63"/>
-                </a:solidFill>
-                <a:latin typeface="Aptos" pitchFamily="34" charset="0"/>
-                <a:ea typeface="Aptos" pitchFamily="34" charset="-122"/>
-                <a:cs typeface="Aptos" pitchFamily="34" charset="-120"/>
-              </a:rPr>
-              <a:t>Dependencies visible</a:t>
-            </a:r>
-            <a:endParaRPr lang="en-US" sz="1000" dirty="0"/>
-          </a:p>
-        </p:txBody>
-      </p:sp>
-      <p:sp>
-        <p:nvSpPr>
-          <p:cNvPr id="22" name="Shape 20"/>
           <p:cNvSpPr/>
           <p:nvPr/>
         </p:nvSpPr>
@@ -18828,7 +16311,7 @@
       </p:sp>
       <p:sp>
         <p:nvSpPr>
-          <p:cNvPr id="23" name="Text 21"/>
+          <p:cNvPr id="17" name="Text 15"/>
           <p:cNvSpPr/>
           <p:nvPr/>
         </p:nvSpPr>
@@ -18867,7 +16350,7 @@
       </p:sp>
       <p:sp>
         <p:nvSpPr>
-          <p:cNvPr id="24" name="Text 22"/>
+          <p:cNvPr id="18" name="Text 16"/>
           <p:cNvSpPr/>
           <p:nvPr/>
         </p:nvSpPr>

--- a/downloads/presentations/modules/ops-240.pptx
+++ b/downloads/presentations/modules/ops-240.pptx
@@ -3265,49 +3265,58 @@
           <a:ln/>
         </p:spPr>
         <p:txBody>
-          <a:bodyPr wrap="square" lIns="635" tIns="635" rIns="635" bIns="635" rtlCol="0" anchor="t">
+          <a:bodyPr wrap="square" lIns="1016" tIns="1016" rIns="1016" bIns="1016" rtlCol="0" anchor="t">
             <a:normAutofit/>
           </a:bodyPr>
           <a:lstStyle/>
           <a:p>
+            <a:pPr indent="0" marL="0">
+              <a:buNone/>
+            </a:pPr>
             <a:r>
               <a:rPr lang="en-US" sz="2100" dirty="0">
                 <a:solidFill>
-                  <a:srgbClr val="17364A"/>
-                </a:solidFill>
-                <a:latin typeface="Aptos" pitchFamily="34" charset="0"/>
-                <a:ea typeface="Aptos" pitchFamily="34" charset="-122"/>
-                <a:cs typeface="Aptos" pitchFamily="34" charset="-120"/>
-              </a:rPr>
-              <a:t>Risks and failure modes include the following:</a:t>
+                  <a:srgbClr val="003A63"/>
+                </a:solidFill>
+                <a:latin typeface="Aptos" pitchFamily="34" charset="0"/>
+                <a:ea typeface="Aptos" pitchFamily="34" charset="-122"/>
+                <a:cs typeface="Aptos" pitchFamily="34" charset="-120"/>
+              </a:rPr>
+              <a:t>• Risks and failure modes include the following:</a:t>
             </a:r>
             <a:endParaRPr lang="en-US" sz="2100" dirty="0"/>
           </a:p>
           <a:p>
+            <a:pPr indent="0" marL="0">
+              <a:buNone/>
+            </a:pPr>
             <a:r>
               <a:rPr lang="en-US" sz="2100" dirty="0">
                 <a:solidFill>
-                  <a:srgbClr val="17364A"/>
-                </a:solidFill>
-                <a:latin typeface="Aptos" pitchFamily="34" charset="0"/>
-                <a:ea typeface="Aptos" pitchFamily="34" charset="-122"/>
-                <a:cs typeface="Aptos" pitchFamily="34" charset="-120"/>
-              </a:rPr>
-              <a:t>Testing only ideal scenarios and missing high-risk workflow failures.</a:t>
+                  <a:srgbClr val="003A63"/>
+                </a:solidFill>
+                <a:latin typeface="Aptos" pitchFamily="34" charset="0"/>
+                <a:ea typeface="Aptos" pitchFamily="34" charset="-122"/>
+                <a:cs typeface="Aptos" pitchFamily="34" charset="-120"/>
+              </a:rPr>
+              <a:t>• Testing only ideal scenarios and missing high-risk workflow failures.</a:t>
             </a:r>
             <a:endParaRPr lang="en-US" sz="2100" dirty="0"/>
           </a:p>
           <a:p>
+            <a:pPr indent="0" marL="0">
+              <a:buNone/>
+            </a:pPr>
             <a:r>
               <a:rPr lang="en-US" sz="2100" dirty="0">
                 <a:solidFill>
-                  <a:srgbClr val="17364A"/>
-                </a:solidFill>
-                <a:latin typeface="Aptos" pitchFamily="34" charset="0"/>
-                <a:ea typeface="Aptos" pitchFamily="34" charset="-122"/>
-                <a:cs typeface="Aptos" pitchFamily="34" charset="-120"/>
-              </a:rPr>
-              <a:t>Excluding real end users from testing.</a:t>
+                  <a:srgbClr val="003A63"/>
+                </a:solidFill>
+                <a:latin typeface="Aptos" pitchFamily="34" charset="0"/>
+                <a:ea typeface="Aptos" pitchFamily="34" charset="-122"/>
+                <a:cs typeface="Aptos" pitchFamily="34" charset="-120"/>
+              </a:rPr>
+              <a:t>• Excluding real end users from testing.</a:t>
             </a:r>
             <a:endParaRPr lang="en-US" sz="2100" dirty="0"/>
           </a:p>
@@ -3387,17 +3396,17 @@
         </p:nvSpPr>
         <p:spPr>
           <a:xfrm>
-            <a:off x="7799832" y="1828800"/>
-            <a:ext cx="3145536" cy="685800"/>
-          </a:xfrm>
-          <a:prstGeom prst="rect">
-            <a:avLst/>
-          </a:prstGeom>
-          <a:noFill/>
-          <a:ln/>
-        </p:spPr>
-        <p:txBody>
-          <a:bodyPr wrap="square" lIns="0" tIns="0" rIns="0" bIns="0" rtlCol="0" anchor="t">
+            <a:off x="7799832" y="1801368"/>
+            <a:ext cx="3145536" cy="758952"/>
+          </a:xfrm>
+          <a:prstGeom prst="rect">
+            <a:avLst/>
+          </a:prstGeom>
+          <a:noFill/>
+          <a:ln/>
+        </p:spPr>
+        <p:txBody>
+          <a:bodyPr wrap="square" lIns="254" tIns="254" rIns="254" bIns="254" rtlCol="0" anchor="t">
             <a:normAutofit/>
           </a:bodyPr>
           <a:lstStyle/>
@@ -3406,7 +3415,7 @@
               <a:buNone/>
             </a:pPr>
             <a:r>
-              <a:rPr lang="en-US" sz="1550" dirty="0">
+              <a:rPr lang="en-US" sz="1320" dirty="0">
                 <a:solidFill>
                   <a:srgbClr val="17364A"/>
                 </a:solidFill>
@@ -3416,7 +3425,7 @@
               </a:rPr>
               <a:t>Risks and failure modes include the following:</a:t>
             </a:r>
-            <a:endParaRPr lang="en-US" sz="1550" dirty="0"/>
+            <a:endParaRPr lang="en-US" sz="1320" dirty="0"/>
           </a:p>
         </p:txBody>
       </p:sp>
@@ -3504,13 +3513,16 @@
           <a:ln/>
         </p:spPr>
         <p:txBody>
-          <a:bodyPr wrap="square" lIns="254" tIns="254" rIns="254" bIns="254" rtlCol="0" anchor="t">
+          <a:bodyPr wrap="square" lIns="508" tIns="508" rIns="508" bIns="508" rtlCol="0" anchor="t">
             <a:normAutofit/>
           </a:bodyPr>
           <a:lstStyle/>
           <a:p>
-            <a:r>
-              <a:rPr lang="en-US" sz="1380" dirty="0">
+            <a:pPr indent="0" marL="0">
+              <a:buNone/>
+            </a:pPr>
+            <a:r>
+              <a:rPr lang="en-US" sz="1220" dirty="0">
                 <a:solidFill>
                   <a:srgbClr val="17364A"/>
                 </a:solidFill>
@@ -3520,11 +3532,14 @@
               </a:rPr>
               <a:t>Risks and failure modes include the following:</a:t>
             </a:r>
-            <a:endParaRPr lang="en-US" sz="1380" dirty="0"/>
-          </a:p>
-          <a:p>
-            <a:r>
-              <a:rPr lang="en-US" sz="1380" dirty="0">
+            <a:endParaRPr lang="en-US" sz="1220" dirty="0"/>
+          </a:p>
+          <a:p>
+            <a:pPr indent="0" marL="0">
+              <a:buNone/>
+            </a:pPr>
+            <a:r>
+              <a:rPr lang="en-US" sz="1220" dirty="0">
                 <a:solidFill>
                   <a:srgbClr val="17364A"/>
                 </a:solidFill>
@@ -3532,13 +3547,16 @@
                 <a:ea typeface="Aptos" pitchFamily="34" charset="-122"/>
                 <a:cs typeface="Aptos" pitchFamily="34" charset="-120"/>
               </a:rPr>
-              <a:t>Testing only ideal scenarios and missing high-risk workflow failures.</a:t>
-            </a:r>
-            <a:endParaRPr lang="en-US" sz="1380" dirty="0"/>
-          </a:p>
-          <a:p>
-            <a:r>
-              <a:rPr lang="en-US" sz="1380" dirty="0">
+              <a:t>Testing only ideal scenarios and missing high-risk workflow.</a:t>
+            </a:r>
+            <a:endParaRPr lang="en-US" sz="1220" dirty="0"/>
+          </a:p>
+          <a:p>
+            <a:pPr indent="0" marL="0">
+              <a:buNone/>
+            </a:pPr>
+            <a:r>
+              <a:rPr lang="en-US" sz="1220" dirty="0">
                 <a:solidFill>
                   <a:srgbClr val="17364A"/>
                 </a:solidFill>
@@ -3548,7 +3566,7 @@
               </a:rPr>
               <a:t>Excluding real end users from testing.</a:t>
             </a:r>
-            <a:endParaRPr lang="en-US" sz="1380" dirty="0"/>
+            <a:endParaRPr lang="en-US" sz="1220" dirty="0"/>
           </a:p>
         </p:txBody>
       </p:sp>
@@ -3626,17 +3644,17 @@
         </p:nvSpPr>
         <p:spPr>
           <a:xfrm>
-            <a:off x="7799832" y="5001768"/>
-            <a:ext cx="3145536" cy="502920"/>
-          </a:xfrm>
-          <a:prstGeom prst="rect">
-            <a:avLst/>
-          </a:prstGeom>
-          <a:noFill/>
-          <a:ln/>
-        </p:spPr>
-        <p:txBody>
-          <a:bodyPr wrap="square" lIns="0" tIns="0" rIns="0" bIns="0" rtlCol="0" anchor="t">
+            <a:off x="7799832" y="4974336"/>
+            <a:ext cx="3145536" cy="576072"/>
+          </a:xfrm>
+          <a:prstGeom prst="rect">
+            <a:avLst/>
+          </a:prstGeom>
+          <a:noFill/>
+          <a:ln/>
+        </p:spPr>
+        <p:txBody>
+          <a:bodyPr wrap="square" lIns="254" tIns="254" rIns="254" bIns="254" rtlCol="0" anchor="t">
             <a:normAutofit/>
           </a:bodyPr>
           <a:lstStyle/>
@@ -3645,7 +3663,7 @@
               <a:buNone/>
             </a:pPr>
             <a:r>
-              <a:rPr lang="en-US" sz="1550" dirty="0">
+              <a:rPr lang="en-US" sz="1320" dirty="0">
                 <a:solidFill>
                   <a:srgbClr val="17364A"/>
                 </a:solidFill>
@@ -3653,9 +3671,9 @@
                 <a:ea typeface="Aptos" pitchFamily="34" charset="-122"/>
                 <a:cs typeface="Aptos" pitchFamily="34" charset="-120"/>
               </a:rPr>
-              <a:t>Identify what could go wrong, who could be affected, what safeguards are needed, and what evidence should be reviewed before use expands.</a:t>
-            </a:r>
-            <a:endParaRPr lang="en-US" sz="1550" dirty="0"/>
+              <a:t>Identify what could go wrong, who could be affected, what safeguards are needed, and what evidence should be reviewed.</a:t>
+            </a:r>
+            <a:endParaRPr lang="en-US" sz="1320" dirty="0"/>
           </a:p>
         </p:txBody>
       </p:sp>
@@ -3956,49 +3974,58 @@
           <a:ln/>
         </p:spPr>
         <p:txBody>
-          <a:bodyPr wrap="square" lIns="635" tIns="635" rIns="635" bIns="635" rtlCol="0" anchor="t">
+          <a:bodyPr wrap="square" lIns="1016" tIns="1016" rIns="1016" bIns="1016" rtlCol="0" anchor="t">
             <a:normAutofit/>
           </a:bodyPr>
           <a:lstStyle/>
           <a:p>
+            <a:pPr indent="0" marL="0">
+              <a:buNone/>
+            </a:pPr>
             <a:r>
               <a:rPr lang="en-US" sz="2100" dirty="0">
                 <a:solidFill>
-                  <a:srgbClr val="17364A"/>
-                </a:solidFill>
-                <a:latin typeface="Aptos" pitchFamily="34" charset="0"/>
-                <a:ea typeface="Aptos" pitchFamily="34" charset="-122"/>
-                <a:cs typeface="Aptos" pitchFamily="34" charset="-120"/>
-              </a:rPr>
-              <a:t>Launching despite unresolved issues that affect safety, equity, or documentation.</a:t>
+                  <a:srgbClr val="003A63"/>
+                </a:solidFill>
+                <a:latin typeface="Aptos" pitchFamily="34" charset="0"/>
+                <a:ea typeface="Aptos" pitchFamily="34" charset="-122"/>
+                <a:cs typeface="Aptos" pitchFamily="34" charset="-120"/>
+              </a:rPr>
+              <a:t>• Launching despite unresolved issues that affect safety, equity, or documentation.</a:t>
             </a:r>
             <a:endParaRPr lang="en-US" sz="2100" dirty="0"/>
           </a:p>
           <a:p>
+            <a:pPr indent="0" marL="0">
+              <a:buNone/>
+            </a:pPr>
             <a:r>
               <a:rPr lang="en-US" sz="2100" dirty="0">
                 <a:solidFill>
-                  <a:srgbClr val="17364A"/>
-                </a:solidFill>
-                <a:latin typeface="Aptos" pitchFamily="34" charset="0"/>
-                <a:ea typeface="Aptos" pitchFamily="34" charset="-122"/>
-                <a:cs typeface="Aptos" pitchFamily="34" charset="-120"/>
-              </a:rPr>
-              <a:t>Treating model validation as a substitute for workflow acceptance testing.</a:t>
+                  <a:srgbClr val="003A63"/>
+                </a:solidFill>
+                <a:latin typeface="Aptos" pitchFamily="34" charset="0"/>
+                <a:ea typeface="Aptos" pitchFamily="34" charset="-122"/>
+                <a:cs typeface="Aptos" pitchFamily="34" charset="-120"/>
+              </a:rPr>
+              <a:t>• Treating model validation as a substitute for workflow acceptance testing.</a:t>
             </a:r>
             <a:endParaRPr lang="en-US" sz="2100" dirty="0"/>
           </a:p>
           <a:p>
+            <a:pPr indent="0" marL="0">
+              <a:buNone/>
+            </a:pPr>
             <a:r>
               <a:rPr lang="en-US" sz="2100" dirty="0">
                 <a:solidFill>
-                  <a:srgbClr val="17364A"/>
-                </a:solidFill>
-                <a:latin typeface="Aptos" pitchFamily="34" charset="0"/>
-                <a:ea typeface="Aptos" pitchFamily="34" charset="-122"/>
-                <a:cs typeface="Aptos" pitchFamily="34" charset="-120"/>
-              </a:rPr>
-              <a:t>Failing to test override, escalation, fallback, and accessibility requirements.</a:t>
+                  <a:srgbClr val="003A63"/>
+                </a:solidFill>
+                <a:latin typeface="Aptos" pitchFamily="34" charset="0"/>
+                <a:ea typeface="Aptos" pitchFamily="34" charset="-122"/>
+                <a:cs typeface="Aptos" pitchFamily="34" charset="-120"/>
+              </a:rPr>
+              <a:t>• Failing to test override, escalation, fallback, and accessibility requirements.</a:t>
             </a:r>
             <a:endParaRPr lang="en-US" sz="2100" dirty="0"/>
           </a:p>
@@ -4078,17 +4105,17 @@
         </p:nvSpPr>
         <p:spPr>
           <a:xfrm>
-            <a:off x="7799832" y="1828800"/>
-            <a:ext cx="3145536" cy="685800"/>
-          </a:xfrm>
-          <a:prstGeom prst="rect">
-            <a:avLst/>
-          </a:prstGeom>
-          <a:noFill/>
-          <a:ln/>
-        </p:spPr>
-        <p:txBody>
-          <a:bodyPr wrap="square" lIns="0" tIns="0" rIns="0" bIns="0" rtlCol="0" anchor="t">
+            <a:off x="7799832" y="1801368"/>
+            <a:ext cx="3145536" cy="758952"/>
+          </a:xfrm>
+          <a:prstGeom prst="rect">
+            <a:avLst/>
+          </a:prstGeom>
+          <a:noFill/>
+          <a:ln/>
+        </p:spPr>
+        <p:txBody>
+          <a:bodyPr wrap="square" lIns="254" tIns="254" rIns="254" bIns="254" rtlCol="0" anchor="t">
             <a:normAutofit/>
           </a:bodyPr>
           <a:lstStyle/>
@@ -4097,7 +4124,7 @@
               <a:buNone/>
             </a:pPr>
             <a:r>
-              <a:rPr lang="en-US" sz="1550" dirty="0">
+              <a:rPr lang="en-US" sz="1320" dirty="0">
                 <a:solidFill>
                   <a:srgbClr val="17364A"/>
                 </a:solidFill>
@@ -4107,7 +4134,7 @@
               </a:rPr>
               <a:t>Launching despite unresolved issues that affect safety, equity, or documentation.</a:t>
             </a:r>
-            <a:endParaRPr lang="en-US" sz="1550" dirty="0"/>
+            <a:endParaRPr lang="en-US" sz="1320" dirty="0"/>
           </a:p>
         </p:txBody>
       </p:sp>
@@ -4195,13 +4222,16 @@
           <a:ln/>
         </p:spPr>
         <p:txBody>
-          <a:bodyPr wrap="square" lIns="254" tIns="254" rIns="254" bIns="254" rtlCol="0" anchor="t">
+          <a:bodyPr wrap="square" lIns="508" tIns="508" rIns="508" bIns="508" rtlCol="0" anchor="t">
             <a:normAutofit/>
           </a:bodyPr>
           <a:lstStyle/>
           <a:p>
-            <a:r>
-              <a:rPr lang="en-US" sz="1380" dirty="0">
+            <a:pPr indent="0" marL="0">
+              <a:buNone/>
+            </a:pPr>
+            <a:r>
+              <a:rPr lang="en-US" sz="1220" dirty="0">
                 <a:solidFill>
                   <a:srgbClr val="17364A"/>
                 </a:solidFill>
@@ -4209,13 +4239,16 @@
                 <a:ea typeface="Aptos" pitchFamily="34" charset="-122"/>
                 <a:cs typeface="Aptos" pitchFamily="34" charset="-120"/>
               </a:rPr>
-              <a:t>Launching despite unresolved issues that affect safety, equity, or documentation.</a:t>
-            </a:r>
-            <a:endParaRPr lang="en-US" sz="1380" dirty="0"/>
-          </a:p>
-          <a:p>
-            <a:r>
-              <a:rPr lang="en-US" sz="1380" dirty="0">
+              <a:t>Launching despite unresolved issues that affect safety, equity, or.</a:t>
+            </a:r>
+            <a:endParaRPr lang="en-US" sz="1220" dirty="0"/>
+          </a:p>
+          <a:p>
+            <a:pPr indent="0" marL="0">
+              <a:buNone/>
+            </a:pPr>
+            <a:r>
+              <a:rPr lang="en-US" sz="1220" dirty="0">
                 <a:solidFill>
                   <a:srgbClr val="17364A"/>
                 </a:solidFill>
@@ -4223,13 +4256,16 @@
                 <a:ea typeface="Aptos" pitchFamily="34" charset="-122"/>
                 <a:cs typeface="Aptos" pitchFamily="34" charset="-120"/>
               </a:rPr>
-              <a:t>Treating model validation as a substitute for workflow acceptance testing.</a:t>
-            </a:r>
-            <a:endParaRPr lang="en-US" sz="1380" dirty="0"/>
-          </a:p>
-          <a:p>
-            <a:r>
-              <a:rPr lang="en-US" sz="1380" dirty="0">
+              <a:t>Treating model validation as a substitute for workflow acceptance.</a:t>
+            </a:r>
+            <a:endParaRPr lang="en-US" sz="1220" dirty="0"/>
+          </a:p>
+          <a:p>
+            <a:pPr indent="0" marL="0">
+              <a:buNone/>
+            </a:pPr>
+            <a:r>
+              <a:rPr lang="en-US" sz="1220" dirty="0">
                 <a:solidFill>
                   <a:srgbClr val="17364A"/>
                 </a:solidFill>
@@ -4237,9 +4273,9 @@
                 <a:ea typeface="Aptos" pitchFamily="34" charset="-122"/>
                 <a:cs typeface="Aptos" pitchFamily="34" charset="-120"/>
               </a:rPr>
-              <a:t>Failing to test override, escalation, fallback, and accessibility requirements.</a:t>
-            </a:r>
-            <a:endParaRPr lang="en-US" sz="1380" dirty="0"/>
+              <a:t>Failing to test override, escalation, fallback, and accessibility.</a:t>
+            </a:r>
+            <a:endParaRPr lang="en-US" sz="1220" dirty="0"/>
           </a:p>
         </p:txBody>
       </p:sp>
@@ -4317,17 +4353,17 @@
         </p:nvSpPr>
         <p:spPr>
           <a:xfrm>
-            <a:off x="7799832" y="5001768"/>
-            <a:ext cx="3145536" cy="502920"/>
-          </a:xfrm>
-          <a:prstGeom prst="rect">
-            <a:avLst/>
-          </a:prstGeom>
-          <a:noFill/>
-          <a:ln/>
-        </p:spPr>
-        <p:txBody>
-          <a:bodyPr wrap="square" lIns="0" tIns="0" rIns="0" bIns="0" rtlCol="0" anchor="t">
+            <a:off x="7799832" y="4974336"/>
+            <a:ext cx="3145536" cy="576072"/>
+          </a:xfrm>
+          <a:prstGeom prst="rect">
+            <a:avLst/>
+          </a:prstGeom>
+          <a:noFill/>
+          <a:ln/>
+        </p:spPr>
+        <p:txBody>
+          <a:bodyPr wrap="square" lIns="254" tIns="254" rIns="254" bIns="254" rtlCol="0" anchor="t">
             <a:normAutofit/>
           </a:bodyPr>
           <a:lstStyle/>
@@ -4336,7 +4372,7 @@
               <a:buNone/>
             </a:pPr>
             <a:r>
-              <a:rPr lang="en-US" sz="1550" dirty="0">
+              <a:rPr lang="en-US" sz="1320" dirty="0">
                 <a:solidFill>
                   <a:srgbClr val="17364A"/>
                 </a:solidFill>
@@ -4344,9 +4380,9 @@
                 <a:ea typeface="Aptos" pitchFamily="34" charset="-122"/>
                 <a:cs typeface="Aptos" pitchFamily="34" charset="-120"/>
               </a:rPr>
-              <a:t>Identify what could go wrong, who could be affected, what safeguards are needed, and what evidence should be reviewed before use expands.</a:t>
-            </a:r>
-            <a:endParaRPr lang="en-US" sz="1550" dirty="0"/>
+              <a:t>Identify what could go wrong, who could be affected, what safeguards are needed, and what evidence should be reviewed.</a:t>
+            </a:r>
+            <a:endParaRPr lang="en-US" sz="1320" dirty="0"/>
           </a:p>
         </p:txBody>
       </p:sp>
@@ -4647,49 +4683,58 @@
           <a:ln/>
         </p:spPr>
         <p:txBody>
-          <a:bodyPr wrap="square" lIns="635" tIns="635" rIns="635" bIns="635" rtlCol="0" anchor="t">
+          <a:bodyPr wrap="square" lIns="1016" tIns="1016" rIns="1016" bIns="1016" rtlCol="0" anchor="t">
             <a:normAutofit/>
           </a:bodyPr>
           <a:lstStyle/>
           <a:p>
+            <a:pPr indent="0" marL="0">
+              <a:buNone/>
+            </a:pPr>
             <a:r>
               <a:rPr lang="en-US" sz="2100" dirty="0">
                 <a:solidFill>
-                  <a:srgbClr val="17364A"/>
-                </a:solidFill>
-                <a:latin typeface="Aptos" pitchFamily="34" charset="0"/>
-                <a:ea typeface="Aptos" pitchFamily="34" charset="-122"/>
-                <a:cs typeface="Aptos" pitchFamily="34" charset="-120"/>
-              </a:rPr>
-              <a:t>Recommended guardrails include the following:</a:t>
+                  <a:srgbClr val="003A63"/>
+                </a:solidFill>
+                <a:latin typeface="Aptos" pitchFamily="34" charset="0"/>
+                <a:ea typeface="Aptos" pitchFamily="34" charset="-122"/>
+                <a:cs typeface="Aptos" pitchFamily="34" charset="-120"/>
+              </a:rPr>
+              <a:t>• Recommended guardrails include the following:</a:t>
             </a:r>
             <a:endParaRPr lang="en-US" sz="2100" dirty="0"/>
           </a:p>
           <a:p>
+            <a:pPr indent="0" marL="0">
+              <a:buNone/>
+            </a:pPr>
             <a:r>
               <a:rPr lang="en-US" sz="2100" dirty="0">
                 <a:solidFill>
-                  <a:srgbClr val="17364A"/>
-                </a:solidFill>
-                <a:latin typeface="Aptos" pitchFamily="34" charset="0"/>
-                <a:ea typeface="Aptos" pitchFamily="34" charset="-122"/>
-                <a:cs typeface="Aptos" pitchFamily="34" charset="-120"/>
-              </a:rPr>
-              <a:t>Develop role-based UAT scripts before launch.</a:t>
+                  <a:srgbClr val="003A63"/>
+                </a:solidFill>
+                <a:latin typeface="Aptos" pitchFamily="34" charset="0"/>
+                <a:ea typeface="Aptos" pitchFamily="34" charset="-122"/>
+                <a:cs typeface="Aptos" pitchFamily="34" charset="-120"/>
+              </a:rPr>
+              <a:t>• Develop role-based UAT scripts before launch.</a:t>
             </a:r>
             <a:endParaRPr lang="en-US" sz="2100" dirty="0"/>
           </a:p>
           <a:p>
+            <a:pPr indent="0" marL="0">
+              <a:buNone/>
+            </a:pPr>
             <a:r>
               <a:rPr lang="en-US" sz="2100" dirty="0">
                 <a:solidFill>
-                  <a:srgbClr val="17364A"/>
-                </a:solidFill>
-                <a:latin typeface="Aptos" pitchFamily="34" charset="0"/>
-                <a:ea typeface="Aptos" pitchFamily="34" charset="-122"/>
-                <a:cs typeface="Aptos" pitchFamily="34" charset="-120"/>
-              </a:rPr>
-              <a:t>Include routine, edge, failure, and equity-sensitive cases.</a:t>
+                  <a:srgbClr val="003A63"/>
+                </a:solidFill>
+                <a:latin typeface="Aptos" pitchFamily="34" charset="0"/>
+                <a:ea typeface="Aptos" pitchFamily="34" charset="-122"/>
+                <a:cs typeface="Aptos" pitchFamily="34" charset="-120"/>
+              </a:rPr>
+              <a:t>• Include routine, edge, failure, and equity-sensitive cases.</a:t>
             </a:r>
             <a:endParaRPr lang="en-US" sz="2100" dirty="0"/>
           </a:p>
@@ -4769,17 +4814,17 @@
         </p:nvSpPr>
         <p:spPr>
           <a:xfrm>
-            <a:off x="7799832" y="1828800"/>
-            <a:ext cx="3145536" cy="685800"/>
-          </a:xfrm>
-          <a:prstGeom prst="rect">
-            <a:avLst/>
-          </a:prstGeom>
-          <a:noFill/>
-          <a:ln/>
-        </p:spPr>
-        <p:txBody>
-          <a:bodyPr wrap="square" lIns="0" tIns="0" rIns="0" bIns="0" rtlCol="0" anchor="t">
+            <a:off x="7799832" y="1801368"/>
+            <a:ext cx="3145536" cy="758952"/>
+          </a:xfrm>
+          <a:prstGeom prst="rect">
+            <a:avLst/>
+          </a:prstGeom>
+          <a:noFill/>
+          <a:ln/>
+        </p:spPr>
+        <p:txBody>
+          <a:bodyPr wrap="square" lIns="254" tIns="254" rIns="254" bIns="254" rtlCol="0" anchor="t">
             <a:normAutofit/>
           </a:bodyPr>
           <a:lstStyle/>
@@ -4788,7 +4833,7 @@
               <a:buNone/>
             </a:pPr>
             <a:r>
-              <a:rPr lang="en-US" sz="1550" dirty="0">
+              <a:rPr lang="en-US" sz="1320" dirty="0">
                 <a:solidFill>
                   <a:srgbClr val="17364A"/>
                 </a:solidFill>
@@ -4798,7 +4843,7 @@
               </a:rPr>
               <a:t>Recommended guardrails include the following:</a:t>
             </a:r>
-            <a:endParaRPr lang="en-US" sz="1550" dirty="0"/>
+            <a:endParaRPr lang="en-US" sz="1320" dirty="0"/>
           </a:p>
         </p:txBody>
       </p:sp>
@@ -4886,13 +4931,16 @@
           <a:ln/>
         </p:spPr>
         <p:txBody>
-          <a:bodyPr wrap="square" lIns="254" tIns="254" rIns="254" bIns="254" rtlCol="0" anchor="t">
+          <a:bodyPr wrap="square" lIns="508" tIns="508" rIns="508" bIns="508" rtlCol="0" anchor="t">
             <a:normAutofit/>
           </a:bodyPr>
           <a:lstStyle/>
           <a:p>
-            <a:r>
-              <a:rPr lang="en-US" sz="1380" dirty="0">
+            <a:pPr indent="0" marL="0">
+              <a:buNone/>
+            </a:pPr>
+            <a:r>
+              <a:rPr lang="en-US" sz="1220" dirty="0">
                 <a:solidFill>
                   <a:srgbClr val="17364A"/>
                 </a:solidFill>
@@ -4902,11 +4950,14 @@
               </a:rPr>
               <a:t>Recommended guardrails include the following:</a:t>
             </a:r>
-            <a:endParaRPr lang="en-US" sz="1380" dirty="0"/>
-          </a:p>
-          <a:p>
-            <a:r>
-              <a:rPr lang="en-US" sz="1380" dirty="0">
+            <a:endParaRPr lang="en-US" sz="1220" dirty="0"/>
+          </a:p>
+          <a:p>
+            <a:pPr indent="0" marL="0">
+              <a:buNone/>
+            </a:pPr>
+            <a:r>
+              <a:rPr lang="en-US" sz="1220" dirty="0">
                 <a:solidFill>
                   <a:srgbClr val="17364A"/>
                 </a:solidFill>
@@ -4916,11 +4967,14 @@
               </a:rPr>
               <a:t>Develop role-based UAT scripts before launch.</a:t>
             </a:r>
-            <a:endParaRPr lang="en-US" sz="1380" dirty="0"/>
-          </a:p>
-          <a:p>
-            <a:r>
-              <a:rPr lang="en-US" sz="1380" dirty="0">
+            <a:endParaRPr lang="en-US" sz="1220" dirty="0"/>
+          </a:p>
+          <a:p>
+            <a:pPr indent="0" marL="0">
+              <a:buNone/>
+            </a:pPr>
+            <a:r>
+              <a:rPr lang="en-US" sz="1220" dirty="0">
                 <a:solidFill>
                   <a:srgbClr val="17364A"/>
                 </a:solidFill>
@@ -4930,7 +4984,7 @@
               </a:rPr>
               <a:t>Include routine, edge, failure, and equity-sensitive cases.</a:t>
             </a:r>
-            <a:endParaRPr lang="en-US" sz="1380" dirty="0"/>
+            <a:endParaRPr lang="en-US" sz="1220" dirty="0"/>
           </a:p>
         </p:txBody>
       </p:sp>
@@ -5008,17 +5062,17 @@
         </p:nvSpPr>
         <p:spPr>
           <a:xfrm>
-            <a:off x="7799832" y="5001768"/>
-            <a:ext cx="3145536" cy="502920"/>
-          </a:xfrm>
-          <a:prstGeom prst="rect">
-            <a:avLst/>
-          </a:prstGeom>
-          <a:noFill/>
-          <a:ln/>
-        </p:spPr>
-        <p:txBody>
-          <a:bodyPr wrap="square" lIns="0" tIns="0" rIns="0" bIns="0" rtlCol="0" anchor="t">
+            <a:off x="7799832" y="4974336"/>
+            <a:ext cx="3145536" cy="576072"/>
+          </a:xfrm>
+          <a:prstGeom prst="rect">
+            <a:avLst/>
+          </a:prstGeom>
+          <a:noFill/>
+          <a:ln/>
+        </p:spPr>
+        <p:txBody>
+          <a:bodyPr wrap="square" lIns="254" tIns="254" rIns="254" bIns="254" rtlCol="0" anchor="t">
             <a:normAutofit/>
           </a:bodyPr>
           <a:lstStyle/>
@@ -5027,7 +5081,7 @@
               <a:buNone/>
             </a:pPr>
             <a:r>
-              <a:rPr lang="en-US" sz="1550" dirty="0">
+              <a:rPr lang="en-US" sz="1320" dirty="0">
                 <a:solidFill>
                   <a:srgbClr val="17364A"/>
                 </a:solidFill>
@@ -5035,9 +5089,9 @@
                 <a:ea typeface="Aptos" pitchFamily="34" charset="-122"/>
                 <a:cs typeface="Aptos" pitchFamily="34" charset="-120"/>
               </a:rPr>
-              <a:t>Identify what could go wrong, who could be affected, what safeguards are needed, and what evidence should be reviewed before use expands.</a:t>
-            </a:r>
-            <a:endParaRPr lang="en-US" sz="1550" dirty="0"/>
+              <a:t>Identify what could go wrong, who could be affected, what safeguards are needed, and what evidence should be reviewed.</a:t>
+            </a:r>
+            <a:endParaRPr lang="en-US" sz="1320" dirty="0"/>
           </a:p>
         </p:txBody>
       </p:sp>
@@ -5338,49 +5392,58 @@
           <a:ln/>
         </p:spPr>
         <p:txBody>
-          <a:bodyPr wrap="square" lIns="635" tIns="635" rIns="635" bIns="635" rtlCol="0" anchor="t">
+          <a:bodyPr wrap="square" lIns="1016" tIns="1016" rIns="1016" bIns="1016" rtlCol="0" anchor="t">
             <a:normAutofit/>
           </a:bodyPr>
           <a:lstStyle/>
           <a:p>
+            <a:pPr indent="0" marL="0">
+              <a:buNone/>
+            </a:pPr>
             <a:r>
               <a:rPr lang="en-US" sz="2100" dirty="0">
                 <a:solidFill>
-                  <a:srgbClr val="17364A"/>
-                </a:solidFill>
-                <a:latin typeface="Aptos" pitchFamily="34" charset="0"/>
-                <a:ea typeface="Aptos" pitchFamily="34" charset="-122"/>
-                <a:cs typeface="Aptos" pitchFamily="34" charset="-120"/>
-              </a:rPr>
-              <a:t>Define acceptance criteria before testing.</a:t>
+                  <a:srgbClr val="003A63"/>
+                </a:solidFill>
+                <a:latin typeface="Aptos" pitchFamily="34" charset="0"/>
+                <a:ea typeface="Aptos" pitchFamily="34" charset="-122"/>
+                <a:cs typeface="Aptos" pitchFamily="34" charset="-120"/>
+              </a:rPr>
+              <a:t>• Define acceptance criteria before testing.</a:t>
             </a:r>
             <a:endParaRPr lang="en-US" sz="2100" dirty="0"/>
           </a:p>
           <a:p>
+            <a:pPr indent="0" marL="0">
+              <a:buNone/>
+            </a:pPr>
             <a:r>
               <a:rPr lang="en-US" sz="2100" dirty="0">
                 <a:solidFill>
-                  <a:srgbClr val="17364A"/>
-                </a:solidFill>
-                <a:latin typeface="Aptos" pitchFamily="34" charset="0"/>
-                <a:ea typeface="Aptos" pitchFamily="34" charset="-122"/>
-                <a:cs typeface="Aptos" pitchFamily="34" charset="-120"/>
-              </a:rPr>
-              <a:t>Track issues by severity, owner, and resolution status.</a:t>
+                  <a:srgbClr val="003A63"/>
+                </a:solidFill>
+                <a:latin typeface="Aptos" pitchFamily="34" charset="0"/>
+                <a:ea typeface="Aptos" pitchFamily="34" charset="-122"/>
+                <a:cs typeface="Aptos" pitchFamily="34" charset="-120"/>
+              </a:rPr>
+              <a:t>• Track issues by severity, owner, and resolution status.</a:t>
             </a:r>
             <a:endParaRPr lang="en-US" sz="2100" dirty="0"/>
           </a:p>
           <a:p>
+            <a:pPr indent="0" marL="0">
+              <a:buNone/>
+            </a:pPr>
             <a:r>
               <a:rPr lang="en-US" sz="2100" dirty="0">
                 <a:solidFill>
-                  <a:srgbClr val="17364A"/>
-                </a:solidFill>
-                <a:latin typeface="Aptos" pitchFamily="34" charset="0"/>
-                <a:ea typeface="Aptos" pitchFamily="34" charset="-122"/>
-                <a:cs typeface="Aptos" pitchFamily="34" charset="-120"/>
-              </a:rPr>
-              <a:t>Require documented sign-off or remediation before deployment.</a:t>
+                  <a:srgbClr val="003A63"/>
+                </a:solidFill>
+                <a:latin typeface="Aptos" pitchFamily="34" charset="0"/>
+                <a:ea typeface="Aptos" pitchFamily="34" charset="-122"/>
+                <a:cs typeface="Aptos" pitchFamily="34" charset="-120"/>
+              </a:rPr>
+              <a:t>• Require documented sign-off or remediation before deployment.</a:t>
             </a:r>
             <a:endParaRPr lang="en-US" sz="2100" dirty="0"/>
           </a:p>
@@ -5460,17 +5523,17 @@
         </p:nvSpPr>
         <p:spPr>
           <a:xfrm>
-            <a:off x="7799832" y="1828800"/>
-            <a:ext cx="3145536" cy="685800"/>
-          </a:xfrm>
-          <a:prstGeom prst="rect">
-            <a:avLst/>
-          </a:prstGeom>
-          <a:noFill/>
-          <a:ln/>
-        </p:spPr>
-        <p:txBody>
-          <a:bodyPr wrap="square" lIns="0" tIns="0" rIns="0" bIns="0" rtlCol="0" anchor="t">
+            <a:off x="7799832" y="1801368"/>
+            <a:ext cx="3145536" cy="758952"/>
+          </a:xfrm>
+          <a:prstGeom prst="rect">
+            <a:avLst/>
+          </a:prstGeom>
+          <a:noFill/>
+          <a:ln/>
+        </p:spPr>
+        <p:txBody>
+          <a:bodyPr wrap="square" lIns="254" tIns="254" rIns="254" bIns="254" rtlCol="0" anchor="t">
             <a:normAutofit/>
           </a:bodyPr>
           <a:lstStyle/>
@@ -5479,7 +5542,7 @@
               <a:buNone/>
             </a:pPr>
             <a:r>
-              <a:rPr lang="en-US" sz="1550" dirty="0">
+              <a:rPr lang="en-US" sz="1320" dirty="0">
                 <a:solidFill>
                   <a:srgbClr val="17364A"/>
                 </a:solidFill>
@@ -5489,7 +5552,7 @@
               </a:rPr>
               <a:t>Define acceptance criteria before testing.</a:t>
             </a:r>
-            <a:endParaRPr lang="en-US" sz="1550" dirty="0"/>
+            <a:endParaRPr lang="en-US" sz="1320" dirty="0"/>
           </a:p>
         </p:txBody>
       </p:sp>
@@ -5577,13 +5640,16 @@
           <a:ln/>
         </p:spPr>
         <p:txBody>
-          <a:bodyPr wrap="square" lIns="254" tIns="254" rIns="254" bIns="254" rtlCol="0" anchor="t">
+          <a:bodyPr wrap="square" lIns="508" tIns="508" rIns="508" bIns="508" rtlCol="0" anchor="t">
             <a:normAutofit/>
           </a:bodyPr>
           <a:lstStyle/>
           <a:p>
-            <a:r>
-              <a:rPr lang="en-US" sz="1380" dirty="0">
+            <a:pPr indent="0" marL="0">
+              <a:buNone/>
+            </a:pPr>
+            <a:r>
+              <a:rPr lang="en-US" sz="1220" dirty="0">
                 <a:solidFill>
                   <a:srgbClr val="17364A"/>
                 </a:solidFill>
@@ -5593,11 +5659,14 @@
               </a:rPr>
               <a:t>Define acceptance criteria before testing.</a:t>
             </a:r>
-            <a:endParaRPr lang="en-US" sz="1380" dirty="0"/>
-          </a:p>
-          <a:p>
-            <a:r>
-              <a:rPr lang="en-US" sz="1380" dirty="0">
+            <a:endParaRPr lang="en-US" sz="1220" dirty="0"/>
+          </a:p>
+          <a:p>
+            <a:pPr indent="0" marL="0">
+              <a:buNone/>
+            </a:pPr>
+            <a:r>
+              <a:rPr lang="en-US" sz="1220" dirty="0">
                 <a:solidFill>
                   <a:srgbClr val="17364A"/>
                 </a:solidFill>
@@ -5607,11 +5676,14 @@
               </a:rPr>
               <a:t>Track issues by severity, owner, and resolution status.</a:t>
             </a:r>
-            <a:endParaRPr lang="en-US" sz="1380" dirty="0"/>
-          </a:p>
-          <a:p>
-            <a:r>
-              <a:rPr lang="en-US" sz="1380" dirty="0">
+            <a:endParaRPr lang="en-US" sz="1220" dirty="0"/>
+          </a:p>
+          <a:p>
+            <a:pPr indent="0" marL="0">
+              <a:buNone/>
+            </a:pPr>
+            <a:r>
+              <a:rPr lang="en-US" sz="1220" dirty="0">
                 <a:solidFill>
                   <a:srgbClr val="17364A"/>
                 </a:solidFill>
@@ -5621,7 +5693,7 @@
               </a:rPr>
               <a:t>Require documented sign-off or remediation before deployment.</a:t>
             </a:r>
-            <a:endParaRPr lang="en-US" sz="1380" dirty="0"/>
+            <a:endParaRPr lang="en-US" sz="1220" dirty="0"/>
           </a:p>
         </p:txBody>
       </p:sp>
@@ -5699,17 +5771,17 @@
         </p:nvSpPr>
         <p:spPr>
           <a:xfrm>
-            <a:off x="7799832" y="5001768"/>
-            <a:ext cx="3145536" cy="502920"/>
-          </a:xfrm>
-          <a:prstGeom prst="rect">
-            <a:avLst/>
-          </a:prstGeom>
-          <a:noFill/>
-          <a:ln/>
-        </p:spPr>
-        <p:txBody>
-          <a:bodyPr wrap="square" lIns="0" tIns="0" rIns="0" bIns="0" rtlCol="0" anchor="t">
+            <a:off x="7799832" y="4974336"/>
+            <a:ext cx="3145536" cy="576072"/>
+          </a:xfrm>
+          <a:prstGeom prst="rect">
+            <a:avLst/>
+          </a:prstGeom>
+          <a:noFill/>
+          <a:ln/>
+        </p:spPr>
+        <p:txBody>
+          <a:bodyPr wrap="square" lIns="254" tIns="254" rIns="254" bIns="254" rtlCol="0" anchor="t">
             <a:normAutofit/>
           </a:bodyPr>
           <a:lstStyle/>
@@ -5718,7 +5790,7 @@
               <a:buNone/>
             </a:pPr>
             <a:r>
-              <a:rPr lang="en-US" sz="1550" dirty="0">
+              <a:rPr lang="en-US" sz="1320" dirty="0">
                 <a:solidFill>
                   <a:srgbClr val="17364A"/>
                 </a:solidFill>
@@ -5726,9 +5798,9 @@
                 <a:ea typeface="Aptos" pitchFamily="34" charset="-122"/>
                 <a:cs typeface="Aptos" pitchFamily="34" charset="-120"/>
               </a:rPr>
-              <a:t>Identify what could go wrong, who could be affected, what safeguards are needed, and what evidence should be reviewed before use expands.</a:t>
-            </a:r>
-            <a:endParaRPr lang="en-US" sz="1550" dirty="0"/>
+              <a:t>Identify what could go wrong, who could be affected, what safeguards are needed, and what evidence should be reviewed.</a:t>
+            </a:r>
+            <a:endParaRPr lang="en-US" sz="1320" dirty="0"/>
           </a:p>
         </p:txBody>
       </p:sp>
@@ -6029,49 +6101,58 @@
           <a:ln/>
         </p:spPr>
         <p:txBody>
-          <a:bodyPr wrap="square" lIns="635" tIns="635" rIns="635" bIns="635" rtlCol="0" anchor="t">
+          <a:bodyPr wrap="square" lIns="1016" tIns="1016" rIns="1016" bIns="1016" rtlCol="0" anchor="t">
             <a:normAutofit/>
           </a:bodyPr>
           <a:lstStyle/>
           <a:p>
+            <a:pPr indent="0" marL="0">
+              <a:buNone/>
+            </a:pPr>
             <a:r>
               <a:rPr lang="en-US" sz="2100" dirty="0">
                 <a:solidFill>
-                  <a:srgbClr val="17364A"/>
-                </a:solidFill>
-                <a:latin typeface="Aptos" pitchFamily="34" charset="0"/>
-                <a:ea typeface="Aptos" pitchFamily="34" charset="-122"/>
-                <a:cs typeface="Aptos" pitchFamily="34" charset="-120"/>
-              </a:rPr>
-              <a:t>Where does this topic appear in your agency, program, or workflow?</a:t>
+                  <a:srgbClr val="003A63"/>
+                </a:solidFill>
+                <a:latin typeface="Aptos" pitchFamily="34" charset="0"/>
+                <a:ea typeface="Aptos" pitchFamily="34" charset="-122"/>
+                <a:cs typeface="Aptos" pitchFamily="34" charset="-120"/>
+              </a:rPr>
+              <a:t>• Where does this topic appear in your agency, program, or workflow?</a:t>
             </a:r>
             <a:endParaRPr lang="en-US" sz="2100" dirty="0"/>
           </a:p>
           <a:p>
+            <a:pPr indent="0" marL="0">
+              <a:buNone/>
+            </a:pPr>
             <a:r>
               <a:rPr lang="en-US" sz="2100" dirty="0">
                 <a:solidFill>
-                  <a:srgbClr val="17364A"/>
-                </a:solidFill>
-                <a:latin typeface="Aptos" pitchFamily="34" charset="0"/>
-                <a:ea typeface="Aptos" pitchFamily="34" charset="-122"/>
-                <a:cs typeface="Aptos" pitchFamily="34" charset="-120"/>
-              </a:rPr>
-              <a:t>Which staff roles would need to understand or apply this concept before AI use is approved?</a:t>
+                  <a:srgbClr val="003A63"/>
+                </a:solidFill>
+                <a:latin typeface="Aptos" pitchFamily="34" charset="0"/>
+                <a:ea typeface="Aptos" pitchFamily="34" charset="-122"/>
+                <a:cs typeface="Aptos" pitchFamily="34" charset="-120"/>
+              </a:rPr>
+              <a:t>• Which staff roles would need to understand or apply this concept before AI use is approved?</a:t>
             </a:r>
             <a:endParaRPr lang="en-US" sz="2100" dirty="0"/>
           </a:p>
           <a:p>
+            <a:pPr indent="0" marL="0">
+              <a:buNone/>
+            </a:pPr>
             <a:r>
               <a:rPr lang="en-US" sz="2100" dirty="0">
                 <a:solidFill>
-                  <a:srgbClr val="17364A"/>
-                </a:solidFill>
-                <a:latin typeface="Aptos" pitchFamily="34" charset="0"/>
-                <a:ea typeface="Aptos" pitchFamily="34" charset="-122"/>
-                <a:cs typeface="Aptos" pitchFamily="34" charset="-120"/>
-              </a:rPr>
-              <a:t>What could go wrong if this topic is not addressed before implementation?</a:t>
+                  <a:srgbClr val="003A63"/>
+                </a:solidFill>
+                <a:latin typeface="Aptos" pitchFamily="34" charset="0"/>
+                <a:ea typeface="Aptos" pitchFamily="34" charset="-122"/>
+                <a:cs typeface="Aptos" pitchFamily="34" charset="-120"/>
+              </a:rPr>
+              <a:t>• What could go wrong if this topic is not addressed before implementation?</a:t>
             </a:r>
             <a:endParaRPr lang="en-US" sz="2100" dirty="0"/>
           </a:p>
@@ -6151,17 +6232,17 @@
         </p:nvSpPr>
         <p:spPr>
           <a:xfrm>
-            <a:off x="7799832" y="1828800"/>
-            <a:ext cx="3145536" cy="685800"/>
-          </a:xfrm>
-          <a:prstGeom prst="rect">
-            <a:avLst/>
-          </a:prstGeom>
-          <a:noFill/>
-          <a:ln/>
-        </p:spPr>
-        <p:txBody>
-          <a:bodyPr wrap="square" lIns="0" tIns="0" rIns="0" bIns="0" rtlCol="0" anchor="t">
+            <a:off x="7799832" y="1801368"/>
+            <a:ext cx="3145536" cy="758952"/>
+          </a:xfrm>
+          <a:prstGeom prst="rect">
+            <a:avLst/>
+          </a:prstGeom>
+          <a:noFill/>
+          <a:ln/>
+        </p:spPr>
+        <p:txBody>
+          <a:bodyPr wrap="square" lIns="254" tIns="254" rIns="254" bIns="254" rtlCol="0" anchor="t">
             <a:normAutofit/>
           </a:bodyPr>
           <a:lstStyle/>
@@ -6170,7 +6251,7 @@
               <a:buNone/>
             </a:pPr>
             <a:r>
-              <a:rPr lang="en-US" sz="1550" dirty="0">
+              <a:rPr lang="en-US" sz="1320" dirty="0">
                 <a:solidFill>
                   <a:srgbClr val="17364A"/>
                 </a:solidFill>
@@ -6180,7 +6261,7 @@
               </a:rPr>
               <a:t>Where does this topic appear in your agency, program, or workflow?</a:t>
             </a:r>
-            <a:endParaRPr lang="en-US" sz="1550" dirty="0"/>
+            <a:endParaRPr lang="en-US" sz="1320" dirty="0"/>
           </a:p>
         </p:txBody>
       </p:sp>
@@ -6268,13 +6349,16 @@
           <a:ln/>
         </p:spPr>
         <p:txBody>
-          <a:bodyPr wrap="square" lIns="254" tIns="254" rIns="254" bIns="254" rtlCol="0" anchor="t">
+          <a:bodyPr wrap="square" lIns="508" tIns="508" rIns="508" bIns="508" rtlCol="0" anchor="t">
             <a:normAutofit/>
           </a:bodyPr>
           <a:lstStyle/>
           <a:p>
-            <a:r>
-              <a:rPr lang="en-US" sz="1380" dirty="0">
+            <a:pPr indent="0" marL="0">
+              <a:buNone/>
+            </a:pPr>
+            <a:r>
+              <a:rPr lang="en-US" sz="1220" dirty="0">
                 <a:solidFill>
                   <a:srgbClr val="17364A"/>
                 </a:solidFill>
@@ -6284,11 +6368,14 @@
               </a:rPr>
               <a:t>Where does this topic appear in your agency, program, or workflow?</a:t>
             </a:r>
-            <a:endParaRPr lang="en-US" sz="1380" dirty="0"/>
-          </a:p>
-          <a:p>
-            <a:r>
-              <a:rPr lang="en-US" sz="1380" dirty="0">
+            <a:endParaRPr lang="en-US" sz="1220" dirty="0"/>
+          </a:p>
+          <a:p>
+            <a:pPr indent="0" marL="0">
+              <a:buNone/>
+            </a:pPr>
+            <a:r>
+              <a:rPr lang="en-US" sz="1220" dirty="0">
                 <a:solidFill>
                   <a:srgbClr val="17364A"/>
                 </a:solidFill>
@@ -6296,13 +6383,16 @@
                 <a:ea typeface="Aptos" pitchFamily="34" charset="-122"/>
                 <a:cs typeface="Aptos" pitchFamily="34" charset="-120"/>
               </a:rPr>
-              <a:t>Which staff roles would need to understand or apply this concept before AI use is approved?</a:t>
-            </a:r>
-            <a:endParaRPr lang="en-US" sz="1380" dirty="0"/>
-          </a:p>
-          <a:p>
-            <a:r>
-              <a:rPr lang="en-US" sz="1380" dirty="0">
+              <a:t>Which staff roles would need to understand or apply this concept.</a:t>
+            </a:r>
+            <a:endParaRPr lang="en-US" sz="1220" dirty="0"/>
+          </a:p>
+          <a:p>
+            <a:pPr indent="0" marL="0">
+              <a:buNone/>
+            </a:pPr>
+            <a:r>
+              <a:rPr lang="en-US" sz="1220" dirty="0">
                 <a:solidFill>
                   <a:srgbClr val="17364A"/>
                 </a:solidFill>
@@ -6310,9 +6400,9 @@
                 <a:ea typeface="Aptos" pitchFamily="34" charset="-122"/>
                 <a:cs typeface="Aptos" pitchFamily="34" charset="-120"/>
               </a:rPr>
-              <a:t>What could go wrong if this topic is not addressed before implementation?</a:t>
-            </a:r>
-            <a:endParaRPr lang="en-US" sz="1380" dirty="0"/>
+              <a:t>What could go wrong if this topic is not addressed before.</a:t>
+            </a:r>
+            <a:endParaRPr lang="en-US" sz="1220" dirty="0"/>
           </a:p>
         </p:txBody>
       </p:sp>
@@ -6390,17 +6480,17 @@
         </p:nvSpPr>
         <p:spPr>
           <a:xfrm>
-            <a:off x="7799832" y="5001768"/>
-            <a:ext cx="3145536" cy="502920"/>
-          </a:xfrm>
-          <a:prstGeom prst="rect">
-            <a:avLst/>
-          </a:prstGeom>
-          <a:noFill/>
-          <a:ln/>
-        </p:spPr>
-        <p:txBody>
-          <a:bodyPr wrap="square" lIns="0" tIns="0" rIns="0" bIns="0" rtlCol="0" anchor="t">
+            <a:off x="7799832" y="4974336"/>
+            <a:ext cx="3145536" cy="576072"/>
+          </a:xfrm>
+          <a:prstGeom prst="rect">
+            <a:avLst/>
+          </a:prstGeom>
+          <a:noFill/>
+          <a:ln/>
+        </p:spPr>
+        <p:txBody>
+          <a:bodyPr wrap="square" lIns="254" tIns="254" rIns="254" bIns="254" rtlCol="0" anchor="t">
             <a:normAutofit/>
           </a:bodyPr>
           <a:lstStyle/>
@@ -6409,7 +6499,7 @@
               <a:buNone/>
             </a:pPr>
             <a:r>
-              <a:rPr lang="en-US" sz="1550" dirty="0">
+              <a:rPr lang="en-US" sz="1320" dirty="0">
                 <a:solidFill>
                   <a:srgbClr val="17364A"/>
                 </a:solidFill>
@@ -6417,9 +6507,9 @@
                 <a:ea typeface="Aptos" pitchFamily="34" charset="-122"/>
                 <a:cs typeface="Aptos" pitchFamily="34" charset="-120"/>
               </a:rPr>
-              <a:t>Use the concept to clarify workflow changes, dependencies, staffing, procurement requirements, training needs, and implementation checkpoints.</a:t>
-            </a:r>
-            <a:endParaRPr lang="en-US" sz="1550" dirty="0"/>
+              <a:t>Use the concept to clarify workflow changes, dependencies, staffing, procurement requirements, training needs, and.</a:t>
+            </a:r>
+            <a:endParaRPr lang="en-US" sz="1320" dirty="0"/>
           </a:p>
         </p:txBody>
       </p:sp>
@@ -6720,35 +6810,41 @@
           <a:ln/>
         </p:spPr>
         <p:txBody>
-          <a:bodyPr wrap="square" lIns="635" tIns="635" rIns="635" bIns="635" rtlCol="0" anchor="t">
+          <a:bodyPr wrap="square" lIns="1016" tIns="1016" rIns="1016" bIns="1016" rtlCol="0" anchor="t">
             <a:normAutofit/>
           </a:bodyPr>
           <a:lstStyle/>
           <a:p>
+            <a:pPr indent="0" marL="0">
+              <a:buNone/>
+            </a:pPr>
             <a:r>
               <a:rPr lang="en-US" sz="2100" dirty="0">
                 <a:solidFill>
-                  <a:srgbClr val="17364A"/>
-                </a:solidFill>
-                <a:latin typeface="Aptos" pitchFamily="34" charset="0"/>
-                <a:ea typeface="Aptos" pitchFamily="34" charset="-122"/>
-                <a:cs typeface="Aptos" pitchFamily="34" charset="-120"/>
-              </a:rPr>
-              <a:t>What evidence would governance, leadership, or operations staff need before moving forward?</a:t>
+                  <a:srgbClr val="003A63"/>
+                </a:solidFill>
+                <a:latin typeface="Aptos" pitchFamily="34" charset="0"/>
+                <a:ea typeface="Aptos" pitchFamily="34" charset="-122"/>
+                <a:cs typeface="Aptos" pitchFamily="34" charset="-120"/>
+              </a:rPr>
+              <a:t>• What evidence would governance, leadership, or operations staff need before moving forward?</a:t>
             </a:r>
             <a:endParaRPr lang="en-US" sz="2100" dirty="0"/>
           </a:p>
           <a:p>
+            <a:pPr indent="0" marL="0">
+              <a:buNone/>
+            </a:pPr>
             <a:r>
               <a:rPr lang="en-US" sz="2100" dirty="0">
                 <a:solidFill>
-                  <a:srgbClr val="17364A"/>
-                </a:solidFill>
-                <a:latin typeface="Aptos" pitchFamily="34" charset="0"/>
-                <a:ea typeface="Aptos" pitchFamily="34" charset="-122"/>
-                <a:cs typeface="Aptos" pitchFamily="34" charset="-120"/>
-              </a:rPr>
-              <a:t>Which policy, data, equity, privacy, security, or workflow questions remain unresolved?</a:t>
+                  <a:srgbClr val="003A63"/>
+                </a:solidFill>
+                <a:latin typeface="Aptos" pitchFamily="34" charset="0"/>
+                <a:ea typeface="Aptos" pitchFamily="34" charset="-122"/>
+                <a:cs typeface="Aptos" pitchFamily="34" charset="-120"/>
+              </a:rPr>
+              <a:t>• Which policy, data, equity, privacy, security, or workflow questions remain unresolved?</a:t>
             </a:r>
             <a:endParaRPr lang="en-US" sz="2100" dirty="0"/>
           </a:p>
@@ -6828,17 +6924,17 @@
         </p:nvSpPr>
         <p:spPr>
           <a:xfrm>
-            <a:off x="7799832" y="1828800"/>
-            <a:ext cx="3145536" cy="685800"/>
-          </a:xfrm>
-          <a:prstGeom prst="rect">
-            <a:avLst/>
-          </a:prstGeom>
-          <a:noFill/>
-          <a:ln/>
-        </p:spPr>
-        <p:txBody>
-          <a:bodyPr wrap="square" lIns="0" tIns="0" rIns="0" bIns="0" rtlCol="0" anchor="t">
+            <a:off x="7799832" y="1801368"/>
+            <a:ext cx="3145536" cy="758952"/>
+          </a:xfrm>
+          <a:prstGeom prst="rect">
+            <a:avLst/>
+          </a:prstGeom>
+          <a:noFill/>
+          <a:ln/>
+        </p:spPr>
+        <p:txBody>
+          <a:bodyPr wrap="square" lIns="254" tIns="254" rIns="254" bIns="254" rtlCol="0" anchor="t">
             <a:normAutofit/>
           </a:bodyPr>
           <a:lstStyle/>
@@ -6847,7 +6943,7 @@
               <a:buNone/>
             </a:pPr>
             <a:r>
-              <a:rPr lang="en-US" sz="1550" dirty="0">
+              <a:rPr lang="en-US" sz="1320" dirty="0">
                 <a:solidFill>
                   <a:srgbClr val="17364A"/>
                 </a:solidFill>
@@ -6857,7 +6953,7 @@
               </a:rPr>
               <a:t>What evidence would governance, leadership, or operations staff need before moving forward?</a:t>
             </a:r>
-            <a:endParaRPr lang="en-US" sz="1550" dirty="0"/>
+            <a:endParaRPr lang="en-US" sz="1320" dirty="0"/>
           </a:p>
         </p:txBody>
       </p:sp>
@@ -6945,13 +7041,16 @@
           <a:ln/>
         </p:spPr>
         <p:txBody>
-          <a:bodyPr wrap="square" lIns="254" tIns="254" rIns="254" bIns="254" rtlCol="0" anchor="t">
+          <a:bodyPr wrap="square" lIns="508" tIns="508" rIns="508" bIns="508" rtlCol="0" anchor="t">
             <a:normAutofit/>
           </a:bodyPr>
           <a:lstStyle/>
           <a:p>
-            <a:r>
-              <a:rPr lang="en-US" sz="1380" dirty="0">
+            <a:pPr indent="0" marL="0">
+              <a:buNone/>
+            </a:pPr>
+            <a:r>
+              <a:rPr lang="en-US" sz="1220" dirty="0">
                 <a:solidFill>
                   <a:srgbClr val="17364A"/>
                 </a:solidFill>
@@ -6959,13 +7058,16 @@
                 <a:ea typeface="Aptos" pitchFamily="34" charset="-122"/>
                 <a:cs typeface="Aptos" pitchFamily="34" charset="-120"/>
               </a:rPr>
-              <a:t>What evidence would governance, leadership, or operations staff need before moving forward?</a:t>
-            </a:r>
-            <a:endParaRPr lang="en-US" sz="1380" dirty="0"/>
-          </a:p>
-          <a:p>
-            <a:r>
-              <a:rPr lang="en-US" sz="1380" dirty="0">
+              <a:t>What evidence would governance, leadership, or operations staff.</a:t>
+            </a:r>
+            <a:endParaRPr lang="en-US" sz="1220" dirty="0"/>
+          </a:p>
+          <a:p>
+            <a:pPr indent="0" marL="0">
+              <a:buNone/>
+            </a:pPr>
+            <a:r>
+              <a:rPr lang="en-US" sz="1220" dirty="0">
                 <a:solidFill>
                   <a:srgbClr val="17364A"/>
                 </a:solidFill>
@@ -6973,9 +7075,9 @@
                 <a:ea typeface="Aptos" pitchFamily="34" charset="-122"/>
                 <a:cs typeface="Aptos" pitchFamily="34" charset="-120"/>
               </a:rPr>
-              <a:t>Which policy, data, equity, privacy, security, or workflow questions remain unresolved?</a:t>
-            </a:r>
-            <a:endParaRPr lang="en-US" sz="1380" dirty="0"/>
+              <a:t>Which policy, data, equity, privacy, security, or workflow.</a:t>
+            </a:r>
+            <a:endParaRPr lang="en-US" sz="1220" dirty="0"/>
           </a:p>
         </p:txBody>
       </p:sp>
@@ -7053,17 +7155,17 @@
         </p:nvSpPr>
         <p:spPr>
           <a:xfrm>
-            <a:off x="7799832" y="5001768"/>
-            <a:ext cx="3145536" cy="502920"/>
-          </a:xfrm>
-          <a:prstGeom prst="rect">
-            <a:avLst/>
-          </a:prstGeom>
-          <a:noFill/>
-          <a:ln/>
-        </p:spPr>
-        <p:txBody>
-          <a:bodyPr wrap="square" lIns="0" tIns="0" rIns="0" bIns="0" rtlCol="0" anchor="t">
+            <a:off x="7799832" y="4974336"/>
+            <a:ext cx="3145536" cy="576072"/>
+          </a:xfrm>
+          <a:prstGeom prst="rect">
+            <a:avLst/>
+          </a:prstGeom>
+          <a:noFill/>
+          <a:ln/>
+        </p:spPr>
+        <p:txBody>
+          <a:bodyPr wrap="square" lIns="254" tIns="254" rIns="254" bIns="254" rtlCol="0" anchor="t">
             <a:normAutofit/>
           </a:bodyPr>
           <a:lstStyle/>
@@ -7072,7 +7174,7 @@
               <a:buNone/>
             </a:pPr>
             <a:r>
-              <a:rPr lang="en-US" sz="1550" dirty="0">
+              <a:rPr lang="en-US" sz="1320" dirty="0">
                 <a:solidFill>
                   <a:srgbClr val="17364A"/>
                 </a:solidFill>
@@ -7080,9 +7182,9 @@
                 <a:ea typeface="Aptos" pitchFamily="34" charset="-122"/>
                 <a:cs typeface="Aptos" pitchFamily="34" charset="-120"/>
               </a:rPr>
-              <a:t>Use the concept to clarify workflow changes, dependencies, staffing, procurement requirements, training needs, and implementation checkpoints.</a:t>
-            </a:r>
-            <a:endParaRPr lang="en-US" sz="1550" dirty="0"/>
+              <a:t>Use the concept to clarify workflow changes, dependencies, staffing, procurement requirements, training needs, and.</a:t>
+            </a:r>
+            <a:endParaRPr lang="en-US" sz="1320" dirty="0"/>
           </a:p>
         </p:txBody>
       </p:sp>
@@ -7383,35 +7485,41 @@
           <a:ln/>
         </p:spPr>
         <p:txBody>
-          <a:bodyPr wrap="square" lIns="635" tIns="635" rIns="635" bIns="635" rtlCol="0" anchor="t">
+          <a:bodyPr wrap="square" lIns="1016" tIns="1016" rIns="1016" bIns="1016" rtlCol="0" anchor="t">
             <a:normAutofit/>
           </a:bodyPr>
           <a:lstStyle/>
           <a:p>
+            <a:pPr indent="0" marL="0">
+              <a:buNone/>
+            </a:pPr>
             <a:r>
               <a:rPr lang="en-US" sz="2100" dirty="0">
                 <a:solidFill>
-                  <a:srgbClr val="17364A"/>
-                </a:solidFill>
-                <a:latin typeface="Aptos" pitchFamily="34" charset="0"/>
-                <a:ea typeface="Aptos" pitchFamily="34" charset="-122"/>
-                <a:cs typeface="Aptos" pitchFamily="34" charset="-120"/>
-              </a:rPr>
-              <a:t>Create a UAT plan for one AI-supported workflow.</a:t>
+                  <a:srgbClr val="003A63"/>
+                </a:solidFill>
+                <a:latin typeface="Aptos" pitchFamily="34" charset="0"/>
+                <a:ea typeface="Aptos" pitchFamily="34" charset="-122"/>
+                <a:cs typeface="Aptos" pitchFamily="34" charset="-120"/>
+              </a:rPr>
+              <a:t>• Create a UAT plan for one AI-supported workflow.</a:t>
             </a:r>
             <a:endParaRPr lang="en-US" sz="2100" dirty="0"/>
           </a:p>
           <a:p>
+            <a:pPr indent="0" marL="0">
+              <a:buNone/>
+            </a:pPr>
             <a:r>
               <a:rPr lang="en-US" sz="2100" dirty="0">
                 <a:solidFill>
-                  <a:srgbClr val="17364A"/>
-                </a:solidFill>
-                <a:latin typeface="Aptos" pitchFamily="34" charset="0"/>
-                <a:ea typeface="Aptos" pitchFamily="34" charset="-122"/>
-                <a:cs typeface="Aptos" pitchFamily="34" charset="-120"/>
-              </a:rPr>
-              <a:t>Include user roles, test scenarios, edge cases, acceptance criteria, tester instructions, issue log.</a:t>
+                  <a:srgbClr val="003A63"/>
+                </a:solidFill>
+                <a:latin typeface="Aptos" pitchFamily="34" charset="0"/>
+                <a:ea typeface="Aptos" pitchFamily="34" charset="-122"/>
+                <a:cs typeface="Aptos" pitchFamily="34" charset="-120"/>
+              </a:rPr>
+              <a:t>• Include user roles, test scenarios, edge cases, acceptance criteria, tester instructions,.</a:t>
             </a:r>
             <a:endParaRPr lang="en-US" sz="2100" dirty="0"/>
           </a:p>
@@ -7491,17 +7599,17 @@
         </p:nvSpPr>
         <p:spPr>
           <a:xfrm>
-            <a:off x="7799832" y="1828800"/>
-            <a:ext cx="3145536" cy="685800"/>
-          </a:xfrm>
-          <a:prstGeom prst="rect">
-            <a:avLst/>
-          </a:prstGeom>
-          <a:noFill/>
-          <a:ln/>
-        </p:spPr>
-        <p:txBody>
-          <a:bodyPr wrap="square" lIns="0" tIns="0" rIns="0" bIns="0" rtlCol="0" anchor="t">
+            <a:off x="7799832" y="1801368"/>
+            <a:ext cx="3145536" cy="758952"/>
+          </a:xfrm>
+          <a:prstGeom prst="rect">
+            <a:avLst/>
+          </a:prstGeom>
+          <a:noFill/>
+          <a:ln/>
+        </p:spPr>
+        <p:txBody>
+          <a:bodyPr wrap="square" lIns="254" tIns="254" rIns="254" bIns="254" rtlCol="0" anchor="t">
             <a:normAutofit/>
           </a:bodyPr>
           <a:lstStyle/>
@@ -7510,7 +7618,7 @@
               <a:buNone/>
             </a:pPr>
             <a:r>
-              <a:rPr lang="en-US" sz="1550" dirty="0">
+              <a:rPr lang="en-US" sz="1320" dirty="0">
                 <a:solidFill>
                   <a:srgbClr val="17364A"/>
                 </a:solidFill>
@@ -7520,7 +7628,7 @@
               </a:rPr>
               <a:t>Create a UAT plan for one AI-supported workflow.</a:t>
             </a:r>
-            <a:endParaRPr lang="en-US" sz="1550" dirty="0"/>
+            <a:endParaRPr lang="en-US" sz="1320" dirty="0"/>
           </a:p>
         </p:txBody>
       </p:sp>
@@ -7608,13 +7716,16 @@
           <a:ln/>
         </p:spPr>
         <p:txBody>
-          <a:bodyPr wrap="square" lIns="254" tIns="254" rIns="254" bIns="254" rtlCol="0" anchor="t">
+          <a:bodyPr wrap="square" lIns="508" tIns="508" rIns="508" bIns="508" rtlCol="0" anchor="t">
             <a:normAutofit/>
           </a:bodyPr>
           <a:lstStyle/>
           <a:p>
-            <a:r>
-              <a:rPr lang="en-US" sz="1380" dirty="0">
+            <a:pPr indent="0" marL="0">
+              <a:buNone/>
+            </a:pPr>
+            <a:r>
+              <a:rPr lang="en-US" sz="1220" dirty="0">
                 <a:solidFill>
                   <a:srgbClr val="17364A"/>
                 </a:solidFill>
@@ -7624,11 +7735,14 @@
               </a:rPr>
               <a:t>Create a UAT plan for one AI-supported workflow.</a:t>
             </a:r>
-            <a:endParaRPr lang="en-US" sz="1380" dirty="0"/>
-          </a:p>
-          <a:p>
-            <a:r>
-              <a:rPr lang="en-US" sz="1380" dirty="0">
+            <a:endParaRPr lang="en-US" sz="1220" dirty="0"/>
+          </a:p>
+          <a:p>
+            <a:pPr indent="0" marL="0">
+              <a:buNone/>
+            </a:pPr>
+            <a:r>
+              <a:rPr lang="en-US" sz="1220" dirty="0">
                 <a:solidFill>
                   <a:srgbClr val="17364A"/>
                 </a:solidFill>
@@ -7636,9 +7750,9 @@
                 <a:ea typeface="Aptos" pitchFamily="34" charset="-122"/>
                 <a:cs typeface="Aptos" pitchFamily="34" charset="-120"/>
               </a:rPr>
-              <a:t>Include user roles, test scenarios, edge cases, acceptance criteria, tester instructions,.</a:t>
-            </a:r>
-            <a:endParaRPr lang="en-US" sz="1380" dirty="0"/>
+              <a:t>Include user roles, test scenarios, edge cases, acceptance.</a:t>
+            </a:r>
+            <a:endParaRPr lang="en-US" sz="1220" dirty="0"/>
           </a:p>
         </p:txBody>
       </p:sp>
@@ -7716,17 +7830,17 @@
         </p:nvSpPr>
         <p:spPr>
           <a:xfrm>
-            <a:off x="7799832" y="5001768"/>
-            <a:ext cx="3145536" cy="502920"/>
-          </a:xfrm>
-          <a:prstGeom prst="rect">
-            <a:avLst/>
-          </a:prstGeom>
-          <a:noFill/>
-          <a:ln/>
-        </p:spPr>
-        <p:txBody>
-          <a:bodyPr wrap="square" lIns="0" tIns="0" rIns="0" bIns="0" rtlCol="0" anchor="t">
+            <a:off x="7799832" y="4974336"/>
+            <a:ext cx="3145536" cy="576072"/>
+          </a:xfrm>
+          <a:prstGeom prst="rect">
+            <a:avLst/>
+          </a:prstGeom>
+          <a:noFill/>
+          <a:ln/>
+        </p:spPr>
+        <p:txBody>
+          <a:bodyPr wrap="square" lIns="254" tIns="254" rIns="254" bIns="254" rtlCol="0" anchor="t">
             <a:normAutofit/>
           </a:bodyPr>
           <a:lstStyle/>
@@ -7735,7 +7849,7 @@
               <a:buNone/>
             </a:pPr>
             <a:r>
-              <a:rPr lang="en-US" sz="1550" dirty="0">
+              <a:rPr lang="en-US" sz="1320" dirty="0">
                 <a:solidFill>
                   <a:srgbClr val="17364A"/>
                 </a:solidFill>
@@ -7743,9 +7857,9 @@
                 <a:ea typeface="Aptos" pitchFamily="34" charset="-122"/>
                 <a:cs typeface="Aptos" pitchFamily="34" charset="-120"/>
               </a:rPr>
-              <a:t>Use the assignment to test whether you can explain the concept, apply it to a realistic public health situation, and identify what would need review before the work moves forward.</a:t>
-            </a:r>
-            <a:endParaRPr lang="en-US" sz="1550" dirty="0"/>
+              <a:t>Use the assignment to test whether you can explain the concept, apply it to a realistic public health situation, and.</a:t>
+            </a:r>
+            <a:endParaRPr lang="en-US" sz="1320" dirty="0"/>
           </a:p>
         </p:txBody>
       </p:sp>
@@ -8046,49 +8160,58 @@
           <a:ln/>
         </p:spPr>
         <p:txBody>
-          <a:bodyPr wrap="square" lIns="635" tIns="635" rIns="635" bIns="635" rtlCol="0" anchor="t">
+          <a:bodyPr wrap="square" lIns="1016" tIns="1016" rIns="1016" bIns="1016" rtlCol="0" anchor="t">
             <a:normAutofit/>
           </a:bodyPr>
           <a:lstStyle/>
           <a:p>
+            <a:pPr indent="0" marL="0">
+              <a:buNone/>
+            </a:pPr>
             <a:r>
               <a:rPr lang="en-US" sz="2100" dirty="0">
                 <a:solidFill>
-                  <a:srgbClr val="17364A"/>
-                </a:solidFill>
-                <a:latin typeface="Aptos" pitchFamily="34" charset="0"/>
-                <a:ea typeface="Aptos" pitchFamily="34" charset="-122"/>
-                <a:cs typeface="Aptos" pitchFamily="34" charset="-120"/>
-              </a:rPr>
-              <a:t>UAT plan</a:t>
+                  <a:srgbClr val="003A63"/>
+                </a:solidFill>
+                <a:latin typeface="Aptos" pitchFamily="34" charset="0"/>
+                <a:ea typeface="Aptos" pitchFamily="34" charset="-122"/>
+                <a:cs typeface="Aptos" pitchFamily="34" charset="-120"/>
+              </a:rPr>
+              <a:t>• UAT plan</a:t>
             </a:r>
             <a:endParaRPr lang="en-US" sz="2100" dirty="0"/>
           </a:p>
           <a:p>
+            <a:pPr indent="0" marL="0">
+              <a:buNone/>
+            </a:pPr>
             <a:r>
               <a:rPr lang="en-US" sz="2100" dirty="0">
                 <a:solidFill>
-                  <a:srgbClr val="17364A"/>
-                </a:solidFill>
-                <a:latin typeface="Aptos" pitchFamily="34" charset="0"/>
-                <a:ea typeface="Aptos" pitchFamily="34" charset="-122"/>
-                <a:cs typeface="Aptos" pitchFamily="34" charset="-120"/>
-              </a:rPr>
-              <a:t>Role-based test scripts</a:t>
+                  <a:srgbClr val="003A63"/>
+                </a:solidFill>
+                <a:latin typeface="Aptos" pitchFamily="34" charset="0"/>
+                <a:ea typeface="Aptos" pitchFamily="34" charset="-122"/>
+                <a:cs typeface="Aptos" pitchFamily="34" charset="-120"/>
+              </a:rPr>
+              <a:t>• Role-based test scripts</a:t>
             </a:r>
             <a:endParaRPr lang="en-US" sz="2100" dirty="0"/>
           </a:p>
           <a:p>
+            <a:pPr indent="0" marL="0">
+              <a:buNone/>
+            </a:pPr>
             <a:r>
               <a:rPr lang="en-US" sz="2100" dirty="0">
                 <a:solidFill>
-                  <a:srgbClr val="17364A"/>
-                </a:solidFill>
-                <a:latin typeface="Aptos" pitchFamily="34" charset="0"/>
-                <a:ea typeface="Aptos" pitchFamily="34" charset="-122"/>
-                <a:cs typeface="Aptos" pitchFamily="34" charset="-120"/>
-              </a:rPr>
-              <a:t>Acceptance criteria</a:t>
+                  <a:srgbClr val="003A63"/>
+                </a:solidFill>
+                <a:latin typeface="Aptos" pitchFamily="34" charset="0"/>
+                <a:ea typeface="Aptos" pitchFamily="34" charset="-122"/>
+                <a:cs typeface="Aptos" pitchFamily="34" charset="-120"/>
+              </a:rPr>
+              <a:t>• Acceptance criteria</a:t>
             </a:r>
             <a:endParaRPr lang="en-US" sz="2100" dirty="0"/>
           </a:p>
@@ -8168,17 +8291,17 @@
         </p:nvSpPr>
         <p:spPr>
           <a:xfrm>
-            <a:off x="7799832" y="1828800"/>
-            <a:ext cx="3145536" cy="685800"/>
-          </a:xfrm>
-          <a:prstGeom prst="rect">
-            <a:avLst/>
-          </a:prstGeom>
-          <a:noFill/>
-          <a:ln/>
-        </p:spPr>
-        <p:txBody>
-          <a:bodyPr wrap="square" lIns="0" tIns="0" rIns="0" bIns="0" rtlCol="0" anchor="t">
+            <a:off x="7799832" y="1801368"/>
+            <a:ext cx="3145536" cy="758952"/>
+          </a:xfrm>
+          <a:prstGeom prst="rect">
+            <a:avLst/>
+          </a:prstGeom>
+          <a:noFill/>
+          <a:ln/>
+        </p:spPr>
+        <p:txBody>
+          <a:bodyPr wrap="square" lIns="254" tIns="254" rIns="254" bIns="254" rtlCol="0" anchor="t">
             <a:normAutofit/>
           </a:bodyPr>
           <a:lstStyle/>
@@ -8187,7 +8310,7 @@
               <a:buNone/>
             </a:pPr>
             <a:r>
-              <a:rPr lang="en-US" sz="1550" dirty="0">
+              <a:rPr lang="en-US" sz="1320" dirty="0">
                 <a:solidFill>
                   <a:srgbClr val="17364A"/>
                 </a:solidFill>
@@ -8197,7 +8320,7 @@
               </a:rPr>
               <a:t>UAT plan</a:t>
             </a:r>
-            <a:endParaRPr lang="en-US" sz="1550" dirty="0"/>
+            <a:endParaRPr lang="en-US" sz="1320" dirty="0"/>
           </a:p>
         </p:txBody>
       </p:sp>
@@ -8285,13 +8408,16 @@
           <a:ln/>
         </p:spPr>
         <p:txBody>
-          <a:bodyPr wrap="square" lIns="254" tIns="254" rIns="254" bIns="254" rtlCol="0" anchor="t">
+          <a:bodyPr wrap="square" lIns="508" tIns="508" rIns="508" bIns="508" rtlCol="0" anchor="t">
             <a:normAutofit/>
           </a:bodyPr>
           <a:lstStyle/>
           <a:p>
-            <a:r>
-              <a:rPr lang="en-US" sz="1380" dirty="0">
+            <a:pPr indent="0" marL="0">
+              <a:buNone/>
+            </a:pPr>
+            <a:r>
+              <a:rPr lang="en-US" sz="1220" dirty="0">
                 <a:solidFill>
                   <a:srgbClr val="17364A"/>
                 </a:solidFill>
@@ -8301,11 +8427,14 @@
               </a:rPr>
               <a:t>UAT plan</a:t>
             </a:r>
-            <a:endParaRPr lang="en-US" sz="1380" dirty="0"/>
-          </a:p>
-          <a:p>
-            <a:r>
-              <a:rPr lang="en-US" sz="1380" dirty="0">
+            <a:endParaRPr lang="en-US" sz="1220" dirty="0"/>
+          </a:p>
+          <a:p>
+            <a:pPr indent="0" marL="0">
+              <a:buNone/>
+            </a:pPr>
+            <a:r>
+              <a:rPr lang="en-US" sz="1220" dirty="0">
                 <a:solidFill>
                   <a:srgbClr val="17364A"/>
                 </a:solidFill>
@@ -8315,11 +8444,14 @@
               </a:rPr>
               <a:t>Role-based test scripts</a:t>
             </a:r>
-            <a:endParaRPr lang="en-US" sz="1380" dirty="0"/>
-          </a:p>
-          <a:p>
-            <a:r>
-              <a:rPr lang="en-US" sz="1380" dirty="0">
+            <a:endParaRPr lang="en-US" sz="1220" dirty="0"/>
+          </a:p>
+          <a:p>
+            <a:pPr indent="0" marL="0">
+              <a:buNone/>
+            </a:pPr>
+            <a:r>
+              <a:rPr lang="en-US" sz="1220" dirty="0">
                 <a:solidFill>
                   <a:srgbClr val="17364A"/>
                 </a:solidFill>
@@ -8329,7 +8461,7 @@
               </a:rPr>
               <a:t>Acceptance criteria</a:t>
             </a:r>
-            <a:endParaRPr lang="en-US" sz="1380" dirty="0"/>
+            <a:endParaRPr lang="en-US" sz="1220" dirty="0"/>
           </a:p>
         </p:txBody>
       </p:sp>
@@ -8407,17 +8539,17 @@
         </p:nvSpPr>
         <p:spPr>
           <a:xfrm>
-            <a:off x="7799832" y="5001768"/>
-            <a:ext cx="3145536" cy="502920"/>
-          </a:xfrm>
-          <a:prstGeom prst="rect">
-            <a:avLst/>
-          </a:prstGeom>
-          <a:noFill/>
-          <a:ln/>
-        </p:spPr>
-        <p:txBody>
-          <a:bodyPr wrap="square" lIns="0" tIns="0" rIns="0" bIns="0" rtlCol="0" anchor="t">
+            <a:off x="7799832" y="4974336"/>
+            <a:ext cx="3145536" cy="576072"/>
+          </a:xfrm>
+          <a:prstGeom prst="rect">
+            <a:avLst/>
+          </a:prstGeom>
+          <a:noFill/>
+          <a:ln/>
+        </p:spPr>
+        <p:txBody>
+          <a:bodyPr wrap="square" lIns="254" tIns="254" rIns="254" bIns="254" rtlCol="0" anchor="t">
             <a:normAutofit/>
           </a:bodyPr>
           <a:lstStyle/>
@@ -8426,7 +8558,7 @@
               <a:buNone/>
             </a:pPr>
             <a:r>
-              <a:rPr lang="en-US" sz="1550" dirty="0">
+              <a:rPr lang="en-US" sz="1320" dirty="0">
                 <a:solidFill>
                   <a:srgbClr val="17364A"/>
                 </a:solidFill>
@@ -8434,9 +8566,9 @@
                 <a:ea typeface="Aptos" pitchFamily="34" charset="-122"/>
                 <a:cs typeface="Aptos" pitchFamily="34" charset="-120"/>
               </a:rPr>
-              <a:t>Use the concept to clarify workflow changes, dependencies, staffing, procurement requirements, training needs, and implementation checkpoints.</a:t>
-            </a:r>
-            <a:endParaRPr lang="en-US" sz="1550" dirty="0"/>
+              <a:t>Use the concept to clarify workflow changes, dependencies, staffing, procurement requirements, training needs, and.</a:t>
+            </a:r>
+            <a:endParaRPr lang="en-US" sz="1320" dirty="0"/>
           </a:p>
         </p:txBody>
       </p:sp>
@@ -8737,35 +8869,41 @@
           <a:ln/>
         </p:spPr>
         <p:txBody>
-          <a:bodyPr wrap="square" lIns="635" tIns="635" rIns="635" bIns="635" rtlCol="0" anchor="t">
+          <a:bodyPr wrap="square" lIns="1016" tIns="1016" rIns="1016" bIns="1016" rtlCol="0" anchor="t">
             <a:normAutofit/>
           </a:bodyPr>
           <a:lstStyle/>
           <a:p>
+            <a:pPr indent="0" marL="0">
+              <a:buNone/>
+            </a:pPr>
             <a:r>
               <a:rPr lang="en-US" sz="2100" dirty="0">
                 <a:solidFill>
-                  <a:srgbClr val="17364A"/>
-                </a:solidFill>
-                <a:latin typeface="Aptos" pitchFamily="34" charset="0"/>
-                <a:ea typeface="Aptos" pitchFamily="34" charset="-122"/>
-                <a:cs typeface="Aptos" pitchFamily="34" charset="-120"/>
-              </a:rPr>
-              <a:t>Issue log template</a:t>
+                  <a:srgbClr val="003A63"/>
+                </a:solidFill>
+                <a:latin typeface="Aptos" pitchFamily="34" charset="0"/>
+                <a:ea typeface="Aptos" pitchFamily="34" charset="-122"/>
+                <a:cs typeface="Aptos" pitchFamily="34" charset="-120"/>
+              </a:rPr>
+              <a:t>• Issue log template</a:t>
             </a:r>
             <a:endParaRPr lang="en-US" sz="2100" dirty="0"/>
           </a:p>
           <a:p>
+            <a:pPr indent="0" marL="0">
+              <a:buNone/>
+            </a:pPr>
             <a:r>
               <a:rPr lang="en-US" sz="2100" dirty="0">
                 <a:solidFill>
-                  <a:srgbClr val="17364A"/>
-                </a:solidFill>
-                <a:latin typeface="Aptos" pitchFamily="34" charset="0"/>
-                <a:ea typeface="Aptos" pitchFamily="34" charset="-122"/>
-                <a:cs typeface="Aptos" pitchFamily="34" charset="-120"/>
-              </a:rPr>
-              <a:t>Sign-off recommendation</a:t>
+                  <a:srgbClr val="003A63"/>
+                </a:solidFill>
+                <a:latin typeface="Aptos" pitchFamily="34" charset="0"/>
+                <a:ea typeface="Aptos" pitchFamily="34" charset="-122"/>
+                <a:cs typeface="Aptos" pitchFamily="34" charset="-120"/>
+              </a:rPr>
+              <a:t>• Sign-off recommendation</a:t>
             </a:r>
             <a:endParaRPr lang="en-US" sz="2100" dirty="0"/>
           </a:p>
@@ -8845,17 +8983,17 @@
         </p:nvSpPr>
         <p:spPr>
           <a:xfrm>
-            <a:off x="7799832" y="1828800"/>
-            <a:ext cx="3145536" cy="685800"/>
-          </a:xfrm>
-          <a:prstGeom prst="rect">
-            <a:avLst/>
-          </a:prstGeom>
-          <a:noFill/>
-          <a:ln/>
-        </p:spPr>
-        <p:txBody>
-          <a:bodyPr wrap="square" lIns="0" tIns="0" rIns="0" bIns="0" rtlCol="0" anchor="t">
+            <a:off x="7799832" y="1801368"/>
+            <a:ext cx="3145536" cy="758952"/>
+          </a:xfrm>
+          <a:prstGeom prst="rect">
+            <a:avLst/>
+          </a:prstGeom>
+          <a:noFill/>
+          <a:ln/>
+        </p:spPr>
+        <p:txBody>
+          <a:bodyPr wrap="square" lIns="254" tIns="254" rIns="254" bIns="254" rtlCol="0" anchor="t">
             <a:normAutofit/>
           </a:bodyPr>
           <a:lstStyle/>
@@ -8864,7 +9002,7 @@
               <a:buNone/>
             </a:pPr>
             <a:r>
-              <a:rPr lang="en-US" sz="1550" dirty="0">
+              <a:rPr lang="en-US" sz="1320" dirty="0">
                 <a:solidFill>
                   <a:srgbClr val="17364A"/>
                 </a:solidFill>
@@ -8874,7 +9012,7 @@
               </a:rPr>
               <a:t>Issue log template</a:t>
             </a:r>
-            <a:endParaRPr lang="en-US" sz="1550" dirty="0"/>
+            <a:endParaRPr lang="en-US" sz="1320" dirty="0"/>
           </a:p>
         </p:txBody>
       </p:sp>
@@ -8962,13 +9100,16 @@
           <a:ln/>
         </p:spPr>
         <p:txBody>
-          <a:bodyPr wrap="square" lIns="254" tIns="254" rIns="254" bIns="254" rtlCol="0" anchor="t">
+          <a:bodyPr wrap="square" lIns="508" tIns="508" rIns="508" bIns="508" rtlCol="0" anchor="t">
             <a:normAutofit/>
           </a:bodyPr>
           <a:lstStyle/>
           <a:p>
-            <a:r>
-              <a:rPr lang="en-US" sz="1380" dirty="0">
+            <a:pPr indent="0" marL="0">
+              <a:buNone/>
+            </a:pPr>
+            <a:r>
+              <a:rPr lang="en-US" sz="1220" dirty="0">
                 <a:solidFill>
                   <a:srgbClr val="17364A"/>
                 </a:solidFill>
@@ -8978,11 +9119,14 @@
               </a:rPr>
               <a:t>Issue log template</a:t>
             </a:r>
-            <a:endParaRPr lang="en-US" sz="1380" dirty="0"/>
-          </a:p>
-          <a:p>
-            <a:r>
-              <a:rPr lang="en-US" sz="1380" dirty="0">
+            <a:endParaRPr lang="en-US" sz="1220" dirty="0"/>
+          </a:p>
+          <a:p>
+            <a:pPr indent="0" marL="0">
+              <a:buNone/>
+            </a:pPr>
+            <a:r>
+              <a:rPr lang="en-US" sz="1220" dirty="0">
                 <a:solidFill>
                   <a:srgbClr val="17364A"/>
                 </a:solidFill>
@@ -8992,7 +9136,7 @@
               </a:rPr>
               <a:t>Sign-off recommendation</a:t>
             </a:r>
-            <a:endParaRPr lang="en-US" sz="1380" dirty="0"/>
+            <a:endParaRPr lang="en-US" sz="1220" dirty="0"/>
           </a:p>
         </p:txBody>
       </p:sp>
@@ -9070,17 +9214,17 @@
         </p:nvSpPr>
         <p:spPr>
           <a:xfrm>
-            <a:off x="7799832" y="5001768"/>
-            <a:ext cx="3145536" cy="502920"/>
-          </a:xfrm>
-          <a:prstGeom prst="rect">
-            <a:avLst/>
-          </a:prstGeom>
-          <a:noFill/>
-          <a:ln/>
-        </p:spPr>
-        <p:txBody>
-          <a:bodyPr wrap="square" lIns="0" tIns="0" rIns="0" bIns="0" rtlCol="0" anchor="t">
+            <a:off x="7799832" y="4974336"/>
+            <a:ext cx="3145536" cy="576072"/>
+          </a:xfrm>
+          <a:prstGeom prst="rect">
+            <a:avLst/>
+          </a:prstGeom>
+          <a:noFill/>
+          <a:ln/>
+        </p:spPr>
+        <p:txBody>
+          <a:bodyPr wrap="square" lIns="254" tIns="254" rIns="254" bIns="254" rtlCol="0" anchor="t">
             <a:normAutofit/>
           </a:bodyPr>
           <a:lstStyle/>
@@ -9089,7 +9233,7 @@
               <a:buNone/>
             </a:pPr>
             <a:r>
-              <a:rPr lang="en-US" sz="1550" dirty="0">
+              <a:rPr lang="en-US" sz="1320" dirty="0">
                 <a:solidFill>
                   <a:srgbClr val="17364A"/>
                 </a:solidFill>
@@ -9097,9 +9241,9 @@
                 <a:ea typeface="Aptos" pitchFamily="34" charset="-122"/>
                 <a:cs typeface="Aptos" pitchFamily="34" charset="-120"/>
               </a:rPr>
-              <a:t>Use the concept to clarify workflow changes, dependencies, staffing, procurement requirements, training needs, and implementation checkpoints.</a:t>
-            </a:r>
-            <a:endParaRPr lang="en-US" sz="1550" dirty="0"/>
+              <a:t>Use the concept to clarify workflow changes, dependencies, staffing, procurement requirements, training needs, and.</a:t>
+            </a:r>
+            <a:endParaRPr lang="en-US" sz="1320" dirty="0"/>
           </a:p>
         </p:txBody>
       </p:sp>
@@ -9400,49 +9544,58 @@
           <a:ln/>
         </p:spPr>
         <p:txBody>
-          <a:bodyPr wrap="square" lIns="635" tIns="635" rIns="635" bIns="635" rtlCol="0" anchor="t">
+          <a:bodyPr wrap="square" lIns="1016" tIns="1016" rIns="1016" bIns="1016" rtlCol="0" anchor="t">
             <a:normAutofit/>
           </a:bodyPr>
           <a:lstStyle/>
           <a:p>
+            <a:pPr indent="0" marL="0">
+              <a:buNone/>
+            </a:pPr>
             <a:r>
               <a:rPr lang="en-US" sz="2100" dirty="0">
                 <a:solidFill>
-                  <a:srgbClr val="17364A"/>
-                </a:solidFill>
-                <a:latin typeface="Aptos" pitchFamily="34" charset="0"/>
-                <a:ea typeface="Aptos" pitchFamily="34" charset="-122"/>
-                <a:cs typeface="Aptos" pitchFamily="34" charset="-120"/>
-              </a:rPr>
-              <a:t>UAT plan</a:t>
+                  <a:srgbClr val="003A63"/>
+                </a:solidFill>
+                <a:latin typeface="Aptos" pitchFamily="34" charset="0"/>
+                <a:ea typeface="Aptos" pitchFamily="34" charset="-122"/>
+                <a:cs typeface="Aptos" pitchFamily="34" charset="-120"/>
+              </a:rPr>
+              <a:t>• UAT plan</a:t>
             </a:r>
             <a:endParaRPr lang="en-US" sz="2100" dirty="0"/>
           </a:p>
           <a:p>
+            <a:pPr indent="0" marL="0">
+              <a:buNone/>
+            </a:pPr>
             <a:r>
               <a:rPr lang="en-US" sz="2100" dirty="0">
                 <a:solidFill>
-                  <a:srgbClr val="17364A"/>
-                </a:solidFill>
-                <a:latin typeface="Aptos" pitchFamily="34" charset="0"/>
-                <a:ea typeface="Aptos" pitchFamily="34" charset="-122"/>
-                <a:cs typeface="Aptos" pitchFamily="34" charset="-120"/>
-              </a:rPr>
-              <a:t>Role-based test scripts</a:t>
+                  <a:srgbClr val="003A63"/>
+                </a:solidFill>
+                <a:latin typeface="Aptos" pitchFamily="34" charset="0"/>
+                <a:ea typeface="Aptos" pitchFamily="34" charset="-122"/>
+                <a:cs typeface="Aptos" pitchFamily="34" charset="-120"/>
+              </a:rPr>
+              <a:t>• Role-based test scripts</a:t>
             </a:r>
             <a:endParaRPr lang="en-US" sz="2100" dirty="0"/>
           </a:p>
           <a:p>
+            <a:pPr indent="0" marL="0">
+              <a:buNone/>
+            </a:pPr>
             <a:r>
               <a:rPr lang="en-US" sz="2100" dirty="0">
                 <a:solidFill>
-                  <a:srgbClr val="17364A"/>
-                </a:solidFill>
-                <a:latin typeface="Aptos" pitchFamily="34" charset="0"/>
-                <a:ea typeface="Aptos" pitchFamily="34" charset="-122"/>
-                <a:cs typeface="Aptos" pitchFamily="34" charset="-120"/>
-              </a:rPr>
-              <a:t>Acceptance criteria</a:t>
+                  <a:srgbClr val="003A63"/>
+                </a:solidFill>
+                <a:latin typeface="Aptos" pitchFamily="34" charset="0"/>
+                <a:ea typeface="Aptos" pitchFamily="34" charset="-122"/>
+                <a:cs typeface="Aptos" pitchFamily="34" charset="-120"/>
+              </a:rPr>
+              <a:t>• Acceptance criteria</a:t>
             </a:r>
             <a:endParaRPr lang="en-US" sz="2100" dirty="0"/>
           </a:p>
@@ -9522,17 +9675,17 @@
         </p:nvSpPr>
         <p:spPr>
           <a:xfrm>
-            <a:off x="7799832" y="1828800"/>
-            <a:ext cx="3145536" cy="685800"/>
-          </a:xfrm>
-          <a:prstGeom prst="rect">
-            <a:avLst/>
-          </a:prstGeom>
-          <a:noFill/>
-          <a:ln/>
-        </p:spPr>
-        <p:txBody>
-          <a:bodyPr wrap="square" lIns="0" tIns="0" rIns="0" bIns="0" rtlCol="0" anchor="t">
+            <a:off x="7799832" y="1801368"/>
+            <a:ext cx="3145536" cy="758952"/>
+          </a:xfrm>
+          <a:prstGeom prst="rect">
+            <a:avLst/>
+          </a:prstGeom>
+          <a:noFill/>
+          <a:ln/>
+        </p:spPr>
+        <p:txBody>
+          <a:bodyPr wrap="square" lIns="254" tIns="254" rIns="254" bIns="254" rtlCol="0" anchor="t">
             <a:normAutofit/>
           </a:bodyPr>
           <a:lstStyle/>
@@ -9541,7 +9694,7 @@
               <a:buNone/>
             </a:pPr>
             <a:r>
-              <a:rPr lang="en-US" sz="1550" dirty="0">
+              <a:rPr lang="en-US" sz="1320" dirty="0">
                 <a:solidFill>
                   <a:srgbClr val="17364A"/>
                 </a:solidFill>
@@ -9551,7 +9704,7 @@
               </a:rPr>
               <a:t>UAT plan</a:t>
             </a:r>
-            <a:endParaRPr lang="en-US" sz="1550" dirty="0"/>
+            <a:endParaRPr lang="en-US" sz="1320" dirty="0"/>
           </a:p>
         </p:txBody>
       </p:sp>
@@ -9639,13 +9792,16 @@
           <a:ln/>
         </p:spPr>
         <p:txBody>
-          <a:bodyPr wrap="square" lIns="254" tIns="254" rIns="254" bIns="254" rtlCol="0" anchor="t">
+          <a:bodyPr wrap="square" lIns="508" tIns="508" rIns="508" bIns="508" rtlCol="0" anchor="t">
             <a:normAutofit/>
           </a:bodyPr>
           <a:lstStyle/>
           <a:p>
-            <a:r>
-              <a:rPr lang="en-US" sz="1380" dirty="0">
+            <a:pPr indent="0" marL="0">
+              <a:buNone/>
+            </a:pPr>
+            <a:r>
+              <a:rPr lang="en-US" sz="1220" dirty="0">
                 <a:solidFill>
                   <a:srgbClr val="17364A"/>
                 </a:solidFill>
@@ -9655,11 +9811,14 @@
               </a:rPr>
               <a:t>Issue log template</a:t>
             </a:r>
-            <a:endParaRPr lang="en-US" sz="1380" dirty="0"/>
-          </a:p>
-          <a:p>
-            <a:r>
-              <a:rPr lang="en-US" sz="1380" dirty="0">
+            <a:endParaRPr lang="en-US" sz="1220" dirty="0"/>
+          </a:p>
+          <a:p>
+            <a:pPr indent="0" marL="0">
+              <a:buNone/>
+            </a:pPr>
+            <a:r>
+              <a:rPr lang="en-US" sz="1220" dirty="0">
                 <a:solidFill>
                   <a:srgbClr val="17364A"/>
                 </a:solidFill>
@@ -9669,7 +9828,7 @@
               </a:rPr>
               <a:t>Sign-off recommendation</a:t>
             </a:r>
-            <a:endParaRPr lang="en-US" sz="1380" dirty="0"/>
+            <a:endParaRPr lang="en-US" sz="1220" dirty="0"/>
           </a:p>
         </p:txBody>
       </p:sp>
@@ -9747,17 +9906,17 @@
         </p:nvSpPr>
         <p:spPr>
           <a:xfrm>
-            <a:off x="7799832" y="5001768"/>
-            <a:ext cx="3145536" cy="502920"/>
-          </a:xfrm>
-          <a:prstGeom prst="rect">
-            <a:avLst/>
-          </a:prstGeom>
-          <a:noFill/>
-          <a:ln/>
-        </p:spPr>
-        <p:txBody>
-          <a:bodyPr wrap="square" lIns="0" tIns="0" rIns="0" bIns="0" rtlCol="0" anchor="t">
+            <a:off x="7799832" y="4974336"/>
+            <a:ext cx="3145536" cy="576072"/>
+          </a:xfrm>
+          <a:prstGeom prst="rect">
+            <a:avLst/>
+          </a:prstGeom>
+          <a:noFill/>
+          <a:ln/>
+        </p:spPr>
+        <p:txBody>
+          <a:bodyPr wrap="square" lIns="254" tIns="254" rIns="254" bIns="254" rtlCol="0" anchor="t">
             <a:normAutofit/>
           </a:bodyPr>
           <a:lstStyle/>
@@ -9766,7 +9925,7 @@
               <a:buNone/>
             </a:pPr>
             <a:r>
-              <a:rPr lang="en-US" sz="1550" dirty="0">
+              <a:rPr lang="en-US" sz="1320" dirty="0">
                 <a:solidFill>
                   <a:srgbClr val="17364A"/>
                 </a:solidFill>
@@ -9774,9 +9933,9 @@
                 <a:ea typeface="Aptos" pitchFamily="34" charset="-122"/>
                 <a:cs typeface="Aptos" pitchFamily="34" charset="-120"/>
               </a:rPr>
-              <a:t>Use the assignment to test whether you can explain the concept, apply it to a realistic public health situation, and identify what would need review before the work moves forward.</a:t>
-            </a:r>
-            <a:endParaRPr lang="en-US" sz="1550" dirty="0"/>
+              <a:t>Use the assignment to test whether you can explain the concept, apply it to a realistic public health situation, and.</a:t>
+            </a:r>
+            <a:endParaRPr lang="en-US" sz="1320" dirty="0"/>
           </a:p>
         </p:txBody>
       </p:sp>
@@ -10077,49 +10236,58 @@
           <a:ln/>
         </p:spPr>
         <p:txBody>
-          <a:bodyPr wrap="square" lIns="635" tIns="635" rIns="635" bIns="635" rtlCol="0" anchor="t">
+          <a:bodyPr wrap="square" lIns="1016" tIns="1016" rIns="1016" bIns="1016" rtlCol="0" anchor="t">
             <a:normAutofit/>
           </a:bodyPr>
           <a:lstStyle/>
           <a:p>
+            <a:pPr indent="0" marL="0">
+              <a:buNone/>
+            </a:pPr>
             <a:r>
               <a:rPr lang="en-US" sz="2100" dirty="0">
                 <a:solidFill>
-                  <a:srgbClr val="17364A"/>
-                </a:solidFill>
-                <a:latin typeface="Aptos" pitchFamily="34" charset="0"/>
-                <a:ea typeface="Aptos" pitchFamily="34" charset="-122"/>
-                <a:cs typeface="Aptos" pitchFamily="34" charset="-120"/>
-              </a:rPr>
-              <a:t>User acceptance testing is the process of determining whether an AI-supported workflow is usable, understandable,.</a:t>
+                  <a:srgbClr val="003A63"/>
+                </a:solidFill>
+                <a:latin typeface="Aptos" pitchFamily="34" charset="0"/>
+                <a:ea typeface="Aptos" pitchFamily="34" charset="-122"/>
+                <a:cs typeface="Aptos" pitchFamily="34" charset="-120"/>
+              </a:rPr>
+              <a:t>• User acceptance testing is the process of determining whether an AI-supported workflow is.</a:t>
             </a:r>
             <a:endParaRPr lang="en-US" sz="2100" dirty="0"/>
           </a:p>
           <a:p>
+            <a:pPr indent="0" marL="0">
+              <a:buNone/>
+            </a:pPr>
             <a:r>
               <a:rPr lang="en-US" sz="2100" dirty="0">
                 <a:solidFill>
-                  <a:srgbClr val="17364A"/>
-                </a:solidFill>
-                <a:latin typeface="Aptos" pitchFamily="34" charset="0"/>
-                <a:ea typeface="Aptos" pitchFamily="34" charset="-122"/>
-                <a:cs typeface="Aptos" pitchFamily="34" charset="-120"/>
-              </a:rPr>
-              <a:t>Technical testing may show that a tool runs, and model validation may show acceptable performance, but neither.</a:t>
+                  <a:srgbClr val="003A63"/>
+                </a:solidFill>
+                <a:latin typeface="Aptos" pitchFamily="34" charset="0"/>
+                <a:ea typeface="Aptos" pitchFamily="34" charset="-122"/>
+                <a:cs typeface="Aptos" pitchFamily="34" charset="-120"/>
+              </a:rPr>
+              <a:t>• Technical testing may show that a tool runs, and model validation may show acceptable.</a:t>
             </a:r>
             <a:endParaRPr lang="en-US" sz="2100" dirty="0"/>
           </a:p>
           <a:p>
+            <a:pPr indent="0" marL="0">
+              <a:buNone/>
+            </a:pPr>
             <a:r>
               <a:rPr lang="en-US" sz="2100" dirty="0">
                 <a:solidFill>
-                  <a:srgbClr val="17364A"/>
-                </a:solidFill>
-                <a:latin typeface="Aptos" pitchFamily="34" charset="0"/>
-                <a:ea typeface="Aptos" pitchFamily="34" charset="-122"/>
-                <a:cs typeface="Aptos" pitchFamily="34" charset="-120"/>
-              </a:rPr>
-              <a:t>UAT fills that gap.</a:t>
+                  <a:srgbClr val="003A63"/>
+                </a:solidFill>
+                <a:latin typeface="Aptos" pitchFamily="34" charset="0"/>
+                <a:ea typeface="Aptos" pitchFamily="34" charset="-122"/>
+                <a:cs typeface="Aptos" pitchFamily="34" charset="-120"/>
+              </a:rPr>
+              <a:t>• UAT fills that gap.</a:t>
             </a:r>
             <a:endParaRPr lang="en-US" sz="2100" dirty="0"/>
           </a:p>
@@ -10199,17 +10367,17 @@
         </p:nvSpPr>
         <p:spPr>
           <a:xfrm>
-            <a:off x="8074152" y="1920240"/>
-            <a:ext cx="2825496" cy="1280160"/>
-          </a:xfrm>
-          <a:prstGeom prst="rect">
-            <a:avLst/>
-          </a:prstGeom>
-          <a:noFill/>
-          <a:ln/>
-        </p:spPr>
-        <p:txBody>
-          <a:bodyPr wrap="square" lIns="0" tIns="0" rIns="0" bIns="0" rtlCol="0" anchor="t">
+            <a:off x="8074152" y="1892808"/>
+            <a:ext cx="2825496" cy="1353312"/>
+          </a:xfrm>
+          <a:prstGeom prst="rect">
+            <a:avLst/>
+          </a:prstGeom>
+          <a:noFill/>
+          <a:ln/>
+        </p:spPr>
+        <p:txBody>
+          <a:bodyPr wrap="square" lIns="254" tIns="254" rIns="254" bIns="254" rtlCol="0" anchor="t">
             <a:normAutofit/>
           </a:bodyPr>
           <a:lstStyle/>
@@ -10218,7 +10386,7 @@
               <a:buNone/>
             </a:pPr>
             <a:r>
-              <a:rPr lang="en-US" sz="1550" dirty="0">
+              <a:rPr lang="en-US" sz="1320" dirty="0">
                 <a:solidFill>
                   <a:srgbClr val="17364A"/>
                 </a:solidFill>
@@ -10226,43 +10394,9 @@
                 <a:ea typeface="Aptos" pitchFamily="34" charset="-122"/>
                 <a:cs typeface="Aptos" pitchFamily="34" charset="-120"/>
               </a:rPr>
-              <a:t>Level: applied/foundational</a:t>
-            </a:r>
-            <a:endParaRPr lang="en-US" sz="1550" dirty="0"/>
-          </a:p>
-          <a:p>
-            <a:pPr indent="0" marL="0">
-              <a:buNone/>
-            </a:pPr>
-            <a:r>
-              <a:rPr lang="en-US" sz="1550" dirty="0">
-                <a:solidFill>
-                  <a:srgbClr val="17364A"/>
-                </a:solidFill>
-                <a:latin typeface="Aptos" pitchFamily="34" charset="0"/>
-                <a:ea typeface="Aptos" pitchFamily="34" charset="-122"/>
-                <a:cs typeface="Aptos" pitchFamily="34" charset="-120"/>
-              </a:rPr>
-              <a:t>Primary track: Operations and Data Quality Track</a:t>
-            </a:r>
-            <a:endParaRPr lang="en-US" sz="1550" dirty="0"/>
-          </a:p>
-          <a:p>
-            <a:pPr indent="0" marL="0">
-              <a:buNone/>
-            </a:pPr>
-            <a:r>
-              <a:rPr lang="en-US" sz="1550" dirty="0">
-                <a:solidFill>
-                  <a:srgbClr val="17364A"/>
-                </a:solidFill>
-                <a:latin typeface="Aptos" pitchFamily="34" charset="0"/>
-                <a:ea typeface="Aptos" pitchFamily="34" charset="-122"/>
-                <a:cs typeface="Aptos" pitchFamily="34" charset="-120"/>
-              </a:rPr>
-              <a:t>Appears in tracks: operations-and-data-quality, program-management, technical-architecture, analytics-and-modeling</a:t>
-            </a:r>
-            <a:endParaRPr lang="en-US" sz="1550" dirty="0"/>
+              <a:t>Level: applied/foundational Primary track: Operations and Data Quality Track Appears in tracks:.</a:t>
+            </a:r>
+            <a:endParaRPr lang="en-US" sz="1320" dirty="0"/>
           </a:p>
         </p:txBody>
       </p:sp>
@@ -10350,13 +10484,16 @@
           <a:ln/>
         </p:spPr>
         <p:txBody>
-          <a:bodyPr wrap="square" lIns="254" tIns="254" rIns="254" bIns="254" rtlCol="0" anchor="t">
+          <a:bodyPr wrap="square" lIns="508" tIns="508" rIns="508" bIns="508" rtlCol="0" anchor="t">
             <a:normAutofit/>
           </a:bodyPr>
           <a:lstStyle/>
           <a:p>
-            <a:r>
-              <a:rPr lang="en-US" sz="1380" dirty="0">
+            <a:pPr indent="0" marL="0">
+              <a:buNone/>
+            </a:pPr>
+            <a:r>
+              <a:rPr lang="en-US" sz="1220" dirty="0">
                 <a:solidFill>
                   <a:srgbClr val="17364A"/>
                 </a:solidFill>
@@ -10366,11 +10503,14 @@
               </a:rPr>
               <a:t>Read the module for shared vocabulary and context.</a:t>
             </a:r>
-            <a:endParaRPr lang="en-US" sz="1380" dirty="0"/>
-          </a:p>
-          <a:p>
-            <a:r>
-              <a:rPr lang="en-US" sz="1380" dirty="0">
+            <a:endParaRPr lang="en-US" sz="1220" dirty="0"/>
+          </a:p>
+          <a:p>
+            <a:pPr indent="0" marL="0">
+              <a:buNone/>
+            </a:pPr>
+            <a:r>
+              <a:rPr lang="en-US" sz="1220" dirty="0">
                 <a:solidFill>
                   <a:srgbClr val="17364A"/>
                 </a:solidFill>
@@ -10380,11 +10520,14 @@
               </a:rPr>
               <a:t>Complete the practical exercise to apply the concept.</a:t>
             </a:r>
-            <a:endParaRPr lang="en-US" sz="1380" dirty="0"/>
-          </a:p>
-          <a:p>
-            <a:r>
-              <a:rPr lang="en-US" sz="1380" dirty="0">
+            <a:endParaRPr lang="en-US" sz="1220" dirty="0"/>
+          </a:p>
+          <a:p>
+            <a:pPr indent="0" marL="0">
+              <a:buNone/>
+            </a:pPr>
+            <a:r>
+              <a:rPr lang="en-US" sz="1220" dirty="0">
                 <a:solidFill>
                   <a:srgbClr val="17364A"/>
                 </a:solidFill>
@@ -10394,7 +10537,7 @@
               </a:rPr>
               <a:t>Use the notes and references for deeper review.</a:t>
             </a:r>
-            <a:endParaRPr lang="en-US" sz="1380" dirty="0"/>
+            <a:endParaRPr lang="en-US" sz="1220" dirty="0"/>
           </a:p>
         </p:txBody>
       </p:sp>
@@ -10695,49 +10838,58 @@
           <a:ln/>
         </p:spPr>
         <p:txBody>
-          <a:bodyPr wrap="square" lIns="635" tIns="635" rIns="635" bIns="635" rtlCol="0" anchor="t">
+          <a:bodyPr wrap="square" lIns="1016" tIns="1016" rIns="1016" bIns="1016" rtlCol="0" anchor="t">
             <a:normAutofit/>
           </a:bodyPr>
           <a:lstStyle/>
           <a:p>
+            <a:pPr indent="0" marL="0">
+              <a:buNone/>
+            </a:pPr>
             <a:r>
               <a:rPr lang="en-US" sz="2100" dirty="0">
                 <a:solidFill>
-                  <a:srgbClr val="17364A"/>
-                </a:solidFill>
-                <a:latin typeface="Aptos" pitchFamily="34" charset="0"/>
-                <a:ea typeface="Aptos" pitchFamily="34" charset="-122"/>
-                <a:cs typeface="Aptos" pitchFamily="34" charset="-120"/>
-              </a:rPr>
-              <a:t>1. What is the purpose of UAT for AI-supported workflows?</a:t>
+                  <a:srgbClr val="003A63"/>
+                </a:solidFill>
+                <a:latin typeface="Aptos" pitchFamily="34" charset="0"/>
+                <a:ea typeface="Aptos" pitchFamily="34" charset="-122"/>
+                <a:cs typeface="Aptos" pitchFamily="34" charset="-120"/>
+              </a:rPr>
+              <a:t>• 1. What is the purpose of UAT for AI-supported workflows?</a:t>
             </a:r>
             <a:endParaRPr lang="en-US" sz="2100" dirty="0"/>
           </a:p>
           <a:p>
+            <a:pPr indent="0" marL="0">
+              <a:buNone/>
+            </a:pPr>
             <a:r>
               <a:rPr lang="en-US" sz="2100" dirty="0">
                 <a:solidFill>
-                  <a:srgbClr val="17364A"/>
-                </a:solidFill>
-                <a:latin typeface="Aptos" pitchFamily="34" charset="0"/>
-                <a:ea typeface="Aptos" pitchFamily="34" charset="-122"/>
-                <a:cs typeface="Aptos" pitchFamily="34" charset="-120"/>
-              </a:rPr>
-              <a:t>2. Who should participate in UAT?</a:t>
+                  <a:srgbClr val="003A63"/>
+                </a:solidFill>
+                <a:latin typeface="Aptos" pitchFamily="34" charset="0"/>
+                <a:ea typeface="Aptos" pitchFamily="34" charset="-122"/>
+                <a:cs typeface="Aptos" pitchFamily="34" charset="-120"/>
+              </a:rPr>
+              <a:t>• 2. Who should participate in UAT?</a:t>
             </a:r>
             <a:endParaRPr lang="en-US" sz="2100" dirty="0"/>
           </a:p>
           <a:p>
+            <a:pPr indent="0" marL="0">
+              <a:buNone/>
+            </a:pPr>
             <a:r>
               <a:rPr lang="en-US" sz="2100" dirty="0">
                 <a:solidFill>
-                  <a:srgbClr val="17364A"/>
-                </a:solidFill>
-                <a:latin typeface="Aptos" pitchFamily="34" charset="0"/>
-                <a:ea typeface="Aptos" pitchFamily="34" charset="-122"/>
-                <a:cs typeface="Aptos" pitchFamily="34" charset="-120"/>
-              </a:rPr>
-              <a:t>3. Which scenario should be included in AI UAT?</a:t>
+                  <a:srgbClr val="003A63"/>
+                </a:solidFill>
+                <a:latin typeface="Aptos" pitchFamily="34" charset="0"/>
+                <a:ea typeface="Aptos" pitchFamily="34" charset="-122"/>
+                <a:cs typeface="Aptos" pitchFamily="34" charset="-120"/>
+              </a:rPr>
+              <a:t>• 3. Which scenario should be included in AI UAT?</a:t>
             </a:r>
             <a:endParaRPr lang="en-US" sz="2100" dirty="0"/>
           </a:p>
@@ -10817,17 +10969,17 @@
         </p:nvSpPr>
         <p:spPr>
           <a:xfrm>
-            <a:off x="7799832" y="1828800"/>
-            <a:ext cx="3145536" cy="685800"/>
-          </a:xfrm>
-          <a:prstGeom prst="rect">
-            <a:avLst/>
-          </a:prstGeom>
-          <a:noFill/>
-          <a:ln/>
-        </p:spPr>
-        <p:txBody>
-          <a:bodyPr wrap="square" lIns="0" tIns="0" rIns="0" bIns="0" rtlCol="0" anchor="t">
+            <a:off x="7799832" y="1801368"/>
+            <a:ext cx="3145536" cy="758952"/>
+          </a:xfrm>
+          <a:prstGeom prst="rect">
+            <a:avLst/>
+          </a:prstGeom>
+          <a:noFill/>
+          <a:ln/>
+        </p:spPr>
+        <p:txBody>
+          <a:bodyPr wrap="square" lIns="254" tIns="254" rIns="254" bIns="254" rtlCol="0" anchor="t">
             <a:normAutofit/>
           </a:bodyPr>
           <a:lstStyle/>
@@ -10836,7 +10988,7 @@
               <a:buNone/>
             </a:pPr>
             <a:r>
-              <a:rPr lang="en-US" sz="1550" dirty="0">
+              <a:rPr lang="en-US" sz="1320" dirty="0">
                 <a:solidFill>
                   <a:srgbClr val="17364A"/>
                 </a:solidFill>
@@ -10846,7 +10998,7 @@
               </a:rPr>
               <a:t>1. What is the purpose of UAT for AI-supported workflows?</a:t>
             </a:r>
-            <a:endParaRPr lang="en-US" sz="1550" dirty="0"/>
+            <a:endParaRPr lang="en-US" sz="1320" dirty="0"/>
           </a:p>
         </p:txBody>
       </p:sp>
@@ -10934,13 +11086,16 @@
           <a:ln/>
         </p:spPr>
         <p:txBody>
-          <a:bodyPr wrap="square" lIns="254" tIns="254" rIns="254" bIns="254" rtlCol="0" anchor="t">
+          <a:bodyPr wrap="square" lIns="508" tIns="508" rIns="508" bIns="508" rtlCol="0" anchor="t">
             <a:normAutofit/>
           </a:bodyPr>
           <a:lstStyle/>
           <a:p>
-            <a:r>
-              <a:rPr lang="en-US" sz="1380" dirty="0">
+            <a:pPr indent="0" marL="0">
+              <a:buNone/>
+            </a:pPr>
+            <a:r>
+              <a:rPr lang="en-US" sz="1220" dirty="0">
                 <a:solidFill>
                   <a:srgbClr val="17364A"/>
                 </a:solidFill>
@@ -10950,11 +11105,14 @@
               </a:rPr>
               <a:t>1.</a:t>
             </a:r>
-            <a:endParaRPr lang="en-US" sz="1380" dirty="0"/>
-          </a:p>
-          <a:p>
-            <a:r>
-              <a:rPr lang="en-US" sz="1380" dirty="0">
+            <a:endParaRPr lang="en-US" sz="1220" dirty="0"/>
+          </a:p>
+          <a:p>
+            <a:pPr indent="0" marL="0">
+              <a:buNone/>
+            </a:pPr>
+            <a:r>
+              <a:rPr lang="en-US" sz="1220" dirty="0">
                 <a:solidFill>
                   <a:srgbClr val="17364A"/>
                 </a:solidFill>
@@ -10964,11 +11122,14 @@
               </a:rPr>
               <a:t>What is the purpose of UAT for AI-supported workflows?</a:t>
             </a:r>
-            <a:endParaRPr lang="en-US" sz="1380" dirty="0"/>
-          </a:p>
-          <a:p>
-            <a:r>
-              <a:rPr lang="en-US" sz="1380" dirty="0">
+            <a:endParaRPr lang="en-US" sz="1220" dirty="0"/>
+          </a:p>
+          <a:p>
+            <a:pPr indent="0" marL="0">
+              <a:buNone/>
+            </a:pPr>
+            <a:r>
+              <a:rPr lang="en-US" sz="1220" dirty="0">
                 <a:solidFill>
                   <a:srgbClr val="17364A"/>
                 </a:solidFill>
@@ -10978,7 +11139,7 @@
               </a:rPr>
               <a:t>2.</a:t>
             </a:r>
-            <a:endParaRPr lang="en-US" sz="1380" dirty="0"/>
+            <a:endParaRPr lang="en-US" sz="1220" dirty="0"/>
           </a:p>
         </p:txBody>
       </p:sp>
@@ -11056,17 +11217,17 @@
         </p:nvSpPr>
         <p:spPr>
           <a:xfrm>
-            <a:off x="7799832" y="5001768"/>
-            <a:ext cx="3145536" cy="502920"/>
-          </a:xfrm>
-          <a:prstGeom prst="rect">
-            <a:avLst/>
-          </a:prstGeom>
-          <a:noFill/>
-          <a:ln/>
-        </p:spPr>
-        <p:txBody>
-          <a:bodyPr wrap="square" lIns="0" tIns="0" rIns="0" bIns="0" rtlCol="0" anchor="t">
+            <a:off x="7799832" y="4974336"/>
+            <a:ext cx="3145536" cy="576072"/>
+          </a:xfrm>
+          <a:prstGeom prst="rect">
+            <a:avLst/>
+          </a:prstGeom>
+          <a:noFill/>
+          <a:ln/>
+        </p:spPr>
+        <p:txBody>
+          <a:bodyPr wrap="square" lIns="254" tIns="254" rIns="254" bIns="254" rtlCol="0" anchor="t">
             <a:normAutofit/>
           </a:bodyPr>
           <a:lstStyle/>
@@ -11075,7 +11236,7 @@
               <a:buNone/>
             </a:pPr>
             <a:r>
-              <a:rPr lang="en-US" sz="1550" dirty="0">
+              <a:rPr lang="en-US" sz="1320" dirty="0">
                 <a:solidFill>
                   <a:srgbClr val="17364A"/>
                 </a:solidFill>
@@ -11083,9 +11244,9 @@
                 <a:ea typeface="Aptos" pitchFamily="34" charset="-122"/>
                 <a:cs typeface="Aptos" pitchFamily="34" charset="-120"/>
               </a:rPr>
-              <a:t>Use the assignment to test whether you can explain the concept, apply it to a realistic public health situation, and identify what would need review before the work moves forward.</a:t>
-            </a:r>
-            <a:endParaRPr lang="en-US" sz="1550" dirty="0"/>
+              <a:t>Use the assignment to test whether you can explain the concept, apply it to a realistic public health situation, and.</a:t>
+            </a:r>
+            <a:endParaRPr lang="en-US" sz="1320" dirty="0"/>
           </a:p>
         </p:txBody>
       </p:sp>
@@ -11386,49 +11547,58 @@
           <a:ln/>
         </p:spPr>
         <p:txBody>
-          <a:bodyPr wrap="square" lIns="635" tIns="635" rIns="635" bIns="635" rtlCol="0" anchor="t">
+          <a:bodyPr wrap="square" lIns="1016" tIns="1016" rIns="1016" bIns="1016" rtlCol="0" anchor="t">
             <a:normAutofit/>
           </a:bodyPr>
           <a:lstStyle/>
           <a:p>
+            <a:pPr indent="0" marL="0">
+              <a:buNone/>
+            </a:pPr>
             <a:r>
               <a:rPr lang="en-US" sz="2100" dirty="0">
                 <a:solidFill>
-                  <a:srgbClr val="17364A"/>
-                </a:solidFill>
-                <a:latin typeface="Aptos" pitchFamily="34" charset="0"/>
-                <a:ea typeface="Aptos" pitchFamily="34" charset="-122"/>
-                <a:cs typeface="Aptos" pitchFamily="34" charset="-120"/>
-              </a:rPr>
-              <a:t>CDC Evaluation Framework: https://www.cdc.gov/evaluation/</a:t>
+                  <a:srgbClr val="003A63"/>
+                </a:solidFill>
+                <a:latin typeface="Aptos" pitchFamily="34" charset="0"/>
+                <a:ea typeface="Aptos" pitchFamily="34" charset="-122"/>
+                <a:cs typeface="Aptos" pitchFamily="34" charset="-120"/>
+              </a:rPr>
+              <a:t>• CDC Evaluation Framework: https://www.cdc.gov/evaluation/</a:t>
             </a:r>
             <a:endParaRPr lang="en-US" sz="2100" dirty="0"/>
           </a:p>
           <a:p>
+            <a:pPr indent="0" marL="0">
+              <a:buNone/>
+            </a:pPr>
             <a:r>
               <a:rPr lang="en-US" sz="2100" dirty="0">
                 <a:solidFill>
-                  <a:srgbClr val="17364A"/>
-                </a:solidFill>
-                <a:latin typeface="Aptos" pitchFamily="34" charset="0"/>
-                <a:ea typeface="Aptos" pitchFamily="34" charset="-122"/>
-                <a:cs typeface="Aptos" pitchFamily="34" charset="-120"/>
-              </a:rPr>
-              <a:t>NIST Artificial Intelligence Risk Management Framework:.</a:t>
+                  <a:srgbClr val="003A63"/>
+                </a:solidFill>
+                <a:latin typeface="Aptos" pitchFamily="34" charset="0"/>
+                <a:ea typeface="Aptos" pitchFamily="34" charset="-122"/>
+                <a:cs typeface="Aptos" pitchFamily="34" charset="-120"/>
+              </a:rPr>
+              <a:t>• NIST Artificial Intelligence Risk Management Framework:.</a:t>
             </a:r>
             <a:endParaRPr lang="en-US" sz="2100" dirty="0"/>
           </a:p>
           <a:p>
+            <a:pPr indent="0" marL="0">
+              <a:buNone/>
+            </a:pPr>
             <a:r>
               <a:rPr lang="en-US" sz="2100" dirty="0">
                 <a:solidFill>
-                  <a:srgbClr val="17364A"/>
-                </a:solidFill>
-                <a:latin typeface="Aptos" pitchFamily="34" charset="0"/>
-                <a:ea typeface="Aptos" pitchFamily="34" charset="-122"/>
-                <a:cs typeface="Aptos" pitchFamily="34" charset="-120"/>
-              </a:rPr>
-              <a:t>NIST AI RMF Generative AI Profile:.</a:t>
+                  <a:srgbClr val="003A63"/>
+                </a:solidFill>
+                <a:latin typeface="Aptos" pitchFamily="34" charset="0"/>
+                <a:ea typeface="Aptos" pitchFamily="34" charset="-122"/>
+                <a:cs typeface="Aptos" pitchFamily="34" charset="-120"/>
+              </a:rPr>
+              <a:t>• NIST AI RMF Generative AI Profile:.</a:t>
             </a:r>
             <a:endParaRPr lang="en-US" sz="2100" dirty="0"/>
           </a:p>
@@ -11508,17 +11678,17 @@
         </p:nvSpPr>
         <p:spPr>
           <a:xfrm>
-            <a:off x="7799832" y="1828800"/>
-            <a:ext cx="3145536" cy="685800"/>
-          </a:xfrm>
-          <a:prstGeom prst="rect">
-            <a:avLst/>
-          </a:prstGeom>
-          <a:noFill/>
-          <a:ln/>
-        </p:spPr>
-        <p:txBody>
-          <a:bodyPr wrap="square" lIns="0" tIns="0" rIns="0" bIns="0" rtlCol="0" anchor="t">
+            <a:off x="7799832" y="1801368"/>
+            <a:ext cx="3145536" cy="758952"/>
+          </a:xfrm>
+          <a:prstGeom prst="rect">
+            <a:avLst/>
+          </a:prstGeom>
+          <a:noFill/>
+          <a:ln/>
+        </p:spPr>
+        <p:txBody>
+          <a:bodyPr wrap="square" lIns="254" tIns="254" rIns="254" bIns="254" rtlCol="0" anchor="t">
             <a:normAutofit/>
           </a:bodyPr>
           <a:lstStyle/>
@@ -11527,7 +11697,7 @@
               <a:buNone/>
             </a:pPr>
             <a:r>
-              <a:rPr lang="en-US" sz="1550" dirty="0">
+              <a:rPr lang="en-US" sz="1320" dirty="0">
                 <a:solidFill>
                   <a:srgbClr val="17364A"/>
                 </a:solidFill>
@@ -11537,7 +11707,7 @@
               </a:rPr>
               <a:t>CDC Evaluation Framework: https://www.cdc.gov/evaluation/</a:t>
             </a:r>
-            <a:endParaRPr lang="en-US" sz="1550" dirty="0"/>
+            <a:endParaRPr lang="en-US" sz="1320" dirty="0"/>
           </a:p>
         </p:txBody>
       </p:sp>
@@ -11625,13 +11795,16 @@
           <a:ln/>
         </p:spPr>
         <p:txBody>
-          <a:bodyPr wrap="square" lIns="254" tIns="254" rIns="254" bIns="254" rtlCol="0" anchor="t">
+          <a:bodyPr wrap="square" lIns="508" tIns="508" rIns="508" bIns="508" rtlCol="0" anchor="t">
             <a:normAutofit/>
           </a:bodyPr>
           <a:lstStyle/>
           <a:p>
-            <a:r>
-              <a:rPr lang="en-US" sz="1380" dirty="0">
+            <a:pPr indent="0" marL="0">
+              <a:buNone/>
+            </a:pPr>
+            <a:r>
+              <a:rPr lang="en-US" sz="1220" dirty="0">
                 <a:solidFill>
                   <a:srgbClr val="17364A"/>
                 </a:solidFill>
@@ -11641,11 +11814,14 @@
               </a:rPr>
               <a:t>NIST Artificial Intelligence Risk Management Framework:.</a:t>
             </a:r>
-            <a:endParaRPr lang="en-US" sz="1380" dirty="0"/>
-          </a:p>
-          <a:p>
-            <a:r>
-              <a:rPr lang="en-US" sz="1380" dirty="0">
+            <a:endParaRPr lang="en-US" sz="1220" dirty="0"/>
+          </a:p>
+          <a:p>
+            <a:pPr indent="0" marL="0">
+              <a:buNone/>
+            </a:pPr>
+            <a:r>
+              <a:rPr lang="en-US" sz="1220" dirty="0">
                 <a:solidFill>
                   <a:srgbClr val="17364A"/>
                 </a:solidFill>
@@ -11655,11 +11831,14 @@
               </a:rPr>
               <a:t>CDC Public Health Data Strategy:.</a:t>
             </a:r>
-            <a:endParaRPr lang="en-US" sz="1380" dirty="0"/>
-          </a:p>
-          <a:p>
-            <a:r>
-              <a:rPr lang="en-US" sz="1380" dirty="0">
+            <a:endParaRPr lang="en-US" sz="1220" dirty="0"/>
+          </a:p>
+          <a:p>
+            <a:pPr indent="0" marL="0">
+              <a:buNone/>
+            </a:pPr>
+            <a:r>
+              <a:rPr lang="en-US" sz="1220" dirty="0">
                 <a:solidFill>
                   <a:srgbClr val="17364A"/>
                 </a:solidFill>
@@ -11667,9 +11846,9 @@
                 <a:ea typeface="Aptos" pitchFamily="34" charset="-122"/>
                 <a:cs typeface="Aptos" pitchFamily="34" charset="-120"/>
               </a:rPr>
-              <a:t>Agency user acceptance testing, quality assurance, accessibility, and implementation.</a:t>
-            </a:r>
-            <a:endParaRPr lang="en-US" sz="1380" dirty="0"/>
+              <a:t>Agency user acceptance testing, quality assurance, accessibility,.</a:t>
+            </a:r>
+            <a:endParaRPr lang="en-US" sz="1220" dirty="0"/>
           </a:p>
         </p:txBody>
       </p:sp>
@@ -11747,17 +11926,17 @@
         </p:nvSpPr>
         <p:spPr>
           <a:xfrm>
-            <a:off x="7799832" y="5001768"/>
-            <a:ext cx="3145536" cy="502920"/>
-          </a:xfrm>
-          <a:prstGeom prst="rect">
-            <a:avLst/>
-          </a:prstGeom>
-          <a:noFill/>
-          <a:ln/>
-        </p:spPr>
-        <p:txBody>
-          <a:bodyPr wrap="square" lIns="0" tIns="0" rIns="0" bIns="0" rtlCol="0" anchor="t">
+            <a:off x="7799832" y="4974336"/>
+            <a:ext cx="3145536" cy="576072"/>
+          </a:xfrm>
+          <a:prstGeom prst="rect">
+            <a:avLst/>
+          </a:prstGeom>
+          <a:noFill/>
+          <a:ln/>
+        </p:spPr>
+        <p:txBody>
+          <a:bodyPr wrap="square" lIns="254" tIns="254" rIns="254" bIns="254" rtlCol="0" anchor="t">
             <a:normAutofit/>
           </a:bodyPr>
           <a:lstStyle/>
@@ -11766,7 +11945,7 @@
               <a:buNone/>
             </a:pPr>
             <a:r>
-              <a:rPr lang="en-US" sz="1550" dirty="0">
+              <a:rPr lang="en-US" sz="1320" dirty="0">
                 <a:solidFill>
                   <a:srgbClr val="17364A"/>
                 </a:solidFill>
@@ -11774,9 +11953,9 @@
                 <a:ea typeface="Aptos" pitchFamily="34" charset="-122"/>
                 <a:cs typeface="Aptos" pitchFamily="34" charset="-120"/>
               </a:rPr>
-              <a:t>Use the concept to clarify workflow changes, dependencies, staffing, procurement requirements, training needs, and implementation checkpoints.</a:t>
-            </a:r>
-            <a:endParaRPr lang="en-US" sz="1550" dirty="0"/>
+              <a:t>Use the concept to clarify workflow changes, dependencies, staffing, procurement requirements, training needs, and.</a:t>
+            </a:r>
+            <a:endParaRPr lang="en-US" sz="1320" dirty="0"/>
           </a:p>
         </p:txBody>
       </p:sp>
@@ -12077,63 +12256,75 @@
           <a:ln/>
         </p:spPr>
         <p:txBody>
-          <a:bodyPr wrap="square" lIns="635" tIns="635" rIns="635" bIns="635" rtlCol="0" anchor="t">
+          <a:bodyPr wrap="square" lIns="1016" tIns="1016" rIns="1016" bIns="1016" rtlCol="0" anchor="t">
             <a:normAutofit/>
           </a:bodyPr>
           <a:lstStyle/>
           <a:p>
+            <a:pPr indent="0" marL="0">
+              <a:buNone/>
+            </a:pPr>
             <a:r>
               <a:rPr lang="en-US" sz="1900" dirty="0">
                 <a:solidFill>
-                  <a:srgbClr val="17364A"/>
-                </a:solidFill>
-                <a:latin typeface="Aptos" pitchFamily="34" charset="0"/>
-                <a:ea typeface="Aptos" pitchFamily="34" charset="-122"/>
-                <a:cs typeface="Aptos" pitchFamily="34" charset="-120"/>
-              </a:rPr>
-              <a:t>Play 11: Build and Deploy AI Solutions - This lesson informs Play 11 by helping learners connect the lesson.</a:t>
+                  <a:srgbClr val="003A63"/>
+                </a:solidFill>
+                <a:latin typeface="Aptos" pitchFamily="34" charset="0"/>
+                <a:ea typeface="Aptos" pitchFamily="34" charset="-122"/>
+                <a:cs typeface="Aptos" pitchFamily="34" charset="-120"/>
+              </a:rPr>
+              <a:t>• Play 11: Build and Deploy AI Solutions - This lesson informs Play 11 by helping learners.</a:t>
             </a:r>
             <a:endParaRPr lang="en-US" sz="1900" dirty="0"/>
           </a:p>
           <a:p>
+            <a:pPr indent="0" marL="0">
+              <a:buNone/>
+            </a:pPr>
             <a:r>
               <a:rPr lang="en-US" sz="1900" dirty="0">
                 <a:solidFill>
-                  <a:srgbClr val="17364A"/>
-                </a:solidFill>
-                <a:latin typeface="Aptos" pitchFamily="34" charset="0"/>
-                <a:ea typeface="Aptos" pitchFamily="34" charset="-122"/>
-                <a:cs typeface="Aptos" pitchFamily="34" charset="-120"/>
-              </a:rPr>
-              <a:t>Play 2: Readiness Assessment - This lesson informs Play 2 by helping learners connect the lesson topic to.</a:t>
+                  <a:srgbClr val="003A63"/>
+                </a:solidFill>
+                <a:latin typeface="Aptos" pitchFamily="34" charset="0"/>
+                <a:ea typeface="Aptos" pitchFamily="34" charset="-122"/>
+                <a:cs typeface="Aptos" pitchFamily="34" charset="-120"/>
+              </a:rPr>
+              <a:t>• Play 2: Readiness Assessment - This lesson informs Play 2 by helping learners connect the.</a:t>
             </a:r>
             <a:endParaRPr lang="en-US" sz="1900" dirty="0"/>
           </a:p>
           <a:p>
+            <a:pPr indent="0" marL="0">
+              <a:buNone/>
+            </a:pPr>
             <a:r>
               <a:rPr lang="en-US" sz="1900" dirty="0">
                 <a:solidFill>
-                  <a:srgbClr val="17364A"/>
-                </a:solidFill>
-                <a:latin typeface="Aptos" pitchFamily="34" charset="0"/>
-                <a:ea typeface="Aptos" pitchFamily="34" charset="-122"/>
-                <a:cs typeface="Aptos" pitchFamily="34" charset="-120"/>
-              </a:rPr>
-              <a:t>Play 1: Vision &amp; Guardrails - This lesson informs Play 1 by helping learners connect the lesson topic to.</a:t>
+                  <a:srgbClr val="003A63"/>
+                </a:solidFill>
+                <a:latin typeface="Aptos" pitchFamily="34" charset="0"/>
+                <a:ea typeface="Aptos" pitchFamily="34" charset="-122"/>
+                <a:cs typeface="Aptos" pitchFamily="34" charset="-120"/>
+              </a:rPr>
+              <a:t>• Play 1: Vision &amp; Guardrails - This lesson informs Play 1 by helping learners connect the.</a:t>
             </a:r>
             <a:endParaRPr lang="en-US" sz="1900" dirty="0"/>
           </a:p>
           <a:p>
+            <a:pPr indent="0" marL="0">
+              <a:buNone/>
+            </a:pPr>
             <a:r>
               <a:rPr lang="en-US" sz="1900" dirty="0">
                 <a:solidFill>
-                  <a:srgbClr val="17364A"/>
-                </a:solidFill>
-                <a:latin typeface="Aptos" pitchFamily="34" charset="0"/>
-                <a:ea typeface="Aptos" pitchFamily="34" charset="-122"/>
-                <a:cs typeface="Aptos" pitchFamily="34" charset="-120"/>
-              </a:rPr>
-              <a:t>Play 7: Prioritize Use Cases - This lesson informs Play 7 by helping learners connect the lesson topic to.</a:t>
+                  <a:srgbClr val="003A63"/>
+                </a:solidFill>
+                <a:latin typeface="Aptos" pitchFamily="34" charset="0"/>
+                <a:ea typeface="Aptos" pitchFamily="34" charset="-122"/>
+                <a:cs typeface="Aptos" pitchFamily="34" charset="-120"/>
+              </a:rPr>
+              <a:t>• Play 7: Prioritize Use Cases - This lesson informs Play 7 by helping learners connect the.</a:t>
             </a:r>
             <a:endParaRPr lang="en-US" sz="1900" dirty="0"/>
           </a:p>
@@ -12213,17 +12404,17 @@
         </p:nvSpPr>
         <p:spPr>
           <a:xfrm>
-            <a:off x="8211312" y="1920240"/>
-            <a:ext cx="2734056" cy="1463040"/>
-          </a:xfrm>
-          <a:prstGeom prst="rect">
-            <a:avLst/>
-          </a:prstGeom>
-          <a:noFill/>
-          <a:ln/>
-        </p:spPr>
-        <p:txBody>
-          <a:bodyPr wrap="square" lIns="0" tIns="0" rIns="0" bIns="0" rtlCol="0" anchor="t">
+            <a:off x="8211312" y="1892808"/>
+            <a:ext cx="2734056" cy="1536192"/>
+          </a:xfrm>
+          <a:prstGeom prst="rect">
+            <a:avLst/>
+          </a:prstGeom>
+          <a:noFill/>
+          <a:ln/>
+        </p:spPr>
+        <p:txBody>
+          <a:bodyPr wrap="square" lIns="254" tIns="254" rIns="254" bIns="254" rtlCol="0" anchor="t">
             <a:normAutofit/>
           </a:bodyPr>
           <a:lstStyle/>
@@ -12232,7 +12423,7 @@
               <a:buNone/>
             </a:pPr>
             <a:r>
-              <a:rPr lang="en-US" sz="1550" dirty="0">
+              <a:rPr lang="en-US" sz="1320" dirty="0">
                 <a:solidFill>
                   <a:srgbClr val="17364A"/>
                 </a:solidFill>
@@ -12240,9 +12431,9 @@
                 <a:ea typeface="Aptos" pitchFamily="34" charset="-122"/>
                 <a:cs typeface="Aptos" pitchFamily="34" charset="-120"/>
               </a:rPr>
-              <a:t>Use the related plays to identify decisions, participants, timing, approvals, and documentation needed for responsible implementation.</a:t>
-            </a:r>
-            <a:endParaRPr lang="en-US" sz="1550" dirty="0"/>
+              <a:t>Use the related plays to identify decisions, participants, timing, approvals, and documentation needed for responsible.</a:t>
+            </a:r>
+            <a:endParaRPr lang="en-US" sz="1320" dirty="0"/>
           </a:p>
         </p:txBody>
       </p:sp>
@@ -12330,13 +12521,16 @@
           <a:ln/>
         </p:spPr>
         <p:txBody>
-          <a:bodyPr wrap="square" lIns="254" tIns="254" rIns="254" bIns="254" rtlCol="0" anchor="t">
+          <a:bodyPr wrap="square" lIns="508" tIns="508" rIns="508" bIns="508" rtlCol="0" anchor="t">
             <a:normAutofit/>
           </a:bodyPr>
           <a:lstStyle/>
           <a:p>
-            <a:r>
-              <a:rPr lang="en-US" sz="1380" dirty="0">
+            <a:pPr indent="0" marL="0">
+              <a:buNone/>
+            </a:pPr>
+            <a:r>
+              <a:rPr lang="en-US" sz="1220" dirty="0">
                 <a:solidFill>
                   <a:srgbClr val="17364A"/>
                 </a:solidFill>
@@ -12346,11 +12540,14 @@
               </a:rPr>
               <a:t>Locate the decision point in the playbook sequence.</a:t>
             </a:r>
-            <a:endParaRPr lang="en-US" sz="1380" dirty="0"/>
-          </a:p>
-          <a:p>
-            <a:r>
-              <a:rPr lang="en-US" sz="1380" dirty="0">
+            <a:endParaRPr lang="en-US" sz="1220" dirty="0"/>
+          </a:p>
+          <a:p>
+            <a:pPr indent="0" marL="0">
+              <a:buNone/>
+            </a:pPr>
+            <a:r>
+              <a:rPr lang="en-US" sz="1220" dirty="0">
                 <a:solidFill>
                   <a:srgbClr val="17364A"/>
                 </a:solidFill>
@@ -12360,11 +12557,14 @@
               </a:rPr>
               <a:t>Identify who should participate in the work.</a:t>
             </a:r>
-            <a:endParaRPr lang="en-US" sz="1380" dirty="0"/>
-          </a:p>
-          <a:p>
-            <a:r>
-              <a:rPr lang="en-US" sz="1380" dirty="0">
+            <a:endParaRPr lang="en-US" sz="1220" dirty="0"/>
+          </a:p>
+          <a:p>
+            <a:pPr indent="0" marL="0">
+              <a:buNone/>
+            </a:pPr>
+            <a:r>
+              <a:rPr lang="en-US" sz="1220" dirty="0">
                 <a:solidFill>
                   <a:srgbClr val="17364A"/>
                 </a:solidFill>
@@ -12374,7 +12574,7 @@
               </a:rPr>
               <a:t>Document the review, approval, or implementation step.</a:t>
             </a:r>
-            <a:endParaRPr lang="en-US" sz="1380" dirty="0"/>
+            <a:endParaRPr lang="en-US" sz="1220" dirty="0"/>
           </a:p>
         </p:txBody>
       </p:sp>
@@ -12675,63 +12875,75 @@
           <a:ln/>
         </p:spPr>
         <p:txBody>
-          <a:bodyPr wrap="square" lIns="635" tIns="635" rIns="635" bIns="635" rtlCol="0" anchor="t">
+          <a:bodyPr wrap="square" lIns="1016" tIns="1016" rIns="1016" bIns="1016" rtlCol="0" anchor="t">
             <a:normAutofit/>
           </a:bodyPr>
           <a:lstStyle/>
           <a:p>
+            <a:pPr indent="0" marL="0">
+              <a:buNone/>
+            </a:pPr>
             <a:r>
               <a:rPr lang="en-US" sz="1850" dirty="0">
                 <a:solidFill>
-                  <a:srgbClr val="17364A"/>
-                </a:solidFill>
-                <a:latin typeface="Aptos" pitchFamily="34" charset="0"/>
-                <a:ea typeface="Aptos" pitchFamily="34" charset="-122"/>
-                <a:cs typeface="Aptos" pitchFamily="34" charset="-120"/>
-              </a:rPr>
-              <a:t>Tool 4: AI Policy Landscape Scan (Worksheet) - Use AI Policy Landscape Scan to translate this lesson into a.</a:t>
+                  <a:srgbClr val="003A63"/>
+                </a:solidFill>
+                <a:latin typeface="Aptos" pitchFamily="34" charset="0"/>
+                <a:ea typeface="Aptos" pitchFamily="34" charset="-122"/>
+                <a:cs typeface="Aptos" pitchFamily="34" charset="-120"/>
+              </a:rPr>
+              <a:t>• Tool 4: AI Policy Landscape Scan (Worksheet) - Use AI Policy Landscape Scan to translate this.</a:t>
             </a:r>
             <a:endParaRPr lang="en-US" sz="1850" dirty="0"/>
           </a:p>
           <a:p>
+            <a:pPr indent="0" marL="0">
+              <a:buNone/>
+            </a:pPr>
             <a:r>
               <a:rPr lang="en-US" sz="1850" dirty="0">
                 <a:solidFill>
-                  <a:srgbClr val="17364A"/>
-                </a:solidFill>
-                <a:latin typeface="Aptos" pitchFamily="34" charset="0"/>
-                <a:ea typeface="Aptos" pitchFamily="34" charset="-122"/>
-                <a:cs typeface="Aptos" pitchFamily="34" charset="-120"/>
-              </a:rPr>
-              <a:t>Tool 5: AI Environmental and Resource Impact Review (Checklist) - Use AI Environmental and Resource Impact.</a:t>
+                  <a:srgbClr val="003A63"/>
+                </a:solidFill>
+                <a:latin typeface="Aptos" pitchFamily="34" charset="0"/>
+                <a:ea typeface="Aptos" pitchFamily="34" charset="-122"/>
+                <a:cs typeface="Aptos" pitchFamily="34" charset="-120"/>
+              </a:rPr>
+              <a:t>• Tool 5: AI Environmental and Resource Impact Review (Checklist) - Use AI Environmental and.</a:t>
             </a:r>
             <a:endParaRPr lang="en-US" sz="1850" dirty="0"/>
           </a:p>
           <a:p>
+            <a:pPr indent="0" marL="0">
+              <a:buNone/>
+            </a:pPr>
             <a:r>
               <a:rPr lang="en-US" sz="1850" dirty="0">
                 <a:solidFill>
-                  <a:srgbClr val="17364A"/>
-                </a:solidFill>
-                <a:latin typeface="Aptos" pitchFamily="34" charset="0"/>
-                <a:ea typeface="Aptos" pitchFamily="34" charset="-122"/>
-                <a:cs typeface="Aptos" pitchFamily="34" charset="-120"/>
-              </a:rPr>
-              <a:t>Tool 6: Human-Centered AI Decision Rule Checklist (Checklist) - Use Human-Centered AI Decision Rule.</a:t>
+                  <a:srgbClr val="003A63"/>
+                </a:solidFill>
+                <a:latin typeface="Aptos" pitchFamily="34" charset="0"/>
+                <a:ea typeface="Aptos" pitchFamily="34" charset="-122"/>
+                <a:cs typeface="Aptos" pitchFamily="34" charset="-120"/>
+              </a:rPr>
+              <a:t>• Tool 6: Human-Centered AI Decision Rule Checklist (Checklist) - Use Human-Centered AI Decision.</a:t>
             </a:r>
             <a:endParaRPr lang="en-US" sz="1850" dirty="0"/>
           </a:p>
           <a:p>
+            <a:pPr indent="0" marL="0">
+              <a:buNone/>
+            </a:pPr>
             <a:r>
               <a:rPr lang="en-US" sz="1850" dirty="0">
                 <a:solidFill>
-                  <a:srgbClr val="17364A"/>
-                </a:solidFill>
-                <a:latin typeface="Aptos" pitchFamily="34" charset="0"/>
-                <a:ea typeface="Aptos" pitchFamily="34" charset="-122"/>
-                <a:cs typeface="Aptos" pitchFamily="34" charset="-120"/>
-              </a:rPr>
-              <a:t>Tool 8: AI Project Charter (Planning) - Use AI Project Charter to translate this lesson into a documented.</a:t>
+                  <a:srgbClr val="003A63"/>
+                </a:solidFill>
+                <a:latin typeface="Aptos" pitchFamily="34" charset="0"/>
+                <a:ea typeface="Aptos" pitchFamily="34" charset="-122"/>
+                <a:cs typeface="Aptos" pitchFamily="34" charset="-120"/>
+              </a:rPr>
+              <a:t>• Tool 8: AI Project Charter (Planning) - Use AI Project Charter to translate this lesson into a.</a:t>
             </a:r>
             <a:endParaRPr lang="en-US" sz="1850" dirty="0"/>
           </a:p>
@@ -12811,17 +13023,17 @@
         </p:nvSpPr>
         <p:spPr>
           <a:xfrm>
-            <a:off x="8211312" y="1920240"/>
-            <a:ext cx="2734056" cy="1463040"/>
-          </a:xfrm>
-          <a:prstGeom prst="rect">
-            <a:avLst/>
-          </a:prstGeom>
-          <a:noFill/>
-          <a:ln/>
-        </p:spPr>
-        <p:txBody>
-          <a:bodyPr wrap="square" lIns="0" tIns="0" rIns="0" bIns="0" rtlCol="0" anchor="t">
+            <a:off x="8211312" y="1892808"/>
+            <a:ext cx="2734056" cy="1536192"/>
+          </a:xfrm>
+          <a:prstGeom prst="rect">
+            <a:avLst/>
+          </a:prstGeom>
+          <a:noFill/>
+          <a:ln/>
+        </p:spPr>
+        <p:txBody>
+          <a:bodyPr wrap="square" lIns="254" tIns="254" rIns="254" bIns="254" rtlCol="0" anchor="t">
             <a:normAutofit/>
           </a:bodyPr>
           <a:lstStyle/>
@@ -12830,7 +13042,7 @@
               <a:buNone/>
             </a:pPr>
             <a:r>
-              <a:rPr lang="en-US" sz="1550" dirty="0">
+              <a:rPr lang="en-US" sz="1320" dirty="0">
                 <a:solidFill>
                   <a:srgbClr val="17364A"/>
                 </a:solidFill>
@@ -12838,9 +13050,9 @@
                 <a:ea typeface="Aptos" pitchFamily="34" charset="-122"/>
                 <a:cs typeface="Aptos" pitchFamily="34" charset="-120"/>
               </a:rPr>
-              <a:t>Use linked tools when your department needs a structured worksheet, template, checklist, review process, or documentation artifact.</a:t>
-            </a:r>
-            <a:endParaRPr lang="en-US" sz="1550" dirty="0"/>
+              <a:t>Use linked tools when your department needs a structured worksheet, template, checklist, review process, or.</a:t>
+            </a:r>
+            <a:endParaRPr lang="en-US" sz="1320" dirty="0"/>
           </a:p>
         </p:txBody>
       </p:sp>
@@ -12928,13 +13140,16 @@
           <a:ln/>
         </p:spPr>
         <p:txBody>
-          <a:bodyPr wrap="square" lIns="254" tIns="254" rIns="254" bIns="254" rtlCol="0" anchor="t">
+          <a:bodyPr wrap="square" lIns="508" tIns="508" rIns="508" bIns="508" rtlCol="0" anchor="t">
             <a:normAutofit/>
           </a:bodyPr>
           <a:lstStyle/>
           <a:p>
-            <a:r>
-              <a:rPr lang="en-US" sz="1380" dirty="0">
+            <a:pPr indent="0" marL="0">
+              <a:buNone/>
+            </a:pPr>
+            <a:r>
+              <a:rPr lang="en-US" sz="1220" dirty="0">
                 <a:solidFill>
                   <a:srgbClr val="17364A"/>
                 </a:solidFill>
@@ -12944,11 +13159,14 @@
               </a:rPr>
               <a:t>Use a tool when no comparable local process exists.</a:t>
             </a:r>
-            <a:endParaRPr lang="en-US" sz="1380" dirty="0"/>
-          </a:p>
-          <a:p>
-            <a:r>
-              <a:rPr lang="en-US" sz="1380" dirty="0">
+            <a:endParaRPr lang="en-US" sz="1220" dirty="0"/>
+          </a:p>
+          <a:p>
+            <a:pPr indent="0" marL="0">
+              <a:buNone/>
+            </a:pPr>
+            <a:r>
+              <a:rPr lang="en-US" sz="1220" dirty="0">
                 <a:solidFill>
                   <a:srgbClr val="17364A"/>
                 </a:solidFill>
@@ -12956,13 +13174,16 @@
                 <a:ea typeface="Aptos" pitchFamily="34" charset="-122"/>
                 <a:cs typeface="Aptos" pitchFamily="34" charset="-120"/>
               </a:rPr>
-              <a:t>Adapt existing department templates when they already fit the purpose.</a:t>
-            </a:r>
-            <a:endParaRPr lang="en-US" sz="1380" dirty="0"/>
-          </a:p>
-          <a:p>
-            <a:r>
-              <a:rPr lang="en-US" sz="1380" dirty="0">
+              <a:t>Adapt existing department templates when they already fit the.</a:t>
+            </a:r>
+            <a:endParaRPr lang="en-US" sz="1220" dirty="0"/>
+          </a:p>
+          <a:p>
+            <a:pPr indent="0" marL="0">
+              <a:buNone/>
+            </a:pPr>
+            <a:r>
+              <a:rPr lang="en-US" sz="1220" dirty="0">
                 <a:solidFill>
                   <a:srgbClr val="17364A"/>
                 </a:solidFill>
@@ -12972,7 +13193,7 @@
               </a:rPr>
               <a:t>Save the completed artifact as evidence of the decision.</a:t>
             </a:r>
-            <a:endParaRPr lang="en-US" sz="1380" dirty="0"/>
+            <a:endParaRPr lang="en-US" sz="1220" dirty="0"/>
           </a:p>
         </p:txBody>
       </p:sp>
@@ -13273,49 +13494,58 @@
           <a:ln/>
         </p:spPr>
         <p:txBody>
-          <a:bodyPr wrap="square" lIns="635" tIns="635" rIns="635" bIns="635" rtlCol="0" anchor="t">
+          <a:bodyPr wrap="square" lIns="1016" tIns="1016" rIns="1016" bIns="1016" rtlCol="0" anchor="t">
             <a:normAutofit/>
           </a:bodyPr>
           <a:lstStyle/>
           <a:p>
+            <a:pPr indent="0" marL="0">
+              <a:buNone/>
+            </a:pPr>
             <a:r>
               <a:rPr lang="en-US" sz="2100" dirty="0">
                 <a:solidFill>
-                  <a:srgbClr val="17364A"/>
-                </a:solidFill>
-                <a:latin typeface="Aptos" pitchFamily="34" charset="0"/>
-                <a:ea typeface="Aptos" pitchFamily="34" charset="-122"/>
-                <a:cs typeface="Aptos" pitchFamily="34" charset="-120"/>
-              </a:rPr>
-              <a:t>Explain the purpose of UAT for AI-supported workflows.</a:t>
+                  <a:srgbClr val="003A63"/>
+                </a:solidFill>
+                <a:latin typeface="Aptos" pitchFamily="34" charset="0"/>
+                <a:ea typeface="Aptos" pitchFamily="34" charset="-122"/>
+                <a:cs typeface="Aptos" pitchFamily="34" charset="-120"/>
+              </a:rPr>
+              <a:t>• Explain the purpose of UAT for AI-supported workflows.</a:t>
             </a:r>
             <a:endParaRPr lang="en-US" sz="2100" dirty="0"/>
           </a:p>
           <a:p>
+            <a:pPr indent="0" marL="0">
+              <a:buNone/>
+            </a:pPr>
             <a:r>
               <a:rPr lang="en-US" sz="2100" dirty="0">
                 <a:solidFill>
-                  <a:srgbClr val="17364A"/>
-                </a:solidFill>
-                <a:latin typeface="Aptos" pitchFamily="34" charset="0"/>
-                <a:ea typeface="Aptos" pitchFamily="34" charset="-122"/>
-                <a:cs typeface="Aptos" pitchFamily="34" charset="-120"/>
-              </a:rPr>
-              <a:t>Develop role-based UAT scenarios and test scripts.</a:t>
+                  <a:srgbClr val="003A63"/>
+                </a:solidFill>
+                <a:latin typeface="Aptos" pitchFamily="34" charset="0"/>
+                <a:ea typeface="Aptos" pitchFamily="34" charset="-122"/>
+                <a:cs typeface="Aptos" pitchFamily="34" charset="-120"/>
+              </a:rPr>
+              <a:t>• Develop role-based UAT scenarios and test scripts.</a:t>
             </a:r>
             <a:endParaRPr lang="en-US" sz="2100" dirty="0"/>
           </a:p>
           <a:p>
+            <a:pPr indent="0" marL="0">
+              <a:buNone/>
+            </a:pPr>
             <a:r>
               <a:rPr lang="en-US" sz="2100" dirty="0">
                 <a:solidFill>
-                  <a:srgbClr val="17364A"/>
-                </a:solidFill>
-                <a:latin typeface="Aptos" pitchFamily="34" charset="0"/>
-                <a:ea typeface="Aptos" pitchFamily="34" charset="-122"/>
-                <a:cs typeface="Aptos" pitchFamily="34" charset="-120"/>
-              </a:rPr>
-              <a:t>Include routine cases, edge cases, failure cases, and equity-sensitive scenarios in UAT.</a:t>
+                  <a:srgbClr val="003A63"/>
+                </a:solidFill>
+                <a:latin typeface="Aptos" pitchFamily="34" charset="0"/>
+                <a:ea typeface="Aptos" pitchFamily="34" charset="-122"/>
+                <a:cs typeface="Aptos" pitchFamily="34" charset="-120"/>
+              </a:rPr>
+              <a:t>• Include routine cases, edge cases, failure cases, and equity-sensitive scenarios in UAT.</a:t>
             </a:r>
             <a:endParaRPr lang="en-US" sz="2100" dirty="0"/>
           </a:p>
@@ -13395,17 +13625,17 @@
         </p:nvSpPr>
         <p:spPr>
           <a:xfrm>
-            <a:off x="7799832" y="1828800"/>
-            <a:ext cx="3145536" cy="685800"/>
-          </a:xfrm>
-          <a:prstGeom prst="rect">
-            <a:avLst/>
-          </a:prstGeom>
-          <a:noFill/>
-          <a:ln/>
-        </p:spPr>
-        <p:txBody>
-          <a:bodyPr wrap="square" lIns="0" tIns="0" rIns="0" bIns="0" rtlCol="0" anchor="t">
+            <a:off x="7799832" y="1801368"/>
+            <a:ext cx="3145536" cy="758952"/>
+          </a:xfrm>
+          <a:prstGeom prst="rect">
+            <a:avLst/>
+          </a:prstGeom>
+          <a:noFill/>
+          <a:ln/>
+        </p:spPr>
+        <p:txBody>
+          <a:bodyPr wrap="square" lIns="254" tIns="254" rIns="254" bIns="254" rtlCol="0" anchor="t">
             <a:normAutofit/>
           </a:bodyPr>
           <a:lstStyle/>
@@ -13414,7 +13644,7 @@
               <a:buNone/>
             </a:pPr>
             <a:r>
-              <a:rPr lang="en-US" sz="1550" dirty="0">
+              <a:rPr lang="en-US" sz="1320" dirty="0">
                 <a:solidFill>
                   <a:srgbClr val="17364A"/>
                 </a:solidFill>
@@ -13424,7 +13654,7 @@
               </a:rPr>
               <a:t>Explain the purpose of UAT for AI-supported workflows.</a:t>
             </a:r>
-            <a:endParaRPr lang="en-US" sz="1550" dirty="0"/>
+            <a:endParaRPr lang="en-US" sz="1320" dirty="0"/>
           </a:p>
         </p:txBody>
       </p:sp>
@@ -13512,13 +13742,16 @@
           <a:ln/>
         </p:spPr>
         <p:txBody>
-          <a:bodyPr wrap="square" lIns="254" tIns="254" rIns="254" bIns="254" rtlCol="0" anchor="t">
+          <a:bodyPr wrap="square" lIns="508" tIns="508" rIns="508" bIns="508" rtlCol="0" anchor="t">
             <a:normAutofit/>
           </a:bodyPr>
           <a:lstStyle/>
           <a:p>
-            <a:r>
-              <a:rPr lang="en-US" sz="1380" dirty="0">
+            <a:pPr indent="0" marL="0">
+              <a:buNone/>
+            </a:pPr>
+            <a:r>
+              <a:rPr lang="en-US" sz="1220" dirty="0">
                 <a:solidFill>
                   <a:srgbClr val="17364A"/>
                 </a:solidFill>
@@ -13526,13 +13759,16 @@
                 <a:ea typeface="Aptos" pitchFamily="34" charset="-122"/>
                 <a:cs typeface="Aptos" pitchFamily="34" charset="-120"/>
               </a:rPr>
-              <a:t>Define acceptance criteria for usability, safety, documentation, human review, and.</a:t>
-            </a:r>
-            <a:endParaRPr lang="en-US" sz="1380" dirty="0"/>
-          </a:p>
-          <a:p>
-            <a:r>
-              <a:rPr lang="en-US" sz="1380" dirty="0">
+              <a:t>Define acceptance criteria for usability, safety, documentation,.</a:t>
+            </a:r>
+            <a:endParaRPr lang="en-US" sz="1220" dirty="0"/>
+          </a:p>
+          <a:p>
+            <a:pPr indent="0" marL="0">
+              <a:buNone/>
+            </a:pPr>
+            <a:r>
+              <a:rPr lang="en-US" sz="1220" dirty="0">
                 <a:solidFill>
                   <a:srgbClr val="17364A"/>
                 </a:solidFill>
@@ -13540,9 +13776,9 @@
                 <a:ea typeface="Aptos" pitchFamily="34" charset="-122"/>
                 <a:cs typeface="Aptos" pitchFamily="34" charset="-120"/>
               </a:rPr>
-              <a:t>Produce a UAT plan and sign-off recommendation for an AI-supported workflow.</a:t>
-            </a:r>
-            <a:endParaRPr lang="en-US" sz="1380" dirty="0"/>
+              <a:t>Produce a UAT plan and sign-off recommendation for an AI-supported.</a:t>
+            </a:r>
+            <a:endParaRPr lang="en-US" sz="1220" dirty="0"/>
           </a:p>
         </p:txBody>
       </p:sp>
@@ -13620,17 +13856,17 @@
         </p:nvSpPr>
         <p:spPr>
           <a:xfrm>
-            <a:off x="7799832" y="5001768"/>
-            <a:ext cx="3145536" cy="502920"/>
-          </a:xfrm>
-          <a:prstGeom prst="rect">
-            <a:avLst/>
-          </a:prstGeom>
-          <a:noFill/>
-          <a:ln/>
-        </p:spPr>
-        <p:txBody>
-          <a:bodyPr wrap="square" lIns="0" tIns="0" rIns="0" bIns="0" rtlCol="0" anchor="t">
+            <a:off x="7799832" y="4974336"/>
+            <a:ext cx="3145536" cy="576072"/>
+          </a:xfrm>
+          <a:prstGeom prst="rect">
+            <a:avLst/>
+          </a:prstGeom>
+          <a:noFill/>
+          <a:ln/>
+        </p:spPr>
+        <p:txBody>
+          <a:bodyPr wrap="square" lIns="254" tIns="254" rIns="254" bIns="254" rtlCol="0" anchor="t">
             <a:normAutofit/>
           </a:bodyPr>
           <a:lstStyle/>
@@ -13639,7 +13875,7 @@
               <a:buNone/>
             </a:pPr>
             <a:r>
-              <a:rPr lang="en-US" sz="1550" dirty="0">
+              <a:rPr lang="en-US" sz="1320" dirty="0">
                 <a:solidFill>
                   <a:srgbClr val="17364A"/>
                 </a:solidFill>
@@ -13647,9 +13883,9 @@
                 <a:ea typeface="Aptos" pitchFamily="34" charset="-122"/>
                 <a:cs typeface="Aptos" pitchFamily="34" charset="-120"/>
               </a:rPr>
-              <a:t>Use the assignment to test whether you can explain the concept, apply it to a realistic public health situation, and identify what would need review before the work moves forward.</a:t>
-            </a:r>
-            <a:endParaRPr lang="en-US" sz="1550" dirty="0"/>
+              <a:t>Use the assignment to test whether you can explain the concept, apply it to a realistic public health situation, and.</a:t>
+            </a:r>
+            <a:endParaRPr lang="en-US" sz="1320" dirty="0"/>
           </a:p>
         </p:txBody>
       </p:sp>
@@ -13950,49 +14186,58 @@
           <a:ln/>
         </p:spPr>
         <p:txBody>
-          <a:bodyPr wrap="square" lIns="635" tIns="635" rIns="635" bIns="635" rtlCol="0" anchor="t">
+          <a:bodyPr wrap="square" lIns="1016" tIns="1016" rIns="1016" bIns="1016" rtlCol="0" anchor="t">
             <a:normAutofit/>
           </a:bodyPr>
           <a:lstStyle/>
           <a:p>
+            <a:pPr indent="0" marL="0">
+              <a:buNone/>
+            </a:pPr>
             <a:r>
               <a:rPr lang="en-US" sz="2100" dirty="0">
                 <a:solidFill>
-                  <a:srgbClr val="17364A"/>
-                </a:solidFill>
-                <a:latin typeface="Aptos" pitchFamily="34" charset="0"/>
-                <a:ea typeface="Aptos" pitchFamily="34" charset="-122"/>
-                <a:cs typeface="Aptos" pitchFamily="34" charset="-120"/>
-              </a:rPr>
-              <a:t>User acceptance testing is the process of determining whether an AI-supported workflow is usable,.</a:t>
+                  <a:srgbClr val="003A63"/>
+                </a:solidFill>
+                <a:latin typeface="Aptos" pitchFamily="34" charset="0"/>
+                <a:ea typeface="Aptos" pitchFamily="34" charset="-122"/>
+                <a:cs typeface="Aptos" pitchFamily="34" charset="-120"/>
+              </a:rPr>
+              <a:t>• User acceptance testing is the process of determining whether an AI-supported workflow is.</a:t>
             </a:r>
             <a:endParaRPr lang="en-US" sz="2100" dirty="0"/>
           </a:p>
           <a:p>
+            <a:pPr indent="0" marL="0">
+              <a:buNone/>
+            </a:pPr>
             <a:r>
               <a:rPr lang="en-US" sz="2100" dirty="0">
                 <a:solidFill>
-                  <a:srgbClr val="17364A"/>
-                </a:solidFill>
-                <a:latin typeface="Aptos" pitchFamily="34" charset="0"/>
-                <a:ea typeface="Aptos" pitchFamily="34" charset="-122"/>
-                <a:cs typeface="Aptos" pitchFamily="34" charset="-120"/>
-              </a:rPr>
-              <a:t>Technical testing may show that a tool runs, and model validation may show acceptable performance, but.</a:t>
+                  <a:srgbClr val="003A63"/>
+                </a:solidFill>
+                <a:latin typeface="Aptos" pitchFamily="34" charset="0"/>
+                <a:ea typeface="Aptos" pitchFamily="34" charset="-122"/>
+                <a:cs typeface="Aptos" pitchFamily="34" charset="-120"/>
+              </a:rPr>
+              <a:t>• Technical testing may show that a tool runs, and model validation may show acceptable.</a:t>
             </a:r>
             <a:endParaRPr lang="en-US" sz="2100" dirty="0"/>
           </a:p>
           <a:p>
+            <a:pPr indent="0" marL="0">
+              <a:buNone/>
+            </a:pPr>
             <a:r>
               <a:rPr lang="en-US" sz="2100" dirty="0">
                 <a:solidFill>
-                  <a:srgbClr val="17364A"/>
-                </a:solidFill>
-                <a:latin typeface="Aptos" pitchFamily="34" charset="0"/>
-                <a:ea typeface="Aptos" pitchFamily="34" charset="-122"/>
-                <a:cs typeface="Aptos" pitchFamily="34" charset="-120"/>
-              </a:rPr>
-              <a:t>UAT fills that gap.</a:t>
+                  <a:srgbClr val="003A63"/>
+                </a:solidFill>
+                <a:latin typeface="Aptos" pitchFamily="34" charset="0"/>
+                <a:ea typeface="Aptos" pitchFamily="34" charset="-122"/>
+                <a:cs typeface="Aptos" pitchFamily="34" charset="-120"/>
+              </a:rPr>
+              <a:t>• UAT fills that gap.</a:t>
             </a:r>
             <a:endParaRPr lang="en-US" sz="2100" dirty="0"/>
           </a:p>
@@ -14072,17 +14317,17 @@
         </p:nvSpPr>
         <p:spPr>
           <a:xfrm>
-            <a:off x="7799832" y="1828800"/>
-            <a:ext cx="3145536" cy="685800"/>
-          </a:xfrm>
-          <a:prstGeom prst="rect">
-            <a:avLst/>
-          </a:prstGeom>
-          <a:noFill/>
-          <a:ln/>
-        </p:spPr>
-        <p:txBody>
-          <a:bodyPr wrap="square" lIns="0" tIns="0" rIns="0" bIns="0" rtlCol="0" anchor="t">
+            <a:off x="7799832" y="1801368"/>
+            <a:ext cx="3145536" cy="758952"/>
+          </a:xfrm>
+          <a:prstGeom prst="rect">
+            <a:avLst/>
+          </a:prstGeom>
+          <a:noFill/>
+          <a:ln/>
+        </p:spPr>
+        <p:txBody>
+          <a:bodyPr wrap="square" lIns="254" tIns="254" rIns="254" bIns="254" rtlCol="0" anchor="t">
             <a:normAutofit/>
           </a:bodyPr>
           <a:lstStyle/>
@@ -14091,7 +14336,7 @@
               <a:buNone/>
             </a:pPr>
             <a:r>
-              <a:rPr lang="en-US" sz="1550" dirty="0">
+              <a:rPr lang="en-US" sz="1320" dirty="0">
                 <a:solidFill>
                   <a:srgbClr val="17364A"/>
                 </a:solidFill>
@@ -14101,7 +14346,7 @@
               </a:rPr>
               <a:t>User acceptance testing is the process of determining whether an AI-supported workflow is usable,.</a:t>
             </a:r>
-            <a:endParaRPr lang="en-US" sz="1550" dirty="0"/>
+            <a:endParaRPr lang="en-US" sz="1320" dirty="0"/>
           </a:p>
         </p:txBody>
       </p:sp>
@@ -14189,13 +14434,16 @@
           <a:ln/>
         </p:spPr>
         <p:txBody>
-          <a:bodyPr wrap="square" lIns="254" tIns="254" rIns="254" bIns="254" rtlCol="0" anchor="t">
+          <a:bodyPr wrap="square" lIns="508" tIns="508" rIns="508" bIns="508" rtlCol="0" anchor="t">
             <a:normAutofit/>
           </a:bodyPr>
           <a:lstStyle/>
           <a:p>
-            <a:r>
-              <a:rPr lang="en-US" sz="1380" dirty="0">
+            <a:pPr indent="0" marL="0">
+              <a:buNone/>
+            </a:pPr>
+            <a:r>
+              <a:rPr lang="en-US" sz="1220" dirty="0">
                 <a:solidFill>
                   <a:srgbClr val="17364A"/>
                 </a:solidFill>
@@ -14203,13 +14451,16 @@
                 <a:ea typeface="Aptos" pitchFamily="34" charset="-122"/>
                 <a:cs typeface="Aptos" pitchFamily="34" charset="-120"/>
               </a:rPr>
-              <a:t>User acceptance testing is the process of determining whether an AI-supported workflow is.</a:t>
-            </a:r>
-            <a:endParaRPr lang="en-US" sz="1380" dirty="0"/>
-          </a:p>
-          <a:p>
-            <a:r>
-              <a:rPr lang="en-US" sz="1380" dirty="0">
+              <a:t>User acceptance testing is the process of determining whether an.</a:t>
+            </a:r>
+            <a:endParaRPr lang="en-US" sz="1220" dirty="0"/>
+          </a:p>
+          <a:p>
+            <a:pPr indent="0" marL="0">
+              <a:buNone/>
+            </a:pPr>
+            <a:r>
+              <a:rPr lang="en-US" sz="1220" dirty="0">
                 <a:solidFill>
                   <a:srgbClr val="17364A"/>
                 </a:solidFill>
@@ -14217,13 +14468,16 @@
                 <a:ea typeface="Aptos" pitchFamily="34" charset="-122"/>
                 <a:cs typeface="Aptos" pitchFamily="34" charset="-120"/>
               </a:rPr>
-              <a:t>Technical testing may show that a tool runs, and model validation may show acceptable.</a:t>
-            </a:r>
-            <a:endParaRPr lang="en-US" sz="1380" dirty="0"/>
-          </a:p>
-          <a:p>
-            <a:r>
-              <a:rPr lang="en-US" sz="1380" dirty="0">
+              <a:t>Technical testing may show that a tool runs, and model validation.</a:t>
+            </a:r>
+            <a:endParaRPr lang="en-US" sz="1220" dirty="0"/>
+          </a:p>
+          <a:p>
+            <a:pPr indent="0" marL="0">
+              <a:buNone/>
+            </a:pPr>
+            <a:r>
+              <a:rPr lang="en-US" sz="1220" dirty="0">
                 <a:solidFill>
                   <a:srgbClr val="17364A"/>
                 </a:solidFill>
@@ -14231,9 +14485,9 @@
                 <a:ea typeface="Aptos" pitchFamily="34" charset="-122"/>
                 <a:cs typeface="Aptos" pitchFamily="34" charset="-120"/>
               </a:rPr>
-              <a:t>This module teaches learners how to design and conduct user acceptance testing for.</a:t>
-            </a:r>
-            <a:endParaRPr lang="en-US" sz="1380" dirty="0"/>
+              <a:t>This module teaches learners how to design and conduct user.</a:t>
+            </a:r>
+            <a:endParaRPr lang="en-US" sz="1220" dirty="0"/>
           </a:p>
         </p:txBody>
       </p:sp>
@@ -14311,17 +14565,17 @@
         </p:nvSpPr>
         <p:spPr>
           <a:xfrm>
-            <a:off x="7799832" y="5001768"/>
-            <a:ext cx="3145536" cy="502920"/>
-          </a:xfrm>
-          <a:prstGeom prst="rect">
-            <a:avLst/>
-          </a:prstGeom>
-          <a:noFill/>
-          <a:ln/>
-        </p:spPr>
-        <p:txBody>
-          <a:bodyPr wrap="square" lIns="0" tIns="0" rIns="0" bIns="0" rtlCol="0" anchor="t">
+            <a:off x="7799832" y="4974336"/>
+            <a:ext cx="3145536" cy="576072"/>
+          </a:xfrm>
+          <a:prstGeom prst="rect">
+            <a:avLst/>
+          </a:prstGeom>
+          <a:noFill/>
+          <a:ln/>
+        </p:spPr>
+        <p:txBody>
+          <a:bodyPr wrap="square" lIns="254" tIns="254" rIns="254" bIns="254" rtlCol="0" anchor="t">
             <a:normAutofit/>
           </a:bodyPr>
           <a:lstStyle/>
@@ -14330,7 +14584,7 @@
               <a:buNone/>
             </a:pPr>
             <a:r>
-              <a:rPr lang="en-US" sz="1550" dirty="0">
+              <a:rPr lang="en-US" sz="1320" dirty="0">
                 <a:solidFill>
                   <a:srgbClr val="17364A"/>
                 </a:solidFill>
@@ -14338,9 +14592,9 @@
                 <a:ea typeface="Aptos" pitchFamily="34" charset="-122"/>
                 <a:cs typeface="Aptos" pitchFamily="34" charset="-120"/>
               </a:rPr>
-              <a:t>Use the concept to clarify workflow changes, dependencies, staffing, procurement requirements, training needs, and implementation checkpoints.</a:t>
-            </a:r>
-            <a:endParaRPr lang="en-US" sz="1550" dirty="0"/>
+              <a:t>Use the concept to clarify workflow changes, dependencies, staffing, procurement requirements, training needs, and.</a:t>
+            </a:r>
+            <a:endParaRPr lang="en-US" sz="1320" dirty="0"/>
           </a:p>
         </p:txBody>
       </p:sp>
@@ -14641,49 +14895,58 @@
           <a:ln/>
         </p:spPr>
         <p:txBody>
-          <a:bodyPr wrap="square" lIns="635" tIns="635" rIns="635" bIns="635" rtlCol="0" anchor="t">
+          <a:bodyPr wrap="square" lIns="1016" tIns="1016" rIns="1016" bIns="1016" rtlCol="0" anchor="t">
             <a:normAutofit/>
           </a:bodyPr>
           <a:lstStyle/>
           <a:p>
+            <a:pPr indent="0" marL="0">
+              <a:buNone/>
+            </a:pPr>
             <a:r>
               <a:rPr lang="en-US" sz="2100" dirty="0">
                 <a:solidFill>
-                  <a:srgbClr val="17364A"/>
-                </a:solidFill>
-                <a:latin typeface="Aptos" pitchFamily="34" charset="0"/>
-                <a:ea typeface="Aptos" pitchFamily="34" charset="-122"/>
-                <a:cs typeface="Aptos" pitchFamily="34" charset="-120"/>
-              </a:rPr>
-              <a:t>Before launching an AI tool that summarizes case investigation notes, investigators complete UAT.</a:t>
+                  <a:srgbClr val="003A63"/>
+                </a:solidFill>
+                <a:latin typeface="Aptos" pitchFamily="34" charset="0"/>
+                <a:ea typeface="Aptos" pitchFamily="34" charset="-122"/>
+                <a:cs typeface="Aptos" pitchFamily="34" charset="-120"/>
+              </a:rPr>
+              <a:t>• Before launching an AI tool that summarizes case investigation notes, investigators complete.</a:t>
             </a:r>
             <a:endParaRPr lang="en-US" sz="2100" dirty="0"/>
           </a:p>
           <a:p>
+            <a:pPr indent="0" marL="0">
+              <a:buNone/>
+            </a:pPr>
             <a:r>
               <a:rPr lang="en-US" sz="2100" dirty="0">
                 <a:solidFill>
-                  <a:srgbClr val="17364A"/>
-                </a:solidFill>
-                <a:latin typeface="Aptos" pitchFamily="34" charset="0"/>
-                <a:ea typeface="Aptos" pitchFamily="34" charset="-122"/>
-                <a:cs typeface="Aptos" pitchFamily="34" charset="-120"/>
-              </a:rPr>
-              <a:t>Testers verify whether the summary is understandable, source information is visible, errors can be.</a:t>
+                  <a:srgbClr val="003A63"/>
+                </a:solidFill>
+                <a:latin typeface="Aptos" pitchFamily="34" charset="0"/>
+                <a:ea typeface="Aptos" pitchFamily="34" charset="-122"/>
+                <a:cs typeface="Aptos" pitchFamily="34" charset="-120"/>
+              </a:rPr>
+              <a:t>• Testers verify whether the summary is understandable, source information is visible, errors.</a:t>
             </a:r>
             <a:endParaRPr lang="en-US" sz="2100" dirty="0"/>
           </a:p>
           <a:p>
+            <a:pPr indent="0" marL="0">
+              <a:buNone/>
+            </a:pPr>
             <a:r>
               <a:rPr lang="en-US" sz="2100" dirty="0">
                 <a:solidFill>
-                  <a:srgbClr val="17364A"/>
-                </a:solidFill>
-                <a:latin typeface="Aptos" pitchFamily="34" charset="0"/>
-                <a:ea typeface="Aptos" pitchFamily="34" charset="-122"/>
-                <a:cs typeface="Aptos" pitchFamily="34" charset="-120"/>
-              </a:rPr>
-              <a:t>The tool does not launch until high-priority issues are resolved.</a:t>
+                  <a:srgbClr val="003A63"/>
+                </a:solidFill>
+                <a:latin typeface="Aptos" pitchFamily="34" charset="0"/>
+                <a:ea typeface="Aptos" pitchFamily="34" charset="-122"/>
+                <a:cs typeface="Aptos" pitchFamily="34" charset="-120"/>
+              </a:rPr>
+              <a:t>• The tool does not launch until high-priority issues are resolved.</a:t>
             </a:r>
             <a:endParaRPr lang="en-US" sz="2100" dirty="0"/>
           </a:p>
@@ -14763,17 +15026,17 @@
         </p:nvSpPr>
         <p:spPr>
           <a:xfrm>
-            <a:off x="7799832" y="1828800"/>
-            <a:ext cx="3145536" cy="685800"/>
-          </a:xfrm>
-          <a:prstGeom prst="rect">
-            <a:avLst/>
-          </a:prstGeom>
-          <a:noFill/>
-          <a:ln/>
-        </p:spPr>
-        <p:txBody>
-          <a:bodyPr wrap="square" lIns="0" tIns="0" rIns="0" bIns="0" rtlCol="0" anchor="t">
+            <a:off x="7799832" y="1801368"/>
+            <a:ext cx="3145536" cy="758952"/>
+          </a:xfrm>
+          <a:prstGeom prst="rect">
+            <a:avLst/>
+          </a:prstGeom>
+          <a:noFill/>
+          <a:ln/>
+        </p:spPr>
+        <p:txBody>
+          <a:bodyPr wrap="square" lIns="254" tIns="254" rIns="254" bIns="254" rtlCol="0" anchor="t">
             <a:normAutofit/>
           </a:bodyPr>
           <a:lstStyle/>
@@ -14782,7 +15045,7 @@
               <a:buNone/>
             </a:pPr>
             <a:r>
-              <a:rPr lang="en-US" sz="1550" dirty="0">
+              <a:rPr lang="en-US" sz="1320" dirty="0">
                 <a:solidFill>
                   <a:srgbClr val="17364A"/>
                 </a:solidFill>
@@ -14792,7 +15055,7 @@
               </a:rPr>
               <a:t>Before launching an AI tool that summarizes case investigation notes, investigators complete UAT.</a:t>
             </a:r>
-            <a:endParaRPr lang="en-US" sz="1550" dirty="0"/>
+            <a:endParaRPr lang="en-US" sz="1320" dirty="0"/>
           </a:p>
         </p:txBody>
       </p:sp>
@@ -14880,13 +15143,16 @@
           <a:ln/>
         </p:spPr>
         <p:txBody>
-          <a:bodyPr wrap="square" lIns="254" tIns="254" rIns="254" bIns="254" rtlCol="0" anchor="t">
+          <a:bodyPr wrap="square" lIns="508" tIns="508" rIns="508" bIns="508" rtlCol="0" anchor="t">
             <a:normAutofit/>
           </a:bodyPr>
           <a:lstStyle/>
           <a:p>
-            <a:r>
-              <a:rPr lang="en-US" sz="1380" dirty="0">
+            <a:pPr indent="0" marL="0">
+              <a:buNone/>
+            </a:pPr>
+            <a:r>
+              <a:rPr lang="en-US" sz="1220" dirty="0">
                 <a:solidFill>
                   <a:srgbClr val="17364A"/>
                 </a:solidFill>
@@ -14894,13 +15160,16 @@
                 <a:ea typeface="Aptos" pitchFamily="34" charset="-122"/>
                 <a:cs typeface="Aptos" pitchFamily="34" charset="-120"/>
               </a:rPr>
-              <a:t>Before launching an AI tool that summarizes case investigation notes, investigators.</a:t>
-            </a:r>
-            <a:endParaRPr lang="en-US" sz="1380" dirty="0"/>
-          </a:p>
-          <a:p>
-            <a:r>
-              <a:rPr lang="en-US" sz="1380" dirty="0">
+              <a:t>Before launching an AI tool that summarizes case investigation.</a:t>
+            </a:r>
+            <a:endParaRPr lang="en-US" sz="1220" dirty="0"/>
+          </a:p>
+          <a:p>
+            <a:pPr indent="0" marL="0">
+              <a:buNone/>
+            </a:pPr>
+            <a:r>
+              <a:rPr lang="en-US" sz="1220" dirty="0">
                 <a:solidFill>
                   <a:srgbClr val="17364A"/>
                 </a:solidFill>
@@ -14908,9 +15177,9 @@
                 <a:ea typeface="Aptos" pitchFamily="34" charset="-122"/>
                 <a:cs typeface="Aptos" pitchFamily="34" charset="-120"/>
               </a:rPr>
-              <a:t>Testers verify whether the summary is understandable, source information is visible,.</a:t>
-            </a:r>
-            <a:endParaRPr lang="en-US" sz="1380" dirty="0"/>
+              <a:t>Testers verify whether the summary is understandable, source.</a:t>
+            </a:r>
+            <a:endParaRPr lang="en-US" sz="1220" dirty="0"/>
           </a:p>
         </p:txBody>
       </p:sp>
@@ -14988,17 +15257,17 @@
         </p:nvSpPr>
         <p:spPr>
           <a:xfrm>
-            <a:off x="7799832" y="5001768"/>
-            <a:ext cx="3145536" cy="502920"/>
-          </a:xfrm>
-          <a:prstGeom prst="rect">
-            <a:avLst/>
-          </a:prstGeom>
-          <a:noFill/>
-          <a:ln/>
-        </p:spPr>
-        <p:txBody>
-          <a:bodyPr wrap="square" lIns="0" tIns="0" rIns="0" bIns="0" rtlCol="0" anchor="t">
+            <a:off x="7799832" y="4974336"/>
+            <a:ext cx="3145536" cy="576072"/>
+          </a:xfrm>
+          <a:prstGeom prst="rect">
+            <a:avLst/>
+          </a:prstGeom>
+          <a:noFill/>
+          <a:ln/>
+        </p:spPr>
+        <p:txBody>
+          <a:bodyPr wrap="square" lIns="254" tIns="254" rIns="254" bIns="254" rtlCol="0" anchor="t">
             <a:normAutofit/>
           </a:bodyPr>
           <a:lstStyle/>
@@ -15007,7 +15276,7 @@
               <a:buNone/>
             </a:pPr>
             <a:r>
-              <a:rPr lang="en-US" sz="1550" dirty="0">
+              <a:rPr lang="en-US" sz="1320" dirty="0">
                 <a:solidFill>
                   <a:srgbClr val="17364A"/>
                 </a:solidFill>
@@ -15015,9 +15284,9 @@
                 <a:ea typeface="Aptos" pitchFamily="34" charset="-122"/>
                 <a:cs typeface="Aptos" pitchFamily="34" charset="-120"/>
               </a:rPr>
-              <a:t>Use the concept to clarify workflow changes, dependencies, staffing, procurement requirements, training needs, and implementation checkpoints.</a:t>
-            </a:r>
-            <a:endParaRPr lang="en-US" sz="1550" dirty="0"/>
+              <a:t>Use the concept to clarify workflow changes, dependencies, staffing, procurement requirements, training needs, and.</a:t>
+            </a:r>
+            <a:endParaRPr lang="en-US" sz="1320" dirty="0"/>
           </a:p>
         </p:txBody>
       </p:sp>
@@ -15318,49 +15587,58 @@
           <a:ln/>
         </p:spPr>
         <p:txBody>
-          <a:bodyPr wrap="square" lIns="635" tIns="635" rIns="635" bIns="635" rtlCol="0" anchor="t">
+          <a:bodyPr wrap="square" lIns="1016" tIns="1016" rIns="1016" bIns="1016" rtlCol="0" anchor="t">
             <a:normAutofit/>
           </a:bodyPr>
           <a:lstStyle/>
           <a:p>
+            <a:pPr indent="0" marL="0">
+              <a:buNone/>
+            </a:pPr>
             <a:r>
               <a:rPr lang="en-US" sz="2100" dirty="0">
                 <a:solidFill>
-                  <a:srgbClr val="17364A"/>
-                </a:solidFill>
-                <a:latin typeface="Aptos" pitchFamily="34" charset="0"/>
-                <a:ea typeface="Aptos" pitchFamily="34" charset="-122"/>
-                <a:cs typeface="Aptos" pitchFamily="34" charset="-120"/>
-              </a:rPr>
-              <a:t>UAT should be designed around real users and real work.</a:t>
+                  <a:srgbClr val="003A63"/>
+                </a:solidFill>
+                <a:latin typeface="Aptos" pitchFamily="34" charset="0"/>
+                <a:ea typeface="Aptos" pitchFamily="34" charset="-122"/>
+                <a:cs typeface="Aptos" pitchFamily="34" charset="-120"/>
+              </a:rPr>
+              <a:t>• UAT should be designed around real users and real work.</a:t>
             </a:r>
             <a:endParaRPr lang="en-US" sz="2100" dirty="0"/>
           </a:p>
           <a:p>
+            <a:pPr indent="0" marL="0">
+              <a:buNone/>
+            </a:pPr>
             <a:r>
               <a:rPr lang="en-US" sz="2100" dirty="0">
                 <a:solidFill>
-                  <a:srgbClr val="17364A"/>
-                </a:solidFill>
-                <a:latin typeface="Aptos" pitchFamily="34" charset="0"/>
-                <a:ea typeface="Aptos" pitchFamily="34" charset="-122"/>
-                <a:cs typeface="Aptos" pitchFamily="34" charset="-120"/>
-              </a:rPr>
-              <a:t>Testers should include the roles that will actually use or supervise the AI-supported workflow, such as.</a:t>
+                  <a:srgbClr val="003A63"/>
+                </a:solidFill>
+                <a:latin typeface="Aptos" pitchFamily="34" charset="0"/>
+                <a:ea typeface="Aptos" pitchFamily="34" charset="-122"/>
+                <a:cs typeface="Aptos" pitchFamily="34" charset="-120"/>
+              </a:rPr>
+              <a:t>• Testers should include the roles that will actually use or supervise the AI-supported.</a:t>
             </a:r>
             <a:endParaRPr lang="en-US" sz="2100" dirty="0"/>
           </a:p>
           <a:p>
+            <a:pPr indent="0" marL="0">
+              <a:buNone/>
+            </a:pPr>
             <a:r>
               <a:rPr lang="en-US" sz="2100" dirty="0">
                 <a:solidFill>
-                  <a:srgbClr val="17364A"/>
-                </a:solidFill>
-                <a:latin typeface="Aptos" pitchFamily="34" charset="0"/>
-                <a:ea typeface="Aptos" pitchFamily="34" charset="-122"/>
-                <a:cs typeface="Aptos" pitchFamily="34" charset="-120"/>
-              </a:rPr>
-              <a:t>If only technical staff test the tool, usability and workflow problems may be missed.</a:t>
+                  <a:srgbClr val="003A63"/>
+                </a:solidFill>
+                <a:latin typeface="Aptos" pitchFamily="34" charset="0"/>
+                <a:ea typeface="Aptos" pitchFamily="34" charset="-122"/>
+                <a:cs typeface="Aptos" pitchFamily="34" charset="-120"/>
+              </a:rPr>
+              <a:t>• If only technical staff test the tool, usability and workflow problems may be missed.</a:t>
             </a:r>
             <a:endParaRPr lang="en-US" sz="2100" dirty="0"/>
           </a:p>
@@ -15440,17 +15718,17 @@
         </p:nvSpPr>
         <p:spPr>
           <a:xfrm>
-            <a:off x="7799832" y="1828800"/>
-            <a:ext cx="3145536" cy="685800"/>
-          </a:xfrm>
-          <a:prstGeom prst="rect">
-            <a:avLst/>
-          </a:prstGeom>
-          <a:noFill/>
-          <a:ln/>
-        </p:spPr>
-        <p:txBody>
-          <a:bodyPr wrap="square" lIns="0" tIns="0" rIns="0" bIns="0" rtlCol="0" anchor="t">
+            <a:off x="7799832" y="1801368"/>
+            <a:ext cx="3145536" cy="758952"/>
+          </a:xfrm>
+          <a:prstGeom prst="rect">
+            <a:avLst/>
+          </a:prstGeom>
+          <a:noFill/>
+          <a:ln/>
+        </p:spPr>
+        <p:txBody>
+          <a:bodyPr wrap="square" lIns="254" tIns="254" rIns="254" bIns="254" rtlCol="0" anchor="t">
             <a:normAutofit/>
           </a:bodyPr>
           <a:lstStyle/>
@@ -15459,7 +15737,7 @@
               <a:buNone/>
             </a:pPr>
             <a:r>
-              <a:rPr lang="en-US" sz="1550" dirty="0">
+              <a:rPr lang="en-US" sz="1320" dirty="0">
                 <a:solidFill>
                   <a:srgbClr val="17364A"/>
                 </a:solidFill>
@@ -15469,7 +15747,7 @@
               </a:rPr>
               <a:t>UAT should be designed around real users and real work.</a:t>
             </a:r>
-            <a:endParaRPr lang="en-US" sz="1550" dirty="0"/>
+            <a:endParaRPr lang="en-US" sz="1320" dirty="0"/>
           </a:p>
         </p:txBody>
       </p:sp>
@@ -15557,13 +15835,16 @@
           <a:ln/>
         </p:spPr>
         <p:txBody>
-          <a:bodyPr wrap="square" lIns="254" tIns="254" rIns="254" bIns="254" rtlCol="0" anchor="t">
+          <a:bodyPr wrap="square" lIns="508" tIns="508" rIns="508" bIns="508" rtlCol="0" anchor="t">
             <a:normAutofit/>
           </a:bodyPr>
           <a:lstStyle/>
           <a:p>
-            <a:r>
-              <a:rPr lang="en-US" sz="1380" dirty="0">
+            <a:pPr indent="0" marL="0">
+              <a:buNone/>
+            </a:pPr>
+            <a:r>
+              <a:rPr lang="en-US" sz="1220" dirty="0">
                 <a:solidFill>
                   <a:srgbClr val="17364A"/>
                 </a:solidFill>
@@ -15571,13 +15852,16 @@
                 <a:ea typeface="Aptos" pitchFamily="34" charset="-122"/>
                 <a:cs typeface="Aptos" pitchFamily="34" charset="-120"/>
               </a:rPr>
-              <a:t>Testers should include the roles that will actually use or supervise the AI-supported.</a:t>
-            </a:r>
-            <a:endParaRPr lang="en-US" sz="1380" dirty="0"/>
-          </a:p>
-          <a:p>
-            <a:r>
-              <a:rPr lang="en-US" sz="1380" dirty="0">
+              <a:t>Testers should include the roles that will actually use or.</a:t>
+            </a:r>
+            <a:endParaRPr lang="en-US" sz="1220" dirty="0"/>
+          </a:p>
+          <a:p>
+            <a:pPr indent="0" marL="0">
+              <a:buNone/>
+            </a:pPr>
+            <a:r>
+              <a:rPr lang="en-US" sz="1220" dirty="0">
                 <a:solidFill>
                   <a:srgbClr val="17364A"/>
                 </a:solidFill>
@@ -15587,11 +15871,14 @@
               </a:rPr>
               <a:t>Test scenarios should include more than ideal cases.</a:t>
             </a:r>
-            <a:endParaRPr lang="en-US" sz="1380" dirty="0"/>
-          </a:p>
-          <a:p>
-            <a:r>
-              <a:rPr lang="en-US" sz="1380" dirty="0">
+            <a:endParaRPr lang="en-US" sz="1220" dirty="0"/>
+          </a:p>
+          <a:p>
+            <a:pPr indent="0" marL="0">
+              <a:buNone/>
+            </a:pPr>
+            <a:r>
+              <a:rPr lang="en-US" sz="1220" dirty="0">
                 <a:solidFill>
                   <a:srgbClr val="17364A"/>
                 </a:solidFill>
@@ -15599,9 +15886,9 @@
                 <a:ea typeface="Aptos" pitchFamily="34" charset="-122"/>
                 <a:cs typeface="Aptos" pitchFamily="34" charset="-120"/>
               </a:rPr>
-              <a:t>AI-supported workflows should be tested with incomplete data, conflicting information,.</a:t>
-            </a:r>
-            <a:endParaRPr lang="en-US" sz="1380" dirty="0"/>
+              <a:t>AI-supported workflows should be tested with incomplete data,.</a:t>
+            </a:r>
+            <a:endParaRPr lang="en-US" sz="1220" dirty="0"/>
           </a:p>
         </p:txBody>
       </p:sp>
@@ -15679,17 +15966,17 @@
         </p:nvSpPr>
         <p:spPr>
           <a:xfrm>
-            <a:off x="7799832" y="5001768"/>
-            <a:ext cx="3145536" cy="502920"/>
-          </a:xfrm>
-          <a:prstGeom prst="rect">
-            <a:avLst/>
-          </a:prstGeom>
-          <a:noFill/>
-          <a:ln/>
-        </p:spPr>
-        <p:txBody>
-          <a:bodyPr wrap="square" lIns="0" tIns="0" rIns="0" bIns="0" rtlCol="0" anchor="t">
+            <a:off x="7799832" y="4974336"/>
+            <a:ext cx="3145536" cy="576072"/>
+          </a:xfrm>
+          <a:prstGeom prst="rect">
+            <a:avLst/>
+          </a:prstGeom>
+          <a:noFill/>
+          <a:ln/>
+        </p:spPr>
+        <p:txBody>
+          <a:bodyPr wrap="square" lIns="254" tIns="254" rIns="254" bIns="254" rtlCol="0" anchor="t">
             <a:normAutofit/>
           </a:bodyPr>
           <a:lstStyle/>
@@ -15698,7 +15985,7 @@
               <a:buNone/>
             </a:pPr>
             <a:r>
-              <a:rPr lang="en-US" sz="1550" dirty="0">
+              <a:rPr lang="en-US" sz="1320" dirty="0">
                 <a:solidFill>
                   <a:srgbClr val="17364A"/>
                 </a:solidFill>
@@ -15706,9 +15993,9 @@
                 <a:ea typeface="Aptos" pitchFamily="34" charset="-122"/>
                 <a:cs typeface="Aptos" pitchFamily="34" charset="-120"/>
               </a:rPr>
-              <a:t>Use the concept to clarify workflow changes, dependencies, staffing, procurement requirements, training needs, and implementation checkpoints.</a:t>
-            </a:r>
-            <a:endParaRPr lang="en-US" sz="1550" dirty="0"/>
+              <a:t>Use the concept to clarify workflow changes, dependencies, staffing, procurement requirements, training needs, and.</a:t>
+            </a:r>
+            <a:endParaRPr lang="en-US" sz="1320" dirty="0"/>
           </a:p>
         </p:txBody>
       </p:sp>
@@ -16009,49 +16296,58 @@
           <a:ln/>
         </p:spPr>
         <p:txBody>
-          <a:bodyPr wrap="square" lIns="635" tIns="635" rIns="635" bIns="635" rtlCol="0" anchor="t">
+          <a:bodyPr wrap="square" lIns="1016" tIns="1016" rIns="1016" bIns="1016" rtlCol="0" anchor="t">
             <a:normAutofit/>
           </a:bodyPr>
           <a:lstStyle/>
           <a:p>
+            <a:pPr indent="0" marL="0">
+              <a:buNone/>
+            </a:pPr>
             <a:r>
               <a:rPr lang="en-US" sz="2100" dirty="0">
                 <a:solidFill>
-                  <a:srgbClr val="17364A"/>
-                </a:solidFill>
-                <a:latin typeface="Aptos" pitchFamily="34" charset="0"/>
-                <a:ea typeface="Aptos" pitchFamily="34" charset="-122"/>
-                <a:cs typeface="Aptos" pitchFamily="34" charset="-120"/>
-              </a:rPr>
-              <a:t>UAT results should lead to a launch decision.</a:t>
+                  <a:srgbClr val="003A63"/>
+                </a:solidFill>
+                <a:latin typeface="Aptos" pitchFamily="34" charset="0"/>
+                <a:ea typeface="Aptos" pitchFamily="34" charset="-122"/>
+                <a:cs typeface="Aptos" pitchFamily="34" charset="-120"/>
+              </a:rPr>
+              <a:t>• UAT results should lead to a launch decision.</a:t>
             </a:r>
             <a:endParaRPr lang="en-US" sz="2100" dirty="0"/>
           </a:p>
           <a:p>
+            <a:pPr indent="0" marL="0">
+              <a:buNone/>
+            </a:pPr>
             <a:r>
               <a:rPr lang="en-US" sz="2100" dirty="0">
                 <a:solidFill>
-                  <a:srgbClr val="17364A"/>
-                </a:solidFill>
-                <a:latin typeface="Aptos" pitchFamily="34" charset="0"/>
-                <a:ea typeface="Aptos" pitchFamily="34" charset="-122"/>
-                <a:cs typeface="Aptos" pitchFamily="34" charset="-120"/>
-              </a:rPr>
-              <a:t>Issues should be categorized by severity, assigned to owners, and resolved or accepted with documented.</a:t>
+                  <a:srgbClr val="003A63"/>
+                </a:solidFill>
+                <a:latin typeface="Aptos" pitchFamily="34" charset="0"/>
+                <a:ea typeface="Aptos" pitchFamily="34" charset="-122"/>
+                <a:cs typeface="Aptos" pitchFamily="34" charset="-120"/>
+              </a:rPr>
+              <a:t>• Issues should be categorized by severity, assigned to owners, and resolved or accepted with.</a:t>
             </a:r>
             <a:endParaRPr lang="en-US" sz="2100" dirty="0"/>
           </a:p>
           <a:p>
+            <a:pPr indent="0" marL="0">
+              <a:buNone/>
+            </a:pPr>
             <a:r>
               <a:rPr lang="en-US" sz="2100" dirty="0">
                 <a:solidFill>
-                  <a:srgbClr val="17364A"/>
-                </a:solidFill>
-                <a:latin typeface="Aptos" pitchFamily="34" charset="0"/>
-                <a:ea typeface="Aptos" pitchFamily="34" charset="-122"/>
-                <a:cs typeface="Aptos" pitchFamily="34" charset="-120"/>
-              </a:rPr>
-              <a:t>A launch should not proceed simply because testing occurred.</a:t>
+                  <a:srgbClr val="003A63"/>
+                </a:solidFill>
+                <a:latin typeface="Aptos" pitchFamily="34" charset="0"/>
+                <a:ea typeface="Aptos" pitchFamily="34" charset="-122"/>
+                <a:cs typeface="Aptos" pitchFamily="34" charset="-120"/>
+              </a:rPr>
+              <a:t>• A launch should not proceed simply because testing occurred.</a:t>
             </a:r>
             <a:endParaRPr lang="en-US" sz="2100" dirty="0"/>
           </a:p>
@@ -16131,17 +16427,17 @@
         </p:nvSpPr>
         <p:spPr>
           <a:xfrm>
-            <a:off x="7799832" y="1828800"/>
-            <a:ext cx="3145536" cy="685800"/>
-          </a:xfrm>
-          <a:prstGeom prst="rect">
-            <a:avLst/>
-          </a:prstGeom>
-          <a:noFill/>
-          <a:ln/>
-        </p:spPr>
-        <p:txBody>
-          <a:bodyPr wrap="square" lIns="0" tIns="0" rIns="0" bIns="0" rtlCol="0" anchor="t">
+            <a:off x="7799832" y="1801368"/>
+            <a:ext cx="3145536" cy="758952"/>
+          </a:xfrm>
+          <a:prstGeom prst="rect">
+            <a:avLst/>
+          </a:prstGeom>
+          <a:noFill/>
+          <a:ln/>
+        </p:spPr>
+        <p:txBody>
+          <a:bodyPr wrap="square" lIns="254" tIns="254" rIns="254" bIns="254" rtlCol="0" anchor="t">
             <a:normAutofit/>
           </a:bodyPr>
           <a:lstStyle/>
@@ -16150,7 +16446,7 @@
               <a:buNone/>
             </a:pPr>
             <a:r>
-              <a:rPr lang="en-US" sz="1550" dirty="0">
+              <a:rPr lang="en-US" sz="1320" dirty="0">
                 <a:solidFill>
                   <a:srgbClr val="17364A"/>
                 </a:solidFill>
@@ -16160,7 +16456,7 @@
               </a:rPr>
               <a:t>UAT results should lead to a launch decision.</a:t>
             </a:r>
-            <a:endParaRPr lang="en-US" sz="1550" dirty="0"/>
+            <a:endParaRPr lang="en-US" sz="1320" dirty="0"/>
           </a:p>
         </p:txBody>
       </p:sp>
@@ -16248,13 +16544,16 @@
           <a:ln/>
         </p:spPr>
         <p:txBody>
-          <a:bodyPr wrap="square" lIns="254" tIns="254" rIns="254" bIns="254" rtlCol="0" anchor="t">
+          <a:bodyPr wrap="square" lIns="508" tIns="508" rIns="508" bIns="508" rtlCol="0" anchor="t">
             <a:normAutofit/>
           </a:bodyPr>
           <a:lstStyle/>
           <a:p>
-            <a:r>
-              <a:rPr lang="en-US" sz="1380" dirty="0">
+            <a:pPr indent="0" marL="0">
+              <a:buNone/>
+            </a:pPr>
+            <a:r>
+              <a:rPr lang="en-US" sz="1220" dirty="0">
                 <a:solidFill>
                   <a:srgbClr val="17364A"/>
                 </a:solidFill>
@@ -16262,13 +16561,16 @@
                 <a:ea typeface="Aptos" pitchFamily="34" charset="-122"/>
                 <a:cs typeface="Aptos" pitchFamily="34" charset="-120"/>
               </a:rPr>
-              <a:t>Issues should be categorized by severity, assigned to owners, and resolved or accepted.</a:t>
-            </a:r>
-            <a:endParaRPr lang="en-US" sz="1380" dirty="0"/>
-          </a:p>
-          <a:p>
-            <a:r>
-              <a:rPr lang="en-US" sz="1380" dirty="0">
+              <a:t>Issues should be categorized by severity, assigned to owners, and.</a:t>
+            </a:r>
+            <a:endParaRPr lang="en-US" sz="1220" dirty="0"/>
+          </a:p>
+          <a:p>
+            <a:pPr indent="0" marL="0">
+              <a:buNone/>
+            </a:pPr>
+            <a:r>
+              <a:rPr lang="en-US" sz="1220" dirty="0">
                 <a:solidFill>
                   <a:srgbClr val="17364A"/>
                 </a:solidFill>
@@ -16276,9 +16578,9 @@
                 <a:ea typeface="Aptos" pitchFamily="34" charset="-122"/>
                 <a:cs typeface="Aptos" pitchFamily="34" charset="-120"/>
               </a:rPr>
-              <a:t>It should proceed only if acceptance criteria are met and unresolved issues do not create.</a:t>
-            </a:r>
-            <a:endParaRPr lang="en-US" sz="1380" dirty="0"/>
+              <a:t>It should proceed only if acceptance criteria are met and.</a:t>
+            </a:r>
+            <a:endParaRPr lang="en-US" sz="1220" dirty="0"/>
           </a:p>
         </p:txBody>
       </p:sp>
@@ -16356,17 +16658,17 @@
         </p:nvSpPr>
         <p:spPr>
           <a:xfrm>
-            <a:off x="7799832" y="5001768"/>
-            <a:ext cx="3145536" cy="502920"/>
-          </a:xfrm>
-          <a:prstGeom prst="rect">
-            <a:avLst/>
-          </a:prstGeom>
-          <a:noFill/>
-          <a:ln/>
-        </p:spPr>
-        <p:txBody>
-          <a:bodyPr wrap="square" lIns="0" tIns="0" rIns="0" bIns="0" rtlCol="0" anchor="t">
+            <a:off x="7799832" y="4974336"/>
+            <a:ext cx="3145536" cy="576072"/>
+          </a:xfrm>
+          <a:prstGeom prst="rect">
+            <a:avLst/>
+          </a:prstGeom>
+          <a:noFill/>
+          <a:ln/>
+        </p:spPr>
+        <p:txBody>
+          <a:bodyPr wrap="square" lIns="254" tIns="254" rIns="254" bIns="254" rtlCol="0" anchor="t">
             <a:normAutofit/>
           </a:bodyPr>
           <a:lstStyle/>
@@ -16375,7 +16677,7 @@
               <a:buNone/>
             </a:pPr>
             <a:r>
-              <a:rPr lang="en-US" sz="1550" dirty="0">
+              <a:rPr lang="en-US" sz="1320" dirty="0">
                 <a:solidFill>
                   <a:srgbClr val="17364A"/>
                 </a:solidFill>
@@ -16383,9 +16685,9 @@
                 <a:ea typeface="Aptos" pitchFamily="34" charset="-122"/>
                 <a:cs typeface="Aptos" pitchFamily="34" charset="-120"/>
               </a:rPr>
-              <a:t>Use the concept to clarify workflow changes, dependencies, staffing, procurement requirements, training needs, and implementation checkpoints.</a:t>
-            </a:r>
-            <a:endParaRPr lang="en-US" sz="1550" dirty="0"/>
+              <a:t>Use the concept to clarify workflow changes, dependencies, staffing, procurement requirements, training needs, and.</a:t>
+            </a:r>
+            <a:endParaRPr lang="en-US" sz="1320" dirty="0"/>
           </a:p>
         </p:txBody>
       </p:sp>

--- a/downloads/presentations/modules/ops-240.pptx
+++ b/downloads/presentations/modules/ops-240.pptx
@@ -3331,11 +3331,11 @@
         <p:spPr>
           <a:xfrm>
             <a:off x="7635240" y="1325880"/>
-            <a:ext cx="3474720" cy="1325880"/>
+            <a:ext cx="3474720" cy="1207008"/>
           </a:xfrm>
           <a:prstGeom prst="roundRect">
             <a:avLst>
-              <a:gd name="adj" fmla="val 8276"/>
+              <a:gd name="adj" fmla="val 9091"/>
             </a:avLst>
           </a:prstGeom>
           <a:solidFill>
@@ -3397,7 +3397,7 @@
         <p:spPr>
           <a:xfrm>
             <a:off x="7799832" y="1801368"/>
-            <a:ext cx="3145536" cy="758952"/>
+            <a:ext cx="3145536" cy="640080"/>
           </a:xfrm>
           <a:prstGeom prst="rect">
             <a:avLst/>
@@ -3437,7 +3437,7 @@
         </p:nvSpPr>
         <p:spPr>
           <a:xfrm>
-            <a:off x="7635240" y="2788920"/>
+            <a:off x="7635240" y="2670048"/>
             <a:ext cx="3474720" cy="1536192"/>
           </a:xfrm>
           <a:prstGeom prst="roundRect">
@@ -3464,7 +3464,7 @@
         </p:nvSpPr>
         <p:spPr>
           <a:xfrm>
-            <a:off x="7799832" y="2935224"/>
+            <a:off x="7799832" y="2816352"/>
             <a:ext cx="3145536" cy="256032"/>
           </a:xfrm>
           <a:prstGeom prst="rect">
@@ -3503,7 +3503,7 @@
         </p:nvSpPr>
         <p:spPr>
           <a:xfrm>
-            <a:off x="7818120" y="3300984"/>
+            <a:off x="7818120" y="3182112"/>
             <a:ext cx="3090672" cy="877824"/>
           </a:xfrm>
           <a:prstGeom prst="rect">
@@ -3578,12 +3578,12 @@
         </p:nvSpPr>
         <p:spPr>
           <a:xfrm>
-            <a:off x="7635240" y="4498848"/>
-            <a:ext cx="3474720" cy="1143000"/>
+            <a:off x="7635240" y="4343400"/>
+            <a:ext cx="3474720" cy="1255471"/>
           </a:xfrm>
           <a:prstGeom prst="roundRect">
             <a:avLst>
-              <a:gd name="adj" fmla="val 9600"/>
+              <a:gd name="adj" fmla="val 8740"/>
             </a:avLst>
           </a:prstGeom>
           <a:solidFill>
@@ -3605,7 +3605,7 @@
         </p:nvSpPr>
         <p:spPr>
           <a:xfrm>
-            <a:off x="7799832" y="4645152"/>
+            <a:off x="7799832" y="4489704"/>
             <a:ext cx="3145536" cy="256032"/>
           </a:xfrm>
           <a:prstGeom prst="rect">
@@ -3644,8 +3644,8 @@
         </p:nvSpPr>
         <p:spPr>
           <a:xfrm>
-            <a:off x="7799832" y="4974336"/>
-            <a:ext cx="3145536" cy="576072"/>
+            <a:off x="7799832" y="4818888"/>
+            <a:ext cx="3145536" cy="688543"/>
           </a:xfrm>
           <a:prstGeom prst="rect">
             <a:avLst/>
@@ -3671,7 +3671,7 @@
                 <a:ea typeface="Aptos" pitchFamily="34" charset="-122"/>
                 <a:cs typeface="Aptos" pitchFamily="34" charset="-120"/>
               </a:rPr>
-              <a:t>Identify what could go wrong, who could be affected, what safeguards are needed, and what evidence should be reviewed.</a:t>
+              <a:t>Identify what could go wrong, who could be affected, what safeguards are needed, and what evidence should be reviewed before use.</a:t>
             </a:r>
             <a:endParaRPr lang="en-US" sz="1320" dirty="0"/>
           </a:p>
@@ -4040,11 +4040,11 @@
         <p:spPr>
           <a:xfrm>
             <a:off x="7635240" y="1325880"/>
-            <a:ext cx="3474720" cy="1325880"/>
+            <a:ext cx="3474720" cy="1207008"/>
           </a:xfrm>
           <a:prstGeom prst="roundRect">
             <a:avLst>
-              <a:gd name="adj" fmla="val 8276"/>
+              <a:gd name="adj" fmla="val 9091"/>
             </a:avLst>
           </a:prstGeom>
           <a:solidFill>
@@ -4106,7 +4106,7 @@
         <p:spPr>
           <a:xfrm>
             <a:off x="7799832" y="1801368"/>
-            <a:ext cx="3145536" cy="758952"/>
+            <a:ext cx="3145536" cy="640080"/>
           </a:xfrm>
           <a:prstGeom prst="rect">
             <a:avLst/>
@@ -4146,7 +4146,7 @@
         </p:nvSpPr>
         <p:spPr>
           <a:xfrm>
-            <a:off x="7635240" y="2788920"/>
+            <a:off x="7635240" y="2670048"/>
             <a:ext cx="3474720" cy="1536192"/>
           </a:xfrm>
           <a:prstGeom prst="roundRect">
@@ -4173,7 +4173,7 @@
         </p:nvSpPr>
         <p:spPr>
           <a:xfrm>
-            <a:off x="7799832" y="2935224"/>
+            <a:off x="7799832" y="2816352"/>
             <a:ext cx="3145536" cy="256032"/>
           </a:xfrm>
           <a:prstGeom prst="rect">
@@ -4212,7 +4212,7 @@
         </p:nvSpPr>
         <p:spPr>
           <a:xfrm>
-            <a:off x="7818120" y="3300984"/>
+            <a:off x="7818120" y="3182112"/>
             <a:ext cx="3090672" cy="877824"/>
           </a:xfrm>
           <a:prstGeom prst="rect">
@@ -4287,12 +4287,12 @@
         </p:nvSpPr>
         <p:spPr>
           <a:xfrm>
-            <a:off x="7635240" y="4498848"/>
-            <a:ext cx="3474720" cy="1143000"/>
+            <a:off x="7635240" y="4343400"/>
+            <a:ext cx="3474720" cy="1255471"/>
           </a:xfrm>
           <a:prstGeom prst="roundRect">
             <a:avLst>
-              <a:gd name="adj" fmla="val 9600"/>
+              <a:gd name="adj" fmla="val 8740"/>
             </a:avLst>
           </a:prstGeom>
           <a:solidFill>
@@ -4314,7 +4314,7 @@
         </p:nvSpPr>
         <p:spPr>
           <a:xfrm>
-            <a:off x="7799832" y="4645152"/>
+            <a:off x="7799832" y="4489704"/>
             <a:ext cx="3145536" cy="256032"/>
           </a:xfrm>
           <a:prstGeom prst="rect">
@@ -4353,8 +4353,8 @@
         </p:nvSpPr>
         <p:spPr>
           <a:xfrm>
-            <a:off x="7799832" y="4974336"/>
-            <a:ext cx="3145536" cy="576072"/>
+            <a:off x="7799832" y="4818888"/>
+            <a:ext cx="3145536" cy="688543"/>
           </a:xfrm>
           <a:prstGeom prst="rect">
             <a:avLst/>
@@ -4380,7 +4380,7 @@
                 <a:ea typeface="Aptos" pitchFamily="34" charset="-122"/>
                 <a:cs typeface="Aptos" pitchFamily="34" charset="-120"/>
               </a:rPr>
-              <a:t>Identify what could go wrong, who could be affected, what safeguards are needed, and what evidence should be reviewed.</a:t>
+              <a:t>Identify what could go wrong, who could be affected, what safeguards are needed, and what evidence should be reviewed before use.</a:t>
             </a:r>
             <a:endParaRPr lang="en-US" sz="1320" dirty="0"/>
           </a:p>
@@ -4749,11 +4749,11 @@
         <p:spPr>
           <a:xfrm>
             <a:off x="7635240" y="1325880"/>
-            <a:ext cx="3474720" cy="1325880"/>
+            <a:ext cx="3474720" cy="1207008"/>
           </a:xfrm>
           <a:prstGeom prst="roundRect">
             <a:avLst>
-              <a:gd name="adj" fmla="val 8276"/>
+              <a:gd name="adj" fmla="val 9091"/>
             </a:avLst>
           </a:prstGeom>
           <a:solidFill>
@@ -4815,7 +4815,7 @@
         <p:spPr>
           <a:xfrm>
             <a:off x="7799832" y="1801368"/>
-            <a:ext cx="3145536" cy="758952"/>
+            <a:ext cx="3145536" cy="640080"/>
           </a:xfrm>
           <a:prstGeom prst="rect">
             <a:avLst/>
@@ -4855,7 +4855,7 @@
         </p:nvSpPr>
         <p:spPr>
           <a:xfrm>
-            <a:off x="7635240" y="2788920"/>
+            <a:off x="7635240" y="2670048"/>
             <a:ext cx="3474720" cy="1536192"/>
           </a:xfrm>
           <a:prstGeom prst="roundRect">
@@ -4882,7 +4882,7 @@
         </p:nvSpPr>
         <p:spPr>
           <a:xfrm>
-            <a:off x="7799832" y="2935224"/>
+            <a:off x="7799832" y="2816352"/>
             <a:ext cx="3145536" cy="256032"/>
           </a:xfrm>
           <a:prstGeom prst="rect">
@@ -4921,7 +4921,7 @@
         </p:nvSpPr>
         <p:spPr>
           <a:xfrm>
-            <a:off x="7818120" y="3300984"/>
+            <a:off x="7818120" y="3182112"/>
             <a:ext cx="3090672" cy="877824"/>
           </a:xfrm>
           <a:prstGeom prst="rect">
@@ -4996,12 +4996,12 @@
         </p:nvSpPr>
         <p:spPr>
           <a:xfrm>
-            <a:off x="7635240" y="4498848"/>
-            <a:ext cx="3474720" cy="1143000"/>
+            <a:off x="7635240" y="4343400"/>
+            <a:ext cx="3474720" cy="1255471"/>
           </a:xfrm>
           <a:prstGeom prst="roundRect">
             <a:avLst>
-              <a:gd name="adj" fmla="val 9600"/>
+              <a:gd name="adj" fmla="val 8740"/>
             </a:avLst>
           </a:prstGeom>
           <a:solidFill>
@@ -5023,7 +5023,7 @@
         </p:nvSpPr>
         <p:spPr>
           <a:xfrm>
-            <a:off x="7799832" y="4645152"/>
+            <a:off x="7799832" y="4489704"/>
             <a:ext cx="3145536" cy="256032"/>
           </a:xfrm>
           <a:prstGeom prst="rect">
@@ -5062,8 +5062,8 @@
         </p:nvSpPr>
         <p:spPr>
           <a:xfrm>
-            <a:off x="7799832" y="4974336"/>
-            <a:ext cx="3145536" cy="576072"/>
+            <a:off x="7799832" y="4818888"/>
+            <a:ext cx="3145536" cy="688543"/>
           </a:xfrm>
           <a:prstGeom prst="rect">
             <a:avLst/>
@@ -5089,7 +5089,7 @@
                 <a:ea typeface="Aptos" pitchFamily="34" charset="-122"/>
                 <a:cs typeface="Aptos" pitchFamily="34" charset="-120"/>
               </a:rPr>
-              <a:t>Identify what could go wrong, who could be affected, what safeguards are needed, and what evidence should be reviewed.</a:t>
+              <a:t>Identify what could go wrong, who could be affected, what safeguards are needed, and what evidence should be reviewed before use.</a:t>
             </a:r>
             <a:endParaRPr lang="en-US" sz="1320" dirty="0"/>
           </a:p>
@@ -5458,11 +5458,11 @@
         <p:spPr>
           <a:xfrm>
             <a:off x="7635240" y="1325880"/>
-            <a:ext cx="3474720" cy="1325880"/>
+            <a:ext cx="3474720" cy="1207008"/>
           </a:xfrm>
           <a:prstGeom prst="roundRect">
             <a:avLst>
-              <a:gd name="adj" fmla="val 8276"/>
+              <a:gd name="adj" fmla="val 9091"/>
             </a:avLst>
           </a:prstGeom>
           <a:solidFill>
@@ -5524,7 +5524,7 @@
         <p:spPr>
           <a:xfrm>
             <a:off x="7799832" y="1801368"/>
-            <a:ext cx="3145536" cy="758952"/>
+            <a:ext cx="3145536" cy="640080"/>
           </a:xfrm>
           <a:prstGeom prst="rect">
             <a:avLst/>
@@ -5564,7 +5564,7 @@
         </p:nvSpPr>
         <p:spPr>
           <a:xfrm>
-            <a:off x="7635240" y="2788920"/>
+            <a:off x="7635240" y="2670048"/>
             <a:ext cx="3474720" cy="1536192"/>
           </a:xfrm>
           <a:prstGeom prst="roundRect">
@@ -5591,7 +5591,7 @@
         </p:nvSpPr>
         <p:spPr>
           <a:xfrm>
-            <a:off x="7799832" y="2935224"/>
+            <a:off x="7799832" y="2816352"/>
             <a:ext cx="3145536" cy="256032"/>
           </a:xfrm>
           <a:prstGeom prst="rect">
@@ -5630,7 +5630,7 @@
         </p:nvSpPr>
         <p:spPr>
           <a:xfrm>
-            <a:off x="7818120" y="3300984"/>
+            <a:off x="7818120" y="3182112"/>
             <a:ext cx="3090672" cy="877824"/>
           </a:xfrm>
           <a:prstGeom prst="rect">
@@ -5705,12 +5705,12 @@
         </p:nvSpPr>
         <p:spPr>
           <a:xfrm>
-            <a:off x="7635240" y="4498848"/>
-            <a:ext cx="3474720" cy="1143000"/>
+            <a:off x="7635240" y="4343400"/>
+            <a:ext cx="3474720" cy="1255471"/>
           </a:xfrm>
           <a:prstGeom prst="roundRect">
             <a:avLst>
-              <a:gd name="adj" fmla="val 9600"/>
+              <a:gd name="adj" fmla="val 8740"/>
             </a:avLst>
           </a:prstGeom>
           <a:solidFill>
@@ -5732,7 +5732,7 @@
         </p:nvSpPr>
         <p:spPr>
           <a:xfrm>
-            <a:off x="7799832" y="4645152"/>
+            <a:off x="7799832" y="4489704"/>
             <a:ext cx="3145536" cy="256032"/>
           </a:xfrm>
           <a:prstGeom prst="rect">
@@ -5771,8 +5771,8 @@
         </p:nvSpPr>
         <p:spPr>
           <a:xfrm>
-            <a:off x="7799832" y="4974336"/>
-            <a:ext cx="3145536" cy="576072"/>
+            <a:off x="7799832" y="4818888"/>
+            <a:ext cx="3145536" cy="688543"/>
           </a:xfrm>
           <a:prstGeom prst="rect">
             <a:avLst/>
@@ -5798,7 +5798,7 @@
                 <a:ea typeface="Aptos" pitchFamily="34" charset="-122"/>
                 <a:cs typeface="Aptos" pitchFamily="34" charset="-120"/>
               </a:rPr>
-              <a:t>Identify what could go wrong, who could be affected, what safeguards are needed, and what evidence should be reviewed.</a:t>
+              <a:t>Identify what could go wrong, who could be affected, what safeguards are needed, and what evidence should be reviewed before use.</a:t>
             </a:r>
             <a:endParaRPr lang="en-US" sz="1320" dirty="0"/>
           </a:p>
@@ -6167,11 +6167,11 @@
         <p:spPr>
           <a:xfrm>
             <a:off x="7635240" y="1325880"/>
-            <a:ext cx="3474720" cy="1325880"/>
+            <a:ext cx="3474720" cy="1207008"/>
           </a:xfrm>
           <a:prstGeom prst="roundRect">
             <a:avLst>
-              <a:gd name="adj" fmla="val 8276"/>
+              <a:gd name="adj" fmla="val 9091"/>
             </a:avLst>
           </a:prstGeom>
           <a:solidFill>
@@ -6233,7 +6233,7 @@
         <p:spPr>
           <a:xfrm>
             <a:off x="7799832" y="1801368"/>
-            <a:ext cx="3145536" cy="758952"/>
+            <a:ext cx="3145536" cy="640080"/>
           </a:xfrm>
           <a:prstGeom prst="rect">
             <a:avLst/>
@@ -6273,12 +6273,12 @@
         </p:nvSpPr>
         <p:spPr>
           <a:xfrm>
-            <a:off x="7635240" y="2788920"/>
-            <a:ext cx="3474720" cy="1536192"/>
+            <a:off x="7635240" y="2670048"/>
+            <a:ext cx="3474720" cy="1377086"/>
           </a:xfrm>
           <a:prstGeom prst="roundRect">
             <a:avLst>
-              <a:gd name="adj" fmla="val 7143"/>
+              <a:gd name="adj" fmla="val 7968"/>
             </a:avLst>
           </a:prstGeom>
           <a:solidFill>
@@ -6300,7 +6300,7 @@
         </p:nvSpPr>
         <p:spPr>
           <a:xfrm>
-            <a:off x="7799832" y="2935224"/>
+            <a:off x="7799832" y="2816352"/>
             <a:ext cx="3145536" cy="256032"/>
           </a:xfrm>
           <a:prstGeom prst="rect">
@@ -6339,8 +6339,8 @@
         </p:nvSpPr>
         <p:spPr>
           <a:xfrm>
-            <a:off x="7818120" y="3300984"/>
-            <a:ext cx="3090672" cy="877824"/>
+            <a:off x="7818120" y="3182112"/>
+            <a:ext cx="3090672" cy="718718"/>
           </a:xfrm>
           <a:prstGeom prst="rect">
             <a:avLst/>
@@ -6414,12 +6414,12 @@
         </p:nvSpPr>
         <p:spPr>
           <a:xfrm>
-            <a:off x="7635240" y="4498848"/>
-            <a:ext cx="3474720" cy="1143000"/>
+            <a:off x="7635240" y="4184294"/>
+            <a:ext cx="3474720" cy="1466698"/>
           </a:xfrm>
           <a:prstGeom prst="roundRect">
             <a:avLst>
-              <a:gd name="adj" fmla="val 9600"/>
+              <a:gd name="adj" fmla="val 7481"/>
             </a:avLst>
           </a:prstGeom>
           <a:solidFill>
@@ -6441,7 +6441,7 @@
         </p:nvSpPr>
         <p:spPr>
           <a:xfrm>
-            <a:off x="7799832" y="4645152"/>
+            <a:off x="7799832" y="4330598"/>
             <a:ext cx="3145536" cy="256032"/>
           </a:xfrm>
           <a:prstGeom prst="rect">
@@ -6480,8 +6480,8 @@
         </p:nvSpPr>
         <p:spPr>
           <a:xfrm>
-            <a:off x="7799832" y="4974336"/>
-            <a:ext cx="3145536" cy="576072"/>
+            <a:off x="7799832" y="4659782"/>
+            <a:ext cx="3145536" cy="899770"/>
           </a:xfrm>
           <a:prstGeom prst="rect">
             <a:avLst/>
@@ -6507,7 +6507,7 @@
                 <a:ea typeface="Aptos" pitchFamily="34" charset="-122"/>
                 <a:cs typeface="Aptos" pitchFamily="34" charset="-120"/>
               </a:rPr>
-              <a:t>Use the concept to clarify workflow changes, dependencies, staffing, procurement requirements, training needs, and.</a:t>
+              <a:t>Use the concept to clarify workflow changes, dependencies, staffing, procurement requirements, training needs, and implementation checkpoints.</a:t>
             </a:r>
             <a:endParaRPr lang="en-US" sz="1320" dirty="0"/>
           </a:p>
@@ -6859,11 +6859,11 @@
         <p:spPr>
           <a:xfrm>
             <a:off x="7635240" y="1325880"/>
-            <a:ext cx="3474720" cy="1325880"/>
+            <a:ext cx="3474720" cy="1207008"/>
           </a:xfrm>
           <a:prstGeom prst="roundRect">
             <a:avLst>
-              <a:gd name="adj" fmla="val 8276"/>
+              <a:gd name="adj" fmla="val 9091"/>
             </a:avLst>
           </a:prstGeom>
           <a:solidFill>
@@ -6925,7 +6925,7 @@
         <p:spPr>
           <a:xfrm>
             <a:off x="7799832" y="1801368"/>
-            <a:ext cx="3145536" cy="758952"/>
+            <a:ext cx="3145536" cy="640080"/>
           </a:xfrm>
           <a:prstGeom prst="rect">
             <a:avLst/>
@@ -6951,7 +6951,7 @@
                 <a:ea typeface="Aptos" pitchFamily="34" charset="-122"/>
                 <a:cs typeface="Aptos" pitchFamily="34" charset="-120"/>
               </a:rPr>
-              <a:t>What evidence would governance, leadership, or operations staff need before moving forward?</a:t>
+              <a:t>What evidence would governance, leadership, or operations staff need before moving.</a:t>
             </a:r>
             <a:endParaRPr lang="en-US" sz="1320" dirty="0"/>
           </a:p>
@@ -6965,12 +6965,12 @@
         </p:nvSpPr>
         <p:spPr>
           <a:xfrm>
-            <a:off x="7635240" y="2788920"/>
-            <a:ext cx="3474720" cy="1536192"/>
+            <a:off x="7635240" y="2670048"/>
+            <a:ext cx="3474720" cy="1377086"/>
           </a:xfrm>
           <a:prstGeom prst="roundRect">
             <a:avLst>
-              <a:gd name="adj" fmla="val 7143"/>
+              <a:gd name="adj" fmla="val 7968"/>
             </a:avLst>
           </a:prstGeom>
           <a:solidFill>
@@ -6992,7 +6992,7 @@
         </p:nvSpPr>
         <p:spPr>
           <a:xfrm>
-            <a:off x="7799832" y="2935224"/>
+            <a:off x="7799832" y="2816352"/>
             <a:ext cx="3145536" cy="256032"/>
           </a:xfrm>
           <a:prstGeom prst="rect">
@@ -7031,8 +7031,8 @@
         </p:nvSpPr>
         <p:spPr>
           <a:xfrm>
-            <a:off x="7818120" y="3300984"/>
-            <a:ext cx="3090672" cy="877824"/>
+            <a:off x="7818120" y="3182112"/>
+            <a:ext cx="3090672" cy="718718"/>
           </a:xfrm>
           <a:prstGeom prst="rect">
             <a:avLst/>
@@ -7089,12 +7089,12 @@
         </p:nvSpPr>
         <p:spPr>
           <a:xfrm>
-            <a:off x="7635240" y="4498848"/>
-            <a:ext cx="3474720" cy="1143000"/>
+            <a:off x="7635240" y="4184294"/>
+            <a:ext cx="3474720" cy="1466698"/>
           </a:xfrm>
           <a:prstGeom prst="roundRect">
             <a:avLst>
-              <a:gd name="adj" fmla="val 9600"/>
+              <a:gd name="adj" fmla="val 7481"/>
             </a:avLst>
           </a:prstGeom>
           <a:solidFill>
@@ -7116,7 +7116,7 @@
         </p:nvSpPr>
         <p:spPr>
           <a:xfrm>
-            <a:off x="7799832" y="4645152"/>
+            <a:off x="7799832" y="4330598"/>
             <a:ext cx="3145536" cy="256032"/>
           </a:xfrm>
           <a:prstGeom prst="rect">
@@ -7155,8 +7155,8 @@
         </p:nvSpPr>
         <p:spPr>
           <a:xfrm>
-            <a:off x="7799832" y="4974336"/>
-            <a:ext cx="3145536" cy="576072"/>
+            <a:off x="7799832" y="4659782"/>
+            <a:ext cx="3145536" cy="899770"/>
           </a:xfrm>
           <a:prstGeom prst="rect">
             <a:avLst/>
@@ -7182,7 +7182,7 @@
                 <a:ea typeface="Aptos" pitchFamily="34" charset="-122"/>
                 <a:cs typeface="Aptos" pitchFamily="34" charset="-120"/>
               </a:rPr>
-              <a:t>Use the concept to clarify workflow changes, dependencies, staffing, procurement requirements, training needs, and.</a:t>
+              <a:t>Use the concept to clarify workflow changes, dependencies, staffing, procurement requirements, training needs, and implementation checkpoints.</a:t>
             </a:r>
             <a:endParaRPr lang="en-US" sz="1320" dirty="0"/>
           </a:p>
@@ -7534,11 +7534,11 @@
         <p:spPr>
           <a:xfrm>
             <a:off x="7635240" y="1325880"/>
-            <a:ext cx="3474720" cy="1325880"/>
+            <a:ext cx="3474720" cy="1207008"/>
           </a:xfrm>
           <a:prstGeom prst="roundRect">
             <a:avLst>
-              <a:gd name="adj" fmla="val 8276"/>
+              <a:gd name="adj" fmla="val 9091"/>
             </a:avLst>
           </a:prstGeom>
           <a:solidFill>
@@ -7600,7 +7600,7 @@
         <p:spPr>
           <a:xfrm>
             <a:off x="7799832" y="1801368"/>
-            <a:ext cx="3145536" cy="758952"/>
+            <a:ext cx="3145536" cy="640080"/>
           </a:xfrm>
           <a:prstGeom prst="rect">
             <a:avLst/>
@@ -7640,12 +7640,12 @@
         </p:nvSpPr>
         <p:spPr>
           <a:xfrm>
-            <a:off x="7635240" y="2788920"/>
-            <a:ext cx="3474720" cy="1536192"/>
+            <a:off x="7635240" y="2670048"/>
+            <a:ext cx="3474720" cy="1377086"/>
           </a:xfrm>
           <a:prstGeom prst="roundRect">
             <a:avLst>
-              <a:gd name="adj" fmla="val 7143"/>
+              <a:gd name="adj" fmla="val 7968"/>
             </a:avLst>
           </a:prstGeom>
           <a:solidFill>
@@ -7667,7 +7667,7 @@
         </p:nvSpPr>
         <p:spPr>
           <a:xfrm>
-            <a:off x="7799832" y="2935224"/>
+            <a:off x="7799832" y="2816352"/>
             <a:ext cx="3145536" cy="256032"/>
           </a:xfrm>
           <a:prstGeom prst="rect">
@@ -7706,8 +7706,8 @@
         </p:nvSpPr>
         <p:spPr>
           <a:xfrm>
-            <a:off x="7818120" y="3300984"/>
-            <a:ext cx="3090672" cy="877824"/>
+            <a:off x="7818120" y="3182112"/>
+            <a:ext cx="3090672" cy="718718"/>
           </a:xfrm>
           <a:prstGeom prst="rect">
             <a:avLst/>
@@ -7764,12 +7764,12 @@
         </p:nvSpPr>
         <p:spPr>
           <a:xfrm>
-            <a:off x="7635240" y="4498848"/>
-            <a:ext cx="3474720" cy="1143000"/>
+            <a:off x="7635240" y="4184294"/>
+            <a:ext cx="3474720" cy="1466698"/>
           </a:xfrm>
           <a:prstGeom prst="roundRect">
             <a:avLst>
-              <a:gd name="adj" fmla="val 9600"/>
+              <a:gd name="adj" fmla="val 7481"/>
             </a:avLst>
           </a:prstGeom>
           <a:solidFill>
@@ -7791,7 +7791,7 @@
         </p:nvSpPr>
         <p:spPr>
           <a:xfrm>
-            <a:off x="7799832" y="4645152"/>
+            <a:off x="7799832" y="4330598"/>
             <a:ext cx="3145536" cy="256032"/>
           </a:xfrm>
           <a:prstGeom prst="rect">
@@ -7830,8 +7830,8 @@
         </p:nvSpPr>
         <p:spPr>
           <a:xfrm>
-            <a:off x="7799832" y="4974336"/>
-            <a:ext cx="3145536" cy="576072"/>
+            <a:off x="7799832" y="4659782"/>
+            <a:ext cx="3145536" cy="899770"/>
           </a:xfrm>
           <a:prstGeom prst="rect">
             <a:avLst/>
@@ -7857,7 +7857,7 @@
                 <a:ea typeface="Aptos" pitchFamily="34" charset="-122"/>
                 <a:cs typeface="Aptos" pitchFamily="34" charset="-120"/>
               </a:rPr>
-              <a:t>Use the assignment to test whether you can explain the concept, apply it to a realistic public health situation, and.</a:t>
+              <a:t>Use the assignment to test whether you can explain the concept, apply it to a realistic public health situation, and identify what would need review before the work moves forward.</a:t>
             </a:r>
             <a:endParaRPr lang="en-US" sz="1320" dirty="0"/>
           </a:p>
@@ -8226,11 +8226,11 @@
         <p:spPr>
           <a:xfrm>
             <a:off x="7635240" y="1325880"/>
-            <a:ext cx="3474720" cy="1325880"/>
+            <a:ext cx="3474720" cy="1207008"/>
           </a:xfrm>
           <a:prstGeom prst="roundRect">
             <a:avLst>
-              <a:gd name="adj" fmla="val 8276"/>
+              <a:gd name="adj" fmla="val 9091"/>
             </a:avLst>
           </a:prstGeom>
           <a:solidFill>
@@ -8292,7 +8292,7 @@
         <p:spPr>
           <a:xfrm>
             <a:off x="7799832" y="1801368"/>
-            <a:ext cx="3145536" cy="758952"/>
+            <a:ext cx="3145536" cy="640080"/>
           </a:xfrm>
           <a:prstGeom prst="rect">
             <a:avLst/>
@@ -8332,12 +8332,12 @@
         </p:nvSpPr>
         <p:spPr>
           <a:xfrm>
-            <a:off x="7635240" y="2788920"/>
-            <a:ext cx="3474720" cy="1536192"/>
+            <a:off x="7635240" y="2670048"/>
+            <a:ext cx="3474720" cy="1377086"/>
           </a:xfrm>
           <a:prstGeom prst="roundRect">
             <a:avLst>
-              <a:gd name="adj" fmla="val 7143"/>
+              <a:gd name="adj" fmla="val 7968"/>
             </a:avLst>
           </a:prstGeom>
           <a:solidFill>
@@ -8359,7 +8359,7 @@
         </p:nvSpPr>
         <p:spPr>
           <a:xfrm>
-            <a:off x="7799832" y="2935224"/>
+            <a:off x="7799832" y="2816352"/>
             <a:ext cx="3145536" cy="256032"/>
           </a:xfrm>
           <a:prstGeom prst="rect">
@@ -8398,8 +8398,8 @@
         </p:nvSpPr>
         <p:spPr>
           <a:xfrm>
-            <a:off x="7818120" y="3300984"/>
-            <a:ext cx="3090672" cy="877824"/>
+            <a:off x="7818120" y="3182112"/>
+            <a:ext cx="3090672" cy="718718"/>
           </a:xfrm>
           <a:prstGeom prst="rect">
             <a:avLst/>
@@ -8473,12 +8473,12 @@
         </p:nvSpPr>
         <p:spPr>
           <a:xfrm>
-            <a:off x="7635240" y="4498848"/>
-            <a:ext cx="3474720" cy="1143000"/>
+            <a:off x="7635240" y="4184294"/>
+            <a:ext cx="3474720" cy="1466698"/>
           </a:xfrm>
           <a:prstGeom prst="roundRect">
             <a:avLst>
-              <a:gd name="adj" fmla="val 9600"/>
+              <a:gd name="adj" fmla="val 7481"/>
             </a:avLst>
           </a:prstGeom>
           <a:solidFill>
@@ -8500,7 +8500,7 @@
         </p:nvSpPr>
         <p:spPr>
           <a:xfrm>
-            <a:off x="7799832" y="4645152"/>
+            <a:off x="7799832" y="4330598"/>
             <a:ext cx="3145536" cy="256032"/>
           </a:xfrm>
           <a:prstGeom prst="rect">
@@ -8539,8 +8539,8 @@
         </p:nvSpPr>
         <p:spPr>
           <a:xfrm>
-            <a:off x="7799832" y="4974336"/>
-            <a:ext cx="3145536" cy="576072"/>
+            <a:off x="7799832" y="4659782"/>
+            <a:ext cx="3145536" cy="899770"/>
           </a:xfrm>
           <a:prstGeom prst="rect">
             <a:avLst/>
@@ -8566,7 +8566,7 @@
                 <a:ea typeface="Aptos" pitchFamily="34" charset="-122"/>
                 <a:cs typeface="Aptos" pitchFamily="34" charset="-120"/>
               </a:rPr>
-              <a:t>Use the concept to clarify workflow changes, dependencies, staffing, procurement requirements, training needs, and.</a:t>
+              <a:t>Use the concept to clarify workflow changes, dependencies, staffing, procurement requirements, training needs, and implementation checkpoints.</a:t>
             </a:r>
             <a:endParaRPr lang="en-US" sz="1320" dirty="0"/>
           </a:p>
@@ -8918,11 +8918,11 @@
         <p:spPr>
           <a:xfrm>
             <a:off x="7635240" y="1325880"/>
-            <a:ext cx="3474720" cy="1325880"/>
+            <a:ext cx="3474720" cy="1207008"/>
           </a:xfrm>
           <a:prstGeom prst="roundRect">
             <a:avLst>
-              <a:gd name="adj" fmla="val 8276"/>
+              <a:gd name="adj" fmla="val 9091"/>
             </a:avLst>
           </a:prstGeom>
           <a:solidFill>
@@ -8984,7 +8984,7 @@
         <p:spPr>
           <a:xfrm>
             <a:off x="7799832" y="1801368"/>
-            <a:ext cx="3145536" cy="758952"/>
+            <a:ext cx="3145536" cy="640080"/>
           </a:xfrm>
           <a:prstGeom prst="rect">
             <a:avLst/>
@@ -9024,12 +9024,12 @@
         </p:nvSpPr>
         <p:spPr>
           <a:xfrm>
-            <a:off x="7635240" y="2788920"/>
-            <a:ext cx="3474720" cy="1536192"/>
+            <a:off x="7635240" y="2670048"/>
+            <a:ext cx="3474720" cy="1377086"/>
           </a:xfrm>
           <a:prstGeom prst="roundRect">
             <a:avLst>
-              <a:gd name="adj" fmla="val 7143"/>
+              <a:gd name="adj" fmla="val 7968"/>
             </a:avLst>
           </a:prstGeom>
           <a:solidFill>
@@ -9051,7 +9051,7 @@
         </p:nvSpPr>
         <p:spPr>
           <a:xfrm>
-            <a:off x="7799832" y="2935224"/>
+            <a:off x="7799832" y="2816352"/>
             <a:ext cx="3145536" cy="256032"/>
           </a:xfrm>
           <a:prstGeom prst="rect">
@@ -9090,8 +9090,8 @@
         </p:nvSpPr>
         <p:spPr>
           <a:xfrm>
-            <a:off x="7818120" y="3300984"/>
-            <a:ext cx="3090672" cy="877824"/>
+            <a:off x="7818120" y="3182112"/>
+            <a:ext cx="3090672" cy="718718"/>
           </a:xfrm>
           <a:prstGeom prst="rect">
             <a:avLst/>
@@ -9148,12 +9148,12 @@
         </p:nvSpPr>
         <p:spPr>
           <a:xfrm>
-            <a:off x="7635240" y="4498848"/>
-            <a:ext cx="3474720" cy="1143000"/>
+            <a:off x="7635240" y="4184294"/>
+            <a:ext cx="3474720" cy="1466698"/>
           </a:xfrm>
           <a:prstGeom prst="roundRect">
             <a:avLst>
-              <a:gd name="adj" fmla="val 9600"/>
+              <a:gd name="adj" fmla="val 7481"/>
             </a:avLst>
           </a:prstGeom>
           <a:solidFill>
@@ -9175,7 +9175,7 @@
         </p:nvSpPr>
         <p:spPr>
           <a:xfrm>
-            <a:off x="7799832" y="4645152"/>
+            <a:off x="7799832" y="4330598"/>
             <a:ext cx="3145536" cy="256032"/>
           </a:xfrm>
           <a:prstGeom prst="rect">
@@ -9214,8 +9214,8 @@
         </p:nvSpPr>
         <p:spPr>
           <a:xfrm>
-            <a:off x="7799832" y="4974336"/>
-            <a:ext cx="3145536" cy="576072"/>
+            <a:off x="7799832" y="4659782"/>
+            <a:ext cx="3145536" cy="899770"/>
           </a:xfrm>
           <a:prstGeom prst="rect">
             <a:avLst/>
@@ -9241,7 +9241,7 @@
                 <a:ea typeface="Aptos" pitchFamily="34" charset="-122"/>
                 <a:cs typeface="Aptos" pitchFamily="34" charset="-120"/>
               </a:rPr>
-              <a:t>Use the concept to clarify workflow changes, dependencies, staffing, procurement requirements, training needs, and.</a:t>
+              <a:t>Use the concept to clarify workflow changes, dependencies, staffing, procurement requirements, training needs, and implementation checkpoints.</a:t>
             </a:r>
             <a:endParaRPr lang="en-US" sz="1320" dirty="0"/>
           </a:p>
@@ -9610,11 +9610,11 @@
         <p:spPr>
           <a:xfrm>
             <a:off x="7635240" y="1325880"/>
-            <a:ext cx="3474720" cy="1325880"/>
+            <a:ext cx="3474720" cy="1207008"/>
           </a:xfrm>
           <a:prstGeom prst="roundRect">
             <a:avLst>
-              <a:gd name="adj" fmla="val 8276"/>
+              <a:gd name="adj" fmla="val 9091"/>
             </a:avLst>
           </a:prstGeom>
           <a:solidFill>
@@ -9676,7 +9676,7 @@
         <p:spPr>
           <a:xfrm>
             <a:off x="7799832" y="1801368"/>
-            <a:ext cx="3145536" cy="758952"/>
+            <a:ext cx="3145536" cy="640080"/>
           </a:xfrm>
           <a:prstGeom prst="rect">
             <a:avLst/>
@@ -9716,12 +9716,12 @@
         </p:nvSpPr>
         <p:spPr>
           <a:xfrm>
-            <a:off x="7635240" y="2788920"/>
-            <a:ext cx="3474720" cy="1536192"/>
+            <a:off x="7635240" y="2670048"/>
+            <a:ext cx="3474720" cy="1377086"/>
           </a:xfrm>
           <a:prstGeom prst="roundRect">
             <a:avLst>
-              <a:gd name="adj" fmla="val 7143"/>
+              <a:gd name="adj" fmla="val 7968"/>
             </a:avLst>
           </a:prstGeom>
           <a:solidFill>
@@ -9743,7 +9743,7 @@
         </p:nvSpPr>
         <p:spPr>
           <a:xfrm>
-            <a:off x="7799832" y="2935224"/>
+            <a:off x="7799832" y="2816352"/>
             <a:ext cx="3145536" cy="256032"/>
           </a:xfrm>
           <a:prstGeom prst="rect">
@@ -9782,8 +9782,8 @@
         </p:nvSpPr>
         <p:spPr>
           <a:xfrm>
-            <a:off x="7818120" y="3300984"/>
-            <a:ext cx="3090672" cy="877824"/>
+            <a:off x="7818120" y="3182112"/>
+            <a:ext cx="3090672" cy="718718"/>
           </a:xfrm>
           <a:prstGeom prst="rect">
             <a:avLst/>
@@ -9840,12 +9840,12 @@
         </p:nvSpPr>
         <p:spPr>
           <a:xfrm>
-            <a:off x="7635240" y="4498848"/>
-            <a:ext cx="3474720" cy="1143000"/>
+            <a:off x="7635240" y="4184294"/>
+            <a:ext cx="3474720" cy="1466698"/>
           </a:xfrm>
           <a:prstGeom prst="roundRect">
             <a:avLst>
-              <a:gd name="adj" fmla="val 9600"/>
+              <a:gd name="adj" fmla="val 7481"/>
             </a:avLst>
           </a:prstGeom>
           <a:solidFill>
@@ -9867,7 +9867,7 @@
         </p:nvSpPr>
         <p:spPr>
           <a:xfrm>
-            <a:off x="7799832" y="4645152"/>
+            <a:off x="7799832" y="4330598"/>
             <a:ext cx="3145536" cy="256032"/>
           </a:xfrm>
           <a:prstGeom prst="rect">
@@ -9906,8 +9906,8 @@
         </p:nvSpPr>
         <p:spPr>
           <a:xfrm>
-            <a:off x="7799832" y="4974336"/>
-            <a:ext cx="3145536" cy="576072"/>
+            <a:off x="7799832" y="4659782"/>
+            <a:ext cx="3145536" cy="899770"/>
           </a:xfrm>
           <a:prstGeom prst="rect">
             <a:avLst/>
@@ -9933,7 +9933,7 @@
                 <a:ea typeface="Aptos" pitchFamily="34" charset="-122"/>
                 <a:cs typeface="Aptos" pitchFamily="34" charset="-120"/>
               </a:rPr>
-              <a:t>Use the assignment to test whether you can explain the concept, apply it to a realistic public health situation, and.</a:t>
+              <a:t>Use the assignment to test whether you can explain the concept, apply it to a realistic public health situation, and identify what would need review before the work moves forward.</a:t>
             </a:r>
             <a:endParaRPr lang="en-US" sz="1320" dirty="0"/>
           </a:p>
@@ -10394,7 +10394,7 @@
                 <a:ea typeface="Aptos" pitchFamily="34" charset="-122"/>
                 <a:cs typeface="Aptos" pitchFamily="34" charset="-120"/>
               </a:rPr>
-              <a:t>Level: applied/foundational Primary track: Operations and Data Quality Track Appears in tracks:.</a:t>
+              <a:t>Level: applied/foundational Primary track: Operations and Data Quality Track Appears in tracks: operations-and-data-quality, program-management, technical-architecture, analytics-and-modeling</a:t>
             </a:r>
             <a:endParaRPr lang="en-US" sz="1320" dirty="0"/>
           </a:p>
@@ -10904,11 +10904,11 @@
         <p:spPr>
           <a:xfrm>
             <a:off x="7635240" y="1325880"/>
-            <a:ext cx="3474720" cy="1325880"/>
+            <a:ext cx="3474720" cy="1207008"/>
           </a:xfrm>
           <a:prstGeom prst="roundRect">
             <a:avLst>
-              <a:gd name="adj" fmla="val 8276"/>
+              <a:gd name="adj" fmla="val 9091"/>
             </a:avLst>
           </a:prstGeom>
           <a:solidFill>
@@ -10970,7 +10970,7 @@
         <p:spPr>
           <a:xfrm>
             <a:off x="7799832" y="1801368"/>
-            <a:ext cx="3145536" cy="758952"/>
+            <a:ext cx="3145536" cy="640080"/>
           </a:xfrm>
           <a:prstGeom prst="rect">
             <a:avLst/>
@@ -11010,12 +11010,12 @@
         </p:nvSpPr>
         <p:spPr>
           <a:xfrm>
-            <a:off x="7635240" y="2788920"/>
-            <a:ext cx="3474720" cy="1536192"/>
+            <a:off x="7635240" y="2670048"/>
+            <a:ext cx="3474720" cy="1377086"/>
           </a:xfrm>
           <a:prstGeom prst="roundRect">
             <a:avLst>
-              <a:gd name="adj" fmla="val 7143"/>
+              <a:gd name="adj" fmla="val 7968"/>
             </a:avLst>
           </a:prstGeom>
           <a:solidFill>
@@ -11037,7 +11037,7 @@
         </p:nvSpPr>
         <p:spPr>
           <a:xfrm>
-            <a:off x="7799832" y="2935224"/>
+            <a:off x="7799832" y="2816352"/>
             <a:ext cx="3145536" cy="256032"/>
           </a:xfrm>
           <a:prstGeom prst="rect">
@@ -11076,8 +11076,8 @@
         </p:nvSpPr>
         <p:spPr>
           <a:xfrm>
-            <a:off x="7818120" y="3300984"/>
-            <a:ext cx="3090672" cy="877824"/>
+            <a:off x="7818120" y="3182112"/>
+            <a:ext cx="3090672" cy="718718"/>
           </a:xfrm>
           <a:prstGeom prst="rect">
             <a:avLst/>
@@ -11151,12 +11151,12 @@
         </p:nvSpPr>
         <p:spPr>
           <a:xfrm>
-            <a:off x="7635240" y="4498848"/>
-            <a:ext cx="3474720" cy="1143000"/>
+            <a:off x="7635240" y="4184294"/>
+            <a:ext cx="3474720" cy="1466698"/>
           </a:xfrm>
           <a:prstGeom prst="roundRect">
             <a:avLst>
-              <a:gd name="adj" fmla="val 9600"/>
+              <a:gd name="adj" fmla="val 7481"/>
             </a:avLst>
           </a:prstGeom>
           <a:solidFill>
@@ -11178,7 +11178,7 @@
         </p:nvSpPr>
         <p:spPr>
           <a:xfrm>
-            <a:off x="7799832" y="4645152"/>
+            <a:off x="7799832" y="4330598"/>
             <a:ext cx="3145536" cy="256032"/>
           </a:xfrm>
           <a:prstGeom prst="rect">
@@ -11217,8 +11217,8 @@
         </p:nvSpPr>
         <p:spPr>
           <a:xfrm>
-            <a:off x="7799832" y="4974336"/>
-            <a:ext cx="3145536" cy="576072"/>
+            <a:off x="7799832" y="4659782"/>
+            <a:ext cx="3145536" cy="899770"/>
           </a:xfrm>
           <a:prstGeom prst="rect">
             <a:avLst/>
@@ -11244,7 +11244,7 @@
                 <a:ea typeface="Aptos" pitchFamily="34" charset="-122"/>
                 <a:cs typeface="Aptos" pitchFamily="34" charset="-120"/>
               </a:rPr>
-              <a:t>Use the assignment to test whether you can explain the concept, apply it to a realistic public health situation, and.</a:t>
+              <a:t>Use the assignment to test whether you can explain the concept, apply it to a realistic public health situation, and identify what would need review before the work moves forward.</a:t>
             </a:r>
             <a:endParaRPr lang="en-US" sz="1320" dirty="0"/>
           </a:p>
@@ -11613,11 +11613,11 @@
         <p:spPr>
           <a:xfrm>
             <a:off x="7635240" y="1325880"/>
-            <a:ext cx="3474720" cy="1325880"/>
+            <a:ext cx="3474720" cy="1207008"/>
           </a:xfrm>
           <a:prstGeom prst="roundRect">
             <a:avLst>
-              <a:gd name="adj" fmla="val 8276"/>
+              <a:gd name="adj" fmla="val 9091"/>
             </a:avLst>
           </a:prstGeom>
           <a:solidFill>
@@ -11679,7 +11679,7 @@
         <p:spPr>
           <a:xfrm>
             <a:off x="7799832" y="1801368"/>
-            <a:ext cx="3145536" cy="758952"/>
+            <a:ext cx="3145536" cy="640080"/>
           </a:xfrm>
           <a:prstGeom prst="rect">
             <a:avLst/>
@@ -11719,12 +11719,12 @@
         </p:nvSpPr>
         <p:spPr>
           <a:xfrm>
-            <a:off x="7635240" y="2788920"/>
-            <a:ext cx="3474720" cy="1536192"/>
+            <a:off x="7635240" y="2670048"/>
+            <a:ext cx="3474720" cy="1377086"/>
           </a:xfrm>
           <a:prstGeom prst="roundRect">
             <a:avLst>
-              <a:gd name="adj" fmla="val 7143"/>
+              <a:gd name="adj" fmla="val 7968"/>
             </a:avLst>
           </a:prstGeom>
           <a:solidFill>
@@ -11746,7 +11746,7 @@
         </p:nvSpPr>
         <p:spPr>
           <a:xfrm>
-            <a:off x="7799832" y="2935224"/>
+            <a:off x="7799832" y="2816352"/>
             <a:ext cx="3145536" cy="256032"/>
           </a:xfrm>
           <a:prstGeom prst="rect">
@@ -11785,8 +11785,8 @@
         </p:nvSpPr>
         <p:spPr>
           <a:xfrm>
-            <a:off x="7818120" y="3300984"/>
-            <a:ext cx="3090672" cy="877824"/>
+            <a:off x="7818120" y="3182112"/>
+            <a:ext cx="3090672" cy="718718"/>
           </a:xfrm>
           <a:prstGeom prst="rect">
             <a:avLst/>
@@ -11860,12 +11860,12 @@
         </p:nvSpPr>
         <p:spPr>
           <a:xfrm>
-            <a:off x="7635240" y="4498848"/>
-            <a:ext cx="3474720" cy="1143000"/>
+            <a:off x="7635240" y="4184294"/>
+            <a:ext cx="3474720" cy="1466698"/>
           </a:xfrm>
           <a:prstGeom prst="roundRect">
             <a:avLst>
-              <a:gd name="adj" fmla="val 9600"/>
+              <a:gd name="adj" fmla="val 7481"/>
             </a:avLst>
           </a:prstGeom>
           <a:solidFill>
@@ -11887,7 +11887,7 @@
         </p:nvSpPr>
         <p:spPr>
           <a:xfrm>
-            <a:off x="7799832" y="4645152"/>
+            <a:off x="7799832" y="4330598"/>
             <a:ext cx="3145536" cy="256032"/>
           </a:xfrm>
           <a:prstGeom prst="rect">
@@ -11926,8 +11926,8 @@
         </p:nvSpPr>
         <p:spPr>
           <a:xfrm>
-            <a:off x="7799832" y="4974336"/>
-            <a:ext cx="3145536" cy="576072"/>
+            <a:off x="7799832" y="4659782"/>
+            <a:ext cx="3145536" cy="899770"/>
           </a:xfrm>
           <a:prstGeom prst="rect">
             <a:avLst/>
@@ -11953,7 +11953,7 @@
                 <a:ea typeface="Aptos" pitchFamily="34" charset="-122"/>
                 <a:cs typeface="Aptos" pitchFamily="34" charset="-120"/>
               </a:rPr>
-              <a:t>Use the concept to clarify workflow changes, dependencies, staffing, procurement requirements, training needs, and.</a:t>
+              <a:t>Use the concept to clarify workflow changes, dependencies, staffing, procurement requirements, training needs, and implementation checkpoints.</a:t>
             </a:r>
             <a:endParaRPr lang="en-US" sz="1320" dirty="0"/>
           </a:p>
@@ -12431,7 +12431,7 @@
                 <a:ea typeface="Aptos" pitchFamily="34" charset="-122"/>
                 <a:cs typeface="Aptos" pitchFamily="34" charset="-120"/>
               </a:rPr>
-              <a:t>Use the related plays to identify decisions, participants, timing, approvals, and documentation needed for responsible.</a:t>
+              <a:t>Use the related plays to identify decisions, participants, timing, approvals, and documentation needed for responsible implementation.</a:t>
             </a:r>
             <a:endParaRPr lang="en-US" sz="1320" dirty="0"/>
           </a:p>
@@ -13050,7 +13050,7 @@
                 <a:ea typeface="Aptos" pitchFamily="34" charset="-122"/>
                 <a:cs typeface="Aptos" pitchFamily="34" charset="-120"/>
               </a:rPr>
-              <a:t>Use linked tools when your department needs a structured worksheet, template, checklist, review process, or.</a:t>
+              <a:t>Use linked tools when your department needs a structured worksheet, template, checklist, review process, or documentation artifact.</a:t>
             </a:r>
             <a:endParaRPr lang="en-US" sz="1320" dirty="0"/>
           </a:p>
@@ -13560,11 +13560,11 @@
         <p:spPr>
           <a:xfrm>
             <a:off x="7635240" y="1325880"/>
-            <a:ext cx="3474720" cy="1325880"/>
+            <a:ext cx="3474720" cy="1207008"/>
           </a:xfrm>
           <a:prstGeom prst="roundRect">
             <a:avLst>
-              <a:gd name="adj" fmla="val 8276"/>
+              <a:gd name="adj" fmla="val 9091"/>
             </a:avLst>
           </a:prstGeom>
           <a:solidFill>
@@ -13626,7 +13626,7 @@
         <p:spPr>
           <a:xfrm>
             <a:off x="7799832" y="1801368"/>
-            <a:ext cx="3145536" cy="758952"/>
+            <a:ext cx="3145536" cy="640080"/>
           </a:xfrm>
           <a:prstGeom prst="rect">
             <a:avLst/>
@@ -13666,12 +13666,12 @@
         </p:nvSpPr>
         <p:spPr>
           <a:xfrm>
-            <a:off x="7635240" y="2788920"/>
-            <a:ext cx="3474720" cy="1536192"/>
+            <a:off x="7635240" y="2670048"/>
+            <a:ext cx="3474720" cy="1377086"/>
           </a:xfrm>
           <a:prstGeom prst="roundRect">
             <a:avLst>
-              <a:gd name="adj" fmla="val 7143"/>
+              <a:gd name="adj" fmla="val 7968"/>
             </a:avLst>
           </a:prstGeom>
           <a:solidFill>
@@ -13693,7 +13693,7 @@
         </p:nvSpPr>
         <p:spPr>
           <a:xfrm>
-            <a:off x="7799832" y="2935224"/>
+            <a:off x="7799832" y="2816352"/>
             <a:ext cx="3145536" cy="256032"/>
           </a:xfrm>
           <a:prstGeom prst="rect">
@@ -13732,8 +13732,8 @@
         </p:nvSpPr>
         <p:spPr>
           <a:xfrm>
-            <a:off x="7818120" y="3300984"/>
-            <a:ext cx="3090672" cy="877824"/>
+            <a:off x="7818120" y="3182112"/>
+            <a:ext cx="3090672" cy="718718"/>
           </a:xfrm>
           <a:prstGeom prst="rect">
             <a:avLst/>
@@ -13790,12 +13790,12 @@
         </p:nvSpPr>
         <p:spPr>
           <a:xfrm>
-            <a:off x="7635240" y="4498848"/>
-            <a:ext cx="3474720" cy="1143000"/>
+            <a:off x="7635240" y="4184294"/>
+            <a:ext cx="3474720" cy="1466698"/>
           </a:xfrm>
           <a:prstGeom prst="roundRect">
             <a:avLst>
-              <a:gd name="adj" fmla="val 9600"/>
+              <a:gd name="adj" fmla="val 7481"/>
             </a:avLst>
           </a:prstGeom>
           <a:solidFill>
@@ -13817,7 +13817,7 @@
         </p:nvSpPr>
         <p:spPr>
           <a:xfrm>
-            <a:off x="7799832" y="4645152"/>
+            <a:off x="7799832" y="4330598"/>
             <a:ext cx="3145536" cy="256032"/>
           </a:xfrm>
           <a:prstGeom prst="rect">
@@ -13856,8 +13856,8 @@
         </p:nvSpPr>
         <p:spPr>
           <a:xfrm>
-            <a:off x="7799832" y="4974336"/>
-            <a:ext cx="3145536" cy="576072"/>
+            <a:off x="7799832" y="4659782"/>
+            <a:ext cx="3145536" cy="899770"/>
           </a:xfrm>
           <a:prstGeom prst="rect">
             <a:avLst/>
@@ -13883,7 +13883,7 @@
                 <a:ea typeface="Aptos" pitchFamily="34" charset="-122"/>
                 <a:cs typeface="Aptos" pitchFamily="34" charset="-120"/>
               </a:rPr>
-              <a:t>Use the assignment to test whether you can explain the concept, apply it to a realistic public health situation, and.</a:t>
+              <a:t>Use the assignment to test whether you can explain the concept, apply it to a realistic public health situation, and identify what would need review before the work moves forward.</a:t>
             </a:r>
             <a:endParaRPr lang="en-US" sz="1320" dirty="0"/>
           </a:p>
@@ -14252,11 +14252,11 @@
         <p:spPr>
           <a:xfrm>
             <a:off x="7635240" y="1325880"/>
-            <a:ext cx="3474720" cy="1325880"/>
+            <a:ext cx="3474720" cy="1255471"/>
           </a:xfrm>
           <a:prstGeom prst="roundRect">
             <a:avLst>
-              <a:gd name="adj" fmla="val 8276"/>
+              <a:gd name="adj" fmla="val 8740"/>
             </a:avLst>
           </a:prstGeom>
           <a:solidFill>
@@ -14318,7 +14318,7 @@
         <p:spPr>
           <a:xfrm>
             <a:off x="7799832" y="1801368"/>
-            <a:ext cx="3145536" cy="758952"/>
+            <a:ext cx="3145536" cy="688543"/>
           </a:xfrm>
           <a:prstGeom prst="rect">
             <a:avLst/>
@@ -14358,12 +14358,12 @@
         </p:nvSpPr>
         <p:spPr>
           <a:xfrm>
-            <a:off x="7635240" y="2788920"/>
-            <a:ext cx="3474720" cy="1536192"/>
+            <a:off x="7635240" y="2718511"/>
+            <a:ext cx="3474720" cy="1328623"/>
           </a:xfrm>
           <a:prstGeom prst="roundRect">
             <a:avLst>
-              <a:gd name="adj" fmla="val 7143"/>
+              <a:gd name="adj" fmla="val 8259"/>
             </a:avLst>
           </a:prstGeom>
           <a:solidFill>
@@ -14385,8 +14385,8 @@
         </p:nvSpPr>
         <p:spPr>
           <a:xfrm>
-            <a:off x="7799832" y="2935224"/>
-            <a:ext cx="3145536" cy="256032"/>
+            <a:off x="7799832" y="2846527"/>
+            <a:ext cx="3145536" cy="237744"/>
           </a:xfrm>
           <a:prstGeom prst="rect">
             <a:avLst/>
@@ -14402,7 +14402,7 @@
               <a:buNone/>
             </a:pPr>
             <a:r>
-              <a:rPr lang="en-US" sz="1300" b="1" dirty="0">
+              <a:rPr lang="en-US" sz="1250" b="1" dirty="0">
                 <a:solidFill>
                   <a:srgbClr val="0068B7"/>
                 </a:solidFill>
@@ -14410,101 +14410,317 @@
                 <a:ea typeface="Aptos" pitchFamily="34" charset="-122"/>
                 <a:cs typeface="Aptos" pitchFamily="34" charset="-120"/>
               </a:rPr>
-              <a:t>Concept checkpoints</a:t>
-            </a:r>
-            <a:endParaRPr lang="en-US" sz="1300" dirty="0"/>
-          </a:p>
-        </p:txBody>
-      </p:sp>
-      <p:sp>
-        <p:nvSpPr>
-          <p:cNvPr id="15" name="Text 13"/>
-          <p:cNvSpPr/>
-          <p:nvPr/>
-        </p:nvSpPr>
-        <p:spPr>
-          <a:xfrm>
-            <a:off x="7818120" y="3300984"/>
-            <a:ext cx="3090672" cy="877824"/>
-          </a:xfrm>
-          <a:prstGeom prst="rect">
-            <a:avLst/>
-          </a:prstGeom>
-          <a:noFill/>
-          <a:ln/>
-        </p:spPr>
-        <p:txBody>
-          <a:bodyPr wrap="square" lIns="508" tIns="508" rIns="508" bIns="508" rtlCol="0" anchor="t">
+              <a:t>Implementation path</a:t>
+            </a:r>
+            <a:endParaRPr lang="en-US" sz="1250" dirty="0"/>
+          </a:p>
+        </p:txBody>
+      </p:sp>
+      <p:sp>
+        <p:nvSpPr>
+          <p:cNvPr id="15" name="Shape 13"/>
+          <p:cNvSpPr/>
+          <p:nvPr/>
+        </p:nvSpPr>
+        <p:spPr>
+          <a:xfrm>
+            <a:off x="8763000" y="3399739"/>
+            <a:ext cx="164592" cy="0"/>
+          </a:xfrm>
+          <a:prstGeom prst="line">
+            <a:avLst/>
+          </a:prstGeom>
+          <a:noFill/>
+          <a:ln w="15240">
+            <a:solidFill>
+              <a:srgbClr val="8ABBD8"/>
+            </a:solidFill>
+            <a:prstDash val="solid"/>
+          </a:ln>
+        </p:spPr>
+      </p:sp>
+      <p:sp>
+        <p:nvSpPr>
+          <p:cNvPr id="16" name="Shape 14"/>
+          <p:cNvSpPr/>
+          <p:nvPr/>
+        </p:nvSpPr>
+        <p:spPr>
+          <a:xfrm>
+            <a:off x="7872984" y="3248863"/>
+            <a:ext cx="890016" cy="301752"/>
+          </a:xfrm>
+          <a:prstGeom prst="roundRect">
+            <a:avLst>
+              <a:gd name="adj" fmla="val 24242"/>
+            </a:avLst>
+          </a:prstGeom>
+          <a:solidFill>
+            <a:srgbClr val="0068B7"/>
+          </a:solidFill>
+          <a:ln w="12700">
+            <a:solidFill>
+              <a:srgbClr val="0068B7"/>
+            </a:solidFill>
+            <a:prstDash val="solid"/>
+          </a:ln>
+        </p:spPr>
+      </p:sp>
+      <p:sp>
+        <p:nvSpPr>
+          <p:cNvPr id="17" name="Text 15"/>
+          <p:cNvSpPr/>
+          <p:nvPr/>
+        </p:nvSpPr>
+        <p:spPr>
+          <a:xfrm>
+            <a:off x="7909560" y="3322015"/>
+            <a:ext cx="816864" cy="146304"/>
+          </a:xfrm>
+          <a:prstGeom prst="rect">
+            <a:avLst/>
+          </a:prstGeom>
+          <a:noFill/>
+          <a:ln/>
+        </p:spPr>
+        <p:txBody>
+          <a:bodyPr wrap="square" lIns="0" tIns="0" rIns="0" bIns="0" rtlCol="0" anchor="ctr">
             <a:normAutofit/>
           </a:bodyPr>
           <a:lstStyle/>
           <a:p>
-            <a:pPr indent="0" marL="0">
-              <a:buNone/>
-            </a:pPr>
-            <a:r>
-              <a:rPr lang="en-US" sz="1220" dirty="0">
-                <a:solidFill>
-                  <a:srgbClr val="17364A"/>
-                </a:solidFill>
-                <a:latin typeface="Aptos" pitchFamily="34" charset="0"/>
-                <a:ea typeface="Aptos" pitchFamily="34" charset="-122"/>
-                <a:cs typeface="Aptos" pitchFamily="34" charset="-120"/>
-              </a:rPr>
-              <a:t>User acceptance testing is the process of determining whether an.</a:t>
-            </a:r>
-            <a:endParaRPr lang="en-US" sz="1220" dirty="0"/>
-          </a:p>
-          <a:p>
-            <a:pPr indent="0" marL="0">
-              <a:buNone/>
-            </a:pPr>
-            <a:r>
-              <a:rPr lang="en-US" sz="1220" dirty="0">
-                <a:solidFill>
-                  <a:srgbClr val="17364A"/>
-                </a:solidFill>
-                <a:latin typeface="Aptos" pitchFamily="34" charset="0"/>
-                <a:ea typeface="Aptos" pitchFamily="34" charset="-122"/>
-                <a:cs typeface="Aptos" pitchFamily="34" charset="-120"/>
-              </a:rPr>
-              <a:t>Technical testing may show that a tool runs, and model validation.</a:t>
-            </a:r>
-            <a:endParaRPr lang="en-US" sz="1220" dirty="0"/>
-          </a:p>
-          <a:p>
-            <a:pPr indent="0" marL="0">
-              <a:buNone/>
-            </a:pPr>
-            <a:r>
-              <a:rPr lang="en-US" sz="1220" dirty="0">
-                <a:solidFill>
-                  <a:srgbClr val="17364A"/>
-                </a:solidFill>
-                <a:latin typeface="Aptos" pitchFamily="34" charset="0"/>
-                <a:ea typeface="Aptos" pitchFamily="34" charset="-122"/>
-                <a:cs typeface="Aptos" pitchFamily="34" charset="-120"/>
-              </a:rPr>
-              <a:t>This module teaches learners how to design and conduct user.</a:t>
-            </a:r>
-            <a:endParaRPr lang="en-US" sz="1220" dirty="0"/>
-          </a:p>
-        </p:txBody>
-      </p:sp>
-      <p:sp>
-        <p:nvSpPr>
-          <p:cNvPr id="16" name="Shape 14"/>
-          <p:cNvSpPr/>
-          <p:nvPr/>
-        </p:nvSpPr>
-        <p:spPr>
-          <a:xfrm>
-            <a:off x="7635240" y="4498848"/>
-            <a:ext cx="3474720" cy="1143000"/>
+            <a:pPr algn="ctr" indent="0" marL="0">
+              <a:buNone/>
+            </a:pPr>
+            <a:r>
+              <a:rPr lang="en-US" sz="880" b="1" dirty="0">
+                <a:solidFill>
+                  <a:srgbClr val="FFFFFF"/>
+                </a:solidFill>
+                <a:latin typeface="Aptos" pitchFamily="34" charset="0"/>
+                <a:ea typeface="Aptos" pitchFamily="34" charset="-122"/>
+                <a:cs typeface="Aptos" pitchFamily="34" charset="-120"/>
+              </a:rPr>
+              <a:t>Need</a:t>
+            </a:r>
+            <a:endParaRPr lang="en-US" sz="880" dirty="0"/>
+          </a:p>
+        </p:txBody>
+      </p:sp>
+      <p:sp>
+        <p:nvSpPr>
+          <p:cNvPr id="18" name="Shape 16"/>
+          <p:cNvSpPr/>
+          <p:nvPr/>
+        </p:nvSpPr>
+        <p:spPr>
+          <a:xfrm>
+            <a:off x="9817608" y="3399739"/>
+            <a:ext cx="164592" cy="0"/>
+          </a:xfrm>
+          <a:prstGeom prst="line">
+            <a:avLst/>
+          </a:prstGeom>
+          <a:noFill/>
+          <a:ln w="15240">
+            <a:solidFill>
+              <a:srgbClr val="8ABBD8"/>
+            </a:solidFill>
+            <a:prstDash val="solid"/>
+          </a:ln>
+        </p:spPr>
+      </p:sp>
+      <p:sp>
+        <p:nvSpPr>
+          <p:cNvPr id="19" name="Shape 17"/>
+          <p:cNvSpPr/>
+          <p:nvPr/>
+        </p:nvSpPr>
+        <p:spPr>
+          <a:xfrm>
+            <a:off x="8927592" y="3248863"/>
+            <a:ext cx="890016" cy="301752"/>
           </a:xfrm>
           <a:prstGeom prst="roundRect">
             <a:avLst>
-              <a:gd name="adj" fmla="val 9600"/>
+              <a:gd name="adj" fmla="val 24242"/>
+            </a:avLst>
+          </a:prstGeom>
+          <a:solidFill>
+            <a:srgbClr val="2F8A28"/>
+          </a:solidFill>
+          <a:ln w="12700">
+            <a:solidFill>
+              <a:srgbClr val="2F8A28"/>
+            </a:solidFill>
+            <a:prstDash val="solid"/>
+          </a:ln>
+        </p:spPr>
+      </p:sp>
+      <p:sp>
+        <p:nvSpPr>
+          <p:cNvPr id="20" name="Text 18"/>
+          <p:cNvSpPr/>
+          <p:nvPr/>
+        </p:nvSpPr>
+        <p:spPr>
+          <a:xfrm>
+            <a:off x="8964168" y="3322015"/>
+            <a:ext cx="816864" cy="146304"/>
+          </a:xfrm>
+          <a:prstGeom prst="rect">
+            <a:avLst/>
+          </a:prstGeom>
+          <a:noFill/>
+          <a:ln/>
+        </p:spPr>
+        <p:txBody>
+          <a:bodyPr wrap="square" lIns="0" tIns="0" rIns="0" bIns="0" rtlCol="0" anchor="ctr">
+            <a:normAutofit/>
+          </a:bodyPr>
+          <a:lstStyle/>
+          <a:p>
+            <a:pPr algn="ctr" indent="0" marL="0">
+              <a:buNone/>
+            </a:pPr>
+            <a:r>
+              <a:rPr lang="en-US" sz="880" b="1" dirty="0">
+                <a:solidFill>
+                  <a:srgbClr val="FFFFFF"/>
+                </a:solidFill>
+                <a:latin typeface="Aptos" pitchFamily="34" charset="0"/>
+                <a:ea typeface="Aptos" pitchFamily="34" charset="-122"/>
+                <a:cs typeface="Aptos" pitchFamily="34" charset="-120"/>
+              </a:rPr>
+              <a:t>Build</a:t>
+            </a:r>
+            <a:endParaRPr lang="en-US" sz="880" dirty="0"/>
+          </a:p>
+        </p:txBody>
+      </p:sp>
+      <p:sp>
+        <p:nvSpPr>
+          <p:cNvPr id="21" name="Shape 19"/>
+          <p:cNvSpPr/>
+          <p:nvPr/>
+        </p:nvSpPr>
+        <p:spPr>
+          <a:xfrm>
+            <a:off x="9982200" y="3248863"/>
+            <a:ext cx="890016" cy="301752"/>
+          </a:xfrm>
+          <a:prstGeom prst="roundRect">
+            <a:avLst>
+              <a:gd name="adj" fmla="val 24242"/>
+            </a:avLst>
+          </a:prstGeom>
+          <a:solidFill>
+            <a:srgbClr val="6A4CA3"/>
+          </a:solidFill>
+          <a:ln w="12700">
+            <a:solidFill>
+              <a:srgbClr val="6A4CA3"/>
+            </a:solidFill>
+            <a:prstDash val="solid"/>
+          </a:ln>
+        </p:spPr>
+      </p:sp>
+      <p:sp>
+        <p:nvSpPr>
+          <p:cNvPr id="22" name="Text 20"/>
+          <p:cNvSpPr/>
+          <p:nvPr/>
+        </p:nvSpPr>
+        <p:spPr>
+          <a:xfrm>
+            <a:off x="10018776" y="3322015"/>
+            <a:ext cx="816864" cy="146304"/>
+          </a:xfrm>
+          <a:prstGeom prst="rect">
+            <a:avLst/>
+          </a:prstGeom>
+          <a:noFill/>
+          <a:ln/>
+        </p:spPr>
+        <p:txBody>
+          <a:bodyPr wrap="square" lIns="0" tIns="0" rIns="0" bIns="0" rtlCol="0" anchor="ctr">
+            <a:normAutofit/>
+          </a:bodyPr>
+          <a:lstStyle/>
+          <a:p>
+            <a:pPr algn="ctr" indent="0" marL="0">
+              <a:buNone/>
+            </a:pPr>
+            <a:r>
+              <a:rPr lang="en-US" sz="880" b="1" dirty="0">
+                <a:solidFill>
+                  <a:srgbClr val="FFFFFF"/>
+                </a:solidFill>
+                <a:latin typeface="Aptos" pitchFamily="34" charset="0"/>
+                <a:ea typeface="Aptos" pitchFamily="34" charset="-122"/>
+                <a:cs typeface="Aptos" pitchFamily="34" charset="-120"/>
+              </a:rPr>
+              <a:t>Adopt</a:t>
+            </a:r>
+            <a:endParaRPr lang="en-US" sz="880" dirty="0"/>
+          </a:p>
+        </p:txBody>
+      </p:sp>
+      <p:sp>
+        <p:nvSpPr>
+          <p:cNvPr id="23" name="Text 21"/>
+          <p:cNvSpPr/>
+          <p:nvPr/>
+        </p:nvSpPr>
+        <p:spPr>
+          <a:xfrm>
+            <a:off x="7854696" y="3742639"/>
+            <a:ext cx="3035808" cy="158191"/>
+          </a:xfrm>
+          <a:prstGeom prst="rect">
+            <a:avLst/>
+          </a:prstGeom>
+          <a:noFill/>
+          <a:ln/>
+        </p:spPr>
+        <p:txBody>
+          <a:bodyPr wrap="square" lIns="254" tIns="254" rIns="254" bIns="254" rtlCol="0" anchor="t">
+            <a:normAutofit/>
+          </a:bodyPr>
+          <a:lstStyle/>
+          <a:p>
+            <a:pPr indent="0" marL="0">
+              <a:buNone/>
+            </a:pPr>
+            <a:r>
+              <a:rPr lang="en-US" sz="1120" dirty="0">
+                <a:solidFill>
+                  <a:srgbClr val="17364A"/>
+                </a:solidFill>
+                <a:latin typeface="Aptos" pitchFamily="34" charset="0"/>
+                <a:ea typeface="Aptos" pitchFamily="34" charset="-122"/>
+                <a:cs typeface="Aptos" pitchFamily="34" charset="-120"/>
+              </a:rPr>
+              <a:t>Implementation work should make dependencies, approvals, training, and sustainment visible before launch.</a:t>
+            </a:r>
+            <a:endParaRPr lang="en-US" sz="1120" dirty="0"/>
+          </a:p>
+        </p:txBody>
+      </p:sp>
+      <p:sp>
+        <p:nvSpPr>
+          <p:cNvPr id="24" name="Shape 22"/>
+          <p:cNvSpPr/>
+          <p:nvPr/>
+        </p:nvSpPr>
+        <p:spPr>
+          <a:xfrm>
+            <a:off x="7635240" y="4184294"/>
+            <a:ext cx="3474720" cy="1466698"/>
+          </a:xfrm>
+          <a:prstGeom prst="roundRect">
+            <a:avLst>
+              <a:gd name="adj" fmla="val 7481"/>
             </a:avLst>
           </a:prstGeom>
           <a:solidFill>
@@ -14520,13 +14736,13 @@
       </p:sp>
       <p:sp>
         <p:nvSpPr>
-          <p:cNvPr id="17" name="Text 15"/>
-          <p:cNvSpPr/>
-          <p:nvPr/>
-        </p:nvSpPr>
-        <p:spPr>
-          <a:xfrm>
-            <a:off x="7799832" y="4645152"/>
+          <p:cNvPr id="25" name="Text 23"/>
+          <p:cNvSpPr/>
+          <p:nvPr/>
+        </p:nvSpPr>
+        <p:spPr>
+          <a:xfrm>
+            <a:off x="7799832" y="4330598"/>
             <a:ext cx="3145536" cy="256032"/>
           </a:xfrm>
           <a:prstGeom prst="rect">
@@ -14559,14 +14775,14 @@
       </p:sp>
       <p:sp>
         <p:nvSpPr>
-          <p:cNvPr id="18" name="Text 16"/>
-          <p:cNvSpPr/>
-          <p:nvPr/>
-        </p:nvSpPr>
-        <p:spPr>
-          <a:xfrm>
-            <a:off x="7799832" y="4974336"/>
-            <a:ext cx="3145536" cy="576072"/>
+          <p:cNvPr id="26" name="Text 24"/>
+          <p:cNvSpPr/>
+          <p:nvPr/>
+        </p:nvSpPr>
+        <p:spPr>
+          <a:xfrm>
+            <a:off x="7799832" y="4659782"/>
+            <a:ext cx="3145536" cy="899770"/>
           </a:xfrm>
           <a:prstGeom prst="rect">
             <a:avLst/>
@@ -14592,7 +14808,7 @@
                 <a:ea typeface="Aptos" pitchFamily="34" charset="-122"/>
                 <a:cs typeface="Aptos" pitchFamily="34" charset="-120"/>
               </a:rPr>
-              <a:t>Use the concept to clarify workflow changes, dependencies, staffing, procurement requirements, training needs, and.</a:t>
+              <a:t>Use the concept to clarify workflow changes, dependencies, staffing, procurement requirements, training needs, and implementation checkpoints.</a:t>
             </a:r>
             <a:endParaRPr lang="en-US" sz="1320" dirty="0"/>
           </a:p>
@@ -14961,11 +15177,11 @@
         <p:spPr>
           <a:xfrm>
             <a:off x="7635240" y="1325880"/>
-            <a:ext cx="3474720" cy="1325880"/>
+            <a:ext cx="3474720" cy="1255471"/>
           </a:xfrm>
           <a:prstGeom prst="roundRect">
             <a:avLst>
-              <a:gd name="adj" fmla="val 8276"/>
+              <a:gd name="adj" fmla="val 8740"/>
             </a:avLst>
           </a:prstGeom>
           <a:solidFill>
@@ -15027,7 +15243,7 @@
         <p:spPr>
           <a:xfrm>
             <a:off x="7799832" y="1801368"/>
-            <a:ext cx="3145536" cy="758952"/>
+            <a:ext cx="3145536" cy="688543"/>
           </a:xfrm>
           <a:prstGeom prst="rect">
             <a:avLst/>
@@ -15067,12 +15283,12 @@
         </p:nvSpPr>
         <p:spPr>
           <a:xfrm>
-            <a:off x="7635240" y="2788920"/>
-            <a:ext cx="3474720" cy="1536192"/>
+            <a:off x="7635240" y="2718511"/>
+            <a:ext cx="3474720" cy="1328623"/>
           </a:xfrm>
           <a:prstGeom prst="roundRect">
             <a:avLst>
-              <a:gd name="adj" fmla="val 7143"/>
+              <a:gd name="adj" fmla="val 8259"/>
             </a:avLst>
           </a:prstGeom>
           <a:solidFill>
@@ -15094,7 +15310,7 @@
         </p:nvSpPr>
         <p:spPr>
           <a:xfrm>
-            <a:off x="7799832" y="2935224"/>
+            <a:off x="7799832" y="2864815"/>
             <a:ext cx="3145536" cy="256032"/>
           </a:xfrm>
           <a:prstGeom prst="rect">
@@ -15133,8 +15349,8 @@
         </p:nvSpPr>
         <p:spPr>
           <a:xfrm>
-            <a:off x="7818120" y="3300984"/>
-            <a:ext cx="3090672" cy="877824"/>
+            <a:off x="7818120" y="3230575"/>
+            <a:ext cx="3090672" cy="670255"/>
           </a:xfrm>
           <a:prstGeom prst="rect">
             <a:avLst/>
@@ -15191,12 +15407,12 @@
         </p:nvSpPr>
         <p:spPr>
           <a:xfrm>
-            <a:off x="7635240" y="4498848"/>
-            <a:ext cx="3474720" cy="1143000"/>
+            <a:off x="7635240" y="4184294"/>
+            <a:ext cx="3474720" cy="1466698"/>
           </a:xfrm>
           <a:prstGeom prst="roundRect">
             <a:avLst>
-              <a:gd name="adj" fmla="val 9600"/>
+              <a:gd name="adj" fmla="val 7481"/>
             </a:avLst>
           </a:prstGeom>
           <a:solidFill>
@@ -15218,7 +15434,7 @@
         </p:nvSpPr>
         <p:spPr>
           <a:xfrm>
-            <a:off x="7799832" y="4645152"/>
+            <a:off x="7799832" y="4330598"/>
             <a:ext cx="3145536" cy="256032"/>
           </a:xfrm>
           <a:prstGeom prst="rect">
@@ -15257,8 +15473,8 @@
         </p:nvSpPr>
         <p:spPr>
           <a:xfrm>
-            <a:off x="7799832" y="4974336"/>
-            <a:ext cx="3145536" cy="576072"/>
+            <a:off x="7799832" y="4659782"/>
+            <a:ext cx="3145536" cy="899770"/>
           </a:xfrm>
           <a:prstGeom prst="rect">
             <a:avLst/>
@@ -15284,7 +15500,7 @@
                 <a:ea typeface="Aptos" pitchFamily="34" charset="-122"/>
                 <a:cs typeface="Aptos" pitchFamily="34" charset="-120"/>
               </a:rPr>
-              <a:t>Use the concept to clarify workflow changes, dependencies, staffing, procurement requirements, training needs, and.</a:t>
+              <a:t>Use the concept to clarify workflow changes, dependencies, staffing, procurement requirements, training needs, and implementation checkpoints.</a:t>
             </a:r>
             <a:endParaRPr lang="en-US" sz="1320" dirty="0"/>
           </a:p>
@@ -15653,11 +15869,11 @@
         <p:spPr>
           <a:xfrm>
             <a:off x="7635240" y="1325880"/>
-            <a:ext cx="3474720" cy="1325880"/>
+            <a:ext cx="3474720" cy="1207008"/>
           </a:xfrm>
           <a:prstGeom prst="roundRect">
             <a:avLst>
-              <a:gd name="adj" fmla="val 8276"/>
+              <a:gd name="adj" fmla="val 9091"/>
             </a:avLst>
           </a:prstGeom>
           <a:solidFill>
@@ -15719,7 +15935,7 @@
         <p:spPr>
           <a:xfrm>
             <a:off x="7799832" y="1801368"/>
-            <a:ext cx="3145536" cy="758952"/>
+            <a:ext cx="3145536" cy="640080"/>
           </a:xfrm>
           <a:prstGeom prst="rect">
             <a:avLst/>
@@ -15759,12 +15975,12 @@
         </p:nvSpPr>
         <p:spPr>
           <a:xfrm>
-            <a:off x="7635240" y="2788920"/>
-            <a:ext cx="3474720" cy="1536192"/>
+            <a:off x="7635240" y="2670048"/>
+            <a:ext cx="3474720" cy="1377086"/>
           </a:xfrm>
           <a:prstGeom prst="roundRect">
             <a:avLst>
-              <a:gd name="adj" fmla="val 7143"/>
+              <a:gd name="adj" fmla="val 7968"/>
             </a:avLst>
           </a:prstGeom>
           <a:solidFill>
@@ -15786,8 +16002,8 @@
         </p:nvSpPr>
         <p:spPr>
           <a:xfrm>
-            <a:off x="7799832" y="2935224"/>
-            <a:ext cx="3145536" cy="256032"/>
+            <a:off x="7799832" y="2798064"/>
+            <a:ext cx="3145536" cy="237744"/>
           </a:xfrm>
           <a:prstGeom prst="rect">
             <a:avLst/>
@@ -15803,7 +16019,7 @@
               <a:buNone/>
             </a:pPr>
             <a:r>
-              <a:rPr lang="en-US" sz="1300" b="1" dirty="0">
+              <a:rPr lang="en-US" sz="1250" b="1" dirty="0">
                 <a:solidFill>
                   <a:srgbClr val="0068B7"/>
                 </a:solidFill>
@@ -15811,101 +16027,317 @@
                 <a:ea typeface="Aptos" pitchFamily="34" charset="-122"/>
                 <a:cs typeface="Aptos" pitchFamily="34" charset="-120"/>
               </a:rPr>
-              <a:t>Concept checkpoints</a:t>
-            </a:r>
-            <a:endParaRPr lang="en-US" sz="1300" dirty="0"/>
-          </a:p>
-        </p:txBody>
-      </p:sp>
-      <p:sp>
-        <p:nvSpPr>
-          <p:cNvPr id="15" name="Text 13"/>
-          <p:cNvSpPr/>
-          <p:nvPr/>
-        </p:nvSpPr>
-        <p:spPr>
-          <a:xfrm>
-            <a:off x="7818120" y="3300984"/>
-            <a:ext cx="3090672" cy="877824"/>
-          </a:xfrm>
-          <a:prstGeom prst="rect">
-            <a:avLst/>
-          </a:prstGeom>
-          <a:noFill/>
-          <a:ln/>
-        </p:spPr>
-        <p:txBody>
-          <a:bodyPr wrap="square" lIns="508" tIns="508" rIns="508" bIns="508" rtlCol="0" anchor="t">
+              <a:t>Implementation path</a:t>
+            </a:r>
+            <a:endParaRPr lang="en-US" sz="1250" dirty="0"/>
+          </a:p>
+        </p:txBody>
+      </p:sp>
+      <p:sp>
+        <p:nvSpPr>
+          <p:cNvPr id="15" name="Shape 13"/>
+          <p:cNvSpPr/>
+          <p:nvPr/>
+        </p:nvSpPr>
+        <p:spPr>
+          <a:xfrm>
+            <a:off x="8763000" y="3351276"/>
+            <a:ext cx="164592" cy="0"/>
+          </a:xfrm>
+          <a:prstGeom prst="line">
+            <a:avLst/>
+          </a:prstGeom>
+          <a:noFill/>
+          <a:ln w="15240">
+            <a:solidFill>
+              <a:srgbClr val="8ABBD8"/>
+            </a:solidFill>
+            <a:prstDash val="solid"/>
+          </a:ln>
+        </p:spPr>
+      </p:sp>
+      <p:sp>
+        <p:nvSpPr>
+          <p:cNvPr id="16" name="Shape 14"/>
+          <p:cNvSpPr/>
+          <p:nvPr/>
+        </p:nvSpPr>
+        <p:spPr>
+          <a:xfrm>
+            <a:off x="7872984" y="3200400"/>
+            <a:ext cx="890016" cy="301752"/>
+          </a:xfrm>
+          <a:prstGeom prst="roundRect">
+            <a:avLst>
+              <a:gd name="adj" fmla="val 24242"/>
+            </a:avLst>
+          </a:prstGeom>
+          <a:solidFill>
+            <a:srgbClr val="0068B7"/>
+          </a:solidFill>
+          <a:ln w="12700">
+            <a:solidFill>
+              <a:srgbClr val="0068B7"/>
+            </a:solidFill>
+            <a:prstDash val="solid"/>
+          </a:ln>
+        </p:spPr>
+      </p:sp>
+      <p:sp>
+        <p:nvSpPr>
+          <p:cNvPr id="17" name="Text 15"/>
+          <p:cNvSpPr/>
+          <p:nvPr/>
+        </p:nvSpPr>
+        <p:spPr>
+          <a:xfrm>
+            <a:off x="7909560" y="3273552"/>
+            <a:ext cx="816864" cy="146304"/>
+          </a:xfrm>
+          <a:prstGeom prst="rect">
+            <a:avLst/>
+          </a:prstGeom>
+          <a:noFill/>
+          <a:ln/>
+        </p:spPr>
+        <p:txBody>
+          <a:bodyPr wrap="square" lIns="0" tIns="0" rIns="0" bIns="0" rtlCol="0" anchor="ctr">
             <a:normAutofit/>
           </a:bodyPr>
           <a:lstStyle/>
           <a:p>
-            <a:pPr indent="0" marL="0">
-              <a:buNone/>
-            </a:pPr>
-            <a:r>
-              <a:rPr lang="en-US" sz="1220" dirty="0">
-                <a:solidFill>
-                  <a:srgbClr val="17364A"/>
-                </a:solidFill>
-                <a:latin typeface="Aptos" pitchFamily="34" charset="0"/>
-                <a:ea typeface="Aptos" pitchFamily="34" charset="-122"/>
-                <a:cs typeface="Aptos" pitchFamily="34" charset="-120"/>
-              </a:rPr>
-              <a:t>Testers should include the roles that will actually use or.</a:t>
-            </a:r>
-            <a:endParaRPr lang="en-US" sz="1220" dirty="0"/>
-          </a:p>
-          <a:p>
-            <a:pPr indent="0" marL="0">
-              <a:buNone/>
-            </a:pPr>
-            <a:r>
-              <a:rPr lang="en-US" sz="1220" dirty="0">
-                <a:solidFill>
-                  <a:srgbClr val="17364A"/>
-                </a:solidFill>
-                <a:latin typeface="Aptos" pitchFamily="34" charset="0"/>
-                <a:ea typeface="Aptos" pitchFamily="34" charset="-122"/>
-                <a:cs typeface="Aptos" pitchFamily="34" charset="-120"/>
-              </a:rPr>
-              <a:t>Test scenarios should include more than ideal cases.</a:t>
-            </a:r>
-            <a:endParaRPr lang="en-US" sz="1220" dirty="0"/>
-          </a:p>
-          <a:p>
-            <a:pPr indent="0" marL="0">
-              <a:buNone/>
-            </a:pPr>
-            <a:r>
-              <a:rPr lang="en-US" sz="1220" dirty="0">
-                <a:solidFill>
-                  <a:srgbClr val="17364A"/>
-                </a:solidFill>
-                <a:latin typeface="Aptos" pitchFamily="34" charset="0"/>
-                <a:ea typeface="Aptos" pitchFamily="34" charset="-122"/>
-                <a:cs typeface="Aptos" pitchFamily="34" charset="-120"/>
-              </a:rPr>
-              <a:t>AI-supported workflows should be tested with incomplete data,.</a:t>
-            </a:r>
-            <a:endParaRPr lang="en-US" sz="1220" dirty="0"/>
-          </a:p>
-        </p:txBody>
-      </p:sp>
-      <p:sp>
-        <p:nvSpPr>
-          <p:cNvPr id="16" name="Shape 14"/>
-          <p:cNvSpPr/>
-          <p:nvPr/>
-        </p:nvSpPr>
-        <p:spPr>
-          <a:xfrm>
-            <a:off x="7635240" y="4498848"/>
-            <a:ext cx="3474720" cy="1143000"/>
+            <a:pPr algn="ctr" indent="0" marL="0">
+              <a:buNone/>
+            </a:pPr>
+            <a:r>
+              <a:rPr lang="en-US" sz="880" b="1" dirty="0">
+                <a:solidFill>
+                  <a:srgbClr val="FFFFFF"/>
+                </a:solidFill>
+                <a:latin typeface="Aptos" pitchFamily="34" charset="0"/>
+                <a:ea typeface="Aptos" pitchFamily="34" charset="-122"/>
+                <a:cs typeface="Aptos" pitchFamily="34" charset="-120"/>
+              </a:rPr>
+              <a:t>Need</a:t>
+            </a:r>
+            <a:endParaRPr lang="en-US" sz="880" dirty="0"/>
+          </a:p>
+        </p:txBody>
+      </p:sp>
+      <p:sp>
+        <p:nvSpPr>
+          <p:cNvPr id="18" name="Shape 16"/>
+          <p:cNvSpPr/>
+          <p:nvPr/>
+        </p:nvSpPr>
+        <p:spPr>
+          <a:xfrm>
+            <a:off x="9817608" y="3351276"/>
+            <a:ext cx="164592" cy="0"/>
+          </a:xfrm>
+          <a:prstGeom prst="line">
+            <a:avLst/>
+          </a:prstGeom>
+          <a:noFill/>
+          <a:ln w="15240">
+            <a:solidFill>
+              <a:srgbClr val="8ABBD8"/>
+            </a:solidFill>
+            <a:prstDash val="solid"/>
+          </a:ln>
+        </p:spPr>
+      </p:sp>
+      <p:sp>
+        <p:nvSpPr>
+          <p:cNvPr id="19" name="Shape 17"/>
+          <p:cNvSpPr/>
+          <p:nvPr/>
+        </p:nvSpPr>
+        <p:spPr>
+          <a:xfrm>
+            <a:off x="8927592" y="3200400"/>
+            <a:ext cx="890016" cy="301752"/>
           </a:xfrm>
           <a:prstGeom prst="roundRect">
             <a:avLst>
-              <a:gd name="adj" fmla="val 9600"/>
+              <a:gd name="adj" fmla="val 24242"/>
+            </a:avLst>
+          </a:prstGeom>
+          <a:solidFill>
+            <a:srgbClr val="2F8A28"/>
+          </a:solidFill>
+          <a:ln w="12700">
+            <a:solidFill>
+              <a:srgbClr val="2F8A28"/>
+            </a:solidFill>
+            <a:prstDash val="solid"/>
+          </a:ln>
+        </p:spPr>
+      </p:sp>
+      <p:sp>
+        <p:nvSpPr>
+          <p:cNvPr id="20" name="Text 18"/>
+          <p:cNvSpPr/>
+          <p:nvPr/>
+        </p:nvSpPr>
+        <p:spPr>
+          <a:xfrm>
+            <a:off x="8964168" y="3273552"/>
+            <a:ext cx="816864" cy="146304"/>
+          </a:xfrm>
+          <a:prstGeom prst="rect">
+            <a:avLst/>
+          </a:prstGeom>
+          <a:noFill/>
+          <a:ln/>
+        </p:spPr>
+        <p:txBody>
+          <a:bodyPr wrap="square" lIns="0" tIns="0" rIns="0" bIns="0" rtlCol="0" anchor="ctr">
+            <a:normAutofit/>
+          </a:bodyPr>
+          <a:lstStyle/>
+          <a:p>
+            <a:pPr algn="ctr" indent="0" marL="0">
+              <a:buNone/>
+            </a:pPr>
+            <a:r>
+              <a:rPr lang="en-US" sz="880" b="1" dirty="0">
+                <a:solidFill>
+                  <a:srgbClr val="FFFFFF"/>
+                </a:solidFill>
+                <a:latin typeface="Aptos" pitchFamily="34" charset="0"/>
+                <a:ea typeface="Aptos" pitchFamily="34" charset="-122"/>
+                <a:cs typeface="Aptos" pitchFamily="34" charset="-120"/>
+              </a:rPr>
+              <a:t>Build</a:t>
+            </a:r>
+            <a:endParaRPr lang="en-US" sz="880" dirty="0"/>
+          </a:p>
+        </p:txBody>
+      </p:sp>
+      <p:sp>
+        <p:nvSpPr>
+          <p:cNvPr id="21" name="Shape 19"/>
+          <p:cNvSpPr/>
+          <p:nvPr/>
+        </p:nvSpPr>
+        <p:spPr>
+          <a:xfrm>
+            <a:off x="9982200" y="3200400"/>
+            <a:ext cx="890016" cy="301752"/>
+          </a:xfrm>
+          <a:prstGeom prst="roundRect">
+            <a:avLst>
+              <a:gd name="adj" fmla="val 24242"/>
+            </a:avLst>
+          </a:prstGeom>
+          <a:solidFill>
+            <a:srgbClr val="6A4CA3"/>
+          </a:solidFill>
+          <a:ln w="12700">
+            <a:solidFill>
+              <a:srgbClr val="6A4CA3"/>
+            </a:solidFill>
+            <a:prstDash val="solid"/>
+          </a:ln>
+        </p:spPr>
+      </p:sp>
+      <p:sp>
+        <p:nvSpPr>
+          <p:cNvPr id="22" name="Text 20"/>
+          <p:cNvSpPr/>
+          <p:nvPr/>
+        </p:nvSpPr>
+        <p:spPr>
+          <a:xfrm>
+            <a:off x="10018776" y="3273552"/>
+            <a:ext cx="816864" cy="146304"/>
+          </a:xfrm>
+          <a:prstGeom prst="rect">
+            <a:avLst/>
+          </a:prstGeom>
+          <a:noFill/>
+          <a:ln/>
+        </p:spPr>
+        <p:txBody>
+          <a:bodyPr wrap="square" lIns="0" tIns="0" rIns="0" bIns="0" rtlCol="0" anchor="ctr">
+            <a:normAutofit/>
+          </a:bodyPr>
+          <a:lstStyle/>
+          <a:p>
+            <a:pPr algn="ctr" indent="0" marL="0">
+              <a:buNone/>
+            </a:pPr>
+            <a:r>
+              <a:rPr lang="en-US" sz="880" b="1" dirty="0">
+                <a:solidFill>
+                  <a:srgbClr val="FFFFFF"/>
+                </a:solidFill>
+                <a:latin typeface="Aptos" pitchFamily="34" charset="0"/>
+                <a:ea typeface="Aptos" pitchFamily="34" charset="-122"/>
+                <a:cs typeface="Aptos" pitchFamily="34" charset="-120"/>
+              </a:rPr>
+              <a:t>Adopt</a:t>
+            </a:r>
+            <a:endParaRPr lang="en-US" sz="880" dirty="0"/>
+          </a:p>
+        </p:txBody>
+      </p:sp>
+      <p:sp>
+        <p:nvSpPr>
+          <p:cNvPr id="23" name="Text 21"/>
+          <p:cNvSpPr/>
+          <p:nvPr/>
+        </p:nvSpPr>
+        <p:spPr>
+          <a:xfrm>
+            <a:off x="7854696" y="3694176"/>
+            <a:ext cx="3035808" cy="206654"/>
+          </a:xfrm>
+          <a:prstGeom prst="rect">
+            <a:avLst/>
+          </a:prstGeom>
+          <a:noFill/>
+          <a:ln/>
+        </p:spPr>
+        <p:txBody>
+          <a:bodyPr wrap="square" lIns="254" tIns="254" rIns="254" bIns="254" rtlCol="0" anchor="t">
+            <a:normAutofit/>
+          </a:bodyPr>
+          <a:lstStyle/>
+          <a:p>
+            <a:pPr indent="0" marL="0">
+              <a:buNone/>
+            </a:pPr>
+            <a:r>
+              <a:rPr lang="en-US" sz="1120" dirty="0">
+                <a:solidFill>
+                  <a:srgbClr val="17364A"/>
+                </a:solidFill>
+                <a:latin typeface="Aptos" pitchFamily="34" charset="0"/>
+                <a:ea typeface="Aptos" pitchFamily="34" charset="-122"/>
+                <a:cs typeface="Aptos" pitchFamily="34" charset="-120"/>
+              </a:rPr>
+              <a:t>Implementation work should make dependencies, approvals, training, and sustainment visible before launch.</a:t>
+            </a:r>
+            <a:endParaRPr lang="en-US" sz="1120" dirty="0"/>
+          </a:p>
+        </p:txBody>
+      </p:sp>
+      <p:sp>
+        <p:nvSpPr>
+          <p:cNvPr id="24" name="Shape 22"/>
+          <p:cNvSpPr/>
+          <p:nvPr/>
+        </p:nvSpPr>
+        <p:spPr>
+          <a:xfrm>
+            <a:off x="7635240" y="4184294"/>
+            <a:ext cx="3474720" cy="1466698"/>
+          </a:xfrm>
+          <a:prstGeom prst="roundRect">
+            <a:avLst>
+              <a:gd name="adj" fmla="val 7481"/>
             </a:avLst>
           </a:prstGeom>
           <a:solidFill>
@@ -15921,13 +16353,13 @@
       </p:sp>
       <p:sp>
         <p:nvSpPr>
-          <p:cNvPr id="17" name="Text 15"/>
-          <p:cNvSpPr/>
-          <p:nvPr/>
-        </p:nvSpPr>
-        <p:spPr>
-          <a:xfrm>
-            <a:off x="7799832" y="4645152"/>
+          <p:cNvPr id="25" name="Text 23"/>
+          <p:cNvSpPr/>
+          <p:nvPr/>
+        </p:nvSpPr>
+        <p:spPr>
+          <a:xfrm>
+            <a:off x="7799832" y="4330598"/>
             <a:ext cx="3145536" cy="256032"/>
           </a:xfrm>
           <a:prstGeom prst="rect">
@@ -15960,14 +16392,14 @@
       </p:sp>
       <p:sp>
         <p:nvSpPr>
-          <p:cNvPr id="18" name="Text 16"/>
-          <p:cNvSpPr/>
-          <p:nvPr/>
-        </p:nvSpPr>
-        <p:spPr>
-          <a:xfrm>
-            <a:off x="7799832" y="4974336"/>
-            <a:ext cx="3145536" cy="576072"/>
+          <p:cNvPr id="26" name="Text 24"/>
+          <p:cNvSpPr/>
+          <p:nvPr/>
+        </p:nvSpPr>
+        <p:spPr>
+          <a:xfrm>
+            <a:off x="7799832" y="4659782"/>
+            <a:ext cx="3145536" cy="899770"/>
           </a:xfrm>
           <a:prstGeom prst="rect">
             <a:avLst/>
@@ -15993,7 +16425,7 @@
                 <a:ea typeface="Aptos" pitchFamily="34" charset="-122"/>
                 <a:cs typeface="Aptos" pitchFamily="34" charset="-120"/>
               </a:rPr>
-              <a:t>Use the concept to clarify workflow changes, dependencies, staffing, procurement requirements, training needs, and.</a:t>
+              <a:t>Use the concept to clarify workflow changes, dependencies, staffing, procurement requirements, training needs, and implementation checkpoints.</a:t>
             </a:r>
             <a:endParaRPr lang="en-US" sz="1320" dirty="0"/>
           </a:p>
@@ -16362,11 +16794,11 @@
         <p:spPr>
           <a:xfrm>
             <a:off x="7635240" y="1325880"/>
-            <a:ext cx="3474720" cy="1325880"/>
+            <a:ext cx="3474720" cy="1207008"/>
           </a:xfrm>
           <a:prstGeom prst="roundRect">
             <a:avLst>
-              <a:gd name="adj" fmla="val 8276"/>
+              <a:gd name="adj" fmla="val 9091"/>
             </a:avLst>
           </a:prstGeom>
           <a:solidFill>
@@ -16428,7 +16860,7 @@
         <p:spPr>
           <a:xfrm>
             <a:off x="7799832" y="1801368"/>
-            <a:ext cx="3145536" cy="758952"/>
+            <a:ext cx="3145536" cy="640080"/>
           </a:xfrm>
           <a:prstGeom prst="rect">
             <a:avLst/>
@@ -16468,12 +16900,12 @@
         </p:nvSpPr>
         <p:spPr>
           <a:xfrm>
-            <a:off x="7635240" y="2788920"/>
-            <a:ext cx="3474720" cy="1536192"/>
+            <a:off x="7635240" y="2670048"/>
+            <a:ext cx="3474720" cy="1377086"/>
           </a:xfrm>
           <a:prstGeom prst="roundRect">
             <a:avLst>
-              <a:gd name="adj" fmla="val 7143"/>
+              <a:gd name="adj" fmla="val 7968"/>
             </a:avLst>
           </a:prstGeom>
           <a:solidFill>
@@ -16495,8 +16927,8 @@
         </p:nvSpPr>
         <p:spPr>
           <a:xfrm>
-            <a:off x="7799832" y="2935224"/>
-            <a:ext cx="3145536" cy="256032"/>
+            <a:off x="7799832" y="2798064"/>
+            <a:ext cx="3145536" cy="237744"/>
           </a:xfrm>
           <a:prstGeom prst="rect">
             <a:avLst/>
@@ -16512,7 +16944,7 @@
               <a:buNone/>
             </a:pPr>
             <a:r>
-              <a:rPr lang="en-US" sz="1300" b="1" dirty="0">
+              <a:rPr lang="en-US" sz="1250" b="1" dirty="0">
                 <a:solidFill>
                   <a:srgbClr val="0068B7"/>
                 </a:solidFill>
@@ -16520,84 +16952,317 @@
                 <a:ea typeface="Aptos" pitchFamily="34" charset="-122"/>
                 <a:cs typeface="Aptos" pitchFamily="34" charset="-120"/>
               </a:rPr>
-              <a:t>Concept checkpoints</a:t>
-            </a:r>
-            <a:endParaRPr lang="en-US" sz="1300" dirty="0"/>
-          </a:p>
-        </p:txBody>
-      </p:sp>
-      <p:sp>
-        <p:nvSpPr>
-          <p:cNvPr id="15" name="Text 13"/>
-          <p:cNvSpPr/>
-          <p:nvPr/>
-        </p:nvSpPr>
-        <p:spPr>
-          <a:xfrm>
-            <a:off x="7818120" y="3300984"/>
-            <a:ext cx="3090672" cy="877824"/>
-          </a:xfrm>
-          <a:prstGeom prst="rect">
-            <a:avLst/>
-          </a:prstGeom>
-          <a:noFill/>
-          <a:ln/>
-        </p:spPr>
-        <p:txBody>
-          <a:bodyPr wrap="square" lIns="508" tIns="508" rIns="508" bIns="508" rtlCol="0" anchor="t">
+              <a:t>Implementation path</a:t>
+            </a:r>
+            <a:endParaRPr lang="en-US" sz="1250" dirty="0"/>
+          </a:p>
+        </p:txBody>
+      </p:sp>
+      <p:sp>
+        <p:nvSpPr>
+          <p:cNvPr id="15" name="Shape 13"/>
+          <p:cNvSpPr/>
+          <p:nvPr/>
+        </p:nvSpPr>
+        <p:spPr>
+          <a:xfrm>
+            <a:off x="8763000" y="3351276"/>
+            <a:ext cx="164592" cy="0"/>
+          </a:xfrm>
+          <a:prstGeom prst="line">
+            <a:avLst/>
+          </a:prstGeom>
+          <a:noFill/>
+          <a:ln w="15240">
+            <a:solidFill>
+              <a:srgbClr val="8ABBD8"/>
+            </a:solidFill>
+            <a:prstDash val="solid"/>
+          </a:ln>
+        </p:spPr>
+      </p:sp>
+      <p:sp>
+        <p:nvSpPr>
+          <p:cNvPr id="16" name="Shape 14"/>
+          <p:cNvSpPr/>
+          <p:nvPr/>
+        </p:nvSpPr>
+        <p:spPr>
+          <a:xfrm>
+            <a:off x="7872984" y="3200400"/>
+            <a:ext cx="890016" cy="301752"/>
+          </a:xfrm>
+          <a:prstGeom prst="roundRect">
+            <a:avLst>
+              <a:gd name="adj" fmla="val 24242"/>
+            </a:avLst>
+          </a:prstGeom>
+          <a:solidFill>
+            <a:srgbClr val="0068B7"/>
+          </a:solidFill>
+          <a:ln w="12700">
+            <a:solidFill>
+              <a:srgbClr val="0068B7"/>
+            </a:solidFill>
+            <a:prstDash val="solid"/>
+          </a:ln>
+        </p:spPr>
+      </p:sp>
+      <p:sp>
+        <p:nvSpPr>
+          <p:cNvPr id="17" name="Text 15"/>
+          <p:cNvSpPr/>
+          <p:nvPr/>
+        </p:nvSpPr>
+        <p:spPr>
+          <a:xfrm>
+            <a:off x="7909560" y="3273552"/>
+            <a:ext cx="816864" cy="146304"/>
+          </a:xfrm>
+          <a:prstGeom prst="rect">
+            <a:avLst/>
+          </a:prstGeom>
+          <a:noFill/>
+          <a:ln/>
+        </p:spPr>
+        <p:txBody>
+          <a:bodyPr wrap="square" lIns="0" tIns="0" rIns="0" bIns="0" rtlCol="0" anchor="ctr">
             <a:normAutofit/>
           </a:bodyPr>
           <a:lstStyle/>
           <a:p>
-            <a:pPr indent="0" marL="0">
-              <a:buNone/>
-            </a:pPr>
-            <a:r>
-              <a:rPr lang="en-US" sz="1220" dirty="0">
-                <a:solidFill>
-                  <a:srgbClr val="17364A"/>
-                </a:solidFill>
-                <a:latin typeface="Aptos" pitchFamily="34" charset="0"/>
-                <a:ea typeface="Aptos" pitchFamily="34" charset="-122"/>
-                <a:cs typeface="Aptos" pitchFamily="34" charset="-120"/>
-              </a:rPr>
-              <a:t>Issues should be categorized by severity, assigned to owners, and.</a:t>
-            </a:r>
-            <a:endParaRPr lang="en-US" sz="1220" dirty="0"/>
-          </a:p>
-          <a:p>
-            <a:pPr indent="0" marL="0">
-              <a:buNone/>
-            </a:pPr>
-            <a:r>
-              <a:rPr lang="en-US" sz="1220" dirty="0">
-                <a:solidFill>
-                  <a:srgbClr val="17364A"/>
-                </a:solidFill>
-                <a:latin typeface="Aptos" pitchFamily="34" charset="0"/>
-                <a:ea typeface="Aptos" pitchFamily="34" charset="-122"/>
-                <a:cs typeface="Aptos" pitchFamily="34" charset="-120"/>
-              </a:rPr>
-              <a:t>It should proceed only if acceptance criteria are met and.</a:t>
-            </a:r>
-            <a:endParaRPr lang="en-US" sz="1220" dirty="0"/>
-          </a:p>
-        </p:txBody>
-      </p:sp>
-      <p:sp>
-        <p:nvSpPr>
-          <p:cNvPr id="16" name="Shape 14"/>
-          <p:cNvSpPr/>
-          <p:nvPr/>
-        </p:nvSpPr>
-        <p:spPr>
-          <a:xfrm>
-            <a:off x="7635240" y="4498848"/>
-            <a:ext cx="3474720" cy="1143000"/>
+            <a:pPr algn="ctr" indent="0" marL="0">
+              <a:buNone/>
+            </a:pPr>
+            <a:r>
+              <a:rPr lang="en-US" sz="880" b="1" dirty="0">
+                <a:solidFill>
+                  <a:srgbClr val="FFFFFF"/>
+                </a:solidFill>
+                <a:latin typeface="Aptos" pitchFamily="34" charset="0"/>
+                <a:ea typeface="Aptos" pitchFamily="34" charset="-122"/>
+                <a:cs typeface="Aptos" pitchFamily="34" charset="-120"/>
+              </a:rPr>
+              <a:t>Need</a:t>
+            </a:r>
+            <a:endParaRPr lang="en-US" sz="880" dirty="0"/>
+          </a:p>
+        </p:txBody>
+      </p:sp>
+      <p:sp>
+        <p:nvSpPr>
+          <p:cNvPr id="18" name="Shape 16"/>
+          <p:cNvSpPr/>
+          <p:nvPr/>
+        </p:nvSpPr>
+        <p:spPr>
+          <a:xfrm>
+            <a:off x="9817608" y="3351276"/>
+            <a:ext cx="164592" cy="0"/>
+          </a:xfrm>
+          <a:prstGeom prst="line">
+            <a:avLst/>
+          </a:prstGeom>
+          <a:noFill/>
+          <a:ln w="15240">
+            <a:solidFill>
+              <a:srgbClr val="8ABBD8"/>
+            </a:solidFill>
+            <a:prstDash val="solid"/>
+          </a:ln>
+        </p:spPr>
+      </p:sp>
+      <p:sp>
+        <p:nvSpPr>
+          <p:cNvPr id="19" name="Shape 17"/>
+          <p:cNvSpPr/>
+          <p:nvPr/>
+        </p:nvSpPr>
+        <p:spPr>
+          <a:xfrm>
+            <a:off x="8927592" y="3200400"/>
+            <a:ext cx="890016" cy="301752"/>
           </a:xfrm>
           <a:prstGeom prst="roundRect">
             <a:avLst>
-              <a:gd name="adj" fmla="val 9600"/>
+              <a:gd name="adj" fmla="val 24242"/>
+            </a:avLst>
+          </a:prstGeom>
+          <a:solidFill>
+            <a:srgbClr val="2F8A28"/>
+          </a:solidFill>
+          <a:ln w="12700">
+            <a:solidFill>
+              <a:srgbClr val="2F8A28"/>
+            </a:solidFill>
+            <a:prstDash val="solid"/>
+          </a:ln>
+        </p:spPr>
+      </p:sp>
+      <p:sp>
+        <p:nvSpPr>
+          <p:cNvPr id="20" name="Text 18"/>
+          <p:cNvSpPr/>
+          <p:nvPr/>
+        </p:nvSpPr>
+        <p:spPr>
+          <a:xfrm>
+            <a:off x="8964168" y="3273552"/>
+            <a:ext cx="816864" cy="146304"/>
+          </a:xfrm>
+          <a:prstGeom prst="rect">
+            <a:avLst/>
+          </a:prstGeom>
+          <a:noFill/>
+          <a:ln/>
+        </p:spPr>
+        <p:txBody>
+          <a:bodyPr wrap="square" lIns="0" tIns="0" rIns="0" bIns="0" rtlCol="0" anchor="ctr">
+            <a:normAutofit/>
+          </a:bodyPr>
+          <a:lstStyle/>
+          <a:p>
+            <a:pPr algn="ctr" indent="0" marL="0">
+              <a:buNone/>
+            </a:pPr>
+            <a:r>
+              <a:rPr lang="en-US" sz="880" b="1" dirty="0">
+                <a:solidFill>
+                  <a:srgbClr val="FFFFFF"/>
+                </a:solidFill>
+                <a:latin typeface="Aptos" pitchFamily="34" charset="0"/>
+                <a:ea typeface="Aptos" pitchFamily="34" charset="-122"/>
+                <a:cs typeface="Aptos" pitchFamily="34" charset="-120"/>
+              </a:rPr>
+              <a:t>Build</a:t>
+            </a:r>
+            <a:endParaRPr lang="en-US" sz="880" dirty="0"/>
+          </a:p>
+        </p:txBody>
+      </p:sp>
+      <p:sp>
+        <p:nvSpPr>
+          <p:cNvPr id="21" name="Shape 19"/>
+          <p:cNvSpPr/>
+          <p:nvPr/>
+        </p:nvSpPr>
+        <p:spPr>
+          <a:xfrm>
+            <a:off x="9982200" y="3200400"/>
+            <a:ext cx="890016" cy="301752"/>
+          </a:xfrm>
+          <a:prstGeom prst="roundRect">
+            <a:avLst>
+              <a:gd name="adj" fmla="val 24242"/>
+            </a:avLst>
+          </a:prstGeom>
+          <a:solidFill>
+            <a:srgbClr val="6A4CA3"/>
+          </a:solidFill>
+          <a:ln w="12700">
+            <a:solidFill>
+              <a:srgbClr val="6A4CA3"/>
+            </a:solidFill>
+            <a:prstDash val="solid"/>
+          </a:ln>
+        </p:spPr>
+      </p:sp>
+      <p:sp>
+        <p:nvSpPr>
+          <p:cNvPr id="22" name="Text 20"/>
+          <p:cNvSpPr/>
+          <p:nvPr/>
+        </p:nvSpPr>
+        <p:spPr>
+          <a:xfrm>
+            <a:off x="10018776" y="3273552"/>
+            <a:ext cx="816864" cy="146304"/>
+          </a:xfrm>
+          <a:prstGeom prst="rect">
+            <a:avLst/>
+          </a:prstGeom>
+          <a:noFill/>
+          <a:ln/>
+        </p:spPr>
+        <p:txBody>
+          <a:bodyPr wrap="square" lIns="0" tIns="0" rIns="0" bIns="0" rtlCol="0" anchor="ctr">
+            <a:normAutofit/>
+          </a:bodyPr>
+          <a:lstStyle/>
+          <a:p>
+            <a:pPr algn="ctr" indent="0" marL="0">
+              <a:buNone/>
+            </a:pPr>
+            <a:r>
+              <a:rPr lang="en-US" sz="880" b="1" dirty="0">
+                <a:solidFill>
+                  <a:srgbClr val="FFFFFF"/>
+                </a:solidFill>
+                <a:latin typeface="Aptos" pitchFamily="34" charset="0"/>
+                <a:ea typeface="Aptos" pitchFamily="34" charset="-122"/>
+                <a:cs typeface="Aptos" pitchFamily="34" charset="-120"/>
+              </a:rPr>
+              <a:t>Adopt</a:t>
+            </a:r>
+            <a:endParaRPr lang="en-US" sz="880" dirty="0"/>
+          </a:p>
+        </p:txBody>
+      </p:sp>
+      <p:sp>
+        <p:nvSpPr>
+          <p:cNvPr id="23" name="Text 21"/>
+          <p:cNvSpPr/>
+          <p:nvPr/>
+        </p:nvSpPr>
+        <p:spPr>
+          <a:xfrm>
+            <a:off x="7854696" y="3694176"/>
+            <a:ext cx="3035808" cy="206654"/>
+          </a:xfrm>
+          <a:prstGeom prst="rect">
+            <a:avLst/>
+          </a:prstGeom>
+          <a:noFill/>
+          <a:ln/>
+        </p:spPr>
+        <p:txBody>
+          <a:bodyPr wrap="square" lIns="254" tIns="254" rIns="254" bIns="254" rtlCol="0" anchor="t">
+            <a:normAutofit/>
+          </a:bodyPr>
+          <a:lstStyle/>
+          <a:p>
+            <a:pPr indent="0" marL="0">
+              <a:buNone/>
+            </a:pPr>
+            <a:r>
+              <a:rPr lang="en-US" sz="1120" dirty="0">
+                <a:solidFill>
+                  <a:srgbClr val="17364A"/>
+                </a:solidFill>
+                <a:latin typeface="Aptos" pitchFamily="34" charset="0"/>
+                <a:ea typeface="Aptos" pitchFamily="34" charset="-122"/>
+                <a:cs typeface="Aptos" pitchFamily="34" charset="-120"/>
+              </a:rPr>
+              <a:t>Implementation work should make dependencies, approvals, training, and sustainment visible before launch.</a:t>
+            </a:r>
+            <a:endParaRPr lang="en-US" sz="1120" dirty="0"/>
+          </a:p>
+        </p:txBody>
+      </p:sp>
+      <p:sp>
+        <p:nvSpPr>
+          <p:cNvPr id="24" name="Shape 22"/>
+          <p:cNvSpPr/>
+          <p:nvPr/>
+        </p:nvSpPr>
+        <p:spPr>
+          <a:xfrm>
+            <a:off x="7635240" y="4184294"/>
+            <a:ext cx="3474720" cy="1466698"/>
+          </a:xfrm>
+          <a:prstGeom prst="roundRect">
+            <a:avLst>
+              <a:gd name="adj" fmla="val 7481"/>
             </a:avLst>
           </a:prstGeom>
           <a:solidFill>
@@ -16613,13 +17278,13 @@
       </p:sp>
       <p:sp>
         <p:nvSpPr>
-          <p:cNvPr id="17" name="Text 15"/>
-          <p:cNvSpPr/>
-          <p:nvPr/>
-        </p:nvSpPr>
-        <p:spPr>
-          <a:xfrm>
-            <a:off x="7799832" y="4645152"/>
+          <p:cNvPr id="25" name="Text 23"/>
+          <p:cNvSpPr/>
+          <p:nvPr/>
+        </p:nvSpPr>
+        <p:spPr>
+          <a:xfrm>
+            <a:off x="7799832" y="4330598"/>
             <a:ext cx="3145536" cy="256032"/>
           </a:xfrm>
           <a:prstGeom prst="rect">
@@ -16652,14 +17317,14 @@
       </p:sp>
       <p:sp>
         <p:nvSpPr>
-          <p:cNvPr id="18" name="Text 16"/>
-          <p:cNvSpPr/>
-          <p:nvPr/>
-        </p:nvSpPr>
-        <p:spPr>
-          <a:xfrm>
-            <a:off x="7799832" y="4974336"/>
-            <a:ext cx="3145536" cy="576072"/>
+          <p:cNvPr id="26" name="Text 24"/>
+          <p:cNvSpPr/>
+          <p:nvPr/>
+        </p:nvSpPr>
+        <p:spPr>
+          <a:xfrm>
+            <a:off x="7799832" y="4659782"/>
+            <a:ext cx="3145536" cy="899770"/>
           </a:xfrm>
           <a:prstGeom prst="rect">
             <a:avLst/>
@@ -16685,7 +17350,7 @@
                 <a:ea typeface="Aptos" pitchFamily="34" charset="-122"/>
                 <a:cs typeface="Aptos" pitchFamily="34" charset="-120"/>
               </a:rPr>
-              <a:t>Use the concept to clarify workflow changes, dependencies, staffing, procurement requirements, training needs, and.</a:t>
+              <a:t>Use the concept to clarify workflow changes, dependencies, staffing, procurement requirements, training needs, and implementation checkpoints.</a:t>
             </a:r>
             <a:endParaRPr lang="en-US" sz="1320" dirty="0"/>
           </a:p>

--- a/downloads/presentations/modules/ops-240.pptx
+++ b/downloads/presentations/modules/ops-240.pptx
@@ -3255,8 +3255,8 @@
         </p:nvSpPr>
         <p:spPr>
           <a:xfrm>
-            <a:off x="868680" y="1508760"/>
-            <a:ext cx="6309360" cy="4160520"/>
+            <a:off x="822960" y="1463040"/>
+            <a:ext cx="6565392" cy="4343400"/>
           </a:xfrm>
           <a:prstGeom prst="rect">
             <a:avLst/>
@@ -3274,7 +3274,7 @@
               <a:buNone/>
             </a:pPr>
             <a:r>
-              <a:rPr lang="en-US" sz="2100" dirty="0">
+              <a:rPr lang="en-US" sz="1920" dirty="0">
                 <a:solidFill>
                   <a:srgbClr val="003A63"/>
                 </a:solidFill>
@@ -3284,14 +3284,14 @@
               </a:rPr>
               <a:t>• Risks and failure modes include the following:</a:t>
             </a:r>
-            <a:endParaRPr lang="en-US" sz="2100" dirty="0"/>
-          </a:p>
-          <a:p>
-            <a:pPr indent="0" marL="0">
-              <a:buNone/>
-            </a:pPr>
-            <a:r>
-              <a:rPr lang="en-US" sz="2100" dirty="0">
+            <a:endParaRPr lang="en-US" sz="1920" dirty="0"/>
+          </a:p>
+          <a:p>
+            <a:pPr indent="0" marL="0">
+              <a:buNone/>
+            </a:pPr>
+            <a:r>
+              <a:rPr lang="en-US" sz="1920" dirty="0">
                 <a:solidFill>
                   <a:srgbClr val="003A63"/>
                 </a:solidFill>
@@ -3301,14 +3301,14 @@
               </a:rPr>
               <a:t>• Testing only ideal scenarios and missing high-risk workflow failures.</a:t>
             </a:r>
-            <a:endParaRPr lang="en-US" sz="2100" dirty="0"/>
-          </a:p>
-          <a:p>
-            <a:pPr indent="0" marL="0">
-              <a:buNone/>
-            </a:pPr>
-            <a:r>
-              <a:rPr lang="en-US" sz="2100" dirty="0">
+            <a:endParaRPr lang="en-US" sz="1920" dirty="0"/>
+          </a:p>
+          <a:p>
+            <a:pPr indent="0" marL="0">
+              <a:buNone/>
+            </a:pPr>
+            <a:r>
+              <a:rPr lang="en-US" sz="1920" dirty="0">
                 <a:solidFill>
                   <a:srgbClr val="003A63"/>
                 </a:solidFill>
@@ -3318,7 +3318,7 @@
               </a:rPr>
               <a:t>• Excluding real end users from testing.</a:t>
             </a:r>
-            <a:endParaRPr lang="en-US" sz="2100" dirty="0"/>
+            <a:endParaRPr lang="en-US" sz="1920" dirty="0"/>
           </a:p>
         </p:txBody>
       </p:sp>
@@ -3330,12 +3330,12 @@
         </p:nvSpPr>
         <p:spPr>
           <a:xfrm>
-            <a:off x="7635240" y="1325880"/>
-            <a:ext cx="3474720" cy="1207008"/>
+            <a:off x="7543800" y="1325880"/>
+            <a:ext cx="3611880" cy="1261872"/>
           </a:xfrm>
           <a:prstGeom prst="roundRect">
             <a:avLst>
-              <a:gd name="adj" fmla="val 9091"/>
+              <a:gd name="adj" fmla="val 8696"/>
             </a:avLst>
           </a:prstGeom>
           <a:solidFill>
@@ -3357,8 +3357,8 @@
         </p:nvSpPr>
         <p:spPr>
           <a:xfrm>
-            <a:off x="7799832" y="1472184"/>
-            <a:ext cx="3145536" cy="256032"/>
+            <a:off x="7708392" y="1453896"/>
+            <a:ext cx="3282696" cy="228600"/>
           </a:xfrm>
           <a:prstGeom prst="rect">
             <a:avLst/>
@@ -3374,7 +3374,7 @@
               <a:buNone/>
             </a:pPr>
             <a:r>
-              <a:rPr lang="en-US" sz="1300" b="1" dirty="0">
+              <a:rPr lang="en-US" sz="1220" b="1" dirty="0">
                 <a:solidFill>
                   <a:srgbClr val="0068B7"/>
                 </a:solidFill>
@@ -3384,7 +3384,7 @@
               </a:rPr>
               <a:t>Risk check</a:t>
             </a:r>
-            <a:endParaRPr lang="en-US" sz="1300" dirty="0"/>
+            <a:endParaRPr lang="en-US" sz="1220" dirty="0"/>
           </a:p>
         </p:txBody>
       </p:sp>
@@ -3396,8 +3396,8 @@
         </p:nvSpPr>
         <p:spPr>
           <a:xfrm>
-            <a:off x="7799832" y="1801368"/>
-            <a:ext cx="3145536" cy="640080"/>
+            <a:off x="7708392" y="1764792"/>
+            <a:ext cx="3282696" cy="749808"/>
           </a:xfrm>
           <a:prstGeom prst="rect">
             <a:avLst/>
@@ -3415,7 +3415,7 @@
               <a:buNone/>
             </a:pPr>
             <a:r>
-              <a:rPr lang="en-US" sz="1320" dirty="0">
+              <a:rPr lang="en-US" sz="1220" dirty="0">
                 <a:solidFill>
                   <a:srgbClr val="17364A"/>
                 </a:solidFill>
@@ -3425,7 +3425,7 @@
               </a:rPr>
               <a:t>Risks and failure modes include the following:</a:t>
             </a:r>
-            <a:endParaRPr lang="en-US" sz="1320" dirty="0"/>
+            <a:endParaRPr lang="en-US" sz="1220" dirty="0"/>
           </a:p>
         </p:txBody>
       </p:sp>
@@ -3437,12 +3437,12 @@
         </p:nvSpPr>
         <p:spPr>
           <a:xfrm>
-            <a:off x="7635240" y="2670048"/>
-            <a:ext cx="3474720" cy="1536192"/>
+            <a:off x="7543800" y="2724912"/>
+            <a:ext cx="3611880" cy="1527048"/>
           </a:xfrm>
           <a:prstGeom prst="roundRect">
             <a:avLst>
-              <a:gd name="adj" fmla="val 7143"/>
+              <a:gd name="adj" fmla="val 7186"/>
             </a:avLst>
           </a:prstGeom>
           <a:solidFill>
@@ -3464,8 +3464,8 @@
         </p:nvSpPr>
         <p:spPr>
           <a:xfrm>
-            <a:off x="7799832" y="2816352"/>
-            <a:ext cx="3145536" cy="256032"/>
+            <a:off x="7708392" y="2852928"/>
+            <a:ext cx="3282696" cy="228600"/>
           </a:xfrm>
           <a:prstGeom prst="rect">
             <a:avLst/>
@@ -3481,7 +3481,7 @@
               <a:buNone/>
             </a:pPr>
             <a:r>
-              <a:rPr lang="en-US" sz="1300" b="1" dirty="0">
+              <a:rPr lang="en-US" sz="1220" b="1" dirty="0">
                 <a:solidFill>
                   <a:srgbClr val="0068B7"/>
                 </a:solidFill>
@@ -3491,7 +3491,7 @@
               </a:rPr>
               <a:t>Concept checkpoints</a:t>
             </a:r>
-            <a:endParaRPr lang="en-US" sz="1300" dirty="0"/>
+            <a:endParaRPr lang="en-US" sz="1220" dirty="0"/>
           </a:p>
         </p:txBody>
       </p:sp>
@@ -3503,8 +3503,8 @@
         </p:nvSpPr>
         <p:spPr>
           <a:xfrm>
-            <a:off x="7818120" y="3182112"/>
-            <a:ext cx="3090672" cy="877824"/>
+            <a:off x="7726680" y="3182112"/>
+            <a:ext cx="3227832" cy="960120"/>
           </a:xfrm>
           <a:prstGeom prst="rect">
             <a:avLst/>
@@ -3522,7 +3522,7 @@
               <a:buNone/>
             </a:pPr>
             <a:r>
-              <a:rPr lang="en-US" sz="1220" dirty="0">
+              <a:rPr lang="en-US" sz="1140" dirty="0">
                 <a:solidFill>
                   <a:srgbClr val="17364A"/>
                 </a:solidFill>
@@ -3532,14 +3532,14 @@
               </a:rPr>
               <a:t>Risks and failure modes include the following:</a:t>
             </a:r>
-            <a:endParaRPr lang="en-US" sz="1220" dirty="0"/>
-          </a:p>
-          <a:p>
-            <a:pPr indent="0" marL="0">
-              <a:buNone/>
-            </a:pPr>
-            <a:r>
-              <a:rPr lang="en-US" sz="1220" dirty="0">
+            <a:endParaRPr lang="en-US" sz="1140" dirty="0"/>
+          </a:p>
+          <a:p>
+            <a:pPr indent="0" marL="0">
+              <a:buNone/>
+            </a:pPr>
+            <a:r>
+              <a:rPr lang="en-US" sz="1140" dirty="0">
                 <a:solidFill>
                   <a:srgbClr val="17364A"/>
                 </a:solidFill>
@@ -3547,16 +3547,16 @@
                 <a:ea typeface="Aptos" pitchFamily="34" charset="-122"/>
                 <a:cs typeface="Aptos" pitchFamily="34" charset="-120"/>
               </a:rPr>
-              <a:t>Testing only ideal scenarios and missing high-risk workflow.</a:t>
-            </a:r>
-            <a:endParaRPr lang="en-US" sz="1220" dirty="0"/>
-          </a:p>
-          <a:p>
-            <a:pPr indent="0" marL="0">
-              <a:buNone/>
-            </a:pPr>
-            <a:r>
-              <a:rPr lang="en-US" sz="1220" dirty="0">
+              <a:t>Testing only ideal scenarios and missing high-risk.</a:t>
+            </a:r>
+            <a:endParaRPr lang="en-US" sz="1140" dirty="0"/>
+          </a:p>
+          <a:p>
+            <a:pPr indent="0" marL="0">
+              <a:buNone/>
+            </a:pPr>
+            <a:r>
+              <a:rPr lang="en-US" sz="1140" dirty="0">
                 <a:solidFill>
                   <a:srgbClr val="17364A"/>
                 </a:solidFill>
@@ -3566,7 +3566,7 @@
               </a:rPr>
               <a:t>Excluding real end users from testing.</a:t>
             </a:r>
-            <a:endParaRPr lang="en-US" sz="1220" dirty="0"/>
+            <a:endParaRPr lang="en-US" sz="1140" dirty="0"/>
           </a:p>
         </p:txBody>
       </p:sp>
@@ -3578,12 +3578,12 @@
         </p:nvSpPr>
         <p:spPr>
           <a:xfrm>
-            <a:off x="7635240" y="4343400"/>
-            <a:ext cx="3474720" cy="1255471"/>
+            <a:off x="7543800" y="4389120"/>
+            <a:ext cx="3611880" cy="1261872"/>
           </a:xfrm>
           <a:prstGeom prst="roundRect">
             <a:avLst>
-              <a:gd name="adj" fmla="val 8740"/>
+              <a:gd name="adj" fmla="val 8696"/>
             </a:avLst>
           </a:prstGeom>
           <a:solidFill>
@@ -3605,8 +3605,8 @@
         </p:nvSpPr>
         <p:spPr>
           <a:xfrm>
-            <a:off x="7799832" y="4489704"/>
-            <a:ext cx="3145536" cy="256032"/>
+            <a:off x="7708392" y="4517136"/>
+            <a:ext cx="3282696" cy="228600"/>
           </a:xfrm>
           <a:prstGeom prst="rect">
             <a:avLst/>
@@ -3622,7 +3622,7 @@
               <a:buNone/>
             </a:pPr>
             <a:r>
-              <a:rPr lang="en-US" sz="1300" b="1" dirty="0">
+              <a:rPr lang="en-US" sz="1220" b="1" dirty="0">
                 <a:solidFill>
                   <a:srgbClr val="0068B7"/>
                 </a:solidFill>
@@ -3632,7 +3632,7 @@
               </a:rPr>
               <a:t>Safeguard to plan</a:t>
             </a:r>
-            <a:endParaRPr lang="en-US" sz="1300" dirty="0"/>
+            <a:endParaRPr lang="en-US" sz="1220" dirty="0"/>
           </a:p>
         </p:txBody>
       </p:sp>
@@ -3644,8 +3644,8 @@
         </p:nvSpPr>
         <p:spPr>
           <a:xfrm>
-            <a:off x="7799832" y="4818888"/>
-            <a:ext cx="3145536" cy="688543"/>
+            <a:off x="7708392" y="4828032"/>
+            <a:ext cx="3282696" cy="749808"/>
           </a:xfrm>
           <a:prstGeom prst="rect">
             <a:avLst/>
@@ -3663,7 +3663,7 @@
               <a:buNone/>
             </a:pPr>
             <a:r>
-              <a:rPr lang="en-US" sz="1320" dirty="0">
+              <a:rPr lang="en-US" sz="1220" dirty="0">
                 <a:solidFill>
                   <a:srgbClr val="17364A"/>
                 </a:solidFill>
@@ -3671,9 +3671,9 @@
                 <a:ea typeface="Aptos" pitchFamily="34" charset="-122"/>
                 <a:cs typeface="Aptos" pitchFamily="34" charset="-120"/>
               </a:rPr>
-              <a:t>Identify what could go wrong, who could be affected, what safeguards are needed, and what evidence should be reviewed before use.</a:t>
-            </a:r>
-            <a:endParaRPr lang="en-US" sz="1320" dirty="0"/>
+              <a:t>Identify what could go wrong, who could be affected, what safeguards are needed,.</a:t>
+            </a:r>
+            <a:endParaRPr lang="en-US" sz="1220" dirty="0"/>
           </a:p>
         </p:txBody>
       </p:sp>
@@ -3964,8 +3964,8 @@
         </p:nvSpPr>
         <p:spPr>
           <a:xfrm>
-            <a:off x="868680" y="1508760"/>
-            <a:ext cx="6309360" cy="4160520"/>
+            <a:off x="822960" y="1463040"/>
+            <a:ext cx="6565392" cy="4343400"/>
           </a:xfrm>
           <a:prstGeom prst="rect">
             <a:avLst/>
@@ -3983,7 +3983,7 @@
               <a:buNone/>
             </a:pPr>
             <a:r>
-              <a:rPr lang="en-US" sz="2100" dirty="0">
+              <a:rPr lang="en-US" sz="1920" dirty="0">
                 <a:solidFill>
                   <a:srgbClr val="003A63"/>
                 </a:solidFill>
@@ -3991,16 +3991,16 @@
                 <a:ea typeface="Aptos" pitchFamily="34" charset="-122"/>
                 <a:cs typeface="Aptos" pitchFamily="34" charset="-120"/>
               </a:rPr>
-              <a:t>• Launching despite unresolved issues that affect safety, equity, or documentation.</a:t>
-            </a:r>
-            <a:endParaRPr lang="en-US" sz="2100" dirty="0"/>
-          </a:p>
-          <a:p>
-            <a:pPr indent="0" marL="0">
-              <a:buNone/>
-            </a:pPr>
-            <a:r>
-              <a:rPr lang="en-US" sz="2100" dirty="0">
+              <a:t>• Launching despite unresolved issues that affect safety, equity, or.</a:t>
+            </a:r>
+            <a:endParaRPr lang="en-US" sz="1920" dirty="0"/>
+          </a:p>
+          <a:p>
+            <a:pPr indent="0" marL="0">
+              <a:buNone/>
+            </a:pPr>
+            <a:r>
+              <a:rPr lang="en-US" sz="1920" dirty="0">
                 <a:solidFill>
                   <a:srgbClr val="003A63"/>
                 </a:solidFill>
@@ -4010,14 +4010,14 @@
               </a:rPr>
               <a:t>• Treating model validation as a substitute for workflow acceptance testing.</a:t>
             </a:r>
-            <a:endParaRPr lang="en-US" sz="2100" dirty="0"/>
-          </a:p>
-          <a:p>
-            <a:pPr indent="0" marL="0">
-              <a:buNone/>
-            </a:pPr>
-            <a:r>
-              <a:rPr lang="en-US" sz="2100" dirty="0">
+            <a:endParaRPr lang="en-US" sz="1920" dirty="0"/>
+          </a:p>
+          <a:p>
+            <a:pPr indent="0" marL="0">
+              <a:buNone/>
+            </a:pPr>
+            <a:r>
+              <a:rPr lang="en-US" sz="1920" dirty="0">
                 <a:solidFill>
                   <a:srgbClr val="003A63"/>
                 </a:solidFill>
@@ -4025,9 +4025,9 @@
                 <a:ea typeface="Aptos" pitchFamily="34" charset="-122"/>
                 <a:cs typeface="Aptos" pitchFamily="34" charset="-120"/>
               </a:rPr>
-              <a:t>• Failing to test override, escalation, fallback, and accessibility requirements.</a:t>
-            </a:r>
-            <a:endParaRPr lang="en-US" sz="2100" dirty="0"/>
+              <a:t>• Failing to test override, escalation, fallback, and accessibility.</a:t>
+            </a:r>
+            <a:endParaRPr lang="en-US" sz="1920" dirty="0"/>
           </a:p>
         </p:txBody>
       </p:sp>
@@ -4039,12 +4039,12 @@
         </p:nvSpPr>
         <p:spPr>
           <a:xfrm>
-            <a:off x="7635240" y="1325880"/>
-            <a:ext cx="3474720" cy="1207008"/>
+            <a:off x="7543800" y="1325880"/>
+            <a:ext cx="3611880" cy="1261872"/>
           </a:xfrm>
           <a:prstGeom prst="roundRect">
             <a:avLst>
-              <a:gd name="adj" fmla="val 9091"/>
+              <a:gd name="adj" fmla="val 8696"/>
             </a:avLst>
           </a:prstGeom>
           <a:solidFill>
@@ -4066,8 +4066,8 @@
         </p:nvSpPr>
         <p:spPr>
           <a:xfrm>
-            <a:off x="7799832" y="1472184"/>
-            <a:ext cx="3145536" cy="256032"/>
+            <a:off x="7708392" y="1453896"/>
+            <a:ext cx="3282696" cy="228600"/>
           </a:xfrm>
           <a:prstGeom prst="rect">
             <a:avLst/>
@@ -4083,7 +4083,7 @@
               <a:buNone/>
             </a:pPr>
             <a:r>
-              <a:rPr lang="en-US" sz="1300" b="1" dirty="0">
+              <a:rPr lang="en-US" sz="1220" b="1" dirty="0">
                 <a:solidFill>
                   <a:srgbClr val="0068B7"/>
                 </a:solidFill>
@@ -4093,7 +4093,7 @@
               </a:rPr>
               <a:t>Risk check</a:t>
             </a:r>
-            <a:endParaRPr lang="en-US" sz="1300" dirty="0"/>
+            <a:endParaRPr lang="en-US" sz="1220" dirty="0"/>
           </a:p>
         </p:txBody>
       </p:sp>
@@ -4105,8 +4105,8 @@
         </p:nvSpPr>
         <p:spPr>
           <a:xfrm>
-            <a:off x="7799832" y="1801368"/>
-            <a:ext cx="3145536" cy="640080"/>
+            <a:off x="7708392" y="1764792"/>
+            <a:ext cx="3282696" cy="749808"/>
           </a:xfrm>
           <a:prstGeom prst="rect">
             <a:avLst/>
@@ -4124,7 +4124,7 @@
               <a:buNone/>
             </a:pPr>
             <a:r>
-              <a:rPr lang="en-US" sz="1320" dirty="0">
+              <a:rPr lang="en-US" sz="1220" dirty="0">
                 <a:solidFill>
                   <a:srgbClr val="17364A"/>
                 </a:solidFill>
@@ -4134,7 +4134,7 @@
               </a:rPr>
               <a:t>Launching despite unresolved issues that affect safety, equity, or documentation.</a:t>
             </a:r>
-            <a:endParaRPr lang="en-US" sz="1320" dirty="0"/>
+            <a:endParaRPr lang="en-US" sz="1220" dirty="0"/>
           </a:p>
         </p:txBody>
       </p:sp>
@@ -4146,12 +4146,12 @@
         </p:nvSpPr>
         <p:spPr>
           <a:xfrm>
-            <a:off x="7635240" y="2670048"/>
-            <a:ext cx="3474720" cy="1536192"/>
+            <a:off x="7543800" y="2724912"/>
+            <a:ext cx="3611880" cy="1527048"/>
           </a:xfrm>
           <a:prstGeom prst="roundRect">
             <a:avLst>
-              <a:gd name="adj" fmla="val 7143"/>
+              <a:gd name="adj" fmla="val 7186"/>
             </a:avLst>
           </a:prstGeom>
           <a:solidFill>
@@ -4173,8 +4173,8 @@
         </p:nvSpPr>
         <p:spPr>
           <a:xfrm>
-            <a:off x="7799832" y="2816352"/>
-            <a:ext cx="3145536" cy="256032"/>
+            <a:off x="7708392" y="2852928"/>
+            <a:ext cx="3282696" cy="228600"/>
           </a:xfrm>
           <a:prstGeom prst="rect">
             <a:avLst/>
@@ -4190,7 +4190,7 @@
               <a:buNone/>
             </a:pPr>
             <a:r>
-              <a:rPr lang="en-US" sz="1300" b="1" dirty="0">
+              <a:rPr lang="en-US" sz="1220" b="1" dirty="0">
                 <a:solidFill>
                   <a:srgbClr val="0068B7"/>
                 </a:solidFill>
@@ -4200,7 +4200,7 @@
               </a:rPr>
               <a:t>Concept checkpoints</a:t>
             </a:r>
-            <a:endParaRPr lang="en-US" sz="1300" dirty="0"/>
+            <a:endParaRPr lang="en-US" sz="1220" dirty="0"/>
           </a:p>
         </p:txBody>
       </p:sp>
@@ -4212,8 +4212,8 @@
         </p:nvSpPr>
         <p:spPr>
           <a:xfrm>
-            <a:off x="7818120" y="3182112"/>
-            <a:ext cx="3090672" cy="877824"/>
+            <a:off x="7726680" y="3182112"/>
+            <a:ext cx="3227832" cy="960120"/>
           </a:xfrm>
           <a:prstGeom prst="rect">
             <a:avLst/>
@@ -4231,7 +4231,7 @@
               <a:buNone/>
             </a:pPr>
             <a:r>
-              <a:rPr lang="en-US" sz="1220" dirty="0">
+              <a:rPr lang="en-US" sz="1140" dirty="0">
                 <a:solidFill>
                   <a:srgbClr val="17364A"/>
                 </a:solidFill>
@@ -4239,16 +4239,16 @@
                 <a:ea typeface="Aptos" pitchFamily="34" charset="-122"/>
                 <a:cs typeface="Aptos" pitchFamily="34" charset="-120"/>
               </a:rPr>
-              <a:t>Launching despite unresolved issues that affect safety, equity, or.</a:t>
-            </a:r>
-            <a:endParaRPr lang="en-US" sz="1220" dirty="0"/>
-          </a:p>
-          <a:p>
-            <a:pPr indent="0" marL="0">
-              <a:buNone/>
-            </a:pPr>
-            <a:r>
-              <a:rPr lang="en-US" sz="1220" dirty="0">
+              <a:t>Launching despite unresolved issues that affect.</a:t>
+            </a:r>
+            <a:endParaRPr lang="en-US" sz="1140" dirty="0"/>
+          </a:p>
+          <a:p>
+            <a:pPr indent="0" marL="0">
+              <a:buNone/>
+            </a:pPr>
+            <a:r>
+              <a:rPr lang="en-US" sz="1140" dirty="0">
                 <a:solidFill>
                   <a:srgbClr val="17364A"/>
                 </a:solidFill>
@@ -4256,16 +4256,16 @@
                 <a:ea typeface="Aptos" pitchFamily="34" charset="-122"/>
                 <a:cs typeface="Aptos" pitchFamily="34" charset="-120"/>
               </a:rPr>
-              <a:t>Treating model validation as a substitute for workflow acceptance.</a:t>
-            </a:r>
-            <a:endParaRPr lang="en-US" sz="1220" dirty="0"/>
-          </a:p>
-          <a:p>
-            <a:pPr indent="0" marL="0">
-              <a:buNone/>
-            </a:pPr>
-            <a:r>
-              <a:rPr lang="en-US" sz="1220" dirty="0">
+              <a:t>Treating model validation as a substitute for.</a:t>
+            </a:r>
+            <a:endParaRPr lang="en-US" sz="1140" dirty="0"/>
+          </a:p>
+          <a:p>
+            <a:pPr indent="0" marL="0">
+              <a:buNone/>
+            </a:pPr>
+            <a:r>
+              <a:rPr lang="en-US" sz="1140" dirty="0">
                 <a:solidFill>
                   <a:srgbClr val="17364A"/>
                 </a:solidFill>
@@ -4273,9 +4273,9 @@
                 <a:ea typeface="Aptos" pitchFamily="34" charset="-122"/>
                 <a:cs typeface="Aptos" pitchFamily="34" charset="-120"/>
               </a:rPr>
-              <a:t>Failing to test override, escalation, fallback, and accessibility.</a:t>
-            </a:r>
-            <a:endParaRPr lang="en-US" sz="1220" dirty="0"/>
+              <a:t>Failing to test override, escalation, fallback,.</a:t>
+            </a:r>
+            <a:endParaRPr lang="en-US" sz="1140" dirty="0"/>
           </a:p>
         </p:txBody>
       </p:sp>
@@ -4287,12 +4287,12 @@
         </p:nvSpPr>
         <p:spPr>
           <a:xfrm>
-            <a:off x="7635240" y="4343400"/>
-            <a:ext cx="3474720" cy="1255471"/>
+            <a:off x="7543800" y="4389120"/>
+            <a:ext cx="3611880" cy="1261872"/>
           </a:xfrm>
           <a:prstGeom prst="roundRect">
             <a:avLst>
-              <a:gd name="adj" fmla="val 8740"/>
+              <a:gd name="adj" fmla="val 8696"/>
             </a:avLst>
           </a:prstGeom>
           <a:solidFill>
@@ -4314,8 +4314,8 @@
         </p:nvSpPr>
         <p:spPr>
           <a:xfrm>
-            <a:off x="7799832" y="4489704"/>
-            <a:ext cx="3145536" cy="256032"/>
+            <a:off x="7708392" y="4517136"/>
+            <a:ext cx="3282696" cy="228600"/>
           </a:xfrm>
           <a:prstGeom prst="rect">
             <a:avLst/>
@@ -4331,7 +4331,7 @@
               <a:buNone/>
             </a:pPr>
             <a:r>
-              <a:rPr lang="en-US" sz="1300" b="1" dirty="0">
+              <a:rPr lang="en-US" sz="1220" b="1" dirty="0">
                 <a:solidFill>
                   <a:srgbClr val="0068B7"/>
                 </a:solidFill>
@@ -4341,7 +4341,7 @@
               </a:rPr>
               <a:t>Safeguard to plan</a:t>
             </a:r>
-            <a:endParaRPr lang="en-US" sz="1300" dirty="0"/>
+            <a:endParaRPr lang="en-US" sz="1220" dirty="0"/>
           </a:p>
         </p:txBody>
       </p:sp>
@@ -4353,8 +4353,8 @@
         </p:nvSpPr>
         <p:spPr>
           <a:xfrm>
-            <a:off x="7799832" y="4818888"/>
-            <a:ext cx="3145536" cy="688543"/>
+            <a:off x="7708392" y="4828032"/>
+            <a:ext cx="3282696" cy="749808"/>
           </a:xfrm>
           <a:prstGeom prst="rect">
             <a:avLst/>
@@ -4372,7 +4372,7 @@
               <a:buNone/>
             </a:pPr>
             <a:r>
-              <a:rPr lang="en-US" sz="1320" dirty="0">
+              <a:rPr lang="en-US" sz="1220" dirty="0">
                 <a:solidFill>
                   <a:srgbClr val="17364A"/>
                 </a:solidFill>
@@ -4380,9 +4380,9 @@
                 <a:ea typeface="Aptos" pitchFamily="34" charset="-122"/>
                 <a:cs typeface="Aptos" pitchFamily="34" charset="-120"/>
               </a:rPr>
-              <a:t>Identify what could go wrong, who could be affected, what safeguards are needed, and what evidence should be reviewed before use.</a:t>
-            </a:r>
-            <a:endParaRPr lang="en-US" sz="1320" dirty="0"/>
+              <a:t>Identify what could go wrong, who could be affected, what safeguards are needed,.</a:t>
+            </a:r>
+            <a:endParaRPr lang="en-US" sz="1220" dirty="0"/>
           </a:p>
         </p:txBody>
       </p:sp>
@@ -4673,8 +4673,8 @@
         </p:nvSpPr>
         <p:spPr>
           <a:xfrm>
-            <a:off x="868680" y="1508760"/>
-            <a:ext cx="6309360" cy="4160520"/>
+            <a:off x="822960" y="1463040"/>
+            <a:ext cx="6565392" cy="4343400"/>
           </a:xfrm>
           <a:prstGeom prst="rect">
             <a:avLst/>
@@ -4692,7 +4692,7 @@
               <a:buNone/>
             </a:pPr>
             <a:r>
-              <a:rPr lang="en-US" sz="2100" dirty="0">
+              <a:rPr lang="en-US" sz="1920" dirty="0">
                 <a:solidFill>
                   <a:srgbClr val="003A63"/>
                 </a:solidFill>
@@ -4702,14 +4702,14 @@
               </a:rPr>
               <a:t>• Recommended guardrails include the following:</a:t>
             </a:r>
-            <a:endParaRPr lang="en-US" sz="2100" dirty="0"/>
-          </a:p>
-          <a:p>
-            <a:pPr indent="0" marL="0">
-              <a:buNone/>
-            </a:pPr>
-            <a:r>
-              <a:rPr lang="en-US" sz="2100" dirty="0">
+            <a:endParaRPr lang="en-US" sz="1920" dirty="0"/>
+          </a:p>
+          <a:p>
+            <a:pPr indent="0" marL="0">
+              <a:buNone/>
+            </a:pPr>
+            <a:r>
+              <a:rPr lang="en-US" sz="1920" dirty="0">
                 <a:solidFill>
                   <a:srgbClr val="003A63"/>
                 </a:solidFill>
@@ -4719,14 +4719,14 @@
               </a:rPr>
               <a:t>• Develop role-based UAT scripts before launch.</a:t>
             </a:r>
-            <a:endParaRPr lang="en-US" sz="2100" dirty="0"/>
-          </a:p>
-          <a:p>
-            <a:pPr indent="0" marL="0">
-              <a:buNone/>
-            </a:pPr>
-            <a:r>
-              <a:rPr lang="en-US" sz="2100" dirty="0">
+            <a:endParaRPr lang="en-US" sz="1920" dirty="0"/>
+          </a:p>
+          <a:p>
+            <a:pPr indent="0" marL="0">
+              <a:buNone/>
+            </a:pPr>
+            <a:r>
+              <a:rPr lang="en-US" sz="1920" dirty="0">
                 <a:solidFill>
                   <a:srgbClr val="003A63"/>
                 </a:solidFill>
@@ -4736,7 +4736,7 @@
               </a:rPr>
               <a:t>• Include routine, edge, failure, and equity-sensitive cases.</a:t>
             </a:r>
-            <a:endParaRPr lang="en-US" sz="2100" dirty="0"/>
+            <a:endParaRPr lang="en-US" sz="1920" dirty="0"/>
           </a:p>
         </p:txBody>
       </p:sp>
@@ -4748,12 +4748,12 @@
         </p:nvSpPr>
         <p:spPr>
           <a:xfrm>
-            <a:off x="7635240" y="1325880"/>
-            <a:ext cx="3474720" cy="1207008"/>
+            <a:off x="7543800" y="1325880"/>
+            <a:ext cx="3611880" cy="1261872"/>
           </a:xfrm>
           <a:prstGeom prst="roundRect">
             <a:avLst>
-              <a:gd name="adj" fmla="val 9091"/>
+              <a:gd name="adj" fmla="val 8696"/>
             </a:avLst>
           </a:prstGeom>
           <a:solidFill>
@@ -4775,8 +4775,8 @@
         </p:nvSpPr>
         <p:spPr>
           <a:xfrm>
-            <a:off x="7799832" y="1472184"/>
-            <a:ext cx="3145536" cy="256032"/>
+            <a:off x="7708392" y="1453896"/>
+            <a:ext cx="3282696" cy="228600"/>
           </a:xfrm>
           <a:prstGeom prst="rect">
             <a:avLst/>
@@ -4792,7 +4792,7 @@
               <a:buNone/>
             </a:pPr>
             <a:r>
-              <a:rPr lang="en-US" sz="1300" b="1" dirty="0">
+              <a:rPr lang="en-US" sz="1220" b="1" dirty="0">
                 <a:solidFill>
                   <a:srgbClr val="0068B7"/>
                 </a:solidFill>
@@ -4802,7 +4802,7 @@
               </a:rPr>
               <a:t>Risk check</a:t>
             </a:r>
-            <a:endParaRPr lang="en-US" sz="1300" dirty="0"/>
+            <a:endParaRPr lang="en-US" sz="1220" dirty="0"/>
           </a:p>
         </p:txBody>
       </p:sp>
@@ -4814,8 +4814,8 @@
         </p:nvSpPr>
         <p:spPr>
           <a:xfrm>
-            <a:off x="7799832" y="1801368"/>
-            <a:ext cx="3145536" cy="640080"/>
+            <a:off x="7708392" y="1764792"/>
+            <a:ext cx="3282696" cy="749808"/>
           </a:xfrm>
           <a:prstGeom prst="rect">
             <a:avLst/>
@@ -4833,7 +4833,7 @@
               <a:buNone/>
             </a:pPr>
             <a:r>
-              <a:rPr lang="en-US" sz="1320" dirty="0">
+              <a:rPr lang="en-US" sz="1220" dirty="0">
                 <a:solidFill>
                   <a:srgbClr val="17364A"/>
                 </a:solidFill>
@@ -4843,7 +4843,7 @@
               </a:rPr>
               <a:t>Recommended guardrails include the following:</a:t>
             </a:r>
-            <a:endParaRPr lang="en-US" sz="1320" dirty="0"/>
+            <a:endParaRPr lang="en-US" sz="1220" dirty="0"/>
           </a:p>
         </p:txBody>
       </p:sp>
@@ -4855,12 +4855,12 @@
         </p:nvSpPr>
         <p:spPr>
           <a:xfrm>
-            <a:off x="7635240" y="2670048"/>
-            <a:ext cx="3474720" cy="1536192"/>
+            <a:off x="7543800" y="2724912"/>
+            <a:ext cx="3611880" cy="1527048"/>
           </a:xfrm>
           <a:prstGeom prst="roundRect">
             <a:avLst>
-              <a:gd name="adj" fmla="val 7143"/>
+              <a:gd name="adj" fmla="val 7186"/>
             </a:avLst>
           </a:prstGeom>
           <a:solidFill>
@@ -4882,8 +4882,8 @@
         </p:nvSpPr>
         <p:spPr>
           <a:xfrm>
-            <a:off x="7799832" y="2816352"/>
-            <a:ext cx="3145536" cy="256032"/>
+            <a:off x="7708392" y="2852928"/>
+            <a:ext cx="3282696" cy="228600"/>
           </a:xfrm>
           <a:prstGeom prst="rect">
             <a:avLst/>
@@ -4899,7 +4899,7 @@
               <a:buNone/>
             </a:pPr>
             <a:r>
-              <a:rPr lang="en-US" sz="1300" b="1" dirty="0">
+              <a:rPr lang="en-US" sz="1220" b="1" dirty="0">
                 <a:solidFill>
                   <a:srgbClr val="0068B7"/>
                 </a:solidFill>
@@ -4909,7 +4909,7 @@
               </a:rPr>
               <a:t>Concept checkpoints</a:t>
             </a:r>
-            <a:endParaRPr lang="en-US" sz="1300" dirty="0"/>
+            <a:endParaRPr lang="en-US" sz="1220" dirty="0"/>
           </a:p>
         </p:txBody>
       </p:sp>
@@ -4921,8 +4921,8 @@
         </p:nvSpPr>
         <p:spPr>
           <a:xfrm>
-            <a:off x="7818120" y="3182112"/>
-            <a:ext cx="3090672" cy="877824"/>
+            <a:off x="7726680" y="3182112"/>
+            <a:ext cx="3227832" cy="960120"/>
           </a:xfrm>
           <a:prstGeom prst="rect">
             <a:avLst/>
@@ -4940,7 +4940,7 @@
               <a:buNone/>
             </a:pPr>
             <a:r>
-              <a:rPr lang="en-US" sz="1220" dirty="0">
+              <a:rPr lang="en-US" sz="1140" dirty="0">
                 <a:solidFill>
                   <a:srgbClr val="17364A"/>
                 </a:solidFill>
@@ -4950,14 +4950,14 @@
               </a:rPr>
               <a:t>Recommended guardrails include the following:</a:t>
             </a:r>
-            <a:endParaRPr lang="en-US" sz="1220" dirty="0"/>
-          </a:p>
-          <a:p>
-            <a:pPr indent="0" marL="0">
-              <a:buNone/>
-            </a:pPr>
-            <a:r>
-              <a:rPr lang="en-US" sz="1220" dirty="0">
+            <a:endParaRPr lang="en-US" sz="1140" dirty="0"/>
+          </a:p>
+          <a:p>
+            <a:pPr indent="0" marL="0">
+              <a:buNone/>
+            </a:pPr>
+            <a:r>
+              <a:rPr lang="en-US" sz="1140" dirty="0">
                 <a:solidFill>
                   <a:srgbClr val="17364A"/>
                 </a:solidFill>
@@ -4967,14 +4967,14 @@
               </a:rPr>
               <a:t>Develop role-based UAT scripts before launch.</a:t>
             </a:r>
-            <a:endParaRPr lang="en-US" sz="1220" dirty="0"/>
-          </a:p>
-          <a:p>
-            <a:pPr indent="0" marL="0">
-              <a:buNone/>
-            </a:pPr>
-            <a:r>
-              <a:rPr lang="en-US" sz="1220" dirty="0">
+            <a:endParaRPr lang="en-US" sz="1140" dirty="0"/>
+          </a:p>
+          <a:p>
+            <a:pPr indent="0" marL="0">
+              <a:buNone/>
+            </a:pPr>
+            <a:r>
+              <a:rPr lang="en-US" sz="1140" dirty="0">
                 <a:solidFill>
                   <a:srgbClr val="17364A"/>
                 </a:solidFill>
@@ -4982,9 +4982,9 @@
                 <a:ea typeface="Aptos" pitchFamily="34" charset="-122"/>
                 <a:cs typeface="Aptos" pitchFamily="34" charset="-120"/>
               </a:rPr>
-              <a:t>Include routine, edge, failure, and equity-sensitive cases.</a:t>
-            </a:r>
-            <a:endParaRPr lang="en-US" sz="1220" dirty="0"/>
+              <a:t>Include routine, edge, failure, and.</a:t>
+            </a:r>
+            <a:endParaRPr lang="en-US" sz="1140" dirty="0"/>
           </a:p>
         </p:txBody>
       </p:sp>
@@ -4996,12 +4996,12 @@
         </p:nvSpPr>
         <p:spPr>
           <a:xfrm>
-            <a:off x="7635240" y="4343400"/>
-            <a:ext cx="3474720" cy="1255471"/>
+            <a:off x="7543800" y="4389120"/>
+            <a:ext cx="3611880" cy="1261872"/>
           </a:xfrm>
           <a:prstGeom prst="roundRect">
             <a:avLst>
-              <a:gd name="adj" fmla="val 8740"/>
+              <a:gd name="adj" fmla="val 8696"/>
             </a:avLst>
           </a:prstGeom>
           <a:solidFill>
@@ -5023,8 +5023,8 @@
         </p:nvSpPr>
         <p:spPr>
           <a:xfrm>
-            <a:off x="7799832" y="4489704"/>
-            <a:ext cx="3145536" cy="256032"/>
+            <a:off x="7708392" y="4517136"/>
+            <a:ext cx="3282696" cy="228600"/>
           </a:xfrm>
           <a:prstGeom prst="rect">
             <a:avLst/>
@@ -5040,7 +5040,7 @@
               <a:buNone/>
             </a:pPr>
             <a:r>
-              <a:rPr lang="en-US" sz="1300" b="1" dirty="0">
+              <a:rPr lang="en-US" sz="1220" b="1" dirty="0">
                 <a:solidFill>
                   <a:srgbClr val="0068B7"/>
                 </a:solidFill>
@@ -5050,7 +5050,7 @@
               </a:rPr>
               <a:t>Safeguard to plan</a:t>
             </a:r>
-            <a:endParaRPr lang="en-US" sz="1300" dirty="0"/>
+            <a:endParaRPr lang="en-US" sz="1220" dirty="0"/>
           </a:p>
         </p:txBody>
       </p:sp>
@@ -5062,8 +5062,8 @@
         </p:nvSpPr>
         <p:spPr>
           <a:xfrm>
-            <a:off x="7799832" y="4818888"/>
-            <a:ext cx="3145536" cy="688543"/>
+            <a:off x="7708392" y="4828032"/>
+            <a:ext cx="3282696" cy="749808"/>
           </a:xfrm>
           <a:prstGeom prst="rect">
             <a:avLst/>
@@ -5081,7 +5081,7 @@
               <a:buNone/>
             </a:pPr>
             <a:r>
-              <a:rPr lang="en-US" sz="1320" dirty="0">
+              <a:rPr lang="en-US" sz="1220" dirty="0">
                 <a:solidFill>
                   <a:srgbClr val="17364A"/>
                 </a:solidFill>
@@ -5089,9 +5089,9 @@
                 <a:ea typeface="Aptos" pitchFamily="34" charset="-122"/>
                 <a:cs typeface="Aptos" pitchFamily="34" charset="-120"/>
               </a:rPr>
-              <a:t>Identify what could go wrong, who could be affected, what safeguards are needed, and what evidence should be reviewed before use.</a:t>
-            </a:r>
-            <a:endParaRPr lang="en-US" sz="1320" dirty="0"/>
+              <a:t>Identify what could go wrong, who could be affected, what safeguards are needed,.</a:t>
+            </a:r>
+            <a:endParaRPr lang="en-US" sz="1220" dirty="0"/>
           </a:p>
         </p:txBody>
       </p:sp>
@@ -5382,8 +5382,8 @@
         </p:nvSpPr>
         <p:spPr>
           <a:xfrm>
-            <a:off x="868680" y="1508760"/>
-            <a:ext cx="6309360" cy="4160520"/>
+            <a:off x="822960" y="1463040"/>
+            <a:ext cx="6565392" cy="4343400"/>
           </a:xfrm>
           <a:prstGeom prst="rect">
             <a:avLst/>
@@ -5401,7 +5401,7 @@
               <a:buNone/>
             </a:pPr>
             <a:r>
-              <a:rPr lang="en-US" sz="2100" dirty="0">
+              <a:rPr lang="en-US" sz="1920" dirty="0">
                 <a:solidFill>
                   <a:srgbClr val="003A63"/>
                 </a:solidFill>
@@ -5411,14 +5411,14 @@
               </a:rPr>
               <a:t>• Define acceptance criteria before testing.</a:t>
             </a:r>
-            <a:endParaRPr lang="en-US" sz="2100" dirty="0"/>
-          </a:p>
-          <a:p>
-            <a:pPr indent="0" marL="0">
-              <a:buNone/>
-            </a:pPr>
-            <a:r>
-              <a:rPr lang="en-US" sz="2100" dirty="0">
+            <a:endParaRPr lang="en-US" sz="1920" dirty="0"/>
+          </a:p>
+          <a:p>
+            <a:pPr indent="0" marL="0">
+              <a:buNone/>
+            </a:pPr>
+            <a:r>
+              <a:rPr lang="en-US" sz="1920" dirty="0">
                 <a:solidFill>
                   <a:srgbClr val="003A63"/>
                 </a:solidFill>
@@ -5428,14 +5428,14 @@
               </a:rPr>
               <a:t>• Track issues by severity, owner, and resolution status.</a:t>
             </a:r>
-            <a:endParaRPr lang="en-US" sz="2100" dirty="0"/>
-          </a:p>
-          <a:p>
-            <a:pPr indent="0" marL="0">
-              <a:buNone/>
-            </a:pPr>
-            <a:r>
-              <a:rPr lang="en-US" sz="2100" dirty="0">
+            <a:endParaRPr lang="en-US" sz="1920" dirty="0"/>
+          </a:p>
+          <a:p>
+            <a:pPr indent="0" marL="0">
+              <a:buNone/>
+            </a:pPr>
+            <a:r>
+              <a:rPr lang="en-US" sz="1920" dirty="0">
                 <a:solidFill>
                   <a:srgbClr val="003A63"/>
                 </a:solidFill>
@@ -5445,7 +5445,7 @@
               </a:rPr>
               <a:t>• Require documented sign-off or remediation before deployment.</a:t>
             </a:r>
-            <a:endParaRPr lang="en-US" sz="2100" dirty="0"/>
+            <a:endParaRPr lang="en-US" sz="1920" dirty="0"/>
           </a:p>
         </p:txBody>
       </p:sp>
@@ -5457,12 +5457,12 @@
         </p:nvSpPr>
         <p:spPr>
           <a:xfrm>
-            <a:off x="7635240" y="1325880"/>
-            <a:ext cx="3474720" cy="1207008"/>
+            <a:off x="7543800" y="1325880"/>
+            <a:ext cx="3611880" cy="1261872"/>
           </a:xfrm>
           <a:prstGeom prst="roundRect">
             <a:avLst>
-              <a:gd name="adj" fmla="val 9091"/>
+              <a:gd name="adj" fmla="val 8696"/>
             </a:avLst>
           </a:prstGeom>
           <a:solidFill>
@@ -5484,8 +5484,8 @@
         </p:nvSpPr>
         <p:spPr>
           <a:xfrm>
-            <a:off x="7799832" y="1472184"/>
-            <a:ext cx="3145536" cy="256032"/>
+            <a:off x="7708392" y="1453896"/>
+            <a:ext cx="3282696" cy="228600"/>
           </a:xfrm>
           <a:prstGeom prst="rect">
             <a:avLst/>
@@ -5501,7 +5501,7 @@
               <a:buNone/>
             </a:pPr>
             <a:r>
-              <a:rPr lang="en-US" sz="1300" b="1" dirty="0">
+              <a:rPr lang="en-US" sz="1220" b="1" dirty="0">
                 <a:solidFill>
                   <a:srgbClr val="0068B7"/>
                 </a:solidFill>
@@ -5511,7 +5511,7 @@
               </a:rPr>
               <a:t>Risk check</a:t>
             </a:r>
-            <a:endParaRPr lang="en-US" sz="1300" dirty="0"/>
+            <a:endParaRPr lang="en-US" sz="1220" dirty="0"/>
           </a:p>
         </p:txBody>
       </p:sp>
@@ -5523,8 +5523,8 @@
         </p:nvSpPr>
         <p:spPr>
           <a:xfrm>
-            <a:off x="7799832" y="1801368"/>
-            <a:ext cx="3145536" cy="640080"/>
+            <a:off x="7708392" y="1764792"/>
+            <a:ext cx="3282696" cy="749808"/>
           </a:xfrm>
           <a:prstGeom prst="rect">
             <a:avLst/>
@@ -5542,7 +5542,7 @@
               <a:buNone/>
             </a:pPr>
             <a:r>
-              <a:rPr lang="en-US" sz="1320" dirty="0">
+              <a:rPr lang="en-US" sz="1220" dirty="0">
                 <a:solidFill>
                   <a:srgbClr val="17364A"/>
                 </a:solidFill>
@@ -5552,7 +5552,7 @@
               </a:rPr>
               <a:t>Define acceptance criteria before testing.</a:t>
             </a:r>
-            <a:endParaRPr lang="en-US" sz="1320" dirty="0"/>
+            <a:endParaRPr lang="en-US" sz="1220" dirty="0"/>
           </a:p>
         </p:txBody>
       </p:sp>
@@ -5564,12 +5564,12 @@
         </p:nvSpPr>
         <p:spPr>
           <a:xfrm>
-            <a:off x="7635240" y="2670048"/>
-            <a:ext cx="3474720" cy="1536192"/>
+            <a:off x="7543800" y="2724912"/>
+            <a:ext cx="3611880" cy="1527048"/>
           </a:xfrm>
           <a:prstGeom prst="roundRect">
             <a:avLst>
-              <a:gd name="adj" fmla="val 7143"/>
+              <a:gd name="adj" fmla="val 7186"/>
             </a:avLst>
           </a:prstGeom>
           <a:solidFill>
@@ -5591,8 +5591,8 @@
         </p:nvSpPr>
         <p:spPr>
           <a:xfrm>
-            <a:off x="7799832" y="2816352"/>
-            <a:ext cx="3145536" cy="256032"/>
+            <a:off x="7708392" y="2852928"/>
+            <a:ext cx="3282696" cy="228600"/>
           </a:xfrm>
           <a:prstGeom prst="rect">
             <a:avLst/>
@@ -5608,7 +5608,7 @@
               <a:buNone/>
             </a:pPr>
             <a:r>
-              <a:rPr lang="en-US" sz="1300" b="1" dirty="0">
+              <a:rPr lang="en-US" sz="1220" b="1" dirty="0">
                 <a:solidFill>
                   <a:srgbClr val="0068B7"/>
                 </a:solidFill>
@@ -5618,7 +5618,7 @@
               </a:rPr>
               <a:t>Concept checkpoints</a:t>
             </a:r>
-            <a:endParaRPr lang="en-US" sz="1300" dirty="0"/>
+            <a:endParaRPr lang="en-US" sz="1220" dirty="0"/>
           </a:p>
         </p:txBody>
       </p:sp>
@@ -5630,8 +5630,8 @@
         </p:nvSpPr>
         <p:spPr>
           <a:xfrm>
-            <a:off x="7818120" y="3182112"/>
-            <a:ext cx="3090672" cy="877824"/>
+            <a:off x="7726680" y="3182112"/>
+            <a:ext cx="3227832" cy="960120"/>
           </a:xfrm>
           <a:prstGeom prst="rect">
             <a:avLst/>
@@ -5649,7 +5649,7 @@
               <a:buNone/>
             </a:pPr>
             <a:r>
-              <a:rPr lang="en-US" sz="1220" dirty="0">
+              <a:rPr lang="en-US" sz="1140" dirty="0">
                 <a:solidFill>
                   <a:srgbClr val="17364A"/>
                 </a:solidFill>
@@ -5659,14 +5659,14 @@
               </a:rPr>
               <a:t>Define acceptance criteria before testing.</a:t>
             </a:r>
-            <a:endParaRPr lang="en-US" sz="1220" dirty="0"/>
-          </a:p>
-          <a:p>
-            <a:pPr indent="0" marL="0">
-              <a:buNone/>
-            </a:pPr>
-            <a:r>
-              <a:rPr lang="en-US" sz="1220" dirty="0">
+            <a:endParaRPr lang="en-US" sz="1140" dirty="0"/>
+          </a:p>
+          <a:p>
+            <a:pPr indent="0" marL="0">
+              <a:buNone/>
+            </a:pPr>
+            <a:r>
+              <a:rPr lang="en-US" sz="1140" dirty="0">
                 <a:solidFill>
                   <a:srgbClr val="17364A"/>
                 </a:solidFill>
@@ -5674,16 +5674,16 @@
                 <a:ea typeface="Aptos" pitchFamily="34" charset="-122"/>
                 <a:cs typeface="Aptos" pitchFamily="34" charset="-120"/>
               </a:rPr>
-              <a:t>Track issues by severity, owner, and resolution status.</a:t>
-            </a:r>
-            <a:endParaRPr lang="en-US" sz="1220" dirty="0"/>
-          </a:p>
-          <a:p>
-            <a:pPr indent="0" marL="0">
-              <a:buNone/>
-            </a:pPr>
-            <a:r>
-              <a:rPr lang="en-US" sz="1220" dirty="0">
+              <a:t>Track issues by severity, owner, and resolution.</a:t>
+            </a:r>
+            <a:endParaRPr lang="en-US" sz="1140" dirty="0"/>
+          </a:p>
+          <a:p>
+            <a:pPr indent="0" marL="0">
+              <a:buNone/>
+            </a:pPr>
+            <a:r>
+              <a:rPr lang="en-US" sz="1140" dirty="0">
                 <a:solidFill>
                   <a:srgbClr val="17364A"/>
                 </a:solidFill>
@@ -5691,9 +5691,9 @@
                 <a:ea typeface="Aptos" pitchFamily="34" charset="-122"/>
                 <a:cs typeface="Aptos" pitchFamily="34" charset="-120"/>
               </a:rPr>
-              <a:t>Require documented sign-off or remediation before deployment.</a:t>
-            </a:r>
-            <a:endParaRPr lang="en-US" sz="1220" dirty="0"/>
+              <a:t>Require documented sign-off or remediation before.</a:t>
+            </a:r>
+            <a:endParaRPr lang="en-US" sz="1140" dirty="0"/>
           </a:p>
         </p:txBody>
       </p:sp>
@@ -5705,12 +5705,12 @@
         </p:nvSpPr>
         <p:spPr>
           <a:xfrm>
-            <a:off x="7635240" y="4343400"/>
-            <a:ext cx="3474720" cy="1255471"/>
+            <a:off x="7543800" y="4389120"/>
+            <a:ext cx="3611880" cy="1261872"/>
           </a:xfrm>
           <a:prstGeom prst="roundRect">
             <a:avLst>
-              <a:gd name="adj" fmla="val 8740"/>
+              <a:gd name="adj" fmla="val 8696"/>
             </a:avLst>
           </a:prstGeom>
           <a:solidFill>
@@ -5732,8 +5732,8 @@
         </p:nvSpPr>
         <p:spPr>
           <a:xfrm>
-            <a:off x="7799832" y="4489704"/>
-            <a:ext cx="3145536" cy="256032"/>
+            <a:off x="7708392" y="4517136"/>
+            <a:ext cx="3282696" cy="228600"/>
           </a:xfrm>
           <a:prstGeom prst="rect">
             <a:avLst/>
@@ -5749,7 +5749,7 @@
               <a:buNone/>
             </a:pPr>
             <a:r>
-              <a:rPr lang="en-US" sz="1300" b="1" dirty="0">
+              <a:rPr lang="en-US" sz="1220" b="1" dirty="0">
                 <a:solidFill>
                   <a:srgbClr val="0068B7"/>
                 </a:solidFill>
@@ -5759,7 +5759,7 @@
               </a:rPr>
               <a:t>Safeguard to plan</a:t>
             </a:r>
-            <a:endParaRPr lang="en-US" sz="1300" dirty="0"/>
+            <a:endParaRPr lang="en-US" sz="1220" dirty="0"/>
           </a:p>
         </p:txBody>
       </p:sp>
@@ -5771,8 +5771,8 @@
         </p:nvSpPr>
         <p:spPr>
           <a:xfrm>
-            <a:off x="7799832" y="4818888"/>
-            <a:ext cx="3145536" cy="688543"/>
+            <a:off x="7708392" y="4828032"/>
+            <a:ext cx="3282696" cy="749808"/>
           </a:xfrm>
           <a:prstGeom prst="rect">
             <a:avLst/>
@@ -5790,7 +5790,7 @@
               <a:buNone/>
             </a:pPr>
             <a:r>
-              <a:rPr lang="en-US" sz="1320" dirty="0">
+              <a:rPr lang="en-US" sz="1220" dirty="0">
                 <a:solidFill>
                   <a:srgbClr val="17364A"/>
                 </a:solidFill>
@@ -5798,9 +5798,9 @@
                 <a:ea typeface="Aptos" pitchFamily="34" charset="-122"/>
                 <a:cs typeface="Aptos" pitchFamily="34" charset="-120"/>
               </a:rPr>
-              <a:t>Identify what could go wrong, who could be affected, what safeguards are needed, and what evidence should be reviewed before use.</a:t>
-            </a:r>
-            <a:endParaRPr lang="en-US" sz="1320" dirty="0"/>
+              <a:t>Identify what could go wrong, who could be affected, what safeguards are needed,.</a:t>
+            </a:r>
+            <a:endParaRPr lang="en-US" sz="1220" dirty="0"/>
           </a:p>
         </p:txBody>
       </p:sp>
@@ -6091,8 +6091,8 @@
         </p:nvSpPr>
         <p:spPr>
           <a:xfrm>
-            <a:off x="868680" y="1508760"/>
-            <a:ext cx="6309360" cy="4160520"/>
+            <a:off x="822960" y="1463040"/>
+            <a:ext cx="6565392" cy="4343400"/>
           </a:xfrm>
           <a:prstGeom prst="rect">
             <a:avLst/>
@@ -6110,7 +6110,7 @@
               <a:buNone/>
             </a:pPr>
             <a:r>
-              <a:rPr lang="en-US" sz="2100" dirty="0">
+              <a:rPr lang="en-US" sz="1920" dirty="0">
                 <a:solidFill>
                   <a:srgbClr val="003A63"/>
                 </a:solidFill>
@@ -6120,14 +6120,14 @@
               </a:rPr>
               <a:t>• Where does this topic appear in your agency, program, or workflow?</a:t>
             </a:r>
-            <a:endParaRPr lang="en-US" sz="2100" dirty="0"/>
-          </a:p>
-          <a:p>
-            <a:pPr indent="0" marL="0">
-              <a:buNone/>
-            </a:pPr>
-            <a:r>
-              <a:rPr lang="en-US" sz="2100" dirty="0">
+            <a:endParaRPr lang="en-US" sz="1920" dirty="0"/>
+          </a:p>
+          <a:p>
+            <a:pPr indent="0" marL="0">
+              <a:buNone/>
+            </a:pPr>
+            <a:r>
+              <a:rPr lang="en-US" sz="1920" dirty="0">
                 <a:solidFill>
                   <a:srgbClr val="003A63"/>
                 </a:solidFill>
@@ -6135,16 +6135,16 @@
                 <a:ea typeface="Aptos" pitchFamily="34" charset="-122"/>
                 <a:cs typeface="Aptos" pitchFamily="34" charset="-120"/>
               </a:rPr>
-              <a:t>• Which staff roles would need to understand or apply this concept before AI use is approved?</a:t>
-            </a:r>
-            <a:endParaRPr lang="en-US" sz="2100" dirty="0"/>
-          </a:p>
-          <a:p>
-            <a:pPr indent="0" marL="0">
-              <a:buNone/>
-            </a:pPr>
-            <a:r>
-              <a:rPr lang="en-US" sz="2100" dirty="0">
+              <a:t>• Which staff roles would need to understand or apply this concept before AI.</a:t>
+            </a:r>
+            <a:endParaRPr lang="en-US" sz="1920" dirty="0"/>
+          </a:p>
+          <a:p>
+            <a:pPr indent="0" marL="0">
+              <a:buNone/>
+            </a:pPr>
+            <a:r>
+              <a:rPr lang="en-US" sz="1920" dirty="0">
                 <a:solidFill>
                   <a:srgbClr val="003A63"/>
                 </a:solidFill>
@@ -6154,7 +6154,7 @@
               </a:rPr>
               <a:t>• What could go wrong if this topic is not addressed before implementation?</a:t>
             </a:r>
-            <a:endParaRPr lang="en-US" sz="2100" dirty="0"/>
+            <a:endParaRPr lang="en-US" sz="1920" dirty="0"/>
           </a:p>
         </p:txBody>
       </p:sp>
@@ -6166,12 +6166,12 @@
         </p:nvSpPr>
         <p:spPr>
           <a:xfrm>
-            <a:off x="7635240" y="1325880"/>
-            <a:ext cx="3474720" cy="1207008"/>
+            <a:off x="7543800" y="1325880"/>
+            <a:ext cx="3611880" cy="1261872"/>
           </a:xfrm>
           <a:prstGeom prst="roundRect">
             <a:avLst>
-              <a:gd name="adj" fmla="val 9091"/>
+              <a:gd name="adj" fmla="val 8696"/>
             </a:avLst>
           </a:prstGeom>
           <a:solidFill>
@@ -6193,8 +6193,8 @@
         </p:nvSpPr>
         <p:spPr>
           <a:xfrm>
-            <a:off x="7799832" y="1472184"/>
-            <a:ext cx="3145536" cy="256032"/>
+            <a:off x="7708392" y="1453896"/>
+            <a:ext cx="3282696" cy="228600"/>
           </a:xfrm>
           <a:prstGeom prst="rect">
             <a:avLst/>
@@ -6210,7 +6210,7 @@
               <a:buNone/>
             </a:pPr>
             <a:r>
-              <a:rPr lang="en-US" sz="1300" b="1" dirty="0">
+              <a:rPr lang="en-US" sz="1220" b="1" dirty="0">
                 <a:solidFill>
                   <a:srgbClr val="0068B7"/>
                 </a:solidFill>
@@ -6220,7 +6220,7 @@
               </a:rPr>
               <a:t>Implementation cue</a:t>
             </a:r>
-            <a:endParaRPr lang="en-US" sz="1300" dirty="0"/>
+            <a:endParaRPr lang="en-US" sz="1220" dirty="0"/>
           </a:p>
         </p:txBody>
       </p:sp>
@@ -6232,8 +6232,8 @@
         </p:nvSpPr>
         <p:spPr>
           <a:xfrm>
-            <a:off x="7799832" y="1801368"/>
-            <a:ext cx="3145536" cy="640080"/>
+            <a:off x="7708392" y="1764792"/>
+            <a:ext cx="3282696" cy="749808"/>
           </a:xfrm>
           <a:prstGeom prst="rect">
             <a:avLst/>
@@ -6251,7 +6251,7 @@
               <a:buNone/>
             </a:pPr>
             <a:r>
-              <a:rPr lang="en-US" sz="1320" dirty="0">
+              <a:rPr lang="en-US" sz="1220" dirty="0">
                 <a:solidFill>
                   <a:srgbClr val="17364A"/>
                 </a:solidFill>
@@ -6261,7 +6261,7 @@
               </a:rPr>
               <a:t>Where does this topic appear in your agency, program, or workflow?</a:t>
             </a:r>
-            <a:endParaRPr lang="en-US" sz="1320" dirty="0"/>
+            <a:endParaRPr lang="en-US" sz="1220" dirty="0"/>
           </a:p>
         </p:txBody>
       </p:sp>
@@ -6273,12 +6273,12 @@
         </p:nvSpPr>
         <p:spPr>
           <a:xfrm>
-            <a:off x="7635240" y="2670048"/>
-            <a:ext cx="3474720" cy="1377086"/>
+            <a:off x="7543800" y="2724912"/>
+            <a:ext cx="3611880" cy="1527048"/>
           </a:xfrm>
           <a:prstGeom prst="roundRect">
             <a:avLst>
-              <a:gd name="adj" fmla="val 7968"/>
+              <a:gd name="adj" fmla="val 7186"/>
             </a:avLst>
           </a:prstGeom>
           <a:solidFill>
@@ -6300,8 +6300,8 @@
         </p:nvSpPr>
         <p:spPr>
           <a:xfrm>
-            <a:off x="7799832" y="2816352"/>
-            <a:ext cx="3145536" cy="256032"/>
+            <a:off x="7708392" y="2852928"/>
+            <a:ext cx="3282696" cy="228600"/>
           </a:xfrm>
           <a:prstGeom prst="rect">
             <a:avLst/>
@@ -6317,7 +6317,7 @@
               <a:buNone/>
             </a:pPr>
             <a:r>
-              <a:rPr lang="en-US" sz="1300" b="1" dirty="0">
+              <a:rPr lang="en-US" sz="1220" b="1" dirty="0">
                 <a:solidFill>
                   <a:srgbClr val="0068B7"/>
                 </a:solidFill>
@@ -6327,7 +6327,7 @@
               </a:rPr>
               <a:t>Concept checkpoints</a:t>
             </a:r>
-            <a:endParaRPr lang="en-US" sz="1300" dirty="0"/>
+            <a:endParaRPr lang="en-US" sz="1220" dirty="0"/>
           </a:p>
         </p:txBody>
       </p:sp>
@@ -6339,8 +6339,8 @@
         </p:nvSpPr>
         <p:spPr>
           <a:xfrm>
-            <a:off x="7818120" y="3182112"/>
-            <a:ext cx="3090672" cy="718718"/>
+            <a:off x="7726680" y="3182112"/>
+            <a:ext cx="3227832" cy="960120"/>
           </a:xfrm>
           <a:prstGeom prst="rect">
             <a:avLst/>
@@ -6358,7 +6358,7 @@
               <a:buNone/>
             </a:pPr>
             <a:r>
-              <a:rPr lang="en-US" sz="1220" dirty="0">
+              <a:rPr lang="en-US" sz="1140" dirty="0">
                 <a:solidFill>
                   <a:srgbClr val="17364A"/>
                 </a:solidFill>
@@ -6366,16 +6366,16 @@
                 <a:ea typeface="Aptos" pitchFamily="34" charset="-122"/>
                 <a:cs typeface="Aptos" pitchFamily="34" charset="-120"/>
               </a:rPr>
-              <a:t>Where does this topic appear in your agency, program, or workflow?</a:t>
-            </a:r>
-            <a:endParaRPr lang="en-US" sz="1220" dirty="0"/>
-          </a:p>
-          <a:p>
-            <a:pPr indent="0" marL="0">
-              <a:buNone/>
-            </a:pPr>
-            <a:r>
-              <a:rPr lang="en-US" sz="1220" dirty="0">
+              <a:t>Where does this topic appear in your agency,.</a:t>
+            </a:r>
+            <a:endParaRPr lang="en-US" sz="1140" dirty="0"/>
+          </a:p>
+          <a:p>
+            <a:pPr indent="0" marL="0">
+              <a:buNone/>
+            </a:pPr>
+            <a:r>
+              <a:rPr lang="en-US" sz="1140" dirty="0">
                 <a:solidFill>
                   <a:srgbClr val="17364A"/>
                 </a:solidFill>
@@ -6383,16 +6383,16 @@
                 <a:ea typeface="Aptos" pitchFamily="34" charset="-122"/>
                 <a:cs typeface="Aptos" pitchFamily="34" charset="-120"/>
               </a:rPr>
-              <a:t>Which staff roles would need to understand or apply this concept.</a:t>
-            </a:r>
-            <a:endParaRPr lang="en-US" sz="1220" dirty="0"/>
-          </a:p>
-          <a:p>
-            <a:pPr indent="0" marL="0">
-              <a:buNone/>
-            </a:pPr>
-            <a:r>
-              <a:rPr lang="en-US" sz="1220" dirty="0">
+              <a:t>Which staff roles would need to understand or.</a:t>
+            </a:r>
+            <a:endParaRPr lang="en-US" sz="1140" dirty="0"/>
+          </a:p>
+          <a:p>
+            <a:pPr indent="0" marL="0">
+              <a:buNone/>
+            </a:pPr>
+            <a:r>
+              <a:rPr lang="en-US" sz="1140" dirty="0">
                 <a:solidFill>
                   <a:srgbClr val="17364A"/>
                 </a:solidFill>
@@ -6400,9 +6400,9 @@
                 <a:ea typeface="Aptos" pitchFamily="34" charset="-122"/>
                 <a:cs typeface="Aptos" pitchFamily="34" charset="-120"/>
               </a:rPr>
-              <a:t>What could go wrong if this topic is not addressed before.</a:t>
-            </a:r>
-            <a:endParaRPr lang="en-US" sz="1220" dirty="0"/>
+              <a:t>What could go wrong if this topic is not addressed.</a:t>
+            </a:r>
+            <a:endParaRPr lang="en-US" sz="1140" dirty="0"/>
           </a:p>
         </p:txBody>
       </p:sp>
@@ -6414,12 +6414,12 @@
         </p:nvSpPr>
         <p:spPr>
           <a:xfrm>
-            <a:off x="7635240" y="4184294"/>
-            <a:ext cx="3474720" cy="1466698"/>
+            <a:off x="7543800" y="4389120"/>
+            <a:ext cx="3611880" cy="1261872"/>
           </a:xfrm>
           <a:prstGeom prst="roundRect">
             <a:avLst>
-              <a:gd name="adj" fmla="val 7481"/>
+              <a:gd name="adj" fmla="val 8696"/>
             </a:avLst>
           </a:prstGeom>
           <a:solidFill>
@@ -6441,8 +6441,8 @@
         </p:nvSpPr>
         <p:spPr>
           <a:xfrm>
-            <a:off x="7799832" y="4330598"/>
-            <a:ext cx="3145536" cy="256032"/>
+            <a:off x="7708392" y="4517136"/>
+            <a:ext cx="3282696" cy="228600"/>
           </a:xfrm>
           <a:prstGeom prst="rect">
             <a:avLst/>
@@ -6458,7 +6458,7 @@
               <a:buNone/>
             </a:pPr>
             <a:r>
-              <a:rPr lang="en-US" sz="1300" b="1" dirty="0">
+              <a:rPr lang="en-US" sz="1220" b="1" dirty="0">
                 <a:solidFill>
                   <a:srgbClr val="0068B7"/>
                 </a:solidFill>
@@ -6468,7 +6468,7 @@
               </a:rPr>
               <a:t>Next action</a:t>
             </a:r>
-            <a:endParaRPr lang="en-US" sz="1300" dirty="0"/>
+            <a:endParaRPr lang="en-US" sz="1220" dirty="0"/>
           </a:p>
         </p:txBody>
       </p:sp>
@@ -6480,8 +6480,8 @@
         </p:nvSpPr>
         <p:spPr>
           <a:xfrm>
-            <a:off x="7799832" y="4659782"/>
-            <a:ext cx="3145536" cy="899770"/>
+            <a:off x="7708392" y="4828032"/>
+            <a:ext cx="3282696" cy="749808"/>
           </a:xfrm>
           <a:prstGeom prst="rect">
             <a:avLst/>
@@ -6499,7 +6499,7 @@
               <a:buNone/>
             </a:pPr>
             <a:r>
-              <a:rPr lang="en-US" sz="1320" dirty="0">
+              <a:rPr lang="en-US" sz="1220" dirty="0">
                 <a:solidFill>
                   <a:srgbClr val="17364A"/>
                 </a:solidFill>
@@ -6507,9 +6507,9 @@
                 <a:ea typeface="Aptos" pitchFamily="34" charset="-122"/>
                 <a:cs typeface="Aptos" pitchFamily="34" charset="-120"/>
               </a:rPr>
-              <a:t>Use the concept to clarify workflow changes, dependencies, staffing, procurement requirements, training needs, and implementation checkpoints.</a:t>
-            </a:r>
-            <a:endParaRPr lang="en-US" sz="1320" dirty="0"/>
+              <a:t>Use the concept to clarify workflow changes, dependencies, staffing, procurement.</a:t>
+            </a:r>
+            <a:endParaRPr lang="en-US" sz="1220" dirty="0"/>
           </a:p>
         </p:txBody>
       </p:sp>
@@ -6800,8 +6800,8 @@
         </p:nvSpPr>
         <p:spPr>
           <a:xfrm>
-            <a:off x="868680" y="1508760"/>
-            <a:ext cx="6309360" cy="4160520"/>
+            <a:off x="822960" y="1463040"/>
+            <a:ext cx="6565392" cy="4343400"/>
           </a:xfrm>
           <a:prstGeom prst="rect">
             <a:avLst/>
@@ -6819,7 +6819,7 @@
               <a:buNone/>
             </a:pPr>
             <a:r>
-              <a:rPr lang="en-US" sz="2100" dirty="0">
+              <a:rPr lang="en-US" sz="1920" dirty="0">
                 <a:solidFill>
                   <a:srgbClr val="003A63"/>
                 </a:solidFill>
@@ -6827,16 +6827,16 @@
                 <a:ea typeface="Aptos" pitchFamily="34" charset="-122"/>
                 <a:cs typeface="Aptos" pitchFamily="34" charset="-120"/>
               </a:rPr>
-              <a:t>• What evidence would governance, leadership, or operations staff need before moving forward?</a:t>
-            </a:r>
-            <a:endParaRPr lang="en-US" sz="2100" dirty="0"/>
-          </a:p>
-          <a:p>
-            <a:pPr indent="0" marL="0">
-              <a:buNone/>
-            </a:pPr>
-            <a:r>
-              <a:rPr lang="en-US" sz="2100" dirty="0">
+              <a:t>• What evidence would governance, leadership, or operations staff need before.</a:t>
+            </a:r>
+            <a:endParaRPr lang="en-US" sz="1920" dirty="0"/>
+          </a:p>
+          <a:p>
+            <a:pPr indent="0" marL="0">
+              <a:buNone/>
+            </a:pPr>
+            <a:r>
+              <a:rPr lang="en-US" sz="1920" dirty="0">
                 <a:solidFill>
                   <a:srgbClr val="003A63"/>
                 </a:solidFill>
@@ -6844,9 +6844,9 @@
                 <a:ea typeface="Aptos" pitchFamily="34" charset="-122"/>
                 <a:cs typeface="Aptos" pitchFamily="34" charset="-120"/>
               </a:rPr>
-              <a:t>• Which policy, data, equity, privacy, security, or workflow questions remain unresolved?</a:t>
-            </a:r>
-            <a:endParaRPr lang="en-US" sz="2100" dirty="0"/>
+              <a:t>• Which policy, data, equity, privacy, security, or workflow questions remain.</a:t>
+            </a:r>
+            <a:endParaRPr lang="en-US" sz="1920" dirty="0"/>
           </a:p>
         </p:txBody>
       </p:sp>
@@ -6858,12 +6858,12 @@
         </p:nvSpPr>
         <p:spPr>
           <a:xfrm>
-            <a:off x="7635240" y="1325880"/>
-            <a:ext cx="3474720" cy="1207008"/>
+            <a:off x="7543800" y="1325880"/>
+            <a:ext cx="3611880" cy="1261872"/>
           </a:xfrm>
           <a:prstGeom prst="roundRect">
             <a:avLst>
-              <a:gd name="adj" fmla="val 9091"/>
+              <a:gd name="adj" fmla="val 8696"/>
             </a:avLst>
           </a:prstGeom>
           <a:solidFill>
@@ -6885,8 +6885,8 @@
         </p:nvSpPr>
         <p:spPr>
           <a:xfrm>
-            <a:off x="7799832" y="1472184"/>
-            <a:ext cx="3145536" cy="256032"/>
+            <a:off x="7708392" y="1453896"/>
+            <a:ext cx="3282696" cy="228600"/>
           </a:xfrm>
           <a:prstGeom prst="rect">
             <a:avLst/>
@@ -6902,7 +6902,7 @@
               <a:buNone/>
             </a:pPr>
             <a:r>
-              <a:rPr lang="en-US" sz="1300" b="1" dirty="0">
+              <a:rPr lang="en-US" sz="1220" b="1" dirty="0">
                 <a:solidFill>
                   <a:srgbClr val="0068B7"/>
                 </a:solidFill>
@@ -6912,7 +6912,7 @@
               </a:rPr>
               <a:t>Implementation cue</a:t>
             </a:r>
-            <a:endParaRPr lang="en-US" sz="1300" dirty="0"/>
+            <a:endParaRPr lang="en-US" sz="1220" dirty="0"/>
           </a:p>
         </p:txBody>
       </p:sp>
@@ -6924,8 +6924,8 @@
         </p:nvSpPr>
         <p:spPr>
           <a:xfrm>
-            <a:off x="7799832" y="1801368"/>
-            <a:ext cx="3145536" cy="640080"/>
+            <a:off x="7708392" y="1764792"/>
+            <a:ext cx="3282696" cy="749808"/>
           </a:xfrm>
           <a:prstGeom prst="rect">
             <a:avLst/>
@@ -6943,7 +6943,7 @@
               <a:buNone/>
             </a:pPr>
             <a:r>
-              <a:rPr lang="en-US" sz="1320" dirty="0">
+              <a:rPr lang="en-US" sz="1220" dirty="0">
                 <a:solidFill>
                   <a:srgbClr val="17364A"/>
                 </a:solidFill>
@@ -6951,9 +6951,9 @@
                 <a:ea typeface="Aptos" pitchFamily="34" charset="-122"/>
                 <a:cs typeface="Aptos" pitchFamily="34" charset="-120"/>
               </a:rPr>
-              <a:t>What evidence would governance, leadership, or operations staff need before moving.</a:t>
-            </a:r>
-            <a:endParaRPr lang="en-US" sz="1320" dirty="0"/>
+              <a:t>What evidence would governance, leadership, or operations staff need before.</a:t>
+            </a:r>
+            <a:endParaRPr lang="en-US" sz="1220" dirty="0"/>
           </a:p>
         </p:txBody>
       </p:sp>
@@ -6965,12 +6965,12 @@
         </p:nvSpPr>
         <p:spPr>
           <a:xfrm>
-            <a:off x="7635240" y="2670048"/>
-            <a:ext cx="3474720" cy="1377086"/>
+            <a:off x="7543800" y="2724912"/>
+            <a:ext cx="3611880" cy="1527048"/>
           </a:xfrm>
           <a:prstGeom prst="roundRect">
             <a:avLst>
-              <a:gd name="adj" fmla="val 7968"/>
+              <a:gd name="adj" fmla="val 7186"/>
             </a:avLst>
           </a:prstGeom>
           <a:solidFill>
@@ -6992,8 +6992,8 @@
         </p:nvSpPr>
         <p:spPr>
           <a:xfrm>
-            <a:off x="7799832" y="2816352"/>
-            <a:ext cx="3145536" cy="256032"/>
+            <a:off x="7708392" y="2852928"/>
+            <a:ext cx="3282696" cy="228600"/>
           </a:xfrm>
           <a:prstGeom prst="rect">
             <a:avLst/>
@@ -7009,7 +7009,7 @@
               <a:buNone/>
             </a:pPr>
             <a:r>
-              <a:rPr lang="en-US" sz="1300" b="1" dirty="0">
+              <a:rPr lang="en-US" sz="1220" b="1" dirty="0">
                 <a:solidFill>
                   <a:srgbClr val="0068B7"/>
                 </a:solidFill>
@@ -7019,7 +7019,7 @@
               </a:rPr>
               <a:t>Concept checkpoints</a:t>
             </a:r>
-            <a:endParaRPr lang="en-US" sz="1300" dirty="0"/>
+            <a:endParaRPr lang="en-US" sz="1220" dirty="0"/>
           </a:p>
         </p:txBody>
       </p:sp>
@@ -7031,8 +7031,8 @@
         </p:nvSpPr>
         <p:spPr>
           <a:xfrm>
-            <a:off x="7818120" y="3182112"/>
-            <a:ext cx="3090672" cy="718718"/>
+            <a:off x="7726680" y="3182112"/>
+            <a:ext cx="3227832" cy="960120"/>
           </a:xfrm>
           <a:prstGeom prst="rect">
             <a:avLst/>
@@ -7050,7 +7050,7 @@
               <a:buNone/>
             </a:pPr>
             <a:r>
-              <a:rPr lang="en-US" sz="1220" dirty="0">
+              <a:rPr lang="en-US" sz="1140" dirty="0">
                 <a:solidFill>
                   <a:srgbClr val="17364A"/>
                 </a:solidFill>
@@ -7058,16 +7058,16 @@
                 <a:ea typeface="Aptos" pitchFamily="34" charset="-122"/>
                 <a:cs typeface="Aptos" pitchFamily="34" charset="-120"/>
               </a:rPr>
-              <a:t>What evidence would governance, leadership, or operations staff.</a:t>
-            </a:r>
-            <a:endParaRPr lang="en-US" sz="1220" dirty="0"/>
-          </a:p>
-          <a:p>
-            <a:pPr indent="0" marL="0">
-              <a:buNone/>
-            </a:pPr>
-            <a:r>
-              <a:rPr lang="en-US" sz="1220" dirty="0">
+              <a:t>What evidence would governance, leadership, or.</a:t>
+            </a:r>
+            <a:endParaRPr lang="en-US" sz="1140" dirty="0"/>
+          </a:p>
+          <a:p>
+            <a:pPr indent="0" marL="0">
+              <a:buNone/>
+            </a:pPr>
+            <a:r>
+              <a:rPr lang="en-US" sz="1140" dirty="0">
                 <a:solidFill>
                   <a:srgbClr val="17364A"/>
                 </a:solidFill>
@@ -7075,9 +7075,9 @@
                 <a:ea typeface="Aptos" pitchFamily="34" charset="-122"/>
                 <a:cs typeface="Aptos" pitchFamily="34" charset="-120"/>
               </a:rPr>
-              <a:t>Which policy, data, equity, privacy, security, or workflow.</a:t>
-            </a:r>
-            <a:endParaRPr lang="en-US" sz="1220" dirty="0"/>
+              <a:t>Which policy, data, equity, privacy, security, or.</a:t>
+            </a:r>
+            <a:endParaRPr lang="en-US" sz="1140" dirty="0"/>
           </a:p>
         </p:txBody>
       </p:sp>
@@ -7089,12 +7089,12 @@
         </p:nvSpPr>
         <p:spPr>
           <a:xfrm>
-            <a:off x="7635240" y="4184294"/>
-            <a:ext cx="3474720" cy="1466698"/>
+            <a:off x="7543800" y="4389120"/>
+            <a:ext cx="3611880" cy="1261872"/>
           </a:xfrm>
           <a:prstGeom prst="roundRect">
             <a:avLst>
-              <a:gd name="adj" fmla="val 7481"/>
+              <a:gd name="adj" fmla="val 8696"/>
             </a:avLst>
           </a:prstGeom>
           <a:solidFill>
@@ -7116,8 +7116,8 @@
         </p:nvSpPr>
         <p:spPr>
           <a:xfrm>
-            <a:off x="7799832" y="4330598"/>
-            <a:ext cx="3145536" cy="256032"/>
+            <a:off x="7708392" y="4517136"/>
+            <a:ext cx="3282696" cy="228600"/>
           </a:xfrm>
           <a:prstGeom prst="rect">
             <a:avLst/>
@@ -7133,7 +7133,7 @@
               <a:buNone/>
             </a:pPr>
             <a:r>
-              <a:rPr lang="en-US" sz="1300" b="1" dirty="0">
+              <a:rPr lang="en-US" sz="1220" b="1" dirty="0">
                 <a:solidFill>
                   <a:srgbClr val="0068B7"/>
                 </a:solidFill>
@@ -7143,7 +7143,7 @@
               </a:rPr>
               <a:t>Next action</a:t>
             </a:r>
-            <a:endParaRPr lang="en-US" sz="1300" dirty="0"/>
+            <a:endParaRPr lang="en-US" sz="1220" dirty="0"/>
           </a:p>
         </p:txBody>
       </p:sp>
@@ -7155,8 +7155,8 @@
         </p:nvSpPr>
         <p:spPr>
           <a:xfrm>
-            <a:off x="7799832" y="4659782"/>
-            <a:ext cx="3145536" cy="899770"/>
+            <a:off x="7708392" y="4828032"/>
+            <a:ext cx="3282696" cy="749808"/>
           </a:xfrm>
           <a:prstGeom prst="rect">
             <a:avLst/>
@@ -7174,7 +7174,7 @@
               <a:buNone/>
             </a:pPr>
             <a:r>
-              <a:rPr lang="en-US" sz="1320" dirty="0">
+              <a:rPr lang="en-US" sz="1220" dirty="0">
                 <a:solidFill>
                   <a:srgbClr val="17364A"/>
                 </a:solidFill>
@@ -7182,9 +7182,9 @@
                 <a:ea typeface="Aptos" pitchFamily="34" charset="-122"/>
                 <a:cs typeface="Aptos" pitchFamily="34" charset="-120"/>
               </a:rPr>
-              <a:t>Use the concept to clarify workflow changes, dependencies, staffing, procurement requirements, training needs, and implementation checkpoints.</a:t>
-            </a:r>
-            <a:endParaRPr lang="en-US" sz="1320" dirty="0"/>
+              <a:t>Use the concept to clarify workflow changes, dependencies, staffing, procurement.</a:t>
+            </a:r>
+            <a:endParaRPr lang="en-US" sz="1220" dirty="0"/>
           </a:p>
         </p:txBody>
       </p:sp>
@@ -7475,8 +7475,8 @@
         </p:nvSpPr>
         <p:spPr>
           <a:xfrm>
-            <a:off x="868680" y="1508760"/>
-            <a:ext cx="6309360" cy="4160520"/>
+            <a:off x="822960" y="1463040"/>
+            <a:ext cx="6565392" cy="4343400"/>
           </a:xfrm>
           <a:prstGeom prst="rect">
             <a:avLst/>
@@ -7494,7 +7494,7 @@
               <a:buNone/>
             </a:pPr>
             <a:r>
-              <a:rPr lang="en-US" sz="2100" dirty="0">
+              <a:rPr lang="en-US" sz="1920" dirty="0">
                 <a:solidFill>
                   <a:srgbClr val="003A63"/>
                 </a:solidFill>
@@ -7504,14 +7504,14 @@
               </a:rPr>
               <a:t>• Create a UAT plan for one AI-supported workflow.</a:t>
             </a:r>
-            <a:endParaRPr lang="en-US" sz="2100" dirty="0"/>
-          </a:p>
-          <a:p>
-            <a:pPr indent="0" marL="0">
-              <a:buNone/>
-            </a:pPr>
-            <a:r>
-              <a:rPr lang="en-US" sz="2100" dirty="0">
+            <a:endParaRPr lang="en-US" sz="1920" dirty="0"/>
+          </a:p>
+          <a:p>
+            <a:pPr indent="0" marL="0">
+              <a:buNone/>
+            </a:pPr>
+            <a:r>
+              <a:rPr lang="en-US" sz="1920" dirty="0">
                 <a:solidFill>
                   <a:srgbClr val="003A63"/>
                 </a:solidFill>
@@ -7519,9 +7519,9 @@
                 <a:ea typeface="Aptos" pitchFamily="34" charset="-122"/>
                 <a:cs typeface="Aptos" pitchFamily="34" charset="-120"/>
               </a:rPr>
-              <a:t>• Include user roles, test scenarios, edge cases, acceptance criteria, tester instructions,.</a:t>
-            </a:r>
-            <a:endParaRPr lang="en-US" sz="2100" dirty="0"/>
+              <a:t>• Include user roles, test scenarios, edge cases, acceptance criteria, tester.</a:t>
+            </a:r>
+            <a:endParaRPr lang="en-US" sz="1920" dirty="0"/>
           </a:p>
         </p:txBody>
       </p:sp>
@@ -7533,12 +7533,12 @@
         </p:nvSpPr>
         <p:spPr>
           <a:xfrm>
-            <a:off x="7635240" y="1325880"/>
-            <a:ext cx="3474720" cy="1207008"/>
+            <a:off x="7543800" y="1325880"/>
+            <a:ext cx="3611880" cy="1261872"/>
           </a:xfrm>
           <a:prstGeom prst="roundRect">
             <a:avLst>
-              <a:gd name="adj" fmla="val 9091"/>
+              <a:gd name="adj" fmla="val 8696"/>
             </a:avLst>
           </a:prstGeom>
           <a:solidFill>
@@ -7560,8 +7560,8 @@
         </p:nvSpPr>
         <p:spPr>
           <a:xfrm>
-            <a:off x="7799832" y="1472184"/>
-            <a:ext cx="3145536" cy="256032"/>
+            <a:off x="7708392" y="1453896"/>
+            <a:ext cx="3282696" cy="228600"/>
           </a:xfrm>
           <a:prstGeom prst="rect">
             <a:avLst/>
@@ -7577,7 +7577,7 @@
               <a:buNone/>
             </a:pPr>
             <a:r>
-              <a:rPr lang="en-US" sz="1300" b="1" dirty="0">
+              <a:rPr lang="en-US" sz="1220" b="1" dirty="0">
                 <a:solidFill>
                   <a:srgbClr val="0068B7"/>
                 </a:solidFill>
@@ -7587,7 +7587,7 @@
               </a:rPr>
               <a:t>Implementation cue</a:t>
             </a:r>
-            <a:endParaRPr lang="en-US" sz="1300" dirty="0"/>
+            <a:endParaRPr lang="en-US" sz="1220" dirty="0"/>
           </a:p>
         </p:txBody>
       </p:sp>
@@ -7599,8 +7599,8 @@
         </p:nvSpPr>
         <p:spPr>
           <a:xfrm>
-            <a:off x="7799832" y="1801368"/>
-            <a:ext cx="3145536" cy="640080"/>
+            <a:off x="7708392" y="1764792"/>
+            <a:ext cx="3282696" cy="749808"/>
           </a:xfrm>
           <a:prstGeom prst="rect">
             <a:avLst/>
@@ -7618,7 +7618,7 @@
               <a:buNone/>
             </a:pPr>
             <a:r>
-              <a:rPr lang="en-US" sz="1320" dirty="0">
+              <a:rPr lang="en-US" sz="1220" dirty="0">
                 <a:solidFill>
                   <a:srgbClr val="17364A"/>
                 </a:solidFill>
@@ -7628,7 +7628,7 @@
               </a:rPr>
               <a:t>Create a UAT plan for one AI-supported workflow.</a:t>
             </a:r>
-            <a:endParaRPr lang="en-US" sz="1320" dirty="0"/>
+            <a:endParaRPr lang="en-US" sz="1220" dirty="0"/>
           </a:p>
         </p:txBody>
       </p:sp>
@@ -7640,12 +7640,12 @@
         </p:nvSpPr>
         <p:spPr>
           <a:xfrm>
-            <a:off x="7635240" y="2670048"/>
-            <a:ext cx="3474720" cy="1377086"/>
+            <a:off x="7543800" y="2724912"/>
+            <a:ext cx="3611880" cy="1527048"/>
           </a:xfrm>
           <a:prstGeom prst="roundRect">
             <a:avLst>
-              <a:gd name="adj" fmla="val 7968"/>
+              <a:gd name="adj" fmla="val 7186"/>
             </a:avLst>
           </a:prstGeom>
           <a:solidFill>
@@ -7667,8 +7667,8 @@
         </p:nvSpPr>
         <p:spPr>
           <a:xfrm>
-            <a:off x="7799832" y="2816352"/>
-            <a:ext cx="3145536" cy="256032"/>
+            <a:off x="7708392" y="2852928"/>
+            <a:ext cx="3282696" cy="228600"/>
           </a:xfrm>
           <a:prstGeom prst="rect">
             <a:avLst/>
@@ -7684,7 +7684,7 @@
               <a:buNone/>
             </a:pPr>
             <a:r>
-              <a:rPr lang="en-US" sz="1300" b="1" dirty="0">
+              <a:rPr lang="en-US" sz="1220" b="1" dirty="0">
                 <a:solidFill>
                   <a:srgbClr val="0068B7"/>
                 </a:solidFill>
@@ -7694,7 +7694,7 @@
               </a:rPr>
               <a:t>Concept checkpoints</a:t>
             </a:r>
-            <a:endParaRPr lang="en-US" sz="1300" dirty="0"/>
+            <a:endParaRPr lang="en-US" sz="1220" dirty="0"/>
           </a:p>
         </p:txBody>
       </p:sp>
@@ -7706,8 +7706,8 @@
         </p:nvSpPr>
         <p:spPr>
           <a:xfrm>
-            <a:off x="7818120" y="3182112"/>
-            <a:ext cx="3090672" cy="718718"/>
+            <a:off x="7726680" y="3182112"/>
+            <a:ext cx="3227832" cy="960120"/>
           </a:xfrm>
           <a:prstGeom prst="rect">
             <a:avLst/>
@@ -7725,7 +7725,7 @@
               <a:buNone/>
             </a:pPr>
             <a:r>
-              <a:rPr lang="en-US" sz="1220" dirty="0">
+              <a:rPr lang="en-US" sz="1140" dirty="0">
                 <a:solidFill>
                   <a:srgbClr val="17364A"/>
                 </a:solidFill>
@@ -7735,14 +7735,14 @@
               </a:rPr>
               <a:t>Create a UAT plan for one AI-supported workflow.</a:t>
             </a:r>
-            <a:endParaRPr lang="en-US" sz="1220" dirty="0"/>
-          </a:p>
-          <a:p>
-            <a:pPr indent="0" marL="0">
-              <a:buNone/>
-            </a:pPr>
-            <a:r>
-              <a:rPr lang="en-US" sz="1220" dirty="0">
+            <a:endParaRPr lang="en-US" sz="1140" dirty="0"/>
+          </a:p>
+          <a:p>
+            <a:pPr indent="0" marL="0">
+              <a:buNone/>
+            </a:pPr>
+            <a:r>
+              <a:rPr lang="en-US" sz="1140" dirty="0">
                 <a:solidFill>
                   <a:srgbClr val="17364A"/>
                 </a:solidFill>
@@ -7750,9 +7750,9 @@
                 <a:ea typeface="Aptos" pitchFamily="34" charset="-122"/>
                 <a:cs typeface="Aptos" pitchFamily="34" charset="-120"/>
               </a:rPr>
-              <a:t>Include user roles, test scenarios, edge cases, acceptance.</a:t>
-            </a:r>
-            <a:endParaRPr lang="en-US" sz="1220" dirty="0"/>
+              <a:t>Include user roles, test scenarios, edge cases,.</a:t>
+            </a:r>
+            <a:endParaRPr lang="en-US" sz="1140" dirty="0"/>
           </a:p>
         </p:txBody>
       </p:sp>
@@ -7764,12 +7764,12 @@
         </p:nvSpPr>
         <p:spPr>
           <a:xfrm>
-            <a:off x="7635240" y="4184294"/>
-            <a:ext cx="3474720" cy="1466698"/>
+            <a:off x="7543800" y="4389120"/>
+            <a:ext cx="3611880" cy="1261872"/>
           </a:xfrm>
           <a:prstGeom prst="roundRect">
             <a:avLst>
-              <a:gd name="adj" fmla="val 7481"/>
+              <a:gd name="adj" fmla="val 8696"/>
             </a:avLst>
           </a:prstGeom>
           <a:solidFill>
@@ -7791,8 +7791,8 @@
         </p:nvSpPr>
         <p:spPr>
           <a:xfrm>
-            <a:off x="7799832" y="4330598"/>
-            <a:ext cx="3145536" cy="256032"/>
+            <a:off x="7708392" y="4517136"/>
+            <a:ext cx="3282696" cy="228600"/>
           </a:xfrm>
           <a:prstGeom prst="rect">
             <a:avLst/>
@@ -7808,7 +7808,7 @@
               <a:buNone/>
             </a:pPr>
             <a:r>
-              <a:rPr lang="en-US" sz="1300" b="1" dirty="0">
+              <a:rPr lang="en-US" sz="1220" b="1" dirty="0">
                 <a:solidFill>
                   <a:srgbClr val="0068B7"/>
                 </a:solidFill>
@@ -7818,7 +7818,7 @@
               </a:rPr>
               <a:t>Next action</a:t>
             </a:r>
-            <a:endParaRPr lang="en-US" sz="1300" dirty="0"/>
+            <a:endParaRPr lang="en-US" sz="1220" dirty="0"/>
           </a:p>
         </p:txBody>
       </p:sp>
@@ -7830,8 +7830,8 @@
         </p:nvSpPr>
         <p:spPr>
           <a:xfrm>
-            <a:off x="7799832" y="4659782"/>
-            <a:ext cx="3145536" cy="899770"/>
+            <a:off x="7708392" y="4828032"/>
+            <a:ext cx="3282696" cy="749808"/>
           </a:xfrm>
           <a:prstGeom prst="rect">
             <a:avLst/>
@@ -7849,7 +7849,7 @@
               <a:buNone/>
             </a:pPr>
             <a:r>
-              <a:rPr lang="en-US" sz="1320" dirty="0">
+              <a:rPr lang="en-US" sz="1220" dirty="0">
                 <a:solidFill>
                   <a:srgbClr val="17364A"/>
                 </a:solidFill>
@@ -7857,9 +7857,9 @@
                 <a:ea typeface="Aptos" pitchFamily="34" charset="-122"/>
                 <a:cs typeface="Aptos" pitchFamily="34" charset="-120"/>
               </a:rPr>
-              <a:t>Use the assignment to test whether you can explain the concept, apply it to a realistic public health situation, and identify what would need review before the work moves forward.</a:t>
-            </a:r>
-            <a:endParaRPr lang="en-US" sz="1320" dirty="0"/>
+              <a:t>Use the assignment to test whether you can explain the concept, apply it to a.</a:t>
+            </a:r>
+            <a:endParaRPr lang="en-US" sz="1220" dirty="0"/>
           </a:p>
         </p:txBody>
       </p:sp>
@@ -8150,8 +8150,8 @@
         </p:nvSpPr>
         <p:spPr>
           <a:xfrm>
-            <a:off x="868680" y="1508760"/>
-            <a:ext cx="6309360" cy="4160520"/>
+            <a:off x="822960" y="1463040"/>
+            <a:ext cx="6565392" cy="4343400"/>
           </a:xfrm>
           <a:prstGeom prst="rect">
             <a:avLst/>
@@ -8169,7 +8169,7 @@
               <a:buNone/>
             </a:pPr>
             <a:r>
-              <a:rPr lang="en-US" sz="2100" dirty="0">
+              <a:rPr lang="en-US" sz="1920" dirty="0">
                 <a:solidFill>
                   <a:srgbClr val="003A63"/>
                 </a:solidFill>
@@ -8179,14 +8179,14 @@
               </a:rPr>
               <a:t>• UAT plan</a:t>
             </a:r>
-            <a:endParaRPr lang="en-US" sz="2100" dirty="0"/>
-          </a:p>
-          <a:p>
-            <a:pPr indent="0" marL="0">
-              <a:buNone/>
-            </a:pPr>
-            <a:r>
-              <a:rPr lang="en-US" sz="2100" dirty="0">
+            <a:endParaRPr lang="en-US" sz="1920" dirty="0"/>
+          </a:p>
+          <a:p>
+            <a:pPr indent="0" marL="0">
+              <a:buNone/>
+            </a:pPr>
+            <a:r>
+              <a:rPr lang="en-US" sz="1920" dirty="0">
                 <a:solidFill>
                   <a:srgbClr val="003A63"/>
                 </a:solidFill>
@@ -8196,14 +8196,14 @@
               </a:rPr>
               <a:t>• Role-based test scripts</a:t>
             </a:r>
-            <a:endParaRPr lang="en-US" sz="2100" dirty="0"/>
-          </a:p>
-          <a:p>
-            <a:pPr indent="0" marL="0">
-              <a:buNone/>
-            </a:pPr>
-            <a:r>
-              <a:rPr lang="en-US" sz="2100" dirty="0">
+            <a:endParaRPr lang="en-US" sz="1920" dirty="0"/>
+          </a:p>
+          <a:p>
+            <a:pPr indent="0" marL="0">
+              <a:buNone/>
+            </a:pPr>
+            <a:r>
+              <a:rPr lang="en-US" sz="1920" dirty="0">
                 <a:solidFill>
                   <a:srgbClr val="003A63"/>
                 </a:solidFill>
@@ -8213,7 +8213,7 @@
               </a:rPr>
               <a:t>• Acceptance criteria</a:t>
             </a:r>
-            <a:endParaRPr lang="en-US" sz="2100" dirty="0"/>
+            <a:endParaRPr lang="en-US" sz="1920" dirty="0"/>
           </a:p>
         </p:txBody>
       </p:sp>
@@ -8225,12 +8225,12 @@
         </p:nvSpPr>
         <p:spPr>
           <a:xfrm>
-            <a:off x="7635240" y="1325880"/>
-            <a:ext cx="3474720" cy="1207008"/>
+            <a:off x="7543800" y="1325880"/>
+            <a:ext cx="3611880" cy="1261872"/>
           </a:xfrm>
           <a:prstGeom prst="roundRect">
             <a:avLst>
-              <a:gd name="adj" fmla="val 9091"/>
+              <a:gd name="adj" fmla="val 8696"/>
             </a:avLst>
           </a:prstGeom>
           <a:solidFill>
@@ -8252,8 +8252,8 @@
         </p:nvSpPr>
         <p:spPr>
           <a:xfrm>
-            <a:off x="7799832" y="1472184"/>
-            <a:ext cx="3145536" cy="256032"/>
+            <a:off x="7708392" y="1453896"/>
+            <a:ext cx="3282696" cy="228600"/>
           </a:xfrm>
           <a:prstGeom prst="rect">
             <a:avLst/>
@@ -8269,7 +8269,7 @@
               <a:buNone/>
             </a:pPr>
             <a:r>
-              <a:rPr lang="en-US" sz="1300" b="1" dirty="0">
+              <a:rPr lang="en-US" sz="1220" b="1" dirty="0">
                 <a:solidFill>
                   <a:srgbClr val="0068B7"/>
                 </a:solidFill>
@@ -8279,7 +8279,7 @@
               </a:rPr>
               <a:t>Implementation cue</a:t>
             </a:r>
-            <a:endParaRPr lang="en-US" sz="1300" dirty="0"/>
+            <a:endParaRPr lang="en-US" sz="1220" dirty="0"/>
           </a:p>
         </p:txBody>
       </p:sp>
@@ -8291,8 +8291,8 @@
         </p:nvSpPr>
         <p:spPr>
           <a:xfrm>
-            <a:off x="7799832" y="1801368"/>
-            <a:ext cx="3145536" cy="640080"/>
+            <a:off x="7708392" y="1764792"/>
+            <a:ext cx="3282696" cy="749808"/>
           </a:xfrm>
           <a:prstGeom prst="rect">
             <a:avLst/>
@@ -8310,7 +8310,7 @@
               <a:buNone/>
             </a:pPr>
             <a:r>
-              <a:rPr lang="en-US" sz="1320" dirty="0">
+              <a:rPr lang="en-US" sz="1220" dirty="0">
                 <a:solidFill>
                   <a:srgbClr val="17364A"/>
                 </a:solidFill>
@@ -8320,7 +8320,7 @@
               </a:rPr>
               <a:t>UAT plan</a:t>
             </a:r>
-            <a:endParaRPr lang="en-US" sz="1320" dirty="0"/>
+            <a:endParaRPr lang="en-US" sz="1220" dirty="0"/>
           </a:p>
         </p:txBody>
       </p:sp>
@@ -8332,12 +8332,12 @@
         </p:nvSpPr>
         <p:spPr>
           <a:xfrm>
-            <a:off x="7635240" y="2670048"/>
-            <a:ext cx="3474720" cy="1377086"/>
+            <a:off x="7543800" y="2724912"/>
+            <a:ext cx="3611880" cy="1527048"/>
           </a:xfrm>
           <a:prstGeom prst="roundRect">
             <a:avLst>
-              <a:gd name="adj" fmla="val 7968"/>
+              <a:gd name="adj" fmla="val 7186"/>
             </a:avLst>
           </a:prstGeom>
           <a:solidFill>
@@ -8359,8 +8359,8 @@
         </p:nvSpPr>
         <p:spPr>
           <a:xfrm>
-            <a:off x="7799832" y="2816352"/>
-            <a:ext cx="3145536" cy="256032"/>
+            <a:off x="7708392" y="2852928"/>
+            <a:ext cx="3282696" cy="228600"/>
           </a:xfrm>
           <a:prstGeom prst="rect">
             <a:avLst/>
@@ -8376,7 +8376,7 @@
               <a:buNone/>
             </a:pPr>
             <a:r>
-              <a:rPr lang="en-US" sz="1300" b="1" dirty="0">
+              <a:rPr lang="en-US" sz="1220" b="1" dirty="0">
                 <a:solidFill>
                   <a:srgbClr val="0068B7"/>
                 </a:solidFill>
@@ -8386,7 +8386,7 @@
               </a:rPr>
               <a:t>Concept checkpoints</a:t>
             </a:r>
-            <a:endParaRPr lang="en-US" sz="1300" dirty="0"/>
+            <a:endParaRPr lang="en-US" sz="1220" dirty="0"/>
           </a:p>
         </p:txBody>
       </p:sp>
@@ -8398,8 +8398,8 @@
         </p:nvSpPr>
         <p:spPr>
           <a:xfrm>
-            <a:off x="7818120" y="3182112"/>
-            <a:ext cx="3090672" cy="718718"/>
+            <a:off x="7726680" y="3182112"/>
+            <a:ext cx="3227832" cy="960120"/>
           </a:xfrm>
           <a:prstGeom prst="rect">
             <a:avLst/>
@@ -8417,7 +8417,7 @@
               <a:buNone/>
             </a:pPr>
             <a:r>
-              <a:rPr lang="en-US" sz="1220" dirty="0">
+              <a:rPr lang="en-US" sz="1140" dirty="0">
                 <a:solidFill>
                   <a:srgbClr val="17364A"/>
                 </a:solidFill>
@@ -8427,14 +8427,14 @@
               </a:rPr>
               <a:t>UAT plan</a:t>
             </a:r>
-            <a:endParaRPr lang="en-US" sz="1220" dirty="0"/>
-          </a:p>
-          <a:p>
-            <a:pPr indent="0" marL="0">
-              <a:buNone/>
-            </a:pPr>
-            <a:r>
-              <a:rPr lang="en-US" sz="1220" dirty="0">
+            <a:endParaRPr lang="en-US" sz="1140" dirty="0"/>
+          </a:p>
+          <a:p>
+            <a:pPr indent="0" marL="0">
+              <a:buNone/>
+            </a:pPr>
+            <a:r>
+              <a:rPr lang="en-US" sz="1140" dirty="0">
                 <a:solidFill>
                   <a:srgbClr val="17364A"/>
                 </a:solidFill>
@@ -8444,14 +8444,14 @@
               </a:rPr>
               <a:t>Role-based test scripts</a:t>
             </a:r>
-            <a:endParaRPr lang="en-US" sz="1220" dirty="0"/>
-          </a:p>
-          <a:p>
-            <a:pPr indent="0" marL="0">
-              <a:buNone/>
-            </a:pPr>
-            <a:r>
-              <a:rPr lang="en-US" sz="1220" dirty="0">
+            <a:endParaRPr lang="en-US" sz="1140" dirty="0"/>
+          </a:p>
+          <a:p>
+            <a:pPr indent="0" marL="0">
+              <a:buNone/>
+            </a:pPr>
+            <a:r>
+              <a:rPr lang="en-US" sz="1140" dirty="0">
                 <a:solidFill>
                   <a:srgbClr val="17364A"/>
                 </a:solidFill>
@@ -8461,7 +8461,7 @@
               </a:rPr>
               <a:t>Acceptance criteria</a:t>
             </a:r>
-            <a:endParaRPr lang="en-US" sz="1220" dirty="0"/>
+            <a:endParaRPr lang="en-US" sz="1140" dirty="0"/>
           </a:p>
         </p:txBody>
       </p:sp>
@@ -8473,12 +8473,12 @@
         </p:nvSpPr>
         <p:spPr>
           <a:xfrm>
-            <a:off x="7635240" y="4184294"/>
-            <a:ext cx="3474720" cy="1466698"/>
+            <a:off x="7543800" y="4389120"/>
+            <a:ext cx="3611880" cy="1261872"/>
           </a:xfrm>
           <a:prstGeom prst="roundRect">
             <a:avLst>
-              <a:gd name="adj" fmla="val 7481"/>
+              <a:gd name="adj" fmla="val 8696"/>
             </a:avLst>
           </a:prstGeom>
           <a:solidFill>
@@ -8500,8 +8500,8 @@
         </p:nvSpPr>
         <p:spPr>
           <a:xfrm>
-            <a:off x="7799832" y="4330598"/>
-            <a:ext cx="3145536" cy="256032"/>
+            <a:off x="7708392" y="4517136"/>
+            <a:ext cx="3282696" cy="228600"/>
           </a:xfrm>
           <a:prstGeom prst="rect">
             <a:avLst/>
@@ -8517,7 +8517,7 @@
               <a:buNone/>
             </a:pPr>
             <a:r>
-              <a:rPr lang="en-US" sz="1300" b="1" dirty="0">
+              <a:rPr lang="en-US" sz="1220" b="1" dirty="0">
                 <a:solidFill>
                   <a:srgbClr val="0068B7"/>
                 </a:solidFill>
@@ -8527,7 +8527,7 @@
               </a:rPr>
               <a:t>Next action</a:t>
             </a:r>
-            <a:endParaRPr lang="en-US" sz="1300" dirty="0"/>
+            <a:endParaRPr lang="en-US" sz="1220" dirty="0"/>
           </a:p>
         </p:txBody>
       </p:sp>
@@ -8539,8 +8539,8 @@
         </p:nvSpPr>
         <p:spPr>
           <a:xfrm>
-            <a:off x="7799832" y="4659782"/>
-            <a:ext cx="3145536" cy="899770"/>
+            <a:off x="7708392" y="4828032"/>
+            <a:ext cx="3282696" cy="749808"/>
           </a:xfrm>
           <a:prstGeom prst="rect">
             <a:avLst/>
@@ -8558,7 +8558,7 @@
               <a:buNone/>
             </a:pPr>
             <a:r>
-              <a:rPr lang="en-US" sz="1320" dirty="0">
+              <a:rPr lang="en-US" sz="1220" dirty="0">
                 <a:solidFill>
                   <a:srgbClr val="17364A"/>
                 </a:solidFill>
@@ -8566,9 +8566,9 @@
                 <a:ea typeface="Aptos" pitchFamily="34" charset="-122"/>
                 <a:cs typeface="Aptos" pitchFamily="34" charset="-120"/>
               </a:rPr>
-              <a:t>Use the concept to clarify workflow changes, dependencies, staffing, procurement requirements, training needs, and implementation checkpoints.</a:t>
-            </a:r>
-            <a:endParaRPr lang="en-US" sz="1320" dirty="0"/>
+              <a:t>Use the concept to clarify workflow changes, dependencies, staffing, procurement.</a:t>
+            </a:r>
+            <a:endParaRPr lang="en-US" sz="1220" dirty="0"/>
           </a:p>
         </p:txBody>
       </p:sp>
@@ -8859,8 +8859,8 @@
         </p:nvSpPr>
         <p:spPr>
           <a:xfrm>
-            <a:off x="868680" y="1508760"/>
-            <a:ext cx="6309360" cy="4160520"/>
+            <a:off x="822960" y="1463040"/>
+            <a:ext cx="6565392" cy="4343400"/>
           </a:xfrm>
           <a:prstGeom prst="rect">
             <a:avLst/>
@@ -8878,7 +8878,7 @@
               <a:buNone/>
             </a:pPr>
             <a:r>
-              <a:rPr lang="en-US" sz="2100" dirty="0">
+              <a:rPr lang="en-US" sz="1920" dirty="0">
                 <a:solidFill>
                   <a:srgbClr val="003A63"/>
                 </a:solidFill>
@@ -8888,14 +8888,14 @@
               </a:rPr>
               <a:t>• Issue log template</a:t>
             </a:r>
-            <a:endParaRPr lang="en-US" sz="2100" dirty="0"/>
-          </a:p>
-          <a:p>
-            <a:pPr indent="0" marL="0">
-              <a:buNone/>
-            </a:pPr>
-            <a:r>
-              <a:rPr lang="en-US" sz="2100" dirty="0">
+            <a:endParaRPr lang="en-US" sz="1920" dirty="0"/>
+          </a:p>
+          <a:p>
+            <a:pPr indent="0" marL="0">
+              <a:buNone/>
+            </a:pPr>
+            <a:r>
+              <a:rPr lang="en-US" sz="1920" dirty="0">
                 <a:solidFill>
                   <a:srgbClr val="003A63"/>
                 </a:solidFill>
@@ -8905,7 +8905,7 @@
               </a:rPr>
               <a:t>• Sign-off recommendation</a:t>
             </a:r>
-            <a:endParaRPr lang="en-US" sz="2100" dirty="0"/>
+            <a:endParaRPr lang="en-US" sz="1920" dirty="0"/>
           </a:p>
         </p:txBody>
       </p:sp>
@@ -8917,12 +8917,12 @@
         </p:nvSpPr>
         <p:spPr>
           <a:xfrm>
-            <a:off x="7635240" y="1325880"/>
-            <a:ext cx="3474720" cy="1207008"/>
+            <a:off x="7543800" y="1325880"/>
+            <a:ext cx="3611880" cy="1261872"/>
           </a:xfrm>
           <a:prstGeom prst="roundRect">
             <a:avLst>
-              <a:gd name="adj" fmla="val 9091"/>
+              <a:gd name="adj" fmla="val 8696"/>
             </a:avLst>
           </a:prstGeom>
           <a:solidFill>
@@ -8944,8 +8944,8 @@
         </p:nvSpPr>
         <p:spPr>
           <a:xfrm>
-            <a:off x="7799832" y="1472184"/>
-            <a:ext cx="3145536" cy="256032"/>
+            <a:off x="7708392" y="1453896"/>
+            <a:ext cx="3282696" cy="228600"/>
           </a:xfrm>
           <a:prstGeom prst="rect">
             <a:avLst/>
@@ -8961,7 +8961,7 @@
               <a:buNone/>
             </a:pPr>
             <a:r>
-              <a:rPr lang="en-US" sz="1300" b="1" dirty="0">
+              <a:rPr lang="en-US" sz="1220" b="1" dirty="0">
                 <a:solidFill>
                   <a:srgbClr val="0068B7"/>
                 </a:solidFill>
@@ -8971,7 +8971,7 @@
               </a:rPr>
               <a:t>Implementation cue</a:t>
             </a:r>
-            <a:endParaRPr lang="en-US" sz="1300" dirty="0"/>
+            <a:endParaRPr lang="en-US" sz="1220" dirty="0"/>
           </a:p>
         </p:txBody>
       </p:sp>
@@ -8983,8 +8983,8 @@
         </p:nvSpPr>
         <p:spPr>
           <a:xfrm>
-            <a:off x="7799832" y="1801368"/>
-            <a:ext cx="3145536" cy="640080"/>
+            <a:off x="7708392" y="1764792"/>
+            <a:ext cx="3282696" cy="749808"/>
           </a:xfrm>
           <a:prstGeom prst="rect">
             <a:avLst/>
@@ -9002,7 +9002,7 @@
               <a:buNone/>
             </a:pPr>
             <a:r>
-              <a:rPr lang="en-US" sz="1320" dirty="0">
+              <a:rPr lang="en-US" sz="1220" dirty="0">
                 <a:solidFill>
                   <a:srgbClr val="17364A"/>
                 </a:solidFill>
@@ -9012,7 +9012,7 @@
               </a:rPr>
               <a:t>Issue log template</a:t>
             </a:r>
-            <a:endParaRPr lang="en-US" sz="1320" dirty="0"/>
+            <a:endParaRPr lang="en-US" sz="1220" dirty="0"/>
           </a:p>
         </p:txBody>
       </p:sp>
@@ -9024,12 +9024,12 @@
         </p:nvSpPr>
         <p:spPr>
           <a:xfrm>
-            <a:off x="7635240" y="2670048"/>
-            <a:ext cx="3474720" cy="1377086"/>
+            <a:off x="7543800" y="2724912"/>
+            <a:ext cx="3611880" cy="1527048"/>
           </a:xfrm>
           <a:prstGeom prst="roundRect">
             <a:avLst>
-              <a:gd name="adj" fmla="val 7968"/>
+              <a:gd name="adj" fmla="val 7186"/>
             </a:avLst>
           </a:prstGeom>
           <a:solidFill>
@@ -9051,8 +9051,8 @@
         </p:nvSpPr>
         <p:spPr>
           <a:xfrm>
-            <a:off x="7799832" y="2816352"/>
-            <a:ext cx="3145536" cy="256032"/>
+            <a:off x="7708392" y="2852928"/>
+            <a:ext cx="3282696" cy="228600"/>
           </a:xfrm>
           <a:prstGeom prst="rect">
             <a:avLst/>
@@ -9068,7 +9068,7 @@
               <a:buNone/>
             </a:pPr>
             <a:r>
-              <a:rPr lang="en-US" sz="1300" b="1" dirty="0">
+              <a:rPr lang="en-US" sz="1220" b="1" dirty="0">
                 <a:solidFill>
                   <a:srgbClr val="0068B7"/>
                 </a:solidFill>
@@ -9078,7 +9078,7 @@
               </a:rPr>
               <a:t>Concept checkpoints</a:t>
             </a:r>
-            <a:endParaRPr lang="en-US" sz="1300" dirty="0"/>
+            <a:endParaRPr lang="en-US" sz="1220" dirty="0"/>
           </a:p>
         </p:txBody>
       </p:sp>
@@ -9090,8 +9090,8 @@
         </p:nvSpPr>
         <p:spPr>
           <a:xfrm>
-            <a:off x="7818120" y="3182112"/>
-            <a:ext cx="3090672" cy="718718"/>
+            <a:off x="7726680" y="3182112"/>
+            <a:ext cx="3227832" cy="960120"/>
           </a:xfrm>
           <a:prstGeom prst="rect">
             <a:avLst/>
@@ -9109,7 +9109,7 @@
               <a:buNone/>
             </a:pPr>
             <a:r>
-              <a:rPr lang="en-US" sz="1220" dirty="0">
+              <a:rPr lang="en-US" sz="1140" dirty="0">
                 <a:solidFill>
                   <a:srgbClr val="17364A"/>
                 </a:solidFill>
@@ -9119,14 +9119,14 @@
               </a:rPr>
               <a:t>Issue log template</a:t>
             </a:r>
-            <a:endParaRPr lang="en-US" sz="1220" dirty="0"/>
-          </a:p>
-          <a:p>
-            <a:pPr indent="0" marL="0">
-              <a:buNone/>
-            </a:pPr>
-            <a:r>
-              <a:rPr lang="en-US" sz="1220" dirty="0">
+            <a:endParaRPr lang="en-US" sz="1140" dirty="0"/>
+          </a:p>
+          <a:p>
+            <a:pPr indent="0" marL="0">
+              <a:buNone/>
+            </a:pPr>
+            <a:r>
+              <a:rPr lang="en-US" sz="1140" dirty="0">
                 <a:solidFill>
                   <a:srgbClr val="17364A"/>
                 </a:solidFill>
@@ -9136,7 +9136,7 @@
               </a:rPr>
               <a:t>Sign-off recommendation</a:t>
             </a:r>
-            <a:endParaRPr lang="en-US" sz="1220" dirty="0"/>
+            <a:endParaRPr lang="en-US" sz="1140" dirty="0"/>
           </a:p>
         </p:txBody>
       </p:sp>
@@ -9148,12 +9148,12 @@
         </p:nvSpPr>
         <p:spPr>
           <a:xfrm>
-            <a:off x="7635240" y="4184294"/>
-            <a:ext cx="3474720" cy="1466698"/>
+            <a:off x="7543800" y="4389120"/>
+            <a:ext cx="3611880" cy="1261872"/>
           </a:xfrm>
           <a:prstGeom prst="roundRect">
             <a:avLst>
-              <a:gd name="adj" fmla="val 7481"/>
+              <a:gd name="adj" fmla="val 8696"/>
             </a:avLst>
           </a:prstGeom>
           <a:solidFill>
@@ -9175,8 +9175,8 @@
         </p:nvSpPr>
         <p:spPr>
           <a:xfrm>
-            <a:off x="7799832" y="4330598"/>
-            <a:ext cx="3145536" cy="256032"/>
+            <a:off x="7708392" y="4517136"/>
+            <a:ext cx="3282696" cy="228600"/>
           </a:xfrm>
           <a:prstGeom prst="rect">
             <a:avLst/>
@@ -9192,7 +9192,7 @@
               <a:buNone/>
             </a:pPr>
             <a:r>
-              <a:rPr lang="en-US" sz="1300" b="1" dirty="0">
+              <a:rPr lang="en-US" sz="1220" b="1" dirty="0">
                 <a:solidFill>
                   <a:srgbClr val="0068B7"/>
                 </a:solidFill>
@@ -9202,7 +9202,7 @@
               </a:rPr>
               <a:t>Next action</a:t>
             </a:r>
-            <a:endParaRPr lang="en-US" sz="1300" dirty="0"/>
+            <a:endParaRPr lang="en-US" sz="1220" dirty="0"/>
           </a:p>
         </p:txBody>
       </p:sp>
@@ -9214,8 +9214,8 @@
         </p:nvSpPr>
         <p:spPr>
           <a:xfrm>
-            <a:off x="7799832" y="4659782"/>
-            <a:ext cx="3145536" cy="899770"/>
+            <a:off x="7708392" y="4828032"/>
+            <a:ext cx="3282696" cy="749808"/>
           </a:xfrm>
           <a:prstGeom prst="rect">
             <a:avLst/>
@@ -9233,7 +9233,7 @@
               <a:buNone/>
             </a:pPr>
             <a:r>
-              <a:rPr lang="en-US" sz="1320" dirty="0">
+              <a:rPr lang="en-US" sz="1220" dirty="0">
                 <a:solidFill>
                   <a:srgbClr val="17364A"/>
                 </a:solidFill>
@@ -9241,9 +9241,9 @@
                 <a:ea typeface="Aptos" pitchFamily="34" charset="-122"/>
                 <a:cs typeface="Aptos" pitchFamily="34" charset="-120"/>
               </a:rPr>
-              <a:t>Use the concept to clarify workflow changes, dependencies, staffing, procurement requirements, training needs, and implementation checkpoints.</a:t>
-            </a:r>
-            <a:endParaRPr lang="en-US" sz="1320" dirty="0"/>
+              <a:t>Use the concept to clarify workflow changes, dependencies, staffing, procurement.</a:t>
+            </a:r>
+            <a:endParaRPr lang="en-US" sz="1220" dirty="0"/>
           </a:p>
         </p:txBody>
       </p:sp>
@@ -9534,8 +9534,8 @@
         </p:nvSpPr>
         <p:spPr>
           <a:xfrm>
-            <a:off x="868680" y="1508760"/>
-            <a:ext cx="6309360" cy="4160520"/>
+            <a:off x="822960" y="1463040"/>
+            <a:ext cx="6565392" cy="4343400"/>
           </a:xfrm>
           <a:prstGeom prst="rect">
             <a:avLst/>
@@ -9553,7 +9553,7 @@
               <a:buNone/>
             </a:pPr>
             <a:r>
-              <a:rPr lang="en-US" sz="2100" dirty="0">
+              <a:rPr lang="en-US" sz="1920" dirty="0">
                 <a:solidFill>
                   <a:srgbClr val="003A63"/>
                 </a:solidFill>
@@ -9563,14 +9563,14 @@
               </a:rPr>
               <a:t>• UAT plan</a:t>
             </a:r>
-            <a:endParaRPr lang="en-US" sz="2100" dirty="0"/>
-          </a:p>
-          <a:p>
-            <a:pPr indent="0" marL="0">
-              <a:buNone/>
-            </a:pPr>
-            <a:r>
-              <a:rPr lang="en-US" sz="2100" dirty="0">
+            <a:endParaRPr lang="en-US" sz="1920" dirty="0"/>
+          </a:p>
+          <a:p>
+            <a:pPr indent="0" marL="0">
+              <a:buNone/>
+            </a:pPr>
+            <a:r>
+              <a:rPr lang="en-US" sz="1920" dirty="0">
                 <a:solidFill>
                   <a:srgbClr val="003A63"/>
                 </a:solidFill>
@@ -9580,14 +9580,14 @@
               </a:rPr>
               <a:t>• Role-based test scripts</a:t>
             </a:r>
-            <a:endParaRPr lang="en-US" sz="2100" dirty="0"/>
-          </a:p>
-          <a:p>
-            <a:pPr indent="0" marL="0">
-              <a:buNone/>
-            </a:pPr>
-            <a:r>
-              <a:rPr lang="en-US" sz="2100" dirty="0">
+            <a:endParaRPr lang="en-US" sz="1920" dirty="0"/>
+          </a:p>
+          <a:p>
+            <a:pPr indent="0" marL="0">
+              <a:buNone/>
+            </a:pPr>
+            <a:r>
+              <a:rPr lang="en-US" sz="1920" dirty="0">
                 <a:solidFill>
                   <a:srgbClr val="003A63"/>
                 </a:solidFill>
@@ -9597,7 +9597,7 @@
               </a:rPr>
               <a:t>• Acceptance criteria</a:t>
             </a:r>
-            <a:endParaRPr lang="en-US" sz="2100" dirty="0"/>
+            <a:endParaRPr lang="en-US" sz="1920" dirty="0"/>
           </a:p>
         </p:txBody>
       </p:sp>
@@ -9609,12 +9609,12 @@
         </p:nvSpPr>
         <p:spPr>
           <a:xfrm>
-            <a:off x="7635240" y="1325880"/>
-            <a:ext cx="3474720" cy="1207008"/>
+            <a:off x="7543800" y="1325880"/>
+            <a:ext cx="3611880" cy="1261872"/>
           </a:xfrm>
           <a:prstGeom prst="roundRect">
             <a:avLst>
-              <a:gd name="adj" fmla="val 9091"/>
+              <a:gd name="adj" fmla="val 8696"/>
             </a:avLst>
           </a:prstGeom>
           <a:solidFill>
@@ -9636,8 +9636,8 @@
         </p:nvSpPr>
         <p:spPr>
           <a:xfrm>
-            <a:off x="7799832" y="1472184"/>
-            <a:ext cx="3145536" cy="256032"/>
+            <a:off x="7708392" y="1453896"/>
+            <a:ext cx="3282696" cy="228600"/>
           </a:xfrm>
           <a:prstGeom prst="rect">
             <a:avLst/>
@@ -9653,7 +9653,7 @@
               <a:buNone/>
             </a:pPr>
             <a:r>
-              <a:rPr lang="en-US" sz="1300" b="1" dirty="0">
+              <a:rPr lang="en-US" sz="1220" b="1" dirty="0">
                 <a:solidFill>
                   <a:srgbClr val="0068B7"/>
                 </a:solidFill>
@@ -9663,7 +9663,7 @@
               </a:rPr>
               <a:t>Implementation cue</a:t>
             </a:r>
-            <a:endParaRPr lang="en-US" sz="1300" dirty="0"/>
+            <a:endParaRPr lang="en-US" sz="1220" dirty="0"/>
           </a:p>
         </p:txBody>
       </p:sp>
@@ -9675,8 +9675,8 @@
         </p:nvSpPr>
         <p:spPr>
           <a:xfrm>
-            <a:off x="7799832" y="1801368"/>
-            <a:ext cx="3145536" cy="640080"/>
+            <a:off x="7708392" y="1764792"/>
+            <a:ext cx="3282696" cy="749808"/>
           </a:xfrm>
           <a:prstGeom prst="rect">
             <a:avLst/>
@@ -9694,7 +9694,7 @@
               <a:buNone/>
             </a:pPr>
             <a:r>
-              <a:rPr lang="en-US" sz="1320" dirty="0">
+              <a:rPr lang="en-US" sz="1220" dirty="0">
                 <a:solidFill>
                   <a:srgbClr val="17364A"/>
                 </a:solidFill>
@@ -9704,7 +9704,7 @@
               </a:rPr>
               <a:t>UAT plan</a:t>
             </a:r>
-            <a:endParaRPr lang="en-US" sz="1320" dirty="0"/>
+            <a:endParaRPr lang="en-US" sz="1220" dirty="0"/>
           </a:p>
         </p:txBody>
       </p:sp>
@@ -9716,12 +9716,12 @@
         </p:nvSpPr>
         <p:spPr>
           <a:xfrm>
-            <a:off x="7635240" y="2670048"/>
-            <a:ext cx="3474720" cy="1377086"/>
+            <a:off x="7543800" y="2724912"/>
+            <a:ext cx="3611880" cy="1527048"/>
           </a:xfrm>
           <a:prstGeom prst="roundRect">
             <a:avLst>
-              <a:gd name="adj" fmla="val 7968"/>
+              <a:gd name="adj" fmla="val 7186"/>
             </a:avLst>
           </a:prstGeom>
           <a:solidFill>
@@ -9743,8 +9743,8 @@
         </p:nvSpPr>
         <p:spPr>
           <a:xfrm>
-            <a:off x="7799832" y="2816352"/>
-            <a:ext cx="3145536" cy="256032"/>
+            <a:off x="7708392" y="2852928"/>
+            <a:ext cx="3282696" cy="228600"/>
           </a:xfrm>
           <a:prstGeom prst="rect">
             <a:avLst/>
@@ -9760,7 +9760,7 @@
               <a:buNone/>
             </a:pPr>
             <a:r>
-              <a:rPr lang="en-US" sz="1300" b="1" dirty="0">
+              <a:rPr lang="en-US" sz="1220" b="1" dirty="0">
                 <a:solidFill>
                   <a:srgbClr val="0068B7"/>
                 </a:solidFill>
@@ -9770,7 +9770,7 @@
               </a:rPr>
               <a:t>Concept checkpoints</a:t>
             </a:r>
-            <a:endParaRPr lang="en-US" sz="1300" dirty="0"/>
+            <a:endParaRPr lang="en-US" sz="1220" dirty="0"/>
           </a:p>
         </p:txBody>
       </p:sp>
@@ -9782,8 +9782,8 @@
         </p:nvSpPr>
         <p:spPr>
           <a:xfrm>
-            <a:off x="7818120" y="3182112"/>
-            <a:ext cx="3090672" cy="718718"/>
+            <a:off x="7726680" y="3182112"/>
+            <a:ext cx="3227832" cy="960120"/>
           </a:xfrm>
           <a:prstGeom prst="rect">
             <a:avLst/>
@@ -9801,7 +9801,7 @@
               <a:buNone/>
             </a:pPr>
             <a:r>
-              <a:rPr lang="en-US" sz="1220" dirty="0">
+              <a:rPr lang="en-US" sz="1140" dirty="0">
                 <a:solidFill>
                   <a:srgbClr val="17364A"/>
                 </a:solidFill>
@@ -9811,14 +9811,14 @@
               </a:rPr>
               <a:t>Issue log template</a:t>
             </a:r>
-            <a:endParaRPr lang="en-US" sz="1220" dirty="0"/>
-          </a:p>
-          <a:p>
-            <a:pPr indent="0" marL="0">
-              <a:buNone/>
-            </a:pPr>
-            <a:r>
-              <a:rPr lang="en-US" sz="1220" dirty="0">
+            <a:endParaRPr lang="en-US" sz="1140" dirty="0"/>
+          </a:p>
+          <a:p>
+            <a:pPr indent="0" marL="0">
+              <a:buNone/>
+            </a:pPr>
+            <a:r>
+              <a:rPr lang="en-US" sz="1140" dirty="0">
                 <a:solidFill>
                   <a:srgbClr val="17364A"/>
                 </a:solidFill>
@@ -9828,7 +9828,7 @@
               </a:rPr>
               <a:t>Sign-off recommendation</a:t>
             </a:r>
-            <a:endParaRPr lang="en-US" sz="1220" dirty="0"/>
+            <a:endParaRPr lang="en-US" sz="1140" dirty="0"/>
           </a:p>
         </p:txBody>
       </p:sp>
@@ -9840,12 +9840,12 @@
         </p:nvSpPr>
         <p:spPr>
           <a:xfrm>
-            <a:off x="7635240" y="4184294"/>
-            <a:ext cx="3474720" cy="1466698"/>
+            <a:off x="7543800" y="4389120"/>
+            <a:ext cx="3611880" cy="1261872"/>
           </a:xfrm>
           <a:prstGeom prst="roundRect">
             <a:avLst>
-              <a:gd name="adj" fmla="val 7481"/>
+              <a:gd name="adj" fmla="val 8696"/>
             </a:avLst>
           </a:prstGeom>
           <a:solidFill>
@@ -9867,8 +9867,8 @@
         </p:nvSpPr>
         <p:spPr>
           <a:xfrm>
-            <a:off x="7799832" y="4330598"/>
-            <a:ext cx="3145536" cy="256032"/>
+            <a:off x="7708392" y="4517136"/>
+            <a:ext cx="3282696" cy="228600"/>
           </a:xfrm>
           <a:prstGeom prst="rect">
             <a:avLst/>
@@ -9884,7 +9884,7 @@
               <a:buNone/>
             </a:pPr>
             <a:r>
-              <a:rPr lang="en-US" sz="1300" b="1" dirty="0">
+              <a:rPr lang="en-US" sz="1220" b="1" dirty="0">
                 <a:solidFill>
                   <a:srgbClr val="0068B7"/>
                 </a:solidFill>
@@ -9894,7 +9894,7 @@
               </a:rPr>
               <a:t>Next action</a:t>
             </a:r>
-            <a:endParaRPr lang="en-US" sz="1300" dirty="0"/>
+            <a:endParaRPr lang="en-US" sz="1220" dirty="0"/>
           </a:p>
         </p:txBody>
       </p:sp>
@@ -9906,8 +9906,8 @@
         </p:nvSpPr>
         <p:spPr>
           <a:xfrm>
-            <a:off x="7799832" y="4659782"/>
-            <a:ext cx="3145536" cy="899770"/>
+            <a:off x="7708392" y="4828032"/>
+            <a:ext cx="3282696" cy="749808"/>
           </a:xfrm>
           <a:prstGeom prst="rect">
             <a:avLst/>
@@ -9925,7 +9925,7 @@
               <a:buNone/>
             </a:pPr>
             <a:r>
-              <a:rPr lang="en-US" sz="1320" dirty="0">
+              <a:rPr lang="en-US" sz="1220" dirty="0">
                 <a:solidFill>
                   <a:srgbClr val="17364A"/>
                 </a:solidFill>
@@ -9933,9 +9933,9 @@
                 <a:ea typeface="Aptos" pitchFamily="34" charset="-122"/>
                 <a:cs typeface="Aptos" pitchFamily="34" charset="-120"/>
               </a:rPr>
-              <a:t>Use the assignment to test whether you can explain the concept, apply it to a realistic public health situation, and identify what would need review before the work moves forward.</a:t>
-            </a:r>
-            <a:endParaRPr lang="en-US" sz="1320" dirty="0"/>
+              <a:t>Use the assignment to test whether you can explain the concept, apply it to a.</a:t>
+            </a:r>
+            <a:endParaRPr lang="en-US" sz="1220" dirty="0"/>
           </a:p>
         </p:txBody>
       </p:sp>
@@ -10253,7 +10253,7 @@
                 <a:ea typeface="Aptos" pitchFamily="34" charset="-122"/>
                 <a:cs typeface="Aptos" pitchFamily="34" charset="-120"/>
               </a:rPr>
-              <a:t>• User acceptance testing is the process of determining whether an AI-supported workflow is.</a:t>
+              <a:t>• User acceptance testing is the process of determining whether an.</a:t>
             </a:r>
             <a:endParaRPr lang="en-US" sz="2100" dirty="0"/>
           </a:p>
@@ -10270,7 +10270,7 @@
                 <a:ea typeface="Aptos" pitchFamily="34" charset="-122"/>
                 <a:cs typeface="Aptos" pitchFamily="34" charset="-120"/>
               </a:rPr>
-              <a:t>• Technical testing may show that a tool runs, and model validation may show acceptable.</a:t>
+              <a:t>• Technical testing may show that a tool runs, and model validation may show.</a:t>
             </a:r>
             <a:endParaRPr lang="en-US" sz="2100" dirty="0"/>
           </a:p>
@@ -10328,8 +10328,8 @@
         </p:nvSpPr>
         <p:spPr>
           <a:xfrm>
-            <a:off x="8074152" y="1563624"/>
-            <a:ext cx="2825496" cy="256032"/>
+            <a:off x="8074152" y="1545336"/>
+            <a:ext cx="2825496" cy="228600"/>
           </a:xfrm>
           <a:prstGeom prst="rect">
             <a:avLst/>
@@ -10345,7 +10345,7 @@
               <a:buNone/>
             </a:pPr>
             <a:r>
-              <a:rPr lang="en-US" sz="1300" b="1" dirty="0">
+              <a:rPr lang="en-US" sz="1220" b="1" dirty="0">
                 <a:solidFill>
                   <a:srgbClr val="0068B7"/>
                 </a:solidFill>
@@ -10355,7 +10355,7 @@
               </a:rPr>
               <a:t>Module details</a:t>
             </a:r>
-            <a:endParaRPr lang="en-US" sz="1300" dirty="0"/>
+            <a:endParaRPr lang="en-US" sz="1220" dirty="0"/>
           </a:p>
         </p:txBody>
       </p:sp>
@@ -10367,8 +10367,8 @@
         </p:nvSpPr>
         <p:spPr>
           <a:xfrm>
-            <a:off x="8074152" y="1892808"/>
-            <a:ext cx="2825496" cy="1353312"/>
+            <a:off x="8074152" y="1856232"/>
+            <a:ext cx="2825496" cy="1408176"/>
           </a:xfrm>
           <a:prstGeom prst="rect">
             <a:avLst/>
@@ -10386,7 +10386,7 @@
               <a:buNone/>
             </a:pPr>
             <a:r>
-              <a:rPr lang="en-US" sz="1320" dirty="0">
+              <a:rPr lang="en-US" sz="1220" dirty="0">
                 <a:solidFill>
                   <a:srgbClr val="17364A"/>
                 </a:solidFill>
@@ -10394,9 +10394,9 @@
                 <a:ea typeface="Aptos" pitchFamily="34" charset="-122"/>
                 <a:cs typeface="Aptos" pitchFamily="34" charset="-120"/>
               </a:rPr>
-              <a:t>Level: applied/foundational Primary track: Operations and Data Quality Track Appears in tracks: operations-and-data-quality, program-management, technical-architecture, analytics-and-modeling</a:t>
-            </a:r>
-            <a:endParaRPr lang="en-US" sz="1320" dirty="0"/>
+              <a:t>Level: applied/foundational Primary track: Operations and Data Quality Track.</a:t>
+            </a:r>
+            <a:endParaRPr lang="en-US" sz="1220" dirty="0"/>
           </a:p>
         </p:txBody>
       </p:sp>
@@ -10435,8 +10435,8 @@
         </p:nvSpPr>
         <p:spPr>
           <a:xfrm>
-            <a:off x="8074152" y="3822192"/>
-            <a:ext cx="2825496" cy="256032"/>
+            <a:off x="8074152" y="3803904"/>
+            <a:ext cx="2825496" cy="228600"/>
           </a:xfrm>
           <a:prstGeom prst="rect">
             <a:avLst/>
@@ -10452,7 +10452,7 @@
               <a:buNone/>
             </a:pPr>
             <a:r>
-              <a:rPr lang="en-US" sz="1300" b="1" dirty="0">
+              <a:rPr lang="en-US" sz="1220" b="1" dirty="0">
                 <a:solidFill>
                   <a:srgbClr val="0068B7"/>
                 </a:solidFill>
@@ -10462,7 +10462,7 @@
               </a:rPr>
               <a:t>Learning sequence</a:t>
             </a:r>
-            <a:endParaRPr lang="en-US" sz="1300" dirty="0"/>
+            <a:endParaRPr lang="en-US" sz="1220" dirty="0"/>
           </a:p>
         </p:txBody>
       </p:sp>
@@ -10474,8 +10474,8 @@
         </p:nvSpPr>
         <p:spPr>
           <a:xfrm>
-            <a:off x="8092440" y="4187952"/>
-            <a:ext cx="2770632" cy="1033272"/>
+            <a:off x="8092440" y="4133088"/>
+            <a:ext cx="2770632" cy="1124712"/>
           </a:xfrm>
           <a:prstGeom prst="rect">
             <a:avLst/>
@@ -10493,7 +10493,7 @@
               <a:buNone/>
             </a:pPr>
             <a:r>
-              <a:rPr lang="en-US" sz="1220" dirty="0">
+              <a:rPr lang="en-US" sz="1140" dirty="0">
                 <a:solidFill>
                   <a:srgbClr val="17364A"/>
                 </a:solidFill>
@@ -10503,14 +10503,14 @@
               </a:rPr>
               <a:t>Read the module for shared vocabulary and context.</a:t>
             </a:r>
-            <a:endParaRPr lang="en-US" sz="1220" dirty="0"/>
-          </a:p>
-          <a:p>
-            <a:pPr indent="0" marL="0">
-              <a:buNone/>
-            </a:pPr>
-            <a:r>
-              <a:rPr lang="en-US" sz="1220" dirty="0">
+            <a:endParaRPr lang="en-US" sz="1140" dirty="0"/>
+          </a:p>
+          <a:p>
+            <a:pPr indent="0" marL="0">
+              <a:buNone/>
+            </a:pPr>
+            <a:r>
+              <a:rPr lang="en-US" sz="1140" dirty="0">
                 <a:solidFill>
                   <a:srgbClr val="17364A"/>
                 </a:solidFill>
@@ -10518,16 +10518,16 @@
                 <a:ea typeface="Aptos" pitchFamily="34" charset="-122"/>
                 <a:cs typeface="Aptos" pitchFamily="34" charset="-120"/>
               </a:rPr>
-              <a:t>Complete the practical exercise to apply the concept.</a:t>
-            </a:r>
-            <a:endParaRPr lang="en-US" sz="1220" dirty="0"/>
-          </a:p>
-          <a:p>
-            <a:pPr indent="0" marL="0">
-              <a:buNone/>
-            </a:pPr>
-            <a:r>
-              <a:rPr lang="en-US" sz="1220" dirty="0">
+              <a:t>Complete the practical exercise to apply the.</a:t>
+            </a:r>
+            <a:endParaRPr lang="en-US" sz="1140" dirty="0"/>
+          </a:p>
+          <a:p>
+            <a:pPr indent="0" marL="0">
+              <a:buNone/>
+            </a:pPr>
+            <a:r>
+              <a:rPr lang="en-US" sz="1140" dirty="0">
                 <a:solidFill>
                   <a:srgbClr val="17364A"/>
                 </a:solidFill>
@@ -10537,7 +10537,7 @@
               </a:rPr>
               <a:t>Use the notes and references for deeper review.</a:t>
             </a:r>
-            <a:endParaRPr lang="en-US" sz="1220" dirty="0"/>
+            <a:endParaRPr lang="en-US" sz="1140" dirty="0"/>
           </a:p>
         </p:txBody>
       </p:sp>
@@ -10828,8 +10828,8 @@
         </p:nvSpPr>
         <p:spPr>
           <a:xfrm>
-            <a:off x="868680" y="1508760"/>
-            <a:ext cx="6309360" cy="4160520"/>
+            <a:off x="822960" y="1463040"/>
+            <a:ext cx="6565392" cy="4343400"/>
           </a:xfrm>
           <a:prstGeom prst="rect">
             <a:avLst/>
@@ -10847,7 +10847,7 @@
               <a:buNone/>
             </a:pPr>
             <a:r>
-              <a:rPr lang="en-US" sz="2100" dirty="0">
+              <a:rPr lang="en-US" sz="1920" dirty="0">
                 <a:solidFill>
                   <a:srgbClr val="003A63"/>
                 </a:solidFill>
@@ -10857,14 +10857,14 @@
               </a:rPr>
               <a:t>• 1. What is the purpose of UAT for AI-supported workflows?</a:t>
             </a:r>
-            <a:endParaRPr lang="en-US" sz="2100" dirty="0"/>
-          </a:p>
-          <a:p>
-            <a:pPr indent="0" marL="0">
-              <a:buNone/>
-            </a:pPr>
-            <a:r>
-              <a:rPr lang="en-US" sz="2100" dirty="0">
+            <a:endParaRPr lang="en-US" sz="1920" dirty="0"/>
+          </a:p>
+          <a:p>
+            <a:pPr indent="0" marL="0">
+              <a:buNone/>
+            </a:pPr>
+            <a:r>
+              <a:rPr lang="en-US" sz="1920" dirty="0">
                 <a:solidFill>
                   <a:srgbClr val="003A63"/>
                 </a:solidFill>
@@ -10874,14 +10874,14 @@
               </a:rPr>
               <a:t>• 2. Who should participate in UAT?</a:t>
             </a:r>
-            <a:endParaRPr lang="en-US" sz="2100" dirty="0"/>
-          </a:p>
-          <a:p>
-            <a:pPr indent="0" marL="0">
-              <a:buNone/>
-            </a:pPr>
-            <a:r>
-              <a:rPr lang="en-US" sz="2100" dirty="0">
+            <a:endParaRPr lang="en-US" sz="1920" dirty="0"/>
+          </a:p>
+          <a:p>
+            <a:pPr indent="0" marL="0">
+              <a:buNone/>
+            </a:pPr>
+            <a:r>
+              <a:rPr lang="en-US" sz="1920" dirty="0">
                 <a:solidFill>
                   <a:srgbClr val="003A63"/>
                 </a:solidFill>
@@ -10891,7 +10891,7 @@
               </a:rPr>
               <a:t>• 3. Which scenario should be included in AI UAT?</a:t>
             </a:r>
-            <a:endParaRPr lang="en-US" sz="2100" dirty="0"/>
+            <a:endParaRPr lang="en-US" sz="1920" dirty="0"/>
           </a:p>
         </p:txBody>
       </p:sp>
@@ -10903,12 +10903,12 @@
         </p:nvSpPr>
         <p:spPr>
           <a:xfrm>
-            <a:off x="7635240" y="1325880"/>
-            <a:ext cx="3474720" cy="1207008"/>
+            <a:off x="7543800" y="1325880"/>
+            <a:ext cx="3611880" cy="1261872"/>
           </a:xfrm>
           <a:prstGeom prst="roundRect">
             <a:avLst>
-              <a:gd name="adj" fmla="val 9091"/>
+              <a:gd name="adj" fmla="val 8696"/>
             </a:avLst>
           </a:prstGeom>
           <a:solidFill>
@@ -10930,8 +10930,8 @@
         </p:nvSpPr>
         <p:spPr>
           <a:xfrm>
-            <a:off x="7799832" y="1472184"/>
-            <a:ext cx="3145536" cy="256032"/>
+            <a:off x="7708392" y="1453896"/>
+            <a:ext cx="3282696" cy="228600"/>
           </a:xfrm>
           <a:prstGeom prst="rect">
             <a:avLst/>
@@ -10947,7 +10947,7 @@
               <a:buNone/>
             </a:pPr>
             <a:r>
-              <a:rPr lang="en-US" sz="1300" b="1" dirty="0">
+              <a:rPr lang="en-US" sz="1220" b="1" dirty="0">
                 <a:solidFill>
                   <a:srgbClr val="0068B7"/>
                 </a:solidFill>
@@ -10957,7 +10957,7 @@
               </a:rPr>
               <a:t>Implementation cue</a:t>
             </a:r>
-            <a:endParaRPr lang="en-US" sz="1300" dirty="0"/>
+            <a:endParaRPr lang="en-US" sz="1220" dirty="0"/>
           </a:p>
         </p:txBody>
       </p:sp>
@@ -10969,8 +10969,8 @@
         </p:nvSpPr>
         <p:spPr>
           <a:xfrm>
-            <a:off x="7799832" y="1801368"/>
-            <a:ext cx="3145536" cy="640080"/>
+            <a:off x="7708392" y="1764792"/>
+            <a:ext cx="3282696" cy="749808"/>
           </a:xfrm>
           <a:prstGeom prst="rect">
             <a:avLst/>
@@ -10988,7 +10988,7 @@
               <a:buNone/>
             </a:pPr>
             <a:r>
-              <a:rPr lang="en-US" sz="1320" dirty="0">
+              <a:rPr lang="en-US" sz="1220" dirty="0">
                 <a:solidFill>
                   <a:srgbClr val="17364A"/>
                 </a:solidFill>
@@ -10998,7 +10998,7 @@
               </a:rPr>
               <a:t>1. What is the purpose of UAT for AI-supported workflows?</a:t>
             </a:r>
-            <a:endParaRPr lang="en-US" sz="1320" dirty="0"/>
+            <a:endParaRPr lang="en-US" sz="1220" dirty="0"/>
           </a:p>
         </p:txBody>
       </p:sp>
@@ -11010,12 +11010,12 @@
         </p:nvSpPr>
         <p:spPr>
           <a:xfrm>
-            <a:off x="7635240" y="2670048"/>
-            <a:ext cx="3474720" cy="1377086"/>
+            <a:off x="7543800" y="2724912"/>
+            <a:ext cx="3611880" cy="1527048"/>
           </a:xfrm>
           <a:prstGeom prst="roundRect">
             <a:avLst>
-              <a:gd name="adj" fmla="val 7968"/>
+              <a:gd name="adj" fmla="val 7186"/>
             </a:avLst>
           </a:prstGeom>
           <a:solidFill>
@@ -11037,8 +11037,8 @@
         </p:nvSpPr>
         <p:spPr>
           <a:xfrm>
-            <a:off x="7799832" y="2816352"/>
-            <a:ext cx="3145536" cy="256032"/>
+            <a:off x="7708392" y="2852928"/>
+            <a:ext cx="3282696" cy="228600"/>
           </a:xfrm>
           <a:prstGeom prst="rect">
             <a:avLst/>
@@ -11054,7 +11054,7 @@
               <a:buNone/>
             </a:pPr>
             <a:r>
-              <a:rPr lang="en-US" sz="1300" b="1" dirty="0">
+              <a:rPr lang="en-US" sz="1220" b="1" dirty="0">
                 <a:solidFill>
                   <a:srgbClr val="0068B7"/>
                 </a:solidFill>
@@ -11064,7 +11064,7 @@
               </a:rPr>
               <a:t>Concept checkpoints</a:t>
             </a:r>
-            <a:endParaRPr lang="en-US" sz="1300" dirty="0"/>
+            <a:endParaRPr lang="en-US" sz="1220" dirty="0"/>
           </a:p>
         </p:txBody>
       </p:sp>
@@ -11076,8 +11076,8 @@
         </p:nvSpPr>
         <p:spPr>
           <a:xfrm>
-            <a:off x="7818120" y="3182112"/>
-            <a:ext cx="3090672" cy="718718"/>
+            <a:off x="7726680" y="3182112"/>
+            <a:ext cx="3227832" cy="960120"/>
           </a:xfrm>
           <a:prstGeom prst="rect">
             <a:avLst/>
@@ -11095,7 +11095,7 @@
               <a:buNone/>
             </a:pPr>
             <a:r>
-              <a:rPr lang="en-US" sz="1220" dirty="0">
+              <a:rPr lang="en-US" sz="1140" dirty="0">
                 <a:solidFill>
                   <a:srgbClr val="17364A"/>
                 </a:solidFill>
@@ -11105,14 +11105,14 @@
               </a:rPr>
               <a:t>1.</a:t>
             </a:r>
-            <a:endParaRPr lang="en-US" sz="1220" dirty="0"/>
-          </a:p>
-          <a:p>
-            <a:pPr indent="0" marL="0">
-              <a:buNone/>
-            </a:pPr>
-            <a:r>
-              <a:rPr lang="en-US" sz="1220" dirty="0">
+            <a:endParaRPr lang="en-US" sz="1140" dirty="0"/>
+          </a:p>
+          <a:p>
+            <a:pPr indent="0" marL="0">
+              <a:buNone/>
+            </a:pPr>
+            <a:r>
+              <a:rPr lang="en-US" sz="1140" dirty="0">
                 <a:solidFill>
                   <a:srgbClr val="17364A"/>
                 </a:solidFill>
@@ -11120,16 +11120,16 @@
                 <a:ea typeface="Aptos" pitchFamily="34" charset="-122"/>
                 <a:cs typeface="Aptos" pitchFamily="34" charset="-120"/>
               </a:rPr>
-              <a:t>What is the purpose of UAT for AI-supported workflows?</a:t>
-            </a:r>
-            <a:endParaRPr lang="en-US" sz="1220" dirty="0"/>
-          </a:p>
-          <a:p>
-            <a:pPr indent="0" marL="0">
-              <a:buNone/>
-            </a:pPr>
-            <a:r>
-              <a:rPr lang="en-US" sz="1220" dirty="0">
+              <a:t>What is the purpose of UAT for AI-supported.</a:t>
+            </a:r>
+            <a:endParaRPr lang="en-US" sz="1140" dirty="0"/>
+          </a:p>
+          <a:p>
+            <a:pPr indent="0" marL="0">
+              <a:buNone/>
+            </a:pPr>
+            <a:r>
+              <a:rPr lang="en-US" sz="1140" dirty="0">
                 <a:solidFill>
                   <a:srgbClr val="17364A"/>
                 </a:solidFill>
@@ -11139,7 +11139,7 @@
               </a:rPr>
               <a:t>2.</a:t>
             </a:r>
-            <a:endParaRPr lang="en-US" sz="1220" dirty="0"/>
+            <a:endParaRPr lang="en-US" sz="1140" dirty="0"/>
           </a:p>
         </p:txBody>
       </p:sp>
@@ -11151,12 +11151,12 @@
         </p:nvSpPr>
         <p:spPr>
           <a:xfrm>
-            <a:off x="7635240" y="4184294"/>
-            <a:ext cx="3474720" cy="1466698"/>
+            <a:off x="7543800" y="4389120"/>
+            <a:ext cx="3611880" cy="1261872"/>
           </a:xfrm>
           <a:prstGeom prst="roundRect">
             <a:avLst>
-              <a:gd name="adj" fmla="val 7481"/>
+              <a:gd name="adj" fmla="val 8696"/>
             </a:avLst>
           </a:prstGeom>
           <a:solidFill>
@@ -11178,8 +11178,8 @@
         </p:nvSpPr>
         <p:spPr>
           <a:xfrm>
-            <a:off x="7799832" y="4330598"/>
-            <a:ext cx="3145536" cy="256032"/>
+            <a:off x="7708392" y="4517136"/>
+            <a:ext cx="3282696" cy="228600"/>
           </a:xfrm>
           <a:prstGeom prst="rect">
             <a:avLst/>
@@ -11195,7 +11195,7 @@
               <a:buNone/>
             </a:pPr>
             <a:r>
-              <a:rPr lang="en-US" sz="1300" b="1" dirty="0">
+              <a:rPr lang="en-US" sz="1220" b="1" dirty="0">
                 <a:solidFill>
                   <a:srgbClr val="0068B7"/>
                 </a:solidFill>
@@ -11205,7 +11205,7 @@
               </a:rPr>
               <a:t>Next action</a:t>
             </a:r>
-            <a:endParaRPr lang="en-US" sz="1300" dirty="0"/>
+            <a:endParaRPr lang="en-US" sz="1220" dirty="0"/>
           </a:p>
         </p:txBody>
       </p:sp>
@@ -11217,8 +11217,8 @@
         </p:nvSpPr>
         <p:spPr>
           <a:xfrm>
-            <a:off x="7799832" y="4659782"/>
-            <a:ext cx="3145536" cy="899770"/>
+            <a:off x="7708392" y="4828032"/>
+            <a:ext cx="3282696" cy="749808"/>
           </a:xfrm>
           <a:prstGeom prst="rect">
             <a:avLst/>
@@ -11236,7 +11236,7 @@
               <a:buNone/>
             </a:pPr>
             <a:r>
-              <a:rPr lang="en-US" sz="1320" dirty="0">
+              <a:rPr lang="en-US" sz="1220" dirty="0">
                 <a:solidFill>
                   <a:srgbClr val="17364A"/>
                 </a:solidFill>
@@ -11244,9 +11244,9 @@
                 <a:ea typeface="Aptos" pitchFamily="34" charset="-122"/>
                 <a:cs typeface="Aptos" pitchFamily="34" charset="-120"/>
               </a:rPr>
-              <a:t>Use the assignment to test whether you can explain the concept, apply it to a realistic public health situation, and identify what would need review before the work moves forward.</a:t>
-            </a:r>
-            <a:endParaRPr lang="en-US" sz="1320" dirty="0"/>
+              <a:t>Use the assignment to test whether you can explain the concept, apply it to a.</a:t>
+            </a:r>
+            <a:endParaRPr lang="en-US" sz="1220" dirty="0"/>
           </a:p>
         </p:txBody>
       </p:sp>
@@ -11537,8 +11537,8 @@
         </p:nvSpPr>
         <p:spPr>
           <a:xfrm>
-            <a:off x="868680" y="1508760"/>
-            <a:ext cx="6309360" cy="4160520"/>
+            <a:off x="822960" y="1463040"/>
+            <a:ext cx="6565392" cy="4343400"/>
           </a:xfrm>
           <a:prstGeom prst="rect">
             <a:avLst/>
@@ -11556,7 +11556,7 @@
               <a:buNone/>
             </a:pPr>
             <a:r>
-              <a:rPr lang="en-US" sz="2100" dirty="0">
+              <a:rPr lang="en-US" sz="1920" dirty="0">
                 <a:solidFill>
                   <a:srgbClr val="003A63"/>
                 </a:solidFill>
@@ -11566,14 +11566,14 @@
               </a:rPr>
               <a:t>• CDC Evaluation Framework: https://www.cdc.gov/evaluation/</a:t>
             </a:r>
-            <a:endParaRPr lang="en-US" sz="2100" dirty="0"/>
-          </a:p>
-          <a:p>
-            <a:pPr indent="0" marL="0">
-              <a:buNone/>
-            </a:pPr>
-            <a:r>
-              <a:rPr lang="en-US" sz="2100" dirty="0">
+            <a:endParaRPr lang="en-US" sz="1920" dirty="0"/>
+          </a:p>
+          <a:p>
+            <a:pPr indent="0" marL="0">
+              <a:buNone/>
+            </a:pPr>
+            <a:r>
+              <a:rPr lang="en-US" sz="1920" dirty="0">
                 <a:solidFill>
                   <a:srgbClr val="003A63"/>
                 </a:solidFill>
@@ -11583,14 +11583,14 @@
               </a:rPr>
               <a:t>• NIST Artificial Intelligence Risk Management Framework:.</a:t>
             </a:r>
-            <a:endParaRPr lang="en-US" sz="2100" dirty="0"/>
-          </a:p>
-          <a:p>
-            <a:pPr indent="0" marL="0">
-              <a:buNone/>
-            </a:pPr>
-            <a:r>
-              <a:rPr lang="en-US" sz="2100" dirty="0">
+            <a:endParaRPr lang="en-US" sz="1920" dirty="0"/>
+          </a:p>
+          <a:p>
+            <a:pPr indent="0" marL="0">
+              <a:buNone/>
+            </a:pPr>
+            <a:r>
+              <a:rPr lang="en-US" sz="1920" dirty="0">
                 <a:solidFill>
                   <a:srgbClr val="003A63"/>
                 </a:solidFill>
@@ -11600,7 +11600,7 @@
               </a:rPr>
               <a:t>• NIST AI RMF Generative AI Profile:.</a:t>
             </a:r>
-            <a:endParaRPr lang="en-US" sz="2100" dirty="0"/>
+            <a:endParaRPr lang="en-US" sz="1920" dirty="0"/>
           </a:p>
         </p:txBody>
       </p:sp>
@@ -11612,12 +11612,12 @@
         </p:nvSpPr>
         <p:spPr>
           <a:xfrm>
-            <a:off x="7635240" y="1325880"/>
-            <a:ext cx="3474720" cy="1207008"/>
+            <a:off x="7543800" y="1325880"/>
+            <a:ext cx="3611880" cy="1261872"/>
           </a:xfrm>
           <a:prstGeom prst="roundRect">
             <a:avLst>
-              <a:gd name="adj" fmla="val 9091"/>
+              <a:gd name="adj" fmla="val 8696"/>
             </a:avLst>
           </a:prstGeom>
           <a:solidFill>
@@ -11639,8 +11639,8 @@
         </p:nvSpPr>
         <p:spPr>
           <a:xfrm>
-            <a:off x="7799832" y="1472184"/>
-            <a:ext cx="3145536" cy="256032"/>
+            <a:off x="7708392" y="1453896"/>
+            <a:ext cx="3282696" cy="228600"/>
           </a:xfrm>
           <a:prstGeom prst="rect">
             <a:avLst/>
@@ -11656,7 +11656,7 @@
               <a:buNone/>
             </a:pPr>
             <a:r>
-              <a:rPr lang="en-US" sz="1300" b="1" dirty="0">
+              <a:rPr lang="en-US" sz="1220" b="1" dirty="0">
                 <a:solidFill>
                   <a:srgbClr val="0068B7"/>
                 </a:solidFill>
@@ -11666,7 +11666,7 @@
               </a:rPr>
               <a:t>Implementation cue</a:t>
             </a:r>
-            <a:endParaRPr lang="en-US" sz="1300" dirty="0"/>
+            <a:endParaRPr lang="en-US" sz="1220" dirty="0"/>
           </a:p>
         </p:txBody>
       </p:sp>
@@ -11678,8 +11678,8 @@
         </p:nvSpPr>
         <p:spPr>
           <a:xfrm>
-            <a:off x="7799832" y="1801368"/>
-            <a:ext cx="3145536" cy="640080"/>
+            <a:off x="7708392" y="1764792"/>
+            <a:ext cx="3282696" cy="749808"/>
           </a:xfrm>
           <a:prstGeom prst="rect">
             <a:avLst/>
@@ -11697,7 +11697,7 @@
               <a:buNone/>
             </a:pPr>
             <a:r>
-              <a:rPr lang="en-US" sz="1320" dirty="0">
+              <a:rPr lang="en-US" sz="1220" dirty="0">
                 <a:solidFill>
                   <a:srgbClr val="17364A"/>
                 </a:solidFill>
@@ -11707,7 +11707,7 @@
               </a:rPr>
               <a:t>CDC Evaluation Framework: https://www.cdc.gov/evaluation/</a:t>
             </a:r>
-            <a:endParaRPr lang="en-US" sz="1320" dirty="0"/>
+            <a:endParaRPr lang="en-US" sz="1220" dirty="0"/>
           </a:p>
         </p:txBody>
       </p:sp>
@@ -11719,12 +11719,12 @@
         </p:nvSpPr>
         <p:spPr>
           <a:xfrm>
-            <a:off x="7635240" y="2670048"/>
-            <a:ext cx="3474720" cy="1377086"/>
+            <a:off x="7543800" y="2724912"/>
+            <a:ext cx="3611880" cy="1527048"/>
           </a:xfrm>
           <a:prstGeom prst="roundRect">
             <a:avLst>
-              <a:gd name="adj" fmla="val 7968"/>
+              <a:gd name="adj" fmla="val 7186"/>
             </a:avLst>
           </a:prstGeom>
           <a:solidFill>
@@ -11746,8 +11746,8 @@
         </p:nvSpPr>
         <p:spPr>
           <a:xfrm>
-            <a:off x="7799832" y="2816352"/>
-            <a:ext cx="3145536" cy="256032"/>
+            <a:off x="7708392" y="2852928"/>
+            <a:ext cx="3282696" cy="228600"/>
           </a:xfrm>
           <a:prstGeom prst="rect">
             <a:avLst/>
@@ -11763,7 +11763,7 @@
               <a:buNone/>
             </a:pPr>
             <a:r>
-              <a:rPr lang="en-US" sz="1300" b="1" dirty="0">
+              <a:rPr lang="en-US" sz="1220" b="1" dirty="0">
                 <a:solidFill>
                   <a:srgbClr val="0068B7"/>
                 </a:solidFill>
@@ -11773,7 +11773,7 @@
               </a:rPr>
               <a:t>Concept checkpoints</a:t>
             </a:r>
-            <a:endParaRPr lang="en-US" sz="1300" dirty="0"/>
+            <a:endParaRPr lang="en-US" sz="1220" dirty="0"/>
           </a:p>
         </p:txBody>
       </p:sp>
@@ -11785,8 +11785,8 @@
         </p:nvSpPr>
         <p:spPr>
           <a:xfrm>
-            <a:off x="7818120" y="3182112"/>
-            <a:ext cx="3090672" cy="718718"/>
+            <a:off x="7726680" y="3182112"/>
+            <a:ext cx="3227832" cy="960120"/>
           </a:xfrm>
           <a:prstGeom prst="rect">
             <a:avLst/>
@@ -11804,7 +11804,7 @@
               <a:buNone/>
             </a:pPr>
             <a:r>
-              <a:rPr lang="en-US" sz="1220" dirty="0">
+              <a:rPr lang="en-US" sz="1140" dirty="0">
                 <a:solidFill>
                   <a:srgbClr val="17364A"/>
                 </a:solidFill>
@@ -11812,16 +11812,16 @@
                 <a:ea typeface="Aptos" pitchFamily="34" charset="-122"/>
                 <a:cs typeface="Aptos" pitchFamily="34" charset="-120"/>
               </a:rPr>
-              <a:t>NIST Artificial Intelligence Risk Management Framework:.</a:t>
-            </a:r>
-            <a:endParaRPr lang="en-US" sz="1220" dirty="0"/>
-          </a:p>
-          <a:p>
-            <a:pPr indent="0" marL="0">
-              <a:buNone/>
-            </a:pPr>
-            <a:r>
-              <a:rPr lang="en-US" sz="1220" dirty="0">
+              <a:t>NIST Artificial Intelligence Risk Management.</a:t>
+            </a:r>
+            <a:endParaRPr lang="en-US" sz="1140" dirty="0"/>
+          </a:p>
+          <a:p>
+            <a:pPr indent="0" marL="0">
+              <a:buNone/>
+            </a:pPr>
+            <a:r>
+              <a:rPr lang="en-US" sz="1140" dirty="0">
                 <a:solidFill>
                   <a:srgbClr val="17364A"/>
                 </a:solidFill>
@@ -11831,14 +11831,14 @@
               </a:rPr>
               <a:t>CDC Public Health Data Strategy:.</a:t>
             </a:r>
-            <a:endParaRPr lang="en-US" sz="1220" dirty="0"/>
-          </a:p>
-          <a:p>
-            <a:pPr indent="0" marL="0">
-              <a:buNone/>
-            </a:pPr>
-            <a:r>
-              <a:rPr lang="en-US" sz="1220" dirty="0">
+            <a:endParaRPr lang="en-US" sz="1140" dirty="0"/>
+          </a:p>
+          <a:p>
+            <a:pPr indent="0" marL="0">
+              <a:buNone/>
+            </a:pPr>
+            <a:r>
+              <a:rPr lang="en-US" sz="1140" dirty="0">
                 <a:solidFill>
                   <a:srgbClr val="17364A"/>
                 </a:solidFill>
@@ -11846,9 +11846,9 @@
                 <a:ea typeface="Aptos" pitchFamily="34" charset="-122"/>
                 <a:cs typeface="Aptos" pitchFamily="34" charset="-120"/>
               </a:rPr>
-              <a:t>Agency user acceptance testing, quality assurance, accessibility,.</a:t>
-            </a:r>
-            <a:endParaRPr lang="en-US" sz="1220" dirty="0"/>
+              <a:t>Agency user acceptance testing, quality assurance,.</a:t>
+            </a:r>
+            <a:endParaRPr lang="en-US" sz="1140" dirty="0"/>
           </a:p>
         </p:txBody>
       </p:sp>
@@ -11860,12 +11860,12 @@
         </p:nvSpPr>
         <p:spPr>
           <a:xfrm>
-            <a:off x="7635240" y="4184294"/>
-            <a:ext cx="3474720" cy="1466698"/>
+            <a:off x="7543800" y="4389120"/>
+            <a:ext cx="3611880" cy="1261872"/>
           </a:xfrm>
           <a:prstGeom prst="roundRect">
             <a:avLst>
-              <a:gd name="adj" fmla="val 7481"/>
+              <a:gd name="adj" fmla="val 8696"/>
             </a:avLst>
           </a:prstGeom>
           <a:solidFill>
@@ -11887,8 +11887,8 @@
         </p:nvSpPr>
         <p:spPr>
           <a:xfrm>
-            <a:off x="7799832" y="4330598"/>
-            <a:ext cx="3145536" cy="256032"/>
+            <a:off x="7708392" y="4517136"/>
+            <a:ext cx="3282696" cy="228600"/>
           </a:xfrm>
           <a:prstGeom prst="rect">
             <a:avLst/>
@@ -11904,7 +11904,7 @@
               <a:buNone/>
             </a:pPr>
             <a:r>
-              <a:rPr lang="en-US" sz="1300" b="1" dirty="0">
+              <a:rPr lang="en-US" sz="1220" b="1" dirty="0">
                 <a:solidFill>
                   <a:srgbClr val="0068B7"/>
                 </a:solidFill>
@@ -11914,7 +11914,7 @@
               </a:rPr>
               <a:t>Next action</a:t>
             </a:r>
-            <a:endParaRPr lang="en-US" sz="1300" dirty="0"/>
+            <a:endParaRPr lang="en-US" sz="1220" dirty="0"/>
           </a:p>
         </p:txBody>
       </p:sp>
@@ -11926,8 +11926,8 @@
         </p:nvSpPr>
         <p:spPr>
           <a:xfrm>
-            <a:off x="7799832" y="4659782"/>
-            <a:ext cx="3145536" cy="899770"/>
+            <a:off x="7708392" y="4828032"/>
+            <a:ext cx="3282696" cy="749808"/>
           </a:xfrm>
           <a:prstGeom prst="rect">
             <a:avLst/>
@@ -11945,7 +11945,7 @@
               <a:buNone/>
             </a:pPr>
             <a:r>
-              <a:rPr lang="en-US" sz="1320" dirty="0">
+              <a:rPr lang="en-US" sz="1220" dirty="0">
                 <a:solidFill>
                   <a:srgbClr val="17364A"/>
                 </a:solidFill>
@@ -11953,9 +11953,9 @@
                 <a:ea typeface="Aptos" pitchFamily="34" charset="-122"/>
                 <a:cs typeface="Aptos" pitchFamily="34" charset="-120"/>
               </a:rPr>
-              <a:t>Use the concept to clarify workflow changes, dependencies, staffing, procurement requirements, training needs, and implementation checkpoints.</a:t>
-            </a:r>
-            <a:endParaRPr lang="en-US" sz="1320" dirty="0"/>
+              <a:t>Use the concept to clarify workflow changes, dependencies, staffing, procurement.</a:t>
+            </a:r>
+            <a:endParaRPr lang="en-US" sz="1220" dirty="0"/>
           </a:p>
         </p:txBody>
       </p:sp>
@@ -12273,7 +12273,7 @@
                 <a:ea typeface="Aptos" pitchFamily="34" charset="-122"/>
                 <a:cs typeface="Aptos" pitchFamily="34" charset="-120"/>
               </a:rPr>
-              <a:t>• Play 11: Build and Deploy AI Solutions - This lesson informs Play 11 by helping learners.</a:t>
+              <a:t>• Play 11: Build and Deploy AI Solutions - This lesson informs Play 11 by.</a:t>
             </a:r>
             <a:endParaRPr lang="en-US" sz="1900" dirty="0"/>
           </a:p>
@@ -12290,7 +12290,7 @@
                 <a:ea typeface="Aptos" pitchFamily="34" charset="-122"/>
                 <a:cs typeface="Aptos" pitchFamily="34" charset="-120"/>
               </a:rPr>
-              <a:t>• Play 2: Readiness Assessment - This lesson informs Play 2 by helping learners connect the.</a:t>
+              <a:t>• Play 2: Readiness Assessment - This lesson informs Play 2 by helping.</a:t>
             </a:r>
             <a:endParaRPr lang="en-US" sz="1900" dirty="0"/>
           </a:p>
@@ -12307,7 +12307,7 @@
                 <a:ea typeface="Aptos" pitchFamily="34" charset="-122"/>
                 <a:cs typeface="Aptos" pitchFamily="34" charset="-120"/>
               </a:rPr>
-              <a:t>• Play 1: Vision &amp; Guardrails - This lesson informs Play 1 by helping learners connect the.</a:t>
+              <a:t>• Play 1: Vision &amp; Guardrails - This lesson informs Play 1 by helping learners.</a:t>
             </a:r>
             <a:endParaRPr lang="en-US" sz="1900" dirty="0"/>
           </a:p>
@@ -12324,7 +12324,7 @@
                 <a:ea typeface="Aptos" pitchFamily="34" charset="-122"/>
                 <a:cs typeface="Aptos" pitchFamily="34" charset="-120"/>
               </a:rPr>
-              <a:t>• Play 7: Prioritize Use Cases - This lesson informs Play 7 by helping learners connect the.</a:t>
+              <a:t>• Play 7: Prioritize Use Cases - This lesson informs Play 7 by helping.</a:t>
             </a:r>
             <a:endParaRPr lang="en-US" sz="1900" dirty="0"/>
           </a:p>
@@ -12365,8 +12365,8 @@
         </p:nvSpPr>
         <p:spPr>
           <a:xfrm>
-            <a:off x="8211312" y="1563624"/>
-            <a:ext cx="2734056" cy="256032"/>
+            <a:off x="8211312" y="1545336"/>
+            <a:ext cx="2734056" cy="228600"/>
           </a:xfrm>
           <a:prstGeom prst="rect">
             <a:avLst/>
@@ -12382,7 +12382,7 @@
               <a:buNone/>
             </a:pPr>
             <a:r>
-              <a:rPr lang="en-US" sz="1300" b="1" dirty="0">
+              <a:rPr lang="en-US" sz="1220" b="1" dirty="0">
                 <a:solidFill>
                   <a:srgbClr val="0068B7"/>
                 </a:solidFill>
@@ -12392,7 +12392,7 @@
               </a:rPr>
               <a:t>Apply the lesson</a:t>
             </a:r>
-            <a:endParaRPr lang="en-US" sz="1300" dirty="0"/>
+            <a:endParaRPr lang="en-US" sz="1220" dirty="0"/>
           </a:p>
         </p:txBody>
       </p:sp>
@@ -12404,8 +12404,8 @@
         </p:nvSpPr>
         <p:spPr>
           <a:xfrm>
-            <a:off x="8211312" y="1892808"/>
-            <a:ext cx="2734056" cy="1536192"/>
+            <a:off x="8211312" y="1856232"/>
+            <a:ext cx="2734056" cy="1591056"/>
           </a:xfrm>
           <a:prstGeom prst="rect">
             <a:avLst/>
@@ -12423,7 +12423,7 @@
               <a:buNone/>
             </a:pPr>
             <a:r>
-              <a:rPr lang="en-US" sz="1320" dirty="0">
+              <a:rPr lang="en-US" sz="1220" dirty="0">
                 <a:solidFill>
                   <a:srgbClr val="17364A"/>
                 </a:solidFill>
@@ -12431,9 +12431,9 @@
                 <a:ea typeface="Aptos" pitchFamily="34" charset="-122"/>
                 <a:cs typeface="Aptos" pitchFamily="34" charset="-120"/>
               </a:rPr>
-              <a:t>Use the related plays to identify decisions, participants, timing, approvals, and documentation needed for responsible implementation.</a:t>
-            </a:r>
-            <a:endParaRPr lang="en-US" sz="1320" dirty="0"/>
+              <a:t>Use the related plays to identify decisions, participants, timing, approvals,.</a:t>
+            </a:r>
+            <a:endParaRPr lang="en-US" sz="1220" dirty="0"/>
           </a:p>
         </p:txBody>
       </p:sp>
@@ -12472,8 +12472,8 @@
         </p:nvSpPr>
         <p:spPr>
           <a:xfrm>
-            <a:off x="8211312" y="3941064"/>
-            <a:ext cx="2734056" cy="256032"/>
+            <a:off x="8211312" y="3922776"/>
+            <a:ext cx="2734056" cy="228600"/>
           </a:xfrm>
           <a:prstGeom prst="rect">
             <a:avLst/>
@@ -12489,7 +12489,7 @@
               <a:buNone/>
             </a:pPr>
             <a:r>
-              <a:rPr lang="en-US" sz="1300" b="1" dirty="0">
+              <a:rPr lang="en-US" sz="1220" b="1" dirty="0">
                 <a:solidFill>
                   <a:srgbClr val="0068B7"/>
                 </a:solidFill>
@@ -12499,7 +12499,7 @@
               </a:rPr>
               <a:t>Use the play links to</a:t>
             </a:r>
-            <a:endParaRPr lang="en-US" sz="1300" dirty="0"/>
+            <a:endParaRPr lang="en-US" sz="1220" dirty="0"/>
           </a:p>
         </p:txBody>
       </p:sp>
@@ -12511,8 +12511,8 @@
         </p:nvSpPr>
         <p:spPr>
           <a:xfrm>
-            <a:off x="8229600" y="4306824"/>
-            <a:ext cx="2679192" cy="941832"/>
+            <a:off x="8229600" y="4251960"/>
+            <a:ext cx="2679192" cy="1033272"/>
           </a:xfrm>
           <a:prstGeom prst="rect">
             <a:avLst/>
@@ -12530,7 +12530,7 @@
               <a:buNone/>
             </a:pPr>
             <a:r>
-              <a:rPr lang="en-US" sz="1220" dirty="0">
+              <a:rPr lang="en-US" sz="1140" dirty="0">
                 <a:solidFill>
                   <a:srgbClr val="17364A"/>
                 </a:solidFill>
@@ -12540,14 +12540,14 @@
               </a:rPr>
               <a:t>Locate the decision point in the playbook sequence.</a:t>
             </a:r>
-            <a:endParaRPr lang="en-US" sz="1220" dirty="0"/>
-          </a:p>
-          <a:p>
-            <a:pPr indent="0" marL="0">
-              <a:buNone/>
-            </a:pPr>
-            <a:r>
-              <a:rPr lang="en-US" sz="1220" dirty="0">
+            <a:endParaRPr lang="en-US" sz="1140" dirty="0"/>
+          </a:p>
+          <a:p>
+            <a:pPr indent="0" marL="0">
+              <a:buNone/>
+            </a:pPr>
+            <a:r>
+              <a:rPr lang="en-US" sz="1140" dirty="0">
                 <a:solidFill>
                   <a:srgbClr val="17364A"/>
                 </a:solidFill>
@@ -12557,14 +12557,14 @@
               </a:rPr>
               <a:t>Identify who should participate in the work.</a:t>
             </a:r>
-            <a:endParaRPr lang="en-US" sz="1220" dirty="0"/>
-          </a:p>
-          <a:p>
-            <a:pPr indent="0" marL="0">
-              <a:buNone/>
-            </a:pPr>
-            <a:r>
-              <a:rPr lang="en-US" sz="1220" dirty="0">
+            <a:endParaRPr lang="en-US" sz="1140" dirty="0"/>
+          </a:p>
+          <a:p>
+            <a:pPr indent="0" marL="0">
+              <a:buNone/>
+            </a:pPr>
+            <a:r>
+              <a:rPr lang="en-US" sz="1140" dirty="0">
                 <a:solidFill>
                   <a:srgbClr val="17364A"/>
                 </a:solidFill>
@@ -12572,9 +12572,9 @@
                 <a:ea typeface="Aptos" pitchFamily="34" charset="-122"/>
                 <a:cs typeface="Aptos" pitchFamily="34" charset="-120"/>
               </a:rPr>
-              <a:t>Document the review, approval, or implementation step.</a:t>
-            </a:r>
-            <a:endParaRPr lang="en-US" sz="1220" dirty="0"/>
+              <a:t>Document the review, approval, or implementation.</a:t>
+            </a:r>
+            <a:endParaRPr lang="en-US" sz="1140" dirty="0"/>
           </a:p>
         </p:txBody>
       </p:sp>
@@ -12892,7 +12892,7 @@
                 <a:ea typeface="Aptos" pitchFamily="34" charset="-122"/>
                 <a:cs typeface="Aptos" pitchFamily="34" charset="-120"/>
               </a:rPr>
-              <a:t>• Tool 4: AI Policy Landscape Scan (Worksheet) - Use AI Policy Landscape Scan to translate this.</a:t>
+              <a:t>• Tool 4: AI Policy Landscape Scan (Worksheet) - Use AI Policy Landscape Scan.</a:t>
             </a:r>
             <a:endParaRPr lang="en-US" sz="1850" dirty="0"/>
           </a:p>
@@ -12909,7 +12909,7 @@
                 <a:ea typeface="Aptos" pitchFamily="34" charset="-122"/>
                 <a:cs typeface="Aptos" pitchFamily="34" charset="-120"/>
               </a:rPr>
-              <a:t>• Tool 5: AI Environmental and Resource Impact Review (Checklist) - Use AI Environmental and.</a:t>
+              <a:t>• Tool 5: AI Environmental and Resource Impact Review (Checklist) - Use AI.</a:t>
             </a:r>
             <a:endParaRPr lang="en-US" sz="1850" dirty="0"/>
           </a:p>
@@ -12926,7 +12926,7 @@
                 <a:ea typeface="Aptos" pitchFamily="34" charset="-122"/>
                 <a:cs typeface="Aptos" pitchFamily="34" charset="-120"/>
               </a:rPr>
-              <a:t>• Tool 6: Human-Centered AI Decision Rule Checklist (Checklist) - Use Human-Centered AI Decision.</a:t>
+              <a:t>• Tool 6: Human-Centered AI Decision Rule Checklist (Checklist) - Use.</a:t>
             </a:r>
             <a:endParaRPr lang="en-US" sz="1850" dirty="0"/>
           </a:p>
@@ -12943,7 +12943,7 @@
                 <a:ea typeface="Aptos" pitchFamily="34" charset="-122"/>
                 <a:cs typeface="Aptos" pitchFamily="34" charset="-120"/>
               </a:rPr>
-              <a:t>• Tool 8: AI Project Charter (Planning) - Use AI Project Charter to translate this lesson into a.</a:t>
+              <a:t>• Tool 8: AI Project Charter (Planning) - Use AI Project Charter to translate.</a:t>
             </a:r>
             <a:endParaRPr lang="en-US" sz="1850" dirty="0"/>
           </a:p>
@@ -12984,8 +12984,8 @@
         </p:nvSpPr>
         <p:spPr>
           <a:xfrm>
-            <a:off x="8211312" y="1563624"/>
-            <a:ext cx="2734056" cy="256032"/>
+            <a:off x="8211312" y="1545336"/>
+            <a:ext cx="2734056" cy="228600"/>
           </a:xfrm>
           <a:prstGeom prst="rect">
             <a:avLst/>
@@ -13001,7 +13001,7 @@
               <a:buNone/>
             </a:pPr>
             <a:r>
-              <a:rPr lang="en-US" sz="1300" b="1" dirty="0">
+              <a:rPr lang="en-US" sz="1220" b="1" dirty="0">
                 <a:solidFill>
                   <a:srgbClr val="0068B7"/>
                 </a:solidFill>
@@ -13011,7 +13011,7 @@
               </a:rPr>
               <a:t>Use the tools</a:t>
             </a:r>
-            <a:endParaRPr lang="en-US" sz="1300" dirty="0"/>
+            <a:endParaRPr lang="en-US" sz="1220" dirty="0"/>
           </a:p>
         </p:txBody>
       </p:sp>
@@ -13023,8 +13023,8 @@
         </p:nvSpPr>
         <p:spPr>
           <a:xfrm>
-            <a:off x="8211312" y="1892808"/>
-            <a:ext cx="2734056" cy="1536192"/>
+            <a:off x="8211312" y="1856232"/>
+            <a:ext cx="2734056" cy="1591056"/>
           </a:xfrm>
           <a:prstGeom prst="rect">
             <a:avLst/>
@@ -13042,7 +13042,7 @@
               <a:buNone/>
             </a:pPr>
             <a:r>
-              <a:rPr lang="en-US" sz="1320" dirty="0">
+              <a:rPr lang="en-US" sz="1220" dirty="0">
                 <a:solidFill>
                   <a:srgbClr val="17364A"/>
                 </a:solidFill>
@@ -13050,9 +13050,9 @@
                 <a:ea typeface="Aptos" pitchFamily="34" charset="-122"/>
                 <a:cs typeface="Aptos" pitchFamily="34" charset="-120"/>
               </a:rPr>
-              <a:t>Use linked tools when your department needs a structured worksheet, template, checklist, review process, or documentation artifact.</a:t>
-            </a:r>
-            <a:endParaRPr lang="en-US" sz="1320" dirty="0"/>
+              <a:t>Use linked tools when your department needs a structured worksheet, template,.</a:t>
+            </a:r>
+            <a:endParaRPr lang="en-US" sz="1220" dirty="0"/>
           </a:p>
         </p:txBody>
       </p:sp>
@@ -13091,8 +13091,8 @@
         </p:nvSpPr>
         <p:spPr>
           <a:xfrm>
-            <a:off x="8211312" y="3941064"/>
-            <a:ext cx="2734056" cy="256032"/>
+            <a:off x="8211312" y="3922776"/>
+            <a:ext cx="2734056" cy="228600"/>
           </a:xfrm>
           <a:prstGeom prst="rect">
             <a:avLst/>
@@ -13108,7 +13108,7 @@
               <a:buNone/>
             </a:pPr>
             <a:r>
-              <a:rPr lang="en-US" sz="1300" b="1" dirty="0">
+              <a:rPr lang="en-US" sz="1220" b="1" dirty="0">
                 <a:solidFill>
                   <a:srgbClr val="0068B7"/>
                 </a:solidFill>
@@ -13118,7 +13118,7 @@
               </a:rPr>
               <a:t>Tool selection cues</a:t>
             </a:r>
-            <a:endParaRPr lang="en-US" sz="1300" dirty="0"/>
+            <a:endParaRPr lang="en-US" sz="1220" dirty="0"/>
           </a:p>
         </p:txBody>
       </p:sp>
@@ -13130,8 +13130,8 @@
         </p:nvSpPr>
         <p:spPr>
           <a:xfrm>
-            <a:off x="8229600" y="4306824"/>
-            <a:ext cx="2679192" cy="941832"/>
+            <a:off x="8229600" y="4251960"/>
+            <a:ext cx="2679192" cy="1033272"/>
           </a:xfrm>
           <a:prstGeom prst="rect">
             <a:avLst/>
@@ -13149,7 +13149,7 @@
               <a:buNone/>
             </a:pPr>
             <a:r>
-              <a:rPr lang="en-US" sz="1220" dirty="0">
+              <a:rPr lang="en-US" sz="1140" dirty="0">
                 <a:solidFill>
                   <a:srgbClr val="17364A"/>
                 </a:solidFill>
@@ -13159,14 +13159,14 @@
               </a:rPr>
               <a:t>Use a tool when no comparable local process exists.</a:t>
             </a:r>
-            <a:endParaRPr lang="en-US" sz="1220" dirty="0"/>
-          </a:p>
-          <a:p>
-            <a:pPr indent="0" marL="0">
-              <a:buNone/>
-            </a:pPr>
-            <a:r>
-              <a:rPr lang="en-US" sz="1220" dirty="0">
+            <a:endParaRPr lang="en-US" sz="1140" dirty="0"/>
+          </a:p>
+          <a:p>
+            <a:pPr indent="0" marL="0">
+              <a:buNone/>
+            </a:pPr>
+            <a:r>
+              <a:rPr lang="en-US" sz="1140" dirty="0">
                 <a:solidFill>
                   <a:srgbClr val="17364A"/>
                 </a:solidFill>
@@ -13174,16 +13174,16 @@
                 <a:ea typeface="Aptos" pitchFamily="34" charset="-122"/>
                 <a:cs typeface="Aptos" pitchFamily="34" charset="-120"/>
               </a:rPr>
-              <a:t>Adapt existing department templates when they already fit the.</a:t>
-            </a:r>
-            <a:endParaRPr lang="en-US" sz="1220" dirty="0"/>
-          </a:p>
-          <a:p>
-            <a:pPr indent="0" marL="0">
-              <a:buNone/>
-            </a:pPr>
-            <a:r>
-              <a:rPr lang="en-US" sz="1220" dirty="0">
+              <a:t>Adapt existing department templates when they.</a:t>
+            </a:r>
+            <a:endParaRPr lang="en-US" sz="1140" dirty="0"/>
+          </a:p>
+          <a:p>
+            <a:pPr indent="0" marL="0">
+              <a:buNone/>
+            </a:pPr>
+            <a:r>
+              <a:rPr lang="en-US" sz="1140" dirty="0">
                 <a:solidFill>
                   <a:srgbClr val="17364A"/>
                 </a:solidFill>
@@ -13191,9 +13191,9 @@
                 <a:ea typeface="Aptos" pitchFamily="34" charset="-122"/>
                 <a:cs typeface="Aptos" pitchFamily="34" charset="-120"/>
               </a:rPr>
-              <a:t>Save the completed artifact as evidence of the decision.</a:t>
-            </a:r>
-            <a:endParaRPr lang="en-US" sz="1220" dirty="0"/>
+              <a:t>Save the completed artifact as evidence of the.</a:t>
+            </a:r>
+            <a:endParaRPr lang="en-US" sz="1140" dirty="0"/>
           </a:p>
         </p:txBody>
       </p:sp>
@@ -13484,8 +13484,8 @@
         </p:nvSpPr>
         <p:spPr>
           <a:xfrm>
-            <a:off x="868680" y="1508760"/>
-            <a:ext cx="6309360" cy="4160520"/>
+            <a:off x="822960" y="1463040"/>
+            <a:ext cx="6565392" cy="4343400"/>
           </a:xfrm>
           <a:prstGeom prst="rect">
             <a:avLst/>
@@ -13503,7 +13503,7 @@
               <a:buNone/>
             </a:pPr>
             <a:r>
-              <a:rPr lang="en-US" sz="2100" dirty="0">
+              <a:rPr lang="en-US" sz="1920" dirty="0">
                 <a:solidFill>
                   <a:srgbClr val="003A63"/>
                 </a:solidFill>
@@ -13513,14 +13513,14 @@
               </a:rPr>
               <a:t>• Explain the purpose of UAT for AI-supported workflows.</a:t>
             </a:r>
-            <a:endParaRPr lang="en-US" sz="2100" dirty="0"/>
-          </a:p>
-          <a:p>
-            <a:pPr indent="0" marL="0">
-              <a:buNone/>
-            </a:pPr>
-            <a:r>
-              <a:rPr lang="en-US" sz="2100" dirty="0">
+            <a:endParaRPr lang="en-US" sz="1920" dirty="0"/>
+          </a:p>
+          <a:p>
+            <a:pPr indent="0" marL="0">
+              <a:buNone/>
+            </a:pPr>
+            <a:r>
+              <a:rPr lang="en-US" sz="1920" dirty="0">
                 <a:solidFill>
                   <a:srgbClr val="003A63"/>
                 </a:solidFill>
@@ -13530,14 +13530,14 @@
               </a:rPr>
               <a:t>• Develop role-based UAT scenarios and test scripts.</a:t>
             </a:r>
-            <a:endParaRPr lang="en-US" sz="2100" dirty="0"/>
-          </a:p>
-          <a:p>
-            <a:pPr indent="0" marL="0">
-              <a:buNone/>
-            </a:pPr>
-            <a:r>
-              <a:rPr lang="en-US" sz="2100" dirty="0">
+            <a:endParaRPr lang="en-US" sz="1920" dirty="0"/>
+          </a:p>
+          <a:p>
+            <a:pPr indent="0" marL="0">
+              <a:buNone/>
+            </a:pPr>
+            <a:r>
+              <a:rPr lang="en-US" sz="1920" dirty="0">
                 <a:solidFill>
                   <a:srgbClr val="003A63"/>
                 </a:solidFill>
@@ -13545,9 +13545,9 @@
                 <a:ea typeface="Aptos" pitchFamily="34" charset="-122"/>
                 <a:cs typeface="Aptos" pitchFamily="34" charset="-120"/>
               </a:rPr>
-              <a:t>• Include routine cases, edge cases, failure cases, and equity-sensitive scenarios in UAT.</a:t>
-            </a:r>
-            <a:endParaRPr lang="en-US" sz="2100" dirty="0"/>
+              <a:t>• Include routine cases, edge cases, failure cases, and equity-sensitive.</a:t>
+            </a:r>
+            <a:endParaRPr lang="en-US" sz="1920" dirty="0"/>
           </a:p>
         </p:txBody>
       </p:sp>
@@ -13559,12 +13559,12 @@
         </p:nvSpPr>
         <p:spPr>
           <a:xfrm>
-            <a:off x="7635240" y="1325880"/>
-            <a:ext cx="3474720" cy="1207008"/>
+            <a:off x="7543800" y="1325880"/>
+            <a:ext cx="3611880" cy="1261872"/>
           </a:xfrm>
           <a:prstGeom prst="roundRect">
             <a:avLst>
-              <a:gd name="adj" fmla="val 9091"/>
+              <a:gd name="adj" fmla="val 8696"/>
             </a:avLst>
           </a:prstGeom>
           <a:solidFill>
@@ -13586,8 +13586,8 @@
         </p:nvSpPr>
         <p:spPr>
           <a:xfrm>
-            <a:off x="7799832" y="1472184"/>
-            <a:ext cx="3145536" cy="256032"/>
+            <a:off x="7708392" y="1453896"/>
+            <a:ext cx="3282696" cy="228600"/>
           </a:xfrm>
           <a:prstGeom prst="rect">
             <a:avLst/>
@@ -13603,7 +13603,7 @@
               <a:buNone/>
             </a:pPr>
             <a:r>
-              <a:rPr lang="en-US" sz="1300" b="1" dirty="0">
+              <a:rPr lang="en-US" sz="1220" b="1" dirty="0">
                 <a:solidFill>
                   <a:srgbClr val="0068B7"/>
                 </a:solidFill>
@@ -13613,7 +13613,7 @@
               </a:rPr>
               <a:t>Implementation cue</a:t>
             </a:r>
-            <a:endParaRPr lang="en-US" sz="1300" dirty="0"/>
+            <a:endParaRPr lang="en-US" sz="1220" dirty="0"/>
           </a:p>
         </p:txBody>
       </p:sp>
@@ -13625,8 +13625,8 @@
         </p:nvSpPr>
         <p:spPr>
           <a:xfrm>
-            <a:off x="7799832" y="1801368"/>
-            <a:ext cx="3145536" cy="640080"/>
+            <a:off x="7708392" y="1764792"/>
+            <a:ext cx="3282696" cy="749808"/>
           </a:xfrm>
           <a:prstGeom prst="rect">
             <a:avLst/>
@@ -13644,7 +13644,7 @@
               <a:buNone/>
             </a:pPr>
             <a:r>
-              <a:rPr lang="en-US" sz="1320" dirty="0">
+              <a:rPr lang="en-US" sz="1220" dirty="0">
                 <a:solidFill>
                   <a:srgbClr val="17364A"/>
                 </a:solidFill>
@@ -13654,7 +13654,7 @@
               </a:rPr>
               <a:t>Explain the purpose of UAT for AI-supported workflows.</a:t>
             </a:r>
-            <a:endParaRPr lang="en-US" sz="1320" dirty="0"/>
+            <a:endParaRPr lang="en-US" sz="1220" dirty="0"/>
           </a:p>
         </p:txBody>
       </p:sp>
@@ -13666,12 +13666,12 @@
         </p:nvSpPr>
         <p:spPr>
           <a:xfrm>
-            <a:off x="7635240" y="2670048"/>
-            <a:ext cx="3474720" cy="1377086"/>
+            <a:off x="7543800" y="2724912"/>
+            <a:ext cx="3611880" cy="1527048"/>
           </a:xfrm>
           <a:prstGeom prst="roundRect">
             <a:avLst>
-              <a:gd name="adj" fmla="val 7968"/>
+              <a:gd name="adj" fmla="val 7186"/>
             </a:avLst>
           </a:prstGeom>
           <a:solidFill>
@@ -13693,8 +13693,8 @@
         </p:nvSpPr>
         <p:spPr>
           <a:xfrm>
-            <a:off x="7799832" y="2816352"/>
-            <a:ext cx="3145536" cy="256032"/>
+            <a:off x="7708392" y="2852928"/>
+            <a:ext cx="3282696" cy="228600"/>
           </a:xfrm>
           <a:prstGeom prst="rect">
             <a:avLst/>
@@ -13710,7 +13710,7 @@
               <a:buNone/>
             </a:pPr>
             <a:r>
-              <a:rPr lang="en-US" sz="1300" b="1" dirty="0">
+              <a:rPr lang="en-US" sz="1220" b="1" dirty="0">
                 <a:solidFill>
                   <a:srgbClr val="0068B7"/>
                 </a:solidFill>
@@ -13720,7 +13720,7 @@
               </a:rPr>
               <a:t>Concept checkpoints</a:t>
             </a:r>
-            <a:endParaRPr lang="en-US" sz="1300" dirty="0"/>
+            <a:endParaRPr lang="en-US" sz="1220" dirty="0"/>
           </a:p>
         </p:txBody>
       </p:sp>
@@ -13732,8 +13732,8 @@
         </p:nvSpPr>
         <p:spPr>
           <a:xfrm>
-            <a:off x="7818120" y="3182112"/>
-            <a:ext cx="3090672" cy="718718"/>
+            <a:off x="7726680" y="3182112"/>
+            <a:ext cx="3227832" cy="960120"/>
           </a:xfrm>
           <a:prstGeom prst="rect">
             <a:avLst/>
@@ -13751,7 +13751,7 @@
               <a:buNone/>
             </a:pPr>
             <a:r>
-              <a:rPr lang="en-US" sz="1220" dirty="0">
+              <a:rPr lang="en-US" sz="1140" dirty="0">
                 <a:solidFill>
                   <a:srgbClr val="17364A"/>
                 </a:solidFill>
@@ -13759,16 +13759,16 @@
                 <a:ea typeface="Aptos" pitchFamily="34" charset="-122"/>
                 <a:cs typeface="Aptos" pitchFamily="34" charset="-120"/>
               </a:rPr>
-              <a:t>Define acceptance criteria for usability, safety, documentation,.</a:t>
-            </a:r>
-            <a:endParaRPr lang="en-US" sz="1220" dirty="0"/>
-          </a:p>
-          <a:p>
-            <a:pPr indent="0" marL="0">
-              <a:buNone/>
-            </a:pPr>
-            <a:r>
-              <a:rPr lang="en-US" sz="1220" dirty="0">
+              <a:t>Define acceptance criteria for usability, safety,.</a:t>
+            </a:r>
+            <a:endParaRPr lang="en-US" sz="1140" dirty="0"/>
+          </a:p>
+          <a:p>
+            <a:pPr indent="0" marL="0">
+              <a:buNone/>
+            </a:pPr>
+            <a:r>
+              <a:rPr lang="en-US" sz="1140" dirty="0">
                 <a:solidFill>
                   <a:srgbClr val="17364A"/>
                 </a:solidFill>
@@ -13776,9 +13776,9 @@
                 <a:ea typeface="Aptos" pitchFamily="34" charset="-122"/>
                 <a:cs typeface="Aptos" pitchFamily="34" charset="-120"/>
               </a:rPr>
-              <a:t>Produce a UAT plan and sign-off recommendation for an AI-supported.</a:t>
-            </a:r>
-            <a:endParaRPr lang="en-US" sz="1220" dirty="0"/>
+              <a:t>Produce a UAT plan and sign-off recommendation for.</a:t>
+            </a:r>
+            <a:endParaRPr lang="en-US" sz="1140" dirty="0"/>
           </a:p>
         </p:txBody>
       </p:sp>
@@ -13790,12 +13790,12 @@
         </p:nvSpPr>
         <p:spPr>
           <a:xfrm>
-            <a:off x="7635240" y="4184294"/>
-            <a:ext cx="3474720" cy="1466698"/>
+            <a:off x="7543800" y="4389120"/>
+            <a:ext cx="3611880" cy="1261872"/>
           </a:xfrm>
           <a:prstGeom prst="roundRect">
             <a:avLst>
-              <a:gd name="adj" fmla="val 7481"/>
+              <a:gd name="adj" fmla="val 8696"/>
             </a:avLst>
           </a:prstGeom>
           <a:solidFill>
@@ -13817,8 +13817,8 @@
         </p:nvSpPr>
         <p:spPr>
           <a:xfrm>
-            <a:off x="7799832" y="4330598"/>
-            <a:ext cx="3145536" cy="256032"/>
+            <a:off x="7708392" y="4517136"/>
+            <a:ext cx="3282696" cy="228600"/>
           </a:xfrm>
           <a:prstGeom prst="rect">
             <a:avLst/>
@@ -13834,7 +13834,7 @@
               <a:buNone/>
             </a:pPr>
             <a:r>
-              <a:rPr lang="en-US" sz="1300" b="1" dirty="0">
+              <a:rPr lang="en-US" sz="1220" b="1" dirty="0">
                 <a:solidFill>
                   <a:srgbClr val="0068B7"/>
                 </a:solidFill>
@@ -13844,7 +13844,7 @@
               </a:rPr>
               <a:t>Next action</a:t>
             </a:r>
-            <a:endParaRPr lang="en-US" sz="1300" dirty="0"/>
+            <a:endParaRPr lang="en-US" sz="1220" dirty="0"/>
           </a:p>
         </p:txBody>
       </p:sp>
@@ -13856,8 +13856,8 @@
         </p:nvSpPr>
         <p:spPr>
           <a:xfrm>
-            <a:off x="7799832" y="4659782"/>
-            <a:ext cx="3145536" cy="899770"/>
+            <a:off x="7708392" y="4828032"/>
+            <a:ext cx="3282696" cy="749808"/>
           </a:xfrm>
           <a:prstGeom prst="rect">
             <a:avLst/>
@@ -13875,7 +13875,7 @@
               <a:buNone/>
             </a:pPr>
             <a:r>
-              <a:rPr lang="en-US" sz="1320" dirty="0">
+              <a:rPr lang="en-US" sz="1220" dirty="0">
                 <a:solidFill>
                   <a:srgbClr val="17364A"/>
                 </a:solidFill>
@@ -13883,9 +13883,9 @@
                 <a:ea typeface="Aptos" pitchFamily="34" charset="-122"/>
                 <a:cs typeface="Aptos" pitchFamily="34" charset="-120"/>
               </a:rPr>
-              <a:t>Use the assignment to test whether you can explain the concept, apply it to a realistic public health situation, and identify what would need review before the work moves forward.</a:t>
-            </a:r>
-            <a:endParaRPr lang="en-US" sz="1320" dirty="0"/>
+              <a:t>Use the assignment to test whether you can explain the concept, apply it to a.</a:t>
+            </a:r>
+            <a:endParaRPr lang="en-US" sz="1220" dirty="0"/>
           </a:p>
         </p:txBody>
       </p:sp>
@@ -14176,8 +14176,8 @@
         </p:nvSpPr>
         <p:spPr>
           <a:xfrm>
-            <a:off x="868680" y="1508760"/>
-            <a:ext cx="6309360" cy="4160520"/>
+            <a:off x="822960" y="1463040"/>
+            <a:ext cx="6565392" cy="4343400"/>
           </a:xfrm>
           <a:prstGeom prst="rect">
             <a:avLst/>
@@ -14195,7 +14195,7 @@
               <a:buNone/>
             </a:pPr>
             <a:r>
-              <a:rPr lang="en-US" sz="2100" dirty="0">
+              <a:rPr lang="en-US" sz="1920" dirty="0">
                 <a:solidFill>
                   <a:srgbClr val="003A63"/>
                 </a:solidFill>
@@ -14203,16 +14203,16 @@
                 <a:ea typeface="Aptos" pitchFamily="34" charset="-122"/>
                 <a:cs typeface="Aptos" pitchFamily="34" charset="-120"/>
               </a:rPr>
-              <a:t>• User acceptance testing is the process of determining whether an AI-supported workflow is.</a:t>
-            </a:r>
-            <a:endParaRPr lang="en-US" sz="2100" dirty="0"/>
-          </a:p>
-          <a:p>
-            <a:pPr indent="0" marL="0">
-              <a:buNone/>
-            </a:pPr>
-            <a:r>
-              <a:rPr lang="en-US" sz="2100" dirty="0">
+              <a:t>• User acceptance testing is the process of determining whether an.</a:t>
+            </a:r>
+            <a:endParaRPr lang="en-US" sz="1920" dirty="0"/>
+          </a:p>
+          <a:p>
+            <a:pPr indent="0" marL="0">
+              <a:buNone/>
+            </a:pPr>
+            <a:r>
+              <a:rPr lang="en-US" sz="1920" dirty="0">
                 <a:solidFill>
                   <a:srgbClr val="003A63"/>
                 </a:solidFill>
@@ -14220,16 +14220,16 @@
                 <a:ea typeface="Aptos" pitchFamily="34" charset="-122"/>
                 <a:cs typeface="Aptos" pitchFamily="34" charset="-120"/>
               </a:rPr>
-              <a:t>• Technical testing may show that a tool runs, and model validation may show acceptable.</a:t>
-            </a:r>
-            <a:endParaRPr lang="en-US" sz="2100" dirty="0"/>
-          </a:p>
-          <a:p>
-            <a:pPr indent="0" marL="0">
-              <a:buNone/>
-            </a:pPr>
-            <a:r>
-              <a:rPr lang="en-US" sz="2100" dirty="0">
+              <a:t>• Technical testing may show that a tool runs, and model validation may show.</a:t>
+            </a:r>
+            <a:endParaRPr lang="en-US" sz="1920" dirty="0"/>
+          </a:p>
+          <a:p>
+            <a:pPr indent="0" marL="0">
+              <a:buNone/>
+            </a:pPr>
+            <a:r>
+              <a:rPr lang="en-US" sz="1920" dirty="0">
                 <a:solidFill>
                   <a:srgbClr val="003A63"/>
                 </a:solidFill>
@@ -14239,7 +14239,7 @@
               </a:rPr>
               <a:t>• UAT fills that gap.</a:t>
             </a:r>
-            <a:endParaRPr lang="en-US" sz="2100" dirty="0"/>
+            <a:endParaRPr lang="en-US" sz="1920" dirty="0"/>
           </a:p>
         </p:txBody>
       </p:sp>
@@ -14251,12 +14251,12 @@
         </p:nvSpPr>
         <p:spPr>
           <a:xfrm>
-            <a:off x="7635240" y="1325880"/>
-            <a:ext cx="3474720" cy="1255471"/>
+            <a:off x="7543800" y="1325880"/>
+            <a:ext cx="3611880" cy="1261872"/>
           </a:xfrm>
           <a:prstGeom prst="roundRect">
             <a:avLst>
-              <a:gd name="adj" fmla="val 8740"/>
+              <a:gd name="adj" fmla="val 8696"/>
             </a:avLst>
           </a:prstGeom>
           <a:solidFill>
@@ -14278,8 +14278,8 @@
         </p:nvSpPr>
         <p:spPr>
           <a:xfrm>
-            <a:off x="7799832" y="1472184"/>
-            <a:ext cx="3145536" cy="256032"/>
+            <a:off x="7708392" y="1453896"/>
+            <a:ext cx="3282696" cy="228600"/>
           </a:xfrm>
           <a:prstGeom prst="rect">
             <a:avLst/>
@@ -14295,7 +14295,7 @@
               <a:buNone/>
             </a:pPr>
             <a:r>
-              <a:rPr lang="en-US" sz="1300" b="1" dirty="0">
+              <a:rPr lang="en-US" sz="1220" b="1" dirty="0">
                 <a:solidFill>
                   <a:srgbClr val="0068B7"/>
                 </a:solidFill>
@@ -14305,7 +14305,7 @@
               </a:rPr>
               <a:t>Implementation cue</a:t>
             </a:r>
-            <a:endParaRPr lang="en-US" sz="1300" dirty="0"/>
+            <a:endParaRPr lang="en-US" sz="1220" dirty="0"/>
           </a:p>
         </p:txBody>
       </p:sp>
@@ -14317,8 +14317,8 @@
         </p:nvSpPr>
         <p:spPr>
           <a:xfrm>
-            <a:off x="7799832" y="1801368"/>
-            <a:ext cx="3145536" cy="688543"/>
+            <a:off x="7708392" y="1764792"/>
+            <a:ext cx="3282696" cy="749808"/>
           </a:xfrm>
           <a:prstGeom prst="rect">
             <a:avLst/>
@@ -14336,7 +14336,7 @@
               <a:buNone/>
             </a:pPr>
             <a:r>
-              <a:rPr lang="en-US" sz="1320" dirty="0">
+              <a:rPr lang="en-US" sz="1220" dirty="0">
                 <a:solidFill>
                   <a:srgbClr val="17364A"/>
                 </a:solidFill>
@@ -14344,9 +14344,9 @@
                 <a:ea typeface="Aptos" pitchFamily="34" charset="-122"/>
                 <a:cs typeface="Aptos" pitchFamily="34" charset="-120"/>
               </a:rPr>
-              <a:t>User acceptance testing is the process of determining whether an AI-supported workflow is usable,.</a:t>
-            </a:r>
-            <a:endParaRPr lang="en-US" sz="1320" dirty="0"/>
+              <a:t>User acceptance testing is the process of determining whether an AI-supported.</a:t>
+            </a:r>
+            <a:endParaRPr lang="en-US" sz="1220" dirty="0"/>
           </a:p>
         </p:txBody>
       </p:sp>
@@ -14358,12 +14358,12 @@
         </p:nvSpPr>
         <p:spPr>
           <a:xfrm>
-            <a:off x="7635240" y="2718511"/>
-            <a:ext cx="3474720" cy="1328623"/>
+            <a:off x="7543800" y="2724912"/>
+            <a:ext cx="3611880" cy="1527048"/>
           </a:xfrm>
           <a:prstGeom prst="roundRect">
             <a:avLst>
-              <a:gd name="adj" fmla="val 8259"/>
+              <a:gd name="adj" fmla="val 7186"/>
             </a:avLst>
           </a:prstGeom>
           <a:solidFill>
@@ -14385,24 +14385,26 @@
         </p:nvSpPr>
         <p:spPr>
           <a:xfrm>
-            <a:off x="7799832" y="2846527"/>
-            <a:ext cx="3145536" cy="237744"/>
-          </a:xfrm>
-          <a:prstGeom prst="rect">
-            <a:avLst/>
-          </a:prstGeom>
-          <a:noFill/>
-          <a:ln/>
-        </p:spPr>
-        <p:txBody>
-          <a:bodyPr wrap="square" lIns="0" tIns="0" rIns="0" bIns="0" rtlCol="0" anchor="ctr"/>
-          <a:lstStyle/>
-          <a:p>
-            <a:pPr indent="0" marL="0">
-              <a:buNone/>
-            </a:pPr>
-            <a:r>
-              <a:rPr lang="en-US" sz="1250" b="1" dirty="0">
+            <a:off x="7708392" y="2852928"/>
+            <a:ext cx="3282696" cy="219456"/>
+          </a:xfrm>
+          <a:prstGeom prst="rect">
+            <a:avLst/>
+          </a:prstGeom>
+          <a:noFill/>
+          <a:ln/>
+        </p:spPr>
+        <p:txBody>
+          <a:bodyPr wrap="square" lIns="0" tIns="0" rIns="0" bIns="0" rtlCol="0" anchor="ctr">
+            <a:normAutofit/>
+          </a:bodyPr>
+          <a:lstStyle/>
+          <a:p>
+            <a:pPr indent="0" marL="0">
+              <a:buNone/>
+            </a:pPr>
+            <a:r>
+              <a:rPr lang="en-US" sz="1160" b="1" dirty="0">
                 <a:solidFill>
                   <a:srgbClr val="0068B7"/>
                 </a:solidFill>
@@ -14412,7 +14414,7 @@
               </a:rPr>
               <a:t>Implementation path</a:t>
             </a:r>
-            <a:endParaRPr lang="en-US" sz="1250" dirty="0"/>
+            <a:endParaRPr lang="en-US" sz="1160" dirty="0"/>
           </a:p>
         </p:txBody>
       </p:sp>
@@ -14424,7 +14426,7 @@
         </p:nvSpPr>
         <p:spPr>
           <a:xfrm>
-            <a:off x="8763000" y="3399739"/>
+            <a:off x="8717280" y="3406140"/>
             <a:ext cx="164592" cy="0"/>
           </a:xfrm>
           <a:prstGeom prst="line">
@@ -14447,8 +14449,8 @@
         </p:nvSpPr>
         <p:spPr>
           <a:xfrm>
-            <a:off x="7872984" y="3248863"/>
-            <a:ext cx="890016" cy="301752"/>
+            <a:off x="7781544" y="3255264"/>
+            <a:ext cx="935736" cy="301752"/>
           </a:xfrm>
           <a:prstGeom prst="roundRect">
             <a:avLst>
@@ -14474,8 +14476,8 @@
         </p:nvSpPr>
         <p:spPr>
           <a:xfrm>
-            <a:off x="7909560" y="3322015"/>
-            <a:ext cx="816864" cy="146304"/>
+            <a:off x="7818120" y="3328416"/>
+            <a:ext cx="862584" cy="146304"/>
           </a:xfrm>
           <a:prstGeom prst="rect">
             <a:avLst/>
@@ -14515,7 +14517,7 @@
         </p:nvSpPr>
         <p:spPr>
           <a:xfrm>
-            <a:off x="9817608" y="3399739"/>
+            <a:off x="9817608" y="3406140"/>
             <a:ext cx="164592" cy="0"/>
           </a:xfrm>
           <a:prstGeom prst="line">
@@ -14538,8 +14540,8 @@
         </p:nvSpPr>
         <p:spPr>
           <a:xfrm>
-            <a:off x="8927592" y="3248863"/>
-            <a:ext cx="890016" cy="301752"/>
+            <a:off x="8881872" y="3255264"/>
+            <a:ext cx="935736" cy="301752"/>
           </a:xfrm>
           <a:prstGeom prst="roundRect">
             <a:avLst>
@@ -14565,8 +14567,8 @@
         </p:nvSpPr>
         <p:spPr>
           <a:xfrm>
-            <a:off x="8964168" y="3322015"/>
-            <a:ext cx="816864" cy="146304"/>
+            <a:off x="8918448" y="3328416"/>
+            <a:ext cx="862584" cy="146304"/>
           </a:xfrm>
           <a:prstGeom prst="rect">
             <a:avLst/>
@@ -14606,8 +14608,8 @@
         </p:nvSpPr>
         <p:spPr>
           <a:xfrm>
-            <a:off x="9982200" y="3248863"/>
-            <a:ext cx="890016" cy="301752"/>
+            <a:off x="9982200" y="3255264"/>
+            <a:ext cx="935736" cy="301752"/>
           </a:xfrm>
           <a:prstGeom prst="roundRect">
             <a:avLst>
@@ -14633,8 +14635,8 @@
         </p:nvSpPr>
         <p:spPr>
           <a:xfrm>
-            <a:off x="10018776" y="3322015"/>
-            <a:ext cx="816864" cy="146304"/>
+            <a:off x="10018776" y="3328416"/>
+            <a:ext cx="862584" cy="146304"/>
           </a:xfrm>
           <a:prstGeom prst="rect">
             <a:avLst/>
@@ -14674,8 +14676,8 @@
         </p:nvSpPr>
         <p:spPr>
           <a:xfrm>
-            <a:off x="7854696" y="3742639"/>
-            <a:ext cx="3035808" cy="158191"/>
+            <a:off x="7763256" y="3749040"/>
+            <a:ext cx="3172968" cy="356616"/>
           </a:xfrm>
           <a:prstGeom prst="rect">
             <a:avLst/>
@@ -14693,7 +14695,7 @@
               <a:buNone/>
             </a:pPr>
             <a:r>
-              <a:rPr lang="en-US" sz="1120" dirty="0">
+              <a:rPr lang="en-US" sz="1040" dirty="0">
                 <a:solidFill>
                   <a:srgbClr val="17364A"/>
                 </a:solidFill>
@@ -14701,9 +14703,9 @@
                 <a:ea typeface="Aptos" pitchFamily="34" charset="-122"/>
                 <a:cs typeface="Aptos" pitchFamily="34" charset="-120"/>
               </a:rPr>
-              <a:t>Implementation work should make dependencies, approvals, training, and sustainment visible before launch.</a:t>
-            </a:r>
-            <a:endParaRPr lang="en-US" sz="1120" dirty="0"/>
+              <a:t>Implementation work should make dependencies, approvals, training, and.</a:t>
+            </a:r>
+            <a:endParaRPr lang="en-US" sz="1040" dirty="0"/>
           </a:p>
         </p:txBody>
       </p:sp>
@@ -14715,12 +14717,12 @@
         </p:nvSpPr>
         <p:spPr>
           <a:xfrm>
-            <a:off x="7635240" y="4184294"/>
-            <a:ext cx="3474720" cy="1466698"/>
+            <a:off x="7543800" y="4389120"/>
+            <a:ext cx="3611880" cy="1261872"/>
           </a:xfrm>
           <a:prstGeom prst="roundRect">
             <a:avLst>
-              <a:gd name="adj" fmla="val 7481"/>
+              <a:gd name="adj" fmla="val 8696"/>
             </a:avLst>
           </a:prstGeom>
           <a:solidFill>
@@ -14742,8 +14744,8 @@
         </p:nvSpPr>
         <p:spPr>
           <a:xfrm>
-            <a:off x="7799832" y="4330598"/>
-            <a:ext cx="3145536" cy="256032"/>
+            <a:off x="7708392" y="4517136"/>
+            <a:ext cx="3282696" cy="228600"/>
           </a:xfrm>
           <a:prstGeom prst="rect">
             <a:avLst/>
@@ -14759,7 +14761,7 @@
               <a:buNone/>
             </a:pPr>
             <a:r>
-              <a:rPr lang="en-US" sz="1300" b="1" dirty="0">
+              <a:rPr lang="en-US" sz="1220" b="1" dirty="0">
                 <a:solidFill>
                   <a:srgbClr val="0068B7"/>
                 </a:solidFill>
@@ -14769,7 +14771,7 @@
               </a:rPr>
               <a:t>Next action</a:t>
             </a:r>
-            <a:endParaRPr lang="en-US" sz="1300" dirty="0"/>
+            <a:endParaRPr lang="en-US" sz="1220" dirty="0"/>
           </a:p>
         </p:txBody>
       </p:sp>
@@ -14781,8 +14783,8 @@
         </p:nvSpPr>
         <p:spPr>
           <a:xfrm>
-            <a:off x="7799832" y="4659782"/>
-            <a:ext cx="3145536" cy="899770"/>
+            <a:off x="7708392" y="4828032"/>
+            <a:ext cx="3282696" cy="749808"/>
           </a:xfrm>
           <a:prstGeom prst="rect">
             <a:avLst/>
@@ -14800,7 +14802,7 @@
               <a:buNone/>
             </a:pPr>
             <a:r>
-              <a:rPr lang="en-US" sz="1320" dirty="0">
+              <a:rPr lang="en-US" sz="1220" dirty="0">
                 <a:solidFill>
                   <a:srgbClr val="17364A"/>
                 </a:solidFill>
@@ -14808,9 +14810,9 @@
                 <a:ea typeface="Aptos" pitchFamily="34" charset="-122"/>
                 <a:cs typeface="Aptos" pitchFamily="34" charset="-120"/>
               </a:rPr>
-              <a:t>Use the concept to clarify workflow changes, dependencies, staffing, procurement requirements, training needs, and implementation checkpoints.</a:t>
-            </a:r>
-            <a:endParaRPr lang="en-US" sz="1320" dirty="0"/>
+              <a:t>Use the concept to clarify workflow changes, dependencies, staffing, procurement.</a:t>
+            </a:r>
+            <a:endParaRPr lang="en-US" sz="1220" dirty="0"/>
           </a:p>
         </p:txBody>
       </p:sp>
@@ -15101,8 +15103,8 @@
         </p:nvSpPr>
         <p:spPr>
           <a:xfrm>
-            <a:off x="868680" y="1508760"/>
-            <a:ext cx="6309360" cy="4160520"/>
+            <a:off x="822960" y="1463040"/>
+            <a:ext cx="6565392" cy="4343400"/>
           </a:xfrm>
           <a:prstGeom prst="rect">
             <a:avLst/>
@@ -15120,7 +15122,7 @@
               <a:buNone/>
             </a:pPr>
             <a:r>
-              <a:rPr lang="en-US" sz="2100" dirty="0">
+              <a:rPr lang="en-US" sz="1920" dirty="0">
                 <a:solidFill>
                   <a:srgbClr val="003A63"/>
                 </a:solidFill>
@@ -15128,16 +15130,16 @@
                 <a:ea typeface="Aptos" pitchFamily="34" charset="-122"/>
                 <a:cs typeface="Aptos" pitchFamily="34" charset="-120"/>
               </a:rPr>
-              <a:t>• Before launching an AI tool that summarizes case investigation notes, investigators complete.</a:t>
-            </a:r>
-            <a:endParaRPr lang="en-US" sz="2100" dirty="0"/>
-          </a:p>
-          <a:p>
-            <a:pPr indent="0" marL="0">
-              <a:buNone/>
-            </a:pPr>
-            <a:r>
-              <a:rPr lang="en-US" sz="2100" dirty="0">
+              <a:t>• Before launching an AI tool that summarizes case investigation notes,.</a:t>
+            </a:r>
+            <a:endParaRPr lang="en-US" sz="1920" dirty="0"/>
+          </a:p>
+          <a:p>
+            <a:pPr indent="0" marL="0">
+              <a:buNone/>
+            </a:pPr>
+            <a:r>
+              <a:rPr lang="en-US" sz="1920" dirty="0">
                 <a:solidFill>
                   <a:srgbClr val="003A63"/>
                 </a:solidFill>
@@ -15145,16 +15147,16 @@
                 <a:ea typeface="Aptos" pitchFamily="34" charset="-122"/>
                 <a:cs typeface="Aptos" pitchFamily="34" charset="-120"/>
               </a:rPr>
-              <a:t>• Testers verify whether the summary is understandable, source information is visible, errors.</a:t>
-            </a:r>
-            <a:endParaRPr lang="en-US" sz="2100" dirty="0"/>
-          </a:p>
-          <a:p>
-            <a:pPr indent="0" marL="0">
-              <a:buNone/>
-            </a:pPr>
-            <a:r>
-              <a:rPr lang="en-US" sz="2100" dirty="0">
+              <a:t>• Testers verify whether the summary is understandable, source information is.</a:t>
+            </a:r>
+            <a:endParaRPr lang="en-US" sz="1920" dirty="0"/>
+          </a:p>
+          <a:p>
+            <a:pPr indent="0" marL="0">
+              <a:buNone/>
+            </a:pPr>
+            <a:r>
+              <a:rPr lang="en-US" sz="1920" dirty="0">
                 <a:solidFill>
                   <a:srgbClr val="003A63"/>
                 </a:solidFill>
@@ -15164,7 +15166,7 @@
               </a:rPr>
               <a:t>• The tool does not launch until high-priority issues are resolved.</a:t>
             </a:r>
-            <a:endParaRPr lang="en-US" sz="2100" dirty="0"/>
+            <a:endParaRPr lang="en-US" sz="1920" dirty="0"/>
           </a:p>
         </p:txBody>
       </p:sp>
@@ -15176,12 +15178,12 @@
         </p:nvSpPr>
         <p:spPr>
           <a:xfrm>
-            <a:off x="7635240" y="1325880"/>
-            <a:ext cx="3474720" cy="1255471"/>
+            <a:off x="7543800" y="1325880"/>
+            <a:ext cx="3611880" cy="1261872"/>
           </a:xfrm>
           <a:prstGeom prst="roundRect">
             <a:avLst>
-              <a:gd name="adj" fmla="val 8740"/>
+              <a:gd name="adj" fmla="val 8696"/>
             </a:avLst>
           </a:prstGeom>
           <a:solidFill>
@@ -15203,8 +15205,8 @@
         </p:nvSpPr>
         <p:spPr>
           <a:xfrm>
-            <a:off x="7799832" y="1472184"/>
-            <a:ext cx="3145536" cy="256032"/>
+            <a:off x="7708392" y="1453896"/>
+            <a:ext cx="3282696" cy="228600"/>
           </a:xfrm>
           <a:prstGeom prst="rect">
             <a:avLst/>
@@ -15220,7 +15222,7 @@
               <a:buNone/>
             </a:pPr>
             <a:r>
-              <a:rPr lang="en-US" sz="1300" b="1" dirty="0">
+              <a:rPr lang="en-US" sz="1220" b="1" dirty="0">
                 <a:solidFill>
                   <a:srgbClr val="0068B7"/>
                 </a:solidFill>
@@ -15230,7 +15232,7 @@
               </a:rPr>
               <a:t>Implementation cue</a:t>
             </a:r>
-            <a:endParaRPr lang="en-US" sz="1300" dirty="0"/>
+            <a:endParaRPr lang="en-US" sz="1220" dirty="0"/>
           </a:p>
         </p:txBody>
       </p:sp>
@@ -15242,8 +15244,8 @@
         </p:nvSpPr>
         <p:spPr>
           <a:xfrm>
-            <a:off x="7799832" y="1801368"/>
-            <a:ext cx="3145536" cy="688543"/>
+            <a:off x="7708392" y="1764792"/>
+            <a:ext cx="3282696" cy="749808"/>
           </a:xfrm>
           <a:prstGeom prst="rect">
             <a:avLst/>
@@ -15261,7 +15263,7 @@
               <a:buNone/>
             </a:pPr>
             <a:r>
-              <a:rPr lang="en-US" sz="1320" dirty="0">
+              <a:rPr lang="en-US" sz="1220" dirty="0">
                 <a:solidFill>
                   <a:srgbClr val="17364A"/>
                 </a:solidFill>
@@ -15269,9 +15271,9 @@
                 <a:ea typeface="Aptos" pitchFamily="34" charset="-122"/>
                 <a:cs typeface="Aptos" pitchFamily="34" charset="-120"/>
               </a:rPr>
-              <a:t>Before launching an AI tool that summarizes case investigation notes, investigators complete UAT.</a:t>
-            </a:r>
-            <a:endParaRPr lang="en-US" sz="1320" dirty="0"/>
+              <a:t>Before launching an AI tool that summarizes case investigation notes,.</a:t>
+            </a:r>
+            <a:endParaRPr lang="en-US" sz="1220" dirty="0"/>
           </a:p>
         </p:txBody>
       </p:sp>
@@ -15283,12 +15285,12 @@
         </p:nvSpPr>
         <p:spPr>
           <a:xfrm>
-            <a:off x="7635240" y="2718511"/>
-            <a:ext cx="3474720" cy="1328623"/>
+            <a:off x="7543800" y="2724912"/>
+            <a:ext cx="3611880" cy="1527048"/>
           </a:xfrm>
           <a:prstGeom prst="roundRect">
             <a:avLst>
-              <a:gd name="adj" fmla="val 8259"/>
+              <a:gd name="adj" fmla="val 7186"/>
             </a:avLst>
           </a:prstGeom>
           <a:solidFill>
@@ -15310,8 +15312,8 @@
         </p:nvSpPr>
         <p:spPr>
           <a:xfrm>
-            <a:off x="7799832" y="2864815"/>
-            <a:ext cx="3145536" cy="256032"/>
+            <a:off x="7708392" y="2852928"/>
+            <a:ext cx="3282696" cy="228600"/>
           </a:xfrm>
           <a:prstGeom prst="rect">
             <a:avLst/>
@@ -15327,7 +15329,7 @@
               <a:buNone/>
             </a:pPr>
             <a:r>
-              <a:rPr lang="en-US" sz="1300" b="1" dirty="0">
+              <a:rPr lang="en-US" sz="1220" b="1" dirty="0">
                 <a:solidFill>
                   <a:srgbClr val="0068B7"/>
                 </a:solidFill>
@@ -15337,7 +15339,7 @@
               </a:rPr>
               <a:t>Concept checkpoints</a:t>
             </a:r>
-            <a:endParaRPr lang="en-US" sz="1300" dirty="0"/>
+            <a:endParaRPr lang="en-US" sz="1220" dirty="0"/>
           </a:p>
         </p:txBody>
       </p:sp>
@@ -15349,8 +15351,8 @@
         </p:nvSpPr>
         <p:spPr>
           <a:xfrm>
-            <a:off x="7818120" y="3230575"/>
-            <a:ext cx="3090672" cy="670255"/>
+            <a:off x="7726680" y="3182112"/>
+            <a:ext cx="3227832" cy="960120"/>
           </a:xfrm>
           <a:prstGeom prst="rect">
             <a:avLst/>
@@ -15368,7 +15370,7 @@
               <a:buNone/>
             </a:pPr>
             <a:r>
-              <a:rPr lang="en-US" sz="1220" dirty="0">
+              <a:rPr lang="en-US" sz="1140" dirty="0">
                 <a:solidFill>
                   <a:srgbClr val="17364A"/>
                 </a:solidFill>
@@ -15376,16 +15378,16 @@
                 <a:ea typeface="Aptos" pitchFamily="34" charset="-122"/>
                 <a:cs typeface="Aptos" pitchFamily="34" charset="-120"/>
               </a:rPr>
-              <a:t>Before launching an AI tool that summarizes case investigation.</a:t>
-            </a:r>
-            <a:endParaRPr lang="en-US" sz="1220" dirty="0"/>
-          </a:p>
-          <a:p>
-            <a:pPr indent="0" marL="0">
-              <a:buNone/>
-            </a:pPr>
-            <a:r>
-              <a:rPr lang="en-US" sz="1220" dirty="0">
+              <a:t>Before launching an AI tool that summarizes case.</a:t>
+            </a:r>
+            <a:endParaRPr lang="en-US" sz="1140" dirty="0"/>
+          </a:p>
+          <a:p>
+            <a:pPr indent="0" marL="0">
+              <a:buNone/>
+            </a:pPr>
+            <a:r>
+              <a:rPr lang="en-US" sz="1140" dirty="0">
                 <a:solidFill>
                   <a:srgbClr val="17364A"/>
                 </a:solidFill>
@@ -15393,9 +15395,9 @@
                 <a:ea typeface="Aptos" pitchFamily="34" charset="-122"/>
                 <a:cs typeface="Aptos" pitchFamily="34" charset="-120"/>
               </a:rPr>
-              <a:t>Testers verify whether the summary is understandable, source.</a:t>
-            </a:r>
-            <a:endParaRPr lang="en-US" sz="1220" dirty="0"/>
+              <a:t>Testers verify whether the summary is.</a:t>
+            </a:r>
+            <a:endParaRPr lang="en-US" sz="1140" dirty="0"/>
           </a:p>
         </p:txBody>
       </p:sp>
@@ -15407,12 +15409,12 @@
         </p:nvSpPr>
         <p:spPr>
           <a:xfrm>
-            <a:off x="7635240" y="4184294"/>
-            <a:ext cx="3474720" cy="1466698"/>
+            <a:off x="7543800" y="4389120"/>
+            <a:ext cx="3611880" cy="1261872"/>
           </a:xfrm>
           <a:prstGeom prst="roundRect">
             <a:avLst>
-              <a:gd name="adj" fmla="val 7481"/>
+              <a:gd name="adj" fmla="val 8696"/>
             </a:avLst>
           </a:prstGeom>
           <a:solidFill>
@@ -15434,8 +15436,8 @@
         </p:nvSpPr>
         <p:spPr>
           <a:xfrm>
-            <a:off x="7799832" y="4330598"/>
-            <a:ext cx="3145536" cy="256032"/>
+            <a:off x="7708392" y="4517136"/>
+            <a:ext cx="3282696" cy="228600"/>
           </a:xfrm>
           <a:prstGeom prst="rect">
             <a:avLst/>
@@ -15451,7 +15453,7 @@
               <a:buNone/>
             </a:pPr>
             <a:r>
-              <a:rPr lang="en-US" sz="1300" b="1" dirty="0">
+              <a:rPr lang="en-US" sz="1220" b="1" dirty="0">
                 <a:solidFill>
                   <a:srgbClr val="0068B7"/>
                 </a:solidFill>
@@ -15461,7 +15463,7 @@
               </a:rPr>
               <a:t>Next action</a:t>
             </a:r>
-            <a:endParaRPr lang="en-US" sz="1300" dirty="0"/>
+            <a:endParaRPr lang="en-US" sz="1220" dirty="0"/>
           </a:p>
         </p:txBody>
       </p:sp>
@@ -15473,8 +15475,8 @@
         </p:nvSpPr>
         <p:spPr>
           <a:xfrm>
-            <a:off x="7799832" y="4659782"/>
-            <a:ext cx="3145536" cy="899770"/>
+            <a:off x="7708392" y="4828032"/>
+            <a:ext cx="3282696" cy="749808"/>
           </a:xfrm>
           <a:prstGeom prst="rect">
             <a:avLst/>
@@ -15492,7 +15494,7 @@
               <a:buNone/>
             </a:pPr>
             <a:r>
-              <a:rPr lang="en-US" sz="1320" dirty="0">
+              <a:rPr lang="en-US" sz="1220" dirty="0">
                 <a:solidFill>
                   <a:srgbClr val="17364A"/>
                 </a:solidFill>
@@ -15500,9 +15502,9 @@
                 <a:ea typeface="Aptos" pitchFamily="34" charset="-122"/>
                 <a:cs typeface="Aptos" pitchFamily="34" charset="-120"/>
               </a:rPr>
-              <a:t>Use the concept to clarify workflow changes, dependencies, staffing, procurement requirements, training needs, and implementation checkpoints.</a:t>
-            </a:r>
-            <a:endParaRPr lang="en-US" sz="1320" dirty="0"/>
+              <a:t>Use the concept to clarify workflow changes, dependencies, staffing, procurement.</a:t>
+            </a:r>
+            <a:endParaRPr lang="en-US" sz="1220" dirty="0"/>
           </a:p>
         </p:txBody>
       </p:sp>
@@ -15793,8 +15795,8 @@
         </p:nvSpPr>
         <p:spPr>
           <a:xfrm>
-            <a:off x="868680" y="1508760"/>
-            <a:ext cx="6309360" cy="4160520"/>
+            <a:off x="822960" y="1463040"/>
+            <a:ext cx="6565392" cy="4343400"/>
           </a:xfrm>
           <a:prstGeom prst="rect">
             <a:avLst/>
@@ -15812,7 +15814,7 @@
               <a:buNone/>
             </a:pPr>
             <a:r>
-              <a:rPr lang="en-US" sz="2100" dirty="0">
+              <a:rPr lang="en-US" sz="1920" dirty="0">
                 <a:solidFill>
                   <a:srgbClr val="003A63"/>
                 </a:solidFill>
@@ -15822,14 +15824,14 @@
               </a:rPr>
               <a:t>• UAT should be designed around real users and real work.</a:t>
             </a:r>
-            <a:endParaRPr lang="en-US" sz="2100" dirty="0"/>
-          </a:p>
-          <a:p>
-            <a:pPr indent="0" marL="0">
-              <a:buNone/>
-            </a:pPr>
-            <a:r>
-              <a:rPr lang="en-US" sz="2100" dirty="0">
+            <a:endParaRPr lang="en-US" sz="1920" dirty="0"/>
+          </a:p>
+          <a:p>
+            <a:pPr indent="0" marL="0">
+              <a:buNone/>
+            </a:pPr>
+            <a:r>
+              <a:rPr lang="en-US" sz="1920" dirty="0">
                 <a:solidFill>
                   <a:srgbClr val="003A63"/>
                 </a:solidFill>
@@ -15837,16 +15839,16 @@
                 <a:ea typeface="Aptos" pitchFamily="34" charset="-122"/>
                 <a:cs typeface="Aptos" pitchFamily="34" charset="-120"/>
               </a:rPr>
-              <a:t>• Testers should include the roles that will actually use or supervise the AI-supported.</a:t>
-            </a:r>
-            <a:endParaRPr lang="en-US" sz="2100" dirty="0"/>
-          </a:p>
-          <a:p>
-            <a:pPr indent="0" marL="0">
-              <a:buNone/>
-            </a:pPr>
-            <a:r>
-              <a:rPr lang="en-US" sz="2100" dirty="0">
+              <a:t>• Testers should include the roles that will actually use or supervise the.</a:t>
+            </a:r>
+            <a:endParaRPr lang="en-US" sz="1920" dirty="0"/>
+          </a:p>
+          <a:p>
+            <a:pPr indent="0" marL="0">
+              <a:buNone/>
+            </a:pPr>
+            <a:r>
+              <a:rPr lang="en-US" sz="1920" dirty="0">
                 <a:solidFill>
                   <a:srgbClr val="003A63"/>
                 </a:solidFill>
@@ -15854,9 +15856,9 @@
                 <a:ea typeface="Aptos" pitchFamily="34" charset="-122"/>
                 <a:cs typeface="Aptos" pitchFamily="34" charset="-120"/>
               </a:rPr>
-              <a:t>• If only technical staff test the tool, usability and workflow problems may be missed.</a:t>
-            </a:r>
-            <a:endParaRPr lang="en-US" sz="2100" dirty="0"/>
+              <a:t>• If only technical staff test the tool, usability and workflow problems may.</a:t>
+            </a:r>
+            <a:endParaRPr lang="en-US" sz="1920" dirty="0"/>
           </a:p>
         </p:txBody>
       </p:sp>
@@ -15868,12 +15870,12 @@
         </p:nvSpPr>
         <p:spPr>
           <a:xfrm>
-            <a:off x="7635240" y="1325880"/>
-            <a:ext cx="3474720" cy="1207008"/>
+            <a:off x="7543800" y="1325880"/>
+            <a:ext cx="3611880" cy="1261872"/>
           </a:xfrm>
           <a:prstGeom prst="roundRect">
             <a:avLst>
-              <a:gd name="adj" fmla="val 9091"/>
+              <a:gd name="adj" fmla="val 8696"/>
             </a:avLst>
           </a:prstGeom>
           <a:solidFill>
@@ -15895,8 +15897,8 @@
         </p:nvSpPr>
         <p:spPr>
           <a:xfrm>
-            <a:off x="7799832" y="1472184"/>
-            <a:ext cx="3145536" cy="256032"/>
+            <a:off x="7708392" y="1453896"/>
+            <a:ext cx="3282696" cy="228600"/>
           </a:xfrm>
           <a:prstGeom prst="rect">
             <a:avLst/>
@@ -15912,7 +15914,7 @@
               <a:buNone/>
             </a:pPr>
             <a:r>
-              <a:rPr lang="en-US" sz="1300" b="1" dirty="0">
+              <a:rPr lang="en-US" sz="1220" b="1" dirty="0">
                 <a:solidFill>
                   <a:srgbClr val="0068B7"/>
                 </a:solidFill>
@@ -15922,7 +15924,7 @@
               </a:rPr>
               <a:t>Implementation cue</a:t>
             </a:r>
-            <a:endParaRPr lang="en-US" sz="1300" dirty="0"/>
+            <a:endParaRPr lang="en-US" sz="1220" dirty="0"/>
           </a:p>
         </p:txBody>
       </p:sp>
@@ -15934,8 +15936,8 @@
         </p:nvSpPr>
         <p:spPr>
           <a:xfrm>
-            <a:off x="7799832" y="1801368"/>
-            <a:ext cx="3145536" cy="640080"/>
+            <a:off x="7708392" y="1764792"/>
+            <a:ext cx="3282696" cy="749808"/>
           </a:xfrm>
           <a:prstGeom prst="rect">
             <a:avLst/>
@@ -15953,7 +15955,7 @@
               <a:buNone/>
             </a:pPr>
             <a:r>
-              <a:rPr lang="en-US" sz="1320" dirty="0">
+              <a:rPr lang="en-US" sz="1220" dirty="0">
                 <a:solidFill>
                   <a:srgbClr val="17364A"/>
                 </a:solidFill>
@@ -15963,7 +15965,7 @@
               </a:rPr>
               <a:t>UAT should be designed around real users and real work.</a:t>
             </a:r>
-            <a:endParaRPr lang="en-US" sz="1320" dirty="0"/>
+            <a:endParaRPr lang="en-US" sz="1220" dirty="0"/>
           </a:p>
         </p:txBody>
       </p:sp>
@@ -15975,12 +15977,12 @@
         </p:nvSpPr>
         <p:spPr>
           <a:xfrm>
-            <a:off x="7635240" y="2670048"/>
-            <a:ext cx="3474720" cy="1377086"/>
+            <a:off x="7543800" y="2724912"/>
+            <a:ext cx="3611880" cy="1527048"/>
           </a:xfrm>
           <a:prstGeom prst="roundRect">
             <a:avLst>
-              <a:gd name="adj" fmla="val 7968"/>
+              <a:gd name="adj" fmla="val 7186"/>
             </a:avLst>
           </a:prstGeom>
           <a:solidFill>
@@ -16002,24 +16004,26 @@
         </p:nvSpPr>
         <p:spPr>
           <a:xfrm>
-            <a:off x="7799832" y="2798064"/>
-            <a:ext cx="3145536" cy="237744"/>
-          </a:xfrm>
-          <a:prstGeom prst="rect">
-            <a:avLst/>
-          </a:prstGeom>
-          <a:noFill/>
-          <a:ln/>
-        </p:spPr>
-        <p:txBody>
-          <a:bodyPr wrap="square" lIns="0" tIns="0" rIns="0" bIns="0" rtlCol="0" anchor="ctr"/>
-          <a:lstStyle/>
-          <a:p>
-            <a:pPr indent="0" marL="0">
-              <a:buNone/>
-            </a:pPr>
-            <a:r>
-              <a:rPr lang="en-US" sz="1250" b="1" dirty="0">
+            <a:off x="7708392" y="2852928"/>
+            <a:ext cx="3282696" cy="219456"/>
+          </a:xfrm>
+          <a:prstGeom prst="rect">
+            <a:avLst/>
+          </a:prstGeom>
+          <a:noFill/>
+          <a:ln/>
+        </p:spPr>
+        <p:txBody>
+          <a:bodyPr wrap="square" lIns="0" tIns="0" rIns="0" bIns="0" rtlCol="0" anchor="ctr">
+            <a:normAutofit/>
+          </a:bodyPr>
+          <a:lstStyle/>
+          <a:p>
+            <a:pPr indent="0" marL="0">
+              <a:buNone/>
+            </a:pPr>
+            <a:r>
+              <a:rPr lang="en-US" sz="1160" b="1" dirty="0">
                 <a:solidFill>
                   <a:srgbClr val="0068B7"/>
                 </a:solidFill>
@@ -16029,7 +16033,7 @@
               </a:rPr>
               <a:t>Implementation path</a:t>
             </a:r>
-            <a:endParaRPr lang="en-US" sz="1250" dirty="0"/>
+            <a:endParaRPr lang="en-US" sz="1160" dirty="0"/>
           </a:p>
         </p:txBody>
       </p:sp>
@@ -16041,7 +16045,7 @@
         </p:nvSpPr>
         <p:spPr>
           <a:xfrm>
-            <a:off x="8763000" y="3351276"/>
+            <a:off x="8717280" y="3406140"/>
             <a:ext cx="164592" cy="0"/>
           </a:xfrm>
           <a:prstGeom prst="line">
@@ -16064,8 +16068,8 @@
         </p:nvSpPr>
         <p:spPr>
           <a:xfrm>
-            <a:off x="7872984" y="3200400"/>
-            <a:ext cx="890016" cy="301752"/>
+            <a:off x="7781544" y="3255264"/>
+            <a:ext cx="935736" cy="301752"/>
           </a:xfrm>
           <a:prstGeom prst="roundRect">
             <a:avLst>
@@ -16091,8 +16095,8 @@
         </p:nvSpPr>
         <p:spPr>
           <a:xfrm>
-            <a:off x="7909560" y="3273552"/>
-            <a:ext cx="816864" cy="146304"/>
+            <a:off x="7818120" y="3328416"/>
+            <a:ext cx="862584" cy="146304"/>
           </a:xfrm>
           <a:prstGeom prst="rect">
             <a:avLst/>
@@ -16132,7 +16136,7 @@
         </p:nvSpPr>
         <p:spPr>
           <a:xfrm>
-            <a:off x="9817608" y="3351276"/>
+            <a:off x="9817608" y="3406140"/>
             <a:ext cx="164592" cy="0"/>
           </a:xfrm>
           <a:prstGeom prst="line">
@@ -16155,8 +16159,8 @@
         </p:nvSpPr>
         <p:spPr>
           <a:xfrm>
-            <a:off x="8927592" y="3200400"/>
-            <a:ext cx="890016" cy="301752"/>
+            <a:off x="8881872" y="3255264"/>
+            <a:ext cx="935736" cy="301752"/>
           </a:xfrm>
           <a:prstGeom prst="roundRect">
             <a:avLst>
@@ -16182,8 +16186,8 @@
         </p:nvSpPr>
         <p:spPr>
           <a:xfrm>
-            <a:off x="8964168" y="3273552"/>
-            <a:ext cx="816864" cy="146304"/>
+            <a:off x="8918448" y="3328416"/>
+            <a:ext cx="862584" cy="146304"/>
           </a:xfrm>
           <a:prstGeom prst="rect">
             <a:avLst/>
@@ -16223,8 +16227,8 @@
         </p:nvSpPr>
         <p:spPr>
           <a:xfrm>
-            <a:off x="9982200" y="3200400"/>
-            <a:ext cx="890016" cy="301752"/>
+            <a:off x="9982200" y="3255264"/>
+            <a:ext cx="935736" cy="301752"/>
           </a:xfrm>
           <a:prstGeom prst="roundRect">
             <a:avLst>
@@ -16250,8 +16254,8 @@
         </p:nvSpPr>
         <p:spPr>
           <a:xfrm>
-            <a:off x="10018776" y="3273552"/>
-            <a:ext cx="816864" cy="146304"/>
+            <a:off x="10018776" y="3328416"/>
+            <a:ext cx="862584" cy="146304"/>
           </a:xfrm>
           <a:prstGeom prst="rect">
             <a:avLst/>
@@ -16291,8 +16295,8 @@
         </p:nvSpPr>
         <p:spPr>
           <a:xfrm>
-            <a:off x="7854696" y="3694176"/>
-            <a:ext cx="3035808" cy="206654"/>
+            <a:off x="7763256" y="3749040"/>
+            <a:ext cx="3172968" cy="356616"/>
           </a:xfrm>
           <a:prstGeom prst="rect">
             <a:avLst/>
@@ -16310,7 +16314,7 @@
               <a:buNone/>
             </a:pPr>
             <a:r>
-              <a:rPr lang="en-US" sz="1120" dirty="0">
+              <a:rPr lang="en-US" sz="1040" dirty="0">
                 <a:solidFill>
                   <a:srgbClr val="17364A"/>
                 </a:solidFill>
@@ -16318,9 +16322,9 @@
                 <a:ea typeface="Aptos" pitchFamily="34" charset="-122"/>
                 <a:cs typeface="Aptos" pitchFamily="34" charset="-120"/>
               </a:rPr>
-              <a:t>Implementation work should make dependencies, approvals, training, and sustainment visible before launch.</a:t>
-            </a:r>
-            <a:endParaRPr lang="en-US" sz="1120" dirty="0"/>
+              <a:t>Implementation work should make dependencies, approvals, training, and.</a:t>
+            </a:r>
+            <a:endParaRPr lang="en-US" sz="1040" dirty="0"/>
           </a:p>
         </p:txBody>
       </p:sp>
@@ -16332,12 +16336,12 @@
         </p:nvSpPr>
         <p:spPr>
           <a:xfrm>
-            <a:off x="7635240" y="4184294"/>
-            <a:ext cx="3474720" cy="1466698"/>
+            <a:off x="7543800" y="4389120"/>
+            <a:ext cx="3611880" cy="1261872"/>
           </a:xfrm>
           <a:prstGeom prst="roundRect">
             <a:avLst>
-              <a:gd name="adj" fmla="val 7481"/>
+              <a:gd name="adj" fmla="val 8696"/>
             </a:avLst>
           </a:prstGeom>
           <a:solidFill>
@@ -16359,8 +16363,8 @@
         </p:nvSpPr>
         <p:spPr>
           <a:xfrm>
-            <a:off x="7799832" y="4330598"/>
-            <a:ext cx="3145536" cy="256032"/>
+            <a:off x="7708392" y="4517136"/>
+            <a:ext cx="3282696" cy="228600"/>
           </a:xfrm>
           <a:prstGeom prst="rect">
             <a:avLst/>
@@ -16376,7 +16380,7 @@
               <a:buNone/>
             </a:pPr>
             <a:r>
-              <a:rPr lang="en-US" sz="1300" b="1" dirty="0">
+              <a:rPr lang="en-US" sz="1220" b="1" dirty="0">
                 <a:solidFill>
                   <a:srgbClr val="0068B7"/>
                 </a:solidFill>
@@ -16386,7 +16390,7 @@
               </a:rPr>
               <a:t>Next action</a:t>
             </a:r>
-            <a:endParaRPr lang="en-US" sz="1300" dirty="0"/>
+            <a:endParaRPr lang="en-US" sz="1220" dirty="0"/>
           </a:p>
         </p:txBody>
       </p:sp>
@@ -16398,8 +16402,8 @@
         </p:nvSpPr>
         <p:spPr>
           <a:xfrm>
-            <a:off x="7799832" y="4659782"/>
-            <a:ext cx="3145536" cy="899770"/>
+            <a:off x="7708392" y="4828032"/>
+            <a:ext cx="3282696" cy="749808"/>
           </a:xfrm>
           <a:prstGeom prst="rect">
             <a:avLst/>
@@ -16417,7 +16421,7 @@
               <a:buNone/>
             </a:pPr>
             <a:r>
-              <a:rPr lang="en-US" sz="1320" dirty="0">
+              <a:rPr lang="en-US" sz="1220" dirty="0">
                 <a:solidFill>
                   <a:srgbClr val="17364A"/>
                 </a:solidFill>
@@ -16425,9 +16429,9 @@
                 <a:ea typeface="Aptos" pitchFamily="34" charset="-122"/>
                 <a:cs typeface="Aptos" pitchFamily="34" charset="-120"/>
               </a:rPr>
-              <a:t>Use the concept to clarify workflow changes, dependencies, staffing, procurement requirements, training needs, and implementation checkpoints.</a:t>
-            </a:r>
-            <a:endParaRPr lang="en-US" sz="1320" dirty="0"/>
+              <a:t>Use the concept to clarify workflow changes, dependencies, staffing, procurement.</a:t>
+            </a:r>
+            <a:endParaRPr lang="en-US" sz="1220" dirty="0"/>
           </a:p>
         </p:txBody>
       </p:sp>
@@ -16718,8 +16722,8 @@
         </p:nvSpPr>
         <p:spPr>
           <a:xfrm>
-            <a:off x="868680" y="1508760"/>
-            <a:ext cx="6309360" cy="4160520"/>
+            <a:off x="822960" y="1463040"/>
+            <a:ext cx="6565392" cy="4343400"/>
           </a:xfrm>
           <a:prstGeom prst="rect">
             <a:avLst/>
@@ -16737,7 +16741,7 @@
               <a:buNone/>
             </a:pPr>
             <a:r>
-              <a:rPr lang="en-US" sz="2100" dirty="0">
+              <a:rPr lang="en-US" sz="1920" dirty="0">
                 <a:solidFill>
                   <a:srgbClr val="003A63"/>
                 </a:solidFill>
@@ -16747,14 +16751,14 @@
               </a:rPr>
               <a:t>• UAT results should lead to a launch decision.</a:t>
             </a:r>
-            <a:endParaRPr lang="en-US" sz="2100" dirty="0"/>
-          </a:p>
-          <a:p>
-            <a:pPr indent="0" marL="0">
-              <a:buNone/>
-            </a:pPr>
-            <a:r>
-              <a:rPr lang="en-US" sz="2100" dirty="0">
+            <a:endParaRPr lang="en-US" sz="1920" dirty="0"/>
+          </a:p>
+          <a:p>
+            <a:pPr indent="0" marL="0">
+              <a:buNone/>
+            </a:pPr>
+            <a:r>
+              <a:rPr lang="en-US" sz="1920" dirty="0">
                 <a:solidFill>
                   <a:srgbClr val="003A63"/>
                 </a:solidFill>
@@ -16762,16 +16766,16 @@
                 <a:ea typeface="Aptos" pitchFamily="34" charset="-122"/>
                 <a:cs typeface="Aptos" pitchFamily="34" charset="-120"/>
               </a:rPr>
-              <a:t>• Issues should be categorized by severity, assigned to owners, and resolved or accepted with.</a:t>
-            </a:r>
-            <a:endParaRPr lang="en-US" sz="2100" dirty="0"/>
-          </a:p>
-          <a:p>
-            <a:pPr indent="0" marL="0">
-              <a:buNone/>
-            </a:pPr>
-            <a:r>
-              <a:rPr lang="en-US" sz="2100" dirty="0">
+              <a:t>• Issues should be categorized by severity, assigned to owners, and resolved.</a:t>
+            </a:r>
+            <a:endParaRPr lang="en-US" sz="1920" dirty="0"/>
+          </a:p>
+          <a:p>
+            <a:pPr indent="0" marL="0">
+              <a:buNone/>
+            </a:pPr>
+            <a:r>
+              <a:rPr lang="en-US" sz="1920" dirty="0">
                 <a:solidFill>
                   <a:srgbClr val="003A63"/>
                 </a:solidFill>
@@ -16781,7 +16785,7 @@
               </a:rPr>
               <a:t>• A launch should not proceed simply because testing occurred.</a:t>
             </a:r>
-            <a:endParaRPr lang="en-US" sz="2100" dirty="0"/>
+            <a:endParaRPr lang="en-US" sz="1920" dirty="0"/>
           </a:p>
         </p:txBody>
       </p:sp>
@@ -16793,12 +16797,12 @@
         </p:nvSpPr>
         <p:spPr>
           <a:xfrm>
-            <a:off x="7635240" y="1325880"/>
-            <a:ext cx="3474720" cy="1207008"/>
+            <a:off x="7543800" y="1325880"/>
+            <a:ext cx="3611880" cy="1261872"/>
           </a:xfrm>
           <a:prstGeom prst="roundRect">
             <a:avLst>
-              <a:gd name="adj" fmla="val 9091"/>
+              <a:gd name="adj" fmla="val 8696"/>
             </a:avLst>
           </a:prstGeom>
           <a:solidFill>
@@ -16820,8 +16824,8 @@
         </p:nvSpPr>
         <p:spPr>
           <a:xfrm>
-            <a:off x="7799832" y="1472184"/>
-            <a:ext cx="3145536" cy="256032"/>
+            <a:off x="7708392" y="1453896"/>
+            <a:ext cx="3282696" cy="228600"/>
           </a:xfrm>
           <a:prstGeom prst="rect">
             <a:avLst/>
@@ -16837,7 +16841,7 @@
               <a:buNone/>
             </a:pPr>
             <a:r>
-              <a:rPr lang="en-US" sz="1300" b="1" dirty="0">
+              <a:rPr lang="en-US" sz="1220" b="1" dirty="0">
                 <a:solidFill>
                   <a:srgbClr val="0068B7"/>
                 </a:solidFill>
@@ -16847,7 +16851,7 @@
               </a:rPr>
               <a:t>Implementation cue</a:t>
             </a:r>
-            <a:endParaRPr lang="en-US" sz="1300" dirty="0"/>
+            <a:endParaRPr lang="en-US" sz="1220" dirty="0"/>
           </a:p>
         </p:txBody>
       </p:sp>
@@ -16859,8 +16863,8 @@
         </p:nvSpPr>
         <p:spPr>
           <a:xfrm>
-            <a:off x="7799832" y="1801368"/>
-            <a:ext cx="3145536" cy="640080"/>
+            <a:off x="7708392" y="1764792"/>
+            <a:ext cx="3282696" cy="749808"/>
           </a:xfrm>
           <a:prstGeom prst="rect">
             <a:avLst/>
@@ -16878,7 +16882,7 @@
               <a:buNone/>
             </a:pPr>
             <a:r>
-              <a:rPr lang="en-US" sz="1320" dirty="0">
+              <a:rPr lang="en-US" sz="1220" dirty="0">
                 <a:solidFill>
                   <a:srgbClr val="17364A"/>
                 </a:solidFill>
@@ -16888,7 +16892,7 @@
               </a:rPr>
               <a:t>UAT results should lead to a launch decision.</a:t>
             </a:r>
-            <a:endParaRPr lang="en-US" sz="1320" dirty="0"/>
+            <a:endParaRPr lang="en-US" sz="1220" dirty="0"/>
           </a:p>
         </p:txBody>
       </p:sp>
@@ -16900,12 +16904,12 @@
         </p:nvSpPr>
         <p:spPr>
           <a:xfrm>
-            <a:off x="7635240" y="2670048"/>
-            <a:ext cx="3474720" cy="1377086"/>
+            <a:off x="7543800" y="2724912"/>
+            <a:ext cx="3611880" cy="1527048"/>
           </a:xfrm>
           <a:prstGeom prst="roundRect">
             <a:avLst>
-              <a:gd name="adj" fmla="val 7968"/>
+              <a:gd name="adj" fmla="val 7186"/>
             </a:avLst>
           </a:prstGeom>
           <a:solidFill>
@@ -16927,24 +16931,26 @@
         </p:nvSpPr>
         <p:spPr>
           <a:xfrm>
-            <a:off x="7799832" y="2798064"/>
-            <a:ext cx="3145536" cy="237744"/>
-          </a:xfrm>
-          <a:prstGeom prst="rect">
-            <a:avLst/>
-          </a:prstGeom>
-          <a:noFill/>
-          <a:ln/>
-        </p:spPr>
-        <p:txBody>
-          <a:bodyPr wrap="square" lIns="0" tIns="0" rIns="0" bIns="0" rtlCol="0" anchor="ctr"/>
-          <a:lstStyle/>
-          <a:p>
-            <a:pPr indent="0" marL="0">
-              <a:buNone/>
-            </a:pPr>
-            <a:r>
-              <a:rPr lang="en-US" sz="1250" b="1" dirty="0">
+            <a:off x="7708392" y="2852928"/>
+            <a:ext cx="3282696" cy="219456"/>
+          </a:xfrm>
+          <a:prstGeom prst="rect">
+            <a:avLst/>
+          </a:prstGeom>
+          <a:noFill/>
+          <a:ln/>
+        </p:spPr>
+        <p:txBody>
+          <a:bodyPr wrap="square" lIns="0" tIns="0" rIns="0" bIns="0" rtlCol="0" anchor="ctr">
+            <a:normAutofit/>
+          </a:bodyPr>
+          <a:lstStyle/>
+          <a:p>
+            <a:pPr indent="0" marL="0">
+              <a:buNone/>
+            </a:pPr>
+            <a:r>
+              <a:rPr lang="en-US" sz="1160" b="1" dirty="0">
                 <a:solidFill>
                   <a:srgbClr val="0068B7"/>
                 </a:solidFill>
@@ -16954,7 +16960,7 @@
               </a:rPr>
               <a:t>Implementation path</a:t>
             </a:r>
-            <a:endParaRPr lang="en-US" sz="1250" dirty="0"/>
+            <a:endParaRPr lang="en-US" sz="1160" dirty="0"/>
           </a:p>
         </p:txBody>
       </p:sp>
@@ -16966,7 +16972,7 @@
         </p:nvSpPr>
         <p:spPr>
           <a:xfrm>
-            <a:off x="8763000" y="3351276"/>
+            <a:off x="8717280" y="3406140"/>
             <a:ext cx="164592" cy="0"/>
           </a:xfrm>
           <a:prstGeom prst="line">
@@ -16989,8 +16995,8 @@
         </p:nvSpPr>
         <p:spPr>
           <a:xfrm>
-            <a:off x="7872984" y="3200400"/>
-            <a:ext cx="890016" cy="301752"/>
+            <a:off x="7781544" y="3255264"/>
+            <a:ext cx="935736" cy="301752"/>
           </a:xfrm>
           <a:prstGeom prst="roundRect">
             <a:avLst>
@@ -17016,8 +17022,8 @@
         </p:nvSpPr>
         <p:spPr>
           <a:xfrm>
-            <a:off x="7909560" y="3273552"/>
-            <a:ext cx="816864" cy="146304"/>
+            <a:off x="7818120" y="3328416"/>
+            <a:ext cx="862584" cy="146304"/>
           </a:xfrm>
           <a:prstGeom prst="rect">
             <a:avLst/>
@@ -17057,7 +17063,7 @@
         </p:nvSpPr>
         <p:spPr>
           <a:xfrm>
-            <a:off x="9817608" y="3351276"/>
+            <a:off x="9817608" y="3406140"/>
             <a:ext cx="164592" cy="0"/>
           </a:xfrm>
           <a:prstGeom prst="line">
@@ -17080,8 +17086,8 @@
         </p:nvSpPr>
         <p:spPr>
           <a:xfrm>
-            <a:off x="8927592" y="3200400"/>
-            <a:ext cx="890016" cy="301752"/>
+            <a:off x="8881872" y="3255264"/>
+            <a:ext cx="935736" cy="301752"/>
           </a:xfrm>
           <a:prstGeom prst="roundRect">
             <a:avLst>
@@ -17107,8 +17113,8 @@
         </p:nvSpPr>
         <p:spPr>
           <a:xfrm>
-            <a:off x="8964168" y="3273552"/>
-            <a:ext cx="816864" cy="146304"/>
+            <a:off x="8918448" y="3328416"/>
+            <a:ext cx="862584" cy="146304"/>
           </a:xfrm>
           <a:prstGeom prst="rect">
             <a:avLst/>
@@ -17148,8 +17154,8 @@
         </p:nvSpPr>
         <p:spPr>
           <a:xfrm>
-            <a:off x="9982200" y="3200400"/>
-            <a:ext cx="890016" cy="301752"/>
+            <a:off x="9982200" y="3255264"/>
+            <a:ext cx="935736" cy="301752"/>
           </a:xfrm>
           <a:prstGeom prst="roundRect">
             <a:avLst>
@@ -17175,8 +17181,8 @@
         </p:nvSpPr>
         <p:spPr>
           <a:xfrm>
-            <a:off x="10018776" y="3273552"/>
-            <a:ext cx="816864" cy="146304"/>
+            <a:off x="10018776" y="3328416"/>
+            <a:ext cx="862584" cy="146304"/>
           </a:xfrm>
           <a:prstGeom prst="rect">
             <a:avLst/>
@@ -17216,8 +17222,8 @@
         </p:nvSpPr>
         <p:spPr>
           <a:xfrm>
-            <a:off x="7854696" y="3694176"/>
-            <a:ext cx="3035808" cy="206654"/>
+            <a:off x="7763256" y="3749040"/>
+            <a:ext cx="3172968" cy="356616"/>
           </a:xfrm>
           <a:prstGeom prst="rect">
             <a:avLst/>
@@ -17235,7 +17241,7 @@
               <a:buNone/>
             </a:pPr>
             <a:r>
-              <a:rPr lang="en-US" sz="1120" dirty="0">
+              <a:rPr lang="en-US" sz="1040" dirty="0">
                 <a:solidFill>
                   <a:srgbClr val="17364A"/>
                 </a:solidFill>
@@ -17243,9 +17249,9 @@
                 <a:ea typeface="Aptos" pitchFamily="34" charset="-122"/>
                 <a:cs typeface="Aptos" pitchFamily="34" charset="-120"/>
               </a:rPr>
-              <a:t>Implementation work should make dependencies, approvals, training, and sustainment visible before launch.</a:t>
-            </a:r>
-            <a:endParaRPr lang="en-US" sz="1120" dirty="0"/>
+              <a:t>Implementation work should make dependencies, approvals, training, and.</a:t>
+            </a:r>
+            <a:endParaRPr lang="en-US" sz="1040" dirty="0"/>
           </a:p>
         </p:txBody>
       </p:sp>
@@ -17257,12 +17263,12 @@
         </p:nvSpPr>
         <p:spPr>
           <a:xfrm>
-            <a:off x="7635240" y="4184294"/>
-            <a:ext cx="3474720" cy="1466698"/>
+            <a:off x="7543800" y="4389120"/>
+            <a:ext cx="3611880" cy="1261872"/>
           </a:xfrm>
           <a:prstGeom prst="roundRect">
             <a:avLst>
-              <a:gd name="adj" fmla="val 7481"/>
+              <a:gd name="adj" fmla="val 8696"/>
             </a:avLst>
           </a:prstGeom>
           <a:solidFill>
@@ -17284,8 +17290,8 @@
         </p:nvSpPr>
         <p:spPr>
           <a:xfrm>
-            <a:off x="7799832" y="4330598"/>
-            <a:ext cx="3145536" cy="256032"/>
+            <a:off x="7708392" y="4517136"/>
+            <a:ext cx="3282696" cy="228600"/>
           </a:xfrm>
           <a:prstGeom prst="rect">
             <a:avLst/>
@@ -17301,7 +17307,7 @@
               <a:buNone/>
             </a:pPr>
             <a:r>
-              <a:rPr lang="en-US" sz="1300" b="1" dirty="0">
+              <a:rPr lang="en-US" sz="1220" b="1" dirty="0">
                 <a:solidFill>
                   <a:srgbClr val="0068B7"/>
                 </a:solidFill>
@@ -17311,7 +17317,7 @@
               </a:rPr>
               <a:t>Next action</a:t>
             </a:r>
-            <a:endParaRPr lang="en-US" sz="1300" dirty="0"/>
+            <a:endParaRPr lang="en-US" sz="1220" dirty="0"/>
           </a:p>
         </p:txBody>
       </p:sp>
@@ -17323,8 +17329,8 @@
         </p:nvSpPr>
         <p:spPr>
           <a:xfrm>
-            <a:off x="7799832" y="4659782"/>
-            <a:ext cx="3145536" cy="899770"/>
+            <a:off x="7708392" y="4828032"/>
+            <a:ext cx="3282696" cy="749808"/>
           </a:xfrm>
           <a:prstGeom prst="rect">
             <a:avLst/>
@@ -17342,7 +17348,7 @@
               <a:buNone/>
             </a:pPr>
             <a:r>
-              <a:rPr lang="en-US" sz="1320" dirty="0">
+              <a:rPr lang="en-US" sz="1220" dirty="0">
                 <a:solidFill>
                   <a:srgbClr val="17364A"/>
                 </a:solidFill>
@@ -17350,9 +17356,9 @@
                 <a:ea typeface="Aptos" pitchFamily="34" charset="-122"/>
                 <a:cs typeface="Aptos" pitchFamily="34" charset="-120"/>
               </a:rPr>
-              <a:t>Use the concept to clarify workflow changes, dependencies, staffing, procurement requirements, training needs, and implementation checkpoints.</a:t>
-            </a:r>
-            <a:endParaRPr lang="en-US" sz="1320" dirty="0"/>
+              <a:t>Use the concept to clarify workflow changes, dependencies, staffing, procurement.</a:t>
+            </a:r>
+            <a:endParaRPr lang="en-US" sz="1220" dirty="0"/>
           </a:p>
         </p:txBody>
       </p:sp>

--- a/downloads/presentations/modules/ops-240.pptx
+++ b/downloads/presentations/modules/ops-240.pptx
@@ -10855,7 +10855,7 @@
                 <a:ea typeface="Aptos" pitchFamily="34" charset="-122"/>
                 <a:cs typeface="Aptos" pitchFamily="34" charset="-120"/>
               </a:rPr>
-              <a:t>• 1. What is the purpose of UAT for AI-supported workflows?</a:t>
+              <a:t>1. What is the purpose of UAT for AI-supported workflows?</a:t>
             </a:r>
             <a:endParaRPr lang="en-US" sz="1920" dirty="0"/>
           </a:p>
@@ -10872,7 +10872,7 @@
                 <a:ea typeface="Aptos" pitchFamily="34" charset="-122"/>
                 <a:cs typeface="Aptos" pitchFamily="34" charset="-120"/>
               </a:rPr>
-              <a:t>• 2. Who should participate in UAT?</a:t>
+              <a:t>2. Who should participate in UAT?</a:t>
             </a:r>
             <a:endParaRPr lang="en-US" sz="1920" dirty="0"/>
           </a:p>
@@ -10889,7 +10889,7 @@
                 <a:ea typeface="Aptos" pitchFamily="34" charset="-122"/>
                 <a:cs typeface="Aptos" pitchFamily="34" charset="-120"/>
               </a:rPr>
-              <a:t>• 3. Which scenario should be included in AI UAT?</a:t>
+              <a:t>3. Which scenario should be included in AI UAT?</a:t>
             </a:r>
             <a:endParaRPr lang="en-US" sz="1920" dirty="0"/>
           </a:p>
@@ -10996,7 +10996,7 @@
                 <a:ea typeface="Aptos" pitchFamily="34" charset="-122"/>
                 <a:cs typeface="Aptos" pitchFamily="34" charset="-120"/>
               </a:rPr>
-              <a:t>1. What is the purpose of UAT for AI-supported workflows?</a:t>
+              <a:t>What is the purpose of UAT for AI-supported workflows?</a:t>
             </a:r>
             <a:endParaRPr lang="en-US" sz="1220" dirty="0"/>
           </a:p>
@@ -11103,41 +11103,7 @@
                 <a:ea typeface="Aptos" pitchFamily="34" charset="-122"/>
                 <a:cs typeface="Aptos" pitchFamily="34" charset="-120"/>
               </a:rPr>
-              <a:t>1.</a:t>
-            </a:r>
-            <a:endParaRPr lang="en-US" sz="1140" dirty="0"/>
-          </a:p>
-          <a:p>
-            <a:pPr indent="0" marL="0">
-              <a:buNone/>
-            </a:pPr>
-            <a:r>
-              <a:rPr lang="en-US" sz="1140" dirty="0">
-                <a:solidFill>
-                  <a:srgbClr val="17364A"/>
-                </a:solidFill>
-                <a:latin typeface="Aptos" pitchFamily="34" charset="0"/>
-                <a:ea typeface="Aptos" pitchFamily="34" charset="-122"/>
-                <a:cs typeface="Aptos" pitchFamily="34" charset="-120"/>
-              </a:rPr>
               <a:t>What is the purpose of UAT for AI-supported.</a:t>
-            </a:r>
-            <a:endParaRPr lang="en-US" sz="1140" dirty="0"/>
-          </a:p>
-          <a:p>
-            <a:pPr indent="0" marL="0">
-              <a:buNone/>
-            </a:pPr>
-            <a:r>
-              <a:rPr lang="en-US" sz="1140" dirty="0">
-                <a:solidFill>
-                  <a:srgbClr val="17364A"/>
-                </a:solidFill>
-                <a:latin typeface="Aptos" pitchFamily="34" charset="0"/>
-                <a:ea typeface="Aptos" pitchFamily="34" charset="-122"/>
-                <a:cs typeface="Aptos" pitchFamily="34" charset="-120"/>
-              </a:rPr>
-              <a:t>2.</a:t>
             </a:r>
             <a:endParaRPr lang="en-US" sz="1140" dirty="0"/>
           </a:p>
